--- a/docs/IPA_hardcoded_IV_ricompilazione.pptx
+++ b/docs/IPA_hardcoded_IV_ricompilazione.pptx
@@ -13,6 +13,9 @@
     <p:sldId id="261" r:id="rId12"/>
     <p:sldId id="262" r:id="rId13"/>
     <p:sldId id="263" r:id="rId14"/>
+    <p:sldId id="264" r:id="rId15"/>
+    <p:sldId id="265" r:id="rId16"/>
+    <p:sldId id="266" r:id="rId17"/>
   </p:sldIdLst>
   <p:sldSz cx="12191969" cy="6858000" type="screen4x3"/>
   <p:notesSz cx="6858000" cy="9144000"/>
@@ -3494,7 +3497,1395 @@
                 </a:solidFill>
                 <a:latin typeface="Consolas"/>
               </a:rPr>
-              <a:t>     ·     IV descriptor  ·  .rodata AOT  ·  BPF_PROG_TEST_RUN</a:t>
+              <a:t>     ·     IV descriptor  ·  vector-map 1 lookup  ·  AOT-literal  ·  BPF_PROG_TEST_RUN</a:t>
+            </a:r>
+          </a:p>
+        </p:txBody>
+      </p:sp>
+    </p:spTree>
+  </p:cSld>
+  <p:clrMapOvr>
+    <a:masterClrMapping/>
+  </p:clrMapOvr>
+</p:sld>
+</file>
+
+<file path=ppt/slides/slide10.xml><?xml version="1.0" encoding="utf-8"?>
+<p:sld xmlns:a="http://schemas.openxmlformats.org/drawingml/2006/main" xmlns:p="http://schemas.openxmlformats.org/presentationml/2006/main" xmlns:r="http://schemas.openxmlformats.org/officeDocument/2006/relationships">
+  <p:cSld>
+    <p:spTree>
+      <p:nvGrpSpPr>
+        <p:cNvPr id="1" name=""/>
+        <p:cNvGrpSpPr/>
+        <p:nvPr/>
+      </p:nvGrpSpPr>
+      <p:grpSpPr/>
+      <p:sp>
+        <p:nvSpPr>
+          <p:cNvPr id="2" name="Rectangle 1"/>
+          <p:cNvSpPr/>
+          <p:nvPr/>
+        </p:nvSpPr>
+        <p:spPr>
+          <a:xfrm>
+            <a:off x="0" y="0"/>
+            <a:ext cx="12191969" cy="6858000"/>
+          </a:xfrm>
+          <a:prstGeom prst="rect">
+            <a:avLst/>
+          </a:prstGeom>
+          <a:solidFill>
+            <a:srgbClr val="0D1117"/>
+          </a:solidFill>
+          <a:ln>
+            <a:noFill/>
+          </a:ln>
+          <a:effectLst/>
+        </p:spPr>
+        <p:style>
+          <a:lnRef idx="1">
+            <a:schemeClr val="accent1"/>
+          </a:lnRef>
+          <a:fillRef idx="3">
+            <a:schemeClr val="accent1"/>
+          </a:fillRef>
+          <a:effectRef idx="2">
+            <a:schemeClr val="accent1"/>
+          </a:effectRef>
+          <a:fontRef idx="minor">
+            <a:schemeClr val="lt1"/>
+          </a:fontRef>
+        </p:style>
+        <p:txBody>
+          <a:bodyPr rtlCol="0" anchor="ctr"/>
+          <a:lstStyle/>
+          <a:p>
+            <a:pPr algn="ctr"/>
+          </a:p>
+        </p:txBody>
+      </p:sp>
+      <p:sp>
+        <p:nvSpPr>
+          <p:cNvPr id="3" name="TextBox 2"/>
+          <p:cNvSpPr txBox="1"/>
+          <p:nvPr/>
+        </p:nvSpPr>
+        <p:spPr>
+          <a:xfrm>
+            <a:off x="566928" y="384048"/>
+            <a:ext cx="1097280" cy="914400"/>
+          </a:xfrm>
+          <a:prstGeom prst="rect">
+            <a:avLst/>
+          </a:prstGeom>
+          <a:noFill/>
+        </p:spPr>
+        <p:txBody>
+          <a:bodyPr wrap="square" anchor="t" lIns="0" rIns="0" tIns="0" bIns="0">
+            <a:spAutoFit/>
+          </a:bodyPr>
+          <a:lstStyle/>
+          <a:p>
+            <a:pPr algn="l"/>
+            <a:r>
+              <a:rPr sz="4000" b="1">
+                <a:solidFill>
+                  <a:srgbClr val="F5A623"/>
+                </a:solidFill>
+                <a:latin typeface="Georgia"/>
+              </a:rPr>
+              <a:t>09</a:t>
+            </a:r>
+          </a:p>
+        </p:txBody>
+      </p:sp>
+      <p:sp>
+        <p:nvSpPr>
+          <p:cNvPr id="4" name="TextBox 3"/>
+          <p:cNvSpPr txBox="1"/>
+          <p:nvPr/>
+        </p:nvSpPr>
+        <p:spPr>
+          <a:xfrm>
+            <a:off x="1600200" y="365760"/>
+            <a:ext cx="10058400" cy="731520"/>
+          </a:xfrm>
+          <a:prstGeom prst="rect">
+            <a:avLst/>
+          </a:prstGeom>
+          <a:noFill/>
+        </p:spPr>
+        <p:txBody>
+          <a:bodyPr wrap="square" anchor="t" lIns="0" rIns="0" tIns="0" bIns="0">
+            <a:spAutoFit/>
+          </a:bodyPr>
+          <a:lstStyle/>
+          <a:p>
+            <a:pPr algn="l"/>
+            <a:r>
+              <a:rPr sz="3000" b="1">
+                <a:solidFill>
+                  <a:srgbClr val="E6EDF3"/>
+                </a:solidFill>
+                <a:latin typeface="Georgia"/>
+              </a:rPr>
+              <a:t>Future work</a:t>
+            </a:r>
+          </a:p>
+        </p:txBody>
+      </p:sp>
+      <p:sp>
+        <p:nvSpPr>
+          <p:cNvPr id="5" name="TextBox 4"/>
+          <p:cNvSpPr txBox="1"/>
+          <p:nvPr/>
+        </p:nvSpPr>
+        <p:spPr>
+          <a:xfrm>
+            <a:off x="1627632" y="1024128"/>
+            <a:ext cx="10241280" cy="457200"/>
+          </a:xfrm>
+          <a:prstGeom prst="rect">
+            <a:avLst/>
+          </a:prstGeom>
+          <a:noFill/>
+        </p:spPr>
+        <p:txBody>
+          <a:bodyPr wrap="square" anchor="t" lIns="0" rIns="0" tIns="0" bIns="0">
+            <a:spAutoFit/>
+          </a:bodyPr>
+          <a:lstStyle/>
+          <a:p>
+            <a:pPr algn="l"/>
+            <a:r>
+              <a:rPr sz="1350" b="0">
+                <a:solidFill>
+                  <a:srgbClr val="8B949E"/>
+                </a:solidFill>
+                <a:latin typeface="Segoe UI"/>
+              </a:rPr>
+              <a:t>AOT-literal per QUALSIASI descrittore, se accettato</a:t>
+            </a:r>
+          </a:p>
+        </p:txBody>
+      </p:sp>
+      <p:sp>
+        <p:nvSpPr>
+          <p:cNvPr id="6" name="Rounded Rectangle 5"/>
+          <p:cNvSpPr/>
+          <p:nvPr/>
+        </p:nvSpPr>
+        <p:spPr>
+          <a:xfrm>
+            <a:off x="640080" y="1874519"/>
+            <a:ext cx="5349240" cy="1874519"/>
+          </a:xfrm>
+          <a:prstGeom prst="roundRect">
+            <a:avLst/>
+          </a:prstGeom>
+          <a:solidFill>
+            <a:srgbClr val="1B222E"/>
+          </a:solidFill>
+          <a:ln>
+            <a:noFill/>
+          </a:ln>
+          <a:effectLst/>
+        </p:spPr>
+        <p:style>
+          <a:lnRef idx="1">
+            <a:schemeClr val="accent1"/>
+          </a:lnRef>
+          <a:fillRef idx="3">
+            <a:schemeClr val="accent1"/>
+          </a:fillRef>
+          <a:effectRef idx="2">
+            <a:schemeClr val="accent1"/>
+          </a:effectRef>
+          <a:fontRef idx="minor">
+            <a:schemeClr val="lt1"/>
+          </a:fontRef>
+        </p:style>
+        <p:txBody>
+          <a:bodyPr rtlCol="0" anchor="ctr"/>
+          <a:lstStyle/>
+          <a:p>
+            <a:pPr algn="ctr"/>
+          </a:p>
+        </p:txBody>
+      </p:sp>
+      <p:sp>
+        <p:nvSpPr>
+          <p:cNvPr id="7" name="Rounded Rectangle 6"/>
+          <p:cNvSpPr/>
+          <p:nvPr/>
+        </p:nvSpPr>
+        <p:spPr>
+          <a:xfrm>
+            <a:off x="731519" y="1920239"/>
+            <a:ext cx="5166359" cy="64008"/>
+          </a:xfrm>
+          <a:prstGeom prst="roundRect">
+            <a:avLst/>
+          </a:prstGeom>
+          <a:solidFill>
+            <a:srgbClr val="F5A623"/>
+          </a:solidFill>
+          <a:ln>
+            <a:noFill/>
+          </a:ln>
+          <a:effectLst/>
+        </p:spPr>
+        <p:style>
+          <a:lnRef idx="1">
+            <a:schemeClr val="accent1"/>
+          </a:lnRef>
+          <a:fillRef idx="3">
+            <a:schemeClr val="accent1"/>
+          </a:fillRef>
+          <a:effectRef idx="2">
+            <a:schemeClr val="accent1"/>
+          </a:effectRef>
+          <a:fontRef idx="minor">
+            <a:schemeClr val="lt1"/>
+          </a:fontRef>
+        </p:style>
+        <p:txBody>
+          <a:bodyPr rtlCol="0" anchor="ctr"/>
+          <a:lstStyle/>
+          <a:p>
+            <a:pPr algn="ctr"/>
+          </a:p>
+        </p:txBody>
+      </p:sp>
+      <p:sp>
+        <p:nvSpPr>
+          <p:cNvPr id="8" name="TextBox 7"/>
+          <p:cNvSpPr txBox="1"/>
+          <p:nvPr/>
+        </p:nvSpPr>
+        <p:spPr>
+          <a:xfrm>
+            <a:off x="713231" y="1929384"/>
+            <a:ext cx="5202936" cy="1764791"/>
+          </a:xfrm>
+          <a:prstGeom prst="rect">
+            <a:avLst/>
+          </a:prstGeom>
+          <a:noFill/>
+        </p:spPr>
+        <p:txBody>
+          <a:bodyPr wrap="square" anchor="ctr" lIns="0" rIns="0" tIns="0" bIns="0">
+            <a:spAutoFit/>
+          </a:bodyPr>
+          <a:lstStyle/>
+          <a:p>
+            <a:pPr algn="l"/>
+            <a:r>
+              <a:rPr sz="1350" b="1">
+                <a:solidFill>
+                  <a:srgbClr val="F5A623"/>
+                </a:solidFill>
+                <a:latin typeface="Segoe UI"/>
+              </a:rPr>
+              <a:t>Oggi: solo descrittore default</a:t>
+            </a:r>
+          </a:p>
+          <a:p>
+            <a:pPr algn="l"/>
+            <a:r>
+              <a:rPr sz="1200" b="0">
+                <a:solidFill>
+                  <a:srgbClr val="E6EDF3"/>
+                </a:solidFill>
+                <a:latin typeface="Segoe UI"/>
+              </a:rPr>
+              <a:t>L'AOT-literal genera C in dialetto libbpf, ma cablato al 65-4-4-7. Il path BCC invece copre già QUALSIASI feature-set sparse.</a:t>
+            </a:r>
+          </a:p>
+        </p:txBody>
+      </p:sp>
+      <p:sp>
+        <p:nvSpPr>
+          <p:cNvPr id="9" name="Rounded Rectangle 8"/>
+          <p:cNvSpPr/>
+          <p:nvPr/>
+        </p:nvSpPr>
+        <p:spPr>
+          <a:xfrm>
+            <a:off x="6199632" y="1874519"/>
+            <a:ext cx="5349240" cy="1874519"/>
+          </a:xfrm>
+          <a:prstGeom prst="roundRect">
+            <a:avLst/>
+          </a:prstGeom>
+          <a:solidFill>
+            <a:srgbClr val="1B222E"/>
+          </a:solidFill>
+          <a:ln>
+            <a:noFill/>
+          </a:ln>
+          <a:effectLst/>
+        </p:spPr>
+        <p:style>
+          <a:lnRef idx="1">
+            <a:schemeClr val="accent1"/>
+          </a:lnRef>
+          <a:fillRef idx="3">
+            <a:schemeClr val="accent1"/>
+          </a:fillRef>
+          <a:effectRef idx="2">
+            <a:schemeClr val="accent1"/>
+          </a:effectRef>
+          <a:fontRef idx="minor">
+            <a:schemeClr val="lt1"/>
+          </a:fontRef>
+        </p:style>
+        <p:txBody>
+          <a:bodyPr rtlCol="0" anchor="ctr"/>
+          <a:lstStyle/>
+          <a:p>
+            <a:pPr algn="ctr"/>
+          </a:p>
+        </p:txBody>
+      </p:sp>
+      <p:sp>
+        <p:nvSpPr>
+          <p:cNvPr id="10" name="Rounded Rectangle 9"/>
+          <p:cNvSpPr/>
+          <p:nvPr/>
+        </p:nvSpPr>
+        <p:spPr>
+          <a:xfrm>
+            <a:off x="6291072" y="1920239"/>
+            <a:ext cx="5166359" cy="64008"/>
+          </a:xfrm>
+          <a:prstGeom prst="roundRect">
+            <a:avLst/>
+          </a:prstGeom>
+          <a:solidFill>
+            <a:srgbClr val="3FB950"/>
+          </a:solidFill>
+          <a:ln>
+            <a:noFill/>
+          </a:ln>
+          <a:effectLst/>
+        </p:spPr>
+        <p:style>
+          <a:lnRef idx="1">
+            <a:schemeClr val="accent1"/>
+          </a:lnRef>
+          <a:fillRef idx="3">
+            <a:schemeClr val="accent1"/>
+          </a:fillRef>
+          <a:effectRef idx="2">
+            <a:schemeClr val="accent1"/>
+          </a:effectRef>
+          <a:fontRef idx="minor">
+            <a:schemeClr val="lt1"/>
+          </a:fontRef>
+        </p:style>
+        <p:txBody>
+          <a:bodyPr rtlCol="0" anchor="ctr"/>
+          <a:lstStyle/>
+          <a:p>
+            <a:pPr algn="ctr"/>
+          </a:p>
+        </p:txBody>
+      </p:sp>
+      <p:sp>
+        <p:nvSpPr>
+          <p:cNvPr id="11" name="TextBox 10"/>
+          <p:cNvSpPr txBox="1"/>
+          <p:nvPr/>
+        </p:nvSpPr>
+        <p:spPr>
+          <a:xfrm>
+            <a:off x="6272784" y="1929384"/>
+            <a:ext cx="5202936" cy="1764791"/>
+          </a:xfrm>
+          <a:prstGeom prst="rect">
+            <a:avLst/>
+          </a:prstGeom>
+          <a:noFill/>
+        </p:spPr>
+        <p:txBody>
+          <a:bodyPr wrap="square" anchor="ctr" lIns="0" rIns="0" tIns="0" bIns="0">
+            <a:spAutoFit/>
+          </a:bodyPr>
+          <a:lstStyle/>
+          <a:p>
+            <a:pPr algn="l"/>
+            <a:r>
+              <a:rPr sz="1350" b="1">
+                <a:solidFill>
+                  <a:srgbClr val="3FB950"/>
+                </a:solidFill>
+                <a:latin typeface="Segoe UI"/>
+              </a:rPr>
+              <a:t>Se accettato</a:t>
+            </a:r>
+          </a:p>
+          <a:p>
+            <a:pPr algn="l"/>
+            <a:r>
+              <a:rPr sz="1200" b="0">
+                <a:solidFill>
+                  <a:srgbClr val="E6EDF3"/>
+                </a:solidFill>
+                <a:latin typeface="Segoe UI"/>
+              </a:rPr>
+              <a:t>Portare le 3 _gen_feature_* (scalar · dense_vector · onehot) in dialetto libbpf → l'AOT copre ogni modello sparse. ≈ mezza giornata + test.</a:t>
+            </a:r>
+          </a:p>
+        </p:txBody>
+      </p:sp>
+      <p:sp>
+        <p:nvSpPr>
+          <p:cNvPr id="12" name="Rounded Rectangle 11"/>
+          <p:cNvSpPr/>
+          <p:nvPr/>
+        </p:nvSpPr>
+        <p:spPr>
+          <a:xfrm>
+            <a:off x="640080" y="3977639"/>
+            <a:ext cx="10972800" cy="1051560"/>
+          </a:xfrm>
+          <a:prstGeom prst="roundRect">
+            <a:avLst/>
+          </a:prstGeom>
+          <a:solidFill>
+            <a:srgbClr val="0A0E14"/>
+          </a:solidFill>
+          <a:ln>
+            <a:noFill/>
+          </a:ln>
+          <a:effectLst/>
+        </p:spPr>
+        <p:style>
+          <a:lnRef idx="1">
+            <a:schemeClr val="accent1"/>
+          </a:lnRef>
+          <a:fillRef idx="3">
+            <a:schemeClr val="accent1"/>
+          </a:fillRef>
+          <a:effectRef idx="2">
+            <a:schemeClr val="accent1"/>
+          </a:effectRef>
+          <a:fontRef idx="minor">
+            <a:schemeClr val="lt1"/>
+          </a:fontRef>
+        </p:style>
+        <p:txBody>
+          <a:bodyPr rtlCol="0" anchor="ctr"/>
+          <a:lstStyle/>
+          <a:p>
+            <a:pPr algn="ctr"/>
+          </a:p>
+        </p:txBody>
+      </p:sp>
+      <p:sp>
+        <p:nvSpPr>
+          <p:cNvPr id="13" name="TextBox 12"/>
+          <p:cNvSpPr txBox="1"/>
+          <p:nvPr/>
+        </p:nvSpPr>
+        <p:spPr>
+          <a:xfrm>
+            <a:off x="868680" y="4096512"/>
+            <a:ext cx="10607040" cy="822960"/>
+          </a:xfrm>
+          <a:prstGeom prst="rect">
+            <a:avLst/>
+          </a:prstGeom>
+          <a:noFill/>
+        </p:spPr>
+        <p:txBody>
+          <a:bodyPr wrap="square" anchor="t" lIns="0" rIns="0" tIns="0" bIns="0">
+            <a:spAutoFit/>
+          </a:bodyPr>
+          <a:lstStyle/>
+          <a:p>
+            <a:pPr algn="l">
+              <a:spcAft>
+                <a:spcPts val="300"/>
+              </a:spcAft>
+            </a:pPr>
+            <a:r>
+              <a:rPr sz="1150" b="1">
+                <a:solidFill>
+                  <a:srgbClr val="8B949E"/>
+                </a:solidFill>
+                <a:latin typeface="Segoe UI"/>
+              </a:rPr>
+              <a:t>differenza di dialetto — stessa logica, sintassi diversa:</a:t>
+            </a:r>
+          </a:p>
+          <a:p>
+            <a:pPr algn="l">
+              <a:spcAft>
+                <a:spcPts val="300"/>
+              </a:spcAft>
+            </a:pPr>
+            <a:r>
+              <a:rPr sz="1150" b="0">
+                <a:solidFill>
+                  <a:srgbClr val="58A6FF"/>
+                </a:solidFill>
+                <a:latin typeface="Consolas"/>
+              </a:rPr>
+              <a:t>BCC     :  BPF_ARRAY(m, t, n)     m.lookup(&amp;k)        (funzioni nude)</a:t>
+            </a:r>
+          </a:p>
+          <a:p>
+            <a:pPr algn="l">
+              <a:spcAft>
+                <a:spcPts val="300"/>
+              </a:spcAft>
+            </a:pPr>
+            <a:r>
+              <a:rPr sz="1150" b="0">
+                <a:solidFill>
+                  <a:srgbClr val="3FB950"/>
+                </a:solidFill>
+                <a:latin typeface="Consolas"/>
+              </a:rPr>
+              <a:t>libbpf  :  struct{...} SEC(.maps) bpf_map_lookup_elem(&amp;m,&amp;k)  SEC("xdp")</a:t>
+            </a:r>
+          </a:p>
+        </p:txBody>
+      </p:sp>
+      <p:sp>
+        <p:nvSpPr>
+          <p:cNvPr id="14" name="TextBox 13"/>
+          <p:cNvSpPr txBox="1"/>
+          <p:nvPr/>
+        </p:nvSpPr>
+        <p:spPr>
+          <a:xfrm>
+            <a:off x="640080" y="5303520"/>
+            <a:ext cx="10972800" cy="914400"/>
+          </a:xfrm>
+          <a:prstGeom prst="rect">
+            <a:avLst/>
+          </a:prstGeom>
+          <a:noFill/>
+        </p:spPr>
+        <p:txBody>
+          <a:bodyPr wrap="square" anchor="t" lIns="0" rIns="0" tIns="0" bIns="0">
+            <a:spAutoFit/>
+          </a:bodyPr>
+          <a:lstStyle/>
+          <a:p>
+            <a:pPr algn="l">
+              <a:spcAft>
+                <a:spcPts val="600"/>
+              </a:spcAft>
+            </a:pPr>
+            <a:r>
+              <a:rPr sz="1300" b="1">
+                <a:solidFill>
+                  <a:srgbClr val="F5A623"/>
+                </a:solidFill>
+                <a:latin typeface="Segoe UI"/>
+              </a:rPr>
+              <a:t>Alternativa senza clang e senza perdita:</a:t>
+            </a:r>
+            <a:r>
+              <a:rPr sz="1300" b="0">
+                <a:solidFill>
+                  <a:srgbClr val="E6EDF3"/>
+                </a:solidFill>
+                <a:latin typeface="Segoe UI"/>
+              </a:rPr>
+              <a:t>  patch immediati direttamente nel bytecode del .o (perf identica ai literal, zero clang) — più lavoro di ingegneria del loader.</a:t>
+            </a:r>
+          </a:p>
+        </p:txBody>
+      </p:sp>
+    </p:spTree>
+  </p:cSld>
+  <p:clrMapOvr>
+    <a:masterClrMapping/>
+  </p:clrMapOvr>
+</p:sld>
+</file>
+
+<file path=ppt/slides/slide11.xml><?xml version="1.0" encoding="utf-8"?>
+<p:sld xmlns:a="http://schemas.openxmlformats.org/drawingml/2006/main" xmlns:p="http://schemas.openxmlformats.org/presentationml/2006/main" xmlns:r="http://schemas.openxmlformats.org/officeDocument/2006/relationships">
+  <p:cSld>
+    <p:spTree>
+      <p:nvGrpSpPr>
+        <p:cNvPr id="1" name=""/>
+        <p:cNvGrpSpPr/>
+        <p:nvPr/>
+      </p:nvGrpSpPr>
+      <p:grpSpPr/>
+      <p:sp>
+        <p:nvSpPr>
+          <p:cNvPr id="2" name="Rectangle 1"/>
+          <p:cNvSpPr/>
+          <p:nvPr/>
+        </p:nvSpPr>
+        <p:spPr>
+          <a:xfrm>
+            <a:off x="0" y="0"/>
+            <a:ext cx="12191969" cy="6858000"/>
+          </a:xfrm>
+          <a:prstGeom prst="rect">
+            <a:avLst/>
+          </a:prstGeom>
+          <a:solidFill>
+            <a:srgbClr val="0D1117"/>
+          </a:solidFill>
+          <a:ln>
+            <a:noFill/>
+          </a:ln>
+          <a:effectLst/>
+        </p:spPr>
+        <p:style>
+          <a:lnRef idx="1">
+            <a:schemeClr val="accent1"/>
+          </a:lnRef>
+          <a:fillRef idx="3">
+            <a:schemeClr val="accent1"/>
+          </a:fillRef>
+          <a:effectRef idx="2">
+            <a:schemeClr val="accent1"/>
+          </a:effectRef>
+          <a:fontRef idx="minor">
+            <a:schemeClr val="lt1"/>
+          </a:fontRef>
+        </p:style>
+        <p:txBody>
+          <a:bodyPr rtlCol="0" anchor="ctr"/>
+          <a:lstStyle/>
+          <a:p>
+            <a:pPr algn="ctr"/>
+          </a:p>
+        </p:txBody>
+      </p:sp>
+      <p:sp>
+        <p:nvSpPr>
+          <p:cNvPr id="3" name="TextBox 2"/>
+          <p:cNvSpPr txBox="1"/>
+          <p:nvPr/>
+        </p:nvSpPr>
+        <p:spPr>
+          <a:xfrm>
+            <a:off x="566928" y="384048"/>
+            <a:ext cx="1097280" cy="914400"/>
+          </a:xfrm>
+          <a:prstGeom prst="rect">
+            <a:avLst/>
+          </a:prstGeom>
+          <a:noFill/>
+        </p:spPr>
+        <p:txBody>
+          <a:bodyPr wrap="square" anchor="t" lIns="0" rIns="0" tIns="0" bIns="0">
+            <a:spAutoFit/>
+          </a:bodyPr>
+          <a:lstStyle/>
+          <a:p>
+            <a:pPr algn="l"/>
+            <a:r>
+              <a:rPr sz="4000" b="1">
+                <a:solidFill>
+                  <a:srgbClr val="F5A623"/>
+                </a:solidFill>
+                <a:latin typeface="Georgia"/>
+              </a:rPr>
+              <a:t>10</a:t>
+            </a:r>
+          </a:p>
+        </p:txBody>
+      </p:sp>
+      <p:sp>
+        <p:nvSpPr>
+          <p:cNvPr id="4" name="TextBox 3"/>
+          <p:cNvSpPr txBox="1"/>
+          <p:nvPr/>
+        </p:nvSpPr>
+        <p:spPr>
+          <a:xfrm>
+            <a:off x="1600200" y="365760"/>
+            <a:ext cx="10058400" cy="731520"/>
+          </a:xfrm>
+          <a:prstGeom prst="rect">
+            <a:avLst/>
+          </a:prstGeom>
+          <a:noFill/>
+        </p:spPr>
+        <p:txBody>
+          <a:bodyPr wrap="square" anchor="t" lIns="0" rIns="0" tIns="0" bIns="0">
+            <a:spAutoFit/>
+          </a:bodyPr>
+          <a:lstStyle/>
+          <a:p>
+            <a:pPr algn="l"/>
+            <a:r>
+              <a:rPr sz="3000" b="1">
+                <a:solidFill>
+                  <a:srgbClr val="E6EDF3"/>
+                </a:solidFill>
+                <a:latin typeface="Georgia"/>
+              </a:rPr>
+              <a:t>In sintesi</a:t>
+            </a:r>
+          </a:p>
+        </p:txBody>
+      </p:sp>
+      <p:sp>
+        <p:nvSpPr>
+          <p:cNvPr id="5" name="TextBox 4"/>
+          <p:cNvSpPr txBox="1"/>
+          <p:nvPr/>
+        </p:nvSpPr>
+        <p:spPr>
+          <a:xfrm>
+            <a:off x="1627632" y="1024128"/>
+            <a:ext cx="10241280" cy="457200"/>
+          </a:xfrm>
+          <a:prstGeom prst="rect">
+            <a:avLst/>
+          </a:prstGeom>
+          <a:noFill/>
+        </p:spPr>
+        <p:txBody>
+          <a:bodyPr wrap="square" anchor="t" lIns="0" rIns="0" tIns="0" bIns="0">
+            <a:spAutoFit/>
+          </a:bodyPr>
+          <a:lstStyle/>
+          <a:p>
+            <a:pPr algn="l"/>
+            <a:r>
+              <a:rPr sz="1350" b="0">
+                <a:solidFill>
+                  <a:srgbClr val="8B949E"/>
+                </a:solidFill>
+                <a:latin typeface="Segoe UI"/>
+              </a:rPr>
+              <a:t>Cosa cambia per l'hardcoded</a:t>
+            </a:r>
+          </a:p>
+        </p:txBody>
+      </p:sp>
+      <p:sp>
+        <p:nvSpPr>
+          <p:cNvPr id="6" name="Rounded Rectangle 5"/>
+          <p:cNvSpPr/>
+          <p:nvPr/>
+        </p:nvSpPr>
+        <p:spPr>
+          <a:xfrm>
+            <a:off x="640080" y="1920240"/>
+            <a:ext cx="10908792" cy="868680"/>
+          </a:xfrm>
+          <a:prstGeom prst="roundRect">
+            <a:avLst/>
+          </a:prstGeom>
+          <a:solidFill>
+            <a:srgbClr val="112A22"/>
+          </a:solidFill>
+          <a:ln>
+            <a:noFill/>
+          </a:ln>
+          <a:effectLst/>
+        </p:spPr>
+        <p:style>
+          <a:lnRef idx="1">
+            <a:schemeClr val="accent1"/>
+          </a:lnRef>
+          <a:fillRef idx="3">
+            <a:schemeClr val="accent1"/>
+          </a:fillRef>
+          <a:effectRef idx="2">
+            <a:schemeClr val="accent1"/>
+          </a:effectRef>
+          <a:fontRef idx="minor">
+            <a:schemeClr val="lt1"/>
+          </a:fontRef>
+        </p:style>
+        <p:txBody>
+          <a:bodyPr rtlCol="0" anchor="ctr"/>
+          <a:lstStyle/>
+          <a:p>
+            <a:pPr algn="ctr"/>
+          </a:p>
+        </p:txBody>
+      </p:sp>
+      <p:sp>
+        <p:nvSpPr>
+          <p:cNvPr id="7" name="Rounded Rectangle 6"/>
+          <p:cNvSpPr/>
+          <p:nvPr/>
+        </p:nvSpPr>
+        <p:spPr>
+          <a:xfrm>
+            <a:off x="731519" y="1965960"/>
+            <a:ext cx="10725912" cy="64008"/>
+          </a:xfrm>
+          <a:prstGeom prst="roundRect">
+            <a:avLst/>
+          </a:prstGeom>
+          <a:solidFill>
+            <a:srgbClr val="3FB950"/>
+          </a:solidFill>
+          <a:ln>
+            <a:noFill/>
+          </a:ln>
+          <a:effectLst/>
+        </p:spPr>
+        <p:style>
+          <a:lnRef idx="1">
+            <a:schemeClr val="accent1"/>
+          </a:lnRef>
+          <a:fillRef idx="3">
+            <a:schemeClr val="accent1"/>
+          </a:fillRef>
+          <a:effectRef idx="2">
+            <a:schemeClr val="accent1"/>
+          </a:effectRef>
+          <a:fontRef idx="minor">
+            <a:schemeClr val="lt1"/>
+          </a:fontRef>
+        </p:style>
+        <p:txBody>
+          <a:bodyPr rtlCol="0" anchor="ctr"/>
+          <a:lstStyle/>
+          <a:p>
+            <a:pPr algn="ctr"/>
+          </a:p>
+        </p:txBody>
+      </p:sp>
+      <p:sp>
+        <p:nvSpPr>
+          <p:cNvPr id="8" name="TextBox 7"/>
+          <p:cNvSpPr txBox="1"/>
+          <p:nvPr/>
+        </p:nvSpPr>
+        <p:spPr>
+          <a:xfrm>
+            <a:off x="713231" y="1975104"/>
+            <a:ext cx="10762488" cy="758952"/>
+          </a:xfrm>
+          <a:prstGeom prst="rect">
+            <a:avLst/>
+          </a:prstGeom>
+          <a:noFill/>
+        </p:spPr>
+        <p:txBody>
+          <a:bodyPr wrap="square" anchor="ctr" lIns="0" rIns="0" tIns="0" bIns="0">
+            <a:spAutoFit/>
+          </a:bodyPr>
+          <a:lstStyle/>
+          <a:p>
+            <a:pPr algn="l"/>
+            <a:r>
+              <a:rPr sz="1350" b="1">
+                <a:solidFill>
+                  <a:srgbClr val="3FB950"/>
+                </a:solidFill>
+                <a:latin typeface="Segoe UI"/>
+              </a:rPr>
+              <a:t>IV flessibile a costo zero:</a:t>
+            </a:r>
+            <a:r>
+              <a:rPr sz="1300" b="0">
+                <a:solidFill>
+                  <a:srgbClr val="E6EDF3"/>
+                </a:solidFill>
+                <a:latin typeface="Segoe UI"/>
+              </a:rPr>
+              <a:t>  descrittore di feature per-modello; il default 65-4-4-7 resta byte-identico (regressione).</a:t>
+            </a:r>
+          </a:p>
+        </p:txBody>
+      </p:sp>
+      <p:sp>
+        <p:nvSpPr>
+          <p:cNvPr id="9" name="Rounded Rectangle 8"/>
+          <p:cNvSpPr/>
+          <p:nvPr/>
+        </p:nvSpPr>
+        <p:spPr>
+          <a:xfrm>
+            <a:off x="640080" y="2926080"/>
+            <a:ext cx="3520440" cy="1828800"/>
+          </a:xfrm>
+          <a:prstGeom prst="roundRect">
+            <a:avLst/>
+          </a:prstGeom>
+          <a:solidFill>
+            <a:srgbClr val="1B222E"/>
+          </a:solidFill>
+          <a:ln>
+            <a:noFill/>
+          </a:ln>
+          <a:effectLst/>
+        </p:spPr>
+        <p:style>
+          <a:lnRef idx="1">
+            <a:schemeClr val="accent1"/>
+          </a:lnRef>
+          <a:fillRef idx="3">
+            <a:schemeClr val="accent1"/>
+          </a:fillRef>
+          <a:effectRef idx="2">
+            <a:schemeClr val="accent1"/>
+          </a:effectRef>
+          <a:fontRef idx="minor">
+            <a:schemeClr val="lt1"/>
+          </a:fontRef>
+        </p:style>
+        <p:txBody>
+          <a:bodyPr rtlCol="0" anchor="ctr"/>
+          <a:lstStyle/>
+          <a:p>
+            <a:pPr algn="ctr"/>
+          </a:p>
+        </p:txBody>
+      </p:sp>
+      <p:sp>
+        <p:nvSpPr>
+          <p:cNvPr id="10" name="Rounded Rectangle 9"/>
+          <p:cNvSpPr/>
+          <p:nvPr/>
+        </p:nvSpPr>
+        <p:spPr>
+          <a:xfrm>
+            <a:off x="731519" y="2971800"/>
+            <a:ext cx="3337560" cy="64008"/>
+          </a:xfrm>
+          <a:prstGeom prst="roundRect">
+            <a:avLst/>
+          </a:prstGeom>
+          <a:solidFill>
+            <a:srgbClr val="58A6FF"/>
+          </a:solidFill>
+          <a:ln>
+            <a:noFill/>
+          </a:ln>
+          <a:effectLst/>
+        </p:spPr>
+        <p:style>
+          <a:lnRef idx="1">
+            <a:schemeClr val="accent1"/>
+          </a:lnRef>
+          <a:fillRef idx="3">
+            <a:schemeClr val="accent1"/>
+          </a:fillRef>
+          <a:effectRef idx="2">
+            <a:schemeClr val="accent1"/>
+          </a:effectRef>
+          <a:fontRef idx="minor">
+            <a:schemeClr val="lt1"/>
+          </a:fontRef>
+        </p:style>
+        <p:txBody>
+          <a:bodyPr rtlCol="0" anchor="ctr"/>
+          <a:lstStyle/>
+          <a:p>
+            <a:pPr algn="ctr"/>
+          </a:p>
+        </p:txBody>
+      </p:sp>
+      <p:sp>
+        <p:nvSpPr>
+          <p:cNvPr id="11" name="TextBox 10"/>
+          <p:cNvSpPr txBox="1"/>
+          <p:nvPr/>
+        </p:nvSpPr>
+        <p:spPr>
+          <a:xfrm>
+            <a:off x="713231" y="2980944"/>
+            <a:ext cx="3374136" cy="1719072"/>
+          </a:xfrm>
+          <a:prstGeom prst="rect">
+            <a:avLst/>
+          </a:prstGeom>
+          <a:noFill/>
+        </p:spPr>
+        <p:txBody>
+          <a:bodyPr wrap="square" anchor="ctr" lIns="0" rIns="0" tIns="0" bIns="0">
+            <a:spAutoFit/>
+          </a:bodyPr>
+          <a:lstStyle/>
+          <a:p>
+            <a:pPr algn="l"/>
+            <a:r>
+              <a:rPr sz="1250" b="1">
+                <a:solidFill>
+                  <a:srgbClr val="58A6FF"/>
+                </a:solidFill>
+                <a:latin typeface="Segoe UI"/>
+              </a:rPr>
+              <a:t>hot-path</a:t>
+            </a:r>
+          </a:p>
+          <a:p>
+            <a:pPr algn="l"/>
+            <a:r>
+              <a:rPr sz="3000" b="1">
+                <a:solidFill>
+                  <a:srgbClr val="E6EDF3"/>
+                </a:solidFill>
+                <a:latin typeface="Georgia"/>
+              </a:rPr>
+              <a:t>N → 1</a:t>
+            </a:r>
+          </a:p>
+          <a:p>
+            <a:pPr algn="l"/>
+            <a:r>
+              <a:rPr sz="1100" b="0">
+                <a:solidFill>
+                  <a:srgbClr val="8B949E"/>
+                </a:solidFill>
+                <a:latin typeface="Segoe UI"/>
+              </a:rPr>
+              <a:t>lookup per feature dense</a:t>
+            </a:r>
+          </a:p>
+        </p:txBody>
+      </p:sp>
+      <p:sp>
+        <p:nvSpPr>
+          <p:cNvPr id="12" name="Rounded Rectangle 11"/>
+          <p:cNvSpPr/>
+          <p:nvPr/>
+        </p:nvSpPr>
+        <p:spPr>
+          <a:xfrm>
+            <a:off x="4334256" y="2926080"/>
+            <a:ext cx="3520440" cy="1828800"/>
+          </a:xfrm>
+          <a:prstGeom prst="roundRect">
+            <a:avLst/>
+          </a:prstGeom>
+          <a:solidFill>
+            <a:srgbClr val="1B222E"/>
+          </a:solidFill>
+          <a:ln>
+            <a:noFill/>
+          </a:ln>
+          <a:effectLst/>
+        </p:spPr>
+        <p:style>
+          <a:lnRef idx="1">
+            <a:schemeClr val="accent1"/>
+          </a:lnRef>
+          <a:fillRef idx="3">
+            <a:schemeClr val="accent1"/>
+          </a:fillRef>
+          <a:effectRef idx="2">
+            <a:schemeClr val="accent1"/>
+          </a:effectRef>
+          <a:fontRef idx="minor">
+            <a:schemeClr val="lt1"/>
+          </a:fontRef>
+        </p:style>
+        <p:txBody>
+          <a:bodyPr rtlCol="0" anchor="ctr"/>
+          <a:lstStyle/>
+          <a:p>
+            <a:pPr algn="ctr"/>
+          </a:p>
+        </p:txBody>
+      </p:sp>
+      <p:sp>
+        <p:nvSpPr>
+          <p:cNvPr id="13" name="Rounded Rectangle 12"/>
+          <p:cNvSpPr/>
+          <p:nvPr/>
+        </p:nvSpPr>
+        <p:spPr>
+          <a:xfrm>
+            <a:off x="4425696" y="2971800"/>
+            <a:ext cx="3337560" cy="64008"/>
+          </a:xfrm>
+          <a:prstGeom prst="roundRect">
+            <a:avLst/>
+          </a:prstGeom>
+          <a:solidFill>
+            <a:srgbClr val="F5A623"/>
+          </a:solidFill>
+          <a:ln>
+            <a:noFill/>
+          </a:ln>
+          <a:effectLst/>
+        </p:spPr>
+        <p:style>
+          <a:lnRef idx="1">
+            <a:schemeClr val="accent1"/>
+          </a:lnRef>
+          <a:fillRef idx="3">
+            <a:schemeClr val="accent1"/>
+          </a:fillRef>
+          <a:effectRef idx="2">
+            <a:schemeClr val="accent1"/>
+          </a:effectRef>
+          <a:fontRef idx="minor">
+            <a:schemeClr val="lt1"/>
+          </a:fontRef>
+        </p:style>
+        <p:txBody>
+          <a:bodyPr rtlCol="0" anchor="ctr"/>
+          <a:lstStyle/>
+          <a:p>
+            <a:pPr algn="ctr"/>
+          </a:p>
+        </p:txBody>
+      </p:sp>
+      <p:sp>
+        <p:nvSpPr>
+          <p:cNvPr id="14" name="TextBox 13"/>
+          <p:cNvSpPr txBox="1"/>
+          <p:nvPr/>
+        </p:nvSpPr>
+        <p:spPr>
+          <a:xfrm>
+            <a:off x="4407408" y="2980944"/>
+            <a:ext cx="3374136" cy="1719072"/>
+          </a:xfrm>
+          <a:prstGeom prst="rect">
+            <a:avLst/>
+          </a:prstGeom>
+          <a:noFill/>
+        </p:spPr>
+        <p:txBody>
+          <a:bodyPr wrap="square" anchor="ctr" lIns="0" rIns="0" tIns="0" bIns="0">
+            <a:spAutoFit/>
+          </a:bodyPr>
+          <a:lstStyle/>
+          <a:p>
+            <a:pPr algn="l"/>
+            <a:r>
+              <a:rPr sz="1250" b="1">
+                <a:solidFill>
+                  <a:srgbClr val="F5A623"/>
+                </a:solidFill>
+                <a:latin typeface="Segoe UI"/>
+              </a:rPr>
+              <a:t>deploy modello</a:t>
+            </a:r>
+          </a:p>
+          <a:p>
+            <a:pPr algn="l"/>
+            <a:r>
+              <a:rPr sz="2400" b="1">
+                <a:solidFill>
+                  <a:srgbClr val="E6EDF3"/>
+                </a:solidFill>
+                <a:latin typeface="Georgia"/>
+              </a:rPr>
+              <a:t>1660 → 6.2 ms</a:t>
+            </a:r>
+          </a:p>
+          <a:p>
+            <a:pPr algn="l"/>
+            <a:r>
+              <a:rPr sz="1100" b="0">
+                <a:solidFill>
+                  <a:srgbClr val="8B949E"/>
+                </a:solidFill>
+                <a:latin typeface="Segoe UI"/>
+              </a:rPr>
+              <a:t>via AOT-literal</a:t>
+            </a:r>
+          </a:p>
+        </p:txBody>
+      </p:sp>
+      <p:sp>
+        <p:nvSpPr>
+          <p:cNvPr id="15" name="Rounded Rectangle 14"/>
+          <p:cNvSpPr/>
+          <p:nvPr/>
+        </p:nvSpPr>
+        <p:spPr>
+          <a:xfrm>
+            <a:off x="8028431" y="2926080"/>
+            <a:ext cx="3520440" cy="1828800"/>
+          </a:xfrm>
+          <a:prstGeom prst="roundRect">
+            <a:avLst/>
+          </a:prstGeom>
+          <a:solidFill>
+            <a:srgbClr val="1B222E"/>
+          </a:solidFill>
+          <a:ln>
+            <a:noFill/>
+          </a:ln>
+          <a:effectLst/>
+        </p:spPr>
+        <p:style>
+          <a:lnRef idx="1">
+            <a:schemeClr val="accent1"/>
+          </a:lnRef>
+          <a:fillRef idx="3">
+            <a:schemeClr val="accent1"/>
+          </a:fillRef>
+          <a:effectRef idx="2">
+            <a:schemeClr val="accent1"/>
+          </a:effectRef>
+          <a:fontRef idx="minor">
+            <a:schemeClr val="lt1"/>
+          </a:fontRef>
+        </p:style>
+        <p:txBody>
+          <a:bodyPr rtlCol="0" anchor="ctr"/>
+          <a:lstStyle/>
+          <a:p>
+            <a:pPr algn="ctr"/>
+          </a:p>
+        </p:txBody>
+      </p:sp>
+      <p:sp>
+        <p:nvSpPr>
+          <p:cNvPr id="16" name="Rounded Rectangle 15"/>
+          <p:cNvSpPr/>
+          <p:nvPr/>
+        </p:nvSpPr>
+        <p:spPr>
+          <a:xfrm>
+            <a:off x="8119871" y="2971800"/>
+            <a:ext cx="3337560" cy="64008"/>
+          </a:xfrm>
+          <a:prstGeom prst="roundRect">
+            <a:avLst/>
+          </a:prstGeom>
+          <a:solidFill>
+            <a:srgbClr val="3FD0C8"/>
+          </a:solidFill>
+          <a:ln>
+            <a:noFill/>
+          </a:ln>
+          <a:effectLst/>
+        </p:spPr>
+        <p:style>
+          <a:lnRef idx="1">
+            <a:schemeClr val="accent1"/>
+          </a:lnRef>
+          <a:fillRef idx="3">
+            <a:schemeClr val="accent1"/>
+          </a:fillRef>
+          <a:effectRef idx="2">
+            <a:schemeClr val="accent1"/>
+          </a:effectRef>
+          <a:fontRef idx="minor">
+            <a:schemeClr val="lt1"/>
+          </a:fontRef>
+        </p:style>
+        <p:txBody>
+          <a:bodyPr rtlCol="0" anchor="ctr"/>
+          <a:lstStyle/>
+          <a:p>
+            <a:pPr algn="ctr"/>
+          </a:p>
+        </p:txBody>
+      </p:sp>
+      <p:sp>
+        <p:nvSpPr>
+          <p:cNvPr id="17" name="TextBox 16"/>
+          <p:cNvSpPr txBox="1"/>
+          <p:nvPr/>
+        </p:nvSpPr>
+        <p:spPr>
+          <a:xfrm>
+            <a:off x="8101583" y="2980944"/>
+            <a:ext cx="3374136" cy="1719072"/>
+          </a:xfrm>
+          <a:prstGeom prst="rect">
+            <a:avLst/>
+          </a:prstGeom>
+          <a:noFill/>
+        </p:spPr>
+        <p:txBody>
+          <a:bodyPr wrap="square" anchor="ctr" lIns="0" rIns="0" tIns="0" bIns="0">
+            <a:spAutoFit/>
+          </a:bodyPr>
+          <a:lstStyle/>
+          <a:p>
+            <a:pPr algn="l"/>
+            <a:r>
+              <a:rPr sz="1250" b="1">
+                <a:solidFill>
+                  <a:srgbClr val="3FD0C8"/>
+                </a:solidFill>
+                <a:latin typeface="Segoe UI"/>
+              </a:rPr>
+              <a:t>performance</a:t>
+            </a:r>
+          </a:p>
+          <a:p>
+            <a:pPr algn="l"/>
+            <a:r>
+              <a:rPr sz="2600" b="1">
+                <a:solidFill>
+                  <a:srgbClr val="E6EDF3"/>
+                </a:solidFill>
+                <a:latin typeface="Georgia"/>
+              </a:rPr>
+              <a:t>literal max</a:t>
+            </a:r>
+          </a:p>
+          <a:p>
+            <a:pPr algn="l"/>
+            <a:r>
+              <a:rPr sz="1100" b="0">
+                <a:solidFill>
+                  <a:srgbClr val="8B949E"/>
+                </a:solidFill>
+                <a:latin typeface="Segoe UI"/>
+              </a:rPr>
+              <a:t>56 ns · 17.86 Mpps</a:t>
+            </a:r>
+          </a:p>
+        </p:txBody>
+      </p:sp>
+      <p:sp>
+        <p:nvSpPr>
+          <p:cNvPr id="18" name="TextBox 17"/>
+          <p:cNvSpPr txBox="1"/>
+          <p:nvPr/>
+        </p:nvSpPr>
+        <p:spPr>
+          <a:xfrm>
+            <a:off x="640080" y="5074920"/>
+            <a:ext cx="10972800" cy="1188720"/>
+          </a:xfrm>
+          <a:prstGeom prst="rect">
+            <a:avLst/>
+          </a:prstGeom>
+          <a:noFill/>
+        </p:spPr>
+        <p:txBody>
+          <a:bodyPr wrap="square" anchor="t" lIns="0" rIns="0" tIns="0" bIns="0">
+            <a:spAutoFit/>
+          </a:bodyPr>
+          <a:lstStyle/>
+          <a:p>
+            <a:pPr algn="l">
+              <a:spcAft>
+                <a:spcPts val="600"/>
+              </a:spcAft>
+            </a:pPr>
+            <a:r>
+              <a:rPr sz="1300" b="1">
+                <a:solidFill>
+                  <a:srgbClr val="8B949E"/>
+                </a:solidFill>
+                <a:latin typeface="Segoe UI"/>
+              </a:rPr>
+              <a:t>Nota:</a:t>
+            </a:r>
+            <a:r>
+              <a:rPr sz="1300" b="0">
+                <a:solidFill>
+                  <a:srgbClr val="E6EDF3"/>
+                </a:solidFill>
+                <a:latin typeface="Segoe UI"/>
+              </a:rPr>
+              <a:t>  method4 BCC literal resta il fallback garantito. L'AOT-literal è un loader alternativo, attivabile per i modelli noti a priori senza toccare l'architettura dispatcher + tail-call.</a:t>
             </a:r>
           </a:p>
         </p:txBody>
@@ -8658,7 +10049,7 @@
                 </a:solidFill>
                 <a:latin typeface="Georgia"/>
               </a:rPr>
-              <a:t>Abbattere la ricompilazione</a:t>
+              <a:t>Ottimizzazione hot-path</a:t>
             </a:r>
           </a:p>
         </p:txBody>
@@ -8693,7 +10084,7 @@
                 </a:solidFill>
                 <a:latin typeface="Segoe UI"/>
               </a:rPr>
-              <a:t>Compila una volta per architettura, poi inietta i pesi</a:t>
+              <a:t>Letture della mappa consolidate: da N lookup a 1</a:t>
             </a:r>
           </a:p>
         </p:txBody>
@@ -8707,7 +10098,7 @@
         <p:spPr>
           <a:xfrm>
             <a:off x="640080" y="1874519"/>
-            <a:ext cx="5349240" cy="1417320"/>
+            <a:ext cx="5349240" cy="1554480"/>
           </a:xfrm>
           <a:prstGeom prst="roundRect">
             <a:avLst/>
@@ -8795,7 +10186,7 @@
         <p:spPr>
           <a:xfrm>
             <a:off x="713231" y="1929384"/>
-            <a:ext cx="5202936" cy="1307592"/>
+            <a:ext cx="5202936" cy="1444752"/>
           </a:xfrm>
           <a:prstGeom prst="rect">
             <a:avLst/>
@@ -8816,7 +10207,7 @@
                 </a:solidFill>
                 <a:latin typeface="Segoe UI"/>
               </a:rPr>
-              <a:t>Oggi: literal + BCC</a:t>
+              <a:t>Prima: un lookup per slot</a:t>
             </a:r>
           </a:p>
           <a:p>
@@ -8828,7 +10219,7 @@
                 </a:solidFill>
                 <a:latin typeface="Segoe UI"/>
               </a:rPr>
-              <a:t>I pesi sono literal nel C. BCC = clang a runtime: ogni modello ricompila tutto. ≈99.8% del costo è clang.</a:t>
+              <a:t>Ogni feature dense leggeva la mappa slot per slot: link_state = 6 bpf_map_lookup_elem, queue_occupancy = 4 → fino a 10 helper call/pacchetto.</a:t>
             </a:r>
           </a:p>
         </p:txBody>
@@ -8842,7 +10233,7 @@
         <p:spPr>
           <a:xfrm>
             <a:off x="6199632" y="1874519"/>
-            <a:ext cx="5349240" cy="1417320"/>
+            <a:ext cx="5349240" cy="1554480"/>
           </a:xfrm>
           <a:prstGeom prst="roundRect">
             <a:avLst/>
@@ -8930,7 +10321,7 @@
         <p:spPr>
           <a:xfrm>
             <a:off x="6272784" y="1929384"/>
-            <a:ext cx="5202936" cy="1307592"/>
+            <a:ext cx="5202936" cy="1444752"/>
           </a:xfrm>
           <a:prstGeom prst="rect">
             <a:avLst/>
@@ -8951,7 +10342,7 @@
                 </a:solidFill>
                 <a:latin typeface="Segoe UI"/>
               </a:rPr>
-              <a:t>Idea: AOT + pesi in .rodata</a:t>
+              <a:t>Dopo: un lookup per feature</a:t>
             </a:r>
           </a:p>
           <a:p>
@@ -8963,7 +10354,7 @@
                 </a:solidFill>
                 <a:latin typeface="Segoe UI"/>
               </a:rPr>
-              <a:t>Compila il .o UNA volta per architettura. Nuovo modello → inietti i pesi in .rodata (frozen) e ricarichi. Zero clang.</a:t>
+              <a:t>La mappa ora è UNA entry struct-valued  {u32 v[N]}  a key 0: un solo lookup + N load diretti dal valore. 10 → 2 helper call.</a:t>
             </a:r>
           </a:p>
         </p:txBody>
@@ -8976,14 +10367,14 @@
         </p:nvSpPr>
         <p:spPr>
           <a:xfrm>
-            <a:off x="640080" y="3611880"/>
-            <a:ext cx="2606040" cy="1005840"/>
+            <a:off x="640080" y="3703320"/>
+            <a:ext cx="10972800" cy="1051560"/>
           </a:xfrm>
           <a:prstGeom prst="roundRect">
             <a:avLst/>
           </a:prstGeom>
           <a:solidFill>
-            <a:srgbClr val="1B222E"/>
+            <a:srgbClr val="0A0E14"/>
           </a:solidFill>
           <a:ln>
             <a:noFill/>
@@ -9014,105 +10405,14 @@
       </p:sp>
       <p:sp>
         <p:nvSpPr>
-          <p:cNvPr id="13" name="Rounded Rectangle 12"/>
-          <p:cNvSpPr/>
-          <p:nvPr/>
-        </p:nvSpPr>
-        <p:spPr>
-          <a:xfrm>
-            <a:off x="731519" y="3657600"/>
-            <a:ext cx="2423160" cy="64008"/>
-          </a:xfrm>
-          <a:prstGeom prst="roundRect">
-            <a:avLst/>
-          </a:prstGeom>
-          <a:solidFill>
-            <a:srgbClr val="58A6FF"/>
-          </a:solidFill>
-          <a:ln>
-            <a:noFill/>
-          </a:ln>
-          <a:effectLst/>
-        </p:spPr>
-        <p:style>
-          <a:lnRef idx="1">
-            <a:schemeClr val="accent1"/>
-          </a:lnRef>
-          <a:fillRef idx="3">
-            <a:schemeClr val="accent1"/>
-          </a:fillRef>
-          <a:effectRef idx="2">
-            <a:schemeClr val="accent1"/>
-          </a:effectRef>
-          <a:fontRef idx="minor">
-            <a:schemeClr val="lt1"/>
-          </a:fontRef>
-        </p:style>
-        <p:txBody>
-          <a:bodyPr rtlCol="0" anchor="ctr"/>
-          <a:lstStyle/>
-          <a:p>
-            <a:pPr algn="ctr"/>
-          </a:p>
-        </p:txBody>
-      </p:sp>
-      <p:sp>
-        <p:nvSpPr>
-          <p:cNvPr id="14" name="TextBox 13"/>
+          <p:cNvPr id="13" name="TextBox 12"/>
           <p:cNvSpPr txBox="1"/>
           <p:nvPr/>
         </p:nvSpPr>
         <p:spPr>
           <a:xfrm>
-            <a:off x="713231" y="3666744"/>
-            <a:ext cx="2459736" cy="896112"/>
-          </a:xfrm>
-          <a:prstGeom prst="rect">
-            <a:avLst/>
-          </a:prstGeom>
-          <a:noFill/>
-        </p:spPr>
-        <p:txBody>
-          <a:bodyPr wrap="square" anchor="ctr" lIns="0" rIns="0" tIns="0" bIns="0">
-            <a:spAutoFit/>
-          </a:bodyPr>
-          <a:lstStyle/>
-          <a:p>
-            <a:pPr algn="l"/>
-            <a:r>
-              <a:rPr sz="1200" b="1">
-                <a:solidFill>
-                  <a:srgbClr val="58A6FF"/>
-                </a:solidFill>
-                <a:latin typeface="Consolas"/>
-              </a:rPr>
-              <a:t>model.bpf.c</a:t>
-            </a:r>
-          </a:p>
-          <a:p>
-            <a:pPr algn="l"/>
-            <a:r>
-              <a:rPr sz="1000" b="0">
-                <a:solidFill>
-                  <a:srgbClr val="8B949E"/>
-                </a:solidFill>
-                <a:latin typeface="Segoe UI"/>
-              </a:rPr>
-              <a:t>const volatile W[N]</a:t>
-            </a:r>
-          </a:p>
-        </p:txBody>
-      </p:sp>
-      <p:sp>
-        <p:nvSpPr>
-          <p:cNvPr id="15" name="TextBox 14"/>
-          <p:cNvSpPr txBox="1"/>
-          <p:nvPr/>
-        </p:nvSpPr>
-        <p:spPr>
-          <a:xfrm>
-            <a:off x="3227832" y="3858768"/>
-            <a:ext cx="365760" cy="457200"/>
+            <a:off x="868680" y="3822191"/>
+            <a:ext cx="10607040" cy="822960"/>
           </a:xfrm>
           <a:prstGeom prst="rect">
             <a:avLst/>
@@ -9125,504 +10425,65 @@
           </a:bodyPr>
           <a:lstStyle/>
           <a:p>
-            <a:pPr algn="l"/>
-            <a:r>
-              <a:rPr sz="2600" b="1">
-                <a:solidFill>
-                  <a:srgbClr val="F5A623"/>
-                </a:solidFill>
-                <a:latin typeface="Segoe UI"/>
-              </a:rPr>
-              <a:t>›</a:t>
-            </a:r>
-          </a:p>
-        </p:txBody>
-      </p:sp>
-      <p:sp>
-        <p:nvSpPr>
-          <p:cNvPr id="16" name="Rounded Rectangle 15"/>
-          <p:cNvSpPr/>
-          <p:nvPr/>
-        </p:nvSpPr>
-        <p:spPr>
-          <a:xfrm>
-            <a:off x="3291839" y="3611880"/>
-            <a:ext cx="2606040" cy="1005840"/>
-          </a:xfrm>
-          <a:prstGeom prst="roundRect">
-            <a:avLst/>
-          </a:prstGeom>
-          <a:solidFill>
-            <a:srgbClr val="1B222E"/>
-          </a:solidFill>
-          <a:ln>
-            <a:noFill/>
-          </a:ln>
-          <a:effectLst/>
-        </p:spPr>
-        <p:style>
-          <a:lnRef idx="1">
-            <a:schemeClr val="accent1"/>
-          </a:lnRef>
-          <a:fillRef idx="3">
-            <a:schemeClr val="accent1"/>
-          </a:fillRef>
-          <a:effectRef idx="2">
-            <a:schemeClr val="accent1"/>
-          </a:effectRef>
-          <a:fontRef idx="minor">
-            <a:schemeClr val="lt1"/>
-          </a:fontRef>
-        </p:style>
-        <p:txBody>
-          <a:bodyPr rtlCol="0" anchor="ctr"/>
-          <a:lstStyle/>
-          <a:p>
-            <a:pPr algn="ctr"/>
-          </a:p>
-        </p:txBody>
-      </p:sp>
-      <p:sp>
-        <p:nvSpPr>
-          <p:cNvPr id="17" name="Rounded Rectangle 16"/>
-          <p:cNvSpPr/>
-          <p:nvPr/>
-        </p:nvSpPr>
-        <p:spPr>
-          <a:xfrm>
-            <a:off x="3383279" y="3657600"/>
-            <a:ext cx="2423160" cy="64008"/>
-          </a:xfrm>
-          <a:prstGeom prst="roundRect">
-            <a:avLst/>
-          </a:prstGeom>
-          <a:solidFill>
-            <a:srgbClr val="F5A623"/>
-          </a:solidFill>
-          <a:ln>
-            <a:noFill/>
-          </a:ln>
-          <a:effectLst/>
-        </p:spPr>
-        <p:style>
-          <a:lnRef idx="1">
-            <a:schemeClr val="accent1"/>
-          </a:lnRef>
-          <a:fillRef idx="3">
-            <a:schemeClr val="accent1"/>
-          </a:fillRef>
-          <a:effectRef idx="2">
-            <a:schemeClr val="accent1"/>
-          </a:effectRef>
-          <a:fontRef idx="minor">
-            <a:schemeClr val="lt1"/>
-          </a:fontRef>
-        </p:style>
-        <p:txBody>
-          <a:bodyPr rtlCol="0" anchor="ctr"/>
-          <a:lstStyle/>
-          <a:p>
-            <a:pPr algn="ctr"/>
-          </a:p>
-        </p:txBody>
-      </p:sp>
-      <p:sp>
-        <p:nvSpPr>
-          <p:cNvPr id="18" name="TextBox 17"/>
+            <a:pPr algn="l">
+              <a:spcAft>
+                <a:spcPts val="300"/>
+              </a:spcAft>
+            </a:pPr>
+            <a:r>
+              <a:rPr sz="1200" b="0">
+                <a:solidFill>
+                  <a:srgbClr val="3FB950"/>
+                </a:solidFill>
+                <a:latin typeface="Consolas"/>
+              </a:rPr>
+              <a:t>struct ls_vec { __u32 v[6]; };  BPF_ARRAY(link_state, struct ls_vec, 1);</a:t>
+            </a:r>
+          </a:p>
+          <a:p>
+            <a:pPr algn="l">
+              <a:spcAft>
+                <a:spcPts val="300"/>
+              </a:spcAft>
+            </a:pPr>
+            <a:r>
+              <a:rPr sz="1200" b="0">
+                <a:solidFill>
+                  <a:srgbClr val="58A6FF"/>
+                </a:solidFill>
+                <a:latin typeface="Consolas"/>
+              </a:rPr>
+              <a:t>int z=0; struct ls_vec *p = link_state.lookup(&amp;z);  // 1 lookup</a:t>
+            </a:r>
+          </a:p>
+          <a:p>
+            <a:pPr algn="l">
+              <a:spcAft>
+                <a:spcPts val="300"/>
+              </a:spcAft>
+            </a:pPr>
+            <a:r>
+              <a:rPr sz="1200" b="0">
+                <a:solidFill>
+                  <a:srgbClr val="E6EDF3"/>
+                </a:solidFill>
+                <a:latin typeface="Consolas"/>
+              </a:rPr>
+              <a:t>if (p) { ls0=p-&gt;v[0]; ls1=p-&gt;v[1]; ... }             // N load, 0 helper</a:t>
+            </a:r>
+          </a:p>
+        </p:txBody>
+      </p:sp>
+      <p:sp>
+        <p:nvSpPr>
+          <p:cNvPr id="14" name="TextBox 13"/>
           <p:cNvSpPr txBox="1"/>
           <p:nvPr/>
         </p:nvSpPr>
         <p:spPr>
           <a:xfrm>
-            <a:off x="3364991" y="3666744"/>
-            <a:ext cx="2459736" cy="896112"/>
-          </a:xfrm>
-          <a:prstGeom prst="rect">
-            <a:avLst/>
-          </a:prstGeom>
-          <a:noFill/>
-        </p:spPr>
-        <p:txBody>
-          <a:bodyPr wrap="square" anchor="ctr" lIns="0" rIns="0" tIns="0" bIns="0">
-            <a:spAutoFit/>
-          </a:bodyPr>
-          <a:lstStyle/>
-          <a:p>
-            <a:pPr algn="l"/>
-            <a:r>
-              <a:rPr sz="1200" b="1">
-                <a:solidFill>
-                  <a:srgbClr val="F5A623"/>
-                </a:solidFill>
-                <a:latin typeface="Consolas"/>
-              </a:rPr>
-              <a:t>clang UNA volta</a:t>
-            </a:r>
-          </a:p>
-          <a:p>
-            <a:pPr algn="l"/>
-            <a:r>
-              <a:rPr sz="1000" b="0">
-                <a:solidFill>
-                  <a:srgbClr val="8B949E"/>
-                </a:solidFill>
-                <a:latin typeface="Segoe UI"/>
-              </a:rPr>
-              <a:t>-&gt; model.o</a:t>
-            </a:r>
-          </a:p>
-        </p:txBody>
-      </p:sp>
-      <p:sp>
-        <p:nvSpPr>
-          <p:cNvPr id="19" name="TextBox 18"/>
-          <p:cNvSpPr txBox="1"/>
-          <p:nvPr/>
-        </p:nvSpPr>
-        <p:spPr>
-          <a:xfrm>
-            <a:off x="5879592" y="3858768"/>
-            <a:ext cx="365760" cy="457200"/>
-          </a:xfrm>
-          <a:prstGeom prst="rect">
-            <a:avLst/>
-          </a:prstGeom>
-          <a:noFill/>
-        </p:spPr>
-        <p:txBody>
-          <a:bodyPr wrap="square" anchor="t" lIns="0" rIns="0" tIns="0" bIns="0">
-            <a:spAutoFit/>
-          </a:bodyPr>
-          <a:lstStyle/>
-          <a:p>
-            <a:pPr algn="l"/>
-            <a:r>
-              <a:rPr sz="2600" b="1">
-                <a:solidFill>
-                  <a:srgbClr val="F5A623"/>
-                </a:solidFill>
-                <a:latin typeface="Segoe UI"/>
-              </a:rPr>
-              <a:t>›</a:t>
-            </a:r>
-          </a:p>
-        </p:txBody>
-      </p:sp>
-      <p:sp>
-        <p:nvSpPr>
-          <p:cNvPr id="20" name="Rounded Rectangle 19"/>
-          <p:cNvSpPr/>
-          <p:nvPr/>
-        </p:nvSpPr>
-        <p:spPr>
-          <a:xfrm>
-            <a:off x="5943600" y="3611880"/>
-            <a:ext cx="2606040" cy="1005840"/>
-          </a:xfrm>
-          <a:prstGeom prst="roundRect">
-            <a:avLst/>
-          </a:prstGeom>
-          <a:solidFill>
-            <a:srgbClr val="1B222E"/>
-          </a:solidFill>
-          <a:ln>
-            <a:noFill/>
-          </a:ln>
-          <a:effectLst/>
-        </p:spPr>
-        <p:style>
-          <a:lnRef idx="1">
-            <a:schemeClr val="accent1"/>
-          </a:lnRef>
-          <a:fillRef idx="3">
-            <a:schemeClr val="accent1"/>
-          </a:fillRef>
-          <a:effectRef idx="2">
-            <a:schemeClr val="accent1"/>
-          </a:effectRef>
-          <a:fontRef idx="minor">
-            <a:schemeClr val="lt1"/>
-          </a:fontRef>
-        </p:style>
-        <p:txBody>
-          <a:bodyPr rtlCol="0" anchor="ctr"/>
-          <a:lstStyle/>
-          <a:p>
-            <a:pPr algn="ctr"/>
-          </a:p>
-        </p:txBody>
-      </p:sp>
-      <p:sp>
-        <p:nvSpPr>
-          <p:cNvPr id="21" name="Rounded Rectangle 20"/>
-          <p:cNvSpPr/>
-          <p:nvPr/>
-        </p:nvSpPr>
-        <p:spPr>
-          <a:xfrm>
-            <a:off x="6035040" y="3657600"/>
-            <a:ext cx="2423160" cy="64008"/>
-          </a:xfrm>
-          <a:prstGeom prst="roundRect">
-            <a:avLst/>
-          </a:prstGeom>
-          <a:solidFill>
-            <a:srgbClr val="3FB950"/>
-          </a:solidFill>
-          <a:ln>
-            <a:noFill/>
-          </a:ln>
-          <a:effectLst/>
-        </p:spPr>
-        <p:style>
-          <a:lnRef idx="1">
-            <a:schemeClr val="accent1"/>
-          </a:lnRef>
-          <a:fillRef idx="3">
-            <a:schemeClr val="accent1"/>
-          </a:fillRef>
-          <a:effectRef idx="2">
-            <a:schemeClr val="accent1"/>
-          </a:effectRef>
-          <a:fontRef idx="minor">
-            <a:schemeClr val="lt1"/>
-          </a:fontRef>
-        </p:style>
-        <p:txBody>
-          <a:bodyPr rtlCol="0" anchor="ctr"/>
-          <a:lstStyle/>
-          <a:p>
-            <a:pPr algn="ctr"/>
-          </a:p>
-        </p:txBody>
-      </p:sp>
-      <p:sp>
-        <p:nvSpPr>
-          <p:cNvPr id="22" name="TextBox 21"/>
-          <p:cNvSpPr txBox="1"/>
-          <p:nvPr/>
-        </p:nvSpPr>
-        <p:spPr>
-          <a:xfrm>
-            <a:off x="6016752" y="3666744"/>
-            <a:ext cx="2459736" cy="896112"/>
-          </a:xfrm>
-          <a:prstGeom prst="rect">
-            <a:avLst/>
-          </a:prstGeom>
-          <a:noFill/>
-        </p:spPr>
-        <p:txBody>
-          <a:bodyPr wrap="square" anchor="ctr" lIns="0" rIns="0" tIns="0" bIns="0">
-            <a:spAutoFit/>
-          </a:bodyPr>
-          <a:lstStyle/>
-          <a:p>
-            <a:pPr algn="l"/>
-            <a:r>
-              <a:rPr sz="1200" b="1">
-                <a:solidFill>
-                  <a:srgbClr val="3FB950"/>
-                </a:solidFill>
-                <a:latin typeface="Consolas"/>
-              </a:rPr>
-              <a:t>inietta pesi</a:t>
-            </a:r>
-          </a:p>
-          <a:p>
-            <a:pPr algn="l"/>
-            <a:r>
-              <a:rPr sz="1000" b="0">
-                <a:solidFill>
-                  <a:srgbClr val="8B949E"/>
-                </a:solidFill>
-                <a:latin typeface="Segoe UI"/>
-              </a:rPr>
-              <a:t>set_initial_value</a:t>
-            </a:r>
-          </a:p>
-        </p:txBody>
-      </p:sp>
-      <p:sp>
-        <p:nvSpPr>
-          <p:cNvPr id="23" name="TextBox 22"/>
-          <p:cNvSpPr txBox="1"/>
-          <p:nvPr/>
-        </p:nvSpPr>
-        <p:spPr>
-          <a:xfrm>
-            <a:off x="8531352" y="3858768"/>
-            <a:ext cx="365760" cy="457200"/>
-          </a:xfrm>
-          <a:prstGeom prst="rect">
-            <a:avLst/>
-          </a:prstGeom>
-          <a:noFill/>
-        </p:spPr>
-        <p:txBody>
-          <a:bodyPr wrap="square" anchor="t" lIns="0" rIns="0" tIns="0" bIns="0">
-            <a:spAutoFit/>
-          </a:bodyPr>
-          <a:lstStyle/>
-          <a:p>
-            <a:pPr algn="l"/>
-            <a:r>
-              <a:rPr sz="2600" b="1">
-                <a:solidFill>
-                  <a:srgbClr val="F5A623"/>
-                </a:solidFill>
-                <a:latin typeface="Segoe UI"/>
-              </a:rPr>
-              <a:t>›</a:t>
-            </a:r>
-          </a:p>
-        </p:txBody>
-      </p:sp>
-      <p:sp>
-        <p:nvSpPr>
-          <p:cNvPr id="24" name="Rounded Rectangle 23"/>
-          <p:cNvSpPr/>
-          <p:nvPr/>
-        </p:nvSpPr>
-        <p:spPr>
-          <a:xfrm>
-            <a:off x="8595360" y="3611880"/>
-            <a:ext cx="2606040" cy="1005840"/>
-          </a:xfrm>
-          <a:prstGeom prst="roundRect">
-            <a:avLst/>
-          </a:prstGeom>
-          <a:solidFill>
-            <a:srgbClr val="1B222E"/>
-          </a:solidFill>
-          <a:ln>
-            <a:noFill/>
-          </a:ln>
-          <a:effectLst/>
-        </p:spPr>
-        <p:style>
-          <a:lnRef idx="1">
-            <a:schemeClr val="accent1"/>
-          </a:lnRef>
-          <a:fillRef idx="3">
-            <a:schemeClr val="accent1"/>
-          </a:fillRef>
-          <a:effectRef idx="2">
-            <a:schemeClr val="accent1"/>
-          </a:effectRef>
-          <a:fontRef idx="minor">
-            <a:schemeClr val="lt1"/>
-          </a:fontRef>
-        </p:style>
-        <p:txBody>
-          <a:bodyPr rtlCol="0" anchor="ctr"/>
-          <a:lstStyle/>
-          <a:p>
-            <a:pPr algn="ctr"/>
-          </a:p>
-        </p:txBody>
-      </p:sp>
-      <p:sp>
-        <p:nvSpPr>
-          <p:cNvPr id="25" name="Rounded Rectangle 24"/>
-          <p:cNvSpPr/>
-          <p:nvPr/>
-        </p:nvSpPr>
-        <p:spPr>
-          <a:xfrm>
-            <a:off x="8686800" y="3657600"/>
-            <a:ext cx="2423160" cy="64008"/>
-          </a:xfrm>
-          <a:prstGeom prst="roundRect">
-            <a:avLst/>
-          </a:prstGeom>
-          <a:solidFill>
-            <a:srgbClr val="3FD0C8"/>
-          </a:solidFill>
-          <a:ln>
-            <a:noFill/>
-          </a:ln>
-          <a:effectLst/>
-        </p:spPr>
-        <p:style>
-          <a:lnRef idx="1">
-            <a:schemeClr val="accent1"/>
-          </a:lnRef>
-          <a:fillRef idx="3">
-            <a:schemeClr val="accent1"/>
-          </a:fillRef>
-          <a:effectRef idx="2">
-            <a:schemeClr val="accent1"/>
-          </a:effectRef>
-          <a:fontRef idx="minor">
-            <a:schemeClr val="lt1"/>
-          </a:fontRef>
-        </p:style>
-        <p:txBody>
-          <a:bodyPr rtlCol="0" anchor="ctr"/>
-          <a:lstStyle/>
-          <a:p>
-            <a:pPr algn="ctr"/>
-          </a:p>
-        </p:txBody>
-      </p:sp>
-      <p:sp>
-        <p:nvSpPr>
-          <p:cNvPr id="26" name="TextBox 25"/>
-          <p:cNvSpPr txBox="1"/>
-          <p:nvPr/>
-        </p:nvSpPr>
-        <p:spPr>
-          <a:xfrm>
-            <a:off x="8668512" y="3666744"/>
-            <a:ext cx="2459736" cy="896112"/>
-          </a:xfrm>
-          <a:prstGeom prst="rect">
-            <a:avLst/>
-          </a:prstGeom>
-          <a:noFill/>
-        </p:spPr>
-        <p:txBody>
-          <a:bodyPr wrap="square" anchor="ctr" lIns="0" rIns="0" tIns="0" bIns="0">
-            <a:spAutoFit/>
-          </a:bodyPr>
-          <a:lstStyle/>
-          <a:p>
-            <a:pPr algn="l"/>
-            <a:r>
-              <a:rPr sz="1200" b="1">
-                <a:solidFill>
-                  <a:srgbClr val="3FD0C8"/>
-                </a:solidFill>
-                <a:latin typeface="Consolas"/>
-              </a:rPr>
-              <a:t>load</a:t>
-            </a:r>
-          </a:p>
-          <a:p>
-            <a:pPr algn="l"/>
-            <a:r>
-              <a:rPr sz="1000" b="0">
-                <a:solidFill>
-                  <a:srgbClr val="8B949E"/>
-                </a:solidFill>
-                <a:latin typeface="Segoe UI"/>
-              </a:rPr>
-              <a:t>verifier freezes</a:t>
-            </a:r>
-          </a:p>
-        </p:txBody>
-      </p:sp>
-      <p:sp>
-        <p:nvSpPr>
-          <p:cNvPr id="27" name="TextBox 26"/>
-          <p:cNvSpPr txBox="1"/>
-          <p:nvPr/>
-        </p:nvSpPr>
-        <p:spPr>
-          <a:xfrm>
-            <a:off x="640080" y="4983480"/>
-            <a:ext cx="10972800" cy="1280160"/>
+            <a:off x="640080" y="5074920"/>
+            <a:ext cx="10972800" cy="1188720"/>
           </a:xfrm>
           <a:prstGeom prst="rect">
             <a:avLst/>
@@ -9647,7 +10508,7 @@
                 </a:solidFill>
                 <a:latin typeface="Segoe UI"/>
               </a:rPr>
-              <a:t>Modelli noti a priori:</a:t>
+              <a:t>Applicata a tutte e 3 le pipeline</a:t>
             </a:r>
             <a:r>
               <a:rPr sz="1300" b="0">
@@ -9656,7 +10517,7 @@
                 </a:solidFill>
                 <a:latin typeface="Segoe UI"/>
               </a:rPr>
-              <a:t>  precompili offline tutte le architetture → a runtime inserire QUALSIASI modello di quelle arch = solo un load (~ms), mai clang.</a:t>
+              <a:t>  (hardcoded · template · modular): solo COME si legge la mappa, l'architettura dispatcher + tail-call resta identica.</a:t>
             </a:r>
           </a:p>
           <a:p>
@@ -9668,11 +10529,11 @@
             <a:r>
               <a:rPr sz="1300" b="1">
                 <a:solidFill>
-                  <a:srgbClr val="8B949E"/>
+                  <a:srgbClr val="3FB950"/>
                 </a:solidFill>
                 <a:latin typeface="Segoe UI"/>
               </a:rPr>
-              <a:t>Costo:</a:t>
+              <a:t>Verifica:</a:t>
             </a:r>
             <a:r>
               <a:rPr sz="1300" b="0">
@@ -9681,7 +10542,7 @@
                 </a:solidFill>
                 <a:latin typeface="Segoe UI"/>
               </a:rPr>
-              <a:t>  i pesi in .rodata sono load (non immediati) → c'è un prezzo per-pacchetto, misurato a lato.</a:t>
+              <a:t>  suite kernel PASS su tutte e 3; inferenza invariata; hardcoded scende di 5 lookup/pacchetto.</a:t>
             </a:r>
           </a:p>
         </p:txBody>
@@ -9813,7 +10674,7 @@
                 </a:solidFill>
                 <a:latin typeface="Georgia"/>
               </a:rPr>
-              <a:t>Performance</a:t>
+              <a:t>Abbattere la ricompilazione</a:t>
             </a:r>
           </a:p>
         </p:txBody>
@@ -9848,7 +10709,7 @@
                 </a:solidFill>
                 <a:latin typeface="Segoe UI"/>
               </a:rPr>
-              <a:t>Ricompilazione risolta, ma con un costo per-pacchetto</a:t>
+              <a:t>Tre strade per non pagare clang a ogni modello</a:t>
             </a:r>
           </a:p>
         </p:txBody>
@@ -9862,7 +10723,7 @@
         <p:spPr>
           <a:xfrm>
             <a:off x="640080" y="1874519"/>
-            <a:ext cx="5349240" cy="2103120"/>
+            <a:ext cx="3611880" cy="2331720"/>
           </a:xfrm>
           <a:prstGeom prst="roundRect">
             <a:avLst/>
@@ -9906,7 +10767,301 @@
         <p:spPr>
           <a:xfrm>
             <a:off x="731519" y="1920239"/>
-            <a:ext cx="5166359" cy="64008"/>
+            <a:ext cx="3429000" cy="64008"/>
+          </a:xfrm>
+          <a:prstGeom prst="roundRect">
+            <a:avLst/>
+          </a:prstGeom>
+          <a:solidFill>
+            <a:srgbClr val="F85149"/>
+          </a:solidFill>
+          <a:ln>
+            <a:noFill/>
+          </a:ln>
+          <a:effectLst/>
+        </p:spPr>
+        <p:style>
+          <a:lnRef idx="1">
+            <a:schemeClr val="accent1"/>
+          </a:lnRef>
+          <a:fillRef idx="3">
+            <a:schemeClr val="accent1"/>
+          </a:fillRef>
+          <a:effectRef idx="2">
+            <a:schemeClr val="accent1"/>
+          </a:effectRef>
+          <a:fontRef idx="minor">
+            <a:schemeClr val="lt1"/>
+          </a:fontRef>
+        </p:style>
+        <p:txBody>
+          <a:bodyPr rtlCol="0" anchor="ctr"/>
+          <a:lstStyle/>
+          <a:p>
+            <a:pPr algn="ctr"/>
+          </a:p>
+        </p:txBody>
+      </p:sp>
+      <p:sp>
+        <p:nvSpPr>
+          <p:cNvPr id="8" name="TextBox 7"/>
+          <p:cNvSpPr txBox="1"/>
+          <p:nvPr/>
+        </p:nvSpPr>
+        <p:spPr>
+          <a:xfrm>
+            <a:off x="713231" y="1929384"/>
+            <a:ext cx="3465576" cy="2221991"/>
+          </a:xfrm>
+          <a:prstGeom prst="rect">
+            <a:avLst/>
+          </a:prstGeom>
+          <a:noFill/>
+        </p:spPr>
+        <p:txBody>
+          <a:bodyPr wrap="square" anchor="ctr" lIns="0" rIns="0" tIns="0" bIns="0">
+            <a:spAutoFit/>
+          </a:bodyPr>
+          <a:lstStyle/>
+          <a:p>
+            <a:pPr algn="l"/>
+            <a:r>
+              <a:rPr sz="1300" b="1">
+                <a:solidFill>
+                  <a:srgbClr val="F85149"/>
+                </a:solidFill>
+                <a:latin typeface="Segoe UI"/>
+              </a:rPr>
+              <a:t>literal + BCC  (oggi)</a:t>
+            </a:r>
+          </a:p>
+          <a:p>
+            <a:pPr algn="l"/>
+            <a:r>
+              <a:rPr sz="1150" b="0">
+                <a:solidFill>
+                  <a:srgbClr val="E6EDF3"/>
+                </a:solidFill>
+                <a:latin typeface="Segoe UI"/>
+              </a:rPr>
+              <a:t>Pesi literal nel C. BCC = clang a runtime: ogni modello ricompila tutto.</a:t>
+            </a:r>
+          </a:p>
+          <a:p>
+            <a:pPr algn="l"/>
+            <a:r>
+              <a:rPr sz="1100" b="0">
+                <a:solidFill>
+                  <a:srgbClr val="F85149"/>
+                </a:solidFill>
+                <a:latin typeface="Segoe UI"/>
+              </a:rPr>
+              <a:t>≈99.8% del costo è clang</a:t>
+            </a:r>
+          </a:p>
+        </p:txBody>
+      </p:sp>
+      <p:sp>
+        <p:nvSpPr>
+          <p:cNvPr id="9" name="Rounded Rectangle 8"/>
+          <p:cNvSpPr/>
+          <p:nvPr/>
+        </p:nvSpPr>
+        <p:spPr>
+          <a:xfrm>
+            <a:off x="4389120" y="1874519"/>
+            <a:ext cx="3611880" cy="2331720"/>
+          </a:xfrm>
+          <a:prstGeom prst="roundRect">
+            <a:avLst/>
+          </a:prstGeom>
+          <a:solidFill>
+            <a:srgbClr val="1B222E"/>
+          </a:solidFill>
+          <a:ln>
+            <a:noFill/>
+          </a:ln>
+          <a:effectLst/>
+        </p:spPr>
+        <p:style>
+          <a:lnRef idx="1">
+            <a:schemeClr val="accent1"/>
+          </a:lnRef>
+          <a:fillRef idx="3">
+            <a:schemeClr val="accent1"/>
+          </a:fillRef>
+          <a:effectRef idx="2">
+            <a:schemeClr val="accent1"/>
+          </a:effectRef>
+          <a:fontRef idx="minor">
+            <a:schemeClr val="lt1"/>
+          </a:fontRef>
+        </p:style>
+        <p:txBody>
+          <a:bodyPr rtlCol="0" anchor="ctr"/>
+          <a:lstStyle/>
+          <a:p>
+            <a:pPr algn="ctr"/>
+          </a:p>
+        </p:txBody>
+      </p:sp>
+      <p:sp>
+        <p:nvSpPr>
+          <p:cNvPr id="10" name="Rounded Rectangle 9"/>
+          <p:cNvSpPr/>
+          <p:nvPr/>
+        </p:nvSpPr>
+        <p:spPr>
+          <a:xfrm>
+            <a:off x="4480559" y="1920239"/>
+            <a:ext cx="3429000" cy="64008"/>
+          </a:xfrm>
+          <a:prstGeom prst="roundRect">
+            <a:avLst/>
+          </a:prstGeom>
+          <a:solidFill>
+            <a:srgbClr val="F5A623"/>
+          </a:solidFill>
+          <a:ln>
+            <a:noFill/>
+          </a:ln>
+          <a:effectLst/>
+        </p:spPr>
+        <p:style>
+          <a:lnRef idx="1">
+            <a:schemeClr val="accent1"/>
+          </a:lnRef>
+          <a:fillRef idx="3">
+            <a:schemeClr val="accent1"/>
+          </a:fillRef>
+          <a:effectRef idx="2">
+            <a:schemeClr val="accent1"/>
+          </a:effectRef>
+          <a:fontRef idx="minor">
+            <a:schemeClr val="lt1"/>
+          </a:fontRef>
+        </p:style>
+        <p:txBody>
+          <a:bodyPr rtlCol="0" anchor="ctr"/>
+          <a:lstStyle/>
+          <a:p>
+            <a:pPr algn="ctr"/>
+          </a:p>
+        </p:txBody>
+      </p:sp>
+      <p:sp>
+        <p:nvSpPr>
+          <p:cNvPr id="11" name="TextBox 10"/>
+          <p:cNvSpPr txBox="1"/>
+          <p:nvPr/>
+        </p:nvSpPr>
+        <p:spPr>
+          <a:xfrm>
+            <a:off x="4462272" y="1929384"/>
+            <a:ext cx="3465576" cy="2221991"/>
+          </a:xfrm>
+          <a:prstGeom prst="rect">
+            <a:avLst/>
+          </a:prstGeom>
+          <a:noFill/>
+        </p:spPr>
+        <p:txBody>
+          <a:bodyPr wrap="square" anchor="ctr" lIns="0" rIns="0" tIns="0" bIns="0">
+            <a:spAutoFit/>
+          </a:bodyPr>
+          <a:lstStyle/>
+          <a:p>
+            <a:pPr algn="l"/>
+            <a:r>
+              <a:rPr sz="1300" b="1">
+                <a:solidFill>
+                  <a:srgbClr val="F5A623"/>
+                </a:solidFill>
+                <a:latin typeface="Segoe UI"/>
+              </a:rPr>
+              <a:t>AOT + pesi in .rodata</a:t>
+            </a:r>
+          </a:p>
+          <a:p>
+            <a:pPr algn="l"/>
+            <a:r>
+              <a:rPr sz="1150" b="0">
+                <a:solidFill>
+                  <a:srgbClr val="E6EDF3"/>
+                </a:solidFill>
+                <a:latin typeface="Segoe UI"/>
+              </a:rPr>
+              <a:t>Compili il .o una volta; nuovo modello = inietti i pesi in .rodata (frozen) e ricarichi.</a:t>
+            </a:r>
+          </a:p>
+          <a:p>
+            <a:pPr algn="l"/>
+            <a:r>
+              <a:rPr sz="1100" b="0">
+                <a:solidFill>
+                  <a:srgbClr val="F5A623"/>
+                </a:solidFill>
+                <a:latin typeface="Segoe UI"/>
+              </a:rPr>
+              <a:t>zero clang, ma perde perf</a:t>
+            </a:r>
+          </a:p>
+        </p:txBody>
+      </p:sp>
+      <p:sp>
+        <p:nvSpPr>
+          <p:cNvPr id="12" name="Rounded Rectangle 11"/>
+          <p:cNvSpPr/>
+          <p:nvPr/>
+        </p:nvSpPr>
+        <p:spPr>
+          <a:xfrm>
+            <a:off x="8138160" y="1874519"/>
+            <a:ext cx="3410712" cy="2331720"/>
+          </a:xfrm>
+          <a:prstGeom prst="roundRect">
+            <a:avLst/>
+          </a:prstGeom>
+          <a:solidFill>
+            <a:srgbClr val="1B222E"/>
+          </a:solidFill>
+          <a:ln>
+            <a:noFill/>
+          </a:ln>
+          <a:effectLst/>
+        </p:spPr>
+        <p:style>
+          <a:lnRef idx="1">
+            <a:schemeClr val="accent1"/>
+          </a:lnRef>
+          <a:fillRef idx="3">
+            <a:schemeClr val="accent1"/>
+          </a:fillRef>
+          <a:effectRef idx="2">
+            <a:schemeClr val="accent1"/>
+          </a:effectRef>
+          <a:fontRef idx="minor">
+            <a:schemeClr val="lt1"/>
+          </a:fontRef>
+        </p:style>
+        <p:txBody>
+          <a:bodyPr rtlCol="0" anchor="ctr"/>
+          <a:lstStyle/>
+          <a:p>
+            <a:pPr algn="ctr"/>
+          </a:p>
+        </p:txBody>
+      </p:sp>
+      <p:sp>
+        <p:nvSpPr>
+          <p:cNvPr id="13" name="Rounded Rectangle 12"/>
+          <p:cNvSpPr/>
+          <p:nvPr/>
+        </p:nvSpPr>
+        <p:spPr>
+          <a:xfrm>
+            <a:off x="8229600" y="1920239"/>
+            <a:ext cx="3227832" cy="64008"/>
           </a:xfrm>
           <a:prstGeom prst="roundRect">
             <a:avLst/>
@@ -9943,14 +11098,14 @@
       </p:sp>
       <p:sp>
         <p:nvSpPr>
-          <p:cNvPr id="8" name="TextBox 7"/>
+          <p:cNvPr id="14" name="TextBox 13"/>
           <p:cNvSpPr txBox="1"/>
           <p:nvPr/>
         </p:nvSpPr>
         <p:spPr>
           <a:xfrm>
-            <a:off x="841247" y="2020824"/>
-            <a:ext cx="4983479" cy="411480"/>
+            <a:off x="8211312" y="1929384"/>
+            <a:ext cx="3264408" cy="2221991"/>
           </a:xfrm>
           <a:prstGeom prst="rect">
             <a:avLst/>
@@ -9958,351 +11113,58 @@
           <a:noFill/>
         </p:spPr>
         <p:txBody>
-          <a:bodyPr wrap="square" anchor="t" lIns="0" rIns="0" tIns="0" bIns="0">
+          <a:bodyPr wrap="square" anchor="ctr" lIns="0" rIns="0" tIns="0" bIns="0">
             <a:spAutoFit/>
           </a:bodyPr>
           <a:lstStyle/>
           <a:p>
             <a:pPr algn="l"/>
             <a:r>
-              <a:rPr sz="1350" b="1">
+              <a:rPr sz="1300" b="1">
                 <a:solidFill>
                   <a:srgbClr val="3FB950"/>
                 </a:solidFill>
                 <a:latin typeface="Segoe UI"/>
               </a:rPr>
-              <a:t>Inserire un modello</a:t>
-            </a:r>
-          </a:p>
-        </p:txBody>
-      </p:sp>
-      <p:sp>
-        <p:nvSpPr>
-          <p:cNvPr id="9" name="TextBox 8"/>
-          <p:cNvSpPr txBox="1"/>
-          <p:nvPr/>
-        </p:nvSpPr>
-        <p:spPr>
-          <a:xfrm>
-            <a:off x="868680" y="2542032"/>
-            <a:ext cx="4892040" cy="1554480"/>
-          </a:xfrm>
-          <a:prstGeom prst="rect">
-            <a:avLst/>
-          </a:prstGeom>
-          <a:noFill/>
-        </p:spPr>
-        <p:txBody>
-          <a:bodyPr wrap="square" anchor="t" lIns="0" rIns="0" tIns="0" bIns="0">
-            <a:spAutoFit/>
-          </a:bodyPr>
-          <a:lstStyle/>
-          <a:p>
-            <a:pPr algn="l">
-              <a:spcAft>
-                <a:spcPts val="900"/>
-              </a:spcAft>
-            </a:pPr>
-            <a:r>
-              <a:rPr sz="1250" b="1">
-                <a:solidFill>
-                  <a:srgbClr val="F85149"/>
-                </a:solidFill>
-                <a:latin typeface="Consolas"/>
-              </a:rPr>
-              <a:t>literal (oggi)</a:t>
-            </a:r>
-            <a:r>
-              <a:rPr sz="1200" b="0">
+              <a:t>AOT-literal  (scelta)</a:t>
+            </a:r>
+          </a:p>
+          <a:p>
+            <a:pPr algn="l"/>
+            <a:r>
+              <a:rPr sz="1150" b="0">
                 <a:solidFill>
                   <a:srgbClr val="E6EDF3"/>
                 </a:solidFill>
                 <a:latin typeface="Segoe UI"/>
               </a:rPr>
-              <a:t>   recompile clang  </a:t>
-            </a:r>
-            <a:r>
-              <a:rPr sz="1250" b="1">
-                <a:solidFill>
-                  <a:srgbClr val="F85149"/>
-                </a:solidFill>
-                <a:latin typeface="Consolas"/>
-              </a:rPr>
-              <a:t>~ secondi</a:t>
-            </a:r>
-          </a:p>
-          <a:p>
-            <a:pPr algn="l">
-              <a:spcAft>
-                <a:spcPts val="900"/>
-              </a:spcAft>
-            </a:pPr>
-            <a:r>
-              <a:rPr sz="1250" b="1">
+              <a:t>Compili offline il .o con i pesi literal; a runtime solo load. Clang -O2 già applicato.</a:t>
+            </a:r>
+          </a:p>
+          <a:p>
+            <a:pPr algn="l"/>
+            <a:r>
+              <a:rPr sz="1100" b="0">
                 <a:solidFill>
                   <a:srgbClr val="3FB950"/>
                 </a:solidFill>
-                <a:latin typeface="Consolas"/>
-              </a:rPr>
-              <a:t>rodata (AOT)</a:t>
-            </a:r>
-            <a:r>
-              <a:rPr sz="1200" b="0">
-                <a:solidFill>
-                  <a:srgbClr val="E6EDF3"/>
-                </a:solidFill>
                 <a:latin typeface="Segoe UI"/>
               </a:rPr>
-              <a:t>   inietta + load    </a:t>
-            </a:r>
-            <a:r>
-              <a:rPr sz="1250" b="1">
-                <a:solidFill>
-                  <a:srgbClr val="3FB950"/>
-                </a:solidFill>
-                <a:latin typeface="Consolas"/>
-              </a:rPr>
-              <a:t>2.6 ms</a:t>
-            </a:r>
-          </a:p>
-          <a:p>
-            <a:pPr algn="l">
-              <a:spcAft>
-                <a:spcPts val="900"/>
-              </a:spcAft>
-            </a:pPr>
-            <a:r>
-              <a:rPr sz="1150" b="0">
-                <a:solidFill>
-                  <a:srgbClr val="F5A623"/>
-                </a:solidFill>
-                <a:latin typeface="Segoe UI"/>
-              </a:rPr>
-              <a:t>≈ 1000× più veloce sul redeploy</a:t>
-            </a:r>
-          </a:p>
-        </p:txBody>
-      </p:sp>
-      <p:sp>
-        <p:nvSpPr>
-          <p:cNvPr id="10" name="Rounded Rectangle 9"/>
+              <a:t>zero clang E perf massima</a:t>
+            </a:r>
+          </a:p>
+        </p:txBody>
+      </p:sp>
+      <p:sp>
+        <p:nvSpPr>
+          <p:cNvPr id="15" name="Rounded Rectangle 14"/>
           <p:cNvSpPr/>
           <p:nvPr/>
         </p:nvSpPr>
         <p:spPr>
           <a:xfrm>
-            <a:off x="6199632" y="1874519"/>
-            <a:ext cx="5349240" cy="2103120"/>
-          </a:xfrm>
-          <a:prstGeom prst="roundRect">
-            <a:avLst/>
-          </a:prstGeom>
-          <a:solidFill>
-            <a:srgbClr val="1B222E"/>
-          </a:solidFill>
-          <a:ln>
-            <a:noFill/>
-          </a:ln>
-          <a:effectLst/>
-        </p:spPr>
-        <p:style>
-          <a:lnRef idx="1">
-            <a:schemeClr val="accent1"/>
-          </a:lnRef>
-          <a:fillRef idx="3">
-            <a:schemeClr val="accent1"/>
-          </a:fillRef>
-          <a:effectRef idx="2">
-            <a:schemeClr val="accent1"/>
-          </a:effectRef>
-          <a:fontRef idx="minor">
-            <a:schemeClr val="lt1"/>
-          </a:fontRef>
-        </p:style>
-        <p:txBody>
-          <a:bodyPr rtlCol="0" anchor="ctr"/>
-          <a:lstStyle/>
-          <a:p>
-            <a:pPr algn="ctr"/>
-          </a:p>
-        </p:txBody>
-      </p:sp>
-      <p:sp>
-        <p:nvSpPr>
-          <p:cNvPr id="11" name="Rounded Rectangle 10"/>
-          <p:cNvSpPr/>
-          <p:nvPr/>
-        </p:nvSpPr>
-        <p:spPr>
-          <a:xfrm>
-            <a:off x="6291072" y="1920239"/>
-            <a:ext cx="5166359" cy="64008"/>
-          </a:xfrm>
-          <a:prstGeom prst="roundRect">
-            <a:avLst/>
-          </a:prstGeom>
-          <a:solidFill>
-            <a:srgbClr val="F5A623"/>
-          </a:solidFill>
-          <a:ln>
-            <a:noFill/>
-          </a:ln>
-          <a:effectLst/>
-        </p:spPr>
-        <p:style>
-          <a:lnRef idx="1">
-            <a:schemeClr val="accent1"/>
-          </a:lnRef>
-          <a:fillRef idx="3">
-            <a:schemeClr val="accent1"/>
-          </a:fillRef>
-          <a:effectRef idx="2">
-            <a:schemeClr val="accent1"/>
-          </a:effectRef>
-          <a:fontRef idx="minor">
-            <a:schemeClr val="lt1"/>
-          </a:fontRef>
-        </p:style>
-        <p:txBody>
-          <a:bodyPr rtlCol="0" anchor="ctr"/>
-          <a:lstStyle/>
-          <a:p>
-            <a:pPr algn="ctr"/>
-          </a:p>
-        </p:txBody>
-      </p:sp>
-      <p:sp>
-        <p:nvSpPr>
-          <p:cNvPr id="12" name="TextBox 11"/>
-          <p:cNvSpPr txBox="1"/>
-          <p:nvPr/>
-        </p:nvSpPr>
-        <p:spPr>
-          <a:xfrm>
-            <a:off x="6400800" y="2020824"/>
-            <a:ext cx="4983479" cy="411480"/>
-          </a:xfrm>
-          <a:prstGeom prst="rect">
-            <a:avLst/>
-          </a:prstGeom>
-          <a:noFill/>
-        </p:spPr>
-        <p:txBody>
-          <a:bodyPr wrap="square" anchor="t" lIns="0" rIns="0" tIns="0" bIns="0">
-            <a:spAutoFit/>
-          </a:bodyPr>
-          <a:lstStyle/>
-          <a:p>
-            <a:pPr algn="l"/>
-            <a:r>
-              <a:rPr sz="1350" b="1">
-                <a:solidFill>
-                  <a:srgbClr val="F5A623"/>
-                </a:solidFill>
-                <a:latin typeface="Segoe UI"/>
-              </a:rPr>
-              <a:t>Costo per-pacchetto (full-path)</a:t>
-            </a:r>
-          </a:p>
-        </p:txBody>
-      </p:sp>
-      <p:sp>
-        <p:nvSpPr>
-          <p:cNvPr id="13" name="TextBox 12"/>
-          <p:cNvSpPr txBox="1"/>
-          <p:nvPr/>
-        </p:nvSpPr>
-        <p:spPr>
-          <a:xfrm>
-            <a:off x="6428232" y="2578608"/>
-            <a:ext cx="4892040" cy="1554480"/>
-          </a:xfrm>
-          <a:prstGeom prst="rect">
-            <a:avLst/>
-          </a:prstGeom>
-          <a:noFill/>
-        </p:spPr>
-        <p:txBody>
-          <a:bodyPr wrap="square" anchor="t" lIns="0" rIns="0" tIns="0" bIns="0">
-            <a:spAutoFit/>
-          </a:bodyPr>
-          <a:lstStyle/>
-          <a:p>
-            <a:pPr algn="l">
-              <a:spcAft>
-                <a:spcPts val="600"/>
-              </a:spcAft>
-            </a:pPr>
-            <a:r>
-              <a:rPr sz="1150" b="1">
-                <a:solidFill>
-                  <a:srgbClr val="8B949E"/>
-                </a:solidFill>
-                <a:latin typeface="Consolas"/>
-              </a:rPr>
-              <a:t>            latenza    throughput</a:t>
-            </a:r>
-          </a:p>
-          <a:p>
-            <a:pPr algn="l">
-              <a:spcAft>
-                <a:spcPts val="600"/>
-              </a:spcAft>
-            </a:pPr>
-            <a:r>
-              <a:rPr sz="1200" b="0">
-                <a:solidFill>
-                  <a:srgbClr val="E6EDF3"/>
-                </a:solidFill>
-                <a:latin typeface="Consolas"/>
-              </a:rPr>
-              <a:t>literal   66 ns     15.2 Mpps</a:t>
-            </a:r>
-          </a:p>
-          <a:p>
-            <a:pPr algn="l">
-              <a:spcAft>
-                <a:spcPts val="600"/>
-              </a:spcAft>
-            </a:pPr>
-            <a:r>
-              <a:rPr sz="1200" b="0">
-                <a:solidFill>
-                  <a:srgbClr val="E6EDF3"/>
-                </a:solidFill>
-                <a:latin typeface="Consolas"/>
-              </a:rPr>
-              <a:t>rodata    91 ns     11.0 Mpps</a:t>
-            </a:r>
-          </a:p>
-          <a:p>
-            <a:pPr algn="l">
-              <a:spcAft>
-                <a:spcPts val="600"/>
-              </a:spcAft>
-            </a:pPr>
-            <a:r>
-              <a:rPr sz="1200" b="1">
-                <a:solidFill>
-                  <a:srgbClr val="F5A623"/>
-                </a:solidFill>
-                <a:latin typeface="Consolas"/>
-              </a:rPr>
-              <a:t>delta     +38%       −27%</a:t>
-            </a:r>
-          </a:p>
-        </p:txBody>
-      </p:sp>
-      <p:sp>
-        <p:nvSpPr>
-          <p:cNvPr id="14" name="Rounded Rectangle 13"/>
-          <p:cNvSpPr/>
-          <p:nvPr/>
-        </p:nvSpPr>
-        <p:spPr>
-          <a:xfrm>
-            <a:off x="640080" y="4206240"/>
-            <a:ext cx="10908792" cy="960120"/>
+            <a:off x="640080" y="4526280"/>
+            <a:ext cx="10972800" cy="822960"/>
           </a:xfrm>
           <a:prstGeom prst="roundRect">
             <a:avLst/>
@@ -10339,58 +11201,14 @@
       </p:sp>
       <p:sp>
         <p:nvSpPr>
-          <p:cNvPr id="15" name="Rounded Rectangle 14"/>
-          <p:cNvSpPr/>
-          <p:nvPr/>
-        </p:nvSpPr>
-        <p:spPr>
-          <a:xfrm>
-            <a:off x="731519" y="4251959"/>
-            <a:ext cx="10725912" cy="64008"/>
-          </a:xfrm>
-          <a:prstGeom prst="roundRect">
-            <a:avLst/>
-          </a:prstGeom>
-          <a:solidFill>
-            <a:srgbClr val="58A6FF"/>
-          </a:solidFill>
-          <a:ln>
-            <a:noFill/>
-          </a:ln>
-          <a:effectLst/>
-        </p:spPr>
-        <p:style>
-          <a:lnRef idx="1">
-            <a:schemeClr val="accent1"/>
-          </a:lnRef>
-          <a:fillRef idx="3">
-            <a:schemeClr val="accent1"/>
-          </a:fillRef>
-          <a:effectRef idx="2">
-            <a:schemeClr val="accent1"/>
-          </a:effectRef>
-          <a:fontRef idx="minor">
-            <a:schemeClr val="lt1"/>
-          </a:fontRef>
-        </p:style>
-        <p:txBody>
-          <a:bodyPr rtlCol="0" anchor="ctr"/>
-          <a:lstStyle/>
-          <a:p>
-            <a:pPr algn="ctr"/>
-          </a:p>
-        </p:txBody>
-      </p:sp>
-      <p:sp>
-        <p:nvSpPr>
           <p:cNvPr id="16" name="TextBox 15"/>
           <p:cNvSpPr txBox="1"/>
           <p:nvPr/>
         </p:nvSpPr>
         <p:spPr>
           <a:xfrm>
-            <a:off x="713231" y="4261103"/>
-            <a:ext cx="10762488" cy="850392"/>
+            <a:off x="841248" y="4663440"/>
+            <a:ext cx="10607040" cy="548640"/>
           </a:xfrm>
           <a:prstGeom prst="rect">
             <a:avLst/>
@@ -10405,22 +11223,22 @@
           <a:p>
             <a:pPr algn="l"/>
             <a:r>
-              <a:rPr sz="1300" b="1">
+              <a:rPr sz="1250" b="1">
                 <a:solidFill>
                   <a:srgbClr val="58A6FF"/>
                 </a:solidFill>
                 <a:latin typeface="Segoe UI"/>
               </a:rPr>
-              <a:t>Diluizione:</a:t>
-            </a:r>
-            <a:r>
-              <a:rPr sz="1250" b="0">
+              <a:t>Perché .rodata perde e literal no: </a:t>
+            </a:r>
+            <a:r>
+              <a:rPr sz="1200" b="0">
                 <a:solidFill>
                   <a:srgbClr val="E6EDF3"/>
                 </a:solidFill>
                 <a:latin typeface="Segoe UI"/>
               </a:rPr>
-              <a:t>  l'inferenza sola costa +94%, ma nel programma completo (parse/mappe/redirect condivisi) scende a +38%. rodata resta 4× più snello del template.</a:t>
+              <a:t>clang riduce ogni peso (x·0 sparisce, x·8 → shift). In .rodata i pesi sono un LOAD generico a runtime → moltiplicazione piena. Nel .o literal la riduzione è già cotta nel bytecode.</a:t>
             </a:r>
           </a:p>
         </p:txBody>
@@ -10433,8 +11251,8 @@
         </p:nvSpPr>
         <p:spPr>
           <a:xfrm>
-            <a:off x="640080" y="5394960"/>
-            <a:ext cx="10972800" cy="1097280"/>
+            <a:off x="640080" y="5623560"/>
+            <a:ext cx="10972800" cy="914400"/>
           </a:xfrm>
           <a:prstGeom prst="rect">
             <a:avLst/>
@@ -10455,54 +11273,20 @@
             <a:r>
               <a:rPr sz="1300" b="1">
                 <a:solidFill>
-                  <a:srgbClr val="8B949E"/>
+                  <a:srgbClr val="F5A623"/>
                 </a:solidFill>
                 <a:latin typeface="Segoe UI"/>
               </a:rPr>
-              <a:t>Bivio:</a:t>
-            </a:r>
-          </a:p>
-          <a:p>
-            <a:pPr algn="l">
-              <a:spcAft>
-                <a:spcPts val="600"/>
-              </a:spcAft>
-            </a:pPr>
-            <a:r>
-              <a:rPr sz="1250" b="1">
-                <a:solidFill>
-                  <a:srgbClr val="3FB950"/>
-                </a:solidFill>
-                <a:latin typeface="Consolas"/>
-              </a:rPr>
-              <a:t>rodata</a:t>
-            </a:r>
-            <a:r>
-              <a:rPr sz="1250" b="0">
+              <a:t>Modelli noti a priori</a:t>
+            </a:r>
+            <a:r>
+              <a:rPr sz="1300" b="0">
                 <a:solidFill>
                   <a:srgbClr val="E6EDF3"/>
                 </a:solidFill>
                 <a:latin typeface="Segoe UI"/>
               </a:rPr>
-              <a:t> = recompile-free, −27% throughput.    </a:t>
-            </a:r>
-            <a:r>
-              <a:rPr sz="1250" b="1">
-                <a:solidFill>
-                  <a:srgbClr val="F5A623"/>
-                </a:solidFill>
-                <a:latin typeface="Consolas"/>
-              </a:rPr>
-              <a:t>patch immediati bytecode</a:t>
-            </a:r>
-            <a:r>
-              <a:rPr sz="1250" b="0">
-                <a:solidFill>
-                  <a:srgbClr val="E6EDF3"/>
-                </a:solidFill>
-                <a:latin typeface="Segoe UI"/>
-              </a:rPr>
-              <a:t> = recompile-free E performance identica ai literal (0% perdita), più lavoro.</a:t>
+              <a:t>  (l'ipotesi dell'hardcoded): precompili offline tutte le architetture → inserire un modello = solo load.</a:t>
             </a:r>
           </a:p>
         </p:txBody>
@@ -10634,7 +11418,7 @@
                 </a:solidFill>
                 <a:latin typeface="Georgia"/>
               </a:rPr>
-              <a:t>Il vecchio hardcoded con il nuovo IV</a:t>
+              <a:t>AOT-literal: come funziona</a:t>
             </a:r>
           </a:p>
         </p:txBody>
@@ -10669,21 +11453,2019 @@
                 </a:solidFill>
                 <a:latin typeface="Segoe UI"/>
               </a:rPr>
-              <a:t>La generalizzazione non costa nulla al modello 65-4-4-7</a:t>
-            </a:r>
-          </a:p>
-        </p:txBody>
-      </p:sp>
-      <p:sp>
-        <p:nvSpPr>
-          <p:cNvPr id="6" name="Rounded Rectangle 5"/>
+              <a:t>Compila offline una volta, a runtime solo load — numeri reali</a:t>
+            </a:r>
+          </a:p>
+        </p:txBody>
+      </p:sp>
+      <p:sp>
+        <p:nvSpPr>
+          <p:cNvPr id="6" name="Rectangle 5"/>
           <p:cNvSpPr/>
           <p:nvPr/>
         </p:nvSpPr>
         <p:spPr>
           <a:xfrm>
-            <a:off x="640080" y="1920240"/>
-            <a:ext cx="10908792" cy="914400"/>
+            <a:off x="640080" y="1828800"/>
+            <a:ext cx="5349240" cy="384048"/>
+          </a:xfrm>
+          <a:prstGeom prst="rect">
+            <a:avLst/>
+          </a:prstGeom>
+          <a:noFill/>
+          <a:ln>
+            <a:noFill/>
+          </a:ln>
+          <a:effectLst/>
+        </p:spPr>
+        <p:style>
+          <a:lnRef idx="1">
+            <a:schemeClr val="accent1"/>
+          </a:lnRef>
+          <a:fillRef idx="3">
+            <a:schemeClr val="accent1"/>
+          </a:fillRef>
+          <a:effectRef idx="2">
+            <a:schemeClr val="accent1"/>
+          </a:effectRef>
+          <a:fontRef idx="minor">
+            <a:schemeClr val="lt1"/>
+          </a:fontRef>
+        </p:style>
+        <p:txBody>
+          <a:bodyPr rtlCol="0" anchor="ctr"/>
+          <a:lstStyle/>
+          <a:p>
+            <a:pPr algn="ctr"/>
+          </a:p>
+        </p:txBody>
+      </p:sp>
+      <p:sp>
+        <p:nvSpPr>
+          <p:cNvPr id="7" name="TextBox 6"/>
+          <p:cNvSpPr txBox="1"/>
+          <p:nvPr/>
+        </p:nvSpPr>
+        <p:spPr>
+          <a:xfrm>
+            <a:off x="658368" y="1828800"/>
+            <a:ext cx="5303520" cy="365760"/>
+          </a:xfrm>
+          <a:prstGeom prst="rect">
+            <a:avLst/>
+          </a:prstGeom>
+          <a:noFill/>
+        </p:spPr>
+        <p:txBody>
+          <a:bodyPr wrap="square" anchor="t" lIns="0" rIns="0" tIns="0" bIns="0">
+            <a:spAutoFit/>
+          </a:bodyPr>
+          <a:lstStyle/>
+          <a:p>
+            <a:pPr algn="l"/>
+            <a:r>
+              <a:rPr sz="1200" b="1">
+                <a:solidFill>
+                  <a:srgbClr val="F5A623"/>
+                </a:solidFill>
+                <a:latin typeface="Segoe UI"/>
+              </a:rPr>
+              <a:t>OFFLINE  ·  build box, una volta</a:t>
+            </a:r>
+          </a:p>
+        </p:txBody>
+      </p:sp>
+      <p:sp>
+        <p:nvSpPr>
+          <p:cNvPr id="8" name="Rounded Rectangle 7"/>
+          <p:cNvSpPr/>
+          <p:nvPr/>
+        </p:nvSpPr>
+        <p:spPr>
+          <a:xfrm>
+            <a:off x="640080" y="2212848"/>
+            <a:ext cx="2606040" cy="914400"/>
+          </a:xfrm>
+          <a:prstGeom prst="roundRect">
+            <a:avLst/>
+          </a:prstGeom>
+          <a:solidFill>
+            <a:srgbClr val="1B222E"/>
+          </a:solidFill>
+          <a:ln>
+            <a:noFill/>
+          </a:ln>
+          <a:effectLst/>
+        </p:spPr>
+        <p:style>
+          <a:lnRef idx="1">
+            <a:schemeClr val="accent1"/>
+          </a:lnRef>
+          <a:fillRef idx="3">
+            <a:schemeClr val="accent1"/>
+          </a:fillRef>
+          <a:effectRef idx="2">
+            <a:schemeClr val="accent1"/>
+          </a:effectRef>
+          <a:fontRef idx="minor">
+            <a:schemeClr val="lt1"/>
+          </a:fontRef>
+        </p:style>
+        <p:txBody>
+          <a:bodyPr rtlCol="0" anchor="ctr"/>
+          <a:lstStyle/>
+          <a:p>
+            <a:pPr algn="ctr"/>
+          </a:p>
+        </p:txBody>
+      </p:sp>
+      <p:sp>
+        <p:nvSpPr>
+          <p:cNvPr id="9" name="Rounded Rectangle 8"/>
+          <p:cNvSpPr/>
+          <p:nvPr/>
+        </p:nvSpPr>
+        <p:spPr>
+          <a:xfrm>
+            <a:off x="731519" y="2258568"/>
+            <a:ext cx="2423160" cy="64008"/>
+          </a:xfrm>
+          <a:prstGeom prst="roundRect">
+            <a:avLst/>
+          </a:prstGeom>
+          <a:solidFill>
+            <a:srgbClr val="58A6FF"/>
+          </a:solidFill>
+          <a:ln>
+            <a:noFill/>
+          </a:ln>
+          <a:effectLst/>
+        </p:spPr>
+        <p:style>
+          <a:lnRef idx="1">
+            <a:schemeClr val="accent1"/>
+          </a:lnRef>
+          <a:fillRef idx="3">
+            <a:schemeClr val="accent1"/>
+          </a:fillRef>
+          <a:effectRef idx="2">
+            <a:schemeClr val="accent1"/>
+          </a:effectRef>
+          <a:fontRef idx="minor">
+            <a:schemeClr val="lt1"/>
+          </a:fontRef>
+        </p:style>
+        <p:txBody>
+          <a:bodyPr rtlCol="0" anchor="ctr"/>
+          <a:lstStyle/>
+          <a:p>
+            <a:pPr algn="ctr"/>
+          </a:p>
+        </p:txBody>
+      </p:sp>
+      <p:sp>
+        <p:nvSpPr>
+          <p:cNvPr id="10" name="TextBox 9"/>
+          <p:cNvSpPr txBox="1"/>
+          <p:nvPr/>
+        </p:nvSpPr>
+        <p:spPr>
+          <a:xfrm>
+            <a:off x="713231" y="2267712"/>
+            <a:ext cx="2459736" cy="804672"/>
+          </a:xfrm>
+          <a:prstGeom prst="rect">
+            <a:avLst/>
+          </a:prstGeom>
+          <a:noFill/>
+        </p:spPr>
+        <p:txBody>
+          <a:bodyPr wrap="square" anchor="ctr" lIns="0" rIns="0" tIns="0" bIns="0">
+            <a:spAutoFit/>
+          </a:bodyPr>
+          <a:lstStyle/>
+          <a:p>
+            <a:pPr algn="l"/>
+            <a:r>
+              <a:rPr sz="1100" b="1">
+                <a:solidFill>
+                  <a:srgbClr val="58A6FF"/>
+                </a:solidFill>
+                <a:latin typeface="Consolas"/>
+              </a:rPr>
+              <a:t>gen_full_c.py</a:t>
+            </a:r>
+          </a:p>
+          <a:p>
+            <a:pPr algn="l"/>
+            <a:r>
+              <a:rPr sz="1000" b="0">
+                <a:solidFill>
+                  <a:srgbClr val="8B949E"/>
+                </a:solidFill>
+                <a:latin typeface="Segoe UI"/>
+              </a:rPr>
+              <a:t>pesi literal → .bpf.c</a:t>
+            </a:r>
+          </a:p>
+        </p:txBody>
+      </p:sp>
+      <p:sp>
+        <p:nvSpPr>
+          <p:cNvPr id="11" name="TextBox 10"/>
+          <p:cNvSpPr txBox="1"/>
+          <p:nvPr/>
+        </p:nvSpPr>
+        <p:spPr>
+          <a:xfrm>
+            <a:off x="3227832" y="2432304"/>
+            <a:ext cx="365760" cy="457200"/>
+          </a:xfrm>
+          <a:prstGeom prst="rect">
+            <a:avLst/>
+          </a:prstGeom>
+          <a:noFill/>
+        </p:spPr>
+        <p:txBody>
+          <a:bodyPr wrap="square" anchor="t" lIns="0" rIns="0" tIns="0" bIns="0">
+            <a:spAutoFit/>
+          </a:bodyPr>
+          <a:lstStyle/>
+          <a:p>
+            <a:pPr algn="l"/>
+            <a:r>
+              <a:rPr sz="2600" b="1">
+                <a:solidFill>
+                  <a:srgbClr val="F5A623"/>
+                </a:solidFill>
+                <a:latin typeface="Segoe UI"/>
+              </a:rPr>
+              <a:t>›</a:t>
+            </a:r>
+          </a:p>
+        </p:txBody>
+      </p:sp>
+      <p:sp>
+        <p:nvSpPr>
+          <p:cNvPr id="12" name="Rounded Rectangle 11"/>
+          <p:cNvSpPr/>
+          <p:nvPr/>
+        </p:nvSpPr>
+        <p:spPr>
+          <a:xfrm>
+            <a:off x="3291839" y="2212848"/>
+            <a:ext cx="2606040" cy="914400"/>
+          </a:xfrm>
+          <a:prstGeom prst="roundRect">
+            <a:avLst/>
+          </a:prstGeom>
+          <a:solidFill>
+            <a:srgbClr val="1B222E"/>
+          </a:solidFill>
+          <a:ln>
+            <a:noFill/>
+          </a:ln>
+          <a:effectLst/>
+        </p:spPr>
+        <p:style>
+          <a:lnRef idx="1">
+            <a:schemeClr val="accent1"/>
+          </a:lnRef>
+          <a:fillRef idx="3">
+            <a:schemeClr val="accent1"/>
+          </a:fillRef>
+          <a:effectRef idx="2">
+            <a:schemeClr val="accent1"/>
+          </a:effectRef>
+          <a:fontRef idx="minor">
+            <a:schemeClr val="lt1"/>
+          </a:fontRef>
+        </p:style>
+        <p:txBody>
+          <a:bodyPr rtlCol="0" anchor="ctr"/>
+          <a:lstStyle/>
+          <a:p>
+            <a:pPr algn="ctr"/>
+          </a:p>
+        </p:txBody>
+      </p:sp>
+      <p:sp>
+        <p:nvSpPr>
+          <p:cNvPr id="13" name="Rounded Rectangle 12"/>
+          <p:cNvSpPr/>
+          <p:nvPr/>
+        </p:nvSpPr>
+        <p:spPr>
+          <a:xfrm>
+            <a:off x="3383279" y="2258568"/>
+            <a:ext cx="2423160" cy="64008"/>
+          </a:xfrm>
+          <a:prstGeom prst="roundRect">
+            <a:avLst/>
+          </a:prstGeom>
+          <a:solidFill>
+            <a:srgbClr val="F5A623"/>
+          </a:solidFill>
+          <a:ln>
+            <a:noFill/>
+          </a:ln>
+          <a:effectLst/>
+        </p:spPr>
+        <p:style>
+          <a:lnRef idx="1">
+            <a:schemeClr val="accent1"/>
+          </a:lnRef>
+          <a:fillRef idx="3">
+            <a:schemeClr val="accent1"/>
+          </a:fillRef>
+          <a:effectRef idx="2">
+            <a:schemeClr val="accent1"/>
+          </a:effectRef>
+          <a:fontRef idx="minor">
+            <a:schemeClr val="lt1"/>
+          </a:fontRef>
+        </p:style>
+        <p:txBody>
+          <a:bodyPr rtlCol="0" anchor="ctr"/>
+          <a:lstStyle/>
+          <a:p>
+            <a:pPr algn="ctr"/>
+          </a:p>
+        </p:txBody>
+      </p:sp>
+      <p:sp>
+        <p:nvSpPr>
+          <p:cNvPr id="14" name="TextBox 13"/>
+          <p:cNvSpPr txBox="1"/>
+          <p:nvPr/>
+        </p:nvSpPr>
+        <p:spPr>
+          <a:xfrm>
+            <a:off x="3364991" y="2267712"/>
+            <a:ext cx="2459736" cy="804672"/>
+          </a:xfrm>
+          <a:prstGeom prst="rect">
+            <a:avLst/>
+          </a:prstGeom>
+          <a:noFill/>
+        </p:spPr>
+        <p:txBody>
+          <a:bodyPr wrap="square" anchor="ctr" lIns="0" rIns="0" tIns="0" bIns="0">
+            <a:spAutoFit/>
+          </a:bodyPr>
+          <a:lstStyle/>
+          <a:p>
+            <a:pPr algn="l"/>
+            <a:r>
+              <a:rPr sz="1100" b="1">
+                <a:solidFill>
+                  <a:srgbClr val="F5A623"/>
+                </a:solidFill>
+                <a:latin typeface="Consolas"/>
+              </a:rPr>
+              <a:t>clang -O2 -target bpf</a:t>
+            </a:r>
+          </a:p>
+          <a:p>
+            <a:pPr algn="l"/>
+            <a:r>
+              <a:rPr sz="1000" b="0">
+                <a:solidFill>
+                  <a:srgbClr val="8B949E"/>
+                </a:solidFill>
+                <a:latin typeface="Segoe UI"/>
+              </a:rPr>
+              <a:t>→ model.o</a:t>
+            </a:r>
+          </a:p>
+        </p:txBody>
+      </p:sp>
+      <p:sp>
+        <p:nvSpPr>
+          <p:cNvPr id="15" name="Rectangle 14"/>
+          <p:cNvSpPr/>
+          <p:nvPr/>
+        </p:nvSpPr>
+        <p:spPr>
+          <a:xfrm>
+            <a:off x="6199632" y="1828800"/>
+            <a:ext cx="5349240" cy="384048"/>
+          </a:xfrm>
+          <a:prstGeom prst="rect">
+            <a:avLst/>
+          </a:prstGeom>
+          <a:noFill/>
+          <a:ln>
+            <a:noFill/>
+          </a:ln>
+          <a:effectLst/>
+        </p:spPr>
+        <p:style>
+          <a:lnRef idx="1">
+            <a:schemeClr val="accent1"/>
+          </a:lnRef>
+          <a:fillRef idx="3">
+            <a:schemeClr val="accent1"/>
+          </a:fillRef>
+          <a:effectRef idx="2">
+            <a:schemeClr val="accent1"/>
+          </a:effectRef>
+          <a:fontRef idx="minor">
+            <a:schemeClr val="lt1"/>
+          </a:fontRef>
+        </p:style>
+        <p:txBody>
+          <a:bodyPr rtlCol="0" anchor="ctr"/>
+          <a:lstStyle/>
+          <a:p>
+            <a:pPr algn="ctr"/>
+          </a:p>
+        </p:txBody>
+      </p:sp>
+      <p:sp>
+        <p:nvSpPr>
+          <p:cNvPr id="16" name="TextBox 15"/>
+          <p:cNvSpPr txBox="1"/>
+          <p:nvPr/>
+        </p:nvSpPr>
+        <p:spPr>
+          <a:xfrm>
+            <a:off x="6217920" y="1828800"/>
+            <a:ext cx="5303520" cy="365760"/>
+          </a:xfrm>
+          <a:prstGeom prst="rect">
+            <a:avLst/>
+          </a:prstGeom>
+          <a:noFill/>
+        </p:spPr>
+        <p:txBody>
+          <a:bodyPr wrap="square" anchor="t" lIns="0" rIns="0" tIns="0" bIns="0">
+            <a:spAutoFit/>
+          </a:bodyPr>
+          <a:lstStyle/>
+          <a:p>
+            <a:pPr algn="l"/>
+            <a:r>
+              <a:rPr sz="1200" b="1">
+                <a:solidFill>
+                  <a:srgbClr val="3FB950"/>
+                </a:solidFill>
+                <a:latin typeface="Segoe UI"/>
+              </a:rPr>
+              <a:t>RUNTIME  ·  nodo datapath, per deploy</a:t>
+            </a:r>
+          </a:p>
+        </p:txBody>
+      </p:sp>
+      <p:sp>
+        <p:nvSpPr>
+          <p:cNvPr id="17" name="Rounded Rectangle 16"/>
+          <p:cNvSpPr/>
+          <p:nvPr/>
+        </p:nvSpPr>
+        <p:spPr>
+          <a:xfrm>
+            <a:off x="6199632" y="2212848"/>
+            <a:ext cx="2606040" cy="914400"/>
+          </a:xfrm>
+          <a:prstGeom prst="roundRect">
+            <a:avLst/>
+          </a:prstGeom>
+          <a:solidFill>
+            <a:srgbClr val="1B222E"/>
+          </a:solidFill>
+          <a:ln>
+            <a:noFill/>
+          </a:ln>
+          <a:effectLst/>
+        </p:spPr>
+        <p:style>
+          <a:lnRef idx="1">
+            <a:schemeClr val="accent1"/>
+          </a:lnRef>
+          <a:fillRef idx="3">
+            <a:schemeClr val="accent1"/>
+          </a:fillRef>
+          <a:effectRef idx="2">
+            <a:schemeClr val="accent1"/>
+          </a:effectRef>
+          <a:fontRef idx="minor">
+            <a:schemeClr val="lt1"/>
+          </a:fontRef>
+        </p:style>
+        <p:txBody>
+          <a:bodyPr rtlCol="0" anchor="ctr"/>
+          <a:lstStyle/>
+          <a:p>
+            <a:pPr algn="ctr"/>
+          </a:p>
+        </p:txBody>
+      </p:sp>
+      <p:sp>
+        <p:nvSpPr>
+          <p:cNvPr id="18" name="Rounded Rectangle 17"/>
+          <p:cNvSpPr/>
+          <p:nvPr/>
+        </p:nvSpPr>
+        <p:spPr>
+          <a:xfrm>
+            <a:off x="6291072" y="2258568"/>
+            <a:ext cx="2423160" cy="64008"/>
+          </a:xfrm>
+          <a:prstGeom prst="roundRect">
+            <a:avLst/>
+          </a:prstGeom>
+          <a:solidFill>
+            <a:srgbClr val="3FB950"/>
+          </a:solidFill>
+          <a:ln>
+            <a:noFill/>
+          </a:ln>
+          <a:effectLst/>
+        </p:spPr>
+        <p:style>
+          <a:lnRef idx="1">
+            <a:schemeClr val="accent1"/>
+          </a:lnRef>
+          <a:fillRef idx="3">
+            <a:schemeClr val="accent1"/>
+          </a:fillRef>
+          <a:effectRef idx="2">
+            <a:schemeClr val="accent1"/>
+          </a:effectRef>
+          <a:fontRef idx="minor">
+            <a:schemeClr val="lt1"/>
+          </a:fontRef>
+        </p:style>
+        <p:txBody>
+          <a:bodyPr rtlCol="0" anchor="ctr"/>
+          <a:lstStyle/>
+          <a:p>
+            <a:pPr algn="ctr"/>
+          </a:p>
+        </p:txBody>
+      </p:sp>
+      <p:sp>
+        <p:nvSpPr>
+          <p:cNvPr id="19" name="TextBox 18"/>
+          <p:cNvSpPr txBox="1"/>
+          <p:nvPr/>
+        </p:nvSpPr>
+        <p:spPr>
+          <a:xfrm>
+            <a:off x="6272784" y="2267712"/>
+            <a:ext cx="2459736" cy="804672"/>
+          </a:xfrm>
+          <a:prstGeom prst="rect">
+            <a:avLst/>
+          </a:prstGeom>
+          <a:noFill/>
+        </p:spPr>
+        <p:txBody>
+          <a:bodyPr wrap="square" anchor="ctr" lIns="0" rIns="0" tIns="0" bIns="0">
+            <a:spAutoFit/>
+          </a:bodyPr>
+          <a:lstStyle/>
+          <a:p>
+            <a:pPr algn="l"/>
+            <a:r>
+              <a:rPr sz="1100" b="1">
+                <a:solidFill>
+                  <a:srgbClr val="3FB950"/>
+                </a:solidFill>
+                <a:latin typeface="Consolas"/>
+              </a:rPr>
+              <a:t>bpf_object__open</a:t>
+            </a:r>
+          </a:p>
+          <a:p>
+            <a:pPr algn="l"/>
+            <a:r>
+              <a:rPr sz="1000" b="0">
+                <a:solidFill>
+                  <a:srgbClr val="8B949E"/>
+                </a:solidFill>
+                <a:latin typeface="Segoe UI"/>
+              </a:rPr>
+              <a:t>+ load</a:t>
+            </a:r>
+          </a:p>
+        </p:txBody>
+      </p:sp>
+      <p:sp>
+        <p:nvSpPr>
+          <p:cNvPr id="20" name="TextBox 19"/>
+          <p:cNvSpPr txBox="1"/>
+          <p:nvPr/>
+        </p:nvSpPr>
+        <p:spPr>
+          <a:xfrm>
+            <a:off x="8787384" y="2432304"/>
+            <a:ext cx="365760" cy="457200"/>
+          </a:xfrm>
+          <a:prstGeom prst="rect">
+            <a:avLst/>
+          </a:prstGeom>
+          <a:noFill/>
+        </p:spPr>
+        <p:txBody>
+          <a:bodyPr wrap="square" anchor="t" lIns="0" rIns="0" tIns="0" bIns="0">
+            <a:spAutoFit/>
+          </a:bodyPr>
+          <a:lstStyle/>
+          <a:p>
+            <a:pPr algn="l"/>
+            <a:r>
+              <a:rPr sz="2600" b="1">
+                <a:solidFill>
+                  <a:srgbClr val="F5A623"/>
+                </a:solidFill>
+                <a:latin typeface="Segoe UI"/>
+              </a:rPr>
+              <a:t>›</a:t>
+            </a:r>
+          </a:p>
+        </p:txBody>
+      </p:sp>
+      <p:sp>
+        <p:nvSpPr>
+          <p:cNvPr id="21" name="Rounded Rectangle 20"/>
+          <p:cNvSpPr/>
+          <p:nvPr/>
+        </p:nvSpPr>
+        <p:spPr>
+          <a:xfrm>
+            <a:off x="8851392" y="2212848"/>
+            <a:ext cx="2606040" cy="914400"/>
+          </a:xfrm>
+          <a:prstGeom prst="roundRect">
+            <a:avLst/>
+          </a:prstGeom>
+          <a:solidFill>
+            <a:srgbClr val="1B222E"/>
+          </a:solidFill>
+          <a:ln>
+            <a:noFill/>
+          </a:ln>
+          <a:effectLst/>
+        </p:spPr>
+        <p:style>
+          <a:lnRef idx="1">
+            <a:schemeClr val="accent1"/>
+          </a:lnRef>
+          <a:fillRef idx="3">
+            <a:schemeClr val="accent1"/>
+          </a:fillRef>
+          <a:effectRef idx="2">
+            <a:schemeClr val="accent1"/>
+          </a:effectRef>
+          <a:fontRef idx="minor">
+            <a:schemeClr val="lt1"/>
+          </a:fontRef>
+        </p:style>
+        <p:txBody>
+          <a:bodyPr rtlCol="0" anchor="ctr"/>
+          <a:lstStyle/>
+          <a:p>
+            <a:pPr algn="ctr"/>
+          </a:p>
+        </p:txBody>
+      </p:sp>
+      <p:sp>
+        <p:nvSpPr>
+          <p:cNvPr id="22" name="Rounded Rectangle 21"/>
+          <p:cNvSpPr/>
+          <p:nvPr/>
+        </p:nvSpPr>
+        <p:spPr>
+          <a:xfrm>
+            <a:off x="8942832" y="2258568"/>
+            <a:ext cx="2423160" cy="64008"/>
+          </a:xfrm>
+          <a:prstGeom prst="roundRect">
+            <a:avLst/>
+          </a:prstGeom>
+          <a:solidFill>
+            <a:srgbClr val="3FD0C8"/>
+          </a:solidFill>
+          <a:ln>
+            <a:noFill/>
+          </a:ln>
+          <a:effectLst/>
+        </p:spPr>
+        <p:style>
+          <a:lnRef idx="1">
+            <a:schemeClr val="accent1"/>
+          </a:lnRef>
+          <a:fillRef idx="3">
+            <a:schemeClr val="accent1"/>
+          </a:fillRef>
+          <a:effectRef idx="2">
+            <a:schemeClr val="accent1"/>
+          </a:effectRef>
+          <a:fontRef idx="minor">
+            <a:schemeClr val="lt1"/>
+          </a:fontRef>
+        </p:style>
+        <p:txBody>
+          <a:bodyPr rtlCol="0" anchor="ctr"/>
+          <a:lstStyle/>
+          <a:p>
+            <a:pPr algn="ctr"/>
+          </a:p>
+        </p:txBody>
+      </p:sp>
+      <p:sp>
+        <p:nvSpPr>
+          <p:cNvPr id="23" name="TextBox 22"/>
+          <p:cNvSpPr txBox="1"/>
+          <p:nvPr/>
+        </p:nvSpPr>
+        <p:spPr>
+          <a:xfrm>
+            <a:off x="8924544" y="2267712"/>
+            <a:ext cx="2459736" cy="804672"/>
+          </a:xfrm>
+          <a:prstGeom prst="rect">
+            <a:avLst/>
+          </a:prstGeom>
+          <a:noFill/>
+        </p:spPr>
+        <p:txBody>
+          <a:bodyPr wrap="square" anchor="ctr" lIns="0" rIns="0" tIns="0" bIns="0">
+            <a:spAutoFit/>
+          </a:bodyPr>
+          <a:lstStyle/>
+          <a:p>
+            <a:pPr algn="l"/>
+            <a:r>
+              <a:rPr sz="1100" b="1">
+                <a:solidFill>
+                  <a:srgbClr val="3FD0C8"/>
+                </a:solidFill>
+                <a:latin typeface="Consolas"/>
+              </a:rPr>
+              <a:t>BPF_PROG_TEST_RUN</a:t>
+            </a:r>
+          </a:p>
+          <a:p>
+            <a:pPr algn="l"/>
+            <a:r>
+              <a:rPr sz="1000" b="0">
+                <a:solidFill>
+                  <a:srgbClr val="8B949E"/>
+                </a:solidFill>
+                <a:latin typeface="Segoe UI"/>
+              </a:rPr>
+              <a:t>perf full-path</a:t>
+            </a:r>
+          </a:p>
+        </p:txBody>
+      </p:sp>
+      <p:sp>
+        <p:nvSpPr>
+          <p:cNvPr id="24" name="Rounded Rectangle 23"/>
+          <p:cNvSpPr/>
+          <p:nvPr/>
+        </p:nvSpPr>
+        <p:spPr>
+          <a:xfrm>
+            <a:off x="640080" y="3429000"/>
+            <a:ext cx="5349240" cy="2331720"/>
+          </a:xfrm>
+          <a:prstGeom prst="roundRect">
+            <a:avLst/>
+          </a:prstGeom>
+          <a:solidFill>
+            <a:srgbClr val="1B222E"/>
+          </a:solidFill>
+          <a:ln>
+            <a:noFill/>
+          </a:ln>
+          <a:effectLst/>
+        </p:spPr>
+        <p:style>
+          <a:lnRef idx="1">
+            <a:schemeClr val="accent1"/>
+          </a:lnRef>
+          <a:fillRef idx="3">
+            <a:schemeClr val="accent1"/>
+          </a:fillRef>
+          <a:effectRef idx="2">
+            <a:schemeClr val="accent1"/>
+          </a:effectRef>
+          <a:fontRef idx="minor">
+            <a:schemeClr val="lt1"/>
+          </a:fontRef>
+        </p:style>
+        <p:txBody>
+          <a:bodyPr rtlCol="0" anchor="ctr"/>
+          <a:lstStyle/>
+          <a:p>
+            <a:pPr algn="ctr"/>
+          </a:p>
+        </p:txBody>
+      </p:sp>
+      <p:sp>
+        <p:nvSpPr>
+          <p:cNvPr id="25" name="Rounded Rectangle 24"/>
+          <p:cNvSpPr/>
+          <p:nvPr/>
+        </p:nvSpPr>
+        <p:spPr>
+          <a:xfrm>
+            <a:off x="731519" y="3474720"/>
+            <a:ext cx="5166359" cy="64008"/>
+          </a:xfrm>
+          <a:prstGeom prst="roundRect">
+            <a:avLst/>
+          </a:prstGeom>
+          <a:solidFill>
+            <a:srgbClr val="3FB950"/>
+          </a:solidFill>
+          <a:ln>
+            <a:noFill/>
+          </a:ln>
+          <a:effectLst/>
+        </p:spPr>
+        <p:style>
+          <a:lnRef idx="1">
+            <a:schemeClr val="accent1"/>
+          </a:lnRef>
+          <a:fillRef idx="3">
+            <a:schemeClr val="accent1"/>
+          </a:fillRef>
+          <a:effectRef idx="2">
+            <a:schemeClr val="accent1"/>
+          </a:effectRef>
+          <a:fontRef idx="minor">
+            <a:schemeClr val="lt1"/>
+          </a:fontRef>
+        </p:style>
+        <p:txBody>
+          <a:bodyPr rtlCol="0" anchor="ctr"/>
+          <a:lstStyle/>
+          <a:p>
+            <a:pPr algn="ctr"/>
+          </a:p>
+        </p:txBody>
+      </p:sp>
+      <p:sp>
+        <p:nvSpPr>
+          <p:cNvPr id="26" name="TextBox 25"/>
+          <p:cNvSpPr txBox="1"/>
+          <p:nvPr/>
+        </p:nvSpPr>
+        <p:spPr>
+          <a:xfrm>
+            <a:off x="841247" y="3575304"/>
+            <a:ext cx="4983479" cy="411480"/>
+          </a:xfrm>
+          <a:prstGeom prst="rect">
+            <a:avLst/>
+          </a:prstGeom>
+          <a:noFill/>
+        </p:spPr>
+        <p:txBody>
+          <a:bodyPr wrap="square" anchor="t" lIns="0" rIns="0" tIns="0" bIns="0">
+            <a:spAutoFit/>
+          </a:bodyPr>
+          <a:lstStyle/>
+          <a:p>
+            <a:pPr algn="l"/>
+            <a:r>
+              <a:rPr sz="1350" b="1">
+                <a:solidFill>
+                  <a:srgbClr val="3FB950"/>
+                </a:solidFill>
+                <a:latin typeface="Segoe UI"/>
+              </a:rPr>
+              <a:t>Costo di deploy (misurato)</a:t>
+            </a:r>
+          </a:p>
+        </p:txBody>
+      </p:sp>
+      <p:sp>
+        <p:nvSpPr>
+          <p:cNvPr id="27" name="TextBox 26"/>
+          <p:cNvSpPr txBox="1"/>
+          <p:nvPr/>
+        </p:nvSpPr>
+        <p:spPr>
+          <a:xfrm>
+            <a:off x="868680" y="4069080"/>
+            <a:ext cx="4892040" cy="1737360"/>
+          </a:xfrm>
+          <a:prstGeom prst="rect">
+            <a:avLst/>
+          </a:prstGeom>
+          <a:noFill/>
+        </p:spPr>
+        <p:txBody>
+          <a:bodyPr wrap="square" anchor="t" lIns="0" rIns="0" tIns="0" bIns="0">
+            <a:spAutoFit/>
+          </a:bodyPr>
+          <a:lstStyle/>
+          <a:p>
+            <a:pPr algn="l">
+              <a:spcAft>
+                <a:spcPts val="500"/>
+              </a:spcAft>
+            </a:pPr>
+            <a:r>
+              <a:rPr sz="1150" b="0">
+                <a:solidFill>
+                  <a:srgbClr val="8B949E"/>
+                </a:solidFill>
+                <a:latin typeface="Consolas"/>
+              </a:rPr>
+              <a:t>build offline (clang→.o)</a:t>
+            </a:r>
+            <a:r>
+              <a:rPr sz="1250" b="1">
+                <a:solidFill>
+                  <a:srgbClr val="F5A623"/>
+                </a:solidFill>
+                <a:latin typeface="Consolas"/>
+              </a:rPr>
+              <a:t>   341 ms</a:t>
+            </a:r>
+          </a:p>
+          <a:p>
+            <a:pPr algn="l">
+              <a:spcAft>
+                <a:spcPts val="500"/>
+              </a:spcAft>
+            </a:pPr>
+            <a:r>
+              <a:rPr sz="1050" b="0">
+                <a:solidFill>
+                  <a:srgbClr val="484F58"/>
+                </a:solidFill>
+                <a:latin typeface="Segoe UI"/>
+              </a:rPr>
+              <a:t>   una volta, sulla build box</a:t>
+            </a:r>
+          </a:p>
+          <a:p>
+            <a:pPr algn="l">
+              <a:spcAft>
+                <a:spcPts val="500"/>
+              </a:spcAft>
+            </a:pPr>
+            <a:r>
+              <a:rPr sz="1150" b="0">
+                <a:solidFill>
+                  <a:srgbClr val="8B949E"/>
+                </a:solidFill>
+                <a:latin typeface="Consolas"/>
+              </a:rPr>
+              <a:t>open_file</a:t>
+            </a:r>
+            <a:r>
+              <a:rPr sz="1250" b="1">
+                <a:solidFill>
+                  <a:srgbClr val="3FB950"/>
+                </a:solidFill>
+                <a:latin typeface="Consolas"/>
+              </a:rPr>
+              <a:t>               0.35 ms</a:t>
+            </a:r>
+          </a:p>
+          <a:p>
+            <a:pPr algn="l">
+              <a:spcAft>
+                <a:spcPts val="500"/>
+              </a:spcAft>
+            </a:pPr>
+            <a:r>
+              <a:rPr sz="1150" b="0">
+                <a:solidFill>
+                  <a:srgbClr val="8B949E"/>
+                </a:solidFill>
+                <a:latin typeface="Consolas"/>
+              </a:rPr>
+              <a:t>load (verify+JIT)</a:t>
+            </a:r>
+            <a:r>
+              <a:rPr sz="1250" b="1">
+                <a:solidFill>
+                  <a:srgbClr val="3FB950"/>
+                </a:solidFill>
+                <a:latin typeface="Consolas"/>
+              </a:rPr>
+              <a:t>       5.81 ms</a:t>
+            </a:r>
+          </a:p>
+          <a:p>
+            <a:pPr algn="l">
+              <a:spcAft>
+                <a:spcPts val="500"/>
+              </a:spcAft>
+            </a:pPr>
+            <a:r>
+              <a:rPr sz="1150" b="1">
+                <a:solidFill>
+                  <a:srgbClr val="E6EDF3"/>
+                </a:solidFill>
+                <a:latin typeface="Consolas"/>
+              </a:rPr>
+              <a:t>deploy runtime totale</a:t>
+            </a:r>
+            <a:r>
+              <a:rPr sz="1300" b="1">
+                <a:solidFill>
+                  <a:srgbClr val="3FB950"/>
+                </a:solidFill>
+                <a:latin typeface="Consolas"/>
+              </a:rPr>
+              <a:t>    6.16 ms</a:t>
+            </a:r>
+          </a:p>
+        </p:txBody>
+      </p:sp>
+      <p:sp>
+        <p:nvSpPr>
+          <p:cNvPr id="28" name="Rounded Rectangle 27"/>
+          <p:cNvSpPr/>
+          <p:nvPr/>
+        </p:nvSpPr>
+        <p:spPr>
+          <a:xfrm>
+            <a:off x="6199632" y="3429000"/>
+            <a:ext cx="5349240" cy="2331720"/>
+          </a:xfrm>
+          <a:prstGeom prst="roundRect">
+            <a:avLst/>
+          </a:prstGeom>
+          <a:solidFill>
+            <a:srgbClr val="1B222E"/>
+          </a:solidFill>
+          <a:ln>
+            <a:noFill/>
+          </a:ln>
+          <a:effectLst/>
+        </p:spPr>
+        <p:style>
+          <a:lnRef idx="1">
+            <a:schemeClr val="accent1"/>
+          </a:lnRef>
+          <a:fillRef idx="3">
+            <a:schemeClr val="accent1"/>
+          </a:fillRef>
+          <a:effectRef idx="2">
+            <a:schemeClr val="accent1"/>
+          </a:effectRef>
+          <a:fontRef idx="minor">
+            <a:schemeClr val="lt1"/>
+          </a:fontRef>
+        </p:style>
+        <p:txBody>
+          <a:bodyPr rtlCol="0" anchor="ctr"/>
+          <a:lstStyle/>
+          <a:p>
+            <a:pPr algn="ctr"/>
+          </a:p>
+        </p:txBody>
+      </p:sp>
+      <p:sp>
+        <p:nvSpPr>
+          <p:cNvPr id="29" name="Rounded Rectangle 28"/>
+          <p:cNvSpPr/>
+          <p:nvPr/>
+        </p:nvSpPr>
+        <p:spPr>
+          <a:xfrm>
+            <a:off x="6291072" y="3474720"/>
+            <a:ext cx="5166359" cy="64008"/>
+          </a:xfrm>
+          <a:prstGeom prst="roundRect">
+            <a:avLst/>
+          </a:prstGeom>
+          <a:solidFill>
+            <a:srgbClr val="F5A623"/>
+          </a:solidFill>
+          <a:ln>
+            <a:noFill/>
+          </a:ln>
+          <a:effectLst/>
+        </p:spPr>
+        <p:style>
+          <a:lnRef idx="1">
+            <a:schemeClr val="accent1"/>
+          </a:lnRef>
+          <a:fillRef idx="3">
+            <a:schemeClr val="accent1"/>
+          </a:fillRef>
+          <a:effectRef idx="2">
+            <a:schemeClr val="accent1"/>
+          </a:effectRef>
+          <a:fontRef idx="minor">
+            <a:schemeClr val="lt1"/>
+          </a:fontRef>
+        </p:style>
+        <p:txBody>
+          <a:bodyPr rtlCol="0" anchor="ctr"/>
+          <a:lstStyle/>
+          <a:p>
+            <a:pPr algn="ctr"/>
+          </a:p>
+        </p:txBody>
+      </p:sp>
+      <p:sp>
+        <p:nvSpPr>
+          <p:cNvPr id="30" name="TextBox 29"/>
+          <p:cNvSpPr txBox="1"/>
+          <p:nvPr/>
+        </p:nvSpPr>
+        <p:spPr>
+          <a:xfrm>
+            <a:off x="6400800" y="3575304"/>
+            <a:ext cx="4983479" cy="411480"/>
+          </a:xfrm>
+          <a:prstGeom prst="rect">
+            <a:avLst/>
+          </a:prstGeom>
+          <a:noFill/>
+        </p:spPr>
+        <p:txBody>
+          <a:bodyPr wrap="square" anchor="t" lIns="0" rIns="0" tIns="0" bIns="0">
+            <a:spAutoFit/>
+          </a:bodyPr>
+          <a:lstStyle/>
+          <a:p>
+            <a:pPr algn="l"/>
+            <a:r>
+              <a:rPr sz="1350" b="1">
+                <a:solidFill>
+                  <a:srgbClr val="F5A623"/>
+                </a:solidFill>
+                <a:latin typeface="Segoe UI"/>
+              </a:rPr>
+              <a:t>Performance (full-path, 1e6 reps)</a:t>
+            </a:r>
+          </a:p>
+        </p:txBody>
+      </p:sp>
+      <p:sp>
+        <p:nvSpPr>
+          <p:cNvPr id="31" name="TextBox 30"/>
+          <p:cNvSpPr txBox="1"/>
+          <p:nvPr/>
+        </p:nvSpPr>
+        <p:spPr>
+          <a:xfrm>
+            <a:off x="6428232" y="4069080"/>
+            <a:ext cx="4892040" cy="1737360"/>
+          </a:xfrm>
+          <a:prstGeom prst="rect">
+            <a:avLst/>
+          </a:prstGeom>
+          <a:noFill/>
+        </p:spPr>
+        <p:txBody>
+          <a:bodyPr wrap="square" anchor="t" lIns="0" rIns="0" tIns="0" bIns="0">
+            <a:spAutoFit/>
+          </a:bodyPr>
+          <a:lstStyle/>
+          <a:p>
+            <a:pPr algn="l">
+              <a:spcAft>
+                <a:spcPts val="500"/>
+              </a:spcAft>
+            </a:pPr>
+            <a:r>
+              <a:rPr sz="1150" b="0">
+                <a:solidFill>
+                  <a:srgbClr val="8B949E"/>
+                </a:solidFill>
+                <a:latin typeface="Consolas"/>
+              </a:rPr>
+              <a:t>xlated insn</a:t>
+            </a:r>
+            <a:r>
+              <a:rPr sz="1250" b="1">
+                <a:solidFill>
+                  <a:srgbClr val="E6EDF3"/>
+                </a:solidFill>
+                <a:latin typeface="Consolas"/>
+              </a:rPr>
+              <a:t>            915</a:t>
+            </a:r>
+          </a:p>
+          <a:p>
+            <a:pPr algn="l">
+              <a:spcAft>
+                <a:spcPts val="500"/>
+              </a:spcAft>
+            </a:pPr>
+            <a:r>
+              <a:rPr sz="1150" b="0">
+                <a:solidFill>
+                  <a:srgbClr val="8B949E"/>
+                </a:solidFill>
+                <a:latin typeface="Consolas"/>
+              </a:rPr>
+              <a:t>latenza</a:t>
+            </a:r>
+            <a:r>
+              <a:rPr sz="1250" b="1">
+                <a:solidFill>
+                  <a:srgbClr val="E6EDF3"/>
+                </a:solidFill>
+                <a:latin typeface="Consolas"/>
+              </a:rPr>
+              <a:t>            56 ns/pkt</a:t>
+            </a:r>
+          </a:p>
+          <a:p>
+            <a:pPr algn="l">
+              <a:spcAft>
+                <a:spcPts val="500"/>
+              </a:spcAft>
+            </a:pPr>
+            <a:r>
+              <a:rPr sz="1150" b="0">
+                <a:solidFill>
+                  <a:srgbClr val="8B949E"/>
+                </a:solidFill>
+                <a:latin typeface="Consolas"/>
+              </a:rPr>
+              <a:t>throughput</a:t>
+            </a:r>
+            <a:r>
+              <a:rPr sz="1250" b="1">
+                <a:solidFill>
+                  <a:srgbClr val="E6EDF3"/>
+                </a:solidFill>
+                <a:latin typeface="Consolas"/>
+              </a:rPr>
+              <a:t>       17.86 Mpps</a:t>
+            </a:r>
+          </a:p>
+          <a:p>
+            <a:pPr algn="l">
+              <a:spcAft>
+                <a:spcPts val="500"/>
+              </a:spcAft>
+            </a:pPr>
+            <a:r>
+              <a:rPr sz="1150" b="0">
+                <a:solidFill>
+                  <a:srgbClr val="8B949E"/>
+                </a:solidFill>
+                <a:latin typeface="Consolas"/>
+              </a:rPr>
+              <a:t>retval</a:t>
+            </a:r>
+            <a:r>
+              <a:rPr sz="1250" b="1">
+                <a:solidFill>
+                  <a:srgbClr val="E6EDF3"/>
+                </a:solidFill>
+                <a:latin typeface="Consolas"/>
+              </a:rPr>
+              <a:t>             4  (redirect)</a:t>
+            </a:r>
+          </a:p>
+          <a:p>
+            <a:pPr algn="l">
+              <a:spcAft>
+                <a:spcPts val="500"/>
+              </a:spcAft>
+            </a:pPr>
+            <a:r>
+              <a:rPr sz="1100" b="0">
+                <a:solidFill>
+                  <a:srgbClr val="3FB950"/>
+                </a:solidFill>
+                <a:latin typeface="Segoe UI"/>
+              </a:rPr>
+              <a:t>= massimo literal, perf NON persa</a:t>
+            </a:r>
+          </a:p>
+        </p:txBody>
+      </p:sp>
+      <p:sp>
+        <p:nvSpPr>
+          <p:cNvPr id="32" name="TextBox 31"/>
+          <p:cNvSpPr txBox="1"/>
+          <p:nvPr/>
+        </p:nvSpPr>
+        <p:spPr>
+          <a:xfrm>
+            <a:off x="640080" y="5989320"/>
+            <a:ext cx="10972800" cy="548640"/>
+          </a:xfrm>
+          <a:prstGeom prst="rect">
+            <a:avLst/>
+          </a:prstGeom>
+          <a:noFill/>
+        </p:spPr>
+        <p:txBody>
+          <a:bodyPr wrap="square" anchor="t" lIns="0" rIns="0" tIns="0" bIns="0">
+            <a:spAutoFit/>
+          </a:bodyPr>
+          <a:lstStyle/>
+          <a:p>
+            <a:pPr algn="l"/>
+            <a:r>
+              <a:rPr sz="1200" b="0">
+                <a:solidFill>
+                  <a:srgbClr val="8B949E"/>
+                </a:solidFill>
+                <a:latin typeface="Segoe UI"/>
+              </a:rPr>
+              <a:t>Il .o è precompilato: a runtime nessun clang. I pesi restano literal → clang -O2 ha già ridotto le moltiplicazioni nel bytecode.</a:t>
+            </a:r>
+          </a:p>
+        </p:txBody>
+      </p:sp>
+    </p:spTree>
+  </p:cSld>
+  <p:clrMapOvr>
+    <a:masterClrMapping/>
+  </p:clrMapOvr>
+</p:sld>
+</file>
+
+<file path=ppt/slides/slide9.xml><?xml version="1.0" encoding="utf-8"?>
+<p:sld xmlns:a="http://schemas.openxmlformats.org/drawingml/2006/main" xmlns:p="http://schemas.openxmlformats.org/presentationml/2006/main" xmlns:r="http://schemas.openxmlformats.org/officeDocument/2006/relationships">
+  <p:cSld>
+    <p:spTree>
+      <p:nvGrpSpPr>
+        <p:cNvPr id="1" name=""/>
+        <p:cNvGrpSpPr/>
+        <p:nvPr/>
+      </p:nvGrpSpPr>
+      <p:grpSpPr/>
+      <p:sp>
+        <p:nvSpPr>
+          <p:cNvPr id="2" name="Rectangle 1"/>
+          <p:cNvSpPr/>
+          <p:nvPr/>
+        </p:nvSpPr>
+        <p:spPr>
+          <a:xfrm>
+            <a:off x="0" y="0"/>
+            <a:ext cx="12191969" cy="6858000"/>
+          </a:xfrm>
+          <a:prstGeom prst="rect">
+            <a:avLst/>
+          </a:prstGeom>
+          <a:solidFill>
+            <a:srgbClr val="0D1117"/>
+          </a:solidFill>
+          <a:ln>
+            <a:noFill/>
+          </a:ln>
+          <a:effectLst/>
+        </p:spPr>
+        <p:style>
+          <a:lnRef idx="1">
+            <a:schemeClr val="accent1"/>
+          </a:lnRef>
+          <a:fillRef idx="3">
+            <a:schemeClr val="accent1"/>
+          </a:fillRef>
+          <a:effectRef idx="2">
+            <a:schemeClr val="accent1"/>
+          </a:effectRef>
+          <a:fontRef idx="minor">
+            <a:schemeClr val="lt1"/>
+          </a:fontRef>
+        </p:style>
+        <p:txBody>
+          <a:bodyPr rtlCol="0" anchor="ctr"/>
+          <a:lstStyle/>
+          <a:p>
+            <a:pPr algn="ctr"/>
+          </a:p>
+        </p:txBody>
+      </p:sp>
+      <p:sp>
+        <p:nvSpPr>
+          <p:cNvPr id="3" name="TextBox 2"/>
+          <p:cNvSpPr txBox="1"/>
+          <p:nvPr/>
+        </p:nvSpPr>
+        <p:spPr>
+          <a:xfrm>
+            <a:off x="566928" y="384048"/>
+            <a:ext cx="1097280" cy="914400"/>
+          </a:xfrm>
+          <a:prstGeom prst="rect">
+            <a:avLst/>
+          </a:prstGeom>
+          <a:noFill/>
+        </p:spPr>
+        <p:txBody>
+          <a:bodyPr wrap="square" anchor="t" lIns="0" rIns="0" tIns="0" bIns="0">
+            <a:spAutoFit/>
+          </a:bodyPr>
+          <a:lstStyle/>
+          <a:p>
+            <a:pPr algn="l"/>
+            <a:r>
+              <a:rPr sz="4000" b="1">
+                <a:solidFill>
+                  <a:srgbClr val="F5A623"/>
+                </a:solidFill>
+                <a:latin typeface="Georgia"/>
+              </a:rPr>
+              <a:t>08</a:t>
+            </a:r>
+          </a:p>
+        </p:txBody>
+      </p:sp>
+      <p:sp>
+        <p:nvSpPr>
+          <p:cNvPr id="4" name="TextBox 3"/>
+          <p:cNvSpPr txBox="1"/>
+          <p:nvPr/>
+        </p:nvSpPr>
+        <p:spPr>
+          <a:xfrm>
+            <a:off x="1600200" y="365760"/>
+            <a:ext cx="10058400" cy="731520"/>
+          </a:xfrm>
+          <a:prstGeom prst="rect">
+            <a:avLst/>
+          </a:prstGeom>
+          <a:noFill/>
+        </p:spPr>
+        <p:txBody>
+          <a:bodyPr wrap="square" anchor="t" lIns="0" rIns="0" tIns="0" bIns="0">
+            <a:spAutoFit/>
+          </a:bodyPr>
+          <a:lstStyle/>
+          <a:p>
+            <a:pPr algn="l"/>
+            <a:r>
+              <a:rPr sz="3000" b="1">
+                <a:solidFill>
+                  <a:srgbClr val="E6EDF3"/>
+                </a:solidFill>
+                <a:latin typeface="Georgia"/>
+              </a:rPr>
+              <a:t>Il confronto</a:t>
+            </a:r>
+          </a:p>
+        </p:txBody>
+      </p:sp>
+      <p:sp>
+        <p:nvSpPr>
+          <p:cNvPr id="5" name="TextBox 4"/>
+          <p:cNvSpPr txBox="1"/>
+          <p:nvPr/>
+        </p:nvSpPr>
+        <p:spPr>
+          <a:xfrm>
+            <a:off x="1627632" y="1024128"/>
+            <a:ext cx="10241280" cy="457200"/>
+          </a:xfrm>
+          <a:prstGeom prst="rect">
+            <a:avLst/>
+          </a:prstGeom>
+          <a:noFill/>
+        </p:spPr>
+        <p:txBody>
+          <a:bodyPr wrap="square" anchor="t" lIns="0" rIns="0" tIns="0" bIns="0">
+            <a:spAutoFit/>
+          </a:bodyPr>
+          <a:lstStyle/>
+          <a:p>
+            <a:pPr algn="l"/>
+            <a:r>
+              <a:rPr sz="1350" b="0">
+                <a:solidFill>
+                  <a:srgbClr val="8B949E"/>
+                </a:solidFill>
+                <a:latin typeface="Segoe UI"/>
+              </a:rPr>
+              <a:t>BCC vs .rodata vs AOT-literal — deploy e performance</a:t>
+            </a:r>
+          </a:p>
+        </p:txBody>
+      </p:sp>
+      <p:sp>
+        <p:nvSpPr>
+          <p:cNvPr id="6" name="TextBox 5"/>
+          <p:cNvSpPr txBox="1"/>
+          <p:nvPr/>
+        </p:nvSpPr>
+        <p:spPr>
+          <a:xfrm>
+            <a:off x="640080" y="1874519"/>
+            <a:ext cx="2331720" cy="365760"/>
+          </a:xfrm>
+          <a:prstGeom prst="rect">
+            <a:avLst/>
+          </a:prstGeom>
+          <a:noFill/>
+        </p:spPr>
+        <p:txBody>
+          <a:bodyPr wrap="square" anchor="t" lIns="0" rIns="0" tIns="0" bIns="0">
+            <a:spAutoFit/>
+          </a:bodyPr>
+          <a:lstStyle/>
+          <a:p>
+            <a:pPr algn="l"/>
+            <a:r>
+              <a:rPr sz="1200" b="1">
+                <a:solidFill>
+                  <a:srgbClr val="8B949E"/>
+                </a:solidFill>
+                <a:latin typeface="Segoe UI"/>
+              </a:rPr>
+              <a:t/>
+            </a:r>
+          </a:p>
+        </p:txBody>
+      </p:sp>
+      <p:sp>
+        <p:nvSpPr>
+          <p:cNvPr id="7" name="TextBox 6"/>
+          <p:cNvSpPr txBox="1"/>
+          <p:nvPr/>
+        </p:nvSpPr>
+        <p:spPr>
+          <a:xfrm>
+            <a:off x="2990087" y="1874519"/>
+            <a:ext cx="2926080" cy="365760"/>
+          </a:xfrm>
+          <a:prstGeom prst="rect">
+            <a:avLst/>
+          </a:prstGeom>
+          <a:noFill/>
+        </p:spPr>
+        <p:txBody>
+          <a:bodyPr wrap="square" anchor="t" lIns="0" rIns="0" tIns="0" bIns="0">
+            <a:spAutoFit/>
+          </a:bodyPr>
+          <a:lstStyle/>
+          <a:p>
+            <a:pPr algn="l"/>
+            <a:r>
+              <a:rPr sz="1200" b="1">
+                <a:solidFill>
+                  <a:srgbClr val="8B949E"/>
+                </a:solidFill>
+                <a:latin typeface="Segoe UI"/>
+              </a:rPr>
+              <a:t>deploy modello</a:t>
+            </a:r>
+          </a:p>
+        </p:txBody>
+      </p:sp>
+      <p:sp>
+        <p:nvSpPr>
+          <p:cNvPr id="8" name="TextBox 7"/>
+          <p:cNvSpPr txBox="1"/>
+          <p:nvPr/>
+        </p:nvSpPr>
+        <p:spPr>
+          <a:xfrm>
+            <a:off x="5934456" y="1874519"/>
+            <a:ext cx="3291840" cy="365760"/>
+          </a:xfrm>
+          <a:prstGeom prst="rect">
+            <a:avLst/>
+          </a:prstGeom>
+          <a:noFill/>
+        </p:spPr>
+        <p:txBody>
+          <a:bodyPr wrap="square" anchor="t" lIns="0" rIns="0" tIns="0" bIns="0">
+            <a:spAutoFit/>
+          </a:bodyPr>
+          <a:lstStyle/>
+          <a:p>
+            <a:pPr algn="l"/>
+            <a:r>
+              <a:rPr sz="1200" b="1">
+                <a:solidFill>
+                  <a:srgbClr val="8B949E"/>
+                </a:solidFill>
+                <a:latin typeface="Segoe UI"/>
+              </a:rPr>
+              <a:t>perf per-pacchetto</a:t>
+            </a:r>
+          </a:p>
+        </p:txBody>
+      </p:sp>
+      <p:sp>
+        <p:nvSpPr>
+          <p:cNvPr id="9" name="TextBox 8"/>
+          <p:cNvSpPr txBox="1"/>
+          <p:nvPr/>
+        </p:nvSpPr>
+        <p:spPr>
+          <a:xfrm>
+            <a:off x="9244584" y="1874519"/>
+            <a:ext cx="2331720" cy="365760"/>
+          </a:xfrm>
+          <a:prstGeom prst="rect">
+            <a:avLst/>
+          </a:prstGeom>
+          <a:noFill/>
+        </p:spPr>
+        <p:txBody>
+          <a:bodyPr wrap="square" anchor="t" lIns="0" rIns="0" tIns="0" bIns="0">
+            <a:spAutoFit/>
+          </a:bodyPr>
+          <a:lstStyle/>
+          <a:p>
+            <a:pPr algn="l"/>
+            <a:r>
+              <a:rPr sz="1200" b="1">
+                <a:solidFill>
+                  <a:srgbClr val="8B949E"/>
+                </a:solidFill>
+                <a:latin typeface="Segoe UI"/>
+              </a:rPr>
+              <a:t>clang runtime</a:t>
+            </a:r>
+          </a:p>
+        </p:txBody>
+      </p:sp>
+      <p:sp>
+        <p:nvSpPr>
+          <p:cNvPr id="10" name="Rounded Rectangle 9"/>
+          <p:cNvSpPr/>
+          <p:nvPr/>
+        </p:nvSpPr>
+        <p:spPr>
+          <a:xfrm>
+            <a:off x="640080" y="2286000"/>
+            <a:ext cx="10927080" cy="749808"/>
+          </a:xfrm>
+          <a:prstGeom prst="roundRect">
+            <a:avLst/>
+          </a:prstGeom>
+          <a:solidFill>
+            <a:srgbClr val="1B222E"/>
+          </a:solidFill>
+          <a:ln>
+            <a:noFill/>
+          </a:ln>
+          <a:effectLst/>
+        </p:spPr>
+        <p:style>
+          <a:lnRef idx="1">
+            <a:schemeClr val="accent1"/>
+          </a:lnRef>
+          <a:fillRef idx="3">
+            <a:schemeClr val="accent1"/>
+          </a:fillRef>
+          <a:effectRef idx="2">
+            <a:schemeClr val="accent1"/>
+          </a:effectRef>
+          <a:fontRef idx="minor">
+            <a:schemeClr val="lt1"/>
+          </a:fontRef>
+        </p:style>
+        <p:txBody>
+          <a:bodyPr rtlCol="0" anchor="ctr"/>
+          <a:lstStyle/>
+          <a:p>
+            <a:pPr algn="ctr"/>
+          </a:p>
+        </p:txBody>
+      </p:sp>
+      <p:sp>
+        <p:nvSpPr>
+          <p:cNvPr id="11" name="TextBox 10"/>
+          <p:cNvSpPr txBox="1"/>
+          <p:nvPr/>
+        </p:nvSpPr>
+        <p:spPr>
+          <a:xfrm>
+            <a:off x="804671" y="2286000"/>
+            <a:ext cx="2148839" cy="749808"/>
+          </a:xfrm>
+          <a:prstGeom prst="rect">
+            <a:avLst/>
+          </a:prstGeom>
+          <a:noFill/>
+        </p:spPr>
+        <p:txBody>
+          <a:bodyPr wrap="square" anchor="ctr" lIns="0" rIns="0" tIns="0" bIns="0">
+            <a:spAutoFit/>
+          </a:bodyPr>
+          <a:lstStyle/>
+          <a:p>
+            <a:pPr algn="l"/>
+            <a:r>
+              <a:rPr sz="1200" b="1">
+                <a:solidFill>
+                  <a:srgbClr val="F85149"/>
+                </a:solidFill>
+                <a:latin typeface="Consolas"/>
+              </a:rPr>
+              <a:t>literal + BCC</a:t>
+            </a:r>
+          </a:p>
+        </p:txBody>
+      </p:sp>
+      <p:sp>
+        <p:nvSpPr>
+          <p:cNvPr id="12" name="TextBox 11"/>
+          <p:cNvSpPr txBox="1"/>
+          <p:nvPr/>
+        </p:nvSpPr>
+        <p:spPr>
+          <a:xfrm>
+            <a:off x="3154679" y="2286000"/>
+            <a:ext cx="2743200" cy="749808"/>
+          </a:xfrm>
+          <a:prstGeom prst="rect">
+            <a:avLst/>
+          </a:prstGeom>
+          <a:noFill/>
+        </p:spPr>
+        <p:txBody>
+          <a:bodyPr wrap="square" anchor="ctr" lIns="0" rIns="0" tIns="0" bIns="0">
+            <a:spAutoFit/>
+          </a:bodyPr>
+          <a:lstStyle/>
+          <a:p>
+            <a:pPr algn="l"/>
+            <a:r>
+              <a:rPr sz="1200" b="0">
+                <a:solidFill>
+                  <a:srgbClr val="F85149"/>
+                </a:solidFill>
+                <a:latin typeface="Consolas"/>
+              </a:rPr>
+              <a:t>~1660 ms</a:t>
+            </a:r>
+          </a:p>
+        </p:txBody>
+      </p:sp>
+      <p:sp>
+        <p:nvSpPr>
+          <p:cNvPr id="13" name="TextBox 12"/>
+          <p:cNvSpPr txBox="1"/>
+          <p:nvPr/>
+        </p:nvSpPr>
+        <p:spPr>
+          <a:xfrm>
+            <a:off x="6099048" y="2286000"/>
+            <a:ext cx="3108960" cy="749808"/>
+          </a:xfrm>
+          <a:prstGeom prst="rect">
+            <a:avLst/>
+          </a:prstGeom>
+          <a:noFill/>
+        </p:spPr>
+        <p:txBody>
+          <a:bodyPr wrap="square" anchor="ctr" lIns="0" rIns="0" tIns="0" bIns="0">
+            <a:spAutoFit/>
+          </a:bodyPr>
+          <a:lstStyle/>
+          <a:p>
+            <a:pPr algn="l"/>
+            <a:r>
+              <a:rPr sz="1200" b="0">
+                <a:solidFill>
+                  <a:srgbClr val="E6EDF3"/>
+                </a:solidFill>
+                <a:latin typeface="Consolas"/>
+              </a:rPr>
+              <a:t>literal max</a:t>
+            </a:r>
+          </a:p>
+        </p:txBody>
+      </p:sp>
+      <p:sp>
+        <p:nvSpPr>
+          <p:cNvPr id="14" name="TextBox 13"/>
+          <p:cNvSpPr txBox="1"/>
+          <p:nvPr/>
+        </p:nvSpPr>
+        <p:spPr>
+          <a:xfrm>
+            <a:off x="9409176" y="2286000"/>
+            <a:ext cx="2148839" cy="749808"/>
+          </a:xfrm>
+          <a:prstGeom prst="rect">
+            <a:avLst/>
+          </a:prstGeom>
+          <a:noFill/>
+        </p:spPr>
+        <p:txBody>
+          <a:bodyPr wrap="square" anchor="ctr" lIns="0" rIns="0" tIns="0" bIns="0">
+            <a:spAutoFit/>
+          </a:bodyPr>
+          <a:lstStyle/>
+          <a:p>
+            <a:pPr algn="l"/>
+            <a:r>
+              <a:rPr sz="1200" b="1">
+                <a:solidFill>
+                  <a:srgbClr val="F85149"/>
+                </a:solidFill>
+                <a:latin typeface="Segoe UI"/>
+              </a:rPr>
+              <a:t>sì, ogni modello</a:t>
+            </a:r>
+          </a:p>
+        </p:txBody>
+      </p:sp>
+      <p:sp>
+        <p:nvSpPr>
+          <p:cNvPr id="15" name="Rounded Rectangle 14"/>
+          <p:cNvSpPr/>
+          <p:nvPr/>
+        </p:nvSpPr>
+        <p:spPr>
+          <a:xfrm>
+            <a:off x="640080" y="3127248"/>
+            <a:ext cx="10927080" cy="749808"/>
+          </a:xfrm>
+          <a:prstGeom prst="roundRect">
+            <a:avLst/>
+          </a:prstGeom>
+          <a:solidFill>
+            <a:srgbClr val="1B222E"/>
+          </a:solidFill>
+          <a:ln>
+            <a:noFill/>
+          </a:ln>
+          <a:effectLst/>
+        </p:spPr>
+        <p:style>
+          <a:lnRef idx="1">
+            <a:schemeClr val="accent1"/>
+          </a:lnRef>
+          <a:fillRef idx="3">
+            <a:schemeClr val="accent1"/>
+          </a:fillRef>
+          <a:effectRef idx="2">
+            <a:schemeClr val="accent1"/>
+          </a:effectRef>
+          <a:fontRef idx="minor">
+            <a:schemeClr val="lt1"/>
+          </a:fontRef>
+        </p:style>
+        <p:txBody>
+          <a:bodyPr rtlCol="0" anchor="ctr"/>
+          <a:lstStyle/>
+          <a:p>
+            <a:pPr algn="ctr"/>
+          </a:p>
+        </p:txBody>
+      </p:sp>
+      <p:sp>
+        <p:nvSpPr>
+          <p:cNvPr id="16" name="TextBox 15"/>
+          <p:cNvSpPr txBox="1"/>
+          <p:nvPr/>
+        </p:nvSpPr>
+        <p:spPr>
+          <a:xfrm>
+            <a:off x="804671" y="3127248"/>
+            <a:ext cx="2148839" cy="749808"/>
+          </a:xfrm>
+          <a:prstGeom prst="rect">
+            <a:avLst/>
+          </a:prstGeom>
+          <a:noFill/>
+        </p:spPr>
+        <p:txBody>
+          <a:bodyPr wrap="square" anchor="ctr" lIns="0" rIns="0" tIns="0" bIns="0">
+            <a:spAutoFit/>
+          </a:bodyPr>
+          <a:lstStyle/>
+          <a:p>
+            <a:pPr algn="l"/>
+            <a:r>
+              <a:rPr sz="1200" b="1">
+                <a:solidFill>
+                  <a:srgbClr val="F5A623"/>
+                </a:solidFill>
+                <a:latin typeface="Consolas"/>
+              </a:rPr>
+              <a:t>AOT + rodata</a:t>
+            </a:r>
+          </a:p>
+        </p:txBody>
+      </p:sp>
+      <p:sp>
+        <p:nvSpPr>
+          <p:cNvPr id="17" name="TextBox 16"/>
+          <p:cNvSpPr txBox="1"/>
+          <p:nvPr/>
+        </p:nvSpPr>
+        <p:spPr>
+          <a:xfrm>
+            <a:off x="3154679" y="3127248"/>
+            <a:ext cx="2743200" cy="749808"/>
+          </a:xfrm>
+          <a:prstGeom prst="rect">
+            <a:avLst/>
+          </a:prstGeom>
+          <a:noFill/>
+        </p:spPr>
+        <p:txBody>
+          <a:bodyPr wrap="square" anchor="ctr" lIns="0" rIns="0" tIns="0" bIns="0">
+            <a:spAutoFit/>
+          </a:bodyPr>
+          <a:lstStyle/>
+          <a:p>
+            <a:pPr algn="l"/>
+            <a:r>
+              <a:rPr sz="1200" b="0">
+                <a:solidFill>
+                  <a:srgbClr val="3FB950"/>
+                </a:solidFill>
+                <a:latin typeface="Consolas"/>
+              </a:rPr>
+              <a:t>~pochi ms</a:t>
+            </a:r>
+          </a:p>
+        </p:txBody>
+      </p:sp>
+      <p:sp>
+        <p:nvSpPr>
+          <p:cNvPr id="18" name="TextBox 17"/>
+          <p:cNvSpPr txBox="1"/>
+          <p:nvPr/>
+        </p:nvSpPr>
+        <p:spPr>
+          <a:xfrm>
+            <a:off x="6099048" y="3127248"/>
+            <a:ext cx="3108960" cy="749808"/>
+          </a:xfrm>
+          <a:prstGeom prst="rect">
+            <a:avLst/>
+          </a:prstGeom>
+          <a:noFill/>
+        </p:spPr>
+        <p:txBody>
+          <a:bodyPr wrap="square" anchor="ctr" lIns="0" rIns="0" tIns="0" bIns="0">
+            <a:spAutoFit/>
+          </a:bodyPr>
+          <a:lstStyle/>
+          <a:p>
+            <a:pPr algn="l"/>
+            <a:r>
+              <a:rPr sz="1200" b="0">
+                <a:solidFill>
+                  <a:srgbClr val="F5A623"/>
+                </a:solidFill>
+                <a:latin typeface="Consolas"/>
+              </a:rPr>
+              <a:t>−27% throughput</a:t>
+            </a:r>
+          </a:p>
+        </p:txBody>
+      </p:sp>
+      <p:sp>
+        <p:nvSpPr>
+          <p:cNvPr id="19" name="TextBox 18"/>
+          <p:cNvSpPr txBox="1"/>
+          <p:nvPr/>
+        </p:nvSpPr>
+        <p:spPr>
+          <a:xfrm>
+            <a:off x="9409176" y="3127248"/>
+            <a:ext cx="2148839" cy="749808"/>
+          </a:xfrm>
+          <a:prstGeom prst="rect">
+            <a:avLst/>
+          </a:prstGeom>
+          <a:noFill/>
+        </p:spPr>
+        <p:txBody>
+          <a:bodyPr wrap="square" anchor="ctr" lIns="0" rIns="0" tIns="0" bIns="0">
+            <a:spAutoFit/>
+          </a:bodyPr>
+          <a:lstStyle/>
+          <a:p>
+            <a:pPr algn="l"/>
+            <a:r>
+              <a:rPr sz="1200" b="1">
+                <a:solidFill>
+                  <a:srgbClr val="3FB950"/>
+                </a:solidFill>
+                <a:latin typeface="Segoe UI"/>
+              </a:rPr>
+              <a:t>no</a:t>
+            </a:r>
+          </a:p>
+        </p:txBody>
+      </p:sp>
+      <p:sp>
+        <p:nvSpPr>
+          <p:cNvPr id="20" name="Rounded Rectangle 19"/>
+          <p:cNvSpPr/>
+          <p:nvPr/>
+        </p:nvSpPr>
+        <p:spPr>
+          <a:xfrm>
+            <a:off x="640080" y="3968496"/>
+            <a:ext cx="10927080" cy="749808"/>
           </a:xfrm>
           <a:prstGeom prst="roundRect">
             <a:avLst/>
@@ -10720,14 +13502,198 @@
       </p:sp>
       <p:sp>
         <p:nvSpPr>
-          <p:cNvPr id="7" name="Rounded Rectangle 6"/>
+          <p:cNvPr id="21" name="TextBox 20"/>
+          <p:cNvSpPr txBox="1"/>
+          <p:nvPr/>
+        </p:nvSpPr>
+        <p:spPr>
+          <a:xfrm>
+            <a:off x="804671" y="3968496"/>
+            <a:ext cx="2148839" cy="749808"/>
+          </a:xfrm>
+          <a:prstGeom prst="rect">
+            <a:avLst/>
+          </a:prstGeom>
+          <a:noFill/>
+        </p:spPr>
+        <p:txBody>
+          <a:bodyPr wrap="square" anchor="ctr" lIns="0" rIns="0" tIns="0" bIns="0">
+            <a:spAutoFit/>
+          </a:bodyPr>
+          <a:lstStyle/>
+          <a:p>
+            <a:pPr algn="l"/>
+            <a:r>
+              <a:rPr sz="1200" b="1">
+                <a:solidFill>
+                  <a:srgbClr val="3FB950"/>
+                </a:solidFill>
+                <a:latin typeface="Consolas"/>
+              </a:rPr>
+              <a:t>AOT-literal</a:t>
+            </a:r>
+          </a:p>
+        </p:txBody>
+      </p:sp>
+      <p:sp>
+        <p:nvSpPr>
+          <p:cNvPr id="22" name="TextBox 21"/>
+          <p:cNvSpPr txBox="1"/>
+          <p:nvPr/>
+        </p:nvSpPr>
+        <p:spPr>
+          <a:xfrm>
+            <a:off x="3154679" y="3968496"/>
+            <a:ext cx="2743200" cy="749808"/>
+          </a:xfrm>
+          <a:prstGeom prst="rect">
+            <a:avLst/>
+          </a:prstGeom>
+          <a:noFill/>
+        </p:spPr>
+        <p:txBody>
+          <a:bodyPr wrap="square" anchor="ctr" lIns="0" rIns="0" tIns="0" bIns="0">
+            <a:spAutoFit/>
+          </a:bodyPr>
+          <a:lstStyle/>
+          <a:p>
+            <a:pPr algn="l"/>
+            <a:r>
+              <a:rPr sz="1200" b="0">
+                <a:solidFill>
+                  <a:srgbClr val="3FB950"/>
+                </a:solidFill>
+                <a:latin typeface="Consolas"/>
+              </a:rPr>
+              <a:t>6.2 ms (misurato)</a:t>
+            </a:r>
+          </a:p>
+        </p:txBody>
+      </p:sp>
+      <p:sp>
+        <p:nvSpPr>
+          <p:cNvPr id="23" name="TextBox 22"/>
+          <p:cNvSpPr txBox="1"/>
+          <p:nvPr/>
+        </p:nvSpPr>
+        <p:spPr>
+          <a:xfrm>
+            <a:off x="6099048" y="3968496"/>
+            <a:ext cx="3108960" cy="749808"/>
+          </a:xfrm>
+          <a:prstGeom prst="rect">
+            <a:avLst/>
+          </a:prstGeom>
+          <a:noFill/>
+        </p:spPr>
+        <p:txBody>
+          <a:bodyPr wrap="square" anchor="ctr" lIns="0" rIns="0" tIns="0" bIns="0">
+            <a:spAutoFit/>
+          </a:bodyPr>
+          <a:lstStyle/>
+          <a:p>
+            <a:pPr algn="l"/>
+            <a:r>
+              <a:rPr sz="1200" b="0">
+                <a:solidFill>
+                  <a:srgbClr val="3FB950"/>
+                </a:solidFill>
+                <a:latin typeface="Consolas"/>
+              </a:rPr>
+              <a:t>literal max (56 ns)</a:t>
+            </a:r>
+          </a:p>
+        </p:txBody>
+      </p:sp>
+      <p:sp>
+        <p:nvSpPr>
+          <p:cNvPr id="24" name="TextBox 23"/>
+          <p:cNvSpPr txBox="1"/>
+          <p:nvPr/>
+        </p:nvSpPr>
+        <p:spPr>
+          <a:xfrm>
+            <a:off x="9409176" y="3968496"/>
+            <a:ext cx="2148839" cy="749808"/>
+          </a:xfrm>
+          <a:prstGeom prst="rect">
+            <a:avLst/>
+          </a:prstGeom>
+          <a:noFill/>
+        </p:spPr>
+        <p:txBody>
+          <a:bodyPr wrap="square" anchor="ctr" lIns="0" rIns="0" tIns="0" bIns="0">
+            <a:spAutoFit/>
+          </a:bodyPr>
+          <a:lstStyle/>
+          <a:p>
+            <a:pPr algn="l"/>
+            <a:r>
+              <a:rPr sz="1200" b="1">
+                <a:solidFill>
+                  <a:srgbClr val="3FB950"/>
+                </a:solidFill>
+                <a:latin typeface="Segoe UI"/>
+              </a:rPr>
+              <a:t>no</a:t>
+            </a:r>
+          </a:p>
+        </p:txBody>
+      </p:sp>
+      <p:sp>
+        <p:nvSpPr>
+          <p:cNvPr id="25" name="Rounded Rectangle 24"/>
           <p:cNvSpPr/>
           <p:nvPr/>
         </p:nvSpPr>
         <p:spPr>
           <a:xfrm>
-            <a:off x="731519" y="1965960"/>
-            <a:ext cx="10725912" cy="64008"/>
+            <a:off x="640080" y="5074920"/>
+            <a:ext cx="10927080" cy="1051560"/>
+          </a:xfrm>
+          <a:prstGeom prst="roundRect">
+            <a:avLst/>
+          </a:prstGeom>
+          <a:solidFill>
+            <a:srgbClr val="112A22"/>
+          </a:solidFill>
+          <a:ln>
+            <a:noFill/>
+          </a:ln>
+          <a:effectLst/>
+        </p:spPr>
+        <p:style>
+          <a:lnRef idx="1">
+            <a:schemeClr val="accent1"/>
+          </a:lnRef>
+          <a:fillRef idx="3">
+            <a:schemeClr val="accent1"/>
+          </a:fillRef>
+          <a:effectRef idx="2">
+            <a:schemeClr val="accent1"/>
+          </a:effectRef>
+          <a:fontRef idx="minor">
+            <a:schemeClr val="lt1"/>
+          </a:fontRef>
+        </p:style>
+        <p:txBody>
+          <a:bodyPr rtlCol="0" anchor="ctr"/>
+          <a:lstStyle/>
+          <a:p>
+            <a:pPr algn="ctr"/>
+          </a:p>
+        </p:txBody>
+      </p:sp>
+      <p:sp>
+        <p:nvSpPr>
+          <p:cNvPr id="26" name="Rounded Rectangle 25"/>
+          <p:cNvSpPr/>
+          <p:nvPr/>
+        </p:nvSpPr>
+        <p:spPr>
+          <a:xfrm>
+            <a:off x="731519" y="5120640"/>
+            <a:ext cx="10744200" cy="64008"/>
           </a:xfrm>
           <a:prstGeom prst="roundRect">
             <a:avLst/>
@@ -10764,14 +13730,14 @@
       </p:sp>
       <p:sp>
         <p:nvSpPr>
-          <p:cNvPr id="8" name="TextBox 7"/>
+          <p:cNvPr id="27" name="TextBox 26"/>
           <p:cNvSpPr txBox="1"/>
           <p:nvPr/>
         </p:nvSpPr>
         <p:spPr>
           <a:xfrm>
-            <a:off x="713231" y="1975104"/>
-            <a:ext cx="10762488" cy="804672"/>
+            <a:off x="713231" y="5129783"/>
+            <a:ext cx="10780776" cy="941831"/>
           </a:xfrm>
           <a:prstGeom prst="rect">
             <a:avLst/>
@@ -10792,471 +13758,33 @@
                 </a:solidFill>
                 <a:latin typeface="Segoe UI"/>
               </a:rPr>
-              <a:t>Regressione:</a:t>
-            </a:r>
-            <a:r>
-              <a:rPr sz="1300" b="0">
+              <a:t>Vincitore per i modelli noti a priori: AOT-literal.</a:t>
+            </a:r>
+          </a:p>
+          <a:p>
+            <a:pPr algn="l"/>
+            <a:r>
+              <a:rPr sz="1250" b="0">
                 <a:solidFill>
                   <a:srgbClr val="E6EDF3"/>
                 </a:solidFill>
                 <a:latin typeface="Segoe UI"/>
               </a:rPr>
-              <a:t>  il descrittore di default riproduce l'IV storico byte-identico — stesso codice generato, stessi valori di inferenza.</a:t>
-            </a:r>
-          </a:p>
-        </p:txBody>
-      </p:sp>
-      <p:sp>
-        <p:nvSpPr>
-          <p:cNvPr id="9" name="Rounded Rectangle 8"/>
-          <p:cNvSpPr/>
-          <p:nvPr/>
-        </p:nvSpPr>
-        <p:spPr>
-          <a:xfrm>
-            <a:off x="640080" y="3063240"/>
-            <a:ext cx="3520440" cy="1874519"/>
-          </a:xfrm>
-          <a:prstGeom prst="roundRect">
-            <a:avLst/>
-          </a:prstGeom>
-          <a:solidFill>
-            <a:srgbClr val="1B222E"/>
-          </a:solidFill>
-          <a:ln>
-            <a:noFill/>
-          </a:ln>
-          <a:effectLst/>
-        </p:spPr>
-        <p:style>
-          <a:lnRef idx="1">
-            <a:schemeClr val="accent1"/>
-          </a:lnRef>
-          <a:fillRef idx="3">
-            <a:schemeClr val="accent1"/>
-          </a:fillRef>
-          <a:effectRef idx="2">
-            <a:schemeClr val="accent1"/>
-          </a:effectRef>
-          <a:fontRef idx="minor">
-            <a:schemeClr val="lt1"/>
-          </a:fontRef>
-        </p:style>
-        <p:txBody>
-          <a:bodyPr rtlCol="0" anchor="ctr"/>
-          <a:lstStyle/>
-          <a:p>
-            <a:pPr algn="ctr"/>
-          </a:p>
-        </p:txBody>
-      </p:sp>
-      <p:sp>
-        <p:nvSpPr>
-          <p:cNvPr id="10" name="Rounded Rectangle 9"/>
-          <p:cNvSpPr/>
-          <p:nvPr/>
-        </p:nvSpPr>
-        <p:spPr>
-          <a:xfrm>
-            <a:off x="731519" y="3108960"/>
-            <a:ext cx="3337560" cy="64008"/>
-          </a:xfrm>
-          <a:prstGeom prst="roundRect">
-            <a:avLst/>
-          </a:prstGeom>
-          <a:solidFill>
-            <a:srgbClr val="58A6FF"/>
-          </a:solidFill>
-          <a:ln>
-            <a:noFill/>
-          </a:ln>
-          <a:effectLst/>
-        </p:spPr>
-        <p:style>
-          <a:lnRef idx="1">
-            <a:schemeClr val="accent1"/>
-          </a:lnRef>
-          <a:fillRef idx="3">
-            <a:schemeClr val="accent1"/>
-          </a:fillRef>
-          <a:effectRef idx="2">
-            <a:schemeClr val="accent1"/>
-          </a:effectRef>
-          <a:fontRef idx="minor">
-            <a:schemeClr val="lt1"/>
-          </a:fontRef>
-        </p:style>
-        <p:txBody>
-          <a:bodyPr rtlCol="0" anchor="ctr"/>
-          <a:lstStyle/>
-          <a:p>
-            <a:pPr algn="ctr"/>
-          </a:p>
-        </p:txBody>
-      </p:sp>
-      <p:sp>
-        <p:nvSpPr>
-          <p:cNvPr id="11" name="TextBox 10"/>
+              <a:t>Deploy ~270× più veloce del BCC (6.2 ms vs 1660 ms) E perf massima preservata — il .rodata scambia perf per flessibilità, l'AOT-literal no.</a:t>
+            </a:r>
+          </a:p>
+        </p:txBody>
+      </p:sp>
+      <p:sp>
+        <p:nvSpPr>
+          <p:cNvPr id="28" name="TextBox 27"/>
           <p:cNvSpPr txBox="1"/>
           <p:nvPr/>
         </p:nvSpPr>
         <p:spPr>
           <a:xfrm>
-            <a:off x="713231" y="3118104"/>
-            <a:ext cx="3374136" cy="1764791"/>
-          </a:xfrm>
-          <a:prstGeom prst="rect">
-            <a:avLst/>
-          </a:prstGeom>
-          <a:noFill/>
-        </p:spPr>
-        <p:txBody>
-          <a:bodyPr wrap="square" anchor="ctr" lIns="0" rIns="0" tIns="0" bIns="0">
-            <a:spAutoFit/>
-          </a:bodyPr>
-          <a:lstStyle/>
-          <a:p>
-            <a:pPr algn="l"/>
-            <a:r>
-              <a:rPr sz="1250" b="1">
-                <a:solidFill>
-                  <a:srgbClr val="58A6FF"/>
-                </a:solidFill>
-                <a:latin typeface="Segoe UI"/>
-              </a:rPr>
-              <a:t>xlated insn</a:t>
-            </a:r>
-          </a:p>
-          <a:p>
-            <a:pPr algn="l"/>
-            <a:r>
-              <a:rPr sz="3400" b="1">
-                <a:solidFill>
-                  <a:srgbClr val="E6EDF3"/>
-                </a:solidFill>
-                <a:latin typeface="Georgia"/>
-              </a:rPr>
-              <a:t>930</a:t>
-            </a:r>
-          </a:p>
-          <a:p>
-            <a:pPr algn="l"/>
-            <a:r>
-              <a:rPr sz="1100" b="0">
-                <a:solidFill>
-                  <a:srgbClr val="8B949E"/>
-                </a:solidFill>
-                <a:latin typeface="Segoe UI"/>
-              </a:rPr>
-              <a:t>≈ 956 di produzione</a:t>
-            </a:r>
-          </a:p>
-        </p:txBody>
-      </p:sp>
-      <p:sp>
-        <p:nvSpPr>
-          <p:cNvPr id="12" name="Rounded Rectangle 11"/>
-          <p:cNvSpPr/>
-          <p:nvPr/>
-        </p:nvSpPr>
-        <p:spPr>
-          <a:xfrm>
-            <a:off x="4334256" y="3063240"/>
-            <a:ext cx="3520440" cy="1874519"/>
-          </a:xfrm>
-          <a:prstGeom prst="roundRect">
-            <a:avLst/>
-          </a:prstGeom>
-          <a:solidFill>
-            <a:srgbClr val="1B222E"/>
-          </a:solidFill>
-          <a:ln>
-            <a:noFill/>
-          </a:ln>
-          <a:effectLst/>
-        </p:spPr>
-        <p:style>
-          <a:lnRef idx="1">
-            <a:schemeClr val="accent1"/>
-          </a:lnRef>
-          <a:fillRef idx="3">
-            <a:schemeClr val="accent1"/>
-          </a:fillRef>
-          <a:effectRef idx="2">
-            <a:schemeClr val="accent1"/>
-          </a:effectRef>
-          <a:fontRef idx="minor">
-            <a:schemeClr val="lt1"/>
-          </a:fontRef>
-        </p:style>
-        <p:txBody>
-          <a:bodyPr rtlCol="0" anchor="ctr"/>
-          <a:lstStyle/>
-          <a:p>
-            <a:pPr algn="ctr"/>
-          </a:p>
-        </p:txBody>
-      </p:sp>
-      <p:sp>
-        <p:nvSpPr>
-          <p:cNvPr id="13" name="Rounded Rectangle 12"/>
-          <p:cNvSpPr/>
-          <p:nvPr/>
-        </p:nvSpPr>
-        <p:spPr>
-          <a:xfrm>
-            <a:off x="4425696" y="3108960"/>
-            <a:ext cx="3337560" cy="64008"/>
-          </a:xfrm>
-          <a:prstGeom prst="roundRect">
-            <a:avLst/>
-          </a:prstGeom>
-          <a:solidFill>
-            <a:srgbClr val="F5A623"/>
-          </a:solidFill>
-          <a:ln>
-            <a:noFill/>
-          </a:ln>
-          <a:effectLst/>
-        </p:spPr>
-        <p:style>
-          <a:lnRef idx="1">
-            <a:schemeClr val="accent1"/>
-          </a:lnRef>
-          <a:fillRef idx="3">
-            <a:schemeClr val="accent1"/>
-          </a:fillRef>
-          <a:effectRef idx="2">
-            <a:schemeClr val="accent1"/>
-          </a:effectRef>
-          <a:fontRef idx="minor">
-            <a:schemeClr val="lt1"/>
-          </a:fontRef>
-        </p:style>
-        <p:txBody>
-          <a:bodyPr rtlCol="0" anchor="ctr"/>
-          <a:lstStyle/>
-          <a:p>
-            <a:pPr algn="ctr"/>
-          </a:p>
-        </p:txBody>
-      </p:sp>
-      <p:sp>
-        <p:nvSpPr>
-          <p:cNvPr id="14" name="TextBox 13"/>
-          <p:cNvSpPr txBox="1"/>
-          <p:nvPr/>
-        </p:nvSpPr>
-        <p:spPr>
-          <a:xfrm>
-            <a:off x="4407408" y="3118104"/>
-            <a:ext cx="3374136" cy="1764791"/>
-          </a:xfrm>
-          <a:prstGeom prst="rect">
-            <a:avLst/>
-          </a:prstGeom>
-          <a:noFill/>
-        </p:spPr>
-        <p:txBody>
-          <a:bodyPr wrap="square" anchor="ctr" lIns="0" rIns="0" tIns="0" bIns="0">
-            <a:spAutoFit/>
-          </a:bodyPr>
-          <a:lstStyle/>
-          <a:p>
-            <a:pPr algn="l"/>
-            <a:r>
-              <a:rPr sz="1250" b="1">
-                <a:solidFill>
-                  <a:srgbClr val="F5A623"/>
-                </a:solidFill>
-                <a:latin typeface="Segoe UI"/>
-              </a:rPr>
-              <a:t>latenza / pacchetto</a:t>
-            </a:r>
-          </a:p>
-          <a:p>
-            <a:pPr algn="l"/>
-            <a:r>
-              <a:rPr sz="3400" b="1">
-                <a:solidFill>
-                  <a:srgbClr val="E6EDF3"/>
-                </a:solidFill>
-                <a:latin typeface="Georgia"/>
-              </a:rPr>
-              <a:t>66 ns</a:t>
-            </a:r>
-          </a:p>
-          <a:p>
-            <a:pPr algn="l"/>
-            <a:r>
-              <a:rPr sz="1100" b="0">
-                <a:solidFill>
-                  <a:srgbClr val="8B949E"/>
-                </a:solidFill>
-                <a:latin typeface="Segoe UI"/>
-              </a:rPr>
-              <a:t>full-path, test-run</a:t>
-            </a:r>
-          </a:p>
-        </p:txBody>
-      </p:sp>
-      <p:sp>
-        <p:nvSpPr>
-          <p:cNvPr id="15" name="Rounded Rectangle 14"/>
-          <p:cNvSpPr/>
-          <p:nvPr/>
-        </p:nvSpPr>
-        <p:spPr>
-          <a:xfrm>
-            <a:off x="8028431" y="3063240"/>
-            <a:ext cx="3520440" cy="1874519"/>
-          </a:xfrm>
-          <a:prstGeom prst="roundRect">
-            <a:avLst/>
-          </a:prstGeom>
-          <a:solidFill>
-            <a:srgbClr val="1B222E"/>
-          </a:solidFill>
-          <a:ln>
-            <a:noFill/>
-          </a:ln>
-          <a:effectLst/>
-        </p:spPr>
-        <p:style>
-          <a:lnRef idx="1">
-            <a:schemeClr val="accent1"/>
-          </a:lnRef>
-          <a:fillRef idx="3">
-            <a:schemeClr val="accent1"/>
-          </a:fillRef>
-          <a:effectRef idx="2">
-            <a:schemeClr val="accent1"/>
-          </a:effectRef>
-          <a:fontRef idx="minor">
-            <a:schemeClr val="lt1"/>
-          </a:fontRef>
-        </p:style>
-        <p:txBody>
-          <a:bodyPr rtlCol="0" anchor="ctr"/>
-          <a:lstStyle/>
-          <a:p>
-            <a:pPr algn="ctr"/>
-          </a:p>
-        </p:txBody>
-      </p:sp>
-      <p:sp>
-        <p:nvSpPr>
-          <p:cNvPr id="16" name="Rounded Rectangle 15"/>
-          <p:cNvSpPr/>
-          <p:nvPr/>
-        </p:nvSpPr>
-        <p:spPr>
-          <a:xfrm>
-            <a:off x="8119871" y="3108960"/>
-            <a:ext cx="3337560" cy="64008"/>
-          </a:xfrm>
-          <a:prstGeom prst="roundRect">
-            <a:avLst/>
-          </a:prstGeom>
-          <a:solidFill>
-            <a:srgbClr val="3FD0C8"/>
-          </a:solidFill>
-          <a:ln>
-            <a:noFill/>
-          </a:ln>
-          <a:effectLst/>
-        </p:spPr>
-        <p:style>
-          <a:lnRef idx="1">
-            <a:schemeClr val="accent1"/>
-          </a:lnRef>
-          <a:fillRef idx="3">
-            <a:schemeClr val="accent1"/>
-          </a:fillRef>
-          <a:effectRef idx="2">
-            <a:schemeClr val="accent1"/>
-          </a:effectRef>
-          <a:fontRef idx="minor">
-            <a:schemeClr val="lt1"/>
-          </a:fontRef>
-        </p:style>
-        <p:txBody>
-          <a:bodyPr rtlCol="0" anchor="ctr"/>
-          <a:lstStyle/>
-          <a:p>
-            <a:pPr algn="ctr"/>
-          </a:p>
-        </p:txBody>
-      </p:sp>
-      <p:sp>
-        <p:nvSpPr>
-          <p:cNvPr id="17" name="TextBox 16"/>
-          <p:cNvSpPr txBox="1"/>
-          <p:nvPr/>
-        </p:nvSpPr>
-        <p:spPr>
-          <a:xfrm>
-            <a:off x="8101583" y="3118104"/>
-            <a:ext cx="3374136" cy="1764791"/>
-          </a:xfrm>
-          <a:prstGeom prst="rect">
-            <a:avLst/>
-          </a:prstGeom>
-          <a:noFill/>
-        </p:spPr>
-        <p:txBody>
-          <a:bodyPr wrap="square" anchor="ctr" lIns="0" rIns="0" tIns="0" bIns="0">
-            <a:spAutoFit/>
-          </a:bodyPr>
-          <a:lstStyle/>
-          <a:p>
-            <a:pPr algn="l"/>
-            <a:r>
-              <a:rPr sz="1250" b="1">
-                <a:solidFill>
-                  <a:srgbClr val="3FD0C8"/>
-                </a:solidFill>
-                <a:latin typeface="Segoe UI"/>
-              </a:rPr>
-              <a:t>throughput</a:t>
-            </a:r>
-          </a:p>
-          <a:p>
-            <a:pPr algn="l"/>
-            <a:r>
-              <a:rPr sz="3000" b="1">
-                <a:solidFill>
-                  <a:srgbClr val="E6EDF3"/>
-                </a:solidFill>
-                <a:latin typeface="Georgia"/>
-              </a:rPr>
-              <a:t>15.2 Mpps</a:t>
-            </a:r>
-          </a:p>
-          <a:p>
-            <a:pPr algn="l"/>
-            <a:r>
-              <a:rPr sz="1100" b="0">
-                <a:solidFill>
-                  <a:srgbClr val="8B949E"/>
-                </a:solidFill>
-                <a:latin typeface="Segoe UI"/>
-              </a:rPr>
-              <a:t>compute puro</a:t>
-            </a:r>
-          </a:p>
-        </p:txBody>
-      </p:sp>
-      <p:sp>
-        <p:nvSpPr>
-          <p:cNvPr id="18" name="TextBox 17"/>
-          <p:cNvSpPr txBox="1"/>
-          <p:nvPr/>
-        </p:nvSpPr>
-        <p:spPr>
-          <a:xfrm>
-            <a:off x="640080" y="5257800"/>
-            <a:ext cx="10972800" cy="1188720"/>
+            <a:off x="640080" y="6309360"/>
+            <a:ext cx="10972800" cy="365760"/>
           </a:xfrm>
           <a:prstGeom prst="rect">
             <a:avLst/>
@@ -11269,28 +13797,15 @@
           </a:bodyPr>
           <a:lstStyle/>
           <a:p>
-            <a:pPr algn="l">
-              <a:spcAft>
-                <a:spcPts val="600"/>
-              </a:spcAft>
-            </a:pPr>
-            <a:r>
-              <a:rPr sz="1300" b="1">
+            <a:pPr algn="l"/>
+            <a:r>
+              <a:rPr sz="1150" b="0">
                 <a:solidFill>
                   <a:srgbClr val="8B949E"/>
                 </a:solidFill>
                 <a:latin typeface="Segoe UI"/>
               </a:rPr>
-              <a:t>In sintesi:</a:t>
-            </a:r>
-            <a:r>
-              <a:rPr sz="1300" b="0">
-                <a:solidFill>
-                  <a:srgbClr val="E6EDF3"/>
-                </a:solidFill>
-                <a:latin typeface="Segoe UI"/>
-              </a:rPr>
-              <a:t>  IV ora flessibile (feature-set per-modello) a costo zero per lo scenario FRR esistente; la ricompilazione ha una strada per scendere a millisecondi.</a:t>
+              <a:t>method4 (BCC literal) resta intatto come fallback garantito: l'AOT-literal è un loader alternativo, non un rimpiazzo.</a:t>
             </a:r>
           </a:p>
         </p:txBody>

--- a/docs/IPA_hardcoded_IV_ricompilazione.pptx
+++ b/docs/IPA_hardcoded_IV_ricompilazione.pptx
@@ -5,19 +5,19 @@
     <p:sldMasterId id="2147483648" r:id="rId1"/>
   </p:sldMasterIdLst>
   <p:sldIdLst>
-    <p:sldId id="256" r:id="rId7"/>
-    <p:sldId id="257" r:id="rId8"/>
-    <p:sldId id="258" r:id="rId9"/>
-    <p:sldId id="259" r:id="rId10"/>
-    <p:sldId id="260" r:id="rId11"/>
-    <p:sldId id="261" r:id="rId12"/>
-    <p:sldId id="262" r:id="rId13"/>
-    <p:sldId id="263" r:id="rId14"/>
-    <p:sldId id="264" r:id="rId15"/>
-    <p:sldId id="265" r:id="rId16"/>
-    <p:sldId id="266" r:id="rId17"/>
+    <p:sldId id="256" r:id="rId2"/>
+    <p:sldId id="257" r:id="rId3"/>
+    <p:sldId id="258" r:id="rId4"/>
+    <p:sldId id="259" r:id="rId5"/>
+    <p:sldId id="260" r:id="rId6"/>
+    <p:sldId id="261" r:id="rId7"/>
+    <p:sldId id="262" r:id="rId8"/>
+    <p:sldId id="263" r:id="rId9"/>
+    <p:sldId id="264" r:id="rId10"/>
+    <p:sldId id="265" r:id="rId11"/>
+    <p:sldId id="266" r:id="rId12"/>
   </p:sldIdLst>
-  <p:sldSz cx="12191969" cy="6858000" type="screen4x3"/>
+  <p:sldSz cx="12192000" cy="6858000"/>
   <p:notesSz cx="6858000" cy="9144000"/>
   <p:defaultTextStyle>
     <a:defPPr>
@@ -114,6 +114,22 @@
       </a:defRPr>
     </a:lvl9pPr>
   </p:defaultTextStyle>
+  <p:extLst>
+    <p:ext uri="{EFAFB233-063F-42B5-8137-9DF3F51BA10A}">
+      <p15:sldGuideLst xmlns:p15="http://schemas.microsoft.com/office/powerpoint/2012/main">
+        <p15:guide id="1" orient="horz" pos="2160">
+          <p15:clr>
+            <a:srgbClr val="A4A3A4"/>
+          </p15:clr>
+        </p15:guide>
+        <p15:guide id="2" pos="2880">
+          <p15:clr>
+            <a:srgbClr val="A4A3A4"/>
+          </p15:clr>
+        </p15:guide>
+      </p15:sldGuideLst>
+    </p:ext>
+  </p:extLst>
 </p:presentation>
 </file>
 
@@ -155,10 +171,9 @@
           <a:lstStyle/>
           <a:p>
             <a:r>
-              <a:rPr lang="en-US" smtClean="0"/>
+              <a:rPr lang="en-US"/>
               <a:t>Click to edit Master title style</a:t>
             </a:r>
-            <a:endParaRPr lang="en-US"/>
           </a:p>
         </p:txBody>
       </p:sp>
@@ -274,10 +289,9 @@
           </a:lstStyle>
           <a:p>
             <a:r>
-              <a:rPr lang="en-US" smtClean="0"/>
+              <a:rPr lang="en-US"/>
               <a:t>Click to edit Master subtitle style</a:t>
             </a:r>
-            <a:endParaRPr lang="en-US"/>
           </a:p>
         </p:txBody>
       </p:sp>
@@ -298,7 +312,7 @@
           <a:p>
             <a:fld id="{5BCAD085-E8A6-8845-BD4E-CB4CCA059FC4}" type="datetimeFigureOut">
               <a:rPr lang="en-US" smtClean="0"/>
-              <a:t>1/27/13</a:t>
+              <a:t>7/14/2026</a:t>
             </a:fld>
             <a:endParaRPr lang="en-US"/>
           </a:p>
@@ -340,7 +354,7 @@
           <a:p>
             <a:fld id="{C1FF6DA9-008F-8B48-92A6-B652298478BF}" type="slidenum">
               <a:rPr lang="en-US" smtClean="0"/>
-              <a:t>‹#›</a:t>
+              <a:t>‹N›</a:t>
             </a:fld>
             <a:endParaRPr lang="en-US"/>
           </a:p>
@@ -392,10 +406,9 @@
           <a:lstStyle/>
           <a:p>
             <a:r>
-              <a:rPr lang="en-US" smtClean="0"/>
+              <a:rPr lang="en-US"/>
               <a:t>Click to edit Master title style</a:t>
             </a:r>
-            <a:endParaRPr lang="en-US"/>
           </a:p>
         </p:txBody>
       </p:sp>
@@ -416,38 +429,37 @@
           <a:p>
             <a:pPr lvl="0"/>
             <a:r>
-              <a:rPr lang="en-US" smtClean="0"/>
+              <a:rPr lang="en-US"/>
               <a:t>Click to edit Master text styles</a:t>
             </a:r>
           </a:p>
           <a:p>
             <a:pPr lvl="1"/>
             <a:r>
-              <a:rPr lang="en-US" smtClean="0"/>
+              <a:rPr lang="en-US"/>
               <a:t>Second level</a:t>
             </a:r>
           </a:p>
           <a:p>
             <a:pPr lvl="2"/>
             <a:r>
-              <a:rPr lang="en-US" smtClean="0"/>
+              <a:rPr lang="en-US"/>
               <a:t>Third level</a:t>
             </a:r>
           </a:p>
           <a:p>
             <a:pPr lvl="3"/>
             <a:r>
-              <a:rPr lang="en-US" smtClean="0"/>
+              <a:rPr lang="en-US"/>
               <a:t>Fourth level</a:t>
             </a:r>
           </a:p>
           <a:p>
             <a:pPr lvl="4"/>
             <a:r>
-              <a:rPr lang="en-US" smtClean="0"/>
+              <a:rPr lang="en-US"/>
               <a:t>Fifth level</a:t>
             </a:r>
-            <a:endParaRPr lang="en-US"/>
           </a:p>
         </p:txBody>
       </p:sp>
@@ -468,7 +480,7 @@
           <a:p>
             <a:fld id="{5BCAD085-E8A6-8845-BD4E-CB4CCA059FC4}" type="datetimeFigureOut">
               <a:rPr lang="en-US" smtClean="0"/>
-              <a:t>1/27/13</a:t>
+              <a:t>7/14/2026</a:t>
             </a:fld>
             <a:endParaRPr lang="en-US"/>
           </a:p>
@@ -510,7 +522,7 @@
           <a:p>
             <a:fld id="{C1FF6DA9-008F-8B48-92A6-B652298478BF}" type="slidenum">
               <a:rPr lang="en-US" smtClean="0"/>
-              <a:t>‹#›</a:t>
+              <a:t>‹N›</a:t>
             </a:fld>
             <a:endParaRPr lang="en-US"/>
           </a:p>
@@ -567,10 +579,9 @@
           <a:lstStyle/>
           <a:p>
             <a:r>
-              <a:rPr lang="en-US" smtClean="0"/>
+              <a:rPr lang="en-US"/>
               <a:t>Click to edit Master title style</a:t>
             </a:r>
-            <a:endParaRPr lang="en-US"/>
           </a:p>
         </p:txBody>
       </p:sp>
@@ -596,38 +607,37 @@
           <a:p>
             <a:pPr lvl="0"/>
             <a:r>
-              <a:rPr lang="en-US" smtClean="0"/>
+              <a:rPr lang="en-US"/>
               <a:t>Click to edit Master text styles</a:t>
             </a:r>
           </a:p>
           <a:p>
             <a:pPr lvl="1"/>
             <a:r>
-              <a:rPr lang="en-US" smtClean="0"/>
+              <a:rPr lang="en-US"/>
               <a:t>Second level</a:t>
             </a:r>
           </a:p>
           <a:p>
             <a:pPr lvl="2"/>
             <a:r>
-              <a:rPr lang="en-US" smtClean="0"/>
+              <a:rPr lang="en-US"/>
               <a:t>Third level</a:t>
             </a:r>
           </a:p>
           <a:p>
             <a:pPr lvl="3"/>
             <a:r>
-              <a:rPr lang="en-US" smtClean="0"/>
+              <a:rPr lang="en-US"/>
               <a:t>Fourth level</a:t>
             </a:r>
           </a:p>
           <a:p>
             <a:pPr lvl="4"/>
             <a:r>
-              <a:rPr lang="en-US" smtClean="0"/>
+              <a:rPr lang="en-US"/>
               <a:t>Fifth level</a:t>
             </a:r>
-            <a:endParaRPr lang="en-US"/>
           </a:p>
         </p:txBody>
       </p:sp>
@@ -648,7 +658,7 @@
           <a:p>
             <a:fld id="{5BCAD085-E8A6-8845-BD4E-CB4CCA059FC4}" type="datetimeFigureOut">
               <a:rPr lang="en-US" smtClean="0"/>
-              <a:t>1/27/13</a:t>
+              <a:t>7/14/2026</a:t>
             </a:fld>
             <a:endParaRPr lang="en-US"/>
           </a:p>
@@ -690,7 +700,7 @@
           <a:p>
             <a:fld id="{C1FF6DA9-008F-8B48-92A6-B652298478BF}" type="slidenum">
               <a:rPr lang="en-US" smtClean="0"/>
-              <a:t>‹#›</a:t>
+              <a:t>‹N›</a:t>
             </a:fld>
             <a:endParaRPr lang="en-US"/>
           </a:p>
@@ -742,10 +752,9 @@
           <a:lstStyle/>
           <a:p>
             <a:r>
-              <a:rPr lang="en-US" smtClean="0"/>
+              <a:rPr lang="en-US"/>
               <a:t>Click to edit Master title style</a:t>
             </a:r>
-            <a:endParaRPr lang="en-US"/>
           </a:p>
         </p:txBody>
       </p:sp>
@@ -766,38 +775,37 @@
           <a:p>
             <a:pPr lvl="0"/>
             <a:r>
-              <a:rPr lang="en-US" smtClean="0"/>
+              <a:rPr lang="en-US"/>
               <a:t>Click to edit Master text styles</a:t>
             </a:r>
           </a:p>
           <a:p>
             <a:pPr lvl="1"/>
             <a:r>
-              <a:rPr lang="en-US" smtClean="0"/>
+              <a:rPr lang="en-US"/>
               <a:t>Second level</a:t>
             </a:r>
           </a:p>
           <a:p>
             <a:pPr lvl="2"/>
             <a:r>
-              <a:rPr lang="en-US" smtClean="0"/>
+              <a:rPr lang="en-US"/>
               <a:t>Third level</a:t>
             </a:r>
           </a:p>
           <a:p>
             <a:pPr lvl="3"/>
             <a:r>
-              <a:rPr lang="en-US" smtClean="0"/>
+              <a:rPr lang="en-US"/>
               <a:t>Fourth level</a:t>
             </a:r>
           </a:p>
           <a:p>
             <a:pPr lvl="4"/>
             <a:r>
-              <a:rPr lang="en-US" smtClean="0"/>
+              <a:rPr lang="en-US"/>
               <a:t>Fifth level</a:t>
             </a:r>
-            <a:endParaRPr lang="en-US"/>
           </a:p>
         </p:txBody>
       </p:sp>
@@ -818,7 +826,7 @@
           <a:p>
             <a:fld id="{5BCAD085-E8A6-8845-BD4E-CB4CCA059FC4}" type="datetimeFigureOut">
               <a:rPr lang="en-US" smtClean="0"/>
-              <a:t>1/27/13</a:t>
+              <a:t>7/14/2026</a:t>
             </a:fld>
             <a:endParaRPr lang="en-US"/>
           </a:p>
@@ -860,7 +868,7 @@
           <a:p>
             <a:fld id="{C1FF6DA9-008F-8B48-92A6-B652298478BF}" type="slidenum">
               <a:rPr lang="en-US" smtClean="0"/>
-              <a:t>‹#›</a:t>
+              <a:t>‹N›</a:t>
             </a:fld>
             <a:endParaRPr lang="en-US"/>
           </a:p>
@@ -921,10 +929,9 @@
           </a:lstStyle>
           <a:p>
             <a:r>
-              <a:rPr lang="en-US" smtClean="0"/>
+              <a:rPr lang="en-US"/>
               <a:t>Click to edit Master title style</a:t>
             </a:r>
-            <a:endParaRPr lang="en-US"/>
           </a:p>
         </p:txBody>
       </p:sp>
@@ -1041,7 +1048,7 @@
           <a:p>
             <a:pPr lvl="0"/>
             <a:r>
-              <a:rPr lang="en-US" smtClean="0"/>
+              <a:rPr lang="en-US"/>
               <a:t>Click to edit Master text styles</a:t>
             </a:r>
           </a:p>
@@ -1064,7 +1071,7 @@
           <a:p>
             <a:fld id="{5BCAD085-E8A6-8845-BD4E-CB4CCA059FC4}" type="datetimeFigureOut">
               <a:rPr lang="en-US" smtClean="0"/>
-              <a:t>1/27/13</a:t>
+              <a:t>7/14/2026</a:t>
             </a:fld>
             <a:endParaRPr lang="en-US"/>
           </a:p>
@@ -1106,7 +1113,7 @@
           <a:p>
             <a:fld id="{C1FF6DA9-008F-8B48-92A6-B652298478BF}" type="slidenum">
               <a:rPr lang="en-US" smtClean="0"/>
-              <a:t>‹#›</a:t>
+              <a:t>‹N›</a:t>
             </a:fld>
             <a:endParaRPr lang="en-US"/>
           </a:p>
@@ -1158,10 +1165,9 @@
           <a:lstStyle/>
           <a:p>
             <a:r>
-              <a:rPr lang="en-US" smtClean="0"/>
+              <a:rPr lang="en-US"/>
               <a:t>Click to edit Master title style</a:t>
             </a:r>
-            <a:endParaRPr lang="en-US"/>
           </a:p>
         </p:txBody>
       </p:sp>
@@ -1215,38 +1221,37 @@
           <a:p>
             <a:pPr lvl="0"/>
             <a:r>
-              <a:rPr lang="en-US" smtClean="0"/>
+              <a:rPr lang="en-US"/>
               <a:t>Click to edit Master text styles</a:t>
             </a:r>
           </a:p>
           <a:p>
             <a:pPr lvl="1"/>
             <a:r>
-              <a:rPr lang="en-US" smtClean="0"/>
+              <a:rPr lang="en-US"/>
               <a:t>Second level</a:t>
             </a:r>
           </a:p>
           <a:p>
             <a:pPr lvl="2"/>
             <a:r>
-              <a:rPr lang="en-US" smtClean="0"/>
+              <a:rPr lang="en-US"/>
               <a:t>Third level</a:t>
             </a:r>
           </a:p>
           <a:p>
             <a:pPr lvl="3"/>
             <a:r>
-              <a:rPr lang="en-US" smtClean="0"/>
+              <a:rPr lang="en-US"/>
               <a:t>Fourth level</a:t>
             </a:r>
           </a:p>
           <a:p>
             <a:pPr lvl="4"/>
             <a:r>
-              <a:rPr lang="en-US" smtClean="0"/>
+              <a:rPr lang="en-US"/>
               <a:t>Fifth level</a:t>
             </a:r>
-            <a:endParaRPr lang="en-US"/>
           </a:p>
         </p:txBody>
       </p:sp>
@@ -1300,38 +1305,37 @@
           <a:p>
             <a:pPr lvl="0"/>
             <a:r>
-              <a:rPr lang="en-US" smtClean="0"/>
+              <a:rPr lang="en-US"/>
               <a:t>Click to edit Master text styles</a:t>
             </a:r>
           </a:p>
           <a:p>
             <a:pPr lvl="1"/>
             <a:r>
-              <a:rPr lang="en-US" smtClean="0"/>
+              <a:rPr lang="en-US"/>
               <a:t>Second level</a:t>
             </a:r>
           </a:p>
           <a:p>
             <a:pPr lvl="2"/>
             <a:r>
-              <a:rPr lang="en-US" smtClean="0"/>
+              <a:rPr lang="en-US"/>
               <a:t>Third level</a:t>
             </a:r>
           </a:p>
           <a:p>
             <a:pPr lvl="3"/>
             <a:r>
-              <a:rPr lang="en-US" smtClean="0"/>
+              <a:rPr lang="en-US"/>
               <a:t>Fourth level</a:t>
             </a:r>
           </a:p>
           <a:p>
             <a:pPr lvl="4"/>
             <a:r>
-              <a:rPr lang="en-US" smtClean="0"/>
+              <a:rPr lang="en-US"/>
               <a:t>Fifth level</a:t>
             </a:r>
-            <a:endParaRPr lang="en-US"/>
           </a:p>
         </p:txBody>
       </p:sp>
@@ -1352,7 +1356,7 @@
           <a:p>
             <a:fld id="{5BCAD085-E8A6-8845-BD4E-CB4CCA059FC4}" type="datetimeFigureOut">
               <a:rPr lang="en-US" smtClean="0"/>
-              <a:t>1/27/13</a:t>
+              <a:t>7/14/2026</a:t>
             </a:fld>
             <a:endParaRPr lang="en-US"/>
           </a:p>
@@ -1394,7 +1398,7 @@
           <a:p>
             <a:fld id="{C1FF6DA9-008F-8B48-92A6-B652298478BF}" type="slidenum">
               <a:rPr lang="en-US" smtClean="0"/>
-              <a:t>‹#›</a:t>
+              <a:t>‹N›</a:t>
             </a:fld>
             <a:endParaRPr lang="en-US"/>
           </a:p>
@@ -1450,10 +1454,9 @@
           </a:lstStyle>
           <a:p>
             <a:r>
-              <a:rPr lang="en-US" smtClean="0"/>
+              <a:rPr lang="en-US"/>
               <a:t>Click to edit Master title style</a:t>
             </a:r>
-            <a:endParaRPr lang="en-US"/>
           </a:p>
         </p:txBody>
       </p:sp>
@@ -1516,7 +1519,7 @@
           <a:p>
             <a:pPr lvl="0"/>
             <a:r>
-              <a:rPr lang="en-US" smtClean="0"/>
+              <a:rPr lang="en-US"/>
               <a:t>Click to edit Master text styles</a:t>
             </a:r>
           </a:p>
@@ -1572,38 +1575,37 @@
           <a:p>
             <a:pPr lvl="0"/>
             <a:r>
-              <a:rPr lang="en-US" smtClean="0"/>
+              <a:rPr lang="en-US"/>
               <a:t>Click to edit Master text styles</a:t>
             </a:r>
           </a:p>
           <a:p>
             <a:pPr lvl="1"/>
             <a:r>
-              <a:rPr lang="en-US" smtClean="0"/>
+              <a:rPr lang="en-US"/>
               <a:t>Second level</a:t>
             </a:r>
           </a:p>
           <a:p>
             <a:pPr lvl="2"/>
             <a:r>
-              <a:rPr lang="en-US" smtClean="0"/>
+              <a:rPr lang="en-US"/>
               <a:t>Third level</a:t>
             </a:r>
           </a:p>
           <a:p>
             <a:pPr lvl="3"/>
             <a:r>
-              <a:rPr lang="en-US" smtClean="0"/>
+              <a:rPr lang="en-US"/>
               <a:t>Fourth level</a:t>
             </a:r>
           </a:p>
           <a:p>
             <a:pPr lvl="4"/>
             <a:r>
-              <a:rPr lang="en-US" smtClean="0"/>
+              <a:rPr lang="en-US"/>
               <a:t>Fifth level</a:t>
             </a:r>
-            <a:endParaRPr lang="en-US"/>
           </a:p>
         </p:txBody>
       </p:sp>
@@ -1666,7 +1668,7 @@
           <a:p>
             <a:pPr lvl="0"/>
             <a:r>
-              <a:rPr lang="en-US" smtClean="0"/>
+              <a:rPr lang="en-US"/>
               <a:t>Click to edit Master text styles</a:t>
             </a:r>
           </a:p>
@@ -1722,38 +1724,37 @@
           <a:p>
             <a:pPr lvl="0"/>
             <a:r>
-              <a:rPr lang="en-US" smtClean="0"/>
+              <a:rPr lang="en-US"/>
               <a:t>Click to edit Master text styles</a:t>
             </a:r>
           </a:p>
           <a:p>
             <a:pPr lvl="1"/>
             <a:r>
-              <a:rPr lang="en-US" smtClean="0"/>
+              <a:rPr lang="en-US"/>
               <a:t>Second level</a:t>
             </a:r>
           </a:p>
           <a:p>
             <a:pPr lvl="2"/>
             <a:r>
-              <a:rPr lang="en-US" smtClean="0"/>
+              <a:rPr lang="en-US"/>
               <a:t>Third level</a:t>
             </a:r>
           </a:p>
           <a:p>
             <a:pPr lvl="3"/>
             <a:r>
-              <a:rPr lang="en-US" smtClean="0"/>
+              <a:rPr lang="en-US"/>
               <a:t>Fourth level</a:t>
             </a:r>
           </a:p>
           <a:p>
             <a:pPr lvl="4"/>
             <a:r>
-              <a:rPr lang="en-US" smtClean="0"/>
+              <a:rPr lang="en-US"/>
               <a:t>Fifth level</a:t>
             </a:r>
-            <a:endParaRPr lang="en-US"/>
           </a:p>
         </p:txBody>
       </p:sp>
@@ -1774,7 +1775,7 @@
           <a:p>
             <a:fld id="{5BCAD085-E8A6-8845-BD4E-CB4CCA059FC4}" type="datetimeFigureOut">
               <a:rPr lang="en-US" smtClean="0"/>
-              <a:t>1/27/13</a:t>
+              <a:t>7/14/2026</a:t>
             </a:fld>
             <a:endParaRPr lang="en-US"/>
           </a:p>
@@ -1816,7 +1817,7 @@
           <a:p>
             <a:fld id="{C1FF6DA9-008F-8B48-92A6-B652298478BF}" type="slidenum">
               <a:rPr lang="en-US" smtClean="0"/>
-              <a:t>‹#›</a:t>
+              <a:t>‹N›</a:t>
             </a:fld>
             <a:endParaRPr lang="en-US"/>
           </a:p>
@@ -1868,10 +1869,9 @@
           <a:lstStyle/>
           <a:p>
             <a:r>
-              <a:rPr lang="en-US" smtClean="0"/>
+              <a:rPr lang="en-US"/>
               <a:t>Click to edit Master title style</a:t>
             </a:r>
-            <a:endParaRPr lang="en-US"/>
           </a:p>
         </p:txBody>
       </p:sp>
@@ -1892,7 +1892,7 @@
           <a:p>
             <a:fld id="{5BCAD085-E8A6-8845-BD4E-CB4CCA059FC4}" type="datetimeFigureOut">
               <a:rPr lang="en-US" smtClean="0"/>
-              <a:t>1/27/13</a:t>
+              <a:t>7/14/2026</a:t>
             </a:fld>
             <a:endParaRPr lang="en-US"/>
           </a:p>
@@ -1934,7 +1934,7 @@
           <a:p>
             <a:fld id="{C1FF6DA9-008F-8B48-92A6-B652298478BF}" type="slidenum">
               <a:rPr lang="en-US" smtClean="0"/>
-              <a:t>‹#›</a:t>
+              <a:t>‹N›</a:t>
             </a:fld>
             <a:endParaRPr lang="en-US"/>
           </a:p>
@@ -1987,7 +1987,7 @@
           <a:p>
             <a:fld id="{5BCAD085-E8A6-8845-BD4E-CB4CCA059FC4}" type="datetimeFigureOut">
               <a:rPr lang="en-US" smtClean="0"/>
-              <a:t>1/27/13</a:t>
+              <a:t>7/14/2026</a:t>
             </a:fld>
             <a:endParaRPr lang="en-US"/>
           </a:p>
@@ -2029,7 +2029,7 @@
           <a:p>
             <a:fld id="{C1FF6DA9-008F-8B48-92A6-B652298478BF}" type="slidenum">
               <a:rPr lang="en-US" smtClean="0"/>
-              <a:t>‹#›</a:t>
+              <a:t>‹N›</a:t>
             </a:fld>
             <a:endParaRPr lang="en-US"/>
           </a:p>
@@ -2090,10 +2090,9 @@
           </a:lstStyle>
           <a:p>
             <a:r>
-              <a:rPr lang="en-US" smtClean="0"/>
+              <a:rPr lang="en-US"/>
               <a:t>Click to edit Master title style</a:t>
             </a:r>
-            <a:endParaRPr lang="en-US"/>
           </a:p>
         </p:txBody>
       </p:sp>
@@ -2147,38 +2146,37 @@
           <a:p>
             <a:pPr lvl="0"/>
             <a:r>
-              <a:rPr lang="en-US" smtClean="0"/>
+              <a:rPr lang="en-US"/>
               <a:t>Click to edit Master text styles</a:t>
             </a:r>
           </a:p>
           <a:p>
             <a:pPr lvl="1"/>
             <a:r>
-              <a:rPr lang="en-US" smtClean="0"/>
+              <a:rPr lang="en-US"/>
               <a:t>Second level</a:t>
             </a:r>
           </a:p>
           <a:p>
             <a:pPr lvl="2"/>
             <a:r>
-              <a:rPr lang="en-US" smtClean="0"/>
+              <a:rPr lang="en-US"/>
               <a:t>Third level</a:t>
             </a:r>
           </a:p>
           <a:p>
             <a:pPr lvl="3"/>
             <a:r>
-              <a:rPr lang="en-US" smtClean="0"/>
+              <a:rPr lang="en-US"/>
               <a:t>Fourth level</a:t>
             </a:r>
           </a:p>
           <a:p>
             <a:pPr lvl="4"/>
             <a:r>
-              <a:rPr lang="en-US" smtClean="0"/>
+              <a:rPr lang="en-US"/>
               <a:t>Fifth level</a:t>
             </a:r>
-            <a:endParaRPr lang="en-US"/>
           </a:p>
         </p:txBody>
       </p:sp>
@@ -2241,7 +2239,7 @@
           <a:p>
             <a:pPr lvl="0"/>
             <a:r>
-              <a:rPr lang="en-US" smtClean="0"/>
+              <a:rPr lang="en-US"/>
               <a:t>Click to edit Master text styles</a:t>
             </a:r>
           </a:p>
@@ -2264,7 +2262,7 @@
           <a:p>
             <a:fld id="{5BCAD085-E8A6-8845-BD4E-CB4CCA059FC4}" type="datetimeFigureOut">
               <a:rPr lang="en-US" smtClean="0"/>
-              <a:t>1/27/13</a:t>
+              <a:t>7/14/2026</a:t>
             </a:fld>
             <a:endParaRPr lang="en-US"/>
           </a:p>
@@ -2306,7 +2304,7 @@
           <a:p>
             <a:fld id="{C1FF6DA9-008F-8B48-92A6-B652298478BF}" type="slidenum">
               <a:rPr lang="en-US" smtClean="0"/>
-              <a:t>‹#›</a:t>
+              <a:t>‹N›</a:t>
             </a:fld>
             <a:endParaRPr lang="en-US"/>
           </a:p>
@@ -2367,10 +2365,9 @@
           </a:lstStyle>
           <a:p>
             <a:r>
-              <a:rPr lang="en-US" smtClean="0"/>
+              <a:rPr lang="en-US"/>
               <a:t>Click to edit Master title style</a:t>
             </a:r>
-            <a:endParaRPr lang="en-US"/>
           </a:p>
         </p:txBody>
       </p:sp>
@@ -2494,7 +2491,7 @@
           <a:p>
             <a:pPr lvl="0"/>
             <a:r>
-              <a:rPr lang="en-US" smtClean="0"/>
+              <a:rPr lang="en-US"/>
               <a:t>Click to edit Master text styles</a:t>
             </a:r>
           </a:p>
@@ -2517,7 +2514,7 @@
           <a:p>
             <a:fld id="{5BCAD085-E8A6-8845-BD4E-CB4CCA059FC4}" type="datetimeFigureOut">
               <a:rPr lang="en-US" smtClean="0"/>
-              <a:t>1/27/13</a:t>
+              <a:t>7/14/2026</a:t>
             </a:fld>
             <a:endParaRPr lang="en-US"/>
           </a:p>
@@ -2559,7 +2556,7 @@
           <a:p>
             <a:fld id="{C1FF6DA9-008F-8B48-92A6-B652298478BF}" type="slidenum">
               <a:rPr lang="en-US" smtClean="0"/>
-              <a:t>‹#›</a:t>
+              <a:t>‹N›</a:t>
             </a:fld>
             <a:endParaRPr lang="en-US"/>
           </a:p>
@@ -2626,10 +2623,9 @@
           <a:lstStyle/>
           <a:p>
             <a:r>
-              <a:rPr lang="en-US" smtClean="0"/>
+              <a:rPr lang="en-US"/>
               <a:t>Click to edit Master title style</a:t>
             </a:r>
-            <a:endParaRPr lang="en-US"/>
           </a:p>
         </p:txBody>
       </p:sp>
@@ -2660,38 +2656,37 @@
           <a:p>
             <a:pPr lvl="0"/>
             <a:r>
-              <a:rPr lang="en-US" smtClean="0"/>
+              <a:rPr lang="en-US"/>
               <a:t>Click to edit Master text styles</a:t>
             </a:r>
           </a:p>
           <a:p>
             <a:pPr lvl="1"/>
             <a:r>
-              <a:rPr lang="en-US" smtClean="0"/>
+              <a:rPr lang="en-US"/>
               <a:t>Second level</a:t>
             </a:r>
           </a:p>
           <a:p>
             <a:pPr lvl="2"/>
             <a:r>
-              <a:rPr lang="en-US" smtClean="0"/>
+              <a:rPr lang="en-US"/>
               <a:t>Third level</a:t>
             </a:r>
           </a:p>
           <a:p>
             <a:pPr lvl="3"/>
             <a:r>
-              <a:rPr lang="en-US" smtClean="0"/>
+              <a:rPr lang="en-US"/>
               <a:t>Fourth level</a:t>
             </a:r>
           </a:p>
           <a:p>
             <a:pPr lvl="4"/>
             <a:r>
-              <a:rPr lang="en-US" smtClean="0"/>
+              <a:rPr lang="en-US"/>
               <a:t>Fifth level</a:t>
             </a:r>
-            <a:endParaRPr lang="en-US"/>
           </a:p>
         </p:txBody>
       </p:sp>
@@ -2730,7 +2725,7 @@
           <a:p>
             <a:fld id="{5BCAD085-E8A6-8845-BD4E-CB4CCA059FC4}" type="datetimeFigureOut">
               <a:rPr lang="en-US" smtClean="0"/>
-              <a:t>1/27/13</a:t>
+              <a:t>7/14/2026</a:t>
             </a:fld>
             <a:endParaRPr lang="en-US"/>
           </a:p>
@@ -2808,7 +2803,7 @@
           <a:p>
             <a:fld id="{C1FF6DA9-008F-8B48-92A6-B652298478BF}" type="slidenum">
               <a:rPr lang="en-US" smtClean="0"/>
-              <a:t>‹#›</a:t>
+              <a:t>‹N›</a:t>
             </a:fld>
             <a:endParaRPr lang="en-US"/>
           </a:p>
@@ -3089,7 +3084,7 @@
 </file>
 
 <file path=ppt/slides/slide1.xml><?xml version="1.0" encoding="utf-8"?>
-<p:sld xmlns:a="http://schemas.openxmlformats.org/drawingml/2006/main" xmlns:p="http://schemas.openxmlformats.org/presentationml/2006/main" xmlns:r="http://schemas.openxmlformats.org/officeDocument/2006/relationships">
+<p:sld xmlns:a="http://schemas.openxmlformats.org/drawingml/2006/main" xmlns:r="http://schemas.openxmlformats.org/officeDocument/2006/relationships" xmlns:p="http://schemas.openxmlformats.org/presentationml/2006/main">
   <p:cSld>
     <p:spTree>
       <p:nvGrpSpPr>
@@ -3097,7 +3092,14 @@
         <p:cNvGrpSpPr/>
         <p:nvPr/>
       </p:nvGrpSpPr>
-      <p:grpSpPr/>
+      <p:grpSpPr>
+        <a:xfrm>
+          <a:off x="0" y="0"/>
+          <a:ext cx="0" cy="0"/>
+          <a:chOff x="0" y="0"/>
+          <a:chExt cx="0" cy="0"/>
+        </a:xfrm>
+      </p:grpSpPr>
       <p:sp>
         <p:nvSpPr>
           <p:cNvPr id="2" name="Rectangle 1"/>
@@ -3139,6 +3141,7 @@
           <a:lstStyle/>
           <a:p>
             <a:pPr algn="ctr"/>
+            <a:endParaRPr/>
           </a:p>
         </p:txBody>
       </p:sp>
@@ -3183,6 +3186,7 @@
           <a:lstStyle/>
           <a:p>
             <a:pPr algn="ctr"/>
+            <a:endParaRPr/>
           </a:p>
         </p:txBody>
       </p:sp>
@@ -3227,6 +3231,7 @@
           <a:lstStyle/>
           <a:p>
             <a:pPr algn="ctr"/>
+            <a:endParaRPr/>
           </a:p>
         </p:txBody>
       </p:sp>
@@ -3271,6 +3276,7 @@
           <a:lstStyle/>
           <a:p>
             <a:pPr algn="ctr"/>
+            <a:endParaRPr/>
           </a:p>
         </p:txBody>
       </p:sp>
@@ -3315,6 +3321,7 @@
           <a:lstStyle/>
           <a:p>
             <a:pPr algn="ctr"/>
+            <a:endParaRPr/>
           </a:p>
         </p:txBody>
       </p:sp>
@@ -3335,7 +3342,7 @@
           <a:noFill/>
         </p:spPr>
         <p:txBody>
-          <a:bodyPr wrap="square" anchor="ctr" lIns="0" rIns="0" tIns="0" bIns="0">
+          <a:bodyPr wrap="square" lIns="0" tIns="0" rIns="0" bIns="0" anchor="ctr">
             <a:spAutoFit/>
           </a:bodyPr>
           <a:lstStyle/>
@@ -3370,7 +3377,7 @@
           <a:noFill/>
         </p:spPr>
         <p:txBody>
-          <a:bodyPr wrap="square" anchor="t" lIns="0" rIns="0" tIns="0" bIns="0">
+          <a:bodyPr wrap="square" lIns="0" tIns="0" rIns="0" bIns="0" anchor="t">
             <a:spAutoFit/>
           </a:bodyPr>
           <a:lstStyle/>
@@ -3405,7 +3412,7 @@
           <a:noFill/>
         </p:spPr>
         <p:txBody>
-          <a:bodyPr wrap="square" anchor="t" lIns="0" rIns="0" tIns="0" bIns="0">
+          <a:bodyPr wrap="square" lIns="0" tIns="0" rIns="0" bIns="0" anchor="t">
             <a:spAutoFit/>
           </a:bodyPr>
           <a:lstStyle/>
@@ -3440,7 +3447,7 @@
           <a:noFill/>
         </p:spPr>
         <p:txBody>
-          <a:bodyPr wrap="square" anchor="t" lIns="0" rIns="0" tIns="0" bIns="0">
+          <a:bodyPr wrap="square" lIns="0" tIns="0" rIns="0" bIns="0" anchor="t">
             <a:spAutoFit/>
           </a:bodyPr>
           <a:lstStyle/>
@@ -3475,7 +3482,7 @@
           <a:noFill/>
         </p:spPr>
         <p:txBody>
-          <a:bodyPr wrap="square" anchor="t" lIns="0" rIns="0" tIns="0" bIns="0">
+          <a:bodyPr wrap="square" lIns="0" tIns="0" rIns="0" bIns="0" anchor="t">
             <a:spAutoFit/>
           </a:bodyPr>
           <a:lstStyle/>
@@ -3511,7 +3518,7 @@
 </file>
 
 <file path=ppt/slides/slide10.xml><?xml version="1.0" encoding="utf-8"?>
-<p:sld xmlns:a="http://schemas.openxmlformats.org/drawingml/2006/main" xmlns:p="http://schemas.openxmlformats.org/presentationml/2006/main" xmlns:r="http://schemas.openxmlformats.org/officeDocument/2006/relationships">
+<p:sld xmlns:a="http://schemas.openxmlformats.org/drawingml/2006/main" xmlns:r="http://schemas.openxmlformats.org/officeDocument/2006/relationships" xmlns:p="http://schemas.openxmlformats.org/presentationml/2006/main">
   <p:cSld>
     <p:spTree>
       <p:nvGrpSpPr>
@@ -3519,7 +3526,14 @@
         <p:cNvGrpSpPr/>
         <p:nvPr/>
       </p:nvGrpSpPr>
-      <p:grpSpPr/>
+      <p:grpSpPr>
+        <a:xfrm>
+          <a:off x="0" y="0"/>
+          <a:ext cx="0" cy="0"/>
+          <a:chOff x="0" y="0"/>
+          <a:chExt cx="0" cy="0"/>
+        </a:xfrm>
+      </p:grpSpPr>
       <p:sp>
         <p:nvSpPr>
           <p:cNvPr id="2" name="Rectangle 1"/>
@@ -3561,6 +3575,7 @@
           <a:lstStyle/>
           <a:p>
             <a:pPr algn="ctr"/>
+            <a:endParaRPr/>
           </a:p>
         </p:txBody>
       </p:sp>
@@ -3581,7 +3596,7 @@
           <a:noFill/>
         </p:spPr>
         <p:txBody>
-          <a:bodyPr wrap="square" anchor="t" lIns="0" rIns="0" tIns="0" bIns="0">
+          <a:bodyPr wrap="square" lIns="0" tIns="0" rIns="0" bIns="0" anchor="t">
             <a:spAutoFit/>
           </a:bodyPr>
           <a:lstStyle/>
@@ -3616,7 +3631,7 @@
           <a:noFill/>
         </p:spPr>
         <p:txBody>
-          <a:bodyPr wrap="square" anchor="t" lIns="0" rIns="0" tIns="0" bIns="0">
+          <a:bodyPr wrap="square" lIns="0" tIns="0" rIns="0" bIns="0" anchor="t">
             <a:spAutoFit/>
           </a:bodyPr>
           <a:lstStyle/>
@@ -3651,7 +3666,7 @@
           <a:noFill/>
         </p:spPr>
         <p:txBody>
-          <a:bodyPr wrap="square" anchor="t" lIns="0" rIns="0" tIns="0" bIns="0">
+          <a:bodyPr wrap="square" lIns="0" tIns="0" rIns="0" bIns="0" anchor="t">
             <a:spAutoFit/>
           </a:bodyPr>
           <a:lstStyle/>
@@ -3710,6 +3725,7 @@
           <a:lstStyle/>
           <a:p>
             <a:pPr algn="ctr"/>
+            <a:endParaRPr/>
           </a:p>
         </p:txBody>
       </p:sp>
@@ -3754,6 +3770,7 @@
           <a:lstStyle/>
           <a:p>
             <a:pPr algn="ctr"/>
+            <a:endParaRPr/>
           </a:p>
         </p:txBody>
       </p:sp>
@@ -3774,7 +3791,7 @@
           <a:noFill/>
         </p:spPr>
         <p:txBody>
-          <a:bodyPr wrap="square" anchor="ctr" lIns="0" rIns="0" tIns="0" bIns="0">
+          <a:bodyPr wrap="square" lIns="0" tIns="0" rIns="0" bIns="0" anchor="ctr">
             <a:spAutoFit/>
           </a:bodyPr>
           <a:lstStyle/>
@@ -3845,6 +3862,7 @@
           <a:lstStyle/>
           <a:p>
             <a:pPr algn="ctr"/>
+            <a:endParaRPr/>
           </a:p>
         </p:txBody>
       </p:sp>
@@ -3889,6 +3907,7 @@
           <a:lstStyle/>
           <a:p>
             <a:pPr algn="ctr"/>
+            <a:endParaRPr/>
           </a:p>
         </p:txBody>
       </p:sp>
@@ -3900,8 +3919,8 @@
         </p:nvSpPr>
         <p:spPr>
           <a:xfrm>
-            <a:off x="6272784" y="1929384"/>
-            <a:ext cx="5202936" cy="1764791"/>
+            <a:off x="6272784" y="2523239"/>
+            <a:ext cx="5202936" cy="577081"/>
           </a:xfrm>
           <a:prstGeom prst="rect">
             <a:avLst/>
@@ -3909,33 +3928,225 @@
           <a:noFill/>
         </p:spPr>
         <p:txBody>
-          <a:bodyPr wrap="square" anchor="ctr" lIns="0" rIns="0" tIns="0" bIns="0">
+          <a:bodyPr wrap="square" lIns="0" tIns="0" rIns="0" bIns="0" anchor="ctr">
             <a:spAutoFit/>
           </a:bodyPr>
           <a:lstStyle/>
           <a:p>
             <a:pPr algn="l"/>
             <a:r>
-              <a:rPr sz="1350" b="1">
+              <a:rPr sz="1350" b="1" dirty="0">
                 <a:solidFill>
                   <a:srgbClr val="3FB950"/>
                 </a:solidFill>
                 <a:latin typeface="Segoe UI"/>
               </a:rPr>
-              <a:t>Se accettato</a:t>
-            </a:r>
+              <a:t>Se </a:t>
+            </a:r>
+            <a:r>
+              <a:rPr sz="1350" b="1" dirty="0" err="1">
+                <a:solidFill>
+                  <a:srgbClr val="3FB950"/>
+                </a:solidFill>
+                <a:latin typeface="Segoe UI"/>
+              </a:rPr>
+              <a:t>accettato</a:t>
+            </a:r>
+            <a:endParaRPr sz="1350" b="1" dirty="0">
+              <a:solidFill>
+                <a:srgbClr val="3FB950"/>
+              </a:solidFill>
+              <a:latin typeface="Segoe UI"/>
+            </a:endParaRPr>
           </a:p>
           <a:p>
             <a:pPr algn="l"/>
             <a:r>
-              <a:rPr sz="1200" b="0">
+              <a:rPr sz="1200" b="0" dirty="0" err="1">
                 <a:solidFill>
                   <a:srgbClr val="E6EDF3"/>
                 </a:solidFill>
                 <a:latin typeface="Segoe UI"/>
               </a:rPr>
-              <a:t>Portare le 3 _gen_feature_* (scalar · dense_vector · onehot) in dialetto libbpf → l'AOT copre ogni modello sparse. ≈ mezza giornata + test.</a:t>
-            </a:r>
+              <a:t>Portare</a:t>
+            </a:r>
+            <a:r>
+              <a:rPr sz="1200" b="0" dirty="0">
+                <a:solidFill>
+                  <a:srgbClr val="E6EDF3"/>
+                </a:solidFill>
+                <a:latin typeface="Segoe UI"/>
+              </a:rPr>
+              <a:t> le 3 _</a:t>
+            </a:r>
+            <a:r>
+              <a:rPr sz="1200" b="0" dirty="0" err="1">
+                <a:solidFill>
+                  <a:srgbClr val="E6EDF3"/>
+                </a:solidFill>
+                <a:latin typeface="Segoe UI"/>
+              </a:rPr>
+              <a:t>gen_feature</a:t>
+            </a:r>
+            <a:r>
+              <a:rPr sz="1200" b="0" dirty="0">
+                <a:solidFill>
+                  <a:srgbClr val="E6EDF3"/>
+                </a:solidFill>
+                <a:latin typeface="Segoe UI"/>
+              </a:rPr>
+              <a:t>_* (scalar · </a:t>
+            </a:r>
+            <a:r>
+              <a:rPr sz="1200" b="0" dirty="0" err="1">
+                <a:solidFill>
+                  <a:srgbClr val="E6EDF3"/>
+                </a:solidFill>
+                <a:latin typeface="Segoe UI"/>
+              </a:rPr>
+              <a:t>dense_vector</a:t>
+            </a:r>
+            <a:r>
+              <a:rPr sz="1200" b="0" dirty="0">
+                <a:solidFill>
+                  <a:srgbClr val="E6EDF3"/>
+                </a:solidFill>
+                <a:latin typeface="Segoe UI"/>
+              </a:rPr>
+              <a:t> · </a:t>
+            </a:r>
+            <a:r>
+              <a:rPr sz="1200" b="0" dirty="0" err="1">
+                <a:solidFill>
+                  <a:srgbClr val="E6EDF3"/>
+                </a:solidFill>
+                <a:latin typeface="Segoe UI"/>
+              </a:rPr>
+              <a:t>onehot</a:t>
+            </a:r>
+            <a:r>
+              <a:rPr sz="1200" b="0" dirty="0">
+                <a:solidFill>
+                  <a:srgbClr val="E6EDF3"/>
+                </a:solidFill>
+                <a:latin typeface="Segoe UI"/>
+              </a:rPr>
+              <a:t>) in </a:t>
+            </a:r>
+            <a:r>
+              <a:rPr sz="1200" b="0" dirty="0" err="1">
+                <a:solidFill>
+                  <a:srgbClr val="E6EDF3"/>
+                </a:solidFill>
+                <a:latin typeface="Segoe UI"/>
+              </a:rPr>
+              <a:t>dialetto</a:t>
+            </a:r>
+            <a:r>
+              <a:rPr sz="1200" b="0" dirty="0">
+                <a:solidFill>
+                  <a:srgbClr val="E6EDF3"/>
+                </a:solidFill>
+                <a:latin typeface="Segoe UI"/>
+              </a:rPr>
+              <a:t> </a:t>
+            </a:r>
+            <a:r>
+              <a:rPr sz="1200" b="0" dirty="0" err="1">
+                <a:solidFill>
+                  <a:srgbClr val="E6EDF3"/>
+                </a:solidFill>
+                <a:latin typeface="Segoe UI"/>
+              </a:rPr>
+              <a:t>libbpf</a:t>
+            </a:r>
+            <a:r>
+              <a:rPr sz="1200" b="0" dirty="0">
+                <a:solidFill>
+                  <a:srgbClr val="E6EDF3"/>
+                </a:solidFill>
+                <a:latin typeface="Segoe UI"/>
+              </a:rPr>
+              <a:t> → </a:t>
+            </a:r>
+            <a:r>
+              <a:rPr sz="1200" b="0" dirty="0" err="1">
+                <a:solidFill>
+                  <a:srgbClr val="E6EDF3"/>
+                </a:solidFill>
+                <a:latin typeface="Segoe UI"/>
+              </a:rPr>
+              <a:t>l'AOT</a:t>
+            </a:r>
+            <a:r>
+              <a:rPr sz="1200" b="0" dirty="0">
+                <a:solidFill>
+                  <a:srgbClr val="E6EDF3"/>
+                </a:solidFill>
+                <a:latin typeface="Segoe UI"/>
+              </a:rPr>
+              <a:t> </a:t>
+            </a:r>
+            <a:r>
+              <a:rPr sz="1200" b="0" dirty="0" err="1">
+                <a:solidFill>
+                  <a:srgbClr val="E6EDF3"/>
+                </a:solidFill>
+                <a:latin typeface="Segoe UI"/>
+              </a:rPr>
+              <a:t>copre</a:t>
+            </a:r>
+            <a:r>
+              <a:rPr sz="1200" b="0" dirty="0">
+                <a:solidFill>
+                  <a:srgbClr val="E6EDF3"/>
+                </a:solidFill>
+                <a:latin typeface="Segoe UI"/>
+              </a:rPr>
+              <a:t> </a:t>
+            </a:r>
+            <a:r>
+              <a:rPr sz="1200" b="0" dirty="0" err="1">
+                <a:solidFill>
+                  <a:srgbClr val="E6EDF3"/>
+                </a:solidFill>
+                <a:latin typeface="Segoe UI"/>
+              </a:rPr>
+              <a:t>ogni</a:t>
+            </a:r>
+            <a:r>
+              <a:rPr sz="1200" b="0" dirty="0">
+                <a:solidFill>
+                  <a:srgbClr val="E6EDF3"/>
+                </a:solidFill>
+                <a:latin typeface="Segoe UI"/>
+              </a:rPr>
+              <a:t> </a:t>
+            </a:r>
+            <a:r>
+              <a:rPr sz="1200" b="0" dirty="0" err="1">
+                <a:solidFill>
+                  <a:srgbClr val="E6EDF3"/>
+                </a:solidFill>
+                <a:latin typeface="Segoe UI"/>
+              </a:rPr>
+              <a:t>modello</a:t>
+            </a:r>
+            <a:r>
+              <a:rPr sz="1200" b="0" dirty="0">
+                <a:solidFill>
+                  <a:srgbClr val="E6EDF3"/>
+                </a:solidFill>
+                <a:latin typeface="Segoe UI"/>
+              </a:rPr>
+              <a:t> sparse. </a:t>
+            </a:r>
+            <a:endParaRPr lang="it-IT" sz="1200" b="0" dirty="0">
+              <a:solidFill>
+                <a:srgbClr val="E6EDF3"/>
+              </a:solidFill>
+              <a:latin typeface="Segoe UI"/>
+            </a:endParaRPr>
           </a:p>
         </p:txBody>
       </p:sp>
@@ -3980,6 +4191,7 @@
           <a:lstStyle/>
           <a:p>
             <a:pPr algn="ctr"/>
+            <a:endParaRPr/>
           </a:p>
         </p:txBody>
       </p:sp>
@@ -4000,7 +4212,7 @@
           <a:noFill/>
         </p:spPr>
         <p:txBody>
-          <a:bodyPr wrap="square" anchor="t" lIns="0" rIns="0" tIns="0" bIns="0">
+          <a:bodyPr wrap="square" lIns="0" tIns="0" rIns="0" bIns="0" anchor="t">
             <a:spAutoFit/>
           </a:bodyPr>
           <a:lstStyle/>
@@ -4050,54 +4262,6 @@
                 <a:latin typeface="Consolas"/>
               </a:rPr>
               <a:t>libbpf  :  struct{...} SEC(.maps) bpf_map_lookup_elem(&amp;m,&amp;k)  SEC("xdp")</a:t>
-            </a:r>
-          </a:p>
-        </p:txBody>
-      </p:sp>
-      <p:sp>
-        <p:nvSpPr>
-          <p:cNvPr id="14" name="TextBox 13"/>
-          <p:cNvSpPr txBox="1"/>
-          <p:nvPr/>
-        </p:nvSpPr>
-        <p:spPr>
-          <a:xfrm>
-            <a:off x="640080" y="5303520"/>
-            <a:ext cx="10972800" cy="914400"/>
-          </a:xfrm>
-          <a:prstGeom prst="rect">
-            <a:avLst/>
-          </a:prstGeom>
-          <a:noFill/>
-        </p:spPr>
-        <p:txBody>
-          <a:bodyPr wrap="square" anchor="t" lIns="0" rIns="0" tIns="0" bIns="0">
-            <a:spAutoFit/>
-          </a:bodyPr>
-          <a:lstStyle/>
-          <a:p>
-            <a:pPr algn="l">
-              <a:spcAft>
-                <a:spcPts val="600"/>
-              </a:spcAft>
-            </a:pPr>
-            <a:r>
-              <a:rPr sz="1300" b="1">
-                <a:solidFill>
-                  <a:srgbClr val="F5A623"/>
-                </a:solidFill>
-                <a:latin typeface="Segoe UI"/>
-              </a:rPr>
-              <a:t>Alternativa senza clang e senza perdita:</a:t>
-            </a:r>
-            <a:r>
-              <a:rPr sz="1300" b="0">
-                <a:solidFill>
-                  <a:srgbClr val="E6EDF3"/>
-                </a:solidFill>
-                <a:latin typeface="Segoe UI"/>
-              </a:rPr>
-              <a:t>  patch immediati direttamente nel bytecode del .o (perf identica ai literal, zero clang) — più lavoro di ingegneria del loader.</a:t>
             </a:r>
           </a:p>
         </p:txBody>
@@ -4111,7 +4275,7 @@
 </file>
 
 <file path=ppt/slides/slide11.xml><?xml version="1.0" encoding="utf-8"?>
-<p:sld xmlns:a="http://schemas.openxmlformats.org/drawingml/2006/main" xmlns:p="http://schemas.openxmlformats.org/presentationml/2006/main" xmlns:r="http://schemas.openxmlformats.org/officeDocument/2006/relationships">
+<p:sld xmlns:a="http://schemas.openxmlformats.org/drawingml/2006/main" xmlns:r="http://schemas.openxmlformats.org/officeDocument/2006/relationships" xmlns:p="http://schemas.openxmlformats.org/presentationml/2006/main">
   <p:cSld>
     <p:spTree>
       <p:nvGrpSpPr>
@@ -4119,7 +4283,14 @@
         <p:cNvGrpSpPr/>
         <p:nvPr/>
       </p:nvGrpSpPr>
-      <p:grpSpPr/>
+      <p:grpSpPr>
+        <a:xfrm>
+          <a:off x="0" y="0"/>
+          <a:ext cx="0" cy="0"/>
+          <a:chOff x="0" y="0"/>
+          <a:chExt cx="0" cy="0"/>
+        </a:xfrm>
+      </p:grpSpPr>
       <p:sp>
         <p:nvSpPr>
           <p:cNvPr id="2" name="Rectangle 1"/>
@@ -4161,6 +4332,7 @@
           <a:lstStyle/>
           <a:p>
             <a:pPr algn="ctr"/>
+            <a:endParaRPr/>
           </a:p>
         </p:txBody>
       </p:sp>
@@ -4181,7 +4353,7 @@
           <a:noFill/>
         </p:spPr>
         <p:txBody>
-          <a:bodyPr wrap="square" anchor="t" lIns="0" rIns="0" tIns="0" bIns="0">
+          <a:bodyPr wrap="square" lIns="0" tIns="0" rIns="0" bIns="0" anchor="t">
             <a:spAutoFit/>
           </a:bodyPr>
           <a:lstStyle/>
@@ -4216,7 +4388,7 @@
           <a:noFill/>
         </p:spPr>
         <p:txBody>
-          <a:bodyPr wrap="square" anchor="t" lIns="0" rIns="0" tIns="0" bIns="0">
+          <a:bodyPr wrap="square" lIns="0" tIns="0" rIns="0" bIns="0" anchor="t">
             <a:spAutoFit/>
           </a:bodyPr>
           <a:lstStyle/>
@@ -4251,7 +4423,7 @@
           <a:noFill/>
         </p:spPr>
         <p:txBody>
-          <a:bodyPr wrap="square" anchor="t" lIns="0" rIns="0" tIns="0" bIns="0">
+          <a:bodyPr wrap="square" lIns="0" tIns="0" rIns="0" bIns="0" anchor="t">
             <a:spAutoFit/>
           </a:bodyPr>
           <a:lstStyle/>
@@ -4310,6 +4482,7 @@
           <a:lstStyle/>
           <a:p>
             <a:pPr algn="ctr"/>
+            <a:endParaRPr/>
           </a:p>
         </p:txBody>
       </p:sp>
@@ -4354,6 +4527,7 @@
           <a:lstStyle/>
           <a:p>
             <a:pPr algn="ctr"/>
+            <a:endParaRPr/>
           </a:p>
         </p:txBody>
       </p:sp>
@@ -4374,7 +4548,7 @@
           <a:noFill/>
         </p:spPr>
         <p:txBody>
-          <a:bodyPr wrap="square" anchor="ctr" lIns="0" rIns="0" tIns="0" bIns="0">
+          <a:bodyPr wrap="square" lIns="0" tIns="0" rIns="0" bIns="0" anchor="ctr">
             <a:spAutoFit/>
           </a:bodyPr>
           <a:lstStyle/>
@@ -4442,6 +4616,7 @@
           <a:lstStyle/>
           <a:p>
             <a:pPr algn="ctr"/>
+            <a:endParaRPr/>
           </a:p>
         </p:txBody>
       </p:sp>
@@ -4486,6 +4661,7 @@
           <a:lstStyle/>
           <a:p>
             <a:pPr algn="ctr"/>
+            <a:endParaRPr/>
           </a:p>
         </p:txBody>
       </p:sp>
@@ -4506,7 +4682,7 @@
           <a:noFill/>
         </p:spPr>
         <p:txBody>
-          <a:bodyPr wrap="square" anchor="ctr" lIns="0" rIns="0" tIns="0" bIns="0">
+          <a:bodyPr wrap="square" lIns="0" tIns="0" rIns="0" bIns="0" anchor="ctr">
             <a:spAutoFit/>
           </a:bodyPr>
           <a:lstStyle/>
@@ -4589,6 +4765,7 @@
           <a:lstStyle/>
           <a:p>
             <a:pPr algn="ctr"/>
+            <a:endParaRPr/>
           </a:p>
         </p:txBody>
       </p:sp>
@@ -4633,6 +4810,7 @@
           <a:lstStyle/>
           <a:p>
             <a:pPr algn="ctr"/>
+            <a:endParaRPr/>
           </a:p>
         </p:txBody>
       </p:sp>
@@ -4653,7 +4831,7 @@
           <a:noFill/>
         </p:spPr>
         <p:txBody>
-          <a:bodyPr wrap="square" anchor="ctr" lIns="0" rIns="0" tIns="0" bIns="0">
+          <a:bodyPr wrap="square" lIns="0" tIns="0" rIns="0" bIns="0" anchor="ctr">
             <a:spAutoFit/>
           </a:bodyPr>
           <a:lstStyle/>
@@ -4736,6 +4914,7 @@
           <a:lstStyle/>
           <a:p>
             <a:pPr algn="ctr"/>
+            <a:endParaRPr/>
           </a:p>
         </p:txBody>
       </p:sp>
@@ -4780,6 +4959,7 @@
           <a:lstStyle/>
           <a:p>
             <a:pPr algn="ctr"/>
+            <a:endParaRPr/>
           </a:p>
         </p:txBody>
       </p:sp>
@@ -4800,7 +4980,7 @@
           <a:noFill/>
         </p:spPr>
         <p:txBody>
-          <a:bodyPr wrap="square" anchor="ctr" lIns="0" rIns="0" tIns="0" bIns="0">
+          <a:bodyPr wrap="square" lIns="0" tIns="0" rIns="0" bIns="0" anchor="ctr">
             <a:spAutoFit/>
           </a:bodyPr>
           <a:lstStyle/>
@@ -4859,7 +5039,7 @@
           <a:noFill/>
         </p:spPr>
         <p:txBody>
-          <a:bodyPr wrap="square" anchor="t" lIns="0" rIns="0" tIns="0" bIns="0">
+          <a:bodyPr wrap="square" lIns="0" tIns="0" rIns="0" bIns="0" anchor="t">
             <a:spAutoFit/>
           </a:bodyPr>
           <a:lstStyle/>
@@ -4899,7 +5079,7 @@
 </file>
 
 <file path=ppt/slides/slide2.xml><?xml version="1.0" encoding="utf-8"?>
-<p:sld xmlns:a="http://schemas.openxmlformats.org/drawingml/2006/main" xmlns:p="http://schemas.openxmlformats.org/presentationml/2006/main" xmlns:r="http://schemas.openxmlformats.org/officeDocument/2006/relationships">
+<p:sld xmlns:a="http://schemas.openxmlformats.org/drawingml/2006/main" xmlns:r="http://schemas.openxmlformats.org/officeDocument/2006/relationships" xmlns:p="http://schemas.openxmlformats.org/presentationml/2006/main">
   <p:cSld>
     <p:spTree>
       <p:nvGrpSpPr>
@@ -4907,7 +5087,14 @@
         <p:cNvGrpSpPr/>
         <p:nvPr/>
       </p:nvGrpSpPr>
-      <p:grpSpPr/>
+      <p:grpSpPr>
+        <a:xfrm>
+          <a:off x="0" y="0"/>
+          <a:ext cx="0" cy="0"/>
+          <a:chOff x="0" y="0"/>
+          <a:chExt cx="0" cy="0"/>
+        </a:xfrm>
+      </p:grpSpPr>
       <p:sp>
         <p:nvSpPr>
           <p:cNvPr id="2" name="Rectangle 1"/>
@@ -4949,6 +5136,7 @@
           <a:lstStyle/>
           <a:p>
             <a:pPr algn="ctr"/>
+            <a:endParaRPr/>
           </a:p>
         </p:txBody>
       </p:sp>
@@ -4969,7 +5157,7 @@
           <a:noFill/>
         </p:spPr>
         <p:txBody>
-          <a:bodyPr wrap="square" anchor="t" lIns="0" rIns="0" tIns="0" bIns="0">
+          <a:bodyPr wrap="square" lIns="0" tIns="0" rIns="0" bIns="0" anchor="t">
             <a:spAutoFit/>
           </a:bodyPr>
           <a:lstStyle/>
@@ -5004,7 +5192,7 @@
           <a:noFill/>
         </p:spPr>
         <p:txBody>
-          <a:bodyPr wrap="square" anchor="t" lIns="0" rIns="0" tIns="0" bIns="0">
+          <a:bodyPr wrap="square" lIns="0" tIns="0" rIns="0" bIns="0" anchor="t">
             <a:spAutoFit/>
           </a:bodyPr>
           <a:lstStyle/>
@@ -5039,7 +5227,7 @@
           <a:noFill/>
         </p:spPr>
         <p:txBody>
-          <a:bodyPr wrap="square" anchor="t" lIns="0" rIns="0" tIns="0" bIns="0">
+          <a:bodyPr wrap="square" lIns="0" tIns="0" rIns="0" bIns="0" anchor="t">
             <a:spAutoFit/>
           </a:bodyPr>
           <a:lstStyle/>
@@ -5098,6 +5286,7 @@
           <a:lstStyle/>
           <a:p>
             <a:pPr algn="ctr"/>
+            <a:endParaRPr/>
           </a:p>
         </p:txBody>
       </p:sp>
@@ -5142,6 +5331,7 @@
           <a:lstStyle/>
           <a:p>
             <a:pPr algn="ctr"/>
+            <a:endParaRPr/>
           </a:p>
         </p:txBody>
       </p:sp>
@@ -5162,7 +5352,7 @@
           <a:noFill/>
         </p:spPr>
         <p:txBody>
-          <a:bodyPr wrap="square" anchor="ctr" lIns="0" rIns="0" tIns="0" bIns="0">
+          <a:bodyPr wrap="square" lIns="0" tIns="0" rIns="0" bIns="0" anchor="ctr">
             <a:spAutoFit/>
           </a:bodyPr>
           <a:lstStyle/>
@@ -5233,6 +5423,7 @@
           <a:lstStyle/>
           <a:p>
             <a:pPr algn="ctr"/>
+            <a:endParaRPr/>
           </a:p>
         </p:txBody>
       </p:sp>
@@ -5277,6 +5468,7 @@
           <a:lstStyle/>
           <a:p>
             <a:pPr algn="ctr"/>
+            <a:endParaRPr/>
           </a:p>
         </p:txBody>
       </p:sp>
@@ -5297,7 +5489,7 @@
           <a:noFill/>
         </p:spPr>
         <p:txBody>
-          <a:bodyPr wrap="square" anchor="ctr" lIns="0" rIns="0" tIns="0" bIns="0">
+          <a:bodyPr wrap="square" lIns="0" tIns="0" rIns="0" bIns="0" anchor="ctr">
             <a:spAutoFit/>
           </a:bodyPr>
           <a:lstStyle/>
@@ -5368,6 +5560,7 @@
           <a:lstStyle/>
           <a:p>
             <a:pPr algn="ctr"/>
+            <a:endParaRPr/>
           </a:p>
         </p:txBody>
       </p:sp>
@@ -5412,6 +5605,7 @@
           <a:lstStyle/>
           <a:p>
             <a:pPr algn="ctr"/>
+            <a:endParaRPr/>
           </a:p>
         </p:txBody>
       </p:sp>
@@ -5432,7 +5626,7 @@
           <a:noFill/>
         </p:spPr>
         <p:txBody>
-          <a:bodyPr wrap="square" anchor="ctr" lIns="0" rIns="0" tIns="0" bIns="0">
+          <a:bodyPr wrap="square" lIns="0" tIns="0" rIns="0" bIns="0" anchor="ctr">
             <a:spAutoFit/>
           </a:bodyPr>
           <a:lstStyle/>
@@ -5468,7 +5662,7 @@
         <p:spPr>
           <a:xfrm>
             <a:off x="640080" y="5257800"/>
-            <a:ext cx="10972800" cy="1280160"/>
+            <a:ext cx="10972800" cy="651460"/>
           </a:xfrm>
           <a:prstGeom prst="rect">
             <a:avLst/>
@@ -5476,7 +5670,7 @@
           <a:noFill/>
         </p:spPr>
         <p:txBody>
-          <a:bodyPr wrap="square" anchor="t" lIns="0" rIns="0" tIns="0" bIns="0">
+          <a:bodyPr wrap="square" lIns="0" tIns="0" rIns="0" bIns="0" anchor="t">
             <a:spAutoFit/>
           </a:bodyPr>
           <a:lstStyle/>
@@ -5487,14 +5681,29 @@
               </a:spcAft>
             </a:pPr>
             <a:r>
-              <a:rPr sz="1300" b="1">
+              <a:rPr sz="1300" b="1" dirty="0" err="1">
                 <a:solidFill>
                   <a:srgbClr val="8B949E"/>
                 </a:solidFill>
                 <a:latin typeface="Segoe UI"/>
               </a:rPr>
-              <a:t>Vincolo del professore (modelli noti a priori):</a:t>
-            </a:r>
+              <a:t>Vincolo</a:t>
+            </a:r>
+            <a:r>
+              <a:rPr lang="it-IT" sz="1300" b="1" dirty="0">
+                <a:solidFill>
+                  <a:srgbClr val="8B949E"/>
+                </a:solidFill>
+                <a:latin typeface="Segoe UI"/>
+              </a:rPr>
+              <a:t> (modelli noti a priori):</a:t>
+            </a:r>
+            <a:endParaRPr sz="1300" b="1" dirty="0">
+              <a:solidFill>
+                <a:srgbClr val="8B949E"/>
+              </a:solidFill>
+              <a:latin typeface="Segoe UI"/>
+            </a:endParaRPr>
           </a:p>
           <a:p>
             <a:pPr algn="l">
@@ -5503,13 +5712,247 @@
               </a:spcAft>
             </a:pPr>
             <a:r>
-              <a:rPr sz="1300" b="0">
+              <a:rPr sz="1300" b="0" dirty="0">
                 <a:solidFill>
                   <a:srgbClr val="E6EDF3"/>
                 </a:solidFill>
                 <a:latin typeface="Segoe UI"/>
               </a:rPr>
-              <a:t>a parità di tipo di feature la dimensione è fissa nella stessa rete — è una proprietà del NODO, non un parametro del modello. I modelli scelgono solo QUALI tipi usare.</a:t>
+              <a:t>a </a:t>
+            </a:r>
+            <a:r>
+              <a:rPr sz="1300" b="0" dirty="0" err="1">
+                <a:solidFill>
+                  <a:srgbClr val="E6EDF3"/>
+                </a:solidFill>
+                <a:latin typeface="Segoe UI"/>
+              </a:rPr>
+              <a:t>parità</a:t>
+            </a:r>
+            <a:r>
+              <a:rPr sz="1300" b="0" dirty="0">
+                <a:solidFill>
+                  <a:srgbClr val="E6EDF3"/>
+                </a:solidFill>
+                <a:latin typeface="Segoe UI"/>
+              </a:rPr>
+              <a:t> di </a:t>
+            </a:r>
+            <a:r>
+              <a:rPr sz="1300" b="0" dirty="0" err="1">
+                <a:solidFill>
+                  <a:srgbClr val="E6EDF3"/>
+                </a:solidFill>
+                <a:latin typeface="Segoe UI"/>
+              </a:rPr>
+              <a:t>tipo</a:t>
+            </a:r>
+            <a:r>
+              <a:rPr sz="1300" b="0" dirty="0">
+                <a:solidFill>
+                  <a:srgbClr val="E6EDF3"/>
+                </a:solidFill>
+                <a:latin typeface="Segoe UI"/>
+              </a:rPr>
+              <a:t> di feature la </a:t>
+            </a:r>
+            <a:r>
+              <a:rPr sz="1300" b="0" dirty="0" err="1">
+                <a:solidFill>
+                  <a:srgbClr val="E6EDF3"/>
+                </a:solidFill>
+                <a:latin typeface="Segoe UI"/>
+              </a:rPr>
+              <a:t>dimensione</a:t>
+            </a:r>
+            <a:r>
+              <a:rPr sz="1300" b="0" dirty="0">
+                <a:solidFill>
+                  <a:srgbClr val="E6EDF3"/>
+                </a:solidFill>
+                <a:latin typeface="Segoe UI"/>
+              </a:rPr>
+              <a:t> è </a:t>
+            </a:r>
+            <a:r>
+              <a:rPr sz="1300" b="0" dirty="0" err="1">
+                <a:solidFill>
+                  <a:srgbClr val="E6EDF3"/>
+                </a:solidFill>
+                <a:latin typeface="Segoe UI"/>
+              </a:rPr>
+              <a:t>fissa</a:t>
+            </a:r>
+            <a:r>
+              <a:rPr sz="1300" b="0" dirty="0">
+                <a:solidFill>
+                  <a:srgbClr val="E6EDF3"/>
+                </a:solidFill>
+                <a:latin typeface="Segoe UI"/>
+              </a:rPr>
+              <a:t> </a:t>
+            </a:r>
+            <a:r>
+              <a:rPr sz="1300" b="0" dirty="0" err="1">
+                <a:solidFill>
+                  <a:srgbClr val="E6EDF3"/>
+                </a:solidFill>
+                <a:latin typeface="Segoe UI"/>
+              </a:rPr>
+              <a:t>nella</a:t>
+            </a:r>
+            <a:r>
+              <a:rPr sz="1300" b="0" dirty="0">
+                <a:solidFill>
+                  <a:srgbClr val="E6EDF3"/>
+                </a:solidFill>
+                <a:latin typeface="Segoe UI"/>
+              </a:rPr>
+              <a:t> </a:t>
+            </a:r>
+            <a:r>
+              <a:rPr sz="1300" b="0" dirty="0" err="1">
+                <a:solidFill>
+                  <a:srgbClr val="E6EDF3"/>
+                </a:solidFill>
+                <a:latin typeface="Segoe UI"/>
+              </a:rPr>
+              <a:t>stessa</a:t>
+            </a:r>
+            <a:r>
+              <a:rPr sz="1300" b="0" dirty="0">
+                <a:solidFill>
+                  <a:srgbClr val="E6EDF3"/>
+                </a:solidFill>
+                <a:latin typeface="Segoe UI"/>
+              </a:rPr>
+              <a:t> rete — è </a:t>
+            </a:r>
+            <a:r>
+              <a:rPr sz="1300" b="0" dirty="0" err="1">
+                <a:solidFill>
+                  <a:srgbClr val="E6EDF3"/>
+                </a:solidFill>
+                <a:latin typeface="Segoe UI"/>
+              </a:rPr>
+              <a:t>una</a:t>
+            </a:r>
+            <a:r>
+              <a:rPr sz="1300" b="0" dirty="0">
+                <a:solidFill>
+                  <a:srgbClr val="E6EDF3"/>
+                </a:solidFill>
+                <a:latin typeface="Segoe UI"/>
+              </a:rPr>
+              <a:t> </a:t>
+            </a:r>
+            <a:r>
+              <a:rPr sz="1300" b="0" dirty="0" err="1">
+                <a:solidFill>
+                  <a:srgbClr val="E6EDF3"/>
+                </a:solidFill>
+                <a:latin typeface="Segoe UI"/>
+              </a:rPr>
+              <a:t>proprietà</a:t>
+            </a:r>
+            <a:r>
+              <a:rPr sz="1300" b="0" dirty="0">
+                <a:solidFill>
+                  <a:srgbClr val="E6EDF3"/>
+                </a:solidFill>
+                <a:latin typeface="Segoe UI"/>
+              </a:rPr>
+              <a:t> del NODO, non un </a:t>
+            </a:r>
+            <a:r>
+              <a:rPr sz="1300" b="0" dirty="0" err="1">
+                <a:solidFill>
+                  <a:srgbClr val="E6EDF3"/>
+                </a:solidFill>
+                <a:latin typeface="Segoe UI"/>
+              </a:rPr>
+              <a:t>parametro</a:t>
+            </a:r>
+            <a:r>
+              <a:rPr sz="1300" b="0" dirty="0">
+                <a:solidFill>
+                  <a:srgbClr val="E6EDF3"/>
+                </a:solidFill>
+                <a:latin typeface="Segoe UI"/>
+              </a:rPr>
+              <a:t> del </a:t>
+            </a:r>
+            <a:r>
+              <a:rPr sz="1300" b="0" dirty="0" err="1">
+                <a:solidFill>
+                  <a:srgbClr val="E6EDF3"/>
+                </a:solidFill>
+                <a:latin typeface="Segoe UI"/>
+              </a:rPr>
+              <a:t>modello</a:t>
+            </a:r>
+            <a:r>
+              <a:rPr sz="1300" b="0" dirty="0">
+                <a:solidFill>
+                  <a:srgbClr val="E6EDF3"/>
+                </a:solidFill>
+                <a:latin typeface="Segoe UI"/>
+              </a:rPr>
+              <a:t>. I </a:t>
+            </a:r>
+            <a:r>
+              <a:rPr sz="1300" b="0" dirty="0" err="1">
+                <a:solidFill>
+                  <a:srgbClr val="E6EDF3"/>
+                </a:solidFill>
+                <a:latin typeface="Segoe UI"/>
+              </a:rPr>
+              <a:t>modelli</a:t>
+            </a:r>
+            <a:r>
+              <a:rPr sz="1300" b="0" dirty="0">
+                <a:solidFill>
+                  <a:srgbClr val="E6EDF3"/>
+                </a:solidFill>
+                <a:latin typeface="Segoe UI"/>
+              </a:rPr>
+              <a:t> </a:t>
+            </a:r>
+            <a:r>
+              <a:rPr sz="1300" b="0" dirty="0" err="1">
+                <a:solidFill>
+                  <a:srgbClr val="E6EDF3"/>
+                </a:solidFill>
+                <a:latin typeface="Segoe UI"/>
+              </a:rPr>
+              <a:t>scelgono</a:t>
+            </a:r>
+            <a:r>
+              <a:rPr sz="1300" b="0" dirty="0">
+                <a:solidFill>
+                  <a:srgbClr val="E6EDF3"/>
+                </a:solidFill>
+                <a:latin typeface="Segoe UI"/>
+              </a:rPr>
+              <a:t> solo QUALI tipi </a:t>
+            </a:r>
+            <a:r>
+              <a:rPr sz="1300" b="0" dirty="0" err="1">
+                <a:solidFill>
+                  <a:srgbClr val="E6EDF3"/>
+                </a:solidFill>
+                <a:latin typeface="Segoe UI"/>
+              </a:rPr>
+              <a:t>usare</a:t>
+            </a:r>
+            <a:r>
+              <a:rPr sz="1300" b="0" dirty="0">
+                <a:solidFill>
+                  <a:srgbClr val="E6EDF3"/>
+                </a:solidFill>
+                <a:latin typeface="Segoe UI"/>
+              </a:rPr>
+              <a:t>.</a:t>
             </a:r>
           </a:p>
         </p:txBody>
@@ -5523,7 +5966,7 @@
 </file>
 
 <file path=ppt/slides/slide3.xml><?xml version="1.0" encoding="utf-8"?>
-<p:sld xmlns:a="http://schemas.openxmlformats.org/drawingml/2006/main" xmlns:p="http://schemas.openxmlformats.org/presentationml/2006/main" xmlns:r="http://schemas.openxmlformats.org/officeDocument/2006/relationships">
+<p:sld xmlns:a="http://schemas.openxmlformats.org/drawingml/2006/main" xmlns:r="http://schemas.openxmlformats.org/officeDocument/2006/relationships" xmlns:p="http://schemas.openxmlformats.org/presentationml/2006/main">
   <p:cSld>
     <p:spTree>
       <p:nvGrpSpPr>
@@ -5531,7 +5974,14 @@
         <p:cNvGrpSpPr/>
         <p:nvPr/>
       </p:nvGrpSpPr>
-      <p:grpSpPr/>
+      <p:grpSpPr>
+        <a:xfrm>
+          <a:off x="0" y="0"/>
+          <a:ext cx="0" cy="0"/>
+          <a:chOff x="0" y="0"/>
+          <a:chExt cx="0" cy="0"/>
+        </a:xfrm>
+      </p:grpSpPr>
       <p:sp>
         <p:nvSpPr>
           <p:cNvPr id="2" name="Rectangle 1"/>
@@ -5573,6 +6023,7 @@
           <a:lstStyle/>
           <a:p>
             <a:pPr algn="ctr"/>
+            <a:endParaRPr/>
           </a:p>
         </p:txBody>
       </p:sp>
@@ -5593,7 +6044,7 @@
           <a:noFill/>
         </p:spPr>
         <p:txBody>
-          <a:bodyPr wrap="square" anchor="t" lIns="0" rIns="0" tIns="0" bIns="0">
+          <a:bodyPr wrap="square" lIns="0" tIns="0" rIns="0" bIns="0" anchor="t">
             <a:spAutoFit/>
           </a:bodyPr>
           <a:lstStyle/>
@@ -5628,7 +6079,7 @@
           <a:noFill/>
         </p:spPr>
         <p:txBody>
-          <a:bodyPr wrap="square" anchor="t" lIns="0" rIns="0" tIns="0" bIns="0">
+          <a:bodyPr wrap="square" lIns="0" tIns="0" rIns="0" bIns="0" anchor="t">
             <a:spAutoFit/>
           </a:bodyPr>
           <a:lstStyle/>
@@ -5663,7 +6114,7 @@
           <a:noFill/>
         </p:spPr>
         <p:txBody>
-          <a:bodyPr wrap="square" anchor="t" lIns="0" rIns="0" tIns="0" bIns="0">
+          <a:bodyPr wrap="square" lIns="0" tIns="0" rIns="0" bIns="0" anchor="t">
             <a:spAutoFit/>
           </a:bodyPr>
           <a:lstStyle/>
@@ -5722,6 +6173,7 @@
           <a:lstStyle/>
           <a:p>
             <a:pPr algn="ctr"/>
+            <a:endParaRPr/>
           </a:p>
         </p:txBody>
       </p:sp>
@@ -5766,6 +6218,7 @@
           <a:lstStyle/>
           <a:p>
             <a:pPr algn="ctr"/>
+            <a:endParaRPr/>
           </a:p>
         </p:txBody>
       </p:sp>
@@ -5786,7 +6239,7 @@
           <a:noFill/>
         </p:spPr>
         <p:txBody>
-          <a:bodyPr wrap="square" anchor="t" lIns="0" rIns="0" tIns="0" bIns="0">
+          <a:bodyPr wrap="square" lIns="0" tIns="0" rIns="0" bIns="0" anchor="t">
             <a:spAutoFit/>
           </a:bodyPr>
           <a:lstStyle/>
@@ -5821,7 +6274,7 @@
           <a:noFill/>
         </p:spPr>
         <p:txBody>
-          <a:bodyPr wrap="square" anchor="t" lIns="0" rIns="0" tIns="0" bIns="0">
+          <a:bodyPr wrap="square" lIns="0" tIns="0" rIns="0" bIns="0" anchor="t">
             <a:spAutoFit/>
           </a:bodyPr>
           <a:lstStyle/>
@@ -6009,6 +6462,7 @@
           <a:lstStyle/>
           <a:p>
             <a:pPr algn="ctr"/>
+            <a:endParaRPr/>
           </a:p>
         </p:txBody>
       </p:sp>
@@ -6053,6 +6507,7 @@
           <a:lstStyle/>
           <a:p>
             <a:pPr algn="ctr"/>
+            <a:endParaRPr/>
           </a:p>
         </p:txBody>
       </p:sp>
@@ -6073,7 +6528,7 @@
           <a:noFill/>
         </p:spPr>
         <p:txBody>
-          <a:bodyPr wrap="square" anchor="t" lIns="0" rIns="0" tIns="0" bIns="0">
+          <a:bodyPr wrap="square" lIns="0" tIns="0" rIns="0" bIns="0" anchor="t">
             <a:spAutoFit/>
           </a:bodyPr>
           <a:lstStyle/>
@@ -6108,7 +6563,7 @@
           <a:noFill/>
         </p:spPr>
         <p:txBody>
-          <a:bodyPr wrap="square" anchor="t" lIns="0" rIns="0" tIns="0" bIns="0">
+          <a:bodyPr wrap="square" lIns="0" tIns="0" rIns="0" bIns="0" anchor="t">
             <a:spAutoFit/>
           </a:bodyPr>
           <a:lstStyle/>
@@ -6267,6 +6722,7 @@
           <a:lstStyle/>
           <a:p>
             <a:pPr algn="ctr"/>
+            <a:endParaRPr/>
           </a:p>
         </p:txBody>
       </p:sp>
@@ -6311,6 +6767,7 @@
           <a:lstStyle/>
           <a:p>
             <a:pPr algn="ctr"/>
+            <a:endParaRPr/>
           </a:p>
         </p:txBody>
       </p:sp>
@@ -6331,7 +6788,7 @@
           <a:noFill/>
         </p:spPr>
         <p:txBody>
-          <a:bodyPr wrap="square" anchor="t" lIns="0" rIns="0" tIns="0" bIns="0">
+          <a:bodyPr wrap="square" lIns="0" tIns="0" rIns="0" bIns="0" anchor="t">
             <a:spAutoFit/>
           </a:bodyPr>
           <a:lstStyle/>
@@ -6366,7 +6823,7 @@
           <a:noFill/>
         </p:spPr>
         <p:txBody>
-          <a:bodyPr wrap="square" anchor="t" lIns="0" rIns="0" tIns="0" bIns="0">
+          <a:bodyPr wrap="square" lIns="0" tIns="0" rIns="0" bIns="0" anchor="t">
             <a:spAutoFit/>
           </a:bodyPr>
           <a:lstStyle/>
@@ -6469,7 +6926,7 @@
           <a:noFill/>
         </p:spPr>
         <p:txBody>
-          <a:bodyPr wrap="square" anchor="t" lIns="0" rIns="0" tIns="0" bIns="0">
+          <a:bodyPr wrap="square" lIns="0" tIns="0" rIns="0" bIns="0" anchor="t">
             <a:spAutoFit/>
           </a:bodyPr>
           <a:lstStyle/>
@@ -6534,7 +6991,7 @@
 </file>
 
 <file path=ppt/slides/slide4.xml><?xml version="1.0" encoding="utf-8"?>
-<p:sld xmlns:a="http://schemas.openxmlformats.org/drawingml/2006/main" xmlns:p="http://schemas.openxmlformats.org/presentationml/2006/main" xmlns:r="http://schemas.openxmlformats.org/officeDocument/2006/relationships">
+<p:sld xmlns:a="http://schemas.openxmlformats.org/drawingml/2006/main" xmlns:r="http://schemas.openxmlformats.org/officeDocument/2006/relationships" xmlns:p="http://schemas.openxmlformats.org/presentationml/2006/main">
   <p:cSld>
     <p:spTree>
       <p:nvGrpSpPr>
@@ -6542,7 +6999,14 @@
         <p:cNvGrpSpPr/>
         <p:nvPr/>
       </p:nvGrpSpPr>
-      <p:grpSpPr/>
+      <p:grpSpPr>
+        <a:xfrm>
+          <a:off x="0" y="0"/>
+          <a:ext cx="0" cy="0"/>
+          <a:chOff x="0" y="0"/>
+          <a:chExt cx="0" cy="0"/>
+        </a:xfrm>
+      </p:grpSpPr>
       <p:sp>
         <p:nvSpPr>
           <p:cNvPr id="2" name="Rectangle 1"/>
@@ -6584,6 +7048,7 @@
           <a:lstStyle/>
           <a:p>
             <a:pPr algn="ctr"/>
+            <a:endParaRPr/>
           </a:p>
         </p:txBody>
       </p:sp>
@@ -6604,7 +7069,7 @@
           <a:noFill/>
         </p:spPr>
         <p:txBody>
-          <a:bodyPr wrap="square" anchor="t" lIns="0" rIns="0" tIns="0" bIns="0">
+          <a:bodyPr wrap="square" lIns="0" tIns="0" rIns="0" bIns="0" anchor="t">
             <a:spAutoFit/>
           </a:bodyPr>
           <a:lstStyle/>
@@ -6639,7 +7104,7 @@
           <a:noFill/>
         </p:spPr>
         <p:txBody>
-          <a:bodyPr wrap="square" anchor="t" lIns="0" rIns="0" tIns="0" bIns="0">
+          <a:bodyPr wrap="square" lIns="0" tIns="0" rIns="0" bIns="0" anchor="t">
             <a:spAutoFit/>
           </a:bodyPr>
           <a:lstStyle/>
@@ -6674,7 +7139,7 @@
           <a:noFill/>
         </p:spPr>
         <p:txBody>
-          <a:bodyPr wrap="square" anchor="t" lIns="0" rIns="0" tIns="0" bIns="0">
+          <a:bodyPr wrap="square" lIns="0" tIns="0" rIns="0" bIns="0" anchor="t">
             <a:spAutoFit/>
           </a:bodyPr>
           <a:lstStyle/>
@@ -6733,6 +7198,7 @@
           <a:lstStyle/>
           <a:p>
             <a:pPr algn="ctr"/>
+            <a:endParaRPr/>
           </a:p>
         </p:txBody>
       </p:sp>
@@ -6777,6 +7243,7 @@
           <a:lstStyle/>
           <a:p>
             <a:pPr algn="ctr"/>
+            <a:endParaRPr/>
           </a:p>
         </p:txBody>
       </p:sp>
@@ -6797,7 +7264,7 @@
           <a:noFill/>
         </p:spPr>
         <p:txBody>
-          <a:bodyPr wrap="square" anchor="ctr" lIns="0" rIns="0" tIns="0" bIns="0">
+          <a:bodyPr wrap="square" lIns="0" tIns="0" rIns="0" bIns="0" anchor="ctr">
             <a:spAutoFit/>
           </a:bodyPr>
           <a:lstStyle/>
@@ -6844,7 +7311,7 @@
           <a:noFill/>
         </p:spPr>
         <p:txBody>
-          <a:bodyPr wrap="square" anchor="t" lIns="0" rIns="0" tIns="0" bIns="0">
+          <a:bodyPr wrap="square" lIns="0" tIns="0" rIns="0" bIns="0" anchor="t">
             <a:spAutoFit/>
           </a:bodyPr>
           <a:lstStyle/>
@@ -6903,6 +7370,7 @@
           <a:lstStyle/>
           <a:p>
             <a:pPr algn="ctr"/>
+            <a:endParaRPr/>
           </a:p>
         </p:txBody>
       </p:sp>
@@ -6947,6 +7415,7 @@
           <a:lstStyle/>
           <a:p>
             <a:pPr algn="ctr"/>
+            <a:endParaRPr/>
           </a:p>
         </p:txBody>
       </p:sp>
@@ -6967,7 +7436,7 @@
           <a:noFill/>
         </p:spPr>
         <p:txBody>
-          <a:bodyPr wrap="square" anchor="ctr" lIns="0" rIns="0" tIns="0" bIns="0">
+          <a:bodyPr wrap="square" lIns="0" tIns="0" rIns="0" bIns="0" anchor="ctr">
             <a:spAutoFit/>
           </a:bodyPr>
           <a:lstStyle/>
@@ -7014,7 +7483,7 @@
           <a:noFill/>
         </p:spPr>
         <p:txBody>
-          <a:bodyPr wrap="square" anchor="t" lIns="0" rIns="0" tIns="0" bIns="0">
+          <a:bodyPr wrap="square" lIns="0" tIns="0" rIns="0" bIns="0" anchor="t">
             <a:spAutoFit/>
           </a:bodyPr>
           <a:lstStyle/>
@@ -7073,6 +7542,7 @@
           <a:lstStyle/>
           <a:p>
             <a:pPr algn="ctr"/>
+            <a:endParaRPr/>
           </a:p>
         </p:txBody>
       </p:sp>
@@ -7117,6 +7587,7 @@
           <a:lstStyle/>
           <a:p>
             <a:pPr algn="ctr"/>
+            <a:endParaRPr/>
           </a:p>
         </p:txBody>
       </p:sp>
@@ -7137,7 +7608,7 @@
           <a:noFill/>
         </p:spPr>
         <p:txBody>
-          <a:bodyPr wrap="square" anchor="ctr" lIns="0" rIns="0" tIns="0" bIns="0">
+          <a:bodyPr wrap="square" lIns="0" tIns="0" rIns="0" bIns="0" anchor="ctr">
             <a:spAutoFit/>
           </a:bodyPr>
           <a:lstStyle/>
@@ -7184,7 +7655,7 @@
           <a:noFill/>
         </p:spPr>
         <p:txBody>
-          <a:bodyPr wrap="square" anchor="t" lIns="0" rIns="0" tIns="0" bIns="0">
+          <a:bodyPr wrap="square" lIns="0" tIns="0" rIns="0" bIns="0" anchor="t">
             <a:spAutoFit/>
           </a:bodyPr>
           <a:lstStyle/>
@@ -7243,6 +7714,7 @@
           <a:lstStyle/>
           <a:p>
             <a:pPr algn="ctr"/>
+            <a:endParaRPr/>
           </a:p>
         </p:txBody>
       </p:sp>
@@ -7287,6 +7759,7 @@
           <a:lstStyle/>
           <a:p>
             <a:pPr algn="ctr"/>
+            <a:endParaRPr/>
           </a:p>
         </p:txBody>
       </p:sp>
@@ -7307,7 +7780,7 @@
           <a:noFill/>
         </p:spPr>
         <p:txBody>
-          <a:bodyPr wrap="square" anchor="ctr" lIns="0" rIns="0" tIns="0" bIns="0">
+          <a:bodyPr wrap="square" lIns="0" tIns="0" rIns="0" bIns="0" anchor="ctr">
             <a:spAutoFit/>
           </a:bodyPr>
           <a:lstStyle/>
@@ -7354,7 +7827,7 @@
           <a:noFill/>
         </p:spPr>
         <p:txBody>
-          <a:bodyPr wrap="square" anchor="t" lIns="0" rIns="0" tIns="0" bIns="0">
+          <a:bodyPr wrap="square" lIns="0" tIns="0" rIns="0" bIns="0" anchor="t">
             <a:spAutoFit/>
           </a:bodyPr>
           <a:lstStyle/>
@@ -7413,6 +7886,7 @@
           <a:lstStyle/>
           <a:p>
             <a:pPr algn="ctr"/>
+            <a:endParaRPr/>
           </a:p>
         </p:txBody>
       </p:sp>
@@ -7457,6 +7931,7 @@
           <a:lstStyle/>
           <a:p>
             <a:pPr algn="ctr"/>
+            <a:endParaRPr/>
           </a:p>
         </p:txBody>
       </p:sp>
@@ -7477,7 +7952,7 @@
           <a:noFill/>
         </p:spPr>
         <p:txBody>
-          <a:bodyPr wrap="square" anchor="ctr" lIns="0" rIns="0" tIns="0" bIns="0">
+          <a:bodyPr wrap="square" lIns="0" tIns="0" rIns="0" bIns="0" anchor="ctr">
             <a:spAutoFit/>
           </a:bodyPr>
           <a:lstStyle/>
@@ -7524,7 +7999,7 @@
           <a:noFill/>
         </p:spPr>
         <p:txBody>
-          <a:bodyPr wrap="square" anchor="t" lIns="0" rIns="0" tIns="0" bIns="0">
+          <a:bodyPr wrap="square" lIns="0" tIns="0" rIns="0" bIns="0" anchor="t">
             <a:spAutoFit/>
           </a:bodyPr>
           <a:lstStyle/>
@@ -7583,6 +8058,7 @@
           <a:lstStyle/>
           <a:p>
             <a:pPr algn="ctr"/>
+            <a:endParaRPr/>
           </a:p>
         </p:txBody>
       </p:sp>
@@ -7627,6 +8103,7 @@
           <a:lstStyle/>
           <a:p>
             <a:pPr algn="ctr"/>
+            <a:endParaRPr/>
           </a:p>
         </p:txBody>
       </p:sp>
@@ -7647,7 +8124,7 @@
           <a:noFill/>
         </p:spPr>
         <p:txBody>
-          <a:bodyPr wrap="square" anchor="ctr" lIns="0" rIns="0" tIns="0" bIns="0">
+          <a:bodyPr wrap="square" lIns="0" tIns="0" rIns="0" bIns="0" anchor="ctr">
             <a:spAutoFit/>
           </a:bodyPr>
           <a:lstStyle/>
@@ -7718,6 +8195,7 @@
           <a:lstStyle/>
           <a:p>
             <a:pPr algn="ctr"/>
+            <a:endParaRPr/>
           </a:p>
         </p:txBody>
       </p:sp>
@@ -7738,7 +8216,7 @@
           <a:noFill/>
         </p:spPr>
         <p:txBody>
-          <a:bodyPr wrap="square" anchor="t" lIns="0" rIns="0" tIns="0" bIns="0">
+          <a:bodyPr wrap="square" lIns="0" tIns="0" rIns="0" bIns="0" anchor="t">
             <a:spAutoFit/>
           </a:bodyPr>
           <a:lstStyle/>
@@ -7773,7 +8251,7 @@
           <a:noFill/>
         </p:spPr>
         <p:txBody>
-          <a:bodyPr wrap="square" anchor="t" lIns="0" rIns="0" tIns="0" bIns="0">
+          <a:bodyPr wrap="square" lIns="0" tIns="0" rIns="0" bIns="0" anchor="t">
             <a:spAutoFit/>
           </a:bodyPr>
           <a:lstStyle/>
@@ -7863,15 +8341,12 @@
                 <a:spcPts val="300"/>
               </a:spcAft>
             </a:pPr>
-            <a:r>
-              <a:rPr sz="1200" b="0">
-                <a:solidFill>
-                  <a:srgbClr val="E6EDF3"/>
-                </a:solidFill>
-                <a:latin typeface="Consolas"/>
-              </a:rPr>
-              <a:t/>
-            </a:r>
+            <a:endParaRPr sz="1200" b="0">
+              <a:solidFill>
+                <a:srgbClr val="58A6FF"/>
+              </a:solidFill>
+              <a:latin typeface="Consolas"/>
+            </a:endParaRPr>
           </a:p>
           <a:p>
             <a:pPr algn="l">
@@ -7932,7 +8407,7 @@
 </file>
 
 <file path=ppt/slides/slide5.xml><?xml version="1.0" encoding="utf-8"?>
-<p:sld xmlns:a="http://schemas.openxmlformats.org/drawingml/2006/main" xmlns:p="http://schemas.openxmlformats.org/presentationml/2006/main" xmlns:r="http://schemas.openxmlformats.org/officeDocument/2006/relationships">
+<p:sld xmlns:a="http://schemas.openxmlformats.org/drawingml/2006/main" xmlns:r="http://schemas.openxmlformats.org/officeDocument/2006/relationships" xmlns:p="http://schemas.openxmlformats.org/presentationml/2006/main">
   <p:cSld>
     <p:spTree>
       <p:nvGrpSpPr>
@@ -7940,7 +8415,14 @@
         <p:cNvGrpSpPr/>
         <p:nvPr/>
       </p:nvGrpSpPr>
-      <p:grpSpPr/>
+      <p:grpSpPr>
+        <a:xfrm>
+          <a:off x="0" y="0"/>
+          <a:ext cx="0" cy="0"/>
+          <a:chOff x="0" y="0"/>
+          <a:chExt cx="0" cy="0"/>
+        </a:xfrm>
+      </p:grpSpPr>
       <p:sp>
         <p:nvSpPr>
           <p:cNvPr id="2" name="Rectangle 1"/>
@@ -7982,6 +8464,7 @@
           <a:lstStyle/>
           <a:p>
             <a:pPr algn="ctr"/>
+            <a:endParaRPr/>
           </a:p>
         </p:txBody>
       </p:sp>
@@ -8002,7 +8485,7 @@
           <a:noFill/>
         </p:spPr>
         <p:txBody>
-          <a:bodyPr wrap="square" anchor="t" lIns="0" rIns="0" tIns="0" bIns="0">
+          <a:bodyPr wrap="square" lIns="0" tIns="0" rIns="0" bIns="0" anchor="t">
             <a:spAutoFit/>
           </a:bodyPr>
           <a:lstStyle/>
@@ -8037,7 +8520,7 @@
           <a:noFill/>
         </p:spPr>
         <p:txBody>
-          <a:bodyPr wrap="square" anchor="t" lIns="0" rIns="0" tIns="0" bIns="0">
+          <a:bodyPr wrap="square" lIns="0" tIns="0" rIns="0" bIns="0" anchor="t">
             <a:spAutoFit/>
           </a:bodyPr>
           <a:lstStyle/>
@@ -8072,7 +8555,7 @@
           <a:noFill/>
         </p:spPr>
         <p:txBody>
-          <a:bodyPr wrap="square" anchor="t" lIns="0" rIns="0" tIns="0" bIns="0">
+          <a:bodyPr wrap="square" lIns="0" tIns="0" rIns="0" bIns="0" anchor="t">
             <a:spAutoFit/>
           </a:bodyPr>
           <a:lstStyle/>
@@ -8107,7 +8590,7 @@
           <a:noFill/>
         </p:spPr>
         <p:txBody>
-          <a:bodyPr wrap="square" anchor="t" lIns="0" rIns="0" tIns="0" bIns="0">
+          <a:bodyPr wrap="square" lIns="0" tIns="0" rIns="0" bIns="0" anchor="t">
             <a:spAutoFit/>
           </a:bodyPr>
           <a:lstStyle/>
@@ -8166,6 +8649,7 @@
           <a:lstStyle/>
           <a:p>
             <a:pPr algn="ctr"/>
+            <a:endParaRPr/>
           </a:p>
         </p:txBody>
       </p:sp>
@@ -8186,7 +8670,7 @@
           <a:noFill/>
         </p:spPr>
         <p:txBody>
-          <a:bodyPr wrap="square" anchor="ctr" lIns="0" rIns="0" tIns="0" bIns="0">
+          <a:bodyPr wrap="square" lIns="0" tIns="0" rIns="0" bIns="0" anchor="ctr">
             <a:spAutoFit/>
           </a:bodyPr>
           <a:lstStyle/>
@@ -8257,6 +8741,7 @@
           <a:lstStyle/>
           <a:p>
             <a:pPr algn="ctr"/>
+            <a:endParaRPr/>
           </a:p>
         </p:txBody>
       </p:sp>
@@ -8277,7 +8762,7 @@
           <a:noFill/>
         </p:spPr>
         <p:txBody>
-          <a:bodyPr wrap="square" anchor="ctr" lIns="0" rIns="0" tIns="0" bIns="0">
+          <a:bodyPr wrap="square" lIns="0" tIns="0" rIns="0" bIns="0" anchor="ctr">
             <a:spAutoFit/>
           </a:bodyPr>
           <a:lstStyle/>
@@ -8348,6 +8833,7 @@
           <a:lstStyle/>
           <a:p>
             <a:pPr algn="ctr"/>
+            <a:endParaRPr/>
           </a:p>
         </p:txBody>
       </p:sp>
@@ -8368,7 +8854,7 @@
           <a:noFill/>
         </p:spPr>
         <p:txBody>
-          <a:bodyPr wrap="square" anchor="ctr" lIns="0" rIns="0" tIns="0" bIns="0">
+          <a:bodyPr wrap="square" lIns="0" tIns="0" rIns="0" bIns="0" anchor="ctr">
             <a:spAutoFit/>
           </a:bodyPr>
           <a:lstStyle/>
@@ -8439,6 +8925,7 @@
           <a:lstStyle/>
           <a:p>
             <a:pPr algn="ctr"/>
+            <a:endParaRPr/>
           </a:p>
         </p:txBody>
       </p:sp>
@@ -8459,7 +8946,7 @@
           <a:noFill/>
         </p:spPr>
         <p:txBody>
-          <a:bodyPr wrap="square" anchor="ctr" lIns="0" rIns="0" tIns="0" bIns="0">
+          <a:bodyPr wrap="square" lIns="0" tIns="0" rIns="0" bIns="0" anchor="ctr">
             <a:spAutoFit/>
           </a:bodyPr>
           <a:lstStyle/>
@@ -8530,6 +9017,7 @@
           <a:lstStyle/>
           <a:p>
             <a:pPr algn="ctr"/>
+            <a:endParaRPr/>
           </a:p>
         </p:txBody>
       </p:sp>
@@ -8550,7 +9038,7 @@
           <a:noFill/>
         </p:spPr>
         <p:txBody>
-          <a:bodyPr wrap="square" anchor="ctr" lIns="0" rIns="0" tIns="0" bIns="0">
+          <a:bodyPr wrap="square" lIns="0" tIns="0" rIns="0" bIns="0" anchor="ctr">
             <a:spAutoFit/>
           </a:bodyPr>
           <a:lstStyle/>
@@ -8621,6 +9109,7 @@
           <a:lstStyle/>
           <a:p>
             <a:pPr algn="ctr"/>
+            <a:endParaRPr/>
           </a:p>
         </p:txBody>
       </p:sp>
@@ -8641,7 +9130,7 @@
           <a:noFill/>
         </p:spPr>
         <p:txBody>
-          <a:bodyPr wrap="square" anchor="ctr" lIns="0" rIns="0" tIns="0" bIns="0">
+          <a:bodyPr wrap="square" lIns="0" tIns="0" rIns="0" bIns="0" anchor="ctr">
             <a:spAutoFit/>
           </a:bodyPr>
           <a:lstStyle/>
@@ -8712,6 +9201,7 @@
           <a:lstStyle/>
           <a:p>
             <a:pPr algn="ctr"/>
+            <a:endParaRPr/>
           </a:p>
         </p:txBody>
       </p:sp>
@@ -8732,7 +9222,7 @@
           <a:noFill/>
         </p:spPr>
         <p:txBody>
-          <a:bodyPr wrap="square" anchor="ctr" lIns="0" rIns="0" tIns="0" bIns="0">
+          <a:bodyPr wrap="square" lIns="0" tIns="0" rIns="0" bIns="0" anchor="ctr">
             <a:spAutoFit/>
           </a:bodyPr>
           <a:lstStyle/>
@@ -8803,6 +9293,7 @@
           <a:lstStyle/>
           <a:p>
             <a:pPr algn="ctr"/>
+            <a:endParaRPr/>
           </a:p>
         </p:txBody>
       </p:sp>
@@ -8823,7 +9314,7 @@
           <a:noFill/>
         </p:spPr>
         <p:txBody>
-          <a:bodyPr wrap="square" anchor="ctr" lIns="0" rIns="0" tIns="0" bIns="0">
+          <a:bodyPr wrap="square" lIns="0" tIns="0" rIns="0" bIns="0" anchor="ctr">
             <a:spAutoFit/>
           </a:bodyPr>
           <a:lstStyle/>
@@ -8870,7 +9361,7 @@
           <a:noFill/>
         </p:spPr>
         <p:txBody>
-          <a:bodyPr wrap="square" anchor="t" lIns="0" rIns="0" tIns="0" bIns="0">
+          <a:bodyPr wrap="square" lIns="0" tIns="0" rIns="0" bIns="0" anchor="t">
             <a:spAutoFit/>
           </a:bodyPr>
           <a:lstStyle/>
@@ -8938,6 +9429,7 @@
           <a:lstStyle/>
           <a:p>
             <a:pPr algn="ctr"/>
+            <a:endParaRPr/>
           </a:p>
         </p:txBody>
       </p:sp>
@@ -8982,6 +9474,7 @@
           <a:lstStyle/>
           <a:p>
             <a:pPr algn="ctr"/>
+            <a:endParaRPr/>
           </a:p>
         </p:txBody>
       </p:sp>
@@ -9002,7 +9495,7 @@
           <a:noFill/>
         </p:spPr>
         <p:txBody>
-          <a:bodyPr wrap="square" anchor="t" lIns="0" rIns="0" tIns="0" bIns="0">
+          <a:bodyPr wrap="square" lIns="0" tIns="0" rIns="0" bIns="0" anchor="t">
             <a:spAutoFit/>
           </a:bodyPr>
           <a:lstStyle/>
@@ -9113,6 +9606,7 @@
           <a:lstStyle/>
           <a:p>
             <a:pPr algn="ctr"/>
+            <a:endParaRPr/>
           </a:p>
         </p:txBody>
       </p:sp>
@@ -9157,6 +9651,7 @@
           <a:lstStyle/>
           <a:p>
             <a:pPr algn="ctr"/>
+            <a:endParaRPr/>
           </a:p>
         </p:txBody>
       </p:sp>
@@ -9177,7 +9672,7 @@
           <a:noFill/>
         </p:spPr>
         <p:txBody>
-          <a:bodyPr wrap="square" anchor="t" lIns="0" rIns="0" tIns="0" bIns="0">
+          <a:bodyPr wrap="square" lIns="0" tIns="0" rIns="0" bIns="0" anchor="t">
             <a:spAutoFit/>
           </a:bodyPr>
           <a:lstStyle/>
@@ -9288,6 +9783,7 @@
           <a:lstStyle/>
           <a:p>
             <a:pPr algn="ctr"/>
+            <a:endParaRPr/>
           </a:p>
         </p:txBody>
       </p:sp>
@@ -9332,6 +9828,7 @@
           <a:lstStyle/>
           <a:p>
             <a:pPr algn="ctr"/>
+            <a:endParaRPr/>
           </a:p>
         </p:txBody>
       </p:sp>
@@ -9352,7 +9849,7 @@
           <a:noFill/>
         </p:spPr>
         <p:txBody>
-          <a:bodyPr wrap="square" anchor="t" lIns="0" rIns="0" tIns="0" bIns="0">
+          <a:bodyPr wrap="square" lIns="0" tIns="0" rIns="0" bIns="0" anchor="t">
             <a:spAutoFit/>
           </a:bodyPr>
           <a:lstStyle/>
@@ -9439,7 +9936,7 @@
           <a:noFill/>
         </p:spPr>
         <p:txBody>
-          <a:bodyPr wrap="square" anchor="t" lIns="0" rIns="0" tIns="0" bIns="0">
+          <a:bodyPr wrap="square" lIns="0" tIns="0" rIns="0" bIns="0" anchor="t">
             <a:spAutoFit/>
           </a:bodyPr>
           <a:lstStyle/>
@@ -9498,6 +9995,7 @@
           <a:lstStyle/>
           <a:p>
             <a:pPr algn="ctr"/>
+            <a:endParaRPr/>
           </a:p>
         </p:txBody>
       </p:sp>
@@ -9518,7 +10016,7 @@
           <a:noFill/>
         </p:spPr>
         <p:txBody>
-          <a:bodyPr wrap="square" anchor="ctr" lIns="0" rIns="0" tIns="0" bIns="0">
+          <a:bodyPr wrap="square" lIns="0" tIns="0" rIns="0" bIns="0" anchor="ctr">
             <a:spAutoFit/>
           </a:bodyPr>
           <a:lstStyle/>
@@ -9577,6 +10075,7 @@
           <a:lstStyle/>
           <a:p>
             <a:pPr algn="ctr"/>
+            <a:endParaRPr/>
           </a:p>
         </p:txBody>
       </p:sp>
@@ -9597,7 +10096,7 @@
           <a:noFill/>
         </p:spPr>
         <p:txBody>
-          <a:bodyPr wrap="square" anchor="ctr" lIns="0" rIns="0" tIns="0" bIns="0">
+          <a:bodyPr wrap="square" lIns="0" tIns="0" rIns="0" bIns="0" anchor="ctr">
             <a:spAutoFit/>
           </a:bodyPr>
           <a:lstStyle/>
@@ -9656,6 +10155,7 @@
           <a:lstStyle/>
           <a:p>
             <a:pPr algn="ctr"/>
+            <a:endParaRPr/>
           </a:p>
         </p:txBody>
       </p:sp>
@@ -9676,7 +10176,7 @@
           <a:noFill/>
         </p:spPr>
         <p:txBody>
-          <a:bodyPr wrap="square" anchor="ctr" lIns="0" rIns="0" tIns="0" bIns="0">
+          <a:bodyPr wrap="square" lIns="0" tIns="0" rIns="0" bIns="0" anchor="ctr">
             <a:spAutoFit/>
           </a:bodyPr>
           <a:lstStyle/>
@@ -9711,7 +10211,7 @@
           <a:noFill/>
         </p:spPr>
         <p:txBody>
-          <a:bodyPr wrap="square" anchor="t" lIns="0" rIns="0" tIns="0" bIns="0">
+          <a:bodyPr wrap="square" lIns="0" tIns="0" rIns="0" bIns="0" anchor="t">
             <a:spAutoFit/>
           </a:bodyPr>
           <a:lstStyle/>
@@ -9770,6 +10270,7 @@
           <a:lstStyle/>
           <a:p>
             <a:pPr algn="ctr"/>
+            <a:endParaRPr/>
           </a:p>
         </p:txBody>
       </p:sp>
@@ -9790,7 +10291,7 @@
           <a:noFill/>
         </p:spPr>
         <p:txBody>
-          <a:bodyPr wrap="square" anchor="ctr" lIns="0" rIns="0" tIns="0" bIns="0">
+          <a:bodyPr wrap="square" lIns="0" tIns="0" rIns="0" bIns="0" anchor="ctr">
             <a:spAutoFit/>
           </a:bodyPr>
           <a:lstStyle/>
@@ -9825,7 +10326,7 @@
           <a:noFill/>
         </p:spPr>
         <p:txBody>
-          <a:bodyPr wrap="square" anchor="t" lIns="0" rIns="0" tIns="0" bIns="0">
+          <a:bodyPr wrap="square" lIns="0" tIns="0" rIns="0" bIns="0" anchor="t">
             <a:spAutoFit/>
           </a:bodyPr>
           <a:lstStyle/>
@@ -9884,6 +10385,7 @@
           <a:lstStyle/>
           <a:p>
             <a:pPr algn="ctr"/>
+            <a:endParaRPr/>
           </a:p>
         </p:txBody>
       </p:sp>
@@ -9904,7 +10406,7 @@
           <a:noFill/>
         </p:spPr>
         <p:txBody>
-          <a:bodyPr wrap="square" anchor="ctr" lIns="0" rIns="0" tIns="0" bIns="0">
+          <a:bodyPr wrap="square" lIns="0" tIns="0" rIns="0" bIns="0" anchor="ctr">
             <a:spAutoFit/>
           </a:bodyPr>
           <a:lstStyle/>
@@ -9931,7 +10433,7 @@
 </file>
 
 <file path=ppt/slides/slide6.xml><?xml version="1.0" encoding="utf-8"?>
-<p:sld xmlns:a="http://schemas.openxmlformats.org/drawingml/2006/main" xmlns:p="http://schemas.openxmlformats.org/presentationml/2006/main" xmlns:r="http://schemas.openxmlformats.org/officeDocument/2006/relationships">
+<p:sld xmlns:a="http://schemas.openxmlformats.org/drawingml/2006/main" xmlns:r="http://schemas.openxmlformats.org/officeDocument/2006/relationships" xmlns:p="http://schemas.openxmlformats.org/presentationml/2006/main">
   <p:cSld>
     <p:spTree>
       <p:nvGrpSpPr>
@@ -9939,7 +10441,14 @@
         <p:cNvGrpSpPr/>
         <p:nvPr/>
       </p:nvGrpSpPr>
-      <p:grpSpPr/>
+      <p:grpSpPr>
+        <a:xfrm>
+          <a:off x="0" y="0"/>
+          <a:ext cx="0" cy="0"/>
+          <a:chOff x="0" y="0"/>
+          <a:chExt cx="0" cy="0"/>
+        </a:xfrm>
+      </p:grpSpPr>
       <p:sp>
         <p:nvSpPr>
           <p:cNvPr id="2" name="Rectangle 1"/>
@@ -9981,6 +10490,7 @@
           <a:lstStyle/>
           <a:p>
             <a:pPr algn="ctr"/>
+            <a:endParaRPr/>
           </a:p>
         </p:txBody>
       </p:sp>
@@ -10001,7 +10511,7 @@
           <a:noFill/>
         </p:spPr>
         <p:txBody>
-          <a:bodyPr wrap="square" anchor="t" lIns="0" rIns="0" tIns="0" bIns="0">
+          <a:bodyPr wrap="square" lIns="0" tIns="0" rIns="0" bIns="0" anchor="t">
             <a:spAutoFit/>
           </a:bodyPr>
           <a:lstStyle/>
@@ -10036,7 +10546,7 @@
           <a:noFill/>
         </p:spPr>
         <p:txBody>
-          <a:bodyPr wrap="square" anchor="t" lIns="0" rIns="0" tIns="0" bIns="0">
+          <a:bodyPr wrap="square" lIns="0" tIns="0" rIns="0" bIns="0" anchor="t">
             <a:spAutoFit/>
           </a:bodyPr>
           <a:lstStyle/>
@@ -10071,7 +10581,7 @@
           <a:noFill/>
         </p:spPr>
         <p:txBody>
-          <a:bodyPr wrap="square" anchor="t" lIns="0" rIns="0" tIns="0" bIns="0">
+          <a:bodyPr wrap="square" lIns="0" tIns="0" rIns="0" bIns="0" anchor="t">
             <a:spAutoFit/>
           </a:bodyPr>
           <a:lstStyle/>
@@ -10130,6 +10640,7 @@
           <a:lstStyle/>
           <a:p>
             <a:pPr algn="ctr"/>
+            <a:endParaRPr/>
           </a:p>
         </p:txBody>
       </p:sp>
@@ -10174,6 +10685,7 @@
           <a:lstStyle/>
           <a:p>
             <a:pPr algn="ctr"/>
+            <a:endParaRPr/>
           </a:p>
         </p:txBody>
       </p:sp>
@@ -10194,7 +10706,7 @@
           <a:noFill/>
         </p:spPr>
         <p:txBody>
-          <a:bodyPr wrap="square" anchor="ctr" lIns="0" rIns="0" tIns="0" bIns="0">
+          <a:bodyPr wrap="square" lIns="0" tIns="0" rIns="0" bIns="0" anchor="ctr">
             <a:spAutoFit/>
           </a:bodyPr>
           <a:lstStyle/>
@@ -10265,6 +10777,7 @@
           <a:lstStyle/>
           <a:p>
             <a:pPr algn="ctr"/>
+            <a:endParaRPr/>
           </a:p>
         </p:txBody>
       </p:sp>
@@ -10309,6 +10822,7 @@
           <a:lstStyle/>
           <a:p>
             <a:pPr algn="ctr"/>
+            <a:endParaRPr/>
           </a:p>
         </p:txBody>
       </p:sp>
@@ -10329,7 +10843,7 @@
           <a:noFill/>
         </p:spPr>
         <p:txBody>
-          <a:bodyPr wrap="square" anchor="ctr" lIns="0" rIns="0" tIns="0" bIns="0">
+          <a:bodyPr wrap="square" lIns="0" tIns="0" rIns="0" bIns="0" anchor="ctr">
             <a:spAutoFit/>
           </a:bodyPr>
           <a:lstStyle/>
@@ -10400,6 +10914,7 @@
           <a:lstStyle/>
           <a:p>
             <a:pPr algn="ctr"/>
+            <a:endParaRPr/>
           </a:p>
         </p:txBody>
       </p:sp>
@@ -10420,7 +10935,7 @@
           <a:noFill/>
         </p:spPr>
         <p:txBody>
-          <a:bodyPr wrap="square" anchor="t" lIns="0" rIns="0" tIns="0" bIns="0">
+          <a:bodyPr wrap="square" lIns="0" tIns="0" rIns="0" bIns="0" anchor="t">
             <a:spAutoFit/>
           </a:bodyPr>
           <a:lstStyle/>
@@ -10491,7 +11006,7 @@
           <a:noFill/>
         </p:spPr>
         <p:txBody>
-          <a:bodyPr wrap="square" anchor="t" lIns="0" rIns="0" tIns="0" bIns="0">
+          <a:bodyPr wrap="square" lIns="0" tIns="0" rIns="0" bIns="0" anchor="t">
             <a:spAutoFit/>
           </a:bodyPr>
           <a:lstStyle/>
@@ -10556,7 +11071,7 @@
 </file>
 
 <file path=ppt/slides/slide7.xml><?xml version="1.0" encoding="utf-8"?>
-<p:sld xmlns:a="http://schemas.openxmlformats.org/drawingml/2006/main" xmlns:p="http://schemas.openxmlformats.org/presentationml/2006/main" xmlns:r="http://schemas.openxmlformats.org/officeDocument/2006/relationships">
+<p:sld xmlns:a="http://schemas.openxmlformats.org/drawingml/2006/main" xmlns:r="http://schemas.openxmlformats.org/officeDocument/2006/relationships" xmlns:p="http://schemas.openxmlformats.org/presentationml/2006/main">
   <p:cSld>
     <p:spTree>
       <p:nvGrpSpPr>
@@ -10564,7 +11079,14 @@
         <p:cNvGrpSpPr/>
         <p:nvPr/>
       </p:nvGrpSpPr>
-      <p:grpSpPr/>
+      <p:grpSpPr>
+        <a:xfrm>
+          <a:off x="0" y="0"/>
+          <a:ext cx="0" cy="0"/>
+          <a:chOff x="0" y="0"/>
+          <a:chExt cx="0" cy="0"/>
+        </a:xfrm>
+      </p:grpSpPr>
       <p:sp>
         <p:nvSpPr>
           <p:cNvPr id="2" name="Rectangle 1"/>
@@ -10606,6 +11128,7 @@
           <a:lstStyle/>
           <a:p>
             <a:pPr algn="ctr"/>
+            <a:endParaRPr/>
           </a:p>
         </p:txBody>
       </p:sp>
@@ -10626,7 +11149,7 @@
           <a:noFill/>
         </p:spPr>
         <p:txBody>
-          <a:bodyPr wrap="square" anchor="t" lIns="0" rIns="0" tIns="0" bIns="0">
+          <a:bodyPr wrap="square" lIns="0" tIns="0" rIns="0" bIns="0" anchor="t">
             <a:spAutoFit/>
           </a:bodyPr>
           <a:lstStyle/>
@@ -10661,7 +11184,7 @@
           <a:noFill/>
         </p:spPr>
         <p:txBody>
-          <a:bodyPr wrap="square" anchor="t" lIns="0" rIns="0" tIns="0" bIns="0">
+          <a:bodyPr wrap="square" lIns="0" tIns="0" rIns="0" bIns="0" anchor="t">
             <a:spAutoFit/>
           </a:bodyPr>
           <a:lstStyle/>
@@ -10696,7 +11219,7 @@
           <a:noFill/>
         </p:spPr>
         <p:txBody>
-          <a:bodyPr wrap="square" anchor="t" lIns="0" rIns="0" tIns="0" bIns="0">
+          <a:bodyPr wrap="square" lIns="0" tIns="0" rIns="0" bIns="0" anchor="t">
             <a:spAutoFit/>
           </a:bodyPr>
           <a:lstStyle/>
@@ -10755,6 +11278,7 @@
           <a:lstStyle/>
           <a:p>
             <a:pPr algn="ctr"/>
+            <a:endParaRPr/>
           </a:p>
         </p:txBody>
       </p:sp>
@@ -10799,6 +11323,7 @@
           <a:lstStyle/>
           <a:p>
             <a:pPr algn="ctr"/>
+            <a:endParaRPr/>
           </a:p>
         </p:txBody>
       </p:sp>
@@ -10819,7 +11344,7 @@
           <a:noFill/>
         </p:spPr>
         <p:txBody>
-          <a:bodyPr wrap="square" anchor="ctr" lIns="0" rIns="0" tIns="0" bIns="0">
+          <a:bodyPr wrap="square" lIns="0" tIns="0" rIns="0" bIns="0" anchor="ctr">
             <a:spAutoFit/>
           </a:bodyPr>
           <a:lstStyle/>
@@ -10902,6 +11427,7 @@
           <a:lstStyle/>
           <a:p>
             <a:pPr algn="ctr"/>
+            <a:endParaRPr/>
           </a:p>
         </p:txBody>
       </p:sp>
@@ -10946,6 +11472,7 @@
           <a:lstStyle/>
           <a:p>
             <a:pPr algn="ctr"/>
+            <a:endParaRPr/>
           </a:p>
         </p:txBody>
       </p:sp>
@@ -10966,7 +11493,7 @@
           <a:noFill/>
         </p:spPr>
         <p:txBody>
-          <a:bodyPr wrap="square" anchor="ctr" lIns="0" rIns="0" tIns="0" bIns="0">
+          <a:bodyPr wrap="square" lIns="0" tIns="0" rIns="0" bIns="0" anchor="ctr">
             <a:spAutoFit/>
           </a:bodyPr>
           <a:lstStyle/>
@@ -11049,6 +11576,7 @@
           <a:lstStyle/>
           <a:p>
             <a:pPr algn="ctr"/>
+            <a:endParaRPr/>
           </a:p>
         </p:txBody>
       </p:sp>
@@ -11093,6 +11621,7 @@
           <a:lstStyle/>
           <a:p>
             <a:pPr algn="ctr"/>
+            <a:endParaRPr/>
           </a:p>
         </p:txBody>
       </p:sp>
@@ -11113,7 +11642,7 @@
           <a:noFill/>
         </p:spPr>
         <p:txBody>
-          <a:bodyPr wrap="square" anchor="ctr" lIns="0" rIns="0" tIns="0" bIns="0">
+          <a:bodyPr wrap="square" lIns="0" tIns="0" rIns="0" bIns="0" anchor="ctr">
             <a:spAutoFit/>
           </a:bodyPr>
           <a:lstStyle/>
@@ -11196,6 +11725,7 @@
           <a:lstStyle/>
           <a:p>
             <a:pPr algn="ctr"/>
+            <a:endParaRPr/>
           </a:p>
         </p:txBody>
       </p:sp>
@@ -11216,7 +11746,7 @@
           <a:noFill/>
         </p:spPr>
         <p:txBody>
-          <a:bodyPr wrap="square" anchor="ctr" lIns="0" rIns="0" tIns="0" bIns="0">
+          <a:bodyPr wrap="square" lIns="0" tIns="0" rIns="0" bIns="0" anchor="ctr">
             <a:spAutoFit/>
           </a:bodyPr>
           <a:lstStyle/>
@@ -11260,7 +11790,7 @@
           <a:noFill/>
         </p:spPr>
         <p:txBody>
-          <a:bodyPr wrap="square" anchor="t" lIns="0" rIns="0" tIns="0" bIns="0">
+          <a:bodyPr wrap="square" lIns="0" tIns="0" rIns="0" bIns="0" anchor="t">
             <a:spAutoFit/>
           </a:bodyPr>
           <a:lstStyle/>
@@ -11300,7 +11830,7 @@
 </file>
 
 <file path=ppt/slides/slide8.xml><?xml version="1.0" encoding="utf-8"?>
-<p:sld xmlns:a="http://schemas.openxmlformats.org/drawingml/2006/main" xmlns:p="http://schemas.openxmlformats.org/presentationml/2006/main" xmlns:r="http://schemas.openxmlformats.org/officeDocument/2006/relationships">
+<p:sld xmlns:a="http://schemas.openxmlformats.org/drawingml/2006/main" xmlns:r="http://schemas.openxmlformats.org/officeDocument/2006/relationships" xmlns:p="http://schemas.openxmlformats.org/presentationml/2006/main">
   <p:cSld>
     <p:spTree>
       <p:nvGrpSpPr>
@@ -11308,7 +11838,14 @@
         <p:cNvGrpSpPr/>
         <p:nvPr/>
       </p:nvGrpSpPr>
-      <p:grpSpPr/>
+      <p:grpSpPr>
+        <a:xfrm>
+          <a:off x="0" y="0"/>
+          <a:ext cx="0" cy="0"/>
+          <a:chOff x="0" y="0"/>
+          <a:chExt cx="0" cy="0"/>
+        </a:xfrm>
+      </p:grpSpPr>
       <p:sp>
         <p:nvSpPr>
           <p:cNvPr id="2" name="Rectangle 1"/>
@@ -11350,6 +11887,7 @@
           <a:lstStyle/>
           <a:p>
             <a:pPr algn="ctr"/>
+            <a:endParaRPr/>
           </a:p>
         </p:txBody>
       </p:sp>
@@ -11370,7 +11908,7 @@
           <a:noFill/>
         </p:spPr>
         <p:txBody>
-          <a:bodyPr wrap="square" anchor="t" lIns="0" rIns="0" tIns="0" bIns="0">
+          <a:bodyPr wrap="square" lIns="0" tIns="0" rIns="0" bIns="0" anchor="t">
             <a:spAutoFit/>
           </a:bodyPr>
           <a:lstStyle/>
@@ -11405,7 +11943,7 @@
           <a:noFill/>
         </p:spPr>
         <p:txBody>
-          <a:bodyPr wrap="square" anchor="t" lIns="0" rIns="0" tIns="0" bIns="0">
+          <a:bodyPr wrap="square" lIns="0" tIns="0" rIns="0" bIns="0" anchor="t">
             <a:spAutoFit/>
           </a:bodyPr>
           <a:lstStyle/>
@@ -11440,7 +11978,7 @@
           <a:noFill/>
         </p:spPr>
         <p:txBody>
-          <a:bodyPr wrap="square" anchor="t" lIns="0" rIns="0" tIns="0" bIns="0">
+          <a:bodyPr wrap="square" lIns="0" tIns="0" rIns="0" bIns="0" anchor="t">
             <a:spAutoFit/>
           </a:bodyPr>
           <a:lstStyle/>
@@ -11497,6 +12035,7 @@
           <a:lstStyle/>
           <a:p>
             <a:pPr algn="ctr"/>
+            <a:endParaRPr/>
           </a:p>
         </p:txBody>
       </p:sp>
@@ -11517,7 +12056,7 @@
           <a:noFill/>
         </p:spPr>
         <p:txBody>
-          <a:bodyPr wrap="square" anchor="t" lIns="0" rIns="0" tIns="0" bIns="0">
+          <a:bodyPr wrap="square" lIns="0" tIns="0" rIns="0" bIns="0" anchor="t">
             <a:spAutoFit/>
           </a:bodyPr>
           <a:lstStyle/>
@@ -11576,6 +12115,7 @@
           <a:lstStyle/>
           <a:p>
             <a:pPr algn="ctr"/>
+            <a:endParaRPr/>
           </a:p>
         </p:txBody>
       </p:sp>
@@ -11620,6 +12160,7 @@
           <a:lstStyle/>
           <a:p>
             <a:pPr algn="ctr"/>
+            <a:endParaRPr/>
           </a:p>
         </p:txBody>
       </p:sp>
@@ -11640,7 +12181,7 @@
           <a:noFill/>
         </p:spPr>
         <p:txBody>
-          <a:bodyPr wrap="square" anchor="ctr" lIns="0" rIns="0" tIns="0" bIns="0">
+          <a:bodyPr wrap="square" lIns="0" tIns="0" rIns="0" bIns="0" anchor="ctr">
             <a:spAutoFit/>
           </a:bodyPr>
           <a:lstStyle/>
@@ -11687,7 +12228,7 @@
           <a:noFill/>
         </p:spPr>
         <p:txBody>
-          <a:bodyPr wrap="square" anchor="t" lIns="0" rIns="0" tIns="0" bIns="0">
+          <a:bodyPr wrap="square" lIns="0" tIns="0" rIns="0" bIns="0" anchor="t">
             <a:spAutoFit/>
           </a:bodyPr>
           <a:lstStyle/>
@@ -11746,6 +12287,7 @@
           <a:lstStyle/>
           <a:p>
             <a:pPr algn="ctr"/>
+            <a:endParaRPr/>
           </a:p>
         </p:txBody>
       </p:sp>
@@ -11790,6 +12332,7 @@
           <a:lstStyle/>
           <a:p>
             <a:pPr algn="ctr"/>
+            <a:endParaRPr/>
           </a:p>
         </p:txBody>
       </p:sp>
@@ -11810,7 +12353,7 @@
           <a:noFill/>
         </p:spPr>
         <p:txBody>
-          <a:bodyPr wrap="square" anchor="ctr" lIns="0" rIns="0" tIns="0" bIns="0">
+          <a:bodyPr wrap="square" lIns="0" tIns="0" rIns="0" bIns="0" anchor="ctr">
             <a:spAutoFit/>
           </a:bodyPr>
           <a:lstStyle/>
@@ -11879,6 +12422,7 @@
           <a:lstStyle/>
           <a:p>
             <a:pPr algn="ctr"/>
+            <a:endParaRPr/>
           </a:p>
         </p:txBody>
       </p:sp>
@@ -11899,7 +12443,7 @@
           <a:noFill/>
         </p:spPr>
         <p:txBody>
-          <a:bodyPr wrap="square" anchor="t" lIns="0" rIns="0" tIns="0" bIns="0">
+          <a:bodyPr wrap="square" lIns="0" tIns="0" rIns="0" bIns="0" anchor="t">
             <a:spAutoFit/>
           </a:bodyPr>
           <a:lstStyle/>
@@ -11958,6 +12502,7 @@
           <a:lstStyle/>
           <a:p>
             <a:pPr algn="ctr"/>
+            <a:endParaRPr/>
           </a:p>
         </p:txBody>
       </p:sp>
@@ -12002,6 +12547,7 @@
           <a:lstStyle/>
           <a:p>
             <a:pPr algn="ctr"/>
+            <a:endParaRPr/>
           </a:p>
         </p:txBody>
       </p:sp>
@@ -12022,7 +12568,7 @@
           <a:noFill/>
         </p:spPr>
         <p:txBody>
-          <a:bodyPr wrap="square" anchor="ctr" lIns="0" rIns="0" tIns="0" bIns="0">
+          <a:bodyPr wrap="square" lIns="0" tIns="0" rIns="0" bIns="0" anchor="ctr">
             <a:spAutoFit/>
           </a:bodyPr>
           <a:lstStyle/>
@@ -12069,7 +12615,7 @@
           <a:noFill/>
         </p:spPr>
         <p:txBody>
-          <a:bodyPr wrap="square" anchor="t" lIns="0" rIns="0" tIns="0" bIns="0">
+          <a:bodyPr wrap="square" lIns="0" tIns="0" rIns="0" bIns="0" anchor="t">
             <a:spAutoFit/>
           </a:bodyPr>
           <a:lstStyle/>
@@ -12128,6 +12674,7 @@
           <a:lstStyle/>
           <a:p>
             <a:pPr algn="ctr"/>
+            <a:endParaRPr/>
           </a:p>
         </p:txBody>
       </p:sp>
@@ -12172,6 +12719,7 @@
           <a:lstStyle/>
           <a:p>
             <a:pPr algn="ctr"/>
+            <a:endParaRPr/>
           </a:p>
         </p:txBody>
       </p:sp>
@@ -12192,7 +12740,7 @@
           <a:noFill/>
         </p:spPr>
         <p:txBody>
-          <a:bodyPr wrap="square" anchor="ctr" lIns="0" rIns="0" tIns="0" bIns="0">
+          <a:bodyPr wrap="square" lIns="0" tIns="0" rIns="0" bIns="0" anchor="ctr">
             <a:spAutoFit/>
           </a:bodyPr>
           <a:lstStyle/>
@@ -12263,6 +12811,7 @@
           <a:lstStyle/>
           <a:p>
             <a:pPr algn="ctr"/>
+            <a:endParaRPr/>
           </a:p>
         </p:txBody>
       </p:sp>
@@ -12307,6 +12856,7 @@
           <a:lstStyle/>
           <a:p>
             <a:pPr algn="ctr"/>
+            <a:endParaRPr/>
           </a:p>
         </p:txBody>
       </p:sp>
@@ -12327,7 +12877,7 @@
           <a:noFill/>
         </p:spPr>
         <p:txBody>
-          <a:bodyPr wrap="square" anchor="t" lIns="0" rIns="0" tIns="0" bIns="0">
+          <a:bodyPr wrap="square" lIns="0" tIns="0" rIns="0" bIns="0" anchor="t">
             <a:spAutoFit/>
           </a:bodyPr>
           <a:lstStyle/>
@@ -12362,7 +12912,7 @@
           <a:noFill/>
         </p:spPr>
         <p:txBody>
-          <a:bodyPr wrap="square" anchor="t" lIns="0" rIns="0" tIns="0" bIns="0">
+          <a:bodyPr wrap="square" lIns="0" tIns="0" rIns="0" bIns="0" anchor="t">
             <a:spAutoFit/>
           </a:bodyPr>
           <a:lstStyle/>
@@ -12525,6 +13075,7 @@
           <a:lstStyle/>
           <a:p>
             <a:pPr algn="ctr"/>
+            <a:endParaRPr/>
           </a:p>
         </p:txBody>
       </p:sp>
@@ -12569,6 +13120,7 @@
           <a:lstStyle/>
           <a:p>
             <a:pPr algn="ctr"/>
+            <a:endParaRPr/>
           </a:p>
         </p:txBody>
       </p:sp>
@@ -12589,7 +13141,7 @@
           <a:noFill/>
         </p:spPr>
         <p:txBody>
-          <a:bodyPr wrap="square" anchor="t" lIns="0" rIns="0" tIns="0" bIns="0">
+          <a:bodyPr wrap="square" lIns="0" tIns="0" rIns="0" bIns="0" anchor="t">
             <a:spAutoFit/>
           </a:bodyPr>
           <a:lstStyle/>
@@ -12624,7 +13176,7 @@
           <a:noFill/>
         </p:spPr>
         <p:txBody>
-          <a:bodyPr wrap="square" anchor="t" lIns="0" rIns="0" tIns="0" bIns="0">
+          <a:bodyPr wrap="square" lIns="0" tIns="0" rIns="0" bIns="0" anchor="t">
             <a:spAutoFit/>
           </a:bodyPr>
           <a:lstStyle/>
@@ -12635,16 +13187,34 @@
               </a:spcAft>
             </a:pPr>
             <a:r>
-              <a:rPr sz="1150" b="0">
+              <a:rPr sz="1150" b="0" dirty="0" err="1">
                 <a:solidFill>
                   <a:srgbClr val="8B949E"/>
                 </a:solidFill>
                 <a:latin typeface="Consolas"/>
               </a:rPr>
-              <a:t>xlated insn</a:t>
-            </a:r>
-            <a:r>
-              <a:rPr sz="1250" b="1">
+              <a:t>xlated</a:t>
+            </a:r>
+            <a:r>
+              <a:rPr sz="1150" b="0" dirty="0">
+                <a:solidFill>
+                  <a:srgbClr val="8B949E"/>
+                </a:solidFill>
+                <a:latin typeface="Consolas"/>
+              </a:rPr>
+              <a:t> </a:t>
+            </a:r>
+            <a:r>
+              <a:rPr sz="1150" b="0" dirty="0" err="1">
+                <a:solidFill>
+                  <a:srgbClr val="8B949E"/>
+                </a:solidFill>
+                <a:latin typeface="Consolas"/>
+              </a:rPr>
+              <a:t>insn</a:t>
+            </a:r>
+            <a:r>
+              <a:rPr sz="1250" b="1" dirty="0">
                 <a:solidFill>
                   <a:srgbClr val="E6EDF3"/>
                 </a:solidFill>
@@ -12660,7 +13230,7 @@
               </a:spcAft>
             </a:pPr>
             <a:r>
-              <a:rPr sz="1150" b="0">
+              <a:rPr sz="1150" b="0" dirty="0" err="1">
                 <a:solidFill>
                   <a:srgbClr val="8B949E"/>
                 </a:solidFill>
@@ -12669,7 +13239,7 @@
               <a:t>latenza</a:t>
             </a:r>
             <a:r>
-              <a:rPr sz="1250" b="1">
+              <a:rPr sz="1250" b="1" dirty="0">
                 <a:solidFill>
                   <a:srgbClr val="E6EDF3"/>
                 </a:solidFill>
@@ -12685,7 +13255,7 @@
               </a:spcAft>
             </a:pPr>
             <a:r>
-              <a:rPr sz="1150" b="0">
+              <a:rPr sz="1150" b="0" dirty="0">
                 <a:solidFill>
                   <a:srgbClr val="8B949E"/>
                 </a:solidFill>
@@ -12694,7 +13264,7 @@
               <a:t>throughput</a:t>
             </a:r>
             <a:r>
-              <a:rPr sz="1250" b="1">
+              <a:rPr sz="1250" b="1" dirty="0">
                 <a:solidFill>
                   <a:srgbClr val="E6EDF3"/>
                 </a:solidFill>
@@ -12710,7 +13280,7 @@
               </a:spcAft>
             </a:pPr>
             <a:r>
-              <a:rPr sz="1150" b="0">
+              <a:rPr sz="1150" b="0" dirty="0" err="1">
                 <a:solidFill>
                   <a:srgbClr val="8B949E"/>
                 </a:solidFill>
@@ -12719,7 +13289,7 @@
               <a:t>retval</a:t>
             </a:r>
             <a:r>
-              <a:rPr sz="1250" b="1">
+              <a:rPr sz="1250" b="1" dirty="0">
                 <a:solidFill>
                   <a:srgbClr val="E6EDF3"/>
                 </a:solidFill>
@@ -12735,14 +13305,47 @@
               </a:spcAft>
             </a:pPr>
             <a:r>
-              <a:rPr sz="1100" b="0">
+              <a:rPr sz="1100" b="0" dirty="0">
                 <a:solidFill>
                   <a:srgbClr val="3FB950"/>
                 </a:solidFill>
                 <a:latin typeface="Segoe UI"/>
               </a:rPr>
-              <a:t>= massimo literal, perf NON persa</a:t>
-            </a:r>
+              <a:t>= </a:t>
+            </a:r>
+            <a:r>
+              <a:rPr sz="1100" b="0" dirty="0" err="1">
+                <a:solidFill>
+                  <a:srgbClr val="3FB950"/>
+                </a:solidFill>
+                <a:latin typeface="Segoe UI"/>
+              </a:rPr>
+              <a:t>massimo</a:t>
+            </a:r>
+            <a:r>
+              <a:rPr sz="1100" b="0" dirty="0">
+                <a:solidFill>
+                  <a:srgbClr val="3FB950"/>
+                </a:solidFill>
+                <a:latin typeface="Segoe UI"/>
+              </a:rPr>
+              <a:t> literal, perf NON </a:t>
+            </a:r>
+            <a:r>
+              <a:rPr sz="1100" b="0" dirty="0" err="1">
+                <a:solidFill>
+                  <a:srgbClr val="3FB950"/>
+                </a:solidFill>
+                <a:latin typeface="Segoe UI"/>
+              </a:rPr>
+              <a:t>persa</a:t>
+            </a:r>
+            <a:endParaRPr sz="1100" b="0" dirty="0">
+              <a:solidFill>
+                <a:srgbClr val="3FB950"/>
+              </a:solidFill>
+              <a:latin typeface="Segoe UI"/>
+            </a:endParaRPr>
           </a:p>
         </p:txBody>
       </p:sp>
@@ -12763,7 +13366,7 @@
           <a:noFill/>
         </p:spPr>
         <p:txBody>
-          <a:bodyPr wrap="square" anchor="t" lIns="0" rIns="0" tIns="0" bIns="0">
+          <a:bodyPr wrap="square" lIns="0" tIns="0" rIns="0" bIns="0" anchor="t">
             <a:spAutoFit/>
           </a:bodyPr>
           <a:lstStyle/>
@@ -12790,7 +13393,7 @@
 </file>
 
 <file path=ppt/slides/slide9.xml><?xml version="1.0" encoding="utf-8"?>
-<p:sld xmlns:a="http://schemas.openxmlformats.org/drawingml/2006/main" xmlns:p="http://schemas.openxmlformats.org/presentationml/2006/main" xmlns:r="http://schemas.openxmlformats.org/officeDocument/2006/relationships">
+<p:sld xmlns:a="http://schemas.openxmlformats.org/drawingml/2006/main" xmlns:r="http://schemas.openxmlformats.org/officeDocument/2006/relationships" xmlns:p="http://schemas.openxmlformats.org/presentationml/2006/main">
   <p:cSld>
     <p:spTree>
       <p:nvGrpSpPr>
@@ -12798,7 +13401,14 @@
         <p:cNvGrpSpPr/>
         <p:nvPr/>
       </p:nvGrpSpPr>
-      <p:grpSpPr/>
+      <p:grpSpPr>
+        <a:xfrm>
+          <a:off x="0" y="0"/>
+          <a:ext cx="0" cy="0"/>
+          <a:chOff x="0" y="0"/>
+          <a:chExt cx="0" cy="0"/>
+        </a:xfrm>
+      </p:grpSpPr>
       <p:sp>
         <p:nvSpPr>
           <p:cNvPr id="2" name="Rectangle 1"/>
@@ -12840,6 +13450,7 @@
           <a:lstStyle/>
           <a:p>
             <a:pPr algn="ctr"/>
+            <a:endParaRPr/>
           </a:p>
         </p:txBody>
       </p:sp>
@@ -12860,7 +13471,7 @@
           <a:noFill/>
         </p:spPr>
         <p:txBody>
-          <a:bodyPr wrap="square" anchor="t" lIns="0" rIns="0" tIns="0" bIns="0">
+          <a:bodyPr wrap="square" lIns="0" tIns="0" rIns="0" bIns="0" anchor="t">
             <a:spAutoFit/>
           </a:bodyPr>
           <a:lstStyle/>
@@ -12895,7 +13506,7 @@
           <a:noFill/>
         </p:spPr>
         <p:txBody>
-          <a:bodyPr wrap="square" anchor="t" lIns="0" rIns="0" tIns="0" bIns="0">
+          <a:bodyPr wrap="square" lIns="0" tIns="0" rIns="0" bIns="0" anchor="t">
             <a:spAutoFit/>
           </a:bodyPr>
           <a:lstStyle/>
@@ -12930,7 +13541,7 @@
           <a:noFill/>
         </p:spPr>
         <p:txBody>
-          <a:bodyPr wrap="square" anchor="t" lIns="0" rIns="0" tIns="0" bIns="0">
+          <a:bodyPr wrap="square" lIns="0" tIns="0" rIns="0" bIns="0" anchor="t">
             <a:spAutoFit/>
           </a:bodyPr>
           <a:lstStyle/>
@@ -12965,21 +13576,13 @@
           <a:noFill/>
         </p:spPr>
         <p:txBody>
-          <a:bodyPr wrap="square" anchor="t" lIns="0" rIns="0" tIns="0" bIns="0">
+          <a:bodyPr wrap="square" lIns="0" tIns="0" rIns="0" bIns="0" anchor="t">
             <a:spAutoFit/>
           </a:bodyPr>
           <a:lstStyle/>
           <a:p>
             <a:pPr algn="l"/>
-            <a:r>
-              <a:rPr sz="1200" b="1">
-                <a:solidFill>
-                  <a:srgbClr val="8B949E"/>
-                </a:solidFill>
-                <a:latin typeface="Segoe UI"/>
-              </a:rPr>
-              <a:t/>
-            </a:r>
+            <a:endParaRPr/>
           </a:p>
         </p:txBody>
       </p:sp>
@@ -13000,7 +13603,7 @@
           <a:noFill/>
         </p:spPr>
         <p:txBody>
-          <a:bodyPr wrap="square" anchor="t" lIns="0" rIns="0" tIns="0" bIns="0">
+          <a:bodyPr wrap="square" lIns="0" tIns="0" rIns="0" bIns="0" anchor="t">
             <a:spAutoFit/>
           </a:bodyPr>
           <a:lstStyle/>
@@ -13035,7 +13638,7 @@
           <a:noFill/>
         </p:spPr>
         <p:txBody>
-          <a:bodyPr wrap="square" anchor="t" lIns="0" rIns="0" tIns="0" bIns="0">
+          <a:bodyPr wrap="square" lIns="0" tIns="0" rIns="0" bIns="0" anchor="t">
             <a:spAutoFit/>
           </a:bodyPr>
           <a:lstStyle/>
@@ -13070,7 +13673,7 @@
           <a:noFill/>
         </p:spPr>
         <p:txBody>
-          <a:bodyPr wrap="square" anchor="t" lIns="0" rIns="0" tIns="0" bIns="0">
+          <a:bodyPr wrap="square" lIns="0" tIns="0" rIns="0" bIns="0" anchor="t">
             <a:spAutoFit/>
           </a:bodyPr>
           <a:lstStyle/>
@@ -13129,6 +13732,7 @@
           <a:lstStyle/>
           <a:p>
             <a:pPr algn="ctr"/>
+            <a:endParaRPr/>
           </a:p>
         </p:txBody>
       </p:sp>
@@ -13149,7 +13753,7 @@
           <a:noFill/>
         </p:spPr>
         <p:txBody>
-          <a:bodyPr wrap="square" anchor="ctr" lIns="0" rIns="0" tIns="0" bIns="0">
+          <a:bodyPr wrap="square" lIns="0" tIns="0" rIns="0" bIns="0" anchor="ctr">
             <a:spAutoFit/>
           </a:bodyPr>
           <a:lstStyle/>
@@ -13184,7 +13788,7 @@
           <a:noFill/>
         </p:spPr>
         <p:txBody>
-          <a:bodyPr wrap="square" anchor="ctr" lIns="0" rIns="0" tIns="0" bIns="0">
+          <a:bodyPr wrap="square" lIns="0" tIns="0" rIns="0" bIns="0" anchor="ctr">
             <a:spAutoFit/>
           </a:bodyPr>
           <a:lstStyle/>
@@ -13219,7 +13823,7 @@
           <a:noFill/>
         </p:spPr>
         <p:txBody>
-          <a:bodyPr wrap="square" anchor="ctr" lIns="0" rIns="0" tIns="0" bIns="0">
+          <a:bodyPr wrap="square" lIns="0" tIns="0" rIns="0" bIns="0" anchor="ctr">
             <a:spAutoFit/>
           </a:bodyPr>
           <a:lstStyle/>
@@ -13254,7 +13858,7 @@
           <a:noFill/>
         </p:spPr>
         <p:txBody>
-          <a:bodyPr wrap="square" anchor="ctr" lIns="0" rIns="0" tIns="0" bIns="0">
+          <a:bodyPr wrap="square" lIns="0" tIns="0" rIns="0" bIns="0" anchor="ctr">
             <a:spAutoFit/>
           </a:bodyPr>
           <a:lstStyle/>
@@ -13313,6 +13917,7 @@
           <a:lstStyle/>
           <a:p>
             <a:pPr algn="ctr"/>
+            <a:endParaRPr/>
           </a:p>
         </p:txBody>
       </p:sp>
@@ -13333,7 +13938,7 @@
           <a:noFill/>
         </p:spPr>
         <p:txBody>
-          <a:bodyPr wrap="square" anchor="ctr" lIns="0" rIns="0" tIns="0" bIns="0">
+          <a:bodyPr wrap="square" lIns="0" tIns="0" rIns="0" bIns="0" anchor="ctr">
             <a:spAutoFit/>
           </a:bodyPr>
           <a:lstStyle/>
@@ -13368,7 +13973,7 @@
           <a:noFill/>
         </p:spPr>
         <p:txBody>
-          <a:bodyPr wrap="square" anchor="ctr" lIns="0" rIns="0" tIns="0" bIns="0">
+          <a:bodyPr wrap="square" lIns="0" tIns="0" rIns="0" bIns="0" anchor="ctr">
             <a:spAutoFit/>
           </a:bodyPr>
           <a:lstStyle/>
@@ -13403,7 +14008,7 @@
           <a:noFill/>
         </p:spPr>
         <p:txBody>
-          <a:bodyPr wrap="square" anchor="ctr" lIns="0" rIns="0" tIns="0" bIns="0">
+          <a:bodyPr wrap="square" lIns="0" tIns="0" rIns="0" bIns="0" anchor="ctr">
             <a:spAutoFit/>
           </a:bodyPr>
           <a:lstStyle/>
@@ -13438,7 +14043,7 @@
           <a:noFill/>
         </p:spPr>
         <p:txBody>
-          <a:bodyPr wrap="square" anchor="ctr" lIns="0" rIns="0" tIns="0" bIns="0">
+          <a:bodyPr wrap="square" lIns="0" tIns="0" rIns="0" bIns="0" anchor="ctr">
             <a:spAutoFit/>
           </a:bodyPr>
           <a:lstStyle/>
@@ -13497,6 +14102,7 @@
           <a:lstStyle/>
           <a:p>
             <a:pPr algn="ctr"/>
+            <a:endParaRPr/>
           </a:p>
         </p:txBody>
       </p:sp>
@@ -13517,7 +14123,7 @@
           <a:noFill/>
         </p:spPr>
         <p:txBody>
-          <a:bodyPr wrap="square" anchor="ctr" lIns="0" rIns="0" tIns="0" bIns="0">
+          <a:bodyPr wrap="square" lIns="0" tIns="0" rIns="0" bIns="0" anchor="ctr">
             <a:spAutoFit/>
           </a:bodyPr>
           <a:lstStyle/>
@@ -13552,7 +14158,7 @@
           <a:noFill/>
         </p:spPr>
         <p:txBody>
-          <a:bodyPr wrap="square" anchor="ctr" lIns="0" rIns="0" tIns="0" bIns="0">
+          <a:bodyPr wrap="square" lIns="0" tIns="0" rIns="0" bIns="0" anchor="ctr">
             <a:spAutoFit/>
           </a:bodyPr>
           <a:lstStyle/>
@@ -13587,7 +14193,7 @@
           <a:noFill/>
         </p:spPr>
         <p:txBody>
-          <a:bodyPr wrap="square" anchor="ctr" lIns="0" rIns="0" tIns="0" bIns="0">
+          <a:bodyPr wrap="square" lIns="0" tIns="0" rIns="0" bIns="0" anchor="ctr">
             <a:spAutoFit/>
           </a:bodyPr>
           <a:lstStyle/>
@@ -13622,7 +14228,7 @@
           <a:noFill/>
         </p:spPr>
         <p:txBody>
-          <a:bodyPr wrap="square" anchor="ctr" lIns="0" rIns="0" tIns="0" bIns="0">
+          <a:bodyPr wrap="square" lIns="0" tIns="0" rIns="0" bIns="0" anchor="ctr">
             <a:spAutoFit/>
           </a:bodyPr>
           <a:lstStyle/>
@@ -13681,6 +14287,7 @@
           <a:lstStyle/>
           <a:p>
             <a:pPr algn="ctr"/>
+            <a:endParaRPr/>
           </a:p>
         </p:txBody>
       </p:sp>
@@ -13725,6 +14332,7 @@
           <a:lstStyle/>
           <a:p>
             <a:pPr algn="ctr"/>
+            <a:endParaRPr/>
           </a:p>
         </p:txBody>
       </p:sp>
@@ -13745,7 +14353,7 @@
           <a:noFill/>
         </p:spPr>
         <p:txBody>
-          <a:bodyPr wrap="square" anchor="ctr" lIns="0" rIns="0" tIns="0" bIns="0">
+          <a:bodyPr wrap="square" lIns="0" tIns="0" rIns="0" bIns="0" anchor="ctr">
             <a:spAutoFit/>
           </a:bodyPr>
           <a:lstStyle/>
@@ -13792,7 +14400,7 @@
           <a:noFill/>
         </p:spPr>
         <p:txBody>
-          <a:bodyPr wrap="square" anchor="t" lIns="0" rIns="0" tIns="0" bIns="0">
+          <a:bodyPr wrap="square" lIns="0" tIns="0" rIns="0" bIns="0" anchor="t">
             <a:spAutoFit/>
           </a:bodyPr>
           <a:lstStyle/>

--- a/docs/IPA_hardcoded_IV_ricompilazione.pptx
+++ b/docs/IPA_hardcoded_IV_ricompilazione.pptx
@@ -5,19 +5,19 @@
     <p:sldMasterId id="2147483648" r:id="rId1"/>
   </p:sldMasterIdLst>
   <p:sldIdLst>
-    <p:sldId id="256" r:id="rId2"/>
-    <p:sldId id="257" r:id="rId3"/>
-    <p:sldId id="258" r:id="rId4"/>
-    <p:sldId id="259" r:id="rId5"/>
-    <p:sldId id="260" r:id="rId6"/>
-    <p:sldId id="261" r:id="rId7"/>
-    <p:sldId id="262" r:id="rId8"/>
-    <p:sldId id="263" r:id="rId9"/>
-    <p:sldId id="264" r:id="rId10"/>
-    <p:sldId id="265" r:id="rId11"/>
-    <p:sldId id="266" r:id="rId12"/>
+    <p:sldId id="256" r:id="rId7"/>
+    <p:sldId id="257" r:id="rId8"/>
+    <p:sldId id="258" r:id="rId9"/>
+    <p:sldId id="259" r:id="rId10"/>
+    <p:sldId id="260" r:id="rId11"/>
+    <p:sldId id="261" r:id="rId12"/>
+    <p:sldId id="262" r:id="rId13"/>
+    <p:sldId id="263" r:id="rId14"/>
+    <p:sldId id="264" r:id="rId15"/>
+    <p:sldId id="265" r:id="rId16"/>
+    <p:sldId id="266" r:id="rId17"/>
   </p:sldIdLst>
-  <p:sldSz cx="12192000" cy="6858000"/>
+  <p:sldSz cx="12191969" cy="6858000" type="screen4x3"/>
   <p:notesSz cx="6858000" cy="9144000"/>
   <p:defaultTextStyle>
     <a:defPPr>
@@ -114,22 +114,6 @@
       </a:defRPr>
     </a:lvl9pPr>
   </p:defaultTextStyle>
-  <p:extLst>
-    <p:ext uri="{EFAFB233-063F-42B5-8137-9DF3F51BA10A}">
-      <p15:sldGuideLst xmlns:p15="http://schemas.microsoft.com/office/powerpoint/2012/main">
-        <p15:guide id="1" orient="horz" pos="2160">
-          <p15:clr>
-            <a:srgbClr val="A4A3A4"/>
-          </p15:clr>
-        </p15:guide>
-        <p15:guide id="2" pos="2880">
-          <p15:clr>
-            <a:srgbClr val="A4A3A4"/>
-          </p15:clr>
-        </p15:guide>
-      </p15:sldGuideLst>
-    </p:ext>
-  </p:extLst>
 </p:presentation>
 </file>
 
@@ -171,9 +155,10 @@
           <a:lstStyle/>
           <a:p>
             <a:r>
-              <a:rPr lang="en-US"/>
+              <a:rPr lang="en-US" smtClean="0"/>
               <a:t>Click to edit Master title style</a:t>
             </a:r>
+            <a:endParaRPr lang="en-US"/>
           </a:p>
         </p:txBody>
       </p:sp>
@@ -289,9 +274,10 @@
           </a:lstStyle>
           <a:p>
             <a:r>
-              <a:rPr lang="en-US"/>
+              <a:rPr lang="en-US" smtClean="0"/>
               <a:t>Click to edit Master subtitle style</a:t>
             </a:r>
+            <a:endParaRPr lang="en-US"/>
           </a:p>
         </p:txBody>
       </p:sp>
@@ -312,7 +298,7 @@
           <a:p>
             <a:fld id="{5BCAD085-E8A6-8845-BD4E-CB4CCA059FC4}" type="datetimeFigureOut">
               <a:rPr lang="en-US" smtClean="0"/>
-              <a:t>7/14/2026</a:t>
+              <a:t>1/27/13</a:t>
             </a:fld>
             <a:endParaRPr lang="en-US"/>
           </a:p>
@@ -354,7 +340,7 @@
           <a:p>
             <a:fld id="{C1FF6DA9-008F-8B48-92A6-B652298478BF}" type="slidenum">
               <a:rPr lang="en-US" smtClean="0"/>
-              <a:t>‹N›</a:t>
+              <a:t>‹#›</a:t>
             </a:fld>
             <a:endParaRPr lang="en-US"/>
           </a:p>
@@ -406,9 +392,10 @@
           <a:lstStyle/>
           <a:p>
             <a:r>
-              <a:rPr lang="en-US"/>
+              <a:rPr lang="en-US" smtClean="0"/>
               <a:t>Click to edit Master title style</a:t>
             </a:r>
+            <a:endParaRPr lang="en-US"/>
           </a:p>
         </p:txBody>
       </p:sp>
@@ -429,37 +416,38 @@
           <a:p>
             <a:pPr lvl="0"/>
             <a:r>
-              <a:rPr lang="en-US"/>
+              <a:rPr lang="en-US" smtClean="0"/>
               <a:t>Click to edit Master text styles</a:t>
             </a:r>
           </a:p>
           <a:p>
             <a:pPr lvl="1"/>
             <a:r>
-              <a:rPr lang="en-US"/>
+              <a:rPr lang="en-US" smtClean="0"/>
               <a:t>Second level</a:t>
             </a:r>
           </a:p>
           <a:p>
             <a:pPr lvl="2"/>
             <a:r>
-              <a:rPr lang="en-US"/>
+              <a:rPr lang="en-US" smtClean="0"/>
               <a:t>Third level</a:t>
             </a:r>
           </a:p>
           <a:p>
             <a:pPr lvl="3"/>
             <a:r>
-              <a:rPr lang="en-US"/>
+              <a:rPr lang="en-US" smtClean="0"/>
               <a:t>Fourth level</a:t>
             </a:r>
           </a:p>
           <a:p>
             <a:pPr lvl="4"/>
             <a:r>
-              <a:rPr lang="en-US"/>
+              <a:rPr lang="en-US" smtClean="0"/>
               <a:t>Fifth level</a:t>
             </a:r>
+            <a:endParaRPr lang="en-US"/>
           </a:p>
         </p:txBody>
       </p:sp>
@@ -480,7 +468,7 @@
           <a:p>
             <a:fld id="{5BCAD085-E8A6-8845-BD4E-CB4CCA059FC4}" type="datetimeFigureOut">
               <a:rPr lang="en-US" smtClean="0"/>
-              <a:t>7/14/2026</a:t>
+              <a:t>1/27/13</a:t>
             </a:fld>
             <a:endParaRPr lang="en-US"/>
           </a:p>
@@ -522,7 +510,7 @@
           <a:p>
             <a:fld id="{C1FF6DA9-008F-8B48-92A6-B652298478BF}" type="slidenum">
               <a:rPr lang="en-US" smtClean="0"/>
-              <a:t>‹N›</a:t>
+              <a:t>‹#›</a:t>
             </a:fld>
             <a:endParaRPr lang="en-US"/>
           </a:p>
@@ -579,9 +567,10 @@
           <a:lstStyle/>
           <a:p>
             <a:r>
-              <a:rPr lang="en-US"/>
+              <a:rPr lang="en-US" smtClean="0"/>
               <a:t>Click to edit Master title style</a:t>
             </a:r>
+            <a:endParaRPr lang="en-US"/>
           </a:p>
         </p:txBody>
       </p:sp>
@@ -607,37 +596,38 @@
           <a:p>
             <a:pPr lvl="0"/>
             <a:r>
-              <a:rPr lang="en-US"/>
+              <a:rPr lang="en-US" smtClean="0"/>
               <a:t>Click to edit Master text styles</a:t>
             </a:r>
           </a:p>
           <a:p>
             <a:pPr lvl="1"/>
             <a:r>
-              <a:rPr lang="en-US"/>
+              <a:rPr lang="en-US" smtClean="0"/>
               <a:t>Second level</a:t>
             </a:r>
           </a:p>
           <a:p>
             <a:pPr lvl="2"/>
             <a:r>
-              <a:rPr lang="en-US"/>
+              <a:rPr lang="en-US" smtClean="0"/>
               <a:t>Third level</a:t>
             </a:r>
           </a:p>
           <a:p>
             <a:pPr lvl="3"/>
             <a:r>
-              <a:rPr lang="en-US"/>
+              <a:rPr lang="en-US" smtClean="0"/>
               <a:t>Fourth level</a:t>
             </a:r>
           </a:p>
           <a:p>
             <a:pPr lvl="4"/>
             <a:r>
-              <a:rPr lang="en-US"/>
+              <a:rPr lang="en-US" smtClean="0"/>
               <a:t>Fifth level</a:t>
             </a:r>
+            <a:endParaRPr lang="en-US"/>
           </a:p>
         </p:txBody>
       </p:sp>
@@ -658,7 +648,7 @@
           <a:p>
             <a:fld id="{5BCAD085-E8A6-8845-BD4E-CB4CCA059FC4}" type="datetimeFigureOut">
               <a:rPr lang="en-US" smtClean="0"/>
-              <a:t>7/14/2026</a:t>
+              <a:t>1/27/13</a:t>
             </a:fld>
             <a:endParaRPr lang="en-US"/>
           </a:p>
@@ -700,7 +690,7 @@
           <a:p>
             <a:fld id="{C1FF6DA9-008F-8B48-92A6-B652298478BF}" type="slidenum">
               <a:rPr lang="en-US" smtClean="0"/>
-              <a:t>‹N›</a:t>
+              <a:t>‹#›</a:t>
             </a:fld>
             <a:endParaRPr lang="en-US"/>
           </a:p>
@@ -752,9 +742,10 @@
           <a:lstStyle/>
           <a:p>
             <a:r>
-              <a:rPr lang="en-US"/>
+              <a:rPr lang="en-US" smtClean="0"/>
               <a:t>Click to edit Master title style</a:t>
             </a:r>
+            <a:endParaRPr lang="en-US"/>
           </a:p>
         </p:txBody>
       </p:sp>
@@ -775,37 +766,38 @@
           <a:p>
             <a:pPr lvl="0"/>
             <a:r>
-              <a:rPr lang="en-US"/>
+              <a:rPr lang="en-US" smtClean="0"/>
               <a:t>Click to edit Master text styles</a:t>
             </a:r>
           </a:p>
           <a:p>
             <a:pPr lvl="1"/>
             <a:r>
-              <a:rPr lang="en-US"/>
+              <a:rPr lang="en-US" smtClean="0"/>
               <a:t>Second level</a:t>
             </a:r>
           </a:p>
           <a:p>
             <a:pPr lvl="2"/>
             <a:r>
-              <a:rPr lang="en-US"/>
+              <a:rPr lang="en-US" smtClean="0"/>
               <a:t>Third level</a:t>
             </a:r>
           </a:p>
           <a:p>
             <a:pPr lvl="3"/>
             <a:r>
-              <a:rPr lang="en-US"/>
+              <a:rPr lang="en-US" smtClean="0"/>
               <a:t>Fourth level</a:t>
             </a:r>
           </a:p>
           <a:p>
             <a:pPr lvl="4"/>
             <a:r>
-              <a:rPr lang="en-US"/>
+              <a:rPr lang="en-US" smtClean="0"/>
               <a:t>Fifth level</a:t>
             </a:r>
+            <a:endParaRPr lang="en-US"/>
           </a:p>
         </p:txBody>
       </p:sp>
@@ -826,7 +818,7 @@
           <a:p>
             <a:fld id="{5BCAD085-E8A6-8845-BD4E-CB4CCA059FC4}" type="datetimeFigureOut">
               <a:rPr lang="en-US" smtClean="0"/>
-              <a:t>7/14/2026</a:t>
+              <a:t>1/27/13</a:t>
             </a:fld>
             <a:endParaRPr lang="en-US"/>
           </a:p>
@@ -868,7 +860,7 @@
           <a:p>
             <a:fld id="{C1FF6DA9-008F-8B48-92A6-B652298478BF}" type="slidenum">
               <a:rPr lang="en-US" smtClean="0"/>
-              <a:t>‹N›</a:t>
+              <a:t>‹#›</a:t>
             </a:fld>
             <a:endParaRPr lang="en-US"/>
           </a:p>
@@ -929,9 +921,10 @@
           </a:lstStyle>
           <a:p>
             <a:r>
-              <a:rPr lang="en-US"/>
+              <a:rPr lang="en-US" smtClean="0"/>
               <a:t>Click to edit Master title style</a:t>
             </a:r>
+            <a:endParaRPr lang="en-US"/>
           </a:p>
         </p:txBody>
       </p:sp>
@@ -1048,7 +1041,7 @@
           <a:p>
             <a:pPr lvl="0"/>
             <a:r>
-              <a:rPr lang="en-US"/>
+              <a:rPr lang="en-US" smtClean="0"/>
               <a:t>Click to edit Master text styles</a:t>
             </a:r>
           </a:p>
@@ -1071,7 +1064,7 @@
           <a:p>
             <a:fld id="{5BCAD085-E8A6-8845-BD4E-CB4CCA059FC4}" type="datetimeFigureOut">
               <a:rPr lang="en-US" smtClean="0"/>
-              <a:t>7/14/2026</a:t>
+              <a:t>1/27/13</a:t>
             </a:fld>
             <a:endParaRPr lang="en-US"/>
           </a:p>
@@ -1113,7 +1106,7 @@
           <a:p>
             <a:fld id="{C1FF6DA9-008F-8B48-92A6-B652298478BF}" type="slidenum">
               <a:rPr lang="en-US" smtClean="0"/>
-              <a:t>‹N›</a:t>
+              <a:t>‹#›</a:t>
             </a:fld>
             <a:endParaRPr lang="en-US"/>
           </a:p>
@@ -1165,9 +1158,10 @@
           <a:lstStyle/>
           <a:p>
             <a:r>
-              <a:rPr lang="en-US"/>
+              <a:rPr lang="en-US" smtClean="0"/>
               <a:t>Click to edit Master title style</a:t>
             </a:r>
+            <a:endParaRPr lang="en-US"/>
           </a:p>
         </p:txBody>
       </p:sp>
@@ -1221,37 +1215,38 @@
           <a:p>
             <a:pPr lvl="0"/>
             <a:r>
-              <a:rPr lang="en-US"/>
+              <a:rPr lang="en-US" smtClean="0"/>
               <a:t>Click to edit Master text styles</a:t>
             </a:r>
           </a:p>
           <a:p>
             <a:pPr lvl="1"/>
             <a:r>
-              <a:rPr lang="en-US"/>
+              <a:rPr lang="en-US" smtClean="0"/>
               <a:t>Second level</a:t>
             </a:r>
           </a:p>
           <a:p>
             <a:pPr lvl="2"/>
             <a:r>
-              <a:rPr lang="en-US"/>
+              <a:rPr lang="en-US" smtClean="0"/>
               <a:t>Third level</a:t>
             </a:r>
           </a:p>
           <a:p>
             <a:pPr lvl="3"/>
             <a:r>
-              <a:rPr lang="en-US"/>
+              <a:rPr lang="en-US" smtClean="0"/>
               <a:t>Fourth level</a:t>
             </a:r>
           </a:p>
           <a:p>
             <a:pPr lvl="4"/>
             <a:r>
-              <a:rPr lang="en-US"/>
+              <a:rPr lang="en-US" smtClean="0"/>
               <a:t>Fifth level</a:t>
             </a:r>
+            <a:endParaRPr lang="en-US"/>
           </a:p>
         </p:txBody>
       </p:sp>
@@ -1305,37 +1300,38 @@
           <a:p>
             <a:pPr lvl="0"/>
             <a:r>
-              <a:rPr lang="en-US"/>
+              <a:rPr lang="en-US" smtClean="0"/>
               <a:t>Click to edit Master text styles</a:t>
             </a:r>
           </a:p>
           <a:p>
             <a:pPr lvl="1"/>
             <a:r>
-              <a:rPr lang="en-US"/>
+              <a:rPr lang="en-US" smtClean="0"/>
               <a:t>Second level</a:t>
             </a:r>
           </a:p>
           <a:p>
             <a:pPr lvl="2"/>
             <a:r>
-              <a:rPr lang="en-US"/>
+              <a:rPr lang="en-US" smtClean="0"/>
               <a:t>Third level</a:t>
             </a:r>
           </a:p>
           <a:p>
             <a:pPr lvl="3"/>
             <a:r>
-              <a:rPr lang="en-US"/>
+              <a:rPr lang="en-US" smtClean="0"/>
               <a:t>Fourth level</a:t>
             </a:r>
           </a:p>
           <a:p>
             <a:pPr lvl="4"/>
             <a:r>
-              <a:rPr lang="en-US"/>
+              <a:rPr lang="en-US" smtClean="0"/>
               <a:t>Fifth level</a:t>
             </a:r>
+            <a:endParaRPr lang="en-US"/>
           </a:p>
         </p:txBody>
       </p:sp>
@@ -1356,7 +1352,7 @@
           <a:p>
             <a:fld id="{5BCAD085-E8A6-8845-BD4E-CB4CCA059FC4}" type="datetimeFigureOut">
               <a:rPr lang="en-US" smtClean="0"/>
-              <a:t>7/14/2026</a:t>
+              <a:t>1/27/13</a:t>
             </a:fld>
             <a:endParaRPr lang="en-US"/>
           </a:p>
@@ -1398,7 +1394,7 @@
           <a:p>
             <a:fld id="{C1FF6DA9-008F-8B48-92A6-B652298478BF}" type="slidenum">
               <a:rPr lang="en-US" smtClean="0"/>
-              <a:t>‹N›</a:t>
+              <a:t>‹#›</a:t>
             </a:fld>
             <a:endParaRPr lang="en-US"/>
           </a:p>
@@ -1454,9 +1450,10 @@
           </a:lstStyle>
           <a:p>
             <a:r>
-              <a:rPr lang="en-US"/>
+              <a:rPr lang="en-US" smtClean="0"/>
               <a:t>Click to edit Master title style</a:t>
             </a:r>
+            <a:endParaRPr lang="en-US"/>
           </a:p>
         </p:txBody>
       </p:sp>
@@ -1519,7 +1516,7 @@
           <a:p>
             <a:pPr lvl="0"/>
             <a:r>
-              <a:rPr lang="en-US"/>
+              <a:rPr lang="en-US" smtClean="0"/>
               <a:t>Click to edit Master text styles</a:t>
             </a:r>
           </a:p>
@@ -1575,37 +1572,38 @@
           <a:p>
             <a:pPr lvl="0"/>
             <a:r>
-              <a:rPr lang="en-US"/>
+              <a:rPr lang="en-US" smtClean="0"/>
               <a:t>Click to edit Master text styles</a:t>
             </a:r>
           </a:p>
           <a:p>
             <a:pPr lvl="1"/>
             <a:r>
-              <a:rPr lang="en-US"/>
+              <a:rPr lang="en-US" smtClean="0"/>
               <a:t>Second level</a:t>
             </a:r>
           </a:p>
           <a:p>
             <a:pPr lvl="2"/>
             <a:r>
-              <a:rPr lang="en-US"/>
+              <a:rPr lang="en-US" smtClean="0"/>
               <a:t>Third level</a:t>
             </a:r>
           </a:p>
           <a:p>
             <a:pPr lvl="3"/>
             <a:r>
-              <a:rPr lang="en-US"/>
+              <a:rPr lang="en-US" smtClean="0"/>
               <a:t>Fourth level</a:t>
             </a:r>
           </a:p>
           <a:p>
             <a:pPr lvl="4"/>
             <a:r>
-              <a:rPr lang="en-US"/>
+              <a:rPr lang="en-US" smtClean="0"/>
               <a:t>Fifth level</a:t>
             </a:r>
+            <a:endParaRPr lang="en-US"/>
           </a:p>
         </p:txBody>
       </p:sp>
@@ -1668,7 +1666,7 @@
           <a:p>
             <a:pPr lvl="0"/>
             <a:r>
-              <a:rPr lang="en-US"/>
+              <a:rPr lang="en-US" smtClean="0"/>
               <a:t>Click to edit Master text styles</a:t>
             </a:r>
           </a:p>
@@ -1724,37 +1722,38 @@
           <a:p>
             <a:pPr lvl="0"/>
             <a:r>
-              <a:rPr lang="en-US"/>
+              <a:rPr lang="en-US" smtClean="0"/>
               <a:t>Click to edit Master text styles</a:t>
             </a:r>
           </a:p>
           <a:p>
             <a:pPr lvl="1"/>
             <a:r>
-              <a:rPr lang="en-US"/>
+              <a:rPr lang="en-US" smtClean="0"/>
               <a:t>Second level</a:t>
             </a:r>
           </a:p>
           <a:p>
             <a:pPr lvl="2"/>
             <a:r>
-              <a:rPr lang="en-US"/>
+              <a:rPr lang="en-US" smtClean="0"/>
               <a:t>Third level</a:t>
             </a:r>
           </a:p>
           <a:p>
             <a:pPr lvl="3"/>
             <a:r>
-              <a:rPr lang="en-US"/>
+              <a:rPr lang="en-US" smtClean="0"/>
               <a:t>Fourth level</a:t>
             </a:r>
           </a:p>
           <a:p>
             <a:pPr lvl="4"/>
             <a:r>
-              <a:rPr lang="en-US"/>
+              <a:rPr lang="en-US" smtClean="0"/>
               <a:t>Fifth level</a:t>
             </a:r>
+            <a:endParaRPr lang="en-US"/>
           </a:p>
         </p:txBody>
       </p:sp>
@@ -1775,7 +1774,7 @@
           <a:p>
             <a:fld id="{5BCAD085-E8A6-8845-BD4E-CB4CCA059FC4}" type="datetimeFigureOut">
               <a:rPr lang="en-US" smtClean="0"/>
-              <a:t>7/14/2026</a:t>
+              <a:t>1/27/13</a:t>
             </a:fld>
             <a:endParaRPr lang="en-US"/>
           </a:p>
@@ -1817,7 +1816,7 @@
           <a:p>
             <a:fld id="{C1FF6DA9-008F-8B48-92A6-B652298478BF}" type="slidenum">
               <a:rPr lang="en-US" smtClean="0"/>
-              <a:t>‹N›</a:t>
+              <a:t>‹#›</a:t>
             </a:fld>
             <a:endParaRPr lang="en-US"/>
           </a:p>
@@ -1869,9 +1868,10 @@
           <a:lstStyle/>
           <a:p>
             <a:r>
-              <a:rPr lang="en-US"/>
+              <a:rPr lang="en-US" smtClean="0"/>
               <a:t>Click to edit Master title style</a:t>
             </a:r>
+            <a:endParaRPr lang="en-US"/>
           </a:p>
         </p:txBody>
       </p:sp>
@@ -1892,7 +1892,7 @@
           <a:p>
             <a:fld id="{5BCAD085-E8A6-8845-BD4E-CB4CCA059FC4}" type="datetimeFigureOut">
               <a:rPr lang="en-US" smtClean="0"/>
-              <a:t>7/14/2026</a:t>
+              <a:t>1/27/13</a:t>
             </a:fld>
             <a:endParaRPr lang="en-US"/>
           </a:p>
@@ -1934,7 +1934,7 @@
           <a:p>
             <a:fld id="{C1FF6DA9-008F-8B48-92A6-B652298478BF}" type="slidenum">
               <a:rPr lang="en-US" smtClean="0"/>
-              <a:t>‹N›</a:t>
+              <a:t>‹#›</a:t>
             </a:fld>
             <a:endParaRPr lang="en-US"/>
           </a:p>
@@ -1987,7 +1987,7 @@
           <a:p>
             <a:fld id="{5BCAD085-E8A6-8845-BD4E-CB4CCA059FC4}" type="datetimeFigureOut">
               <a:rPr lang="en-US" smtClean="0"/>
-              <a:t>7/14/2026</a:t>
+              <a:t>1/27/13</a:t>
             </a:fld>
             <a:endParaRPr lang="en-US"/>
           </a:p>
@@ -2029,7 +2029,7 @@
           <a:p>
             <a:fld id="{C1FF6DA9-008F-8B48-92A6-B652298478BF}" type="slidenum">
               <a:rPr lang="en-US" smtClean="0"/>
-              <a:t>‹N›</a:t>
+              <a:t>‹#›</a:t>
             </a:fld>
             <a:endParaRPr lang="en-US"/>
           </a:p>
@@ -2090,9 +2090,10 @@
           </a:lstStyle>
           <a:p>
             <a:r>
-              <a:rPr lang="en-US"/>
+              <a:rPr lang="en-US" smtClean="0"/>
               <a:t>Click to edit Master title style</a:t>
             </a:r>
+            <a:endParaRPr lang="en-US"/>
           </a:p>
         </p:txBody>
       </p:sp>
@@ -2146,37 +2147,38 @@
           <a:p>
             <a:pPr lvl="0"/>
             <a:r>
-              <a:rPr lang="en-US"/>
+              <a:rPr lang="en-US" smtClean="0"/>
               <a:t>Click to edit Master text styles</a:t>
             </a:r>
           </a:p>
           <a:p>
             <a:pPr lvl="1"/>
             <a:r>
-              <a:rPr lang="en-US"/>
+              <a:rPr lang="en-US" smtClean="0"/>
               <a:t>Second level</a:t>
             </a:r>
           </a:p>
           <a:p>
             <a:pPr lvl="2"/>
             <a:r>
-              <a:rPr lang="en-US"/>
+              <a:rPr lang="en-US" smtClean="0"/>
               <a:t>Third level</a:t>
             </a:r>
           </a:p>
           <a:p>
             <a:pPr lvl="3"/>
             <a:r>
-              <a:rPr lang="en-US"/>
+              <a:rPr lang="en-US" smtClean="0"/>
               <a:t>Fourth level</a:t>
             </a:r>
           </a:p>
           <a:p>
             <a:pPr lvl="4"/>
             <a:r>
-              <a:rPr lang="en-US"/>
+              <a:rPr lang="en-US" smtClean="0"/>
               <a:t>Fifth level</a:t>
             </a:r>
+            <a:endParaRPr lang="en-US"/>
           </a:p>
         </p:txBody>
       </p:sp>
@@ -2239,7 +2241,7 @@
           <a:p>
             <a:pPr lvl="0"/>
             <a:r>
-              <a:rPr lang="en-US"/>
+              <a:rPr lang="en-US" smtClean="0"/>
               <a:t>Click to edit Master text styles</a:t>
             </a:r>
           </a:p>
@@ -2262,7 +2264,7 @@
           <a:p>
             <a:fld id="{5BCAD085-E8A6-8845-BD4E-CB4CCA059FC4}" type="datetimeFigureOut">
               <a:rPr lang="en-US" smtClean="0"/>
-              <a:t>7/14/2026</a:t>
+              <a:t>1/27/13</a:t>
             </a:fld>
             <a:endParaRPr lang="en-US"/>
           </a:p>
@@ -2304,7 +2306,7 @@
           <a:p>
             <a:fld id="{C1FF6DA9-008F-8B48-92A6-B652298478BF}" type="slidenum">
               <a:rPr lang="en-US" smtClean="0"/>
-              <a:t>‹N›</a:t>
+              <a:t>‹#›</a:t>
             </a:fld>
             <a:endParaRPr lang="en-US"/>
           </a:p>
@@ -2365,9 +2367,10 @@
           </a:lstStyle>
           <a:p>
             <a:r>
-              <a:rPr lang="en-US"/>
+              <a:rPr lang="en-US" smtClean="0"/>
               <a:t>Click to edit Master title style</a:t>
             </a:r>
+            <a:endParaRPr lang="en-US"/>
           </a:p>
         </p:txBody>
       </p:sp>
@@ -2491,7 +2494,7 @@
           <a:p>
             <a:pPr lvl="0"/>
             <a:r>
-              <a:rPr lang="en-US"/>
+              <a:rPr lang="en-US" smtClean="0"/>
               <a:t>Click to edit Master text styles</a:t>
             </a:r>
           </a:p>
@@ -2514,7 +2517,7 @@
           <a:p>
             <a:fld id="{5BCAD085-E8A6-8845-BD4E-CB4CCA059FC4}" type="datetimeFigureOut">
               <a:rPr lang="en-US" smtClean="0"/>
-              <a:t>7/14/2026</a:t>
+              <a:t>1/27/13</a:t>
             </a:fld>
             <a:endParaRPr lang="en-US"/>
           </a:p>
@@ -2556,7 +2559,7 @@
           <a:p>
             <a:fld id="{C1FF6DA9-008F-8B48-92A6-B652298478BF}" type="slidenum">
               <a:rPr lang="en-US" smtClean="0"/>
-              <a:t>‹N›</a:t>
+              <a:t>‹#›</a:t>
             </a:fld>
             <a:endParaRPr lang="en-US"/>
           </a:p>
@@ -2623,9 +2626,10 @@
           <a:lstStyle/>
           <a:p>
             <a:r>
-              <a:rPr lang="en-US"/>
+              <a:rPr lang="en-US" smtClean="0"/>
               <a:t>Click to edit Master title style</a:t>
             </a:r>
+            <a:endParaRPr lang="en-US"/>
           </a:p>
         </p:txBody>
       </p:sp>
@@ -2656,37 +2660,38 @@
           <a:p>
             <a:pPr lvl="0"/>
             <a:r>
-              <a:rPr lang="en-US"/>
+              <a:rPr lang="en-US" smtClean="0"/>
               <a:t>Click to edit Master text styles</a:t>
             </a:r>
           </a:p>
           <a:p>
             <a:pPr lvl="1"/>
             <a:r>
-              <a:rPr lang="en-US"/>
+              <a:rPr lang="en-US" smtClean="0"/>
               <a:t>Second level</a:t>
             </a:r>
           </a:p>
           <a:p>
             <a:pPr lvl="2"/>
             <a:r>
-              <a:rPr lang="en-US"/>
+              <a:rPr lang="en-US" smtClean="0"/>
               <a:t>Third level</a:t>
             </a:r>
           </a:p>
           <a:p>
             <a:pPr lvl="3"/>
             <a:r>
-              <a:rPr lang="en-US"/>
+              <a:rPr lang="en-US" smtClean="0"/>
               <a:t>Fourth level</a:t>
             </a:r>
           </a:p>
           <a:p>
             <a:pPr lvl="4"/>
             <a:r>
-              <a:rPr lang="en-US"/>
+              <a:rPr lang="en-US" smtClean="0"/>
               <a:t>Fifth level</a:t>
             </a:r>
+            <a:endParaRPr lang="en-US"/>
           </a:p>
         </p:txBody>
       </p:sp>
@@ -2725,7 +2730,7 @@
           <a:p>
             <a:fld id="{5BCAD085-E8A6-8845-BD4E-CB4CCA059FC4}" type="datetimeFigureOut">
               <a:rPr lang="en-US" smtClean="0"/>
-              <a:t>7/14/2026</a:t>
+              <a:t>1/27/13</a:t>
             </a:fld>
             <a:endParaRPr lang="en-US"/>
           </a:p>
@@ -2803,7 +2808,7 @@
           <a:p>
             <a:fld id="{C1FF6DA9-008F-8B48-92A6-B652298478BF}" type="slidenum">
               <a:rPr lang="en-US" smtClean="0"/>
-              <a:t>‹N›</a:t>
+              <a:t>‹#›</a:t>
             </a:fld>
             <a:endParaRPr lang="en-US"/>
           </a:p>
@@ -3084,7 +3089,7 @@
 </file>
 
 <file path=ppt/slides/slide1.xml><?xml version="1.0" encoding="utf-8"?>
-<p:sld xmlns:a="http://schemas.openxmlformats.org/drawingml/2006/main" xmlns:r="http://schemas.openxmlformats.org/officeDocument/2006/relationships" xmlns:p="http://schemas.openxmlformats.org/presentationml/2006/main">
+<p:sld xmlns:a="http://schemas.openxmlformats.org/drawingml/2006/main" xmlns:p="http://schemas.openxmlformats.org/presentationml/2006/main" xmlns:r="http://schemas.openxmlformats.org/officeDocument/2006/relationships">
   <p:cSld>
     <p:spTree>
       <p:nvGrpSpPr>
@@ -3092,14 +3097,7 @@
         <p:cNvGrpSpPr/>
         <p:nvPr/>
       </p:nvGrpSpPr>
-      <p:grpSpPr>
-        <a:xfrm>
-          <a:off x="0" y="0"/>
-          <a:ext cx="0" cy="0"/>
-          <a:chOff x="0" y="0"/>
-          <a:chExt cx="0" cy="0"/>
-        </a:xfrm>
-      </p:grpSpPr>
+      <p:grpSpPr/>
       <p:sp>
         <p:nvSpPr>
           <p:cNvPr id="2" name="Rectangle 1"/>
@@ -3141,7 +3139,6 @@
           <a:lstStyle/>
           <a:p>
             <a:pPr algn="ctr"/>
-            <a:endParaRPr/>
           </a:p>
         </p:txBody>
       </p:sp>
@@ -3186,7 +3183,6 @@
           <a:lstStyle/>
           <a:p>
             <a:pPr algn="ctr"/>
-            <a:endParaRPr/>
           </a:p>
         </p:txBody>
       </p:sp>
@@ -3231,7 +3227,6 @@
           <a:lstStyle/>
           <a:p>
             <a:pPr algn="ctr"/>
-            <a:endParaRPr/>
           </a:p>
         </p:txBody>
       </p:sp>
@@ -3276,7 +3271,6 @@
           <a:lstStyle/>
           <a:p>
             <a:pPr algn="ctr"/>
-            <a:endParaRPr/>
           </a:p>
         </p:txBody>
       </p:sp>
@@ -3321,7 +3315,6 @@
           <a:lstStyle/>
           <a:p>
             <a:pPr algn="ctr"/>
-            <a:endParaRPr/>
           </a:p>
         </p:txBody>
       </p:sp>
@@ -3342,7 +3335,7 @@
           <a:noFill/>
         </p:spPr>
         <p:txBody>
-          <a:bodyPr wrap="square" lIns="0" tIns="0" rIns="0" bIns="0" anchor="ctr">
+          <a:bodyPr wrap="square" anchor="ctr" lIns="0" rIns="0" tIns="0" bIns="0">
             <a:spAutoFit/>
           </a:bodyPr>
           <a:lstStyle/>
@@ -3377,7 +3370,7 @@
           <a:noFill/>
         </p:spPr>
         <p:txBody>
-          <a:bodyPr wrap="square" lIns="0" tIns="0" rIns="0" bIns="0" anchor="t">
+          <a:bodyPr wrap="square" anchor="t" lIns="0" rIns="0" tIns="0" bIns="0">
             <a:spAutoFit/>
           </a:bodyPr>
           <a:lstStyle/>
@@ -3412,7 +3405,7 @@
           <a:noFill/>
         </p:spPr>
         <p:txBody>
-          <a:bodyPr wrap="square" lIns="0" tIns="0" rIns="0" bIns="0" anchor="t">
+          <a:bodyPr wrap="square" anchor="t" lIns="0" rIns="0" tIns="0" bIns="0">
             <a:spAutoFit/>
           </a:bodyPr>
           <a:lstStyle/>
@@ -3447,7 +3440,7 @@
           <a:noFill/>
         </p:spPr>
         <p:txBody>
-          <a:bodyPr wrap="square" lIns="0" tIns="0" rIns="0" bIns="0" anchor="t">
+          <a:bodyPr wrap="square" anchor="t" lIns="0" rIns="0" tIns="0" bIns="0">
             <a:spAutoFit/>
           </a:bodyPr>
           <a:lstStyle/>
@@ -3482,7 +3475,7 @@
           <a:noFill/>
         </p:spPr>
         <p:txBody>
-          <a:bodyPr wrap="square" lIns="0" tIns="0" rIns="0" bIns="0" anchor="t">
+          <a:bodyPr wrap="square" anchor="t" lIns="0" rIns="0" tIns="0" bIns="0">
             <a:spAutoFit/>
           </a:bodyPr>
           <a:lstStyle/>
@@ -3518,7 +3511,7 @@
 </file>
 
 <file path=ppt/slides/slide10.xml><?xml version="1.0" encoding="utf-8"?>
-<p:sld xmlns:a="http://schemas.openxmlformats.org/drawingml/2006/main" xmlns:r="http://schemas.openxmlformats.org/officeDocument/2006/relationships" xmlns:p="http://schemas.openxmlformats.org/presentationml/2006/main">
+<p:sld xmlns:a="http://schemas.openxmlformats.org/drawingml/2006/main" xmlns:p="http://schemas.openxmlformats.org/presentationml/2006/main" xmlns:r="http://schemas.openxmlformats.org/officeDocument/2006/relationships">
   <p:cSld>
     <p:spTree>
       <p:nvGrpSpPr>
@@ -3526,14 +3519,7 @@
         <p:cNvGrpSpPr/>
         <p:nvPr/>
       </p:nvGrpSpPr>
-      <p:grpSpPr>
-        <a:xfrm>
-          <a:off x="0" y="0"/>
-          <a:ext cx="0" cy="0"/>
-          <a:chOff x="0" y="0"/>
-          <a:chExt cx="0" cy="0"/>
-        </a:xfrm>
-      </p:grpSpPr>
+      <p:grpSpPr/>
       <p:sp>
         <p:nvSpPr>
           <p:cNvPr id="2" name="Rectangle 1"/>
@@ -3575,7 +3561,6 @@
           <a:lstStyle/>
           <a:p>
             <a:pPr algn="ctr"/>
-            <a:endParaRPr/>
           </a:p>
         </p:txBody>
       </p:sp>
@@ -3596,7 +3581,7 @@
           <a:noFill/>
         </p:spPr>
         <p:txBody>
-          <a:bodyPr wrap="square" lIns="0" tIns="0" rIns="0" bIns="0" anchor="t">
+          <a:bodyPr wrap="square" anchor="t" lIns="0" rIns="0" tIns="0" bIns="0">
             <a:spAutoFit/>
           </a:bodyPr>
           <a:lstStyle/>
@@ -3631,7 +3616,7 @@
           <a:noFill/>
         </p:spPr>
         <p:txBody>
-          <a:bodyPr wrap="square" lIns="0" tIns="0" rIns="0" bIns="0" anchor="t">
+          <a:bodyPr wrap="square" anchor="t" lIns="0" rIns="0" tIns="0" bIns="0">
             <a:spAutoFit/>
           </a:bodyPr>
           <a:lstStyle/>
@@ -3666,7 +3651,7 @@
           <a:noFill/>
         </p:spPr>
         <p:txBody>
-          <a:bodyPr wrap="square" lIns="0" tIns="0" rIns="0" bIns="0" anchor="t">
+          <a:bodyPr wrap="square" anchor="t" lIns="0" rIns="0" tIns="0" bIns="0">
             <a:spAutoFit/>
           </a:bodyPr>
           <a:lstStyle/>
@@ -3725,7 +3710,6 @@
           <a:lstStyle/>
           <a:p>
             <a:pPr algn="ctr"/>
-            <a:endParaRPr/>
           </a:p>
         </p:txBody>
       </p:sp>
@@ -3770,7 +3754,6 @@
           <a:lstStyle/>
           <a:p>
             <a:pPr algn="ctr"/>
-            <a:endParaRPr/>
           </a:p>
         </p:txBody>
       </p:sp>
@@ -3791,7 +3774,7 @@
           <a:noFill/>
         </p:spPr>
         <p:txBody>
-          <a:bodyPr wrap="square" lIns="0" tIns="0" rIns="0" bIns="0" anchor="ctr">
+          <a:bodyPr wrap="square" anchor="ctr" lIns="0" rIns="0" tIns="0" bIns="0">
             <a:spAutoFit/>
           </a:bodyPr>
           <a:lstStyle/>
@@ -3862,7 +3845,6 @@
           <a:lstStyle/>
           <a:p>
             <a:pPr algn="ctr"/>
-            <a:endParaRPr/>
           </a:p>
         </p:txBody>
       </p:sp>
@@ -3907,7 +3889,6 @@
           <a:lstStyle/>
           <a:p>
             <a:pPr algn="ctr"/>
-            <a:endParaRPr/>
           </a:p>
         </p:txBody>
       </p:sp>
@@ -3919,8 +3900,8 @@
         </p:nvSpPr>
         <p:spPr>
           <a:xfrm>
-            <a:off x="6272784" y="2523239"/>
-            <a:ext cx="5202936" cy="577081"/>
+            <a:off x="6272784" y="1929384"/>
+            <a:ext cx="5202936" cy="1764791"/>
           </a:xfrm>
           <a:prstGeom prst="rect">
             <a:avLst/>
@@ -3928,225 +3909,33 @@
           <a:noFill/>
         </p:spPr>
         <p:txBody>
-          <a:bodyPr wrap="square" lIns="0" tIns="0" rIns="0" bIns="0" anchor="ctr">
+          <a:bodyPr wrap="square" anchor="ctr" lIns="0" rIns="0" tIns="0" bIns="0">
             <a:spAutoFit/>
           </a:bodyPr>
           <a:lstStyle/>
           <a:p>
             <a:pPr algn="l"/>
             <a:r>
-              <a:rPr sz="1350" b="1" dirty="0">
+              <a:rPr sz="1350" b="1">
                 <a:solidFill>
                   <a:srgbClr val="3FB950"/>
                 </a:solidFill>
                 <a:latin typeface="Segoe UI"/>
               </a:rPr>
-              <a:t>Se </a:t>
-            </a:r>
-            <a:r>
-              <a:rPr sz="1350" b="1" dirty="0" err="1">
-                <a:solidFill>
-                  <a:srgbClr val="3FB950"/>
+              <a:t>Se accettato</a:t>
+            </a:r>
+          </a:p>
+          <a:p>
+            <a:pPr algn="l"/>
+            <a:r>
+              <a:rPr sz="1200" b="0">
+                <a:solidFill>
+                  <a:srgbClr val="E6EDF3"/>
                 </a:solidFill>
                 <a:latin typeface="Segoe UI"/>
               </a:rPr>
-              <a:t>accettato</a:t>
-            </a:r>
-            <a:endParaRPr sz="1350" b="1" dirty="0">
-              <a:solidFill>
-                <a:srgbClr val="3FB950"/>
-              </a:solidFill>
-              <a:latin typeface="Segoe UI"/>
-            </a:endParaRPr>
-          </a:p>
-          <a:p>
-            <a:pPr algn="l"/>
-            <a:r>
-              <a:rPr sz="1200" b="0" dirty="0" err="1">
-                <a:solidFill>
-                  <a:srgbClr val="E6EDF3"/>
-                </a:solidFill>
-                <a:latin typeface="Segoe UI"/>
-              </a:rPr>
-              <a:t>Portare</a:t>
-            </a:r>
-            <a:r>
-              <a:rPr sz="1200" b="0" dirty="0">
-                <a:solidFill>
-                  <a:srgbClr val="E6EDF3"/>
-                </a:solidFill>
-                <a:latin typeface="Segoe UI"/>
-              </a:rPr>
-              <a:t> le 3 _</a:t>
-            </a:r>
-            <a:r>
-              <a:rPr sz="1200" b="0" dirty="0" err="1">
-                <a:solidFill>
-                  <a:srgbClr val="E6EDF3"/>
-                </a:solidFill>
-                <a:latin typeface="Segoe UI"/>
-              </a:rPr>
-              <a:t>gen_feature</a:t>
-            </a:r>
-            <a:r>
-              <a:rPr sz="1200" b="0" dirty="0">
-                <a:solidFill>
-                  <a:srgbClr val="E6EDF3"/>
-                </a:solidFill>
-                <a:latin typeface="Segoe UI"/>
-              </a:rPr>
-              <a:t>_* (scalar · </a:t>
-            </a:r>
-            <a:r>
-              <a:rPr sz="1200" b="0" dirty="0" err="1">
-                <a:solidFill>
-                  <a:srgbClr val="E6EDF3"/>
-                </a:solidFill>
-                <a:latin typeface="Segoe UI"/>
-              </a:rPr>
-              <a:t>dense_vector</a:t>
-            </a:r>
-            <a:r>
-              <a:rPr sz="1200" b="0" dirty="0">
-                <a:solidFill>
-                  <a:srgbClr val="E6EDF3"/>
-                </a:solidFill>
-                <a:latin typeface="Segoe UI"/>
-              </a:rPr>
-              <a:t> · </a:t>
-            </a:r>
-            <a:r>
-              <a:rPr sz="1200" b="0" dirty="0" err="1">
-                <a:solidFill>
-                  <a:srgbClr val="E6EDF3"/>
-                </a:solidFill>
-                <a:latin typeface="Segoe UI"/>
-              </a:rPr>
-              <a:t>onehot</a:t>
-            </a:r>
-            <a:r>
-              <a:rPr sz="1200" b="0" dirty="0">
-                <a:solidFill>
-                  <a:srgbClr val="E6EDF3"/>
-                </a:solidFill>
-                <a:latin typeface="Segoe UI"/>
-              </a:rPr>
-              <a:t>) in </a:t>
-            </a:r>
-            <a:r>
-              <a:rPr sz="1200" b="0" dirty="0" err="1">
-                <a:solidFill>
-                  <a:srgbClr val="E6EDF3"/>
-                </a:solidFill>
-                <a:latin typeface="Segoe UI"/>
-              </a:rPr>
-              <a:t>dialetto</a:t>
-            </a:r>
-            <a:r>
-              <a:rPr sz="1200" b="0" dirty="0">
-                <a:solidFill>
-                  <a:srgbClr val="E6EDF3"/>
-                </a:solidFill>
-                <a:latin typeface="Segoe UI"/>
-              </a:rPr>
-              <a:t> </a:t>
-            </a:r>
-            <a:r>
-              <a:rPr sz="1200" b="0" dirty="0" err="1">
-                <a:solidFill>
-                  <a:srgbClr val="E6EDF3"/>
-                </a:solidFill>
-                <a:latin typeface="Segoe UI"/>
-              </a:rPr>
-              <a:t>libbpf</a:t>
-            </a:r>
-            <a:r>
-              <a:rPr sz="1200" b="0" dirty="0">
-                <a:solidFill>
-                  <a:srgbClr val="E6EDF3"/>
-                </a:solidFill>
-                <a:latin typeface="Segoe UI"/>
-              </a:rPr>
-              <a:t> → </a:t>
-            </a:r>
-            <a:r>
-              <a:rPr sz="1200" b="0" dirty="0" err="1">
-                <a:solidFill>
-                  <a:srgbClr val="E6EDF3"/>
-                </a:solidFill>
-                <a:latin typeface="Segoe UI"/>
-              </a:rPr>
-              <a:t>l'AOT</a:t>
-            </a:r>
-            <a:r>
-              <a:rPr sz="1200" b="0" dirty="0">
-                <a:solidFill>
-                  <a:srgbClr val="E6EDF3"/>
-                </a:solidFill>
-                <a:latin typeface="Segoe UI"/>
-              </a:rPr>
-              <a:t> </a:t>
-            </a:r>
-            <a:r>
-              <a:rPr sz="1200" b="0" dirty="0" err="1">
-                <a:solidFill>
-                  <a:srgbClr val="E6EDF3"/>
-                </a:solidFill>
-                <a:latin typeface="Segoe UI"/>
-              </a:rPr>
-              <a:t>copre</a:t>
-            </a:r>
-            <a:r>
-              <a:rPr sz="1200" b="0" dirty="0">
-                <a:solidFill>
-                  <a:srgbClr val="E6EDF3"/>
-                </a:solidFill>
-                <a:latin typeface="Segoe UI"/>
-              </a:rPr>
-              <a:t> </a:t>
-            </a:r>
-            <a:r>
-              <a:rPr sz="1200" b="0" dirty="0" err="1">
-                <a:solidFill>
-                  <a:srgbClr val="E6EDF3"/>
-                </a:solidFill>
-                <a:latin typeface="Segoe UI"/>
-              </a:rPr>
-              <a:t>ogni</a:t>
-            </a:r>
-            <a:r>
-              <a:rPr sz="1200" b="0" dirty="0">
-                <a:solidFill>
-                  <a:srgbClr val="E6EDF3"/>
-                </a:solidFill>
-                <a:latin typeface="Segoe UI"/>
-              </a:rPr>
-              <a:t> </a:t>
-            </a:r>
-            <a:r>
-              <a:rPr sz="1200" b="0" dirty="0" err="1">
-                <a:solidFill>
-                  <a:srgbClr val="E6EDF3"/>
-                </a:solidFill>
-                <a:latin typeface="Segoe UI"/>
-              </a:rPr>
-              <a:t>modello</a:t>
-            </a:r>
-            <a:r>
-              <a:rPr sz="1200" b="0" dirty="0">
-                <a:solidFill>
-                  <a:srgbClr val="E6EDF3"/>
-                </a:solidFill>
-                <a:latin typeface="Segoe UI"/>
-              </a:rPr>
-              <a:t> sparse. </a:t>
-            </a:r>
-            <a:endParaRPr lang="it-IT" sz="1200" b="0" dirty="0">
-              <a:solidFill>
-                <a:srgbClr val="E6EDF3"/>
-              </a:solidFill>
-              <a:latin typeface="Segoe UI"/>
-            </a:endParaRPr>
+              <a:t>Portare le 3 _gen_feature_* (scalar · dense_vector · onehot) in dialetto libbpf → l'AOT copre ogni modello sparse. ≈ mezza giornata + test.</a:t>
+            </a:r>
           </a:p>
         </p:txBody>
       </p:sp>
@@ -4191,7 +3980,6 @@
           <a:lstStyle/>
           <a:p>
             <a:pPr algn="ctr"/>
-            <a:endParaRPr/>
           </a:p>
         </p:txBody>
       </p:sp>
@@ -4212,7 +4000,7 @@
           <a:noFill/>
         </p:spPr>
         <p:txBody>
-          <a:bodyPr wrap="square" lIns="0" tIns="0" rIns="0" bIns="0" anchor="t">
+          <a:bodyPr wrap="square" anchor="t" lIns="0" rIns="0" tIns="0" bIns="0">
             <a:spAutoFit/>
           </a:bodyPr>
           <a:lstStyle/>
@@ -4262,6 +4050,54 @@
                 <a:latin typeface="Consolas"/>
               </a:rPr>
               <a:t>libbpf  :  struct{...} SEC(.maps) bpf_map_lookup_elem(&amp;m,&amp;k)  SEC("xdp")</a:t>
+            </a:r>
+          </a:p>
+        </p:txBody>
+      </p:sp>
+      <p:sp>
+        <p:nvSpPr>
+          <p:cNvPr id="14" name="TextBox 13"/>
+          <p:cNvSpPr txBox="1"/>
+          <p:nvPr/>
+        </p:nvSpPr>
+        <p:spPr>
+          <a:xfrm>
+            <a:off x="640080" y="5303520"/>
+            <a:ext cx="10972800" cy="914400"/>
+          </a:xfrm>
+          <a:prstGeom prst="rect">
+            <a:avLst/>
+          </a:prstGeom>
+          <a:noFill/>
+        </p:spPr>
+        <p:txBody>
+          <a:bodyPr wrap="square" anchor="t" lIns="0" rIns="0" tIns="0" bIns="0">
+            <a:spAutoFit/>
+          </a:bodyPr>
+          <a:lstStyle/>
+          <a:p>
+            <a:pPr algn="l">
+              <a:spcAft>
+                <a:spcPts val="600"/>
+              </a:spcAft>
+            </a:pPr>
+            <a:r>
+              <a:rPr sz="1300" b="1">
+                <a:solidFill>
+                  <a:srgbClr val="F5A623"/>
+                </a:solidFill>
+                <a:latin typeface="Segoe UI"/>
+              </a:rPr>
+              <a:t>Alternativa senza clang e senza perdita:</a:t>
+            </a:r>
+            <a:r>
+              <a:rPr sz="1300" b="0">
+                <a:solidFill>
+                  <a:srgbClr val="E6EDF3"/>
+                </a:solidFill>
+                <a:latin typeface="Segoe UI"/>
+              </a:rPr>
+              <a:t>  patch immediati direttamente nel bytecode del .o (perf identica ai literal, zero clang) — più lavoro di ingegneria del loader.</a:t>
             </a:r>
           </a:p>
         </p:txBody>
@@ -4275,7 +4111,7 @@
 </file>
 
 <file path=ppt/slides/slide11.xml><?xml version="1.0" encoding="utf-8"?>
-<p:sld xmlns:a="http://schemas.openxmlformats.org/drawingml/2006/main" xmlns:r="http://schemas.openxmlformats.org/officeDocument/2006/relationships" xmlns:p="http://schemas.openxmlformats.org/presentationml/2006/main">
+<p:sld xmlns:a="http://schemas.openxmlformats.org/drawingml/2006/main" xmlns:p="http://schemas.openxmlformats.org/presentationml/2006/main" xmlns:r="http://schemas.openxmlformats.org/officeDocument/2006/relationships">
   <p:cSld>
     <p:spTree>
       <p:nvGrpSpPr>
@@ -4283,14 +4119,7 @@
         <p:cNvGrpSpPr/>
         <p:nvPr/>
       </p:nvGrpSpPr>
-      <p:grpSpPr>
-        <a:xfrm>
-          <a:off x="0" y="0"/>
-          <a:ext cx="0" cy="0"/>
-          <a:chOff x="0" y="0"/>
-          <a:chExt cx="0" cy="0"/>
-        </a:xfrm>
-      </p:grpSpPr>
+      <p:grpSpPr/>
       <p:sp>
         <p:nvSpPr>
           <p:cNvPr id="2" name="Rectangle 1"/>
@@ -4332,7 +4161,6 @@
           <a:lstStyle/>
           <a:p>
             <a:pPr algn="ctr"/>
-            <a:endParaRPr/>
           </a:p>
         </p:txBody>
       </p:sp>
@@ -4353,7 +4181,7 @@
           <a:noFill/>
         </p:spPr>
         <p:txBody>
-          <a:bodyPr wrap="square" lIns="0" tIns="0" rIns="0" bIns="0" anchor="t">
+          <a:bodyPr wrap="square" anchor="t" lIns="0" rIns="0" tIns="0" bIns="0">
             <a:spAutoFit/>
           </a:bodyPr>
           <a:lstStyle/>
@@ -4388,7 +4216,7 @@
           <a:noFill/>
         </p:spPr>
         <p:txBody>
-          <a:bodyPr wrap="square" lIns="0" tIns="0" rIns="0" bIns="0" anchor="t">
+          <a:bodyPr wrap="square" anchor="t" lIns="0" rIns="0" tIns="0" bIns="0">
             <a:spAutoFit/>
           </a:bodyPr>
           <a:lstStyle/>
@@ -4423,7 +4251,7 @@
           <a:noFill/>
         </p:spPr>
         <p:txBody>
-          <a:bodyPr wrap="square" lIns="0" tIns="0" rIns="0" bIns="0" anchor="t">
+          <a:bodyPr wrap="square" anchor="t" lIns="0" rIns="0" tIns="0" bIns="0">
             <a:spAutoFit/>
           </a:bodyPr>
           <a:lstStyle/>
@@ -4482,7 +4310,6 @@
           <a:lstStyle/>
           <a:p>
             <a:pPr algn="ctr"/>
-            <a:endParaRPr/>
           </a:p>
         </p:txBody>
       </p:sp>
@@ -4527,7 +4354,6 @@
           <a:lstStyle/>
           <a:p>
             <a:pPr algn="ctr"/>
-            <a:endParaRPr/>
           </a:p>
         </p:txBody>
       </p:sp>
@@ -4548,7 +4374,7 @@
           <a:noFill/>
         </p:spPr>
         <p:txBody>
-          <a:bodyPr wrap="square" lIns="0" tIns="0" rIns="0" bIns="0" anchor="ctr">
+          <a:bodyPr wrap="square" anchor="ctr" lIns="0" rIns="0" tIns="0" bIns="0">
             <a:spAutoFit/>
           </a:bodyPr>
           <a:lstStyle/>
@@ -4616,7 +4442,6 @@
           <a:lstStyle/>
           <a:p>
             <a:pPr algn="ctr"/>
-            <a:endParaRPr/>
           </a:p>
         </p:txBody>
       </p:sp>
@@ -4661,7 +4486,6 @@
           <a:lstStyle/>
           <a:p>
             <a:pPr algn="ctr"/>
-            <a:endParaRPr/>
           </a:p>
         </p:txBody>
       </p:sp>
@@ -4682,7 +4506,7 @@
           <a:noFill/>
         </p:spPr>
         <p:txBody>
-          <a:bodyPr wrap="square" lIns="0" tIns="0" rIns="0" bIns="0" anchor="ctr">
+          <a:bodyPr wrap="square" anchor="ctr" lIns="0" rIns="0" tIns="0" bIns="0">
             <a:spAutoFit/>
           </a:bodyPr>
           <a:lstStyle/>
@@ -4765,7 +4589,6 @@
           <a:lstStyle/>
           <a:p>
             <a:pPr algn="ctr"/>
-            <a:endParaRPr/>
           </a:p>
         </p:txBody>
       </p:sp>
@@ -4810,7 +4633,6 @@
           <a:lstStyle/>
           <a:p>
             <a:pPr algn="ctr"/>
-            <a:endParaRPr/>
           </a:p>
         </p:txBody>
       </p:sp>
@@ -4831,7 +4653,7 @@
           <a:noFill/>
         </p:spPr>
         <p:txBody>
-          <a:bodyPr wrap="square" lIns="0" tIns="0" rIns="0" bIns="0" anchor="ctr">
+          <a:bodyPr wrap="square" anchor="ctr" lIns="0" rIns="0" tIns="0" bIns="0">
             <a:spAutoFit/>
           </a:bodyPr>
           <a:lstStyle/>
@@ -4856,7 +4678,7 @@
                 </a:solidFill>
                 <a:latin typeface="Georgia"/>
               </a:rPr>
-              <a:t>1660 → 6.2 ms</a:t>
+              <a:t>1660 → 5.5 ms</a:t>
             </a:r>
           </a:p>
           <a:p>
@@ -4914,7 +4736,6 @@
           <a:lstStyle/>
           <a:p>
             <a:pPr algn="ctr"/>
-            <a:endParaRPr/>
           </a:p>
         </p:txBody>
       </p:sp>
@@ -4959,7 +4780,6 @@
           <a:lstStyle/>
           <a:p>
             <a:pPr algn="ctr"/>
-            <a:endParaRPr/>
           </a:p>
         </p:txBody>
       </p:sp>
@@ -4980,7 +4800,7 @@
           <a:noFill/>
         </p:spPr>
         <p:txBody>
-          <a:bodyPr wrap="square" lIns="0" tIns="0" rIns="0" bIns="0" anchor="ctr">
+          <a:bodyPr wrap="square" anchor="ctr" lIns="0" rIns="0" tIns="0" bIns="0">
             <a:spAutoFit/>
           </a:bodyPr>
           <a:lstStyle/>
@@ -4999,13 +4819,13 @@
           <a:p>
             <a:pPr algn="l"/>
             <a:r>
-              <a:rPr sz="2600" b="1">
+              <a:rPr sz="3000" b="1">
                 <a:solidFill>
                   <a:srgbClr val="E6EDF3"/>
                 </a:solidFill>
                 <a:latin typeface="Georgia"/>
               </a:rPr>
-              <a:t>literal max</a:t>
+              <a:t>= BCC</a:t>
             </a:r>
           </a:p>
           <a:p>
@@ -5017,7 +4837,7 @@
                 </a:solidFill>
                 <a:latin typeface="Segoe UI"/>
               </a:rPr>
-              <a:t>56 ns · 17.86 Mpps</a:t>
+              <a:t>69 vs 66 ns (identici)</a:t>
             </a:r>
           </a:p>
         </p:txBody>
@@ -5039,7 +4859,7 @@
           <a:noFill/>
         </p:spPr>
         <p:txBody>
-          <a:bodyPr wrap="square" lIns="0" tIns="0" rIns="0" bIns="0" anchor="t">
+          <a:bodyPr wrap="square" anchor="t" lIns="0" rIns="0" tIns="0" bIns="0">
             <a:spAutoFit/>
           </a:bodyPr>
           <a:lstStyle/>
@@ -5079,7 +4899,7 @@
 </file>
 
 <file path=ppt/slides/slide2.xml><?xml version="1.0" encoding="utf-8"?>
-<p:sld xmlns:a="http://schemas.openxmlformats.org/drawingml/2006/main" xmlns:r="http://schemas.openxmlformats.org/officeDocument/2006/relationships" xmlns:p="http://schemas.openxmlformats.org/presentationml/2006/main">
+<p:sld xmlns:a="http://schemas.openxmlformats.org/drawingml/2006/main" xmlns:p="http://schemas.openxmlformats.org/presentationml/2006/main" xmlns:r="http://schemas.openxmlformats.org/officeDocument/2006/relationships">
   <p:cSld>
     <p:spTree>
       <p:nvGrpSpPr>
@@ -5087,14 +4907,7 @@
         <p:cNvGrpSpPr/>
         <p:nvPr/>
       </p:nvGrpSpPr>
-      <p:grpSpPr>
-        <a:xfrm>
-          <a:off x="0" y="0"/>
-          <a:ext cx="0" cy="0"/>
-          <a:chOff x="0" y="0"/>
-          <a:chExt cx="0" cy="0"/>
-        </a:xfrm>
-      </p:grpSpPr>
+      <p:grpSpPr/>
       <p:sp>
         <p:nvSpPr>
           <p:cNvPr id="2" name="Rectangle 1"/>
@@ -5136,7 +4949,6 @@
           <a:lstStyle/>
           <a:p>
             <a:pPr algn="ctr"/>
-            <a:endParaRPr/>
           </a:p>
         </p:txBody>
       </p:sp>
@@ -5157,7 +4969,7 @@
           <a:noFill/>
         </p:spPr>
         <p:txBody>
-          <a:bodyPr wrap="square" lIns="0" tIns="0" rIns="0" bIns="0" anchor="t">
+          <a:bodyPr wrap="square" anchor="t" lIns="0" rIns="0" tIns="0" bIns="0">
             <a:spAutoFit/>
           </a:bodyPr>
           <a:lstStyle/>
@@ -5192,7 +5004,7 @@
           <a:noFill/>
         </p:spPr>
         <p:txBody>
-          <a:bodyPr wrap="square" lIns="0" tIns="0" rIns="0" bIns="0" anchor="t">
+          <a:bodyPr wrap="square" anchor="t" lIns="0" rIns="0" tIns="0" bIns="0">
             <a:spAutoFit/>
           </a:bodyPr>
           <a:lstStyle/>
@@ -5227,7 +5039,7 @@
           <a:noFill/>
         </p:spPr>
         <p:txBody>
-          <a:bodyPr wrap="square" lIns="0" tIns="0" rIns="0" bIns="0" anchor="t">
+          <a:bodyPr wrap="square" anchor="t" lIns="0" rIns="0" tIns="0" bIns="0">
             <a:spAutoFit/>
           </a:bodyPr>
           <a:lstStyle/>
@@ -5286,7 +5098,6 @@
           <a:lstStyle/>
           <a:p>
             <a:pPr algn="ctr"/>
-            <a:endParaRPr/>
           </a:p>
         </p:txBody>
       </p:sp>
@@ -5331,7 +5142,6 @@
           <a:lstStyle/>
           <a:p>
             <a:pPr algn="ctr"/>
-            <a:endParaRPr/>
           </a:p>
         </p:txBody>
       </p:sp>
@@ -5352,7 +5162,7 @@
           <a:noFill/>
         </p:spPr>
         <p:txBody>
-          <a:bodyPr wrap="square" lIns="0" tIns="0" rIns="0" bIns="0" anchor="ctr">
+          <a:bodyPr wrap="square" anchor="ctr" lIns="0" rIns="0" tIns="0" bIns="0">
             <a:spAutoFit/>
           </a:bodyPr>
           <a:lstStyle/>
@@ -5423,7 +5233,6 @@
           <a:lstStyle/>
           <a:p>
             <a:pPr algn="ctr"/>
-            <a:endParaRPr/>
           </a:p>
         </p:txBody>
       </p:sp>
@@ -5468,7 +5277,6 @@
           <a:lstStyle/>
           <a:p>
             <a:pPr algn="ctr"/>
-            <a:endParaRPr/>
           </a:p>
         </p:txBody>
       </p:sp>
@@ -5489,7 +5297,7 @@
           <a:noFill/>
         </p:spPr>
         <p:txBody>
-          <a:bodyPr wrap="square" lIns="0" tIns="0" rIns="0" bIns="0" anchor="ctr">
+          <a:bodyPr wrap="square" anchor="ctr" lIns="0" rIns="0" tIns="0" bIns="0">
             <a:spAutoFit/>
           </a:bodyPr>
           <a:lstStyle/>
@@ -5560,7 +5368,6 @@
           <a:lstStyle/>
           <a:p>
             <a:pPr algn="ctr"/>
-            <a:endParaRPr/>
           </a:p>
         </p:txBody>
       </p:sp>
@@ -5605,7 +5412,6 @@
           <a:lstStyle/>
           <a:p>
             <a:pPr algn="ctr"/>
-            <a:endParaRPr/>
           </a:p>
         </p:txBody>
       </p:sp>
@@ -5626,7 +5432,7 @@
           <a:noFill/>
         </p:spPr>
         <p:txBody>
-          <a:bodyPr wrap="square" lIns="0" tIns="0" rIns="0" bIns="0" anchor="ctr">
+          <a:bodyPr wrap="square" anchor="ctr" lIns="0" rIns="0" tIns="0" bIns="0">
             <a:spAutoFit/>
           </a:bodyPr>
           <a:lstStyle/>
@@ -5662,7 +5468,7 @@
         <p:spPr>
           <a:xfrm>
             <a:off x="640080" y="5257800"/>
-            <a:ext cx="10972800" cy="651460"/>
+            <a:ext cx="10972800" cy="1280160"/>
           </a:xfrm>
           <a:prstGeom prst="rect">
             <a:avLst/>
@@ -5670,7 +5476,7 @@
           <a:noFill/>
         </p:spPr>
         <p:txBody>
-          <a:bodyPr wrap="square" lIns="0" tIns="0" rIns="0" bIns="0" anchor="t">
+          <a:bodyPr wrap="square" anchor="t" lIns="0" rIns="0" tIns="0" bIns="0">
             <a:spAutoFit/>
           </a:bodyPr>
           <a:lstStyle/>
@@ -5681,29 +5487,14 @@
               </a:spcAft>
             </a:pPr>
             <a:r>
-              <a:rPr sz="1300" b="1" dirty="0" err="1">
+              <a:rPr sz="1300" b="1">
                 <a:solidFill>
                   <a:srgbClr val="8B949E"/>
                 </a:solidFill>
                 <a:latin typeface="Segoe UI"/>
               </a:rPr>
-              <a:t>Vincolo</a:t>
-            </a:r>
-            <a:r>
-              <a:rPr lang="it-IT" sz="1300" b="1" dirty="0">
-                <a:solidFill>
-                  <a:srgbClr val="8B949E"/>
-                </a:solidFill>
-                <a:latin typeface="Segoe UI"/>
-              </a:rPr>
-              <a:t> (modelli noti a priori):</a:t>
-            </a:r>
-            <a:endParaRPr sz="1300" b="1" dirty="0">
-              <a:solidFill>
-                <a:srgbClr val="8B949E"/>
-              </a:solidFill>
-              <a:latin typeface="Segoe UI"/>
-            </a:endParaRPr>
+              <a:t>Vincolo del professore (modelli noti a priori):</a:t>
+            </a:r>
           </a:p>
           <a:p>
             <a:pPr algn="l">
@@ -5712,247 +5503,13 @@
               </a:spcAft>
             </a:pPr>
             <a:r>
-              <a:rPr sz="1300" b="0" dirty="0">
+              <a:rPr sz="1300" b="0">
                 <a:solidFill>
                   <a:srgbClr val="E6EDF3"/>
                 </a:solidFill>
                 <a:latin typeface="Segoe UI"/>
               </a:rPr>
-              <a:t>a </a:t>
-            </a:r>
-            <a:r>
-              <a:rPr sz="1300" b="0" dirty="0" err="1">
-                <a:solidFill>
-                  <a:srgbClr val="E6EDF3"/>
-                </a:solidFill>
-                <a:latin typeface="Segoe UI"/>
-              </a:rPr>
-              <a:t>parità</a:t>
-            </a:r>
-            <a:r>
-              <a:rPr sz="1300" b="0" dirty="0">
-                <a:solidFill>
-                  <a:srgbClr val="E6EDF3"/>
-                </a:solidFill>
-                <a:latin typeface="Segoe UI"/>
-              </a:rPr>
-              <a:t> di </a:t>
-            </a:r>
-            <a:r>
-              <a:rPr sz="1300" b="0" dirty="0" err="1">
-                <a:solidFill>
-                  <a:srgbClr val="E6EDF3"/>
-                </a:solidFill>
-                <a:latin typeface="Segoe UI"/>
-              </a:rPr>
-              <a:t>tipo</a:t>
-            </a:r>
-            <a:r>
-              <a:rPr sz="1300" b="0" dirty="0">
-                <a:solidFill>
-                  <a:srgbClr val="E6EDF3"/>
-                </a:solidFill>
-                <a:latin typeface="Segoe UI"/>
-              </a:rPr>
-              <a:t> di feature la </a:t>
-            </a:r>
-            <a:r>
-              <a:rPr sz="1300" b="0" dirty="0" err="1">
-                <a:solidFill>
-                  <a:srgbClr val="E6EDF3"/>
-                </a:solidFill>
-                <a:latin typeface="Segoe UI"/>
-              </a:rPr>
-              <a:t>dimensione</a:t>
-            </a:r>
-            <a:r>
-              <a:rPr sz="1300" b="0" dirty="0">
-                <a:solidFill>
-                  <a:srgbClr val="E6EDF3"/>
-                </a:solidFill>
-                <a:latin typeface="Segoe UI"/>
-              </a:rPr>
-              <a:t> è </a:t>
-            </a:r>
-            <a:r>
-              <a:rPr sz="1300" b="0" dirty="0" err="1">
-                <a:solidFill>
-                  <a:srgbClr val="E6EDF3"/>
-                </a:solidFill>
-                <a:latin typeface="Segoe UI"/>
-              </a:rPr>
-              <a:t>fissa</a:t>
-            </a:r>
-            <a:r>
-              <a:rPr sz="1300" b="0" dirty="0">
-                <a:solidFill>
-                  <a:srgbClr val="E6EDF3"/>
-                </a:solidFill>
-                <a:latin typeface="Segoe UI"/>
-              </a:rPr>
-              <a:t> </a:t>
-            </a:r>
-            <a:r>
-              <a:rPr sz="1300" b="0" dirty="0" err="1">
-                <a:solidFill>
-                  <a:srgbClr val="E6EDF3"/>
-                </a:solidFill>
-                <a:latin typeface="Segoe UI"/>
-              </a:rPr>
-              <a:t>nella</a:t>
-            </a:r>
-            <a:r>
-              <a:rPr sz="1300" b="0" dirty="0">
-                <a:solidFill>
-                  <a:srgbClr val="E6EDF3"/>
-                </a:solidFill>
-                <a:latin typeface="Segoe UI"/>
-              </a:rPr>
-              <a:t> </a:t>
-            </a:r>
-            <a:r>
-              <a:rPr sz="1300" b="0" dirty="0" err="1">
-                <a:solidFill>
-                  <a:srgbClr val="E6EDF3"/>
-                </a:solidFill>
-                <a:latin typeface="Segoe UI"/>
-              </a:rPr>
-              <a:t>stessa</a:t>
-            </a:r>
-            <a:r>
-              <a:rPr sz="1300" b="0" dirty="0">
-                <a:solidFill>
-                  <a:srgbClr val="E6EDF3"/>
-                </a:solidFill>
-                <a:latin typeface="Segoe UI"/>
-              </a:rPr>
-              <a:t> rete — è </a:t>
-            </a:r>
-            <a:r>
-              <a:rPr sz="1300" b="0" dirty="0" err="1">
-                <a:solidFill>
-                  <a:srgbClr val="E6EDF3"/>
-                </a:solidFill>
-                <a:latin typeface="Segoe UI"/>
-              </a:rPr>
-              <a:t>una</a:t>
-            </a:r>
-            <a:r>
-              <a:rPr sz="1300" b="0" dirty="0">
-                <a:solidFill>
-                  <a:srgbClr val="E6EDF3"/>
-                </a:solidFill>
-                <a:latin typeface="Segoe UI"/>
-              </a:rPr>
-              <a:t> </a:t>
-            </a:r>
-            <a:r>
-              <a:rPr sz="1300" b="0" dirty="0" err="1">
-                <a:solidFill>
-                  <a:srgbClr val="E6EDF3"/>
-                </a:solidFill>
-                <a:latin typeface="Segoe UI"/>
-              </a:rPr>
-              <a:t>proprietà</a:t>
-            </a:r>
-            <a:r>
-              <a:rPr sz="1300" b="0" dirty="0">
-                <a:solidFill>
-                  <a:srgbClr val="E6EDF3"/>
-                </a:solidFill>
-                <a:latin typeface="Segoe UI"/>
-              </a:rPr>
-              <a:t> del NODO, non un </a:t>
-            </a:r>
-            <a:r>
-              <a:rPr sz="1300" b="0" dirty="0" err="1">
-                <a:solidFill>
-                  <a:srgbClr val="E6EDF3"/>
-                </a:solidFill>
-                <a:latin typeface="Segoe UI"/>
-              </a:rPr>
-              <a:t>parametro</a:t>
-            </a:r>
-            <a:r>
-              <a:rPr sz="1300" b="0" dirty="0">
-                <a:solidFill>
-                  <a:srgbClr val="E6EDF3"/>
-                </a:solidFill>
-                <a:latin typeface="Segoe UI"/>
-              </a:rPr>
-              <a:t> del </a:t>
-            </a:r>
-            <a:r>
-              <a:rPr sz="1300" b="0" dirty="0" err="1">
-                <a:solidFill>
-                  <a:srgbClr val="E6EDF3"/>
-                </a:solidFill>
-                <a:latin typeface="Segoe UI"/>
-              </a:rPr>
-              <a:t>modello</a:t>
-            </a:r>
-            <a:r>
-              <a:rPr sz="1300" b="0" dirty="0">
-                <a:solidFill>
-                  <a:srgbClr val="E6EDF3"/>
-                </a:solidFill>
-                <a:latin typeface="Segoe UI"/>
-              </a:rPr>
-              <a:t>. I </a:t>
-            </a:r>
-            <a:r>
-              <a:rPr sz="1300" b="0" dirty="0" err="1">
-                <a:solidFill>
-                  <a:srgbClr val="E6EDF3"/>
-                </a:solidFill>
-                <a:latin typeface="Segoe UI"/>
-              </a:rPr>
-              <a:t>modelli</a:t>
-            </a:r>
-            <a:r>
-              <a:rPr sz="1300" b="0" dirty="0">
-                <a:solidFill>
-                  <a:srgbClr val="E6EDF3"/>
-                </a:solidFill>
-                <a:latin typeface="Segoe UI"/>
-              </a:rPr>
-              <a:t> </a:t>
-            </a:r>
-            <a:r>
-              <a:rPr sz="1300" b="0" dirty="0" err="1">
-                <a:solidFill>
-                  <a:srgbClr val="E6EDF3"/>
-                </a:solidFill>
-                <a:latin typeface="Segoe UI"/>
-              </a:rPr>
-              <a:t>scelgono</a:t>
-            </a:r>
-            <a:r>
-              <a:rPr sz="1300" b="0" dirty="0">
-                <a:solidFill>
-                  <a:srgbClr val="E6EDF3"/>
-                </a:solidFill>
-                <a:latin typeface="Segoe UI"/>
-              </a:rPr>
-              <a:t> solo QUALI tipi </a:t>
-            </a:r>
-            <a:r>
-              <a:rPr sz="1300" b="0" dirty="0" err="1">
-                <a:solidFill>
-                  <a:srgbClr val="E6EDF3"/>
-                </a:solidFill>
-                <a:latin typeface="Segoe UI"/>
-              </a:rPr>
-              <a:t>usare</a:t>
-            </a:r>
-            <a:r>
-              <a:rPr sz="1300" b="0" dirty="0">
-                <a:solidFill>
-                  <a:srgbClr val="E6EDF3"/>
-                </a:solidFill>
-                <a:latin typeface="Segoe UI"/>
-              </a:rPr>
-              <a:t>.</a:t>
+              <a:t>a parità di tipo di feature la dimensione è fissa nella stessa rete — è una proprietà del NODO, non un parametro del modello. I modelli scelgono solo QUALI tipi usare.</a:t>
             </a:r>
           </a:p>
         </p:txBody>
@@ -5966,7 +5523,7 @@
 </file>
 
 <file path=ppt/slides/slide3.xml><?xml version="1.0" encoding="utf-8"?>
-<p:sld xmlns:a="http://schemas.openxmlformats.org/drawingml/2006/main" xmlns:r="http://schemas.openxmlformats.org/officeDocument/2006/relationships" xmlns:p="http://schemas.openxmlformats.org/presentationml/2006/main">
+<p:sld xmlns:a="http://schemas.openxmlformats.org/drawingml/2006/main" xmlns:p="http://schemas.openxmlformats.org/presentationml/2006/main" xmlns:r="http://schemas.openxmlformats.org/officeDocument/2006/relationships">
   <p:cSld>
     <p:spTree>
       <p:nvGrpSpPr>
@@ -5974,14 +5531,7 @@
         <p:cNvGrpSpPr/>
         <p:nvPr/>
       </p:nvGrpSpPr>
-      <p:grpSpPr>
-        <a:xfrm>
-          <a:off x="0" y="0"/>
-          <a:ext cx="0" cy="0"/>
-          <a:chOff x="0" y="0"/>
-          <a:chExt cx="0" cy="0"/>
-        </a:xfrm>
-      </p:grpSpPr>
+      <p:grpSpPr/>
       <p:sp>
         <p:nvSpPr>
           <p:cNvPr id="2" name="Rectangle 1"/>
@@ -6023,7 +5573,6 @@
           <a:lstStyle/>
           <a:p>
             <a:pPr algn="ctr"/>
-            <a:endParaRPr/>
           </a:p>
         </p:txBody>
       </p:sp>
@@ -6044,7 +5593,7 @@
           <a:noFill/>
         </p:spPr>
         <p:txBody>
-          <a:bodyPr wrap="square" lIns="0" tIns="0" rIns="0" bIns="0" anchor="t">
+          <a:bodyPr wrap="square" anchor="t" lIns="0" rIns="0" tIns="0" bIns="0">
             <a:spAutoFit/>
           </a:bodyPr>
           <a:lstStyle/>
@@ -6079,7 +5628,7 @@
           <a:noFill/>
         </p:spPr>
         <p:txBody>
-          <a:bodyPr wrap="square" lIns="0" tIns="0" rIns="0" bIns="0" anchor="t">
+          <a:bodyPr wrap="square" anchor="t" lIns="0" rIns="0" tIns="0" bIns="0">
             <a:spAutoFit/>
           </a:bodyPr>
           <a:lstStyle/>
@@ -6114,7 +5663,7 @@
           <a:noFill/>
         </p:spPr>
         <p:txBody>
-          <a:bodyPr wrap="square" lIns="0" tIns="0" rIns="0" bIns="0" anchor="t">
+          <a:bodyPr wrap="square" anchor="t" lIns="0" rIns="0" tIns="0" bIns="0">
             <a:spAutoFit/>
           </a:bodyPr>
           <a:lstStyle/>
@@ -6173,7 +5722,6 @@
           <a:lstStyle/>
           <a:p>
             <a:pPr algn="ctr"/>
-            <a:endParaRPr/>
           </a:p>
         </p:txBody>
       </p:sp>
@@ -6218,7 +5766,6 @@
           <a:lstStyle/>
           <a:p>
             <a:pPr algn="ctr"/>
-            <a:endParaRPr/>
           </a:p>
         </p:txBody>
       </p:sp>
@@ -6239,7 +5786,7 @@
           <a:noFill/>
         </p:spPr>
         <p:txBody>
-          <a:bodyPr wrap="square" lIns="0" tIns="0" rIns="0" bIns="0" anchor="t">
+          <a:bodyPr wrap="square" anchor="t" lIns="0" rIns="0" tIns="0" bIns="0">
             <a:spAutoFit/>
           </a:bodyPr>
           <a:lstStyle/>
@@ -6274,7 +5821,7 @@
           <a:noFill/>
         </p:spPr>
         <p:txBody>
-          <a:bodyPr wrap="square" lIns="0" tIns="0" rIns="0" bIns="0" anchor="t">
+          <a:bodyPr wrap="square" anchor="t" lIns="0" rIns="0" tIns="0" bIns="0">
             <a:spAutoFit/>
           </a:bodyPr>
           <a:lstStyle/>
@@ -6462,7 +6009,6 @@
           <a:lstStyle/>
           <a:p>
             <a:pPr algn="ctr"/>
-            <a:endParaRPr/>
           </a:p>
         </p:txBody>
       </p:sp>
@@ -6507,7 +6053,6 @@
           <a:lstStyle/>
           <a:p>
             <a:pPr algn="ctr"/>
-            <a:endParaRPr/>
           </a:p>
         </p:txBody>
       </p:sp>
@@ -6528,7 +6073,7 @@
           <a:noFill/>
         </p:spPr>
         <p:txBody>
-          <a:bodyPr wrap="square" lIns="0" tIns="0" rIns="0" bIns="0" anchor="t">
+          <a:bodyPr wrap="square" anchor="t" lIns="0" rIns="0" tIns="0" bIns="0">
             <a:spAutoFit/>
           </a:bodyPr>
           <a:lstStyle/>
@@ -6563,7 +6108,7 @@
           <a:noFill/>
         </p:spPr>
         <p:txBody>
-          <a:bodyPr wrap="square" lIns="0" tIns="0" rIns="0" bIns="0" anchor="t">
+          <a:bodyPr wrap="square" anchor="t" lIns="0" rIns="0" tIns="0" bIns="0">
             <a:spAutoFit/>
           </a:bodyPr>
           <a:lstStyle/>
@@ -6722,7 +6267,6 @@
           <a:lstStyle/>
           <a:p>
             <a:pPr algn="ctr"/>
-            <a:endParaRPr/>
           </a:p>
         </p:txBody>
       </p:sp>
@@ -6767,7 +6311,6 @@
           <a:lstStyle/>
           <a:p>
             <a:pPr algn="ctr"/>
-            <a:endParaRPr/>
           </a:p>
         </p:txBody>
       </p:sp>
@@ -6788,7 +6331,7 @@
           <a:noFill/>
         </p:spPr>
         <p:txBody>
-          <a:bodyPr wrap="square" lIns="0" tIns="0" rIns="0" bIns="0" anchor="t">
+          <a:bodyPr wrap="square" anchor="t" lIns="0" rIns="0" tIns="0" bIns="0">
             <a:spAutoFit/>
           </a:bodyPr>
           <a:lstStyle/>
@@ -6823,7 +6366,7 @@
           <a:noFill/>
         </p:spPr>
         <p:txBody>
-          <a:bodyPr wrap="square" lIns="0" tIns="0" rIns="0" bIns="0" anchor="t">
+          <a:bodyPr wrap="square" anchor="t" lIns="0" rIns="0" tIns="0" bIns="0">
             <a:spAutoFit/>
           </a:bodyPr>
           <a:lstStyle/>
@@ -6926,7 +6469,7 @@
           <a:noFill/>
         </p:spPr>
         <p:txBody>
-          <a:bodyPr wrap="square" lIns="0" tIns="0" rIns="0" bIns="0" anchor="t">
+          <a:bodyPr wrap="square" anchor="t" lIns="0" rIns="0" tIns="0" bIns="0">
             <a:spAutoFit/>
           </a:bodyPr>
           <a:lstStyle/>
@@ -6991,7 +6534,7 @@
 </file>
 
 <file path=ppt/slides/slide4.xml><?xml version="1.0" encoding="utf-8"?>
-<p:sld xmlns:a="http://schemas.openxmlformats.org/drawingml/2006/main" xmlns:r="http://schemas.openxmlformats.org/officeDocument/2006/relationships" xmlns:p="http://schemas.openxmlformats.org/presentationml/2006/main">
+<p:sld xmlns:a="http://schemas.openxmlformats.org/drawingml/2006/main" xmlns:p="http://schemas.openxmlformats.org/presentationml/2006/main" xmlns:r="http://schemas.openxmlformats.org/officeDocument/2006/relationships">
   <p:cSld>
     <p:spTree>
       <p:nvGrpSpPr>
@@ -6999,14 +6542,7 @@
         <p:cNvGrpSpPr/>
         <p:nvPr/>
       </p:nvGrpSpPr>
-      <p:grpSpPr>
-        <a:xfrm>
-          <a:off x="0" y="0"/>
-          <a:ext cx="0" cy="0"/>
-          <a:chOff x="0" y="0"/>
-          <a:chExt cx="0" cy="0"/>
-        </a:xfrm>
-      </p:grpSpPr>
+      <p:grpSpPr/>
       <p:sp>
         <p:nvSpPr>
           <p:cNvPr id="2" name="Rectangle 1"/>
@@ -7048,7 +6584,6 @@
           <a:lstStyle/>
           <a:p>
             <a:pPr algn="ctr"/>
-            <a:endParaRPr/>
           </a:p>
         </p:txBody>
       </p:sp>
@@ -7069,7 +6604,7 @@
           <a:noFill/>
         </p:spPr>
         <p:txBody>
-          <a:bodyPr wrap="square" lIns="0" tIns="0" rIns="0" bIns="0" anchor="t">
+          <a:bodyPr wrap="square" anchor="t" lIns="0" rIns="0" tIns="0" bIns="0">
             <a:spAutoFit/>
           </a:bodyPr>
           <a:lstStyle/>
@@ -7104,7 +6639,7 @@
           <a:noFill/>
         </p:spPr>
         <p:txBody>
-          <a:bodyPr wrap="square" lIns="0" tIns="0" rIns="0" bIns="0" anchor="t">
+          <a:bodyPr wrap="square" anchor="t" lIns="0" rIns="0" tIns="0" bIns="0">
             <a:spAutoFit/>
           </a:bodyPr>
           <a:lstStyle/>
@@ -7139,7 +6674,7 @@
           <a:noFill/>
         </p:spPr>
         <p:txBody>
-          <a:bodyPr wrap="square" lIns="0" tIns="0" rIns="0" bIns="0" anchor="t">
+          <a:bodyPr wrap="square" anchor="t" lIns="0" rIns="0" tIns="0" bIns="0">
             <a:spAutoFit/>
           </a:bodyPr>
           <a:lstStyle/>
@@ -7198,7 +6733,6 @@
           <a:lstStyle/>
           <a:p>
             <a:pPr algn="ctr"/>
-            <a:endParaRPr/>
           </a:p>
         </p:txBody>
       </p:sp>
@@ -7243,7 +6777,6 @@
           <a:lstStyle/>
           <a:p>
             <a:pPr algn="ctr"/>
-            <a:endParaRPr/>
           </a:p>
         </p:txBody>
       </p:sp>
@@ -7264,7 +6797,7 @@
           <a:noFill/>
         </p:spPr>
         <p:txBody>
-          <a:bodyPr wrap="square" lIns="0" tIns="0" rIns="0" bIns="0" anchor="ctr">
+          <a:bodyPr wrap="square" anchor="ctr" lIns="0" rIns="0" tIns="0" bIns="0">
             <a:spAutoFit/>
           </a:bodyPr>
           <a:lstStyle/>
@@ -7311,7 +6844,7 @@
           <a:noFill/>
         </p:spPr>
         <p:txBody>
-          <a:bodyPr wrap="square" lIns="0" tIns="0" rIns="0" bIns="0" anchor="t">
+          <a:bodyPr wrap="square" anchor="t" lIns="0" rIns="0" tIns="0" bIns="0">
             <a:spAutoFit/>
           </a:bodyPr>
           <a:lstStyle/>
@@ -7370,7 +6903,6 @@
           <a:lstStyle/>
           <a:p>
             <a:pPr algn="ctr"/>
-            <a:endParaRPr/>
           </a:p>
         </p:txBody>
       </p:sp>
@@ -7415,7 +6947,6 @@
           <a:lstStyle/>
           <a:p>
             <a:pPr algn="ctr"/>
-            <a:endParaRPr/>
           </a:p>
         </p:txBody>
       </p:sp>
@@ -7436,7 +6967,7 @@
           <a:noFill/>
         </p:spPr>
         <p:txBody>
-          <a:bodyPr wrap="square" lIns="0" tIns="0" rIns="0" bIns="0" anchor="ctr">
+          <a:bodyPr wrap="square" anchor="ctr" lIns="0" rIns="0" tIns="0" bIns="0">
             <a:spAutoFit/>
           </a:bodyPr>
           <a:lstStyle/>
@@ -7483,7 +7014,7 @@
           <a:noFill/>
         </p:spPr>
         <p:txBody>
-          <a:bodyPr wrap="square" lIns="0" tIns="0" rIns="0" bIns="0" anchor="t">
+          <a:bodyPr wrap="square" anchor="t" lIns="0" rIns="0" tIns="0" bIns="0">
             <a:spAutoFit/>
           </a:bodyPr>
           <a:lstStyle/>
@@ -7542,7 +7073,6 @@
           <a:lstStyle/>
           <a:p>
             <a:pPr algn="ctr"/>
-            <a:endParaRPr/>
           </a:p>
         </p:txBody>
       </p:sp>
@@ -7587,7 +7117,6 @@
           <a:lstStyle/>
           <a:p>
             <a:pPr algn="ctr"/>
-            <a:endParaRPr/>
           </a:p>
         </p:txBody>
       </p:sp>
@@ -7608,7 +7137,7 @@
           <a:noFill/>
         </p:spPr>
         <p:txBody>
-          <a:bodyPr wrap="square" lIns="0" tIns="0" rIns="0" bIns="0" anchor="ctr">
+          <a:bodyPr wrap="square" anchor="ctr" lIns="0" rIns="0" tIns="0" bIns="0">
             <a:spAutoFit/>
           </a:bodyPr>
           <a:lstStyle/>
@@ -7655,7 +7184,7 @@
           <a:noFill/>
         </p:spPr>
         <p:txBody>
-          <a:bodyPr wrap="square" lIns="0" tIns="0" rIns="0" bIns="0" anchor="t">
+          <a:bodyPr wrap="square" anchor="t" lIns="0" rIns="0" tIns="0" bIns="0">
             <a:spAutoFit/>
           </a:bodyPr>
           <a:lstStyle/>
@@ -7714,7 +7243,6 @@
           <a:lstStyle/>
           <a:p>
             <a:pPr algn="ctr"/>
-            <a:endParaRPr/>
           </a:p>
         </p:txBody>
       </p:sp>
@@ -7759,7 +7287,6 @@
           <a:lstStyle/>
           <a:p>
             <a:pPr algn="ctr"/>
-            <a:endParaRPr/>
           </a:p>
         </p:txBody>
       </p:sp>
@@ -7780,7 +7307,7 @@
           <a:noFill/>
         </p:spPr>
         <p:txBody>
-          <a:bodyPr wrap="square" lIns="0" tIns="0" rIns="0" bIns="0" anchor="ctr">
+          <a:bodyPr wrap="square" anchor="ctr" lIns="0" rIns="0" tIns="0" bIns="0">
             <a:spAutoFit/>
           </a:bodyPr>
           <a:lstStyle/>
@@ -7827,7 +7354,7 @@
           <a:noFill/>
         </p:spPr>
         <p:txBody>
-          <a:bodyPr wrap="square" lIns="0" tIns="0" rIns="0" bIns="0" anchor="t">
+          <a:bodyPr wrap="square" anchor="t" lIns="0" rIns="0" tIns="0" bIns="0">
             <a:spAutoFit/>
           </a:bodyPr>
           <a:lstStyle/>
@@ -7886,7 +7413,6 @@
           <a:lstStyle/>
           <a:p>
             <a:pPr algn="ctr"/>
-            <a:endParaRPr/>
           </a:p>
         </p:txBody>
       </p:sp>
@@ -7931,7 +7457,6 @@
           <a:lstStyle/>
           <a:p>
             <a:pPr algn="ctr"/>
-            <a:endParaRPr/>
           </a:p>
         </p:txBody>
       </p:sp>
@@ -7952,7 +7477,7 @@
           <a:noFill/>
         </p:spPr>
         <p:txBody>
-          <a:bodyPr wrap="square" lIns="0" tIns="0" rIns="0" bIns="0" anchor="ctr">
+          <a:bodyPr wrap="square" anchor="ctr" lIns="0" rIns="0" tIns="0" bIns="0">
             <a:spAutoFit/>
           </a:bodyPr>
           <a:lstStyle/>
@@ -7999,7 +7524,7 @@
           <a:noFill/>
         </p:spPr>
         <p:txBody>
-          <a:bodyPr wrap="square" lIns="0" tIns="0" rIns="0" bIns="0" anchor="t">
+          <a:bodyPr wrap="square" anchor="t" lIns="0" rIns="0" tIns="0" bIns="0">
             <a:spAutoFit/>
           </a:bodyPr>
           <a:lstStyle/>
@@ -8058,7 +7583,6 @@
           <a:lstStyle/>
           <a:p>
             <a:pPr algn="ctr"/>
-            <a:endParaRPr/>
           </a:p>
         </p:txBody>
       </p:sp>
@@ -8103,7 +7627,6 @@
           <a:lstStyle/>
           <a:p>
             <a:pPr algn="ctr"/>
-            <a:endParaRPr/>
           </a:p>
         </p:txBody>
       </p:sp>
@@ -8124,7 +7647,7 @@
           <a:noFill/>
         </p:spPr>
         <p:txBody>
-          <a:bodyPr wrap="square" lIns="0" tIns="0" rIns="0" bIns="0" anchor="ctr">
+          <a:bodyPr wrap="square" anchor="ctr" lIns="0" rIns="0" tIns="0" bIns="0">
             <a:spAutoFit/>
           </a:bodyPr>
           <a:lstStyle/>
@@ -8195,7 +7718,6 @@
           <a:lstStyle/>
           <a:p>
             <a:pPr algn="ctr"/>
-            <a:endParaRPr/>
           </a:p>
         </p:txBody>
       </p:sp>
@@ -8216,7 +7738,7 @@
           <a:noFill/>
         </p:spPr>
         <p:txBody>
-          <a:bodyPr wrap="square" lIns="0" tIns="0" rIns="0" bIns="0" anchor="t">
+          <a:bodyPr wrap="square" anchor="t" lIns="0" rIns="0" tIns="0" bIns="0">
             <a:spAutoFit/>
           </a:bodyPr>
           <a:lstStyle/>
@@ -8251,7 +7773,7 @@
           <a:noFill/>
         </p:spPr>
         <p:txBody>
-          <a:bodyPr wrap="square" lIns="0" tIns="0" rIns="0" bIns="0" anchor="t">
+          <a:bodyPr wrap="square" anchor="t" lIns="0" rIns="0" tIns="0" bIns="0">
             <a:spAutoFit/>
           </a:bodyPr>
           <a:lstStyle/>
@@ -8341,12 +7863,15 @@
                 <a:spcPts val="300"/>
               </a:spcAft>
             </a:pPr>
-            <a:endParaRPr sz="1200" b="0">
-              <a:solidFill>
-                <a:srgbClr val="58A6FF"/>
-              </a:solidFill>
-              <a:latin typeface="Consolas"/>
-            </a:endParaRPr>
+            <a:r>
+              <a:rPr sz="1200" b="0">
+                <a:solidFill>
+                  <a:srgbClr val="E6EDF3"/>
+                </a:solidFill>
+                <a:latin typeface="Consolas"/>
+              </a:rPr>
+              <a:t/>
+            </a:r>
           </a:p>
           <a:p>
             <a:pPr algn="l">
@@ -8407,7 +7932,7 @@
 </file>
 
 <file path=ppt/slides/slide5.xml><?xml version="1.0" encoding="utf-8"?>
-<p:sld xmlns:a="http://schemas.openxmlformats.org/drawingml/2006/main" xmlns:r="http://schemas.openxmlformats.org/officeDocument/2006/relationships" xmlns:p="http://schemas.openxmlformats.org/presentationml/2006/main">
+<p:sld xmlns:a="http://schemas.openxmlformats.org/drawingml/2006/main" xmlns:p="http://schemas.openxmlformats.org/presentationml/2006/main" xmlns:r="http://schemas.openxmlformats.org/officeDocument/2006/relationships">
   <p:cSld>
     <p:spTree>
       <p:nvGrpSpPr>
@@ -8415,14 +7940,7 @@
         <p:cNvGrpSpPr/>
         <p:nvPr/>
       </p:nvGrpSpPr>
-      <p:grpSpPr>
-        <a:xfrm>
-          <a:off x="0" y="0"/>
-          <a:ext cx="0" cy="0"/>
-          <a:chOff x="0" y="0"/>
-          <a:chExt cx="0" cy="0"/>
-        </a:xfrm>
-      </p:grpSpPr>
+      <p:grpSpPr/>
       <p:sp>
         <p:nvSpPr>
           <p:cNvPr id="2" name="Rectangle 1"/>
@@ -8464,7 +7982,6 @@
           <a:lstStyle/>
           <a:p>
             <a:pPr algn="ctr"/>
-            <a:endParaRPr/>
           </a:p>
         </p:txBody>
       </p:sp>
@@ -8485,7 +8002,7 @@
           <a:noFill/>
         </p:spPr>
         <p:txBody>
-          <a:bodyPr wrap="square" lIns="0" tIns="0" rIns="0" bIns="0" anchor="t">
+          <a:bodyPr wrap="square" anchor="t" lIns="0" rIns="0" tIns="0" bIns="0">
             <a:spAutoFit/>
           </a:bodyPr>
           <a:lstStyle/>
@@ -8520,7 +8037,7 @@
           <a:noFill/>
         </p:spPr>
         <p:txBody>
-          <a:bodyPr wrap="square" lIns="0" tIns="0" rIns="0" bIns="0" anchor="t">
+          <a:bodyPr wrap="square" anchor="t" lIns="0" rIns="0" tIns="0" bIns="0">
             <a:spAutoFit/>
           </a:bodyPr>
           <a:lstStyle/>
@@ -8555,7 +8072,7 @@
           <a:noFill/>
         </p:spPr>
         <p:txBody>
-          <a:bodyPr wrap="square" lIns="0" tIns="0" rIns="0" bIns="0" anchor="t">
+          <a:bodyPr wrap="square" anchor="t" lIns="0" rIns="0" tIns="0" bIns="0">
             <a:spAutoFit/>
           </a:bodyPr>
           <a:lstStyle/>
@@ -8590,7 +8107,7 @@
           <a:noFill/>
         </p:spPr>
         <p:txBody>
-          <a:bodyPr wrap="square" lIns="0" tIns="0" rIns="0" bIns="0" anchor="t">
+          <a:bodyPr wrap="square" anchor="t" lIns="0" rIns="0" tIns="0" bIns="0">
             <a:spAutoFit/>
           </a:bodyPr>
           <a:lstStyle/>
@@ -8649,7 +8166,6 @@
           <a:lstStyle/>
           <a:p>
             <a:pPr algn="ctr"/>
-            <a:endParaRPr/>
           </a:p>
         </p:txBody>
       </p:sp>
@@ -8670,7 +8186,7 @@
           <a:noFill/>
         </p:spPr>
         <p:txBody>
-          <a:bodyPr wrap="square" lIns="0" tIns="0" rIns="0" bIns="0" anchor="ctr">
+          <a:bodyPr wrap="square" anchor="ctr" lIns="0" rIns="0" tIns="0" bIns="0">
             <a:spAutoFit/>
           </a:bodyPr>
           <a:lstStyle/>
@@ -8741,7 +8257,6 @@
           <a:lstStyle/>
           <a:p>
             <a:pPr algn="ctr"/>
-            <a:endParaRPr/>
           </a:p>
         </p:txBody>
       </p:sp>
@@ -8762,7 +8277,7 @@
           <a:noFill/>
         </p:spPr>
         <p:txBody>
-          <a:bodyPr wrap="square" lIns="0" tIns="0" rIns="0" bIns="0" anchor="ctr">
+          <a:bodyPr wrap="square" anchor="ctr" lIns="0" rIns="0" tIns="0" bIns="0">
             <a:spAutoFit/>
           </a:bodyPr>
           <a:lstStyle/>
@@ -8833,7 +8348,6 @@
           <a:lstStyle/>
           <a:p>
             <a:pPr algn="ctr"/>
-            <a:endParaRPr/>
           </a:p>
         </p:txBody>
       </p:sp>
@@ -8854,7 +8368,7 @@
           <a:noFill/>
         </p:spPr>
         <p:txBody>
-          <a:bodyPr wrap="square" lIns="0" tIns="0" rIns="0" bIns="0" anchor="ctr">
+          <a:bodyPr wrap="square" anchor="ctr" lIns="0" rIns="0" tIns="0" bIns="0">
             <a:spAutoFit/>
           </a:bodyPr>
           <a:lstStyle/>
@@ -8925,7 +8439,6 @@
           <a:lstStyle/>
           <a:p>
             <a:pPr algn="ctr"/>
-            <a:endParaRPr/>
           </a:p>
         </p:txBody>
       </p:sp>
@@ -8946,7 +8459,7 @@
           <a:noFill/>
         </p:spPr>
         <p:txBody>
-          <a:bodyPr wrap="square" lIns="0" tIns="0" rIns="0" bIns="0" anchor="ctr">
+          <a:bodyPr wrap="square" anchor="ctr" lIns="0" rIns="0" tIns="0" bIns="0">
             <a:spAutoFit/>
           </a:bodyPr>
           <a:lstStyle/>
@@ -9017,7 +8530,6 @@
           <a:lstStyle/>
           <a:p>
             <a:pPr algn="ctr"/>
-            <a:endParaRPr/>
           </a:p>
         </p:txBody>
       </p:sp>
@@ -9038,7 +8550,7 @@
           <a:noFill/>
         </p:spPr>
         <p:txBody>
-          <a:bodyPr wrap="square" lIns="0" tIns="0" rIns="0" bIns="0" anchor="ctr">
+          <a:bodyPr wrap="square" anchor="ctr" lIns="0" rIns="0" tIns="0" bIns="0">
             <a:spAutoFit/>
           </a:bodyPr>
           <a:lstStyle/>
@@ -9109,7 +8621,6 @@
           <a:lstStyle/>
           <a:p>
             <a:pPr algn="ctr"/>
-            <a:endParaRPr/>
           </a:p>
         </p:txBody>
       </p:sp>
@@ -9130,7 +8641,7 @@
           <a:noFill/>
         </p:spPr>
         <p:txBody>
-          <a:bodyPr wrap="square" lIns="0" tIns="0" rIns="0" bIns="0" anchor="ctr">
+          <a:bodyPr wrap="square" anchor="ctr" lIns="0" rIns="0" tIns="0" bIns="0">
             <a:spAutoFit/>
           </a:bodyPr>
           <a:lstStyle/>
@@ -9201,7 +8712,6 @@
           <a:lstStyle/>
           <a:p>
             <a:pPr algn="ctr"/>
-            <a:endParaRPr/>
           </a:p>
         </p:txBody>
       </p:sp>
@@ -9222,7 +8732,7 @@
           <a:noFill/>
         </p:spPr>
         <p:txBody>
-          <a:bodyPr wrap="square" lIns="0" tIns="0" rIns="0" bIns="0" anchor="ctr">
+          <a:bodyPr wrap="square" anchor="ctr" lIns="0" rIns="0" tIns="0" bIns="0">
             <a:spAutoFit/>
           </a:bodyPr>
           <a:lstStyle/>
@@ -9293,7 +8803,6 @@
           <a:lstStyle/>
           <a:p>
             <a:pPr algn="ctr"/>
-            <a:endParaRPr/>
           </a:p>
         </p:txBody>
       </p:sp>
@@ -9314,7 +8823,7 @@
           <a:noFill/>
         </p:spPr>
         <p:txBody>
-          <a:bodyPr wrap="square" lIns="0" tIns="0" rIns="0" bIns="0" anchor="ctr">
+          <a:bodyPr wrap="square" anchor="ctr" lIns="0" rIns="0" tIns="0" bIns="0">
             <a:spAutoFit/>
           </a:bodyPr>
           <a:lstStyle/>
@@ -9361,7 +8870,7 @@
           <a:noFill/>
         </p:spPr>
         <p:txBody>
-          <a:bodyPr wrap="square" lIns="0" tIns="0" rIns="0" bIns="0" anchor="t">
+          <a:bodyPr wrap="square" anchor="t" lIns="0" rIns="0" tIns="0" bIns="0">
             <a:spAutoFit/>
           </a:bodyPr>
           <a:lstStyle/>
@@ -9429,7 +8938,6 @@
           <a:lstStyle/>
           <a:p>
             <a:pPr algn="ctr"/>
-            <a:endParaRPr/>
           </a:p>
         </p:txBody>
       </p:sp>
@@ -9474,7 +8982,6 @@
           <a:lstStyle/>
           <a:p>
             <a:pPr algn="ctr"/>
-            <a:endParaRPr/>
           </a:p>
         </p:txBody>
       </p:sp>
@@ -9495,7 +9002,7 @@
           <a:noFill/>
         </p:spPr>
         <p:txBody>
-          <a:bodyPr wrap="square" lIns="0" tIns="0" rIns="0" bIns="0" anchor="t">
+          <a:bodyPr wrap="square" anchor="t" lIns="0" rIns="0" tIns="0" bIns="0">
             <a:spAutoFit/>
           </a:bodyPr>
           <a:lstStyle/>
@@ -9606,7 +9113,6 @@
           <a:lstStyle/>
           <a:p>
             <a:pPr algn="ctr"/>
-            <a:endParaRPr/>
           </a:p>
         </p:txBody>
       </p:sp>
@@ -9651,7 +9157,6 @@
           <a:lstStyle/>
           <a:p>
             <a:pPr algn="ctr"/>
-            <a:endParaRPr/>
           </a:p>
         </p:txBody>
       </p:sp>
@@ -9672,7 +9177,7 @@
           <a:noFill/>
         </p:spPr>
         <p:txBody>
-          <a:bodyPr wrap="square" lIns="0" tIns="0" rIns="0" bIns="0" anchor="t">
+          <a:bodyPr wrap="square" anchor="t" lIns="0" rIns="0" tIns="0" bIns="0">
             <a:spAutoFit/>
           </a:bodyPr>
           <a:lstStyle/>
@@ -9783,7 +9288,6 @@
           <a:lstStyle/>
           <a:p>
             <a:pPr algn="ctr"/>
-            <a:endParaRPr/>
           </a:p>
         </p:txBody>
       </p:sp>
@@ -9828,7 +9332,6 @@
           <a:lstStyle/>
           <a:p>
             <a:pPr algn="ctr"/>
-            <a:endParaRPr/>
           </a:p>
         </p:txBody>
       </p:sp>
@@ -9849,7 +9352,7 @@
           <a:noFill/>
         </p:spPr>
         <p:txBody>
-          <a:bodyPr wrap="square" lIns="0" tIns="0" rIns="0" bIns="0" anchor="t">
+          <a:bodyPr wrap="square" anchor="t" lIns="0" rIns="0" tIns="0" bIns="0">
             <a:spAutoFit/>
           </a:bodyPr>
           <a:lstStyle/>
@@ -9936,7 +9439,7 @@
           <a:noFill/>
         </p:spPr>
         <p:txBody>
-          <a:bodyPr wrap="square" lIns="0" tIns="0" rIns="0" bIns="0" anchor="t">
+          <a:bodyPr wrap="square" anchor="t" lIns="0" rIns="0" tIns="0" bIns="0">
             <a:spAutoFit/>
           </a:bodyPr>
           <a:lstStyle/>
@@ -9995,7 +9498,6 @@
           <a:lstStyle/>
           <a:p>
             <a:pPr algn="ctr"/>
-            <a:endParaRPr/>
           </a:p>
         </p:txBody>
       </p:sp>
@@ -10016,7 +9518,7 @@
           <a:noFill/>
         </p:spPr>
         <p:txBody>
-          <a:bodyPr wrap="square" lIns="0" tIns="0" rIns="0" bIns="0" anchor="ctr">
+          <a:bodyPr wrap="square" anchor="ctr" lIns="0" rIns="0" tIns="0" bIns="0">
             <a:spAutoFit/>
           </a:bodyPr>
           <a:lstStyle/>
@@ -10075,7 +9577,6 @@
           <a:lstStyle/>
           <a:p>
             <a:pPr algn="ctr"/>
-            <a:endParaRPr/>
           </a:p>
         </p:txBody>
       </p:sp>
@@ -10096,7 +9597,7 @@
           <a:noFill/>
         </p:spPr>
         <p:txBody>
-          <a:bodyPr wrap="square" lIns="0" tIns="0" rIns="0" bIns="0" anchor="ctr">
+          <a:bodyPr wrap="square" anchor="ctr" lIns="0" rIns="0" tIns="0" bIns="0">
             <a:spAutoFit/>
           </a:bodyPr>
           <a:lstStyle/>
@@ -10155,7 +9656,6 @@
           <a:lstStyle/>
           <a:p>
             <a:pPr algn="ctr"/>
-            <a:endParaRPr/>
           </a:p>
         </p:txBody>
       </p:sp>
@@ -10176,7 +9676,7 @@
           <a:noFill/>
         </p:spPr>
         <p:txBody>
-          <a:bodyPr wrap="square" lIns="0" tIns="0" rIns="0" bIns="0" anchor="ctr">
+          <a:bodyPr wrap="square" anchor="ctr" lIns="0" rIns="0" tIns="0" bIns="0">
             <a:spAutoFit/>
           </a:bodyPr>
           <a:lstStyle/>
@@ -10211,7 +9711,7 @@
           <a:noFill/>
         </p:spPr>
         <p:txBody>
-          <a:bodyPr wrap="square" lIns="0" tIns="0" rIns="0" bIns="0" anchor="t">
+          <a:bodyPr wrap="square" anchor="t" lIns="0" rIns="0" tIns="0" bIns="0">
             <a:spAutoFit/>
           </a:bodyPr>
           <a:lstStyle/>
@@ -10270,7 +9770,6 @@
           <a:lstStyle/>
           <a:p>
             <a:pPr algn="ctr"/>
-            <a:endParaRPr/>
           </a:p>
         </p:txBody>
       </p:sp>
@@ -10291,7 +9790,7 @@
           <a:noFill/>
         </p:spPr>
         <p:txBody>
-          <a:bodyPr wrap="square" lIns="0" tIns="0" rIns="0" bIns="0" anchor="ctr">
+          <a:bodyPr wrap="square" anchor="ctr" lIns="0" rIns="0" tIns="0" bIns="0">
             <a:spAutoFit/>
           </a:bodyPr>
           <a:lstStyle/>
@@ -10326,7 +9825,7 @@
           <a:noFill/>
         </p:spPr>
         <p:txBody>
-          <a:bodyPr wrap="square" lIns="0" tIns="0" rIns="0" bIns="0" anchor="t">
+          <a:bodyPr wrap="square" anchor="t" lIns="0" rIns="0" tIns="0" bIns="0">
             <a:spAutoFit/>
           </a:bodyPr>
           <a:lstStyle/>
@@ -10385,7 +9884,6 @@
           <a:lstStyle/>
           <a:p>
             <a:pPr algn="ctr"/>
-            <a:endParaRPr/>
           </a:p>
         </p:txBody>
       </p:sp>
@@ -10406,7 +9904,7 @@
           <a:noFill/>
         </p:spPr>
         <p:txBody>
-          <a:bodyPr wrap="square" lIns="0" tIns="0" rIns="0" bIns="0" anchor="ctr">
+          <a:bodyPr wrap="square" anchor="ctr" lIns="0" rIns="0" tIns="0" bIns="0">
             <a:spAutoFit/>
           </a:bodyPr>
           <a:lstStyle/>
@@ -10433,7 +9931,7 @@
 </file>
 
 <file path=ppt/slides/slide6.xml><?xml version="1.0" encoding="utf-8"?>
-<p:sld xmlns:a="http://schemas.openxmlformats.org/drawingml/2006/main" xmlns:r="http://schemas.openxmlformats.org/officeDocument/2006/relationships" xmlns:p="http://schemas.openxmlformats.org/presentationml/2006/main">
+<p:sld xmlns:a="http://schemas.openxmlformats.org/drawingml/2006/main" xmlns:p="http://schemas.openxmlformats.org/presentationml/2006/main" xmlns:r="http://schemas.openxmlformats.org/officeDocument/2006/relationships">
   <p:cSld>
     <p:spTree>
       <p:nvGrpSpPr>
@@ -10441,14 +9939,7 @@
         <p:cNvGrpSpPr/>
         <p:nvPr/>
       </p:nvGrpSpPr>
-      <p:grpSpPr>
-        <a:xfrm>
-          <a:off x="0" y="0"/>
-          <a:ext cx="0" cy="0"/>
-          <a:chOff x="0" y="0"/>
-          <a:chExt cx="0" cy="0"/>
-        </a:xfrm>
-      </p:grpSpPr>
+      <p:grpSpPr/>
       <p:sp>
         <p:nvSpPr>
           <p:cNvPr id="2" name="Rectangle 1"/>
@@ -10490,7 +9981,6 @@
           <a:lstStyle/>
           <a:p>
             <a:pPr algn="ctr"/>
-            <a:endParaRPr/>
           </a:p>
         </p:txBody>
       </p:sp>
@@ -10511,7 +10001,7 @@
           <a:noFill/>
         </p:spPr>
         <p:txBody>
-          <a:bodyPr wrap="square" lIns="0" tIns="0" rIns="0" bIns="0" anchor="t">
+          <a:bodyPr wrap="square" anchor="t" lIns="0" rIns="0" tIns="0" bIns="0">
             <a:spAutoFit/>
           </a:bodyPr>
           <a:lstStyle/>
@@ -10546,7 +10036,7 @@
           <a:noFill/>
         </p:spPr>
         <p:txBody>
-          <a:bodyPr wrap="square" lIns="0" tIns="0" rIns="0" bIns="0" anchor="t">
+          <a:bodyPr wrap="square" anchor="t" lIns="0" rIns="0" tIns="0" bIns="0">
             <a:spAutoFit/>
           </a:bodyPr>
           <a:lstStyle/>
@@ -10581,7 +10071,7 @@
           <a:noFill/>
         </p:spPr>
         <p:txBody>
-          <a:bodyPr wrap="square" lIns="0" tIns="0" rIns="0" bIns="0" anchor="t">
+          <a:bodyPr wrap="square" anchor="t" lIns="0" rIns="0" tIns="0" bIns="0">
             <a:spAutoFit/>
           </a:bodyPr>
           <a:lstStyle/>
@@ -10640,7 +10130,6 @@
           <a:lstStyle/>
           <a:p>
             <a:pPr algn="ctr"/>
-            <a:endParaRPr/>
           </a:p>
         </p:txBody>
       </p:sp>
@@ -10685,7 +10174,6 @@
           <a:lstStyle/>
           <a:p>
             <a:pPr algn="ctr"/>
-            <a:endParaRPr/>
           </a:p>
         </p:txBody>
       </p:sp>
@@ -10706,7 +10194,7 @@
           <a:noFill/>
         </p:spPr>
         <p:txBody>
-          <a:bodyPr wrap="square" lIns="0" tIns="0" rIns="0" bIns="0" anchor="ctr">
+          <a:bodyPr wrap="square" anchor="ctr" lIns="0" rIns="0" tIns="0" bIns="0">
             <a:spAutoFit/>
           </a:bodyPr>
           <a:lstStyle/>
@@ -10777,7 +10265,6 @@
           <a:lstStyle/>
           <a:p>
             <a:pPr algn="ctr"/>
-            <a:endParaRPr/>
           </a:p>
         </p:txBody>
       </p:sp>
@@ -10822,7 +10309,6 @@
           <a:lstStyle/>
           <a:p>
             <a:pPr algn="ctr"/>
-            <a:endParaRPr/>
           </a:p>
         </p:txBody>
       </p:sp>
@@ -10843,7 +10329,7 @@
           <a:noFill/>
         </p:spPr>
         <p:txBody>
-          <a:bodyPr wrap="square" lIns="0" tIns="0" rIns="0" bIns="0" anchor="ctr">
+          <a:bodyPr wrap="square" anchor="ctr" lIns="0" rIns="0" tIns="0" bIns="0">
             <a:spAutoFit/>
           </a:bodyPr>
           <a:lstStyle/>
@@ -10914,7 +10400,6 @@
           <a:lstStyle/>
           <a:p>
             <a:pPr algn="ctr"/>
-            <a:endParaRPr/>
           </a:p>
         </p:txBody>
       </p:sp>
@@ -10935,7 +10420,7 @@
           <a:noFill/>
         </p:spPr>
         <p:txBody>
-          <a:bodyPr wrap="square" lIns="0" tIns="0" rIns="0" bIns="0" anchor="t">
+          <a:bodyPr wrap="square" anchor="t" lIns="0" rIns="0" tIns="0" bIns="0">
             <a:spAutoFit/>
           </a:bodyPr>
           <a:lstStyle/>
@@ -11006,7 +10491,7 @@
           <a:noFill/>
         </p:spPr>
         <p:txBody>
-          <a:bodyPr wrap="square" lIns="0" tIns="0" rIns="0" bIns="0" anchor="t">
+          <a:bodyPr wrap="square" anchor="t" lIns="0" rIns="0" tIns="0" bIns="0">
             <a:spAutoFit/>
           </a:bodyPr>
           <a:lstStyle/>
@@ -11071,7 +10556,7 @@
 </file>
 
 <file path=ppt/slides/slide7.xml><?xml version="1.0" encoding="utf-8"?>
-<p:sld xmlns:a="http://schemas.openxmlformats.org/drawingml/2006/main" xmlns:r="http://schemas.openxmlformats.org/officeDocument/2006/relationships" xmlns:p="http://schemas.openxmlformats.org/presentationml/2006/main">
+<p:sld xmlns:a="http://schemas.openxmlformats.org/drawingml/2006/main" xmlns:p="http://schemas.openxmlformats.org/presentationml/2006/main" xmlns:r="http://schemas.openxmlformats.org/officeDocument/2006/relationships">
   <p:cSld>
     <p:spTree>
       <p:nvGrpSpPr>
@@ -11079,14 +10564,7 @@
         <p:cNvGrpSpPr/>
         <p:nvPr/>
       </p:nvGrpSpPr>
-      <p:grpSpPr>
-        <a:xfrm>
-          <a:off x="0" y="0"/>
-          <a:ext cx="0" cy="0"/>
-          <a:chOff x="0" y="0"/>
-          <a:chExt cx="0" cy="0"/>
-        </a:xfrm>
-      </p:grpSpPr>
+      <p:grpSpPr/>
       <p:sp>
         <p:nvSpPr>
           <p:cNvPr id="2" name="Rectangle 1"/>
@@ -11128,7 +10606,6 @@
           <a:lstStyle/>
           <a:p>
             <a:pPr algn="ctr"/>
-            <a:endParaRPr/>
           </a:p>
         </p:txBody>
       </p:sp>
@@ -11149,7 +10626,7 @@
           <a:noFill/>
         </p:spPr>
         <p:txBody>
-          <a:bodyPr wrap="square" lIns="0" tIns="0" rIns="0" bIns="0" anchor="t">
+          <a:bodyPr wrap="square" anchor="t" lIns="0" rIns="0" tIns="0" bIns="0">
             <a:spAutoFit/>
           </a:bodyPr>
           <a:lstStyle/>
@@ -11184,7 +10661,7 @@
           <a:noFill/>
         </p:spPr>
         <p:txBody>
-          <a:bodyPr wrap="square" lIns="0" tIns="0" rIns="0" bIns="0" anchor="t">
+          <a:bodyPr wrap="square" anchor="t" lIns="0" rIns="0" tIns="0" bIns="0">
             <a:spAutoFit/>
           </a:bodyPr>
           <a:lstStyle/>
@@ -11219,7 +10696,7 @@
           <a:noFill/>
         </p:spPr>
         <p:txBody>
-          <a:bodyPr wrap="square" lIns="0" tIns="0" rIns="0" bIns="0" anchor="t">
+          <a:bodyPr wrap="square" anchor="t" lIns="0" rIns="0" tIns="0" bIns="0">
             <a:spAutoFit/>
           </a:bodyPr>
           <a:lstStyle/>
@@ -11232,7 +10709,7 @@
                 </a:solidFill>
                 <a:latin typeface="Segoe UI"/>
               </a:rPr>
-              <a:t>Tre strade per non pagare clang a ogni modello</a:t>
+              <a:t>Compila offline una volta, a runtime solo load</a:t>
             </a:r>
           </a:p>
         </p:txBody>
@@ -11246,7 +10723,7 @@
         <p:spPr>
           <a:xfrm>
             <a:off x="640080" y="1874519"/>
-            <a:ext cx="3611880" cy="2331720"/>
+            <a:ext cx="5349240" cy="2331720"/>
           </a:xfrm>
           <a:prstGeom prst="roundRect">
             <a:avLst/>
@@ -11278,7 +10755,6 @@
           <a:lstStyle/>
           <a:p>
             <a:pPr algn="ctr"/>
-            <a:endParaRPr/>
           </a:p>
         </p:txBody>
       </p:sp>
@@ -11291,7 +10767,7 @@
         <p:spPr>
           <a:xfrm>
             <a:off x="731519" y="1920239"/>
-            <a:ext cx="3429000" cy="64008"/>
+            <a:ext cx="5166359" cy="64008"/>
           </a:xfrm>
           <a:prstGeom prst="roundRect">
             <a:avLst/>
@@ -11323,7 +10799,6 @@
           <a:lstStyle/>
           <a:p>
             <a:pPr algn="ctr"/>
-            <a:endParaRPr/>
           </a:p>
         </p:txBody>
       </p:sp>
@@ -11336,7 +10811,7 @@
         <p:spPr>
           <a:xfrm>
             <a:off x="713231" y="1929384"/>
-            <a:ext cx="3465576" cy="2221991"/>
+            <a:ext cx="5202936" cy="2221991"/>
           </a:xfrm>
           <a:prstGeom prst="rect">
             <a:avLst/>
@@ -11344,14 +10819,14 @@
           <a:noFill/>
         </p:spPr>
         <p:txBody>
-          <a:bodyPr wrap="square" lIns="0" tIns="0" rIns="0" bIns="0" anchor="ctr">
+          <a:bodyPr wrap="square" anchor="ctr" lIns="0" rIns="0" tIns="0" bIns="0">
             <a:spAutoFit/>
           </a:bodyPr>
           <a:lstStyle/>
           <a:p>
             <a:pPr algn="l"/>
             <a:r>
-              <a:rPr sz="1300" b="1">
+              <a:rPr sz="1350" b="1">
                 <a:solidFill>
                   <a:srgbClr val="F85149"/>
                 </a:solidFill>
@@ -11363,19 +10838,19 @@
           <a:p>
             <a:pPr algn="l"/>
             <a:r>
+              <a:rPr sz="1200" b="0">
+                <a:solidFill>
+                  <a:srgbClr val="E6EDF3"/>
+                </a:solidFill>
+                <a:latin typeface="Segoe UI"/>
+              </a:rPr>
+              <a:t>I pesi sono literal nel C. BCC = clang a runtime: ogni modello nuovo o modificato ricompila tutto da zero (~1660 ms).</a:t>
+            </a:r>
+          </a:p>
+          <a:p>
+            <a:pPr algn="l"/>
+            <a:r>
               <a:rPr sz="1150" b="0">
-                <a:solidFill>
-                  <a:srgbClr val="E6EDF3"/>
-                </a:solidFill>
-                <a:latin typeface="Segoe UI"/>
-              </a:rPr>
-              <a:t>Pesi literal nel C. BCC = clang a runtime: ogni modello ricompila tutto.</a:t>
-            </a:r>
-          </a:p>
-          <a:p>
-            <a:pPr algn="l"/>
-            <a:r>
-              <a:rPr sz="1100" b="0">
                 <a:solidFill>
                   <a:srgbClr val="F85149"/>
                 </a:solidFill>
@@ -11394,8 +10869,8 @@
         </p:nvSpPr>
         <p:spPr>
           <a:xfrm>
-            <a:off x="4389120" y="1874519"/>
-            <a:ext cx="3611880" cy="2331720"/>
+            <a:off x="6199632" y="1874519"/>
+            <a:ext cx="5349240" cy="2331720"/>
           </a:xfrm>
           <a:prstGeom prst="roundRect">
             <a:avLst/>
@@ -11427,7 +10902,6 @@
           <a:lstStyle/>
           <a:p>
             <a:pPr algn="ctr"/>
-            <a:endParaRPr/>
           </a:p>
         </p:txBody>
       </p:sp>
@@ -11439,157 +10913,8 @@
         </p:nvSpPr>
         <p:spPr>
           <a:xfrm>
-            <a:off x="4480559" y="1920239"/>
-            <a:ext cx="3429000" cy="64008"/>
-          </a:xfrm>
-          <a:prstGeom prst="roundRect">
-            <a:avLst/>
-          </a:prstGeom>
-          <a:solidFill>
-            <a:srgbClr val="F5A623"/>
-          </a:solidFill>
-          <a:ln>
-            <a:noFill/>
-          </a:ln>
-          <a:effectLst/>
-        </p:spPr>
-        <p:style>
-          <a:lnRef idx="1">
-            <a:schemeClr val="accent1"/>
-          </a:lnRef>
-          <a:fillRef idx="3">
-            <a:schemeClr val="accent1"/>
-          </a:fillRef>
-          <a:effectRef idx="2">
-            <a:schemeClr val="accent1"/>
-          </a:effectRef>
-          <a:fontRef idx="minor">
-            <a:schemeClr val="lt1"/>
-          </a:fontRef>
-        </p:style>
-        <p:txBody>
-          <a:bodyPr rtlCol="0" anchor="ctr"/>
-          <a:lstStyle/>
-          <a:p>
-            <a:pPr algn="ctr"/>
-            <a:endParaRPr/>
-          </a:p>
-        </p:txBody>
-      </p:sp>
-      <p:sp>
-        <p:nvSpPr>
-          <p:cNvPr id="11" name="TextBox 10"/>
-          <p:cNvSpPr txBox="1"/>
-          <p:nvPr/>
-        </p:nvSpPr>
-        <p:spPr>
-          <a:xfrm>
-            <a:off x="4462272" y="1929384"/>
-            <a:ext cx="3465576" cy="2221991"/>
-          </a:xfrm>
-          <a:prstGeom prst="rect">
-            <a:avLst/>
-          </a:prstGeom>
-          <a:noFill/>
-        </p:spPr>
-        <p:txBody>
-          <a:bodyPr wrap="square" lIns="0" tIns="0" rIns="0" bIns="0" anchor="ctr">
-            <a:spAutoFit/>
-          </a:bodyPr>
-          <a:lstStyle/>
-          <a:p>
-            <a:pPr algn="l"/>
-            <a:r>
-              <a:rPr sz="1300" b="1">
-                <a:solidFill>
-                  <a:srgbClr val="F5A623"/>
-                </a:solidFill>
-                <a:latin typeface="Segoe UI"/>
-              </a:rPr>
-              <a:t>AOT + pesi in .rodata</a:t>
-            </a:r>
-          </a:p>
-          <a:p>
-            <a:pPr algn="l"/>
-            <a:r>
-              <a:rPr sz="1150" b="0">
-                <a:solidFill>
-                  <a:srgbClr val="E6EDF3"/>
-                </a:solidFill>
-                <a:latin typeface="Segoe UI"/>
-              </a:rPr>
-              <a:t>Compili il .o una volta; nuovo modello = inietti i pesi in .rodata (frozen) e ricarichi.</a:t>
-            </a:r>
-          </a:p>
-          <a:p>
-            <a:pPr algn="l"/>
-            <a:r>
-              <a:rPr sz="1100" b="0">
-                <a:solidFill>
-                  <a:srgbClr val="F5A623"/>
-                </a:solidFill>
-                <a:latin typeface="Segoe UI"/>
-              </a:rPr>
-              <a:t>zero clang, ma perde perf</a:t>
-            </a:r>
-          </a:p>
-        </p:txBody>
-      </p:sp>
-      <p:sp>
-        <p:nvSpPr>
-          <p:cNvPr id="12" name="Rounded Rectangle 11"/>
-          <p:cNvSpPr/>
-          <p:nvPr/>
-        </p:nvSpPr>
-        <p:spPr>
-          <a:xfrm>
-            <a:off x="8138160" y="1874519"/>
-            <a:ext cx="3410712" cy="2331720"/>
-          </a:xfrm>
-          <a:prstGeom prst="roundRect">
-            <a:avLst/>
-          </a:prstGeom>
-          <a:solidFill>
-            <a:srgbClr val="1B222E"/>
-          </a:solidFill>
-          <a:ln>
-            <a:noFill/>
-          </a:ln>
-          <a:effectLst/>
-        </p:spPr>
-        <p:style>
-          <a:lnRef idx="1">
-            <a:schemeClr val="accent1"/>
-          </a:lnRef>
-          <a:fillRef idx="3">
-            <a:schemeClr val="accent1"/>
-          </a:fillRef>
-          <a:effectRef idx="2">
-            <a:schemeClr val="accent1"/>
-          </a:effectRef>
-          <a:fontRef idx="minor">
-            <a:schemeClr val="lt1"/>
-          </a:fontRef>
-        </p:style>
-        <p:txBody>
-          <a:bodyPr rtlCol="0" anchor="ctr"/>
-          <a:lstStyle/>
-          <a:p>
-            <a:pPr algn="ctr"/>
-            <a:endParaRPr/>
-          </a:p>
-        </p:txBody>
-      </p:sp>
-      <p:sp>
-        <p:nvSpPr>
-          <p:cNvPr id="13" name="Rounded Rectangle 12"/>
-          <p:cNvSpPr/>
-          <p:nvPr/>
-        </p:nvSpPr>
-        <p:spPr>
-          <a:xfrm>
-            <a:off x="8229600" y="1920239"/>
-            <a:ext cx="3227832" cy="64008"/>
+            <a:off x="6291072" y="1920239"/>
+            <a:ext cx="5166359" cy="64008"/>
           </a:xfrm>
           <a:prstGeom prst="roundRect">
             <a:avLst/>
@@ -11621,20 +10946,19 @@
           <a:lstStyle/>
           <a:p>
             <a:pPr algn="ctr"/>
-            <a:endParaRPr/>
-          </a:p>
-        </p:txBody>
-      </p:sp>
-      <p:sp>
-        <p:nvSpPr>
-          <p:cNvPr id="14" name="TextBox 13"/>
+          </a:p>
+        </p:txBody>
+      </p:sp>
+      <p:sp>
+        <p:nvSpPr>
+          <p:cNvPr id="11" name="TextBox 10"/>
           <p:cNvSpPr txBox="1"/>
           <p:nvPr/>
         </p:nvSpPr>
         <p:spPr>
           <a:xfrm>
-            <a:off x="8211312" y="1929384"/>
-            <a:ext cx="3264408" cy="2221991"/>
+            <a:off x="6272784" y="1929384"/>
+            <a:ext cx="5202936" cy="2221991"/>
           </a:xfrm>
           <a:prstGeom prst="rect">
             <a:avLst/>
@@ -11642,14 +10966,14 @@
           <a:noFill/>
         </p:spPr>
         <p:txBody>
-          <a:bodyPr wrap="square" lIns="0" tIns="0" rIns="0" bIns="0" anchor="ctr">
+          <a:bodyPr wrap="square" anchor="ctr" lIns="0" rIns="0" tIns="0" bIns="0">
             <a:spAutoFit/>
           </a:bodyPr>
           <a:lstStyle/>
           <a:p>
             <a:pPr algn="l"/>
             <a:r>
-              <a:rPr sz="1300" b="1">
+              <a:rPr sz="1350" b="1">
                 <a:solidFill>
                   <a:srgbClr val="3FB950"/>
                 </a:solidFill>
@@ -11661,32 +10985,32 @@
           <a:p>
             <a:pPr algn="l"/>
             <a:r>
+              <a:rPr sz="1200" b="0">
+                <a:solidFill>
+                  <a:srgbClr val="E6EDF3"/>
+                </a:solidFill>
+                <a:latin typeface="Segoe UI"/>
+              </a:rPr>
+              <a:t>Compili il .o offline, una volta, con i pesi ancora literal. A runtime il nodo fa solo open+load: zero clang.</a:t>
+            </a:r>
+          </a:p>
+          <a:p>
+            <a:pPr algn="l"/>
+            <a:r>
               <a:rPr sz="1150" b="0">
                 <a:solidFill>
-                  <a:srgbClr val="E6EDF3"/>
+                  <a:srgbClr val="3FB950"/>
                 </a:solidFill>
                 <a:latin typeface="Segoe UI"/>
               </a:rPr>
-              <a:t>Compili offline il .o con i pesi literal; a runtime solo load. Clang -O2 già applicato.</a:t>
-            </a:r>
-          </a:p>
-          <a:p>
-            <a:pPr algn="l"/>
-            <a:r>
-              <a:rPr sz="1100" b="0">
-                <a:solidFill>
-                  <a:srgbClr val="3FB950"/>
-                </a:solidFill>
-                <a:latin typeface="Segoe UI"/>
-              </a:rPr>
-              <a:t>zero clang E perf massima</a:t>
-            </a:r>
-          </a:p>
-        </p:txBody>
-      </p:sp>
-      <p:sp>
-        <p:nvSpPr>
-          <p:cNvPr id="15" name="Rounded Rectangle 14"/>
+              <a:t>zero clang E perf massima preservata</a:t>
+            </a:r>
+          </a:p>
+        </p:txBody>
+      </p:sp>
+      <p:sp>
+        <p:nvSpPr>
+          <p:cNvPr id="12" name="Rounded Rectangle 11"/>
           <p:cNvSpPr/>
           <p:nvPr/>
         </p:nvSpPr>
@@ -11725,13 +11049,12 @@
           <a:lstStyle/>
           <a:p>
             <a:pPr algn="ctr"/>
-            <a:endParaRPr/>
-          </a:p>
-        </p:txBody>
-      </p:sp>
-      <p:sp>
-        <p:nvSpPr>
-          <p:cNvPr id="16" name="TextBox 15"/>
+          </a:p>
+        </p:txBody>
+      </p:sp>
+      <p:sp>
+        <p:nvSpPr>
+          <p:cNvPr id="13" name="TextBox 12"/>
           <p:cNvSpPr txBox="1"/>
           <p:nvPr/>
         </p:nvSpPr>
@@ -11746,7 +11069,7 @@
           <a:noFill/>
         </p:spPr>
         <p:txBody>
-          <a:bodyPr wrap="square" lIns="0" tIns="0" rIns="0" bIns="0" anchor="ctr">
+          <a:bodyPr wrap="square" anchor="ctr" lIns="0" rIns="0" tIns="0" bIns="0">
             <a:spAutoFit/>
           </a:bodyPr>
           <a:lstStyle/>
@@ -11759,7 +11082,7 @@
                 </a:solidFill>
                 <a:latin typeface="Segoe UI"/>
               </a:rPr>
-              <a:t>Perché .rodata perde e literal no: </a:t>
+              <a:t>Perché la perf resta massima: </a:t>
             </a:r>
             <a:r>
               <a:rPr sz="1200" b="0">
@@ -11768,14 +11091,14 @@
                 </a:solidFill>
                 <a:latin typeface="Segoe UI"/>
               </a:rPr>
-              <a:t>clang riduce ogni peso (x·0 sparisce, x·8 → shift). In .rodata i pesi sono un LOAD generico a runtime → moltiplicazione piena. Nel .o literal la riduzione è già cotta nel bytecode.</a:t>
-            </a:r>
-          </a:p>
-        </p:txBody>
-      </p:sp>
-      <p:sp>
-        <p:nvSpPr>
-          <p:cNvPr id="17" name="TextBox 16"/>
+              <a:t>i pesi restano literal, quindi clang -O2 ha già ridotto ogni moltiplicazione (x·0 sparisce, x·8 → shift) dentro il bytecode del .o. A runtime nessuna ricompilazione.</a:t>
+            </a:r>
+          </a:p>
+        </p:txBody>
+      </p:sp>
+      <p:sp>
+        <p:nvSpPr>
+          <p:cNvPr id="14" name="TextBox 13"/>
           <p:cNvSpPr txBox="1"/>
           <p:nvPr/>
         </p:nvSpPr>
@@ -11790,7 +11113,7 @@
           <a:noFill/>
         </p:spPr>
         <p:txBody>
-          <a:bodyPr wrap="square" lIns="0" tIns="0" rIns="0" bIns="0" anchor="t">
+          <a:bodyPr wrap="square" anchor="t" lIns="0" rIns="0" tIns="0" bIns="0">
             <a:spAutoFit/>
           </a:bodyPr>
           <a:lstStyle/>
@@ -11816,7 +11139,7 @@
                 </a:solidFill>
                 <a:latin typeface="Segoe UI"/>
               </a:rPr>
-              <a:t>  (l'ipotesi dell'hardcoded): precompili offline tutte le architetture → inserire un modello = solo load.</a:t>
+              <a:t>  (l'ipotesi dell'hardcoded): precompili offline le architetture → inserire un modello = solo load (~ms).</a:t>
             </a:r>
           </a:p>
         </p:txBody>
@@ -11830,7 +11153,7 @@
 </file>
 
 <file path=ppt/slides/slide8.xml><?xml version="1.0" encoding="utf-8"?>
-<p:sld xmlns:a="http://schemas.openxmlformats.org/drawingml/2006/main" xmlns:r="http://schemas.openxmlformats.org/officeDocument/2006/relationships" xmlns:p="http://schemas.openxmlformats.org/presentationml/2006/main">
+<p:sld xmlns:a="http://schemas.openxmlformats.org/drawingml/2006/main" xmlns:p="http://schemas.openxmlformats.org/presentationml/2006/main" xmlns:r="http://schemas.openxmlformats.org/officeDocument/2006/relationships">
   <p:cSld>
     <p:spTree>
       <p:nvGrpSpPr>
@@ -11838,14 +11161,7 @@
         <p:cNvGrpSpPr/>
         <p:nvPr/>
       </p:nvGrpSpPr>
-      <p:grpSpPr>
-        <a:xfrm>
-          <a:off x="0" y="0"/>
-          <a:ext cx="0" cy="0"/>
-          <a:chOff x="0" y="0"/>
-          <a:chExt cx="0" cy="0"/>
-        </a:xfrm>
-      </p:grpSpPr>
+      <p:grpSpPr/>
       <p:sp>
         <p:nvSpPr>
           <p:cNvPr id="2" name="Rectangle 1"/>
@@ -11887,7 +11203,6 @@
           <a:lstStyle/>
           <a:p>
             <a:pPr algn="ctr"/>
-            <a:endParaRPr/>
           </a:p>
         </p:txBody>
       </p:sp>
@@ -11908,7 +11223,7 @@
           <a:noFill/>
         </p:spPr>
         <p:txBody>
-          <a:bodyPr wrap="square" lIns="0" tIns="0" rIns="0" bIns="0" anchor="t">
+          <a:bodyPr wrap="square" anchor="t" lIns="0" rIns="0" tIns="0" bIns="0">
             <a:spAutoFit/>
           </a:bodyPr>
           <a:lstStyle/>
@@ -11943,7 +11258,7 @@
           <a:noFill/>
         </p:spPr>
         <p:txBody>
-          <a:bodyPr wrap="square" lIns="0" tIns="0" rIns="0" bIns="0" anchor="t">
+          <a:bodyPr wrap="square" anchor="t" lIns="0" rIns="0" tIns="0" bIns="0">
             <a:spAutoFit/>
           </a:bodyPr>
           <a:lstStyle/>
@@ -11978,7 +11293,7 @@
           <a:noFill/>
         </p:spPr>
         <p:txBody>
-          <a:bodyPr wrap="square" lIns="0" tIns="0" rIns="0" bIns="0" anchor="t">
+          <a:bodyPr wrap="square" anchor="t" lIns="0" rIns="0" tIns="0" bIns="0">
             <a:spAutoFit/>
           </a:bodyPr>
           <a:lstStyle/>
@@ -11991,7 +11306,7 @@
                 </a:solidFill>
                 <a:latin typeface="Segoe UI"/>
               </a:rPr>
-              <a:t>Compila offline una volta, a runtime solo load — numeri reali</a:t>
+              <a:t>Stessa topologia del BCC (dispatcher+tail-call+doppio parse) — numeri reali</a:t>
             </a:r>
           </a:p>
         </p:txBody>
@@ -12035,7 +11350,6 @@
           <a:lstStyle/>
           <a:p>
             <a:pPr algn="ctr"/>
-            <a:endParaRPr/>
           </a:p>
         </p:txBody>
       </p:sp>
@@ -12056,7 +11370,7 @@
           <a:noFill/>
         </p:spPr>
         <p:txBody>
-          <a:bodyPr wrap="square" lIns="0" tIns="0" rIns="0" bIns="0" anchor="t">
+          <a:bodyPr wrap="square" anchor="t" lIns="0" rIns="0" tIns="0" bIns="0">
             <a:spAutoFit/>
           </a:bodyPr>
           <a:lstStyle/>
@@ -12115,7 +11429,6 @@
           <a:lstStyle/>
           <a:p>
             <a:pPr algn="ctr"/>
-            <a:endParaRPr/>
           </a:p>
         </p:txBody>
       </p:sp>
@@ -12160,7 +11473,6 @@
           <a:lstStyle/>
           <a:p>
             <a:pPr algn="ctr"/>
-            <a:endParaRPr/>
           </a:p>
         </p:txBody>
       </p:sp>
@@ -12181,7 +11493,7 @@
           <a:noFill/>
         </p:spPr>
         <p:txBody>
-          <a:bodyPr wrap="square" lIns="0" tIns="0" rIns="0" bIns="0" anchor="ctr">
+          <a:bodyPr wrap="square" anchor="ctr" lIns="0" rIns="0" tIns="0" bIns="0">
             <a:spAutoFit/>
           </a:bodyPr>
           <a:lstStyle/>
@@ -12228,7 +11540,7 @@
           <a:noFill/>
         </p:spPr>
         <p:txBody>
-          <a:bodyPr wrap="square" lIns="0" tIns="0" rIns="0" bIns="0" anchor="t">
+          <a:bodyPr wrap="square" anchor="t" lIns="0" rIns="0" tIns="0" bIns="0">
             <a:spAutoFit/>
           </a:bodyPr>
           <a:lstStyle/>
@@ -12287,7 +11599,6 @@
           <a:lstStyle/>
           <a:p>
             <a:pPr algn="ctr"/>
-            <a:endParaRPr/>
           </a:p>
         </p:txBody>
       </p:sp>
@@ -12332,7 +11643,6 @@
           <a:lstStyle/>
           <a:p>
             <a:pPr algn="ctr"/>
-            <a:endParaRPr/>
           </a:p>
         </p:txBody>
       </p:sp>
@@ -12353,7 +11663,7 @@
           <a:noFill/>
         </p:spPr>
         <p:txBody>
-          <a:bodyPr wrap="square" lIns="0" tIns="0" rIns="0" bIns="0" anchor="ctr">
+          <a:bodyPr wrap="square" anchor="ctr" lIns="0" rIns="0" tIns="0" bIns="0">
             <a:spAutoFit/>
           </a:bodyPr>
           <a:lstStyle/>
@@ -12422,7 +11732,6 @@
           <a:lstStyle/>
           <a:p>
             <a:pPr algn="ctr"/>
-            <a:endParaRPr/>
           </a:p>
         </p:txBody>
       </p:sp>
@@ -12443,7 +11752,7 @@
           <a:noFill/>
         </p:spPr>
         <p:txBody>
-          <a:bodyPr wrap="square" lIns="0" tIns="0" rIns="0" bIns="0" anchor="t">
+          <a:bodyPr wrap="square" anchor="t" lIns="0" rIns="0" tIns="0" bIns="0">
             <a:spAutoFit/>
           </a:bodyPr>
           <a:lstStyle/>
@@ -12502,7 +11811,6 @@
           <a:lstStyle/>
           <a:p>
             <a:pPr algn="ctr"/>
-            <a:endParaRPr/>
           </a:p>
         </p:txBody>
       </p:sp>
@@ -12547,7 +11855,6 @@
           <a:lstStyle/>
           <a:p>
             <a:pPr algn="ctr"/>
-            <a:endParaRPr/>
           </a:p>
         </p:txBody>
       </p:sp>
@@ -12568,7 +11875,7 @@
           <a:noFill/>
         </p:spPr>
         <p:txBody>
-          <a:bodyPr wrap="square" lIns="0" tIns="0" rIns="0" bIns="0" anchor="ctr">
+          <a:bodyPr wrap="square" anchor="ctr" lIns="0" rIns="0" tIns="0" bIns="0">
             <a:spAutoFit/>
           </a:bodyPr>
           <a:lstStyle/>
@@ -12615,7 +11922,7 @@
           <a:noFill/>
         </p:spPr>
         <p:txBody>
-          <a:bodyPr wrap="square" lIns="0" tIns="0" rIns="0" bIns="0" anchor="t">
+          <a:bodyPr wrap="square" anchor="t" lIns="0" rIns="0" tIns="0" bIns="0">
             <a:spAutoFit/>
           </a:bodyPr>
           <a:lstStyle/>
@@ -12674,7 +11981,6 @@
           <a:lstStyle/>
           <a:p>
             <a:pPr algn="ctr"/>
-            <a:endParaRPr/>
           </a:p>
         </p:txBody>
       </p:sp>
@@ -12719,7 +12025,6 @@
           <a:lstStyle/>
           <a:p>
             <a:pPr algn="ctr"/>
-            <a:endParaRPr/>
           </a:p>
         </p:txBody>
       </p:sp>
@@ -12740,7 +12045,7 @@
           <a:noFill/>
         </p:spPr>
         <p:txBody>
-          <a:bodyPr wrap="square" lIns="0" tIns="0" rIns="0" bIns="0" anchor="ctr">
+          <a:bodyPr wrap="square" anchor="ctr" lIns="0" rIns="0" tIns="0" bIns="0">
             <a:spAutoFit/>
           </a:bodyPr>
           <a:lstStyle/>
@@ -12811,7 +12116,6 @@
           <a:lstStyle/>
           <a:p>
             <a:pPr algn="ctr"/>
-            <a:endParaRPr/>
           </a:p>
         </p:txBody>
       </p:sp>
@@ -12856,7 +12160,6 @@
           <a:lstStyle/>
           <a:p>
             <a:pPr algn="ctr"/>
-            <a:endParaRPr/>
           </a:p>
         </p:txBody>
       </p:sp>
@@ -12877,7 +12180,7 @@
           <a:noFill/>
         </p:spPr>
         <p:txBody>
-          <a:bodyPr wrap="square" lIns="0" tIns="0" rIns="0" bIns="0" anchor="t">
+          <a:bodyPr wrap="square" anchor="t" lIns="0" rIns="0" tIns="0" bIns="0">
             <a:spAutoFit/>
           </a:bodyPr>
           <a:lstStyle/>
@@ -12912,7 +12215,7 @@
           <a:noFill/>
         </p:spPr>
         <p:txBody>
-          <a:bodyPr wrap="square" lIns="0" tIns="0" rIns="0" bIns="0" anchor="t">
+          <a:bodyPr wrap="square" anchor="t" lIns="0" rIns="0" tIns="0" bIns="0">
             <a:spAutoFit/>
           </a:bodyPr>
           <a:lstStyle/>
@@ -12938,7 +12241,7 @@
                 </a:solidFill>
                 <a:latin typeface="Consolas"/>
               </a:rPr>
-              <a:t>   341 ms</a:t>
+              <a:t>   555 ms</a:t>
             </a:r>
           </a:p>
           <a:p>
@@ -12979,7 +12282,7 @@
                 </a:solidFill>
                 <a:latin typeface="Consolas"/>
               </a:rPr>
-              <a:t>               0.35 ms</a:t>
+              <a:t>               0.58 ms</a:t>
             </a:r>
           </a:p>
           <a:p>
@@ -13004,7 +12307,7 @@
                 </a:solidFill>
                 <a:latin typeface="Consolas"/>
               </a:rPr>
-              <a:t>       5.81 ms</a:t>
+              <a:t>       4.89 ms</a:t>
             </a:r>
           </a:p>
           <a:p>
@@ -13029,7 +12332,7 @@
                 </a:solidFill>
                 <a:latin typeface="Consolas"/>
               </a:rPr>
-              <a:t>    6.16 ms</a:t>
+              <a:t>    5.47 ms</a:t>
             </a:r>
           </a:p>
         </p:txBody>
@@ -13075,7 +12378,6 @@
           <a:lstStyle/>
           <a:p>
             <a:pPr algn="ctr"/>
-            <a:endParaRPr/>
           </a:p>
         </p:txBody>
       </p:sp>
@@ -13120,7 +12422,6 @@
           <a:lstStyle/>
           <a:p>
             <a:pPr algn="ctr"/>
-            <a:endParaRPr/>
           </a:p>
         </p:txBody>
       </p:sp>
@@ -13141,7 +12442,7 @@
           <a:noFill/>
         </p:spPr>
         <p:txBody>
-          <a:bodyPr wrap="square" lIns="0" tIns="0" rIns="0" bIns="0" anchor="t">
+          <a:bodyPr wrap="square" anchor="t" lIns="0" rIns="0" tIns="0" bIns="0">
             <a:spAutoFit/>
           </a:bodyPr>
           <a:lstStyle/>
@@ -13154,7 +12455,7 @@
                 </a:solidFill>
                 <a:latin typeface="Segoe UI"/>
               </a:rPr>
-              <a:t>Performance (full-path, 1e6 reps)</a:t>
+              <a:t>Performance — arch-fedele vs BCC</a:t>
             </a:r>
           </a:p>
         </p:txBody>
@@ -13167,7 +12468,7 @@
         </p:nvSpPr>
         <p:spPr>
           <a:xfrm>
-            <a:off x="6428232" y="4069080"/>
+            <a:off x="6428232" y="4041648"/>
             <a:ext cx="4892040" cy="1737360"/>
           </a:xfrm>
           <a:prstGeom prst="rect">
@@ -13176,7 +12477,7 @@
           <a:noFill/>
         </p:spPr>
         <p:txBody>
-          <a:bodyPr wrap="square" lIns="0" tIns="0" rIns="0" bIns="0" anchor="t">
+          <a:bodyPr wrap="square" anchor="t" lIns="0" rIns="0" tIns="0" bIns="0">
             <a:spAutoFit/>
           </a:bodyPr>
           <a:lstStyle/>
@@ -13187,40 +12488,13 @@
               </a:spcAft>
             </a:pPr>
             <a:r>
-              <a:rPr sz="1150" b="0" dirty="0" err="1">
+              <a:rPr sz="1100" b="1">
                 <a:solidFill>
                   <a:srgbClr val="8B949E"/>
                 </a:solidFill>
                 <a:latin typeface="Consolas"/>
               </a:rPr>
-              <a:t>xlated</a:t>
-            </a:r>
-            <a:r>
-              <a:rPr sz="1150" b="0" dirty="0">
-                <a:solidFill>
-                  <a:srgbClr val="8B949E"/>
-                </a:solidFill>
-                <a:latin typeface="Consolas"/>
-              </a:rPr>
-              <a:t> </a:t>
-            </a:r>
-            <a:r>
-              <a:rPr sz="1150" b="0" dirty="0" err="1">
-                <a:solidFill>
-                  <a:srgbClr val="8B949E"/>
-                </a:solidFill>
-                <a:latin typeface="Consolas"/>
-              </a:rPr>
-              <a:t>insn</a:t>
-            </a:r>
-            <a:r>
-              <a:rPr sz="1250" b="1" dirty="0">
-                <a:solidFill>
-                  <a:srgbClr val="E6EDF3"/>
-                </a:solidFill>
-                <a:latin typeface="Consolas"/>
-              </a:rPr>
-              <a:t>            915</a:t>
+              <a:t>            AOT       BCC</a:t>
             </a:r>
           </a:p>
           <a:p>
@@ -13230,22 +12504,13 @@
               </a:spcAft>
             </a:pPr>
             <a:r>
-              <a:rPr sz="1150" b="0" dirty="0" err="1">
-                <a:solidFill>
-                  <a:srgbClr val="8B949E"/>
+              <a:rPr sz="1150" b="0">
+                <a:solidFill>
+                  <a:srgbClr val="E6EDF3"/>
                 </a:solidFill>
                 <a:latin typeface="Consolas"/>
               </a:rPr>
-              <a:t>latenza</a:t>
-            </a:r>
-            <a:r>
-              <a:rPr sz="1250" b="1" dirty="0">
-                <a:solidFill>
-                  <a:srgbClr val="E6EDF3"/>
-                </a:solidFill>
-                <a:latin typeface="Consolas"/>
-              </a:rPr>
-              <a:t>            56 ns/pkt</a:t>
+              <a:t>insn      943      980</a:t>
             </a:r>
           </a:p>
           <a:p>
@@ -13255,22 +12520,13 @@
               </a:spcAft>
             </a:pPr>
             <a:r>
-              <a:rPr sz="1150" b="0" dirty="0">
-                <a:solidFill>
-                  <a:srgbClr val="8B949E"/>
+              <a:rPr sz="1150" b="0">
+                <a:solidFill>
+                  <a:srgbClr val="E6EDF3"/>
                 </a:solidFill>
                 <a:latin typeface="Consolas"/>
               </a:rPr>
-              <a:t>throughput</a:t>
-            </a:r>
-            <a:r>
-              <a:rPr sz="1250" b="1" dirty="0">
-                <a:solidFill>
-                  <a:srgbClr val="E6EDF3"/>
-                </a:solidFill>
-                <a:latin typeface="Consolas"/>
-              </a:rPr>
-              <a:t>       17.86 Mpps</a:t>
+              <a:t>latenza   69 ns    66 ns</a:t>
             </a:r>
           </a:p>
           <a:p>
@@ -13280,22 +12536,13 @@
               </a:spcAft>
             </a:pPr>
             <a:r>
-              <a:rPr sz="1150" b="0" dirty="0" err="1">
-                <a:solidFill>
-                  <a:srgbClr val="8B949E"/>
+              <a:rPr sz="1150" b="0">
+                <a:solidFill>
+                  <a:srgbClr val="E6EDF3"/>
                 </a:solidFill>
                 <a:latin typeface="Consolas"/>
               </a:rPr>
-              <a:t>retval</a:t>
-            </a:r>
-            <a:r>
-              <a:rPr sz="1250" b="1" dirty="0">
-                <a:solidFill>
-                  <a:srgbClr val="E6EDF3"/>
-                </a:solidFill>
-                <a:latin typeface="Consolas"/>
-              </a:rPr>
-              <a:t>             4  (redirect)</a:t>
+              <a:t>thrpt     14.5     15.2 Mpps</a:t>
             </a:r>
           </a:p>
           <a:p>
@@ -13305,47 +12552,14 @@
               </a:spcAft>
             </a:pPr>
             <a:r>
-              <a:rPr sz="1100" b="0" dirty="0">
+              <a:rPr sz="1100" b="0">
                 <a:solidFill>
                   <a:srgbClr val="3FB950"/>
                 </a:solidFill>
                 <a:latin typeface="Segoe UI"/>
               </a:rPr>
-              <a:t>= </a:t>
-            </a:r>
-            <a:r>
-              <a:rPr sz="1100" b="0" dirty="0" err="1">
-                <a:solidFill>
-                  <a:srgbClr val="3FB950"/>
-                </a:solidFill>
-                <a:latin typeface="Segoe UI"/>
-              </a:rPr>
-              <a:t>massimo</a:t>
-            </a:r>
-            <a:r>
-              <a:rPr sz="1100" b="0" dirty="0">
-                <a:solidFill>
-                  <a:srgbClr val="3FB950"/>
-                </a:solidFill>
-                <a:latin typeface="Segoe UI"/>
-              </a:rPr>
-              <a:t> literal, perf NON </a:t>
-            </a:r>
-            <a:r>
-              <a:rPr sz="1100" b="0" dirty="0" err="1">
-                <a:solidFill>
-                  <a:srgbClr val="3FB950"/>
-                </a:solidFill>
-                <a:latin typeface="Segoe UI"/>
-              </a:rPr>
-              <a:t>persa</a:t>
-            </a:r>
-            <a:endParaRPr sz="1100" b="0" dirty="0">
-              <a:solidFill>
-                <a:srgbClr val="3FB950"/>
-              </a:solidFill>
-              <a:latin typeface="Segoe UI"/>
-            </a:endParaRPr>
+              <a:t>= identici (rumore di misura)</a:t>
+            </a:r>
           </a:p>
         </p:txBody>
       </p:sp>
@@ -13357,8 +12571,8 @@
         </p:nvSpPr>
         <p:spPr>
           <a:xfrm>
-            <a:off x="640080" y="5989320"/>
-            <a:ext cx="10972800" cy="548640"/>
+            <a:off x="640080" y="5943600"/>
+            <a:ext cx="10972800" cy="640080"/>
           </a:xfrm>
           <a:prstGeom prst="rect">
             <a:avLst/>
@@ -13366,20 +12580,29 @@
           <a:noFill/>
         </p:spPr>
         <p:txBody>
-          <a:bodyPr wrap="square" lIns="0" tIns="0" rIns="0" bIns="0" anchor="t">
+          <a:bodyPr wrap="square" anchor="t" lIns="0" rIns="0" tIns="0" bIns="0">
             <a:spAutoFit/>
           </a:bodyPr>
           <a:lstStyle/>
           <a:p>
             <a:pPr algn="l"/>
             <a:r>
+              <a:rPr sz="1200" b="1">
+                <a:solidFill>
+                  <a:srgbClr val="8B949E"/>
+                </a:solidFill>
+                <a:latin typeface="Segoe UI"/>
+              </a:rPr>
+              <a:t>Stessa topologia del BCC (943 = disp 28 + model 915; test-run sul dispatcher). </a:t>
+            </a:r>
+            <a:r>
               <a:rPr sz="1200" b="0">
                 <a:solidFill>
-                  <a:srgbClr val="8B949E"/>
+                  <a:srgbClr val="E6EDF3"/>
                 </a:solidFill>
                 <a:latin typeface="Segoe UI"/>
               </a:rPr>
-              <a:t>Il .o è precompilato: a runtime nessun clang. I pesi restano literal → clang -O2 ha già ridotto le moltiplicazioni nel bytecode.</a:t>
+              <a:t>AOT NON è più veloce del BCC: preserva la perf literal-max — il valore è il deploy senza clang.</a:t>
             </a:r>
           </a:p>
         </p:txBody>
@@ -13393,7 +12616,7 @@
 </file>
 
 <file path=ppt/slides/slide9.xml><?xml version="1.0" encoding="utf-8"?>
-<p:sld xmlns:a="http://schemas.openxmlformats.org/drawingml/2006/main" xmlns:r="http://schemas.openxmlformats.org/officeDocument/2006/relationships" xmlns:p="http://schemas.openxmlformats.org/presentationml/2006/main">
+<p:sld xmlns:a="http://schemas.openxmlformats.org/drawingml/2006/main" xmlns:p="http://schemas.openxmlformats.org/presentationml/2006/main" xmlns:r="http://schemas.openxmlformats.org/officeDocument/2006/relationships">
   <p:cSld>
     <p:spTree>
       <p:nvGrpSpPr>
@@ -13401,14 +12624,7 @@
         <p:cNvGrpSpPr/>
         <p:nvPr/>
       </p:nvGrpSpPr>
-      <p:grpSpPr>
-        <a:xfrm>
-          <a:off x="0" y="0"/>
-          <a:ext cx="0" cy="0"/>
-          <a:chOff x="0" y="0"/>
-          <a:chExt cx="0" cy="0"/>
-        </a:xfrm>
-      </p:grpSpPr>
+      <p:grpSpPr/>
       <p:sp>
         <p:nvSpPr>
           <p:cNvPr id="2" name="Rectangle 1"/>
@@ -13450,7 +12666,6 @@
           <a:lstStyle/>
           <a:p>
             <a:pPr algn="ctr"/>
-            <a:endParaRPr/>
           </a:p>
         </p:txBody>
       </p:sp>
@@ -13471,7 +12686,7 @@
           <a:noFill/>
         </p:spPr>
         <p:txBody>
-          <a:bodyPr wrap="square" lIns="0" tIns="0" rIns="0" bIns="0" anchor="t">
+          <a:bodyPr wrap="square" anchor="t" lIns="0" rIns="0" tIns="0" bIns="0">
             <a:spAutoFit/>
           </a:bodyPr>
           <a:lstStyle/>
@@ -13506,7 +12721,7 @@
           <a:noFill/>
         </p:spPr>
         <p:txBody>
-          <a:bodyPr wrap="square" lIns="0" tIns="0" rIns="0" bIns="0" anchor="t">
+          <a:bodyPr wrap="square" anchor="t" lIns="0" rIns="0" tIns="0" bIns="0">
             <a:spAutoFit/>
           </a:bodyPr>
           <a:lstStyle/>
@@ -13541,7 +12756,7 @@
           <a:noFill/>
         </p:spPr>
         <p:txBody>
-          <a:bodyPr wrap="square" lIns="0" tIns="0" rIns="0" bIns="0" anchor="t">
+          <a:bodyPr wrap="square" anchor="t" lIns="0" rIns="0" tIns="0" bIns="0">
             <a:spAutoFit/>
           </a:bodyPr>
           <a:lstStyle/>
@@ -13554,7 +12769,7 @@
                 </a:solidFill>
                 <a:latin typeface="Segoe UI"/>
               </a:rPr>
-              <a:t>BCC vs .rodata vs AOT-literal — deploy e performance</a:t>
+              <a:t>BCC vs AOT-literal — deploy e performance</a:t>
             </a:r>
           </a:p>
         </p:txBody>
@@ -13576,13 +12791,21 @@
           <a:noFill/>
         </p:spPr>
         <p:txBody>
-          <a:bodyPr wrap="square" lIns="0" tIns="0" rIns="0" bIns="0" anchor="t">
+          <a:bodyPr wrap="square" anchor="t" lIns="0" rIns="0" tIns="0" bIns="0">
             <a:spAutoFit/>
           </a:bodyPr>
           <a:lstStyle/>
           <a:p>
             <a:pPr algn="l"/>
-            <a:endParaRPr/>
+            <a:r>
+              <a:rPr sz="1200" b="1">
+                <a:solidFill>
+                  <a:srgbClr val="8B949E"/>
+                </a:solidFill>
+                <a:latin typeface="Segoe UI"/>
+              </a:rPr>
+              <a:t/>
+            </a:r>
           </a:p>
         </p:txBody>
       </p:sp>
@@ -13603,7 +12826,7 @@
           <a:noFill/>
         </p:spPr>
         <p:txBody>
-          <a:bodyPr wrap="square" lIns="0" tIns="0" rIns="0" bIns="0" anchor="t">
+          <a:bodyPr wrap="square" anchor="t" lIns="0" rIns="0" tIns="0" bIns="0">
             <a:spAutoFit/>
           </a:bodyPr>
           <a:lstStyle/>
@@ -13638,7 +12861,7 @@
           <a:noFill/>
         </p:spPr>
         <p:txBody>
-          <a:bodyPr wrap="square" lIns="0" tIns="0" rIns="0" bIns="0" anchor="t">
+          <a:bodyPr wrap="square" anchor="t" lIns="0" rIns="0" tIns="0" bIns="0">
             <a:spAutoFit/>
           </a:bodyPr>
           <a:lstStyle/>
@@ -13673,7 +12896,7 @@
           <a:noFill/>
         </p:spPr>
         <p:txBody>
-          <a:bodyPr wrap="square" lIns="0" tIns="0" rIns="0" bIns="0" anchor="t">
+          <a:bodyPr wrap="square" anchor="t" lIns="0" rIns="0" tIns="0" bIns="0">
             <a:spAutoFit/>
           </a:bodyPr>
           <a:lstStyle/>
@@ -13699,7 +12922,7 @@
         </p:nvSpPr>
         <p:spPr>
           <a:xfrm>
-            <a:off x="640080" y="2286000"/>
+            <a:off x="640080" y="2514600"/>
             <a:ext cx="10927080" cy="749808"/>
           </a:xfrm>
           <a:prstGeom prst="roundRect">
@@ -13732,7 +12955,6 @@
           <a:lstStyle/>
           <a:p>
             <a:pPr algn="ctr"/>
-            <a:endParaRPr/>
           </a:p>
         </p:txBody>
       </p:sp>
@@ -13744,7 +12966,7 @@
         </p:nvSpPr>
         <p:spPr>
           <a:xfrm>
-            <a:off x="804671" y="2286000"/>
+            <a:off x="804671" y="2514600"/>
             <a:ext cx="2148839" cy="749808"/>
           </a:xfrm>
           <a:prstGeom prst="rect">
@@ -13753,7 +12975,7 @@
           <a:noFill/>
         </p:spPr>
         <p:txBody>
-          <a:bodyPr wrap="square" lIns="0" tIns="0" rIns="0" bIns="0" anchor="ctr">
+          <a:bodyPr wrap="square" anchor="ctr" lIns="0" rIns="0" tIns="0" bIns="0">
             <a:spAutoFit/>
           </a:bodyPr>
           <a:lstStyle/>
@@ -13779,7 +13001,7 @@
         </p:nvSpPr>
         <p:spPr>
           <a:xfrm>
-            <a:off x="3154679" y="2286000"/>
+            <a:off x="3154679" y="2514600"/>
             <a:ext cx="2743200" cy="749808"/>
           </a:xfrm>
           <a:prstGeom prst="rect">
@@ -13788,7 +13010,7 @@
           <a:noFill/>
         </p:spPr>
         <p:txBody>
-          <a:bodyPr wrap="square" lIns="0" tIns="0" rIns="0" bIns="0" anchor="ctr">
+          <a:bodyPr wrap="square" anchor="ctr" lIns="0" rIns="0" tIns="0" bIns="0">
             <a:spAutoFit/>
           </a:bodyPr>
           <a:lstStyle/>
@@ -13814,7 +13036,7 @@
         </p:nvSpPr>
         <p:spPr>
           <a:xfrm>
-            <a:off x="6099048" y="2286000"/>
+            <a:off x="6099048" y="2514600"/>
             <a:ext cx="3108960" cy="749808"/>
           </a:xfrm>
           <a:prstGeom prst="rect">
@@ -13823,7 +13045,7 @@
           <a:noFill/>
         </p:spPr>
         <p:txBody>
-          <a:bodyPr wrap="square" lIns="0" tIns="0" rIns="0" bIns="0" anchor="ctr">
+          <a:bodyPr wrap="square" anchor="ctr" lIns="0" rIns="0" tIns="0" bIns="0">
             <a:spAutoFit/>
           </a:bodyPr>
           <a:lstStyle/>
@@ -13836,7 +13058,7 @@
                 </a:solidFill>
                 <a:latin typeface="Consolas"/>
               </a:rPr>
-              <a:t>literal max</a:t>
+              <a:t>66 ns · 980 insn</a:t>
             </a:r>
           </a:p>
         </p:txBody>
@@ -13849,7 +13071,7 @@
         </p:nvSpPr>
         <p:spPr>
           <a:xfrm>
-            <a:off x="9409176" y="2286000"/>
+            <a:off x="9409176" y="2514600"/>
             <a:ext cx="2148839" cy="749808"/>
           </a:xfrm>
           <a:prstGeom prst="rect">
@@ -13858,7 +13080,7 @@
           <a:noFill/>
         </p:spPr>
         <p:txBody>
-          <a:bodyPr wrap="square" lIns="0" tIns="0" rIns="0" bIns="0" anchor="ctr">
+          <a:bodyPr wrap="square" anchor="ctr" lIns="0" rIns="0" tIns="0" bIns="0">
             <a:spAutoFit/>
           </a:bodyPr>
           <a:lstStyle/>
@@ -13884,192 +13106,7 @@
         </p:nvSpPr>
         <p:spPr>
           <a:xfrm>
-            <a:off x="640080" y="3127248"/>
-            <a:ext cx="10927080" cy="749808"/>
-          </a:xfrm>
-          <a:prstGeom prst="roundRect">
-            <a:avLst/>
-          </a:prstGeom>
-          <a:solidFill>
-            <a:srgbClr val="1B222E"/>
-          </a:solidFill>
-          <a:ln>
-            <a:noFill/>
-          </a:ln>
-          <a:effectLst/>
-        </p:spPr>
-        <p:style>
-          <a:lnRef idx="1">
-            <a:schemeClr val="accent1"/>
-          </a:lnRef>
-          <a:fillRef idx="3">
-            <a:schemeClr val="accent1"/>
-          </a:fillRef>
-          <a:effectRef idx="2">
-            <a:schemeClr val="accent1"/>
-          </a:effectRef>
-          <a:fontRef idx="minor">
-            <a:schemeClr val="lt1"/>
-          </a:fontRef>
-        </p:style>
-        <p:txBody>
-          <a:bodyPr rtlCol="0" anchor="ctr"/>
-          <a:lstStyle/>
-          <a:p>
-            <a:pPr algn="ctr"/>
-            <a:endParaRPr/>
-          </a:p>
-        </p:txBody>
-      </p:sp>
-      <p:sp>
-        <p:nvSpPr>
-          <p:cNvPr id="16" name="TextBox 15"/>
-          <p:cNvSpPr txBox="1"/>
-          <p:nvPr/>
-        </p:nvSpPr>
-        <p:spPr>
-          <a:xfrm>
-            <a:off x="804671" y="3127248"/>
-            <a:ext cx="2148839" cy="749808"/>
-          </a:xfrm>
-          <a:prstGeom prst="rect">
-            <a:avLst/>
-          </a:prstGeom>
-          <a:noFill/>
-        </p:spPr>
-        <p:txBody>
-          <a:bodyPr wrap="square" lIns="0" tIns="0" rIns="0" bIns="0" anchor="ctr">
-            <a:spAutoFit/>
-          </a:bodyPr>
-          <a:lstStyle/>
-          <a:p>
-            <a:pPr algn="l"/>
-            <a:r>
-              <a:rPr sz="1200" b="1">
-                <a:solidFill>
-                  <a:srgbClr val="F5A623"/>
-                </a:solidFill>
-                <a:latin typeface="Consolas"/>
-              </a:rPr>
-              <a:t>AOT + rodata</a:t>
-            </a:r>
-          </a:p>
-        </p:txBody>
-      </p:sp>
-      <p:sp>
-        <p:nvSpPr>
-          <p:cNvPr id="17" name="TextBox 16"/>
-          <p:cNvSpPr txBox="1"/>
-          <p:nvPr/>
-        </p:nvSpPr>
-        <p:spPr>
-          <a:xfrm>
-            <a:off x="3154679" y="3127248"/>
-            <a:ext cx="2743200" cy="749808"/>
-          </a:xfrm>
-          <a:prstGeom prst="rect">
-            <a:avLst/>
-          </a:prstGeom>
-          <a:noFill/>
-        </p:spPr>
-        <p:txBody>
-          <a:bodyPr wrap="square" lIns="0" tIns="0" rIns="0" bIns="0" anchor="ctr">
-            <a:spAutoFit/>
-          </a:bodyPr>
-          <a:lstStyle/>
-          <a:p>
-            <a:pPr algn="l"/>
-            <a:r>
-              <a:rPr sz="1200" b="0">
-                <a:solidFill>
-                  <a:srgbClr val="3FB950"/>
-                </a:solidFill>
-                <a:latin typeface="Consolas"/>
-              </a:rPr>
-              <a:t>~pochi ms</a:t>
-            </a:r>
-          </a:p>
-        </p:txBody>
-      </p:sp>
-      <p:sp>
-        <p:nvSpPr>
-          <p:cNvPr id="18" name="TextBox 17"/>
-          <p:cNvSpPr txBox="1"/>
-          <p:nvPr/>
-        </p:nvSpPr>
-        <p:spPr>
-          <a:xfrm>
-            <a:off x="6099048" y="3127248"/>
-            <a:ext cx="3108960" cy="749808"/>
-          </a:xfrm>
-          <a:prstGeom prst="rect">
-            <a:avLst/>
-          </a:prstGeom>
-          <a:noFill/>
-        </p:spPr>
-        <p:txBody>
-          <a:bodyPr wrap="square" lIns="0" tIns="0" rIns="0" bIns="0" anchor="ctr">
-            <a:spAutoFit/>
-          </a:bodyPr>
-          <a:lstStyle/>
-          <a:p>
-            <a:pPr algn="l"/>
-            <a:r>
-              <a:rPr sz="1200" b="0">
-                <a:solidFill>
-                  <a:srgbClr val="F5A623"/>
-                </a:solidFill>
-                <a:latin typeface="Consolas"/>
-              </a:rPr>
-              <a:t>−27% throughput</a:t>
-            </a:r>
-          </a:p>
-        </p:txBody>
-      </p:sp>
-      <p:sp>
-        <p:nvSpPr>
-          <p:cNvPr id="19" name="TextBox 18"/>
-          <p:cNvSpPr txBox="1"/>
-          <p:nvPr/>
-        </p:nvSpPr>
-        <p:spPr>
-          <a:xfrm>
-            <a:off x="9409176" y="3127248"/>
-            <a:ext cx="2148839" cy="749808"/>
-          </a:xfrm>
-          <a:prstGeom prst="rect">
-            <a:avLst/>
-          </a:prstGeom>
-          <a:noFill/>
-        </p:spPr>
-        <p:txBody>
-          <a:bodyPr wrap="square" lIns="0" tIns="0" rIns="0" bIns="0" anchor="ctr">
-            <a:spAutoFit/>
-          </a:bodyPr>
-          <a:lstStyle/>
-          <a:p>
-            <a:pPr algn="l"/>
-            <a:r>
-              <a:rPr sz="1200" b="1">
-                <a:solidFill>
-                  <a:srgbClr val="3FB950"/>
-                </a:solidFill>
-                <a:latin typeface="Segoe UI"/>
-              </a:rPr>
-              <a:t>no</a:t>
-            </a:r>
-          </a:p>
-        </p:txBody>
-      </p:sp>
-      <p:sp>
-        <p:nvSpPr>
-          <p:cNvPr id="20" name="Rounded Rectangle 19"/>
-          <p:cNvSpPr/>
-          <p:nvPr/>
-        </p:nvSpPr>
-        <p:spPr>
-          <a:xfrm>
-            <a:off x="640080" y="3968496"/>
+            <a:off x="640080" y="3429000"/>
             <a:ext cx="10927080" cy="749808"/>
           </a:xfrm>
           <a:prstGeom prst="roundRect">
@@ -14102,19 +13139,18 @@
           <a:lstStyle/>
           <a:p>
             <a:pPr algn="ctr"/>
-            <a:endParaRPr/>
-          </a:p>
-        </p:txBody>
-      </p:sp>
-      <p:sp>
-        <p:nvSpPr>
-          <p:cNvPr id="21" name="TextBox 20"/>
+          </a:p>
+        </p:txBody>
+      </p:sp>
+      <p:sp>
+        <p:nvSpPr>
+          <p:cNvPr id="16" name="TextBox 15"/>
           <p:cNvSpPr txBox="1"/>
           <p:nvPr/>
         </p:nvSpPr>
         <p:spPr>
           <a:xfrm>
-            <a:off x="804671" y="3968496"/>
+            <a:off x="804671" y="3429000"/>
             <a:ext cx="2148839" cy="749808"/>
           </a:xfrm>
           <a:prstGeom prst="rect">
@@ -14123,7 +13159,7 @@
           <a:noFill/>
         </p:spPr>
         <p:txBody>
-          <a:bodyPr wrap="square" lIns="0" tIns="0" rIns="0" bIns="0" anchor="ctr">
+          <a:bodyPr wrap="square" anchor="ctr" lIns="0" rIns="0" tIns="0" bIns="0">
             <a:spAutoFit/>
           </a:bodyPr>
           <a:lstStyle/>
@@ -14143,13 +13179,13 @@
       </p:sp>
       <p:sp>
         <p:nvSpPr>
-          <p:cNvPr id="22" name="TextBox 21"/>
+          <p:cNvPr id="17" name="TextBox 16"/>
           <p:cNvSpPr txBox="1"/>
           <p:nvPr/>
         </p:nvSpPr>
         <p:spPr>
           <a:xfrm>
-            <a:off x="3154679" y="3968496"/>
+            <a:off x="3154679" y="3429000"/>
             <a:ext cx="2743200" cy="749808"/>
           </a:xfrm>
           <a:prstGeom prst="rect">
@@ -14158,7 +13194,7 @@
           <a:noFill/>
         </p:spPr>
         <p:txBody>
-          <a:bodyPr wrap="square" lIns="0" tIns="0" rIns="0" bIns="0" anchor="ctr">
+          <a:bodyPr wrap="square" anchor="ctr" lIns="0" rIns="0" tIns="0" bIns="0">
             <a:spAutoFit/>
           </a:bodyPr>
           <a:lstStyle/>
@@ -14171,20 +13207,20 @@
                 </a:solidFill>
                 <a:latin typeface="Consolas"/>
               </a:rPr>
-              <a:t>6.2 ms (misurato)</a:t>
-            </a:r>
-          </a:p>
-        </p:txBody>
-      </p:sp>
-      <p:sp>
-        <p:nvSpPr>
-          <p:cNvPr id="23" name="TextBox 22"/>
+              <a:t>5.5 ms (misurato)</a:t>
+            </a:r>
+          </a:p>
+        </p:txBody>
+      </p:sp>
+      <p:sp>
+        <p:nvSpPr>
+          <p:cNvPr id="18" name="TextBox 17"/>
           <p:cNvSpPr txBox="1"/>
           <p:nvPr/>
         </p:nvSpPr>
         <p:spPr>
           <a:xfrm>
-            <a:off x="6099048" y="3968496"/>
+            <a:off x="6099048" y="3429000"/>
             <a:ext cx="3108960" cy="749808"/>
           </a:xfrm>
           <a:prstGeom prst="rect">
@@ -14193,7 +13229,7 @@
           <a:noFill/>
         </p:spPr>
         <p:txBody>
-          <a:bodyPr wrap="square" lIns="0" tIns="0" rIns="0" bIns="0" anchor="ctr">
+          <a:bodyPr wrap="square" anchor="ctr" lIns="0" rIns="0" tIns="0" bIns="0">
             <a:spAutoFit/>
           </a:bodyPr>
           <a:lstStyle/>
@@ -14206,20 +13242,20 @@
                 </a:solidFill>
                 <a:latin typeface="Consolas"/>
               </a:rPr>
-              <a:t>literal max (56 ns)</a:t>
-            </a:r>
-          </a:p>
-        </p:txBody>
-      </p:sp>
-      <p:sp>
-        <p:nvSpPr>
-          <p:cNvPr id="24" name="TextBox 23"/>
+              <a:t>69 ns · 943 = BCC</a:t>
+            </a:r>
+          </a:p>
+        </p:txBody>
+      </p:sp>
+      <p:sp>
+        <p:nvSpPr>
+          <p:cNvPr id="19" name="TextBox 18"/>
           <p:cNvSpPr txBox="1"/>
           <p:nvPr/>
         </p:nvSpPr>
         <p:spPr>
           <a:xfrm>
-            <a:off x="9409176" y="3968496"/>
+            <a:off x="9409176" y="3429000"/>
             <a:ext cx="2148839" cy="749808"/>
           </a:xfrm>
           <a:prstGeom prst="rect">
@@ -14228,7 +13264,7 @@
           <a:noFill/>
         </p:spPr>
         <p:txBody>
-          <a:bodyPr wrap="square" lIns="0" tIns="0" rIns="0" bIns="0" anchor="ctr">
+          <a:bodyPr wrap="square" anchor="ctr" lIns="0" rIns="0" tIns="0" bIns="0">
             <a:spAutoFit/>
           </a:bodyPr>
           <a:lstStyle/>
@@ -14248,14 +13284,14 @@
       </p:sp>
       <p:sp>
         <p:nvSpPr>
-          <p:cNvPr id="25" name="Rounded Rectangle 24"/>
+          <p:cNvPr id="20" name="Rounded Rectangle 19"/>
           <p:cNvSpPr/>
           <p:nvPr/>
         </p:nvSpPr>
         <p:spPr>
           <a:xfrm>
-            <a:off x="640080" y="5074920"/>
-            <a:ext cx="10927080" cy="1051560"/>
+            <a:off x="640080" y="4617720"/>
+            <a:ext cx="10927080" cy="1234440"/>
           </a:xfrm>
           <a:prstGeom prst="roundRect">
             <a:avLst/>
@@ -14287,19 +13323,18 @@
           <a:lstStyle/>
           <a:p>
             <a:pPr algn="ctr"/>
-            <a:endParaRPr/>
-          </a:p>
-        </p:txBody>
-      </p:sp>
-      <p:sp>
-        <p:nvSpPr>
-          <p:cNvPr id="26" name="Rounded Rectangle 25"/>
+          </a:p>
+        </p:txBody>
+      </p:sp>
+      <p:sp>
+        <p:nvSpPr>
+          <p:cNvPr id="21" name="Rounded Rectangle 20"/>
           <p:cNvSpPr/>
           <p:nvPr/>
         </p:nvSpPr>
         <p:spPr>
           <a:xfrm>
-            <a:off x="731519" y="5120640"/>
+            <a:off x="731519" y="4663440"/>
             <a:ext cx="10744200" cy="64008"/>
           </a:xfrm>
           <a:prstGeom prst="roundRect">
@@ -14332,20 +13367,19 @@
           <a:lstStyle/>
           <a:p>
             <a:pPr algn="ctr"/>
-            <a:endParaRPr/>
-          </a:p>
-        </p:txBody>
-      </p:sp>
-      <p:sp>
-        <p:nvSpPr>
-          <p:cNvPr id="27" name="TextBox 26"/>
+          </a:p>
+        </p:txBody>
+      </p:sp>
+      <p:sp>
+        <p:nvSpPr>
+          <p:cNvPr id="22" name="TextBox 21"/>
           <p:cNvSpPr txBox="1"/>
           <p:nvPr/>
         </p:nvSpPr>
         <p:spPr>
           <a:xfrm>
-            <a:off x="713231" y="5129783"/>
-            <a:ext cx="10780776" cy="941831"/>
+            <a:off x="713231" y="4672583"/>
+            <a:ext cx="10780776" cy="1124712"/>
           </a:xfrm>
           <a:prstGeom prst="rect">
             <a:avLst/>
@@ -14353,7 +13387,7 @@
           <a:noFill/>
         </p:spPr>
         <p:txBody>
-          <a:bodyPr wrap="square" lIns="0" tIns="0" rIns="0" bIns="0" anchor="ctr">
+          <a:bodyPr wrap="square" anchor="ctr" lIns="0" rIns="0" tIns="0" bIns="0">
             <a:spAutoFit/>
           </a:bodyPr>
           <a:lstStyle/>
@@ -14366,7 +13400,7 @@
                 </a:solidFill>
                 <a:latin typeface="Segoe UI"/>
               </a:rPr>
-              <a:t>Vincitore per i modelli noti a priori: AOT-literal.</a:t>
+              <a:t>Per i modelli noti a priori: AOT-literal.</a:t>
             </a:r>
           </a:p>
           <a:p>
@@ -14378,14 +13412,14 @@
                 </a:solidFill>
                 <a:latin typeface="Segoe UI"/>
               </a:rPr>
-              <a:t>Deploy ~270× più veloce del BCC (6.2 ms vs 1660 ms) E perf massima preservata — il .rodata scambia perf per flessibilità, l'AOT-literal no.</a:t>
-            </a:r>
-          </a:p>
-        </p:txBody>
-      </p:sp>
-      <p:sp>
-        <p:nvSpPr>
-          <p:cNvPr id="28" name="TextBox 27"/>
+              <a:t>A parità di architettura (dispatcher + tail-call + doppio parse) la perf è IDENTICA al BCC (69 vs 66 ns/pacchetto, 943 vs 980 insn), ma il deploy di un modello è ~300× più veloce: 5.5 ms invece di 1660 ms, senza clang a runtime.</a:t>
+            </a:r>
+          </a:p>
+        </p:txBody>
+      </p:sp>
+      <p:sp>
+        <p:nvSpPr>
+          <p:cNvPr id="23" name="TextBox 22"/>
           <p:cNvSpPr txBox="1"/>
           <p:nvPr/>
         </p:nvSpPr>
@@ -14400,7 +13434,7 @@
           <a:noFill/>
         </p:spPr>
         <p:txBody>
-          <a:bodyPr wrap="square" lIns="0" tIns="0" rIns="0" bIns="0" anchor="t">
+          <a:bodyPr wrap="square" anchor="t" lIns="0" rIns="0" tIns="0" bIns="0">
             <a:spAutoFit/>
           </a:bodyPr>
           <a:lstStyle/>

--- a/docs/IPA_hardcoded_IV_ricompilazione.pptx
+++ b/docs/IPA_hardcoded_IV_ricompilazione.pptx
@@ -5,20 +5,20 @@
     <p:sldMasterId id="2147483648" r:id="rId1"/>
   </p:sldMasterIdLst>
   <p:sldIdLst>
-    <p:sldId id="256" r:id="rId7"/>
-    <p:sldId id="257" r:id="rId8"/>
-    <p:sldId id="258" r:id="rId9"/>
-    <p:sldId id="259" r:id="rId10"/>
-    <p:sldId id="260" r:id="rId11"/>
-    <p:sldId id="261" r:id="rId12"/>
-    <p:sldId id="262" r:id="rId13"/>
-    <p:sldId id="263" r:id="rId14"/>
-    <p:sldId id="264" r:id="rId15"/>
-    <p:sldId id="265" r:id="rId16"/>
-    <p:sldId id="266" r:id="rId17"/>
-    <p:sldId id="267" r:id="rId18"/>
+    <p:sldId id="256" r:id="rId2"/>
+    <p:sldId id="257" r:id="rId3"/>
+    <p:sldId id="258" r:id="rId4"/>
+    <p:sldId id="259" r:id="rId5"/>
+    <p:sldId id="260" r:id="rId6"/>
+    <p:sldId id="261" r:id="rId7"/>
+    <p:sldId id="262" r:id="rId8"/>
+    <p:sldId id="263" r:id="rId9"/>
+    <p:sldId id="264" r:id="rId10"/>
+    <p:sldId id="265" r:id="rId11"/>
+    <p:sldId id="266" r:id="rId12"/>
+    <p:sldId id="267" r:id="rId13"/>
   </p:sldIdLst>
-  <p:sldSz cx="12191969" cy="6858000" type="screen4x3"/>
+  <p:sldSz cx="12192000" cy="6858000"/>
   <p:notesSz cx="6858000" cy="9144000"/>
   <p:defaultTextStyle>
     <a:defPPr>
@@ -115,6 +115,22 @@
       </a:defRPr>
     </a:lvl9pPr>
   </p:defaultTextStyle>
+  <p:extLst>
+    <p:ext uri="{EFAFB233-063F-42B5-8137-9DF3F51BA10A}">
+      <p15:sldGuideLst xmlns:p15="http://schemas.microsoft.com/office/powerpoint/2012/main">
+        <p15:guide id="1" orient="horz" pos="2160">
+          <p15:clr>
+            <a:srgbClr val="A4A3A4"/>
+          </p15:clr>
+        </p15:guide>
+        <p15:guide id="2" pos="2880">
+          <p15:clr>
+            <a:srgbClr val="A4A3A4"/>
+          </p15:clr>
+        </p15:guide>
+      </p15:sldGuideLst>
+    </p:ext>
+  </p:extLst>
 </p:presentation>
 </file>
 
@@ -156,10 +172,9 @@
           <a:lstStyle/>
           <a:p>
             <a:r>
-              <a:rPr lang="en-US" smtClean="0"/>
+              <a:rPr lang="en-US"/>
               <a:t>Click to edit Master title style</a:t>
             </a:r>
-            <a:endParaRPr lang="en-US"/>
           </a:p>
         </p:txBody>
       </p:sp>
@@ -275,10 +290,9 @@
           </a:lstStyle>
           <a:p>
             <a:r>
-              <a:rPr lang="en-US" smtClean="0"/>
+              <a:rPr lang="en-US"/>
               <a:t>Click to edit Master subtitle style</a:t>
             </a:r>
-            <a:endParaRPr lang="en-US"/>
           </a:p>
         </p:txBody>
       </p:sp>
@@ -299,7 +313,7 @@
           <a:p>
             <a:fld id="{5BCAD085-E8A6-8845-BD4E-CB4CCA059FC4}" type="datetimeFigureOut">
               <a:rPr lang="en-US" smtClean="0"/>
-              <a:t>1/27/13</a:t>
+              <a:t>7/14/2026</a:t>
             </a:fld>
             <a:endParaRPr lang="en-US"/>
           </a:p>
@@ -341,7 +355,7 @@
           <a:p>
             <a:fld id="{C1FF6DA9-008F-8B48-92A6-B652298478BF}" type="slidenum">
               <a:rPr lang="en-US" smtClean="0"/>
-              <a:t>‹#›</a:t>
+              <a:t>‹N›</a:t>
             </a:fld>
             <a:endParaRPr lang="en-US"/>
           </a:p>
@@ -393,10 +407,9 @@
           <a:lstStyle/>
           <a:p>
             <a:r>
-              <a:rPr lang="en-US" smtClean="0"/>
+              <a:rPr lang="en-US"/>
               <a:t>Click to edit Master title style</a:t>
             </a:r>
-            <a:endParaRPr lang="en-US"/>
           </a:p>
         </p:txBody>
       </p:sp>
@@ -417,38 +430,37 @@
           <a:p>
             <a:pPr lvl="0"/>
             <a:r>
-              <a:rPr lang="en-US" smtClean="0"/>
+              <a:rPr lang="en-US"/>
               <a:t>Click to edit Master text styles</a:t>
             </a:r>
           </a:p>
           <a:p>
             <a:pPr lvl="1"/>
             <a:r>
-              <a:rPr lang="en-US" smtClean="0"/>
+              <a:rPr lang="en-US"/>
               <a:t>Second level</a:t>
             </a:r>
           </a:p>
           <a:p>
             <a:pPr lvl="2"/>
             <a:r>
-              <a:rPr lang="en-US" smtClean="0"/>
+              <a:rPr lang="en-US"/>
               <a:t>Third level</a:t>
             </a:r>
           </a:p>
           <a:p>
             <a:pPr lvl="3"/>
             <a:r>
-              <a:rPr lang="en-US" smtClean="0"/>
+              <a:rPr lang="en-US"/>
               <a:t>Fourth level</a:t>
             </a:r>
           </a:p>
           <a:p>
             <a:pPr lvl="4"/>
             <a:r>
-              <a:rPr lang="en-US" smtClean="0"/>
+              <a:rPr lang="en-US"/>
               <a:t>Fifth level</a:t>
             </a:r>
-            <a:endParaRPr lang="en-US"/>
           </a:p>
         </p:txBody>
       </p:sp>
@@ -469,7 +481,7 @@
           <a:p>
             <a:fld id="{5BCAD085-E8A6-8845-BD4E-CB4CCA059FC4}" type="datetimeFigureOut">
               <a:rPr lang="en-US" smtClean="0"/>
-              <a:t>1/27/13</a:t>
+              <a:t>7/14/2026</a:t>
             </a:fld>
             <a:endParaRPr lang="en-US"/>
           </a:p>
@@ -511,7 +523,7 @@
           <a:p>
             <a:fld id="{C1FF6DA9-008F-8B48-92A6-B652298478BF}" type="slidenum">
               <a:rPr lang="en-US" smtClean="0"/>
-              <a:t>‹#›</a:t>
+              <a:t>‹N›</a:t>
             </a:fld>
             <a:endParaRPr lang="en-US"/>
           </a:p>
@@ -568,10 +580,9 @@
           <a:lstStyle/>
           <a:p>
             <a:r>
-              <a:rPr lang="en-US" smtClean="0"/>
+              <a:rPr lang="en-US"/>
               <a:t>Click to edit Master title style</a:t>
             </a:r>
-            <a:endParaRPr lang="en-US"/>
           </a:p>
         </p:txBody>
       </p:sp>
@@ -597,38 +608,37 @@
           <a:p>
             <a:pPr lvl="0"/>
             <a:r>
-              <a:rPr lang="en-US" smtClean="0"/>
+              <a:rPr lang="en-US"/>
               <a:t>Click to edit Master text styles</a:t>
             </a:r>
           </a:p>
           <a:p>
             <a:pPr lvl="1"/>
             <a:r>
-              <a:rPr lang="en-US" smtClean="0"/>
+              <a:rPr lang="en-US"/>
               <a:t>Second level</a:t>
             </a:r>
           </a:p>
           <a:p>
             <a:pPr lvl="2"/>
             <a:r>
-              <a:rPr lang="en-US" smtClean="0"/>
+              <a:rPr lang="en-US"/>
               <a:t>Third level</a:t>
             </a:r>
           </a:p>
           <a:p>
             <a:pPr lvl="3"/>
             <a:r>
-              <a:rPr lang="en-US" smtClean="0"/>
+              <a:rPr lang="en-US"/>
               <a:t>Fourth level</a:t>
             </a:r>
           </a:p>
           <a:p>
             <a:pPr lvl="4"/>
             <a:r>
-              <a:rPr lang="en-US" smtClean="0"/>
+              <a:rPr lang="en-US"/>
               <a:t>Fifth level</a:t>
             </a:r>
-            <a:endParaRPr lang="en-US"/>
           </a:p>
         </p:txBody>
       </p:sp>
@@ -649,7 +659,7 @@
           <a:p>
             <a:fld id="{5BCAD085-E8A6-8845-BD4E-CB4CCA059FC4}" type="datetimeFigureOut">
               <a:rPr lang="en-US" smtClean="0"/>
-              <a:t>1/27/13</a:t>
+              <a:t>7/14/2026</a:t>
             </a:fld>
             <a:endParaRPr lang="en-US"/>
           </a:p>
@@ -691,7 +701,7 @@
           <a:p>
             <a:fld id="{C1FF6DA9-008F-8B48-92A6-B652298478BF}" type="slidenum">
               <a:rPr lang="en-US" smtClean="0"/>
-              <a:t>‹#›</a:t>
+              <a:t>‹N›</a:t>
             </a:fld>
             <a:endParaRPr lang="en-US"/>
           </a:p>
@@ -743,10 +753,9 @@
           <a:lstStyle/>
           <a:p>
             <a:r>
-              <a:rPr lang="en-US" smtClean="0"/>
+              <a:rPr lang="en-US"/>
               <a:t>Click to edit Master title style</a:t>
             </a:r>
-            <a:endParaRPr lang="en-US"/>
           </a:p>
         </p:txBody>
       </p:sp>
@@ -767,38 +776,37 @@
           <a:p>
             <a:pPr lvl="0"/>
             <a:r>
-              <a:rPr lang="en-US" smtClean="0"/>
+              <a:rPr lang="en-US"/>
               <a:t>Click to edit Master text styles</a:t>
             </a:r>
           </a:p>
           <a:p>
             <a:pPr lvl="1"/>
             <a:r>
-              <a:rPr lang="en-US" smtClean="0"/>
+              <a:rPr lang="en-US"/>
               <a:t>Second level</a:t>
             </a:r>
           </a:p>
           <a:p>
             <a:pPr lvl="2"/>
             <a:r>
-              <a:rPr lang="en-US" smtClean="0"/>
+              <a:rPr lang="en-US"/>
               <a:t>Third level</a:t>
             </a:r>
           </a:p>
           <a:p>
             <a:pPr lvl="3"/>
             <a:r>
-              <a:rPr lang="en-US" smtClean="0"/>
+              <a:rPr lang="en-US"/>
               <a:t>Fourth level</a:t>
             </a:r>
           </a:p>
           <a:p>
             <a:pPr lvl="4"/>
             <a:r>
-              <a:rPr lang="en-US" smtClean="0"/>
+              <a:rPr lang="en-US"/>
               <a:t>Fifth level</a:t>
             </a:r>
-            <a:endParaRPr lang="en-US"/>
           </a:p>
         </p:txBody>
       </p:sp>
@@ -819,7 +827,7 @@
           <a:p>
             <a:fld id="{5BCAD085-E8A6-8845-BD4E-CB4CCA059FC4}" type="datetimeFigureOut">
               <a:rPr lang="en-US" smtClean="0"/>
-              <a:t>1/27/13</a:t>
+              <a:t>7/14/2026</a:t>
             </a:fld>
             <a:endParaRPr lang="en-US"/>
           </a:p>
@@ -861,7 +869,7 @@
           <a:p>
             <a:fld id="{C1FF6DA9-008F-8B48-92A6-B652298478BF}" type="slidenum">
               <a:rPr lang="en-US" smtClean="0"/>
-              <a:t>‹#›</a:t>
+              <a:t>‹N›</a:t>
             </a:fld>
             <a:endParaRPr lang="en-US"/>
           </a:p>
@@ -922,10 +930,9 @@
           </a:lstStyle>
           <a:p>
             <a:r>
-              <a:rPr lang="en-US" smtClean="0"/>
+              <a:rPr lang="en-US"/>
               <a:t>Click to edit Master title style</a:t>
             </a:r>
-            <a:endParaRPr lang="en-US"/>
           </a:p>
         </p:txBody>
       </p:sp>
@@ -1042,7 +1049,7 @@
           <a:p>
             <a:pPr lvl="0"/>
             <a:r>
-              <a:rPr lang="en-US" smtClean="0"/>
+              <a:rPr lang="en-US"/>
               <a:t>Click to edit Master text styles</a:t>
             </a:r>
           </a:p>
@@ -1065,7 +1072,7 @@
           <a:p>
             <a:fld id="{5BCAD085-E8A6-8845-BD4E-CB4CCA059FC4}" type="datetimeFigureOut">
               <a:rPr lang="en-US" smtClean="0"/>
-              <a:t>1/27/13</a:t>
+              <a:t>7/14/2026</a:t>
             </a:fld>
             <a:endParaRPr lang="en-US"/>
           </a:p>
@@ -1107,7 +1114,7 @@
           <a:p>
             <a:fld id="{C1FF6DA9-008F-8B48-92A6-B652298478BF}" type="slidenum">
               <a:rPr lang="en-US" smtClean="0"/>
-              <a:t>‹#›</a:t>
+              <a:t>‹N›</a:t>
             </a:fld>
             <a:endParaRPr lang="en-US"/>
           </a:p>
@@ -1159,10 +1166,9 @@
           <a:lstStyle/>
           <a:p>
             <a:r>
-              <a:rPr lang="en-US" smtClean="0"/>
+              <a:rPr lang="en-US"/>
               <a:t>Click to edit Master title style</a:t>
             </a:r>
-            <a:endParaRPr lang="en-US"/>
           </a:p>
         </p:txBody>
       </p:sp>
@@ -1216,38 +1222,37 @@
           <a:p>
             <a:pPr lvl="0"/>
             <a:r>
-              <a:rPr lang="en-US" smtClean="0"/>
+              <a:rPr lang="en-US"/>
               <a:t>Click to edit Master text styles</a:t>
             </a:r>
           </a:p>
           <a:p>
             <a:pPr lvl="1"/>
             <a:r>
-              <a:rPr lang="en-US" smtClean="0"/>
+              <a:rPr lang="en-US"/>
               <a:t>Second level</a:t>
             </a:r>
           </a:p>
           <a:p>
             <a:pPr lvl="2"/>
             <a:r>
-              <a:rPr lang="en-US" smtClean="0"/>
+              <a:rPr lang="en-US"/>
               <a:t>Third level</a:t>
             </a:r>
           </a:p>
           <a:p>
             <a:pPr lvl="3"/>
             <a:r>
-              <a:rPr lang="en-US" smtClean="0"/>
+              <a:rPr lang="en-US"/>
               <a:t>Fourth level</a:t>
             </a:r>
           </a:p>
           <a:p>
             <a:pPr lvl="4"/>
             <a:r>
-              <a:rPr lang="en-US" smtClean="0"/>
+              <a:rPr lang="en-US"/>
               <a:t>Fifth level</a:t>
             </a:r>
-            <a:endParaRPr lang="en-US"/>
           </a:p>
         </p:txBody>
       </p:sp>
@@ -1301,38 +1306,37 @@
           <a:p>
             <a:pPr lvl="0"/>
             <a:r>
-              <a:rPr lang="en-US" smtClean="0"/>
+              <a:rPr lang="en-US"/>
               <a:t>Click to edit Master text styles</a:t>
             </a:r>
           </a:p>
           <a:p>
             <a:pPr lvl="1"/>
             <a:r>
-              <a:rPr lang="en-US" smtClean="0"/>
+              <a:rPr lang="en-US"/>
               <a:t>Second level</a:t>
             </a:r>
           </a:p>
           <a:p>
             <a:pPr lvl="2"/>
             <a:r>
-              <a:rPr lang="en-US" smtClean="0"/>
+              <a:rPr lang="en-US"/>
               <a:t>Third level</a:t>
             </a:r>
           </a:p>
           <a:p>
             <a:pPr lvl="3"/>
             <a:r>
-              <a:rPr lang="en-US" smtClean="0"/>
+              <a:rPr lang="en-US"/>
               <a:t>Fourth level</a:t>
             </a:r>
           </a:p>
           <a:p>
             <a:pPr lvl="4"/>
             <a:r>
-              <a:rPr lang="en-US" smtClean="0"/>
+              <a:rPr lang="en-US"/>
               <a:t>Fifth level</a:t>
             </a:r>
-            <a:endParaRPr lang="en-US"/>
           </a:p>
         </p:txBody>
       </p:sp>
@@ -1353,7 +1357,7 @@
           <a:p>
             <a:fld id="{5BCAD085-E8A6-8845-BD4E-CB4CCA059FC4}" type="datetimeFigureOut">
               <a:rPr lang="en-US" smtClean="0"/>
-              <a:t>1/27/13</a:t>
+              <a:t>7/14/2026</a:t>
             </a:fld>
             <a:endParaRPr lang="en-US"/>
           </a:p>
@@ -1395,7 +1399,7 @@
           <a:p>
             <a:fld id="{C1FF6DA9-008F-8B48-92A6-B652298478BF}" type="slidenum">
               <a:rPr lang="en-US" smtClean="0"/>
-              <a:t>‹#›</a:t>
+              <a:t>‹N›</a:t>
             </a:fld>
             <a:endParaRPr lang="en-US"/>
           </a:p>
@@ -1451,10 +1455,9 @@
           </a:lstStyle>
           <a:p>
             <a:r>
-              <a:rPr lang="en-US" smtClean="0"/>
+              <a:rPr lang="en-US"/>
               <a:t>Click to edit Master title style</a:t>
             </a:r>
-            <a:endParaRPr lang="en-US"/>
           </a:p>
         </p:txBody>
       </p:sp>
@@ -1517,7 +1520,7 @@
           <a:p>
             <a:pPr lvl="0"/>
             <a:r>
-              <a:rPr lang="en-US" smtClean="0"/>
+              <a:rPr lang="en-US"/>
               <a:t>Click to edit Master text styles</a:t>
             </a:r>
           </a:p>
@@ -1573,38 +1576,37 @@
           <a:p>
             <a:pPr lvl="0"/>
             <a:r>
-              <a:rPr lang="en-US" smtClean="0"/>
+              <a:rPr lang="en-US"/>
               <a:t>Click to edit Master text styles</a:t>
             </a:r>
           </a:p>
           <a:p>
             <a:pPr lvl="1"/>
             <a:r>
-              <a:rPr lang="en-US" smtClean="0"/>
+              <a:rPr lang="en-US"/>
               <a:t>Second level</a:t>
             </a:r>
           </a:p>
           <a:p>
             <a:pPr lvl="2"/>
             <a:r>
-              <a:rPr lang="en-US" smtClean="0"/>
+              <a:rPr lang="en-US"/>
               <a:t>Third level</a:t>
             </a:r>
           </a:p>
           <a:p>
             <a:pPr lvl="3"/>
             <a:r>
-              <a:rPr lang="en-US" smtClean="0"/>
+              <a:rPr lang="en-US"/>
               <a:t>Fourth level</a:t>
             </a:r>
           </a:p>
           <a:p>
             <a:pPr lvl="4"/>
             <a:r>
-              <a:rPr lang="en-US" smtClean="0"/>
+              <a:rPr lang="en-US"/>
               <a:t>Fifth level</a:t>
             </a:r>
-            <a:endParaRPr lang="en-US"/>
           </a:p>
         </p:txBody>
       </p:sp>
@@ -1667,7 +1669,7 @@
           <a:p>
             <a:pPr lvl="0"/>
             <a:r>
-              <a:rPr lang="en-US" smtClean="0"/>
+              <a:rPr lang="en-US"/>
               <a:t>Click to edit Master text styles</a:t>
             </a:r>
           </a:p>
@@ -1723,38 +1725,37 @@
           <a:p>
             <a:pPr lvl="0"/>
             <a:r>
-              <a:rPr lang="en-US" smtClean="0"/>
+              <a:rPr lang="en-US"/>
               <a:t>Click to edit Master text styles</a:t>
             </a:r>
           </a:p>
           <a:p>
             <a:pPr lvl="1"/>
             <a:r>
-              <a:rPr lang="en-US" smtClean="0"/>
+              <a:rPr lang="en-US"/>
               <a:t>Second level</a:t>
             </a:r>
           </a:p>
           <a:p>
             <a:pPr lvl="2"/>
             <a:r>
-              <a:rPr lang="en-US" smtClean="0"/>
+              <a:rPr lang="en-US"/>
               <a:t>Third level</a:t>
             </a:r>
           </a:p>
           <a:p>
             <a:pPr lvl="3"/>
             <a:r>
-              <a:rPr lang="en-US" smtClean="0"/>
+              <a:rPr lang="en-US"/>
               <a:t>Fourth level</a:t>
             </a:r>
           </a:p>
           <a:p>
             <a:pPr lvl="4"/>
             <a:r>
-              <a:rPr lang="en-US" smtClean="0"/>
+              <a:rPr lang="en-US"/>
               <a:t>Fifth level</a:t>
             </a:r>
-            <a:endParaRPr lang="en-US"/>
           </a:p>
         </p:txBody>
       </p:sp>
@@ -1775,7 +1776,7 @@
           <a:p>
             <a:fld id="{5BCAD085-E8A6-8845-BD4E-CB4CCA059FC4}" type="datetimeFigureOut">
               <a:rPr lang="en-US" smtClean="0"/>
-              <a:t>1/27/13</a:t>
+              <a:t>7/14/2026</a:t>
             </a:fld>
             <a:endParaRPr lang="en-US"/>
           </a:p>
@@ -1817,7 +1818,7 @@
           <a:p>
             <a:fld id="{C1FF6DA9-008F-8B48-92A6-B652298478BF}" type="slidenum">
               <a:rPr lang="en-US" smtClean="0"/>
-              <a:t>‹#›</a:t>
+              <a:t>‹N›</a:t>
             </a:fld>
             <a:endParaRPr lang="en-US"/>
           </a:p>
@@ -1869,10 +1870,9 @@
           <a:lstStyle/>
           <a:p>
             <a:r>
-              <a:rPr lang="en-US" smtClean="0"/>
+              <a:rPr lang="en-US"/>
               <a:t>Click to edit Master title style</a:t>
             </a:r>
-            <a:endParaRPr lang="en-US"/>
           </a:p>
         </p:txBody>
       </p:sp>
@@ -1893,7 +1893,7 @@
           <a:p>
             <a:fld id="{5BCAD085-E8A6-8845-BD4E-CB4CCA059FC4}" type="datetimeFigureOut">
               <a:rPr lang="en-US" smtClean="0"/>
-              <a:t>1/27/13</a:t>
+              <a:t>7/14/2026</a:t>
             </a:fld>
             <a:endParaRPr lang="en-US"/>
           </a:p>
@@ -1935,7 +1935,7 @@
           <a:p>
             <a:fld id="{C1FF6DA9-008F-8B48-92A6-B652298478BF}" type="slidenum">
               <a:rPr lang="en-US" smtClean="0"/>
-              <a:t>‹#›</a:t>
+              <a:t>‹N›</a:t>
             </a:fld>
             <a:endParaRPr lang="en-US"/>
           </a:p>
@@ -1988,7 +1988,7 @@
           <a:p>
             <a:fld id="{5BCAD085-E8A6-8845-BD4E-CB4CCA059FC4}" type="datetimeFigureOut">
               <a:rPr lang="en-US" smtClean="0"/>
-              <a:t>1/27/13</a:t>
+              <a:t>7/14/2026</a:t>
             </a:fld>
             <a:endParaRPr lang="en-US"/>
           </a:p>
@@ -2030,7 +2030,7 @@
           <a:p>
             <a:fld id="{C1FF6DA9-008F-8B48-92A6-B652298478BF}" type="slidenum">
               <a:rPr lang="en-US" smtClean="0"/>
-              <a:t>‹#›</a:t>
+              <a:t>‹N›</a:t>
             </a:fld>
             <a:endParaRPr lang="en-US"/>
           </a:p>
@@ -2091,10 +2091,9 @@
           </a:lstStyle>
           <a:p>
             <a:r>
-              <a:rPr lang="en-US" smtClean="0"/>
+              <a:rPr lang="en-US"/>
               <a:t>Click to edit Master title style</a:t>
             </a:r>
-            <a:endParaRPr lang="en-US"/>
           </a:p>
         </p:txBody>
       </p:sp>
@@ -2148,38 +2147,37 @@
           <a:p>
             <a:pPr lvl="0"/>
             <a:r>
-              <a:rPr lang="en-US" smtClean="0"/>
+              <a:rPr lang="en-US"/>
               <a:t>Click to edit Master text styles</a:t>
             </a:r>
           </a:p>
           <a:p>
             <a:pPr lvl="1"/>
             <a:r>
-              <a:rPr lang="en-US" smtClean="0"/>
+              <a:rPr lang="en-US"/>
               <a:t>Second level</a:t>
             </a:r>
           </a:p>
           <a:p>
             <a:pPr lvl="2"/>
             <a:r>
-              <a:rPr lang="en-US" smtClean="0"/>
+              <a:rPr lang="en-US"/>
               <a:t>Third level</a:t>
             </a:r>
           </a:p>
           <a:p>
             <a:pPr lvl="3"/>
             <a:r>
-              <a:rPr lang="en-US" smtClean="0"/>
+              <a:rPr lang="en-US"/>
               <a:t>Fourth level</a:t>
             </a:r>
           </a:p>
           <a:p>
             <a:pPr lvl="4"/>
             <a:r>
-              <a:rPr lang="en-US" smtClean="0"/>
+              <a:rPr lang="en-US"/>
               <a:t>Fifth level</a:t>
             </a:r>
-            <a:endParaRPr lang="en-US"/>
           </a:p>
         </p:txBody>
       </p:sp>
@@ -2242,7 +2240,7 @@
           <a:p>
             <a:pPr lvl="0"/>
             <a:r>
-              <a:rPr lang="en-US" smtClean="0"/>
+              <a:rPr lang="en-US"/>
               <a:t>Click to edit Master text styles</a:t>
             </a:r>
           </a:p>
@@ -2265,7 +2263,7 @@
           <a:p>
             <a:fld id="{5BCAD085-E8A6-8845-BD4E-CB4CCA059FC4}" type="datetimeFigureOut">
               <a:rPr lang="en-US" smtClean="0"/>
-              <a:t>1/27/13</a:t>
+              <a:t>7/14/2026</a:t>
             </a:fld>
             <a:endParaRPr lang="en-US"/>
           </a:p>
@@ -2307,7 +2305,7 @@
           <a:p>
             <a:fld id="{C1FF6DA9-008F-8B48-92A6-B652298478BF}" type="slidenum">
               <a:rPr lang="en-US" smtClean="0"/>
-              <a:t>‹#›</a:t>
+              <a:t>‹N›</a:t>
             </a:fld>
             <a:endParaRPr lang="en-US"/>
           </a:p>
@@ -2368,10 +2366,9 @@
           </a:lstStyle>
           <a:p>
             <a:r>
-              <a:rPr lang="en-US" smtClean="0"/>
+              <a:rPr lang="en-US"/>
               <a:t>Click to edit Master title style</a:t>
             </a:r>
-            <a:endParaRPr lang="en-US"/>
           </a:p>
         </p:txBody>
       </p:sp>
@@ -2495,7 +2492,7 @@
           <a:p>
             <a:pPr lvl="0"/>
             <a:r>
-              <a:rPr lang="en-US" smtClean="0"/>
+              <a:rPr lang="en-US"/>
               <a:t>Click to edit Master text styles</a:t>
             </a:r>
           </a:p>
@@ -2518,7 +2515,7 @@
           <a:p>
             <a:fld id="{5BCAD085-E8A6-8845-BD4E-CB4CCA059FC4}" type="datetimeFigureOut">
               <a:rPr lang="en-US" smtClean="0"/>
-              <a:t>1/27/13</a:t>
+              <a:t>7/14/2026</a:t>
             </a:fld>
             <a:endParaRPr lang="en-US"/>
           </a:p>
@@ -2560,7 +2557,7 @@
           <a:p>
             <a:fld id="{C1FF6DA9-008F-8B48-92A6-B652298478BF}" type="slidenum">
               <a:rPr lang="en-US" smtClean="0"/>
-              <a:t>‹#›</a:t>
+              <a:t>‹N›</a:t>
             </a:fld>
             <a:endParaRPr lang="en-US"/>
           </a:p>
@@ -2627,10 +2624,9 @@
           <a:lstStyle/>
           <a:p>
             <a:r>
-              <a:rPr lang="en-US" smtClean="0"/>
+              <a:rPr lang="en-US"/>
               <a:t>Click to edit Master title style</a:t>
             </a:r>
-            <a:endParaRPr lang="en-US"/>
           </a:p>
         </p:txBody>
       </p:sp>
@@ -2661,38 +2657,37 @@
           <a:p>
             <a:pPr lvl="0"/>
             <a:r>
-              <a:rPr lang="en-US" smtClean="0"/>
+              <a:rPr lang="en-US"/>
               <a:t>Click to edit Master text styles</a:t>
             </a:r>
           </a:p>
           <a:p>
             <a:pPr lvl="1"/>
             <a:r>
-              <a:rPr lang="en-US" smtClean="0"/>
+              <a:rPr lang="en-US"/>
               <a:t>Second level</a:t>
             </a:r>
           </a:p>
           <a:p>
             <a:pPr lvl="2"/>
             <a:r>
-              <a:rPr lang="en-US" smtClean="0"/>
+              <a:rPr lang="en-US"/>
               <a:t>Third level</a:t>
             </a:r>
           </a:p>
           <a:p>
             <a:pPr lvl="3"/>
             <a:r>
-              <a:rPr lang="en-US" smtClean="0"/>
+              <a:rPr lang="en-US"/>
               <a:t>Fourth level</a:t>
             </a:r>
           </a:p>
           <a:p>
             <a:pPr lvl="4"/>
             <a:r>
-              <a:rPr lang="en-US" smtClean="0"/>
+              <a:rPr lang="en-US"/>
               <a:t>Fifth level</a:t>
             </a:r>
-            <a:endParaRPr lang="en-US"/>
           </a:p>
         </p:txBody>
       </p:sp>
@@ -2731,7 +2726,7 @@
           <a:p>
             <a:fld id="{5BCAD085-E8A6-8845-BD4E-CB4CCA059FC4}" type="datetimeFigureOut">
               <a:rPr lang="en-US" smtClean="0"/>
-              <a:t>1/27/13</a:t>
+              <a:t>7/14/2026</a:t>
             </a:fld>
             <a:endParaRPr lang="en-US"/>
           </a:p>
@@ -2809,7 +2804,7 @@
           <a:p>
             <a:fld id="{C1FF6DA9-008F-8B48-92A6-B652298478BF}" type="slidenum">
               <a:rPr lang="en-US" smtClean="0"/>
-              <a:t>‹#›</a:t>
+              <a:t>‹N›</a:t>
             </a:fld>
             <a:endParaRPr lang="en-US"/>
           </a:p>
@@ -3090,7 +3085,7 @@
 </file>
 
 <file path=ppt/slides/slide1.xml><?xml version="1.0" encoding="utf-8"?>
-<p:sld xmlns:a="http://schemas.openxmlformats.org/drawingml/2006/main" xmlns:p="http://schemas.openxmlformats.org/presentationml/2006/main" xmlns:r="http://schemas.openxmlformats.org/officeDocument/2006/relationships">
+<p:sld xmlns:a="http://schemas.openxmlformats.org/drawingml/2006/main" xmlns:r="http://schemas.openxmlformats.org/officeDocument/2006/relationships" xmlns:p="http://schemas.openxmlformats.org/presentationml/2006/main">
   <p:cSld>
     <p:spTree>
       <p:nvGrpSpPr>
@@ -3098,7 +3093,14 @@
         <p:cNvGrpSpPr/>
         <p:nvPr/>
       </p:nvGrpSpPr>
-      <p:grpSpPr/>
+      <p:grpSpPr>
+        <a:xfrm>
+          <a:off x="0" y="0"/>
+          <a:ext cx="0" cy="0"/>
+          <a:chOff x="0" y="0"/>
+          <a:chExt cx="0" cy="0"/>
+        </a:xfrm>
+      </p:grpSpPr>
       <p:sp>
         <p:nvSpPr>
           <p:cNvPr id="2" name="Rectangle 1"/>
@@ -3140,6 +3142,7 @@
           <a:lstStyle/>
           <a:p>
             <a:pPr algn="ctr"/>
+            <a:endParaRPr/>
           </a:p>
         </p:txBody>
       </p:sp>
@@ -3184,6 +3187,7 @@
           <a:lstStyle/>
           <a:p>
             <a:pPr algn="ctr"/>
+            <a:endParaRPr/>
           </a:p>
         </p:txBody>
       </p:sp>
@@ -3228,6 +3232,7 @@
           <a:lstStyle/>
           <a:p>
             <a:pPr algn="ctr"/>
+            <a:endParaRPr/>
           </a:p>
         </p:txBody>
       </p:sp>
@@ -3272,6 +3277,7 @@
           <a:lstStyle/>
           <a:p>
             <a:pPr algn="ctr"/>
+            <a:endParaRPr/>
           </a:p>
         </p:txBody>
       </p:sp>
@@ -3316,6 +3322,7 @@
           <a:lstStyle/>
           <a:p>
             <a:pPr algn="ctr"/>
+            <a:endParaRPr/>
           </a:p>
         </p:txBody>
       </p:sp>
@@ -3336,7 +3343,7 @@
           <a:noFill/>
         </p:spPr>
         <p:txBody>
-          <a:bodyPr wrap="square" anchor="ctr" lIns="0" rIns="0" tIns="0" bIns="0">
+          <a:bodyPr wrap="square" lIns="0" tIns="0" rIns="0" bIns="0" anchor="ctr">
             <a:spAutoFit/>
           </a:bodyPr>
           <a:lstStyle/>
@@ -3371,7 +3378,7 @@
           <a:noFill/>
         </p:spPr>
         <p:txBody>
-          <a:bodyPr wrap="square" anchor="t" lIns="0" rIns="0" tIns="0" bIns="0">
+          <a:bodyPr wrap="square" lIns="0" tIns="0" rIns="0" bIns="0" anchor="t">
             <a:spAutoFit/>
           </a:bodyPr>
           <a:lstStyle/>
@@ -3406,7 +3413,7 @@
           <a:noFill/>
         </p:spPr>
         <p:txBody>
-          <a:bodyPr wrap="square" anchor="t" lIns="0" rIns="0" tIns="0" bIns="0">
+          <a:bodyPr wrap="square" lIns="0" tIns="0" rIns="0" bIns="0" anchor="t">
             <a:spAutoFit/>
           </a:bodyPr>
           <a:lstStyle/>
@@ -3441,7 +3448,7 @@
           <a:noFill/>
         </p:spPr>
         <p:txBody>
-          <a:bodyPr wrap="square" anchor="t" lIns="0" rIns="0" tIns="0" bIns="0">
+          <a:bodyPr wrap="square" lIns="0" tIns="0" rIns="0" bIns="0" anchor="t">
             <a:spAutoFit/>
           </a:bodyPr>
           <a:lstStyle/>
@@ -3476,7 +3483,7 @@
           <a:noFill/>
         </p:spPr>
         <p:txBody>
-          <a:bodyPr wrap="square" anchor="t" lIns="0" rIns="0" tIns="0" bIns="0">
+          <a:bodyPr wrap="square" lIns="0" tIns="0" rIns="0" bIns="0" anchor="t">
             <a:spAutoFit/>
           </a:bodyPr>
           <a:lstStyle/>
@@ -3512,7 +3519,7 @@
 </file>
 
 <file path=ppt/slides/slide10.xml><?xml version="1.0" encoding="utf-8"?>
-<p:sld xmlns:a="http://schemas.openxmlformats.org/drawingml/2006/main" xmlns:p="http://schemas.openxmlformats.org/presentationml/2006/main" xmlns:r="http://schemas.openxmlformats.org/officeDocument/2006/relationships">
+<p:sld xmlns:a="http://schemas.openxmlformats.org/drawingml/2006/main" xmlns:r="http://schemas.openxmlformats.org/officeDocument/2006/relationships" xmlns:p="http://schemas.openxmlformats.org/presentationml/2006/main">
   <p:cSld>
     <p:spTree>
       <p:nvGrpSpPr>
@@ -3520,7 +3527,14 @@
         <p:cNvGrpSpPr/>
         <p:nvPr/>
       </p:nvGrpSpPr>
-      <p:grpSpPr/>
+      <p:grpSpPr>
+        <a:xfrm>
+          <a:off x="0" y="0"/>
+          <a:ext cx="0" cy="0"/>
+          <a:chOff x="0" y="0"/>
+          <a:chExt cx="0" cy="0"/>
+        </a:xfrm>
+      </p:grpSpPr>
       <p:sp>
         <p:nvSpPr>
           <p:cNvPr id="2" name="Rectangle 1"/>
@@ -3562,6 +3576,7 @@
           <a:lstStyle/>
           <a:p>
             <a:pPr algn="ctr"/>
+            <a:endParaRPr/>
           </a:p>
         </p:txBody>
       </p:sp>
@@ -3582,7 +3597,7 @@
           <a:noFill/>
         </p:spPr>
         <p:txBody>
-          <a:bodyPr wrap="square" anchor="t" lIns="0" rIns="0" tIns="0" bIns="0">
+          <a:bodyPr wrap="square" lIns="0" tIns="0" rIns="0" bIns="0" anchor="t">
             <a:spAutoFit/>
           </a:bodyPr>
           <a:lstStyle/>
@@ -3617,7 +3632,7 @@
           <a:noFill/>
         </p:spPr>
         <p:txBody>
-          <a:bodyPr wrap="square" anchor="t" lIns="0" rIns="0" tIns="0" bIns="0">
+          <a:bodyPr wrap="square" lIns="0" tIns="0" rIns="0" bIns="0" anchor="t">
             <a:spAutoFit/>
           </a:bodyPr>
           <a:lstStyle/>
@@ -3652,7 +3667,7 @@
           <a:noFill/>
         </p:spPr>
         <p:txBody>
-          <a:bodyPr wrap="square" anchor="t" lIns="0" rIns="0" tIns="0" bIns="0">
+          <a:bodyPr wrap="square" lIns="0" tIns="0" rIns="0" bIns="0" anchor="t">
             <a:spAutoFit/>
           </a:bodyPr>
           <a:lstStyle/>
@@ -3687,21 +3702,13 @@
           <a:noFill/>
         </p:spPr>
         <p:txBody>
-          <a:bodyPr wrap="square" anchor="t" lIns="0" rIns="0" tIns="0" bIns="0">
+          <a:bodyPr wrap="square" lIns="0" tIns="0" rIns="0" bIns="0" anchor="t">
             <a:spAutoFit/>
           </a:bodyPr>
           <a:lstStyle/>
           <a:p>
             <a:pPr algn="l"/>
-            <a:r>
-              <a:rPr sz="1200" b="1">
-                <a:solidFill>
-                  <a:srgbClr val="8B949E"/>
-                </a:solidFill>
-                <a:latin typeface="Segoe UI"/>
-              </a:rPr>
-              <a:t/>
-            </a:r>
+            <a:endParaRPr/>
           </a:p>
         </p:txBody>
       </p:sp>
@@ -3722,7 +3729,7 @@
           <a:noFill/>
         </p:spPr>
         <p:txBody>
-          <a:bodyPr wrap="square" anchor="t" lIns="0" rIns="0" tIns="0" bIns="0">
+          <a:bodyPr wrap="square" lIns="0" tIns="0" rIns="0" bIns="0" anchor="t">
             <a:spAutoFit/>
           </a:bodyPr>
           <a:lstStyle/>
@@ -3757,7 +3764,7 @@
           <a:noFill/>
         </p:spPr>
         <p:txBody>
-          <a:bodyPr wrap="square" anchor="t" lIns="0" rIns="0" tIns="0" bIns="0">
+          <a:bodyPr wrap="square" lIns="0" tIns="0" rIns="0" bIns="0" anchor="t">
             <a:spAutoFit/>
           </a:bodyPr>
           <a:lstStyle/>
@@ -3792,7 +3799,7 @@
           <a:noFill/>
         </p:spPr>
         <p:txBody>
-          <a:bodyPr wrap="square" anchor="t" lIns="0" rIns="0" tIns="0" bIns="0">
+          <a:bodyPr wrap="square" lIns="0" tIns="0" rIns="0" bIns="0" anchor="t">
             <a:spAutoFit/>
           </a:bodyPr>
           <a:lstStyle/>
@@ -3851,6 +3858,7 @@
           <a:lstStyle/>
           <a:p>
             <a:pPr algn="ctr"/>
+            <a:endParaRPr/>
           </a:p>
         </p:txBody>
       </p:sp>
@@ -3871,7 +3879,7 @@
           <a:noFill/>
         </p:spPr>
         <p:txBody>
-          <a:bodyPr wrap="square" anchor="ctr" lIns="0" rIns="0" tIns="0" bIns="0">
+          <a:bodyPr wrap="square" lIns="0" tIns="0" rIns="0" bIns="0" anchor="ctr">
             <a:spAutoFit/>
           </a:bodyPr>
           <a:lstStyle/>
@@ -3906,7 +3914,7 @@
           <a:noFill/>
         </p:spPr>
         <p:txBody>
-          <a:bodyPr wrap="square" anchor="ctr" lIns="0" rIns="0" tIns="0" bIns="0">
+          <a:bodyPr wrap="square" lIns="0" tIns="0" rIns="0" bIns="0" anchor="ctr">
             <a:spAutoFit/>
           </a:bodyPr>
           <a:lstStyle/>
@@ -3941,7 +3949,7 @@
           <a:noFill/>
         </p:spPr>
         <p:txBody>
-          <a:bodyPr wrap="square" anchor="ctr" lIns="0" rIns="0" tIns="0" bIns="0">
+          <a:bodyPr wrap="square" lIns="0" tIns="0" rIns="0" bIns="0" anchor="ctr">
             <a:spAutoFit/>
           </a:bodyPr>
           <a:lstStyle/>
@@ -3976,7 +3984,7 @@
           <a:noFill/>
         </p:spPr>
         <p:txBody>
-          <a:bodyPr wrap="square" anchor="ctr" lIns="0" rIns="0" tIns="0" bIns="0">
+          <a:bodyPr wrap="square" lIns="0" tIns="0" rIns="0" bIns="0" anchor="ctr">
             <a:spAutoFit/>
           </a:bodyPr>
           <a:lstStyle/>
@@ -4035,6 +4043,7 @@
           <a:lstStyle/>
           <a:p>
             <a:pPr algn="ctr"/>
+            <a:endParaRPr/>
           </a:p>
         </p:txBody>
       </p:sp>
@@ -4055,7 +4064,7 @@
           <a:noFill/>
         </p:spPr>
         <p:txBody>
-          <a:bodyPr wrap="square" anchor="ctr" lIns="0" rIns="0" tIns="0" bIns="0">
+          <a:bodyPr wrap="square" lIns="0" tIns="0" rIns="0" bIns="0" anchor="ctr">
             <a:spAutoFit/>
           </a:bodyPr>
           <a:lstStyle/>
@@ -4090,7 +4099,7 @@
           <a:noFill/>
         </p:spPr>
         <p:txBody>
-          <a:bodyPr wrap="square" anchor="ctr" lIns="0" rIns="0" tIns="0" bIns="0">
+          <a:bodyPr wrap="square" lIns="0" tIns="0" rIns="0" bIns="0" anchor="ctr">
             <a:spAutoFit/>
           </a:bodyPr>
           <a:lstStyle/>
@@ -4125,7 +4134,7 @@
           <a:noFill/>
         </p:spPr>
         <p:txBody>
-          <a:bodyPr wrap="square" anchor="ctr" lIns="0" rIns="0" tIns="0" bIns="0">
+          <a:bodyPr wrap="square" lIns="0" tIns="0" rIns="0" bIns="0" anchor="ctr">
             <a:spAutoFit/>
           </a:bodyPr>
           <a:lstStyle/>
@@ -4160,7 +4169,7 @@
           <a:noFill/>
         </p:spPr>
         <p:txBody>
-          <a:bodyPr wrap="square" anchor="ctr" lIns="0" rIns="0" tIns="0" bIns="0">
+          <a:bodyPr wrap="square" lIns="0" tIns="0" rIns="0" bIns="0" anchor="ctr">
             <a:spAutoFit/>
           </a:bodyPr>
           <a:lstStyle/>
@@ -4219,6 +4228,7 @@
           <a:lstStyle/>
           <a:p>
             <a:pPr algn="ctr"/>
+            <a:endParaRPr/>
           </a:p>
         </p:txBody>
       </p:sp>
@@ -4263,6 +4273,7 @@
           <a:lstStyle/>
           <a:p>
             <a:pPr algn="ctr"/>
+            <a:endParaRPr/>
           </a:p>
         </p:txBody>
       </p:sp>
@@ -4283,7 +4294,7 @@
           <a:noFill/>
         </p:spPr>
         <p:txBody>
-          <a:bodyPr wrap="square" anchor="ctr" lIns="0" rIns="0" tIns="0" bIns="0">
+          <a:bodyPr wrap="square" lIns="0" tIns="0" rIns="0" bIns="0" anchor="ctr">
             <a:spAutoFit/>
           </a:bodyPr>
           <a:lstStyle/>
@@ -4330,7 +4341,7 @@
           <a:noFill/>
         </p:spPr>
         <p:txBody>
-          <a:bodyPr wrap="square" anchor="t" lIns="0" rIns="0" tIns="0" bIns="0">
+          <a:bodyPr wrap="square" lIns="0" tIns="0" rIns="0" bIns="0" anchor="t">
             <a:spAutoFit/>
           </a:bodyPr>
           <a:lstStyle/>
@@ -4357,7 +4368,7 @@
 </file>
 
 <file path=ppt/slides/slide11.xml><?xml version="1.0" encoding="utf-8"?>
-<p:sld xmlns:a="http://schemas.openxmlformats.org/drawingml/2006/main" xmlns:p="http://schemas.openxmlformats.org/presentationml/2006/main" xmlns:r="http://schemas.openxmlformats.org/officeDocument/2006/relationships">
+<p:sld xmlns:a="http://schemas.openxmlformats.org/drawingml/2006/main" xmlns:r="http://schemas.openxmlformats.org/officeDocument/2006/relationships" xmlns:p="http://schemas.openxmlformats.org/presentationml/2006/main">
   <p:cSld>
     <p:spTree>
       <p:nvGrpSpPr>
@@ -4365,7 +4376,14 @@
         <p:cNvGrpSpPr/>
         <p:nvPr/>
       </p:nvGrpSpPr>
-      <p:grpSpPr/>
+      <p:grpSpPr>
+        <a:xfrm>
+          <a:off x="0" y="0"/>
+          <a:ext cx="0" cy="0"/>
+          <a:chOff x="0" y="0"/>
+          <a:chExt cx="0" cy="0"/>
+        </a:xfrm>
+      </p:grpSpPr>
       <p:sp>
         <p:nvSpPr>
           <p:cNvPr id="2" name="Rectangle 1"/>
@@ -4407,6 +4425,7 @@
           <a:lstStyle/>
           <a:p>
             <a:pPr algn="ctr"/>
+            <a:endParaRPr/>
           </a:p>
         </p:txBody>
       </p:sp>
@@ -4427,7 +4446,7 @@
           <a:noFill/>
         </p:spPr>
         <p:txBody>
-          <a:bodyPr wrap="square" anchor="t" lIns="0" rIns="0" tIns="0" bIns="0">
+          <a:bodyPr wrap="square" lIns="0" tIns="0" rIns="0" bIns="0" anchor="t">
             <a:spAutoFit/>
           </a:bodyPr>
           <a:lstStyle/>
@@ -4462,7 +4481,7 @@
           <a:noFill/>
         </p:spPr>
         <p:txBody>
-          <a:bodyPr wrap="square" anchor="t" lIns="0" rIns="0" tIns="0" bIns="0">
+          <a:bodyPr wrap="square" lIns="0" tIns="0" rIns="0" bIns="0" anchor="t">
             <a:spAutoFit/>
           </a:bodyPr>
           <a:lstStyle/>
@@ -4497,7 +4516,7 @@
           <a:noFill/>
         </p:spPr>
         <p:txBody>
-          <a:bodyPr wrap="square" anchor="t" lIns="0" rIns="0" tIns="0" bIns="0">
+          <a:bodyPr wrap="square" lIns="0" tIns="0" rIns="0" bIns="0" anchor="t">
             <a:spAutoFit/>
           </a:bodyPr>
           <a:lstStyle/>
@@ -4556,6 +4575,7 @@
           <a:lstStyle/>
           <a:p>
             <a:pPr algn="ctr"/>
+            <a:endParaRPr/>
           </a:p>
         </p:txBody>
       </p:sp>
@@ -4600,6 +4620,7 @@
           <a:lstStyle/>
           <a:p>
             <a:pPr algn="ctr"/>
+            <a:endParaRPr/>
           </a:p>
         </p:txBody>
       </p:sp>
@@ -4620,7 +4641,7 @@
           <a:noFill/>
         </p:spPr>
         <p:txBody>
-          <a:bodyPr wrap="square" anchor="ctr" lIns="0" rIns="0" tIns="0" bIns="0">
+          <a:bodyPr wrap="square" lIns="0" tIns="0" rIns="0" bIns="0" anchor="ctr">
             <a:spAutoFit/>
           </a:bodyPr>
           <a:lstStyle/>
@@ -4691,6 +4712,7 @@
           <a:lstStyle/>
           <a:p>
             <a:pPr algn="ctr"/>
+            <a:endParaRPr/>
           </a:p>
         </p:txBody>
       </p:sp>
@@ -4735,6 +4757,7 @@
           <a:lstStyle/>
           <a:p>
             <a:pPr algn="ctr"/>
+            <a:endParaRPr/>
           </a:p>
         </p:txBody>
       </p:sp>
@@ -4755,7 +4778,7 @@
           <a:noFill/>
         </p:spPr>
         <p:txBody>
-          <a:bodyPr wrap="square" anchor="ctr" lIns="0" rIns="0" tIns="0" bIns="0">
+          <a:bodyPr wrap="square" lIns="0" tIns="0" rIns="0" bIns="0" anchor="ctr">
             <a:spAutoFit/>
           </a:bodyPr>
           <a:lstStyle/>
@@ -4826,6 +4849,7 @@
           <a:lstStyle/>
           <a:p>
             <a:pPr algn="ctr"/>
+            <a:endParaRPr/>
           </a:p>
         </p:txBody>
       </p:sp>
@@ -4846,7 +4870,7 @@
           <a:noFill/>
         </p:spPr>
         <p:txBody>
-          <a:bodyPr wrap="square" anchor="t" lIns="0" rIns="0" tIns="0" bIns="0">
+          <a:bodyPr wrap="square" lIns="0" tIns="0" rIns="0" bIns="0" anchor="t">
             <a:spAutoFit/>
           </a:bodyPr>
           <a:lstStyle/>
@@ -4917,7 +4941,7 @@
           <a:noFill/>
         </p:spPr>
         <p:txBody>
-          <a:bodyPr wrap="square" anchor="t" lIns="0" rIns="0" tIns="0" bIns="0">
+          <a:bodyPr wrap="square" lIns="0" tIns="0" rIns="0" bIns="0" anchor="t">
             <a:spAutoFit/>
           </a:bodyPr>
           <a:lstStyle/>
@@ -4957,7 +4981,7 @@
 </file>
 
 <file path=ppt/slides/slide12.xml><?xml version="1.0" encoding="utf-8"?>
-<p:sld xmlns:a="http://schemas.openxmlformats.org/drawingml/2006/main" xmlns:p="http://schemas.openxmlformats.org/presentationml/2006/main" xmlns:r="http://schemas.openxmlformats.org/officeDocument/2006/relationships">
+<p:sld xmlns:a="http://schemas.openxmlformats.org/drawingml/2006/main" xmlns:r="http://schemas.openxmlformats.org/officeDocument/2006/relationships" xmlns:p="http://schemas.openxmlformats.org/presentationml/2006/main">
   <p:cSld>
     <p:spTree>
       <p:nvGrpSpPr>
@@ -4965,7 +4989,14 @@
         <p:cNvGrpSpPr/>
         <p:nvPr/>
       </p:nvGrpSpPr>
-      <p:grpSpPr/>
+      <p:grpSpPr>
+        <a:xfrm>
+          <a:off x="0" y="0"/>
+          <a:ext cx="0" cy="0"/>
+          <a:chOff x="0" y="0"/>
+          <a:chExt cx="0" cy="0"/>
+        </a:xfrm>
+      </p:grpSpPr>
       <p:sp>
         <p:nvSpPr>
           <p:cNvPr id="2" name="Rectangle 1"/>
@@ -5007,6 +5038,7 @@
           <a:lstStyle/>
           <a:p>
             <a:pPr algn="ctr"/>
+            <a:endParaRPr/>
           </a:p>
         </p:txBody>
       </p:sp>
@@ -5027,7 +5059,7 @@
           <a:noFill/>
         </p:spPr>
         <p:txBody>
-          <a:bodyPr wrap="square" anchor="t" lIns="0" rIns="0" tIns="0" bIns="0">
+          <a:bodyPr wrap="square" lIns="0" tIns="0" rIns="0" bIns="0" anchor="t">
             <a:spAutoFit/>
           </a:bodyPr>
           <a:lstStyle/>
@@ -5062,7 +5094,7 @@
           <a:noFill/>
         </p:spPr>
         <p:txBody>
-          <a:bodyPr wrap="square" anchor="t" lIns="0" rIns="0" tIns="0" bIns="0">
+          <a:bodyPr wrap="square" lIns="0" tIns="0" rIns="0" bIns="0" anchor="t">
             <a:spAutoFit/>
           </a:bodyPr>
           <a:lstStyle/>
@@ -5097,7 +5129,7 @@
           <a:noFill/>
         </p:spPr>
         <p:txBody>
-          <a:bodyPr wrap="square" anchor="t" lIns="0" rIns="0" tIns="0" bIns="0">
+          <a:bodyPr wrap="square" lIns="0" tIns="0" rIns="0" bIns="0" anchor="t">
             <a:spAutoFit/>
           </a:bodyPr>
           <a:lstStyle/>
@@ -5156,6 +5188,7 @@
           <a:lstStyle/>
           <a:p>
             <a:pPr algn="ctr"/>
+            <a:endParaRPr/>
           </a:p>
         </p:txBody>
       </p:sp>
@@ -5200,6 +5233,7 @@
           <a:lstStyle/>
           <a:p>
             <a:pPr algn="ctr"/>
+            <a:endParaRPr/>
           </a:p>
         </p:txBody>
       </p:sp>
@@ -5220,7 +5254,7 @@
           <a:noFill/>
         </p:spPr>
         <p:txBody>
-          <a:bodyPr wrap="square" anchor="ctr" lIns="0" rIns="0" tIns="0" bIns="0">
+          <a:bodyPr wrap="square" lIns="0" tIns="0" rIns="0" bIns="0" anchor="ctr">
             <a:spAutoFit/>
           </a:bodyPr>
           <a:lstStyle/>
@@ -5288,6 +5322,7 @@
           <a:lstStyle/>
           <a:p>
             <a:pPr algn="ctr"/>
+            <a:endParaRPr/>
           </a:p>
         </p:txBody>
       </p:sp>
@@ -5332,6 +5367,7 @@
           <a:lstStyle/>
           <a:p>
             <a:pPr algn="ctr"/>
+            <a:endParaRPr/>
           </a:p>
         </p:txBody>
       </p:sp>
@@ -5352,7 +5388,7 @@
           <a:noFill/>
         </p:spPr>
         <p:txBody>
-          <a:bodyPr wrap="square" anchor="ctr" lIns="0" rIns="0" tIns="0" bIns="0">
+          <a:bodyPr wrap="square" lIns="0" tIns="0" rIns="0" bIns="0" anchor="ctr">
             <a:spAutoFit/>
           </a:bodyPr>
           <a:lstStyle/>
@@ -5435,6 +5471,7 @@
           <a:lstStyle/>
           <a:p>
             <a:pPr algn="ctr"/>
+            <a:endParaRPr/>
           </a:p>
         </p:txBody>
       </p:sp>
@@ -5479,6 +5516,7 @@
           <a:lstStyle/>
           <a:p>
             <a:pPr algn="ctr"/>
+            <a:endParaRPr/>
           </a:p>
         </p:txBody>
       </p:sp>
@@ -5499,7 +5537,7 @@
           <a:noFill/>
         </p:spPr>
         <p:txBody>
-          <a:bodyPr wrap="square" anchor="ctr" lIns="0" rIns="0" tIns="0" bIns="0">
+          <a:bodyPr wrap="square" lIns="0" tIns="0" rIns="0" bIns="0" anchor="ctr">
             <a:spAutoFit/>
           </a:bodyPr>
           <a:lstStyle/>
@@ -5582,6 +5620,7 @@
           <a:lstStyle/>
           <a:p>
             <a:pPr algn="ctr"/>
+            <a:endParaRPr/>
           </a:p>
         </p:txBody>
       </p:sp>
@@ -5626,6 +5665,7 @@
           <a:lstStyle/>
           <a:p>
             <a:pPr algn="ctr"/>
+            <a:endParaRPr/>
           </a:p>
         </p:txBody>
       </p:sp>
@@ -5646,7 +5686,7 @@
           <a:noFill/>
         </p:spPr>
         <p:txBody>
-          <a:bodyPr wrap="square" anchor="ctr" lIns="0" rIns="0" tIns="0" bIns="0">
+          <a:bodyPr wrap="square" lIns="0" tIns="0" rIns="0" bIns="0" anchor="ctr">
             <a:spAutoFit/>
           </a:bodyPr>
           <a:lstStyle/>
@@ -5705,7 +5745,7 @@
           <a:noFill/>
         </p:spPr>
         <p:txBody>
-          <a:bodyPr wrap="square" anchor="t" lIns="0" rIns="0" tIns="0" bIns="0">
+          <a:bodyPr wrap="square" lIns="0" tIns="0" rIns="0" bIns="0" anchor="t">
             <a:spAutoFit/>
           </a:bodyPr>
           <a:lstStyle/>
@@ -5745,7 +5785,7 @@
 </file>
 
 <file path=ppt/slides/slide2.xml><?xml version="1.0" encoding="utf-8"?>
-<p:sld xmlns:a="http://schemas.openxmlformats.org/drawingml/2006/main" xmlns:p="http://schemas.openxmlformats.org/presentationml/2006/main" xmlns:r="http://schemas.openxmlformats.org/officeDocument/2006/relationships">
+<p:sld xmlns:a="http://schemas.openxmlformats.org/drawingml/2006/main" xmlns:r="http://schemas.openxmlformats.org/officeDocument/2006/relationships" xmlns:p="http://schemas.openxmlformats.org/presentationml/2006/main">
   <p:cSld>
     <p:spTree>
       <p:nvGrpSpPr>
@@ -5753,7 +5793,14 @@
         <p:cNvGrpSpPr/>
         <p:nvPr/>
       </p:nvGrpSpPr>
-      <p:grpSpPr/>
+      <p:grpSpPr>
+        <a:xfrm>
+          <a:off x="0" y="0"/>
+          <a:ext cx="0" cy="0"/>
+          <a:chOff x="0" y="0"/>
+          <a:chExt cx="0" cy="0"/>
+        </a:xfrm>
+      </p:grpSpPr>
       <p:sp>
         <p:nvSpPr>
           <p:cNvPr id="2" name="Rectangle 1"/>
@@ -5795,6 +5842,7 @@
           <a:lstStyle/>
           <a:p>
             <a:pPr algn="ctr"/>
+            <a:endParaRPr/>
           </a:p>
         </p:txBody>
       </p:sp>
@@ -5815,7 +5863,7 @@
           <a:noFill/>
         </p:spPr>
         <p:txBody>
-          <a:bodyPr wrap="square" anchor="t" lIns="0" rIns="0" tIns="0" bIns="0">
+          <a:bodyPr wrap="square" lIns="0" tIns="0" rIns="0" bIns="0" anchor="t">
             <a:spAutoFit/>
           </a:bodyPr>
           <a:lstStyle/>
@@ -5850,7 +5898,7 @@
           <a:noFill/>
         </p:spPr>
         <p:txBody>
-          <a:bodyPr wrap="square" anchor="t" lIns="0" rIns="0" tIns="0" bIns="0">
+          <a:bodyPr wrap="square" lIns="0" tIns="0" rIns="0" bIns="0" anchor="t">
             <a:spAutoFit/>
           </a:bodyPr>
           <a:lstStyle/>
@@ -5885,7 +5933,7 @@
           <a:noFill/>
         </p:spPr>
         <p:txBody>
-          <a:bodyPr wrap="square" anchor="t" lIns="0" rIns="0" tIns="0" bIns="0">
+          <a:bodyPr wrap="square" lIns="0" tIns="0" rIns="0" bIns="0" anchor="t">
             <a:spAutoFit/>
           </a:bodyPr>
           <a:lstStyle/>
@@ -5944,6 +5992,7 @@
           <a:lstStyle/>
           <a:p>
             <a:pPr algn="ctr"/>
+            <a:endParaRPr/>
           </a:p>
         </p:txBody>
       </p:sp>
@@ -5988,6 +6037,7 @@
           <a:lstStyle/>
           <a:p>
             <a:pPr algn="ctr"/>
+            <a:endParaRPr/>
           </a:p>
         </p:txBody>
       </p:sp>
@@ -6008,7 +6058,7 @@
           <a:noFill/>
         </p:spPr>
         <p:txBody>
-          <a:bodyPr wrap="square" anchor="ctr" lIns="0" rIns="0" tIns="0" bIns="0">
+          <a:bodyPr wrap="square" lIns="0" tIns="0" rIns="0" bIns="0" anchor="ctr">
             <a:spAutoFit/>
           </a:bodyPr>
           <a:lstStyle/>
@@ -6079,6 +6129,7 @@
           <a:lstStyle/>
           <a:p>
             <a:pPr algn="ctr"/>
+            <a:endParaRPr/>
           </a:p>
         </p:txBody>
       </p:sp>
@@ -6123,6 +6174,7 @@
           <a:lstStyle/>
           <a:p>
             <a:pPr algn="ctr"/>
+            <a:endParaRPr/>
           </a:p>
         </p:txBody>
       </p:sp>
@@ -6143,7 +6195,7 @@
           <a:noFill/>
         </p:spPr>
         <p:txBody>
-          <a:bodyPr wrap="square" anchor="ctr" lIns="0" rIns="0" tIns="0" bIns="0">
+          <a:bodyPr wrap="square" lIns="0" tIns="0" rIns="0" bIns="0" anchor="ctr">
             <a:spAutoFit/>
           </a:bodyPr>
           <a:lstStyle/>
@@ -6214,6 +6266,7 @@
           <a:lstStyle/>
           <a:p>
             <a:pPr algn="ctr"/>
+            <a:endParaRPr/>
           </a:p>
         </p:txBody>
       </p:sp>
@@ -6258,6 +6311,7 @@
           <a:lstStyle/>
           <a:p>
             <a:pPr algn="ctr"/>
+            <a:endParaRPr/>
           </a:p>
         </p:txBody>
       </p:sp>
@@ -6278,7 +6332,7 @@
           <a:noFill/>
         </p:spPr>
         <p:txBody>
-          <a:bodyPr wrap="square" anchor="ctr" lIns="0" rIns="0" tIns="0" bIns="0">
+          <a:bodyPr wrap="square" lIns="0" tIns="0" rIns="0" bIns="0" anchor="ctr">
             <a:spAutoFit/>
           </a:bodyPr>
           <a:lstStyle/>
@@ -6314,7 +6368,7 @@
         <p:spPr>
           <a:xfrm>
             <a:off x="640080" y="5257800"/>
-            <a:ext cx="10972800" cy="1280160"/>
+            <a:ext cx="10972800" cy="651460"/>
           </a:xfrm>
           <a:prstGeom prst="rect">
             <a:avLst/>
@@ -6322,7 +6376,7 @@
           <a:noFill/>
         </p:spPr>
         <p:txBody>
-          <a:bodyPr wrap="square" anchor="t" lIns="0" rIns="0" tIns="0" bIns="0">
+          <a:bodyPr wrap="square" lIns="0" tIns="0" rIns="0" bIns="0" anchor="t">
             <a:spAutoFit/>
           </a:bodyPr>
           <a:lstStyle/>
@@ -6339,7 +6393,43 @@
                 </a:solidFill>
                 <a:latin typeface="Segoe UI"/>
               </a:rPr>
-              <a:t>Vincolo del professore (modelli noti a priori):</a:t>
+              <a:t>Vincolo(</a:t>
+            </a:r>
+            <a:r>
+              <a:rPr sz="1300" b="1" dirty="0" err="1">
+                <a:solidFill>
+                  <a:srgbClr val="8B949E"/>
+                </a:solidFill>
+                <a:latin typeface="Segoe UI"/>
+              </a:rPr>
+              <a:t>modelli</a:t>
+            </a:r>
+            <a:r>
+              <a:rPr sz="1300" b="1" dirty="0">
+                <a:solidFill>
+                  <a:srgbClr val="8B949E"/>
+                </a:solidFill>
+                <a:latin typeface="Segoe UI"/>
+              </a:rPr>
+              <a:t> </a:t>
+            </a:r>
+            <a:r>
+              <a:rPr sz="1300" b="1" dirty="0" err="1">
+                <a:solidFill>
+                  <a:srgbClr val="8B949E"/>
+                </a:solidFill>
+                <a:latin typeface="Segoe UI"/>
+              </a:rPr>
+              <a:t>noti</a:t>
+            </a:r>
+            <a:r>
+              <a:rPr sz="1300" b="1" dirty="0">
+                <a:solidFill>
+                  <a:srgbClr val="8B949E"/>
+                </a:solidFill>
+                <a:latin typeface="Segoe UI"/>
+              </a:rPr>
+              <a:t> a priori):</a:t>
             </a:r>
           </a:p>
           <a:p>
@@ -6349,13 +6439,301 @@
               </a:spcAft>
             </a:pPr>
             <a:r>
-              <a:rPr sz="1300" b="0">
+              <a:rPr sz="1300" b="0" dirty="0">
                 <a:solidFill>
                   <a:srgbClr val="E6EDF3"/>
                 </a:solidFill>
                 <a:latin typeface="Segoe UI"/>
               </a:rPr>
-              <a:t>a parità di tipo di feature la dimensione è fissa nella stessa rete — è una proprietà della TOPOLOGIA (condivisa da tutti i nodi), non un parametro del modello. I modelli scelgono solo QUALI tipi usare.</a:t>
+              <a:t>a </a:t>
+            </a:r>
+            <a:r>
+              <a:rPr sz="1300" b="0" dirty="0" err="1">
+                <a:solidFill>
+                  <a:srgbClr val="E6EDF3"/>
+                </a:solidFill>
+                <a:latin typeface="Segoe UI"/>
+              </a:rPr>
+              <a:t>parità</a:t>
+            </a:r>
+            <a:r>
+              <a:rPr sz="1300" b="0" dirty="0">
+                <a:solidFill>
+                  <a:srgbClr val="E6EDF3"/>
+                </a:solidFill>
+                <a:latin typeface="Segoe UI"/>
+              </a:rPr>
+              <a:t> di </a:t>
+            </a:r>
+            <a:r>
+              <a:rPr sz="1300" b="0" dirty="0" err="1">
+                <a:solidFill>
+                  <a:srgbClr val="E6EDF3"/>
+                </a:solidFill>
+                <a:latin typeface="Segoe UI"/>
+              </a:rPr>
+              <a:t>tipo</a:t>
+            </a:r>
+            <a:r>
+              <a:rPr sz="1300" b="0" dirty="0">
+                <a:solidFill>
+                  <a:srgbClr val="E6EDF3"/>
+                </a:solidFill>
+                <a:latin typeface="Segoe UI"/>
+              </a:rPr>
+              <a:t> di feature la </a:t>
+            </a:r>
+            <a:r>
+              <a:rPr sz="1300" b="0" dirty="0" err="1">
+                <a:solidFill>
+                  <a:srgbClr val="E6EDF3"/>
+                </a:solidFill>
+                <a:latin typeface="Segoe UI"/>
+              </a:rPr>
+              <a:t>dimensione</a:t>
+            </a:r>
+            <a:r>
+              <a:rPr sz="1300" b="0" dirty="0">
+                <a:solidFill>
+                  <a:srgbClr val="E6EDF3"/>
+                </a:solidFill>
+                <a:latin typeface="Segoe UI"/>
+              </a:rPr>
+              <a:t> è </a:t>
+            </a:r>
+            <a:r>
+              <a:rPr sz="1300" b="0" dirty="0" err="1">
+                <a:solidFill>
+                  <a:srgbClr val="E6EDF3"/>
+                </a:solidFill>
+                <a:latin typeface="Segoe UI"/>
+              </a:rPr>
+              <a:t>fissa</a:t>
+            </a:r>
+            <a:r>
+              <a:rPr sz="1300" b="0" dirty="0">
+                <a:solidFill>
+                  <a:srgbClr val="E6EDF3"/>
+                </a:solidFill>
+                <a:latin typeface="Segoe UI"/>
+              </a:rPr>
+              <a:t> </a:t>
+            </a:r>
+            <a:r>
+              <a:rPr sz="1300" b="0" dirty="0" err="1">
+                <a:solidFill>
+                  <a:srgbClr val="E6EDF3"/>
+                </a:solidFill>
+                <a:latin typeface="Segoe UI"/>
+              </a:rPr>
+              <a:t>nella</a:t>
+            </a:r>
+            <a:r>
+              <a:rPr sz="1300" b="0" dirty="0">
+                <a:solidFill>
+                  <a:srgbClr val="E6EDF3"/>
+                </a:solidFill>
+                <a:latin typeface="Segoe UI"/>
+              </a:rPr>
+              <a:t> </a:t>
+            </a:r>
+            <a:r>
+              <a:rPr sz="1300" b="0" dirty="0" err="1">
+                <a:solidFill>
+                  <a:srgbClr val="E6EDF3"/>
+                </a:solidFill>
+                <a:latin typeface="Segoe UI"/>
+              </a:rPr>
+              <a:t>stessa</a:t>
+            </a:r>
+            <a:r>
+              <a:rPr sz="1300" b="0" dirty="0">
+                <a:solidFill>
+                  <a:srgbClr val="E6EDF3"/>
+                </a:solidFill>
+                <a:latin typeface="Segoe UI"/>
+              </a:rPr>
+              <a:t> rete — è </a:t>
+            </a:r>
+            <a:r>
+              <a:rPr sz="1300" b="0" dirty="0" err="1">
+                <a:solidFill>
+                  <a:srgbClr val="E6EDF3"/>
+                </a:solidFill>
+                <a:latin typeface="Segoe UI"/>
+              </a:rPr>
+              <a:t>una</a:t>
+            </a:r>
+            <a:r>
+              <a:rPr sz="1300" b="0" dirty="0">
+                <a:solidFill>
+                  <a:srgbClr val="E6EDF3"/>
+                </a:solidFill>
+                <a:latin typeface="Segoe UI"/>
+              </a:rPr>
+              <a:t> </a:t>
+            </a:r>
+            <a:r>
+              <a:rPr sz="1300" b="0" dirty="0" err="1">
+                <a:solidFill>
+                  <a:srgbClr val="E6EDF3"/>
+                </a:solidFill>
+                <a:latin typeface="Segoe UI"/>
+              </a:rPr>
+              <a:t>proprietà</a:t>
+            </a:r>
+            <a:r>
+              <a:rPr sz="1300" b="0" dirty="0">
+                <a:solidFill>
+                  <a:srgbClr val="E6EDF3"/>
+                </a:solidFill>
+                <a:latin typeface="Segoe UI"/>
+              </a:rPr>
+              <a:t> </a:t>
+            </a:r>
+            <a:r>
+              <a:rPr sz="1300" b="0" dirty="0" err="1">
+                <a:solidFill>
+                  <a:srgbClr val="E6EDF3"/>
+                </a:solidFill>
+                <a:latin typeface="Segoe UI"/>
+              </a:rPr>
+              <a:t>della</a:t>
+            </a:r>
+            <a:r>
+              <a:rPr sz="1300" b="0" dirty="0">
+                <a:solidFill>
+                  <a:srgbClr val="E6EDF3"/>
+                </a:solidFill>
+                <a:latin typeface="Segoe UI"/>
+              </a:rPr>
+              <a:t> TOPOLOGIA (</a:t>
+            </a:r>
+            <a:r>
+              <a:rPr sz="1300" b="0" dirty="0" err="1">
+                <a:solidFill>
+                  <a:srgbClr val="E6EDF3"/>
+                </a:solidFill>
+                <a:latin typeface="Segoe UI"/>
+              </a:rPr>
+              <a:t>condivisa</a:t>
+            </a:r>
+            <a:r>
+              <a:rPr sz="1300" b="0" dirty="0">
+                <a:solidFill>
+                  <a:srgbClr val="E6EDF3"/>
+                </a:solidFill>
+                <a:latin typeface="Segoe UI"/>
+              </a:rPr>
+              <a:t> da tutti </a:t>
+            </a:r>
+            <a:r>
+              <a:rPr sz="1300" b="0" dirty="0" err="1">
+                <a:solidFill>
+                  <a:srgbClr val="E6EDF3"/>
+                </a:solidFill>
+                <a:latin typeface="Segoe UI"/>
+              </a:rPr>
+              <a:t>i</a:t>
+            </a:r>
+            <a:r>
+              <a:rPr sz="1300" b="0" dirty="0">
+                <a:solidFill>
+                  <a:srgbClr val="E6EDF3"/>
+                </a:solidFill>
+                <a:latin typeface="Segoe UI"/>
+              </a:rPr>
+              <a:t> nodi), non un </a:t>
+            </a:r>
+            <a:r>
+              <a:rPr sz="1300" b="0" dirty="0" err="1">
+                <a:solidFill>
+                  <a:srgbClr val="E6EDF3"/>
+                </a:solidFill>
+                <a:latin typeface="Segoe UI"/>
+              </a:rPr>
+              <a:t>parametro</a:t>
+            </a:r>
+            <a:r>
+              <a:rPr sz="1300" b="0" dirty="0">
+                <a:solidFill>
+                  <a:srgbClr val="E6EDF3"/>
+                </a:solidFill>
+                <a:latin typeface="Segoe UI"/>
+              </a:rPr>
+              <a:t> del </a:t>
+            </a:r>
+            <a:r>
+              <a:rPr sz="1300" b="0" dirty="0" err="1">
+                <a:solidFill>
+                  <a:srgbClr val="E6EDF3"/>
+                </a:solidFill>
+                <a:latin typeface="Segoe UI"/>
+              </a:rPr>
+              <a:t>modello</a:t>
+            </a:r>
+            <a:r>
+              <a:rPr sz="1300" b="0" dirty="0">
+                <a:solidFill>
+                  <a:srgbClr val="E6EDF3"/>
+                </a:solidFill>
+                <a:latin typeface="Segoe UI"/>
+              </a:rPr>
+              <a:t>. I </a:t>
+            </a:r>
+            <a:r>
+              <a:rPr sz="1300" b="0" dirty="0" err="1">
+                <a:solidFill>
+                  <a:srgbClr val="E6EDF3"/>
+                </a:solidFill>
+                <a:latin typeface="Segoe UI"/>
+              </a:rPr>
+              <a:t>modelli</a:t>
+            </a:r>
+            <a:r>
+              <a:rPr sz="1300" b="0" dirty="0">
+                <a:solidFill>
+                  <a:srgbClr val="E6EDF3"/>
+                </a:solidFill>
+                <a:latin typeface="Segoe UI"/>
+              </a:rPr>
+              <a:t> </a:t>
+            </a:r>
+            <a:r>
+              <a:rPr sz="1300" b="0" dirty="0" err="1">
+                <a:solidFill>
+                  <a:srgbClr val="E6EDF3"/>
+                </a:solidFill>
+                <a:latin typeface="Segoe UI"/>
+              </a:rPr>
+              <a:t>scelgono</a:t>
+            </a:r>
+            <a:r>
+              <a:rPr sz="1300" b="0" dirty="0">
+                <a:solidFill>
+                  <a:srgbClr val="E6EDF3"/>
+                </a:solidFill>
+                <a:latin typeface="Segoe UI"/>
+              </a:rPr>
+              <a:t> solo QUALI tipi </a:t>
+            </a:r>
+            <a:r>
+              <a:rPr sz="1300" b="0" dirty="0" err="1">
+                <a:solidFill>
+                  <a:srgbClr val="E6EDF3"/>
+                </a:solidFill>
+                <a:latin typeface="Segoe UI"/>
+              </a:rPr>
+              <a:t>usare</a:t>
+            </a:r>
+            <a:r>
+              <a:rPr sz="1300" b="0" dirty="0">
+                <a:solidFill>
+                  <a:srgbClr val="E6EDF3"/>
+                </a:solidFill>
+                <a:latin typeface="Segoe UI"/>
+              </a:rPr>
+              <a:t>.</a:t>
             </a:r>
           </a:p>
         </p:txBody>
@@ -6369,7 +6747,7 @@
 </file>
 
 <file path=ppt/slides/slide3.xml><?xml version="1.0" encoding="utf-8"?>
-<p:sld xmlns:a="http://schemas.openxmlformats.org/drawingml/2006/main" xmlns:p="http://schemas.openxmlformats.org/presentationml/2006/main" xmlns:r="http://schemas.openxmlformats.org/officeDocument/2006/relationships">
+<p:sld xmlns:a="http://schemas.openxmlformats.org/drawingml/2006/main" xmlns:r="http://schemas.openxmlformats.org/officeDocument/2006/relationships" xmlns:p="http://schemas.openxmlformats.org/presentationml/2006/main">
   <p:cSld>
     <p:spTree>
       <p:nvGrpSpPr>
@@ -6377,7 +6755,14 @@
         <p:cNvGrpSpPr/>
         <p:nvPr/>
       </p:nvGrpSpPr>
-      <p:grpSpPr/>
+      <p:grpSpPr>
+        <a:xfrm>
+          <a:off x="0" y="0"/>
+          <a:ext cx="0" cy="0"/>
+          <a:chOff x="0" y="0"/>
+          <a:chExt cx="0" cy="0"/>
+        </a:xfrm>
+      </p:grpSpPr>
       <p:sp>
         <p:nvSpPr>
           <p:cNvPr id="2" name="Rectangle 1"/>
@@ -6419,6 +6804,7 @@
           <a:lstStyle/>
           <a:p>
             <a:pPr algn="ctr"/>
+            <a:endParaRPr/>
           </a:p>
         </p:txBody>
       </p:sp>
@@ -6439,7 +6825,7 @@
           <a:noFill/>
         </p:spPr>
         <p:txBody>
-          <a:bodyPr wrap="square" anchor="t" lIns="0" rIns="0" tIns="0" bIns="0">
+          <a:bodyPr wrap="square" lIns="0" tIns="0" rIns="0" bIns="0" anchor="t">
             <a:spAutoFit/>
           </a:bodyPr>
           <a:lstStyle/>
@@ -6474,7 +6860,7 @@
           <a:noFill/>
         </p:spPr>
         <p:txBody>
-          <a:bodyPr wrap="square" anchor="t" lIns="0" rIns="0" tIns="0" bIns="0">
+          <a:bodyPr wrap="square" lIns="0" tIns="0" rIns="0" bIns="0" anchor="t">
             <a:spAutoFit/>
           </a:bodyPr>
           <a:lstStyle/>
@@ -6509,7 +6895,7 @@
           <a:noFill/>
         </p:spPr>
         <p:txBody>
-          <a:bodyPr wrap="square" anchor="t" lIns="0" rIns="0" tIns="0" bIns="0">
+          <a:bodyPr wrap="square" lIns="0" tIns="0" rIns="0" bIns="0" anchor="t">
             <a:spAutoFit/>
           </a:bodyPr>
           <a:lstStyle/>
@@ -6568,6 +6954,7 @@
           <a:lstStyle/>
           <a:p>
             <a:pPr algn="ctr"/>
+            <a:endParaRPr/>
           </a:p>
         </p:txBody>
       </p:sp>
@@ -6612,6 +6999,7 @@
           <a:lstStyle/>
           <a:p>
             <a:pPr algn="ctr"/>
+            <a:endParaRPr/>
           </a:p>
         </p:txBody>
       </p:sp>
@@ -6632,7 +7020,7 @@
           <a:noFill/>
         </p:spPr>
         <p:txBody>
-          <a:bodyPr wrap="square" anchor="t" lIns="0" rIns="0" tIns="0" bIns="0">
+          <a:bodyPr wrap="square" lIns="0" tIns="0" rIns="0" bIns="0" anchor="t">
             <a:spAutoFit/>
           </a:bodyPr>
           <a:lstStyle/>
@@ -6667,7 +7055,7 @@
           <a:noFill/>
         </p:spPr>
         <p:txBody>
-          <a:bodyPr wrap="square" anchor="t" lIns="0" rIns="0" tIns="0" bIns="0">
+          <a:bodyPr wrap="square" lIns="0" tIns="0" rIns="0" bIns="0" anchor="t">
             <a:spAutoFit/>
           </a:bodyPr>
           <a:lstStyle/>
@@ -6855,6 +7243,7 @@
           <a:lstStyle/>
           <a:p>
             <a:pPr algn="ctr"/>
+            <a:endParaRPr/>
           </a:p>
         </p:txBody>
       </p:sp>
@@ -6899,6 +7288,7 @@
           <a:lstStyle/>
           <a:p>
             <a:pPr algn="ctr"/>
+            <a:endParaRPr/>
           </a:p>
         </p:txBody>
       </p:sp>
@@ -6919,7 +7309,7 @@
           <a:noFill/>
         </p:spPr>
         <p:txBody>
-          <a:bodyPr wrap="square" anchor="t" lIns="0" rIns="0" tIns="0" bIns="0">
+          <a:bodyPr wrap="square" lIns="0" tIns="0" rIns="0" bIns="0" anchor="t">
             <a:spAutoFit/>
           </a:bodyPr>
           <a:lstStyle/>
@@ -6954,7 +7344,7 @@
           <a:noFill/>
         </p:spPr>
         <p:txBody>
-          <a:bodyPr wrap="square" anchor="t" lIns="0" rIns="0" tIns="0" bIns="0">
+          <a:bodyPr wrap="square" lIns="0" tIns="0" rIns="0" bIns="0" anchor="t">
             <a:spAutoFit/>
           </a:bodyPr>
           <a:lstStyle/>
@@ -7113,6 +7503,7 @@
           <a:lstStyle/>
           <a:p>
             <a:pPr algn="ctr"/>
+            <a:endParaRPr/>
           </a:p>
         </p:txBody>
       </p:sp>
@@ -7157,6 +7548,7 @@
           <a:lstStyle/>
           <a:p>
             <a:pPr algn="ctr"/>
+            <a:endParaRPr/>
           </a:p>
         </p:txBody>
       </p:sp>
@@ -7177,7 +7569,7 @@
           <a:noFill/>
         </p:spPr>
         <p:txBody>
-          <a:bodyPr wrap="square" anchor="t" lIns="0" rIns="0" tIns="0" bIns="0">
+          <a:bodyPr wrap="square" lIns="0" tIns="0" rIns="0" bIns="0" anchor="t">
             <a:spAutoFit/>
           </a:bodyPr>
           <a:lstStyle/>
@@ -7212,7 +7604,7 @@
           <a:noFill/>
         </p:spPr>
         <p:txBody>
-          <a:bodyPr wrap="square" anchor="t" lIns="0" rIns="0" tIns="0" bIns="0">
+          <a:bodyPr wrap="square" lIns="0" tIns="0" rIns="0" bIns="0" anchor="t">
             <a:spAutoFit/>
           </a:bodyPr>
           <a:lstStyle/>
@@ -7315,7 +7707,7 @@
           <a:noFill/>
         </p:spPr>
         <p:txBody>
-          <a:bodyPr wrap="square" anchor="t" lIns="0" rIns="0" tIns="0" bIns="0">
+          <a:bodyPr wrap="square" lIns="0" tIns="0" rIns="0" bIns="0" anchor="t">
             <a:spAutoFit/>
           </a:bodyPr>
           <a:lstStyle/>
@@ -7405,7 +7797,7 @@
 </file>
 
 <file path=ppt/slides/slide4.xml><?xml version="1.0" encoding="utf-8"?>
-<p:sld xmlns:a="http://schemas.openxmlformats.org/drawingml/2006/main" xmlns:p="http://schemas.openxmlformats.org/presentationml/2006/main" xmlns:r="http://schemas.openxmlformats.org/officeDocument/2006/relationships">
+<p:sld xmlns:a="http://schemas.openxmlformats.org/drawingml/2006/main" xmlns:r="http://schemas.openxmlformats.org/officeDocument/2006/relationships" xmlns:p="http://schemas.openxmlformats.org/presentationml/2006/main">
   <p:cSld>
     <p:spTree>
       <p:nvGrpSpPr>
@@ -7413,7 +7805,14 @@
         <p:cNvGrpSpPr/>
         <p:nvPr/>
       </p:nvGrpSpPr>
-      <p:grpSpPr/>
+      <p:grpSpPr>
+        <a:xfrm>
+          <a:off x="0" y="0"/>
+          <a:ext cx="0" cy="0"/>
+          <a:chOff x="0" y="0"/>
+          <a:chExt cx="0" cy="0"/>
+        </a:xfrm>
+      </p:grpSpPr>
       <p:sp>
         <p:nvSpPr>
           <p:cNvPr id="2" name="Rectangle 1"/>
@@ -7455,6 +7854,7 @@
           <a:lstStyle/>
           <a:p>
             <a:pPr algn="ctr"/>
+            <a:endParaRPr/>
           </a:p>
         </p:txBody>
       </p:sp>
@@ -7475,7 +7875,7 @@
           <a:noFill/>
         </p:spPr>
         <p:txBody>
-          <a:bodyPr wrap="square" anchor="t" lIns="0" rIns="0" tIns="0" bIns="0">
+          <a:bodyPr wrap="square" lIns="0" tIns="0" rIns="0" bIns="0" anchor="t">
             <a:spAutoFit/>
           </a:bodyPr>
           <a:lstStyle/>
@@ -7510,7 +7910,7 @@
           <a:noFill/>
         </p:spPr>
         <p:txBody>
-          <a:bodyPr wrap="square" anchor="t" lIns="0" rIns="0" tIns="0" bIns="0">
+          <a:bodyPr wrap="square" lIns="0" tIns="0" rIns="0" bIns="0" anchor="t">
             <a:spAutoFit/>
           </a:bodyPr>
           <a:lstStyle/>
@@ -7545,7 +7945,7 @@
           <a:noFill/>
         </p:spPr>
         <p:txBody>
-          <a:bodyPr wrap="square" anchor="t" lIns="0" rIns="0" tIns="0" bIns="0">
+          <a:bodyPr wrap="square" lIns="0" tIns="0" rIns="0" bIns="0" anchor="t">
             <a:spAutoFit/>
           </a:bodyPr>
           <a:lstStyle/>
@@ -7604,6 +8004,7 @@
           <a:lstStyle/>
           <a:p>
             <a:pPr algn="ctr"/>
+            <a:endParaRPr/>
           </a:p>
         </p:txBody>
       </p:sp>
@@ -7648,6 +8049,7 @@
           <a:lstStyle/>
           <a:p>
             <a:pPr algn="ctr"/>
+            <a:endParaRPr/>
           </a:p>
         </p:txBody>
       </p:sp>
@@ -7668,7 +8070,7 @@
           <a:noFill/>
         </p:spPr>
         <p:txBody>
-          <a:bodyPr wrap="square" anchor="ctr" lIns="0" rIns="0" tIns="0" bIns="0">
+          <a:bodyPr wrap="square" lIns="0" tIns="0" rIns="0" bIns="0" anchor="ctr">
             <a:spAutoFit/>
           </a:bodyPr>
           <a:lstStyle/>
@@ -7739,6 +8141,7 @@
           <a:lstStyle/>
           <a:p>
             <a:pPr algn="ctr"/>
+            <a:endParaRPr/>
           </a:p>
         </p:txBody>
       </p:sp>
@@ -7783,6 +8186,7 @@
           <a:lstStyle/>
           <a:p>
             <a:pPr algn="ctr"/>
+            <a:endParaRPr/>
           </a:p>
         </p:txBody>
       </p:sp>
@@ -7803,7 +8207,7 @@
           <a:noFill/>
         </p:spPr>
         <p:txBody>
-          <a:bodyPr wrap="square" anchor="ctr" lIns="0" rIns="0" tIns="0" bIns="0">
+          <a:bodyPr wrap="square" lIns="0" tIns="0" rIns="0" bIns="0" anchor="ctr">
             <a:spAutoFit/>
           </a:bodyPr>
           <a:lstStyle/>
@@ -7874,6 +8278,7 @@
           <a:lstStyle/>
           <a:p>
             <a:pPr algn="ctr"/>
+            <a:endParaRPr/>
           </a:p>
         </p:txBody>
       </p:sp>
@@ -7894,7 +8299,7 @@
           <a:noFill/>
         </p:spPr>
         <p:txBody>
-          <a:bodyPr wrap="square" anchor="t" lIns="0" rIns="0" tIns="0" bIns="0">
+          <a:bodyPr wrap="square" lIns="0" tIns="0" rIns="0" bIns="0" anchor="t">
             <a:spAutoFit/>
           </a:bodyPr>
           <a:lstStyle/>
@@ -7965,7 +8370,7 @@
           <a:noFill/>
         </p:spPr>
         <p:txBody>
-          <a:bodyPr wrap="square" anchor="t" lIns="0" rIns="0" tIns="0" bIns="0">
+          <a:bodyPr wrap="square" lIns="0" tIns="0" rIns="0" bIns="0" anchor="t">
             <a:spAutoFit/>
           </a:bodyPr>
           <a:lstStyle/>
@@ -8005,7 +8410,7 @@
 </file>
 
 <file path=ppt/slides/slide5.xml><?xml version="1.0" encoding="utf-8"?>
-<p:sld xmlns:a="http://schemas.openxmlformats.org/drawingml/2006/main" xmlns:p="http://schemas.openxmlformats.org/presentationml/2006/main" xmlns:r="http://schemas.openxmlformats.org/officeDocument/2006/relationships">
+<p:sld xmlns:a="http://schemas.openxmlformats.org/drawingml/2006/main" xmlns:r="http://schemas.openxmlformats.org/officeDocument/2006/relationships" xmlns:p="http://schemas.openxmlformats.org/presentationml/2006/main">
   <p:cSld>
     <p:spTree>
       <p:nvGrpSpPr>
@@ -8013,7 +8418,14 @@
         <p:cNvGrpSpPr/>
         <p:nvPr/>
       </p:nvGrpSpPr>
-      <p:grpSpPr/>
+      <p:grpSpPr>
+        <a:xfrm>
+          <a:off x="0" y="0"/>
+          <a:ext cx="0" cy="0"/>
+          <a:chOff x="0" y="0"/>
+          <a:chExt cx="0" cy="0"/>
+        </a:xfrm>
+      </p:grpSpPr>
       <p:sp>
         <p:nvSpPr>
           <p:cNvPr id="2" name="Rectangle 1"/>
@@ -8055,6 +8467,7 @@
           <a:lstStyle/>
           <a:p>
             <a:pPr algn="ctr"/>
+            <a:endParaRPr/>
           </a:p>
         </p:txBody>
       </p:sp>
@@ -8075,7 +8488,7 @@
           <a:noFill/>
         </p:spPr>
         <p:txBody>
-          <a:bodyPr wrap="square" anchor="t" lIns="0" rIns="0" tIns="0" bIns="0">
+          <a:bodyPr wrap="square" lIns="0" tIns="0" rIns="0" bIns="0" anchor="t">
             <a:spAutoFit/>
           </a:bodyPr>
           <a:lstStyle/>
@@ -8110,7 +8523,7 @@
           <a:noFill/>
         </p:spPr>
         <p:txBody>
-          <a:bodyPr wrap="square" anchor="t" lIns="0" rIns="0" tIns="0" bIns="0">
+          <a:bodyPr wrap="square" lIns="0" tIns="0" rIns="0" bIns="0" anchor="t">
             <a:spAutoFit/>
           </a:bodyPr>
           <a:lstStyle/>
@@ -8145,7 +8558,7 @@
           <a:noFill/>
         </p:spPr>
         <p:txBody>
-          <a:bodyPr wrap="square" anchor="t" lIns="0" rIns="0" tIns="0" bIns="0">
+          <a:bodyPr wrap="square" lIns="0" tIns="0" rIns="0" bIns="0" anchor="t">
             <a:spAutoFit/>
           </a:bodyPr>
           <a:lstStyle/>
@@ -8204,6 +8617,7 @@
           <a:lstStyle/>
           <a:p>
             <a:pPr algn="ctr"/>
+            <a:endParaRPr/>
           </a:p>
         </p:txBody>
       </p:sp>
@@ -8248,6 +8662,7 @@
           <a:lstStyle/>
           <a:p>
             <a:pPr algn="ctr"/>
+            <a:endParaRPr/>
           </a:p>
         </p:txBody>
       </p:sp>
@@ -8268,7 +8683,7 @@
           <a:noFill/>
         </p:spPr>
         <p:txBody>
-          <a:bodyPr wrap="square" anchor="ctr" lIns="0" rIns="0" tIns="0" bIns="0">
+          <a:bodyPr wrap="square" lIns="0" tIns="0" rIns="0" bIns="0" anchor="ctr">
             <a:spAutoFit/>
           </a:bodyPr>
           <a:lstStyle/>
@@ -8315,7 +8730,7 @@
           <a:noFill/>
         </p:spPr>
         <p:txBody>
-          <a:bodyPr wrap="square" anchor="t" lIns="0" rIns="0" tIns="0" bIns="0">
+          <a:bodyPr wrap="square" lIns="0" tIns="0" rIns="0" bIns="0" anchor="t">
             <a:spAutoFit/>
           </a:bodyPr>
           <a:lstStyle/>
@@ -8374,6 +8789,7 @@
           <a:lstStyle/>
           <a:p>
             <a:pPr algn="ctr"/>
+            <a:endParaRPr/>
           </a:p>
         </p:txBody>
       </p:sp>
@@ -8418,6 +8834,7 @@
           <a:lstStyle/>
           <a:p>
             <a:pPr algn="ctr"/>
+            <a:endParaRPr/>
           </a:p>
         </p:txBody>
       </p:sp>
@@ -8438,7 +8855,7 @@
           <a:noFill/>
         </p:spPr>
         <p:txBody>
-          <a:bodyPr wrap="square" anchor="ctr" lIns="0" rIns="0" tIns="0" bIns="0">
+          <a:bodyPr wrap="square" lIns="0" tIns="0" rIns="0" bIns="0" anchor="ctr">
             <a:spAutoFit/>
           </a:bodyPr>
           <a:lstStyle/>
@@ -8485,7 +8902,7 @@
           <a:noFill/>
         </p:spPr>
         <p:txBody>
-          <a:bodyPr wrap="square" anchor="t" lIns="0" rIns="0" tIns="0" bIns="0">
+          <a:bodyPr wrap="square" lIns="0" tIns="0" rIns="0" bIns="0" anchor="t">
             <a:spAutoFit/>
           </a:bodyPr>
           <a:lstStyle/>
@@ -8544,6 +8961,7 @@
           <a:lstStyle/>
           <a:p>
             <a:pPr algn="ctr"/>
+            <a:endParaRPr/>
           </a:p>
         </p:txBody>
       </p:sp>
@@ -8588,6 +9006,7 @@
           <a:lstStyle/>
           <a:p>
             <a:pPr algn="ctr"/>
+            <a:endParaRPr/>
           </a:p>
         </p:txBody>
       </p:sp>
@@ -8608,7 +9027,7 @@
           <a:noFill/>
         </p:spPr>
         <p:txBody>
-          <a:bodyPr wrap="square" anchor="ctr" lIns="0" rIns="0" tIns="0" bIns="0">
+          <a:bodyPr wrap="square" lIns="0" tIns="0" rIns="0" bIns="0" anchor="ctr">
             <a:spAutoFit/>
           </a:bodyPr>
           <a:lstStyle/>
@@ -8655,7 +9074,7 @@
           <a:noFill/>
         </p:spPr>
         <p:txBody>
-          <a:bodyPr wrap="square" anchor="t" lIns="0" rIns="0" tIns="0" bIns="0">
+          <a:bodyPr wrap="square" lIns="0" tIns="0" rIns="0" bIns="0" anchor="t">
             <a:spAutoFit/>
           </a:bodyPr>
           <a:lstStyle/>
@@ -8714,6 +9133,7 @@
           <a:lstStyle/>
           <a:p>
             <a:pPr algn="ctr"/>
+            <a:endParaRPr/>
           </a:p>
         </p:txBody>
       </p:sp>
@@ -8758,6 +9178,7 @@
           <a:lstStyle/>
           <a:p>
             <a:pPr algn="ctr"/>
+            <a:endParaRPr/>
           </a:p>
         </p:txBody>
       </p:sp>
@@ -8778,7 +9199,7 @@
           <a:noFill/>
         </p:spPr>
         <p:txBody>
-          <a:bodyPr wrap="square" anchor="ctr" lIns="0" rIns="0" tIns="0" bIns="0">
+          <a:bodyPr wrap="square" lIns="0" tIns="0" rIns="0" bIns="0" anchor="ctr">
             <a:spAutoFit/>
           </a:bodyPr>
           <a:lstStyle/>
@@ -8825,7 +9246,7 @@
           <a:noFill/>
         </p:spPr>
         <p:txBody>
-          <a:bodyPr wrap="square" anchor="t" lIns="0" rIns="0" tIns="0" bIns="0">
+          <a:bodyPr wrap="square" lIns="0" tIns="0" rIns="0" bIns="0" anchor="t">
             <a:spAutoFit/>
           </a:bodyPr>
           <a:lstStyle/>
@@ -8884,6 +9305,7 @@
           <a:lstStyle/>
           <a:p>
             <a:pPr algn="ctr"/>
+            <a:endParaRPr/>
           </a:p>
         </p:txBody>
       </p:sp>
@@ -8928,6 +9350,7 @@
           <a:lstStyle/>
           <a:p>
             <a:pPr algn="ctr"/>
+            <a:endParaRPr/>
           </a:p>
         </p:txBody>
       </p:sp>
@@ -8948,7 +9371,7 @@
           <a:noFill/>
         </p:spPr>
         <p:txBody>
-          <a:bodyPr wrap="square" anchor="ctr" lIns="0" rIns="0" tIns="0" bIns="0">
+          <a:bodyPr wrap="square" lIns="0" tIns="0" rIns="0" bIns="0" anchor="ctr">
             <a:spAutoFit/>
           </a:bodyPr>
           <a:lstStyle/>
@@ -8995,7 +9418,7 @@
           <a:noFill/>
         </p:spPr>
         <p:txBody>
-          <a:bodyPr wrap="square" anchor="t" lIns="0" rIns="0" tIns="0" bIns="0">
+          <a:bodyPr wrap="square" lIns="0" tIns="0" rIns="0" bIns="0" anchor="t">
             <a:spAutoFit/>
           </a:bodyPr>
           <a:lstStyle/>
@@ -9054,6 +9477,7 @@
           <a:lstStyle/>
           <a:p>
             <a:pPr algn="ctr"/>
+            <a:endParaRPr/>
           </a:p>
         </p:txBody>
       </p:sp>
@@ -9098,6 +9522,7 @@
           <a:lstStyle/>
           <a:p>
             <a:pPr algn="ctr"/>
+            <a:endParaRPr/>
           </a:p>
         </p:txBody>
       </p:sp>
@@ -9118,7 +9543,7 @@
           <a:noFill/>
         </p:spPr>
         <p:txBody>
-          <a:bodyPr wrap="square" anchor="ctr" lIns="0" rIns="0" tIns="0" bIns="0">
+          <a:bodyPr wrap="square" lIns="0" tIns="0" rIns="0" bIns="0" anchor="ctr">
             <a:spAutoFit/>
           </a:bodyPr>
           <a:lstStyle/>
@@ -9189,6 +9614,7 @@
           <a:lstStyle/>
           <a:p>
             <a:pPr algn="ctr"/>
+            <a:endParaRPr/>
           </a:p>
         </p:txBody>
       </p:sp>
@@ -9209,7 +9635,7 @@
           <a:noFill/>
         </p:spPr>
         <p:txBody>
-          <a:bodyPr wrap="square" anchor="t" lIns="0" rIns="0" tIns="0" bIns="0">
+          <a:bodyPr wrap="square" lIns="0" tIns="0" rIns="0" bIns="0" anchor="t">
             <a:spAutoFit/>
           </a:bodyPr>
           <a:lstStyle/>
@@ -9244,7 +9670,7 @@
           <a:noFill/>
         </p:spPr>
         <p:txBody>
-          <a:bodyPr wrap="square" anchor="t" lIns="0" rIns="0" tIns="0" bIns="0">
+          <a:bodyPr wrap="square" lIns="0" tIns="0" rIns="0" bIns="0" anchor="t">
             <a:spAutoFit/>
           </a:bodyPr>
           <a:lstStyle/>
@@ -9334,15 +9760,12 @@
                 <a:spcPts val="300"/>
               </a:spcAft>
             </a:pPr>
-            <a:r>
-              <a:rPr sz="1200" b="0">
-                <a:solidFill>
-                  <a:srgbClr val="E6EDF3"/>
-                </a:solidFill>
-                <a:latin typeface="Consolas"/>
-              </a:rPr>
-              <a:t/>
-            </a:r>
+            <a:endParaRPr sz="1200" b="0">
+              <a:solidFill>
+                <a:srgbClr val="58A6FF"/>
+              </a:solidFill>
+              <a:latin typeface="Consolas"/>
+            </a:endParaRPr>
           </a:p>
           <a:p>
             <a:pPr algn="l">
@@ -9403,7 +9826,7 @@
 </file>
 
 <file path=ppt/slides/slide6.xml><?xml version="1.0" encoding="utf-8"?>
-<p:sld xmlns:a="http://schemas.openxmlformats.org/drawingml/2006/main" xmlns:p="http://schemas.openxmlformats.org/presentationml/2006/main" xmlns:r="http://schemas.openxmlformats.org/officeDocument/2006/relationships">
+<p:sld xmlns:a="http://schemas.openxmlformats.org/drawingml/2006/main" xmlns:r="http://schemas.openxmlformats.org/officeDocument/2006/relationships" xmlns:p="http://schemas.openxmlformats.org/presentationml/2006/main">
   <p:cSld>
     <p:spTree>
       <p:nvGrpSpPr>
@@ -9411,7 +9834,14 @@
         <p:cNvGrpSpPr/>
         <p:nvPr/>
       </p:nvGrpSpPr>
-      <p:grpSpPr/>
+      <p:grpSpPr>
+        <a:xfrm>
+          <a:off x="0" y="0"/>
+          <a:ext cx="0" cy="0"/>
+          <a:chOff x="0" y="0"/>
+          <a:chExt cx="0" cy="0"/>
+        </a:xfrm>
+      </p:grpSpPr>
       <p:sp>
         <p:nvSpPr>
           <p:cNvPr id="2" name="Rectangle 1"/>
@@ -9453,6 +9883,7 @@
           <a:lstStyle/>
           <a:p>
             <a:pPr algn="ctr"/>
+            <a:endParaRPr/>
           </a:p>
         </p:txBody>
       </p:sp>
@@ -9473,7 +9904,7 @@
           <a:noFill/>
         </p:spPr>
         <p:txBody>
-          <a:bodyPr wrap="square" anchor="t" lIns="0" rIns="0" tIns="0" bIns="0">
+          <a:bodyPr wrap="square" lIns="0" tIns="0" rIns="0" bIns="0" anchor="t">
             <a:spAutoFit/>
           </a:bodyPr>
           <a:lstStyle/>
@@ -9508,7 +9939,7 @@
           <a:noFill/>
         </p:spPr>
         <p:txBody>
-          <a:bodyPr wrap="square" anchor="t" lIns="0" rIns="0" tIns="0" bIns="0">
+          <a:bodyPr wrap="square" lIns="0" tIns="0" rIns="0" bIns="0" anchor="t">
             <a:spAutoFit/>
           </a:bodyPr>
           <a:lstStyle/>
@@ -9543,7 +9974,7 @@
           <a:noFill/>
         </p:spPr>
         <p:txBody>
-          <a:bodyPr wrap="square" anchor="t" lIns="0" rIns="0" tIns="0" bIns="0">
+          <a:bodyPr wrap="square" lIns="0" tIns="0" rIns="0" bIns="0" anchor="t">
             <a:spAutoFit/>
           </a:bodyPr>
           <a:lstStyle/>
@@ -9578,7 +10009,7 @@
           <a:noFill/>
         </p:spPr>
         <p:txBody>
-          <a:bodyPr wrap="square" anchor="t" lIns="0" rIns="0" tIns="0" bIns="0">
+          <a:bodyPr wrap="square" lIns="0" tIns="0" rIns="0" bIns="0" anchor="t">
             <a:spAutoFit/>
           </a:bodyPr>
           <a:lstStyle/>
@@ -9637,6 +10068,7 @@
           <a:lstStyle/>
           <a:p>
             <a:pPr algn="ctr"/>
+            <a:endParaRPr/>
           </a:p>
         </p:txBody>
       </p:sp>
@@ -9657,7 +10089,7 @@
           <a:noFill/>
         </p:spPr>
         <p:txBody>
-          <a:bodyPr wrap="square" anchor="ctr" lIns="0" rIns="0" tIns="0" bIns="0">
+          <a:bodyPr wrap="square" lIns="0" tIns="0" rIns="0" bIns="0" anchor="ctr">
             <a:spAutoFit/>
           </a:bodyPr>
           <a:lstStyle/>
@@ -9728,6 +10160,7 @@
           <a:lstStyle/>
           <a:p>
             <a:pPr algn="ctr"/>
+            <a:endParaRPr/>
           </a:p>
         </p:txBody>
       </p:sp>
@@ -9748,7 +10181,7 @@
           <a:noFill/>
         </p:spPr>
         <p:txBody>
-          <a:bodyPr wrap="square" anchor="ctr" lIns="0" rIns="0" tIns="0" bIns="0">
+          <a:bodyPr wrap="square" lIns="0" tIns="0" rIns="0" bIns="0" anchor="ctr">
             <a:spAutoFit/>
           </a:bodyPr>
           <a:lstStyle/>
@@ -9819,6 +10252,7 @@
           <a:lstStyle/>
           <a:p>
             <a:pPr algn="ctr"/>
+            <a:endParaRPr/>
           </a:p>
         </p:txBody>
       </p:sp>
@@ -9839,7 +10273,7 @@
           <a:noFill/>
         </p:spPr>
         <p:txBody>
-          <a:bodyPr wrap="square" anchor="ctr" lIns="0" rIns="0" tIns="0" bIns="0">
+          <a:bodyPr wrap="square" lIns="0" tIns="0" rIns="0" bIns="0" anchor="ctr">
             <a:spAutoFit/>
           </a:bodyPr>
           <a:lstStyle/>
@@ -9910,6 +10344,7 @@
           <a:lstStyle/>
           <a:p>
             <a:pPr algn="ctr"/>
+            <a:endParaRPr/>
           </a:p>
         </p:txBody>
       </p:sp>
@@ -9930,7 +10365,7 @@
           <a:noFill/>
         </p:spPr>
         <p:txBody>
-          <a:bodyPr wrap="square" anchor="ctr" lIns="0" rIns="0" tIns="0" bIns="0">
+          <a:bodyPr wrap="square" lIns="0" tIns="0" rIns="0" bIns="0" anchor="ctr">
             <a:spAutoFit/>
           </a:bodyPr>
           <a:lstStyle/>
@@ -10001,6 +10436,7 @@
           <a:lstStyle/>
           <a:p>
             <a:pPr algn="ctr"/>
+            <a:endParaRPr/>
           </a:p>
         </p:txBody>
       </p:sp>
@@ -10021,7 +10457,7 @@
           <a:noFill/>
         </p:spPr>
         <p:txBody>
-          <a:bodyPr wrap="square" anchor="ctr" lIns="0" rIns="0" tIns="0" bIns="0">
+          <a:bodyPr wrap="square" lIns="0" tIns="0" rIns="0" bIns="0" anchor="ctr">
             <a:spAutoFit/>
           </a:bodyPr>
           <a:lstStyle/>
@@ -10092,6 +10528,7 @@
           <a:lstStyle/>
           <a:p>
             <a:pPr algn="ctr"/>
+            <a:endParaRPr/>
           </a:p>
         </p:txBody>
       </p:sp>
@@ -10112,7 +10549,7 @@
           <a:noFill/>
         </p:spPr>
         <p:txBody>
-          <a:bodyPr wrap="square" anchor="ctr" lIns="0" rIns="0" tIns="0" bIns="0">
+          <a:bodyPr wrap="square" lIns="0" tIns="0" rIns="0" bIns="0" anchor="ctr">
             <a:spAutoFit/>
           </a:bodyPr>
           <a:lstStyle/>
@@ -10183,6 +10620,7 @@
           <a:lstStyle/>
           <a:p>
             <a:pPr algn="ctr"/>
+            <a:endParaRPr/>
           </a:p>
         </p:txBody>
       </p:sp>
@@ -10203,7 +10641,7 @@
           <a:noFill/>
         </p:spPr>
         <p:txBody>
-          <a:bodyPr wrap="square" anchor="ctr" lIns="0" rIns="0" tIns="0" bIns="0">
+          <a:bodyPr wrap="square" lIns="0" tIns="0" rIns="0" bIns="0" anchor="ctr">
             <a:spAutoFit/>
           </a:bodyPr>
           <a:lstStyle/>
@@ -10274,6 +10712,7 @@
           <a:lstStyle/>
           <a:p>
             <a:pPr algn="ctr"/>
+            <a:endParaRPr/>
           </a:p>
         </p:txBody>
       </p:sp>
@@ -10294,7 +10733,7 @@
           <a:noFill/>
         </p:spPr>
         <p:txBody>
-          <a:bodyPr wrap="square" anchor="ctr" lIns="0" rIns="0" tIns="0" bIns="0">
+          <a:bodyPr wrap="square" lIns="0" tIns="0" rIns="0" bIns="0" anchor="ctr">
             <a:spAutoFit/>
           </a:bodyPr>
           <a:lstStyle/>
@@ -10341,7 +10780,7 @@
           <a:noFill/>
         </p:spPr>
         <p:txBody>
-          <a:bodyPr wrap="square" anchor="t" lIns="0" rIns="0" tIns="0" bIns="0">
+          <a:bodyPr wrap="square" lIns="0" tIns="0" rIns="0" bIns="0" anchor="t">
             <a:spAutoFit/>
           </a:bodyPr>
           <a:lstStyle/>
@@ -10409,6 +10848,7 @@
           <a:lstStyle/>
           <a:p>
             <a:pPr algn="ctr"/>
+            <a:endParaRPr/>
           </a:p>
         </p:txBody>
       </p:sp>
@@ -10453,6 +10893,7 @@
           <a:lstStyle/>
           <a:p>
             <a:pPr algn="ctr"/>
+            <a:endParaRPr/>
           </a:p>
         </p:txBody>
       </p:sp>
@@ -10473,7 +10914,7 @@
           <a:noFill/>
         </p:spPr>
         <p:txBody>
-          <a:bodyPr wrap="square" anchor="t" lIns="0" rIns="0" tIns="0" bIns="0">
+          <a:bodyPr wrap="square" lIns="0" tIns="0" rIns="0" bIns="0" anchor="t">
             <a:spAutoFit/>
           </a:bodyPr>
           <a:lstStyle/>
@@ -10584,6 +11025,7 @@
           <a:lstStyle/>
           <a:p>
             <a:pPr algn="ctr"/>
+            <a:endParaRPr/>
           </a:p>
         </p:txBody>
       </p:sp>
@@ -10628,6 +11070,7 @@
           <a:lstStyle/>
           <a:p>
             <a:pPr algn="ctr"/>
+            <a:endParaRPr/>
           </a:p>
         </p:txBody>
       </p:sp>
@@ -10648,7 +11091,7 @@
           <a:noFill/>
         </p:spPr>
         <p:txBody>
-          <a:bodyPr wrap="square" anchor="t" lIns="0" rIns="0" tIns="0" bIns="0">
+          <a:bodyPr wrap="square" lIns="0" tIns="0" rIns="0" bIns="0" anchor="t">
             <a:spAutoFit/>
           </a:bodyPr>
           <a:lstStyle/>
@@ -10759,6 +11202,7 @@
           <a:lstStyle/>
           <a:p>
             <a:pPr algn="ctr"/>
+            <a:endParaRPr/>
           </a:p>
         </p:txBody>
       </p:sp>
@@ -10803,6 +11247,7 @@
           <a:lstStyle/>
           <a:p>
             <a:pPr algn="ctr"/>
+            <a:endParaRPr/>
           </a:p>
         </p:txBody>
       </p:sp>
@@ -10823,7 +11268,7 @@
           <a:noFill/>
         </p:spPr>
         <p:txBody>
-          <a:bodyPr wrap="square" anchor="t" lIns="0" rIns="0" tIns="0" bIns="0">
+          <a:bodyPr wrap="square" lIns="0" tIns="0" rIns="0" bIns="0" anchor="t">
             <a:spAutoFit/>
           </a:bodyPr>
           <a:lstStyle/>
@@ -10910,7 +11355,7 @@
           <a:noFill/>
         </p:spPr>
         <p:txBody>
-          <a:bodyPr wrap="square" anchor="t" lIns="0" rIns="0" tIns="0" bIns="0">
+          <a:bodyPr wrap="square" lIns="0" tIns="0" rIns="0" bIns="0" anchor="t">
             <a:spAutoFit/>
           </a:bodyPr>
           <a:lstStyle/>
@@ -10969,6 +11414,7 @@
           <a:lstStyle/>
           <a:p>
             <a:pPr algn="ctr"/>
+            <a:endParaRPr/>
           </a:p>
         </p:txBody>
       </p:sp>
@@ -10989,7 +11435,7 @@
           <a:noFill/>
         </p:spPr>
         <p:txBody>
-          <a:bodyPr wrap="square" anchor="ctr" lIns="0" rIns="0" tIns="0" bIns="0">
+          <a:bodyPr wrap="square" lIns="0" tIns="0" rIns="0" bIns="0" anchor="ctr">
             <a:spAutoFit/>
           </a:bodyPr>
           <a:lstStyle/>
@@ -11048,6 +11494,7 @@
           <a:lstStyle/>
           <a:p>
             <a:pPr algn="ctr"/>
+            <a:endParaRPr/>
           </a:p>
         </p:txBody>
       </p:sp>
@@ -11068,7 +11515,7 @@
           <a:noFill/>
         </p:spPr>
         <p:txBody>
-          <a:bodyPr wrap="square" anchor="ctr" lIns="0" rIns="0" tIns="0" bIns="0">
+          <a:bodyPr wrap="square" lIns="0" tIns="0" rIns="0" bIns="0" anchor="ctr">
             <a:spAutoFit/>
           </a:bodyPr>
           <a:lstStyle/>
@@ -11127,6 +11574,7 @@
           <a:lstStyle/>
           <a:p>
             <a:pPr algn="ctr"/>
+            <a:endParaRPr/>
           </a:p>
         </p:txBody>
       </p:sp>
@@ -11147,7 +11595,7 @@
           <a:noFill/>
         </p:spPr>
         <p:txBody>
-          <a:bodyPr wrap="square" anchor="ctr" lIns="0" rIns="0" tIns="0" bIns="0">
+          <a:bodyPr wrap="square" lIns="0" tIns="0" rIns="0" bIns="0" anchor="ctr">
             <a:spAutoFit/>
           </a:bodyPr>
           <a:lstStyle/>
@@ -11182,7 +11630,7 @@
           <a:noFill/>
         </p:spPr>
         <p:txBody>
-          <a:bodyPr wrap="square" anchor="t" lIns="0" rIns="0" tIns="0" bIns="0">
+          <a:bodyPr wrap="square" lIns="0" tIns="0" rIns="0" bIns="0" anchor="t">
             <a:spAutoFit/>
           </a:bodyPr>
           <a:lstStyle/>
@@ -11241,6 +11689,7 @@
           <a:lstStyle/>
           <a:p>
             <a:pPr algn="ctr"/>
+            <a:endParaRPr/>
           </a:p>
         </p:txBody>
       </p:sp>
@@ -11261,7 +11710,7 @@
           <a:noFill/>
         </p:spPr>
         <p:txBody>
-          <a:bodyPr wrap="square" anchor="ctr" lIns="0" rIns="0" tIns="0" bIns="0">
+          <a:bodyPr wrap="square" lIns="0" tIns="0" rIns="0" bIns="0" anchor="ctr">
             <a:spAutoFit/>
           </a:bodyPr>
           <a:lstStyle/>
@@ -11296,7 +11745,7 @@
           <a:noFill/>
         </p:spPr>
         <p:txBody>
-          <a:bodyPr wrap="square" anchor="t" lIns="0" rIns="0" tIns="0" bIns="0">
+          <a:bodyPr wrap="square" lIns="0" tIns="0" rIns="0" bIns="0" anchor="t">
             <a:spAutoFit/>
           </a:bodyPr>
           <a:lstStyle/>
@@ -11355,6 +11804,7 @@
           <a:lstStyle/>
           <a:p>
             <a:pPr algn="ctr"/>
+            <a:endParaRPr/>
           </a:p>
         </p:txBody>
       </p:sp>
@@ -11375,7 +11825,7 @@
           <a:noFill/>
         </p:spPr>
         <p:txBody>
-          <a:bodyPr wrap="square" anchor="ctr" lIns="0" rIns="0" tIns="0" bIns="0">
+          <a:bodyPr wrap="square" lIns="0" tIns="0" rIns="0" bIns="0" anchor="ctr">
             <a:spAutoFit/>
           </a:bodyPr>
           <a:lstStyle/>
@@ -11402,7 +11852,7 @@
 </file>
 
 <file path=ppt/slides/slide7.xml><?xml version="1.0" encoding="utf-8"?>
-<p:sld xmlns:a="http://schemas.openxmlformats.org/drawingml/2006/main" xmlns:p="http://schemas.openxmlformats.org/presentationml/2006/main" xmlns:r="http://schemas.openxmlformats.org/officeDocument/2006/relationships">
+<p:sld xmlns:a="http://schemas.openxmlformats.org/drawingml/2006/main" xmlns:r="http://schemas.openxmlformats.org/officeDocument/2006/relationships" xmlns:p="http://schemas.openxmlformats.org/presentationml/2006/main">
   <p:cSld>
     <p:spTree>
       <p:nvGrpSpPr>
@@ -11410,7 +11860,14 @@
         <p:cNvGrpSpPr/>
         <p:nvPr/>
       </p:nvGrpSpPr>
-      <p:grpSpPr/>
+      <p:grpSpPr>
+        <a:xfrm>
+          <a:off x="0" y="0"/>
+          <a:ext cx="0" cy="0"/>
+          <a:chOff x="0" y="0"/>
+          <a:chExt cx="0" cy="0"/>
+        </a:xfrm>
+      </p:grpSpPr>
       <p:sp>
         <p:nvSpPr>
           <p:cNvPr id="2" name="Rectangle 1"/>
@@ -11452,6 +11909,7 @@
           <a:lstStyle/>
           <a:p>
             <a:pPr algn="ctr"/>
+            <a:endParaRPr/>
           </a:p>
         </p:txBody>
       </p:sp>
@@ -11472,7 +11930,7 @@
           <a:noFill/>
         </p:spPr>
         <p:txBody>
-          <a:bodyPr wrap="square" anchor="t" lIns="0" rIns="0" tIns="0" bIns="0">
+          <a:bodyPr wrap="square" lIns="0" tIns="0" rIns="0" bIns="0" anchor="t">
             <a:spAutoFit/>
           </a:bodyPr>
           <a:lstStyle/>
@@ -11507,7 +11965,7 @@
           <a:noFill/>
         </p:spPr>
         <p:txBody>
-          <a:bodyPr wrap="square" anchor="t" lIns="0" rIns="0" tIns="0" bIns="0">
+          <a:bodyPr wrap="square" lIns="0" tIns="0" rIns="0" bIns="0" anchor="t">
             <a:spAutoFit/>
           </a:bodyPr>
           <a:lstStyle/>
@@ -11542,7 +12000,7 @@
           <a:noFill/>
         </p:spPr>
         <p:txBody>
-          <a:bodyPr wrap="square" anchor="t" lIns="0" rIns="0" tIns="0" bIns="0">
+          <a:bodyPr wrap="square" lIns="0" tIns="0" rIns="0" bIns="0" anchor="t">
             <a:spAutoFit/>
           </a:bodyPr>
           <a:lstStyle/>
@@ -11601,6 +12059,7 @@
           <a:lstStyle/>
           <a:p>
             <a:pPr algn="ctr"/>
+            <a:endParaRPr/>
           </a:p>
         </p:txBody>
       </p:sp>
@@ -11645,6 +12104,7 @@
           <a:lstStyle/>
           <a:p>
             <a:pPr algn="ctr"/>
+            <a:endParaRPr/>
           </a:p>
         </p:txBody>
       </p:sp>
@@ -11665,7 +12125,7 @@
           <a:noFill/>
         </p:spPr>
         <p:txBody>
-          <a:bodyPr wrap="square" anchor="ctr" lIns="0" rIns="0" tIns="0" bIns="0">
+          <a:bodyPr wrap="square" lIns="0" tIns="0" rIns="0" bIns="0" anchor="ctr">
             <a:spAutoFit/>
           </a:bodyPr>
           <a:lstStyle/>
@@ -11736,6 +12196,7 @@
           <a:lstStyle/>
           <a:p>
             <a:pPr algn="ctr"/>
+            <a:endParaRPr/>
           </a:p>
         </p:txBody>
       </p:sp>
@@ -11780,6 +12241,7 @@
           <a:lstStyle/>
           <a:p>
             <a:pPr algn="ctr"/>
+            <a:endParaRPr/>
           </a:p>
         </p:txBody>
       </p:sp>
@@ -11800,7 +12262,7 @@
           <a:noFill/>
         </p:spPr>
         <p:txBody>
-          <a:bodyPr wrap="square" anchor="ctr" lIns="0" rIns="0" tIns="0" bIns="0">
+          <a:bodyPr wrap="square" lIns="0" tIns="0" rIns="0" bIns="0" anchor="ctr">
             <a:spAutoFit/>
           </a:bodyPr>
           <a:lstStyle/>
@@ -11871,6 +12333,7 @@
           <a:lstStyle/>
           <a:p>
             <a:pPr algn="ctr"/>
+            <a:endParaRPr/>
           </a:p>
         </p:txBody>
       </p:sp>
@@ -11891,7 +12354,7 @@
           <a:noFill/>
         </p:spPr>
         <p:txBody>
-          <a:bodyPr wrap="square" anchor="t" lIns="0" rIns="0" tIns="0" bIns="0">
+          <a:bodyPr wrap="square" lIns="0" tIns="0" rIns="0" bIns="0" anchor="t">
             <a:spAutoFit/>
           </a:bodyPr>
           <a:lstStyle/>
@@ -11962,7 +12425,7 @@
           <a:noFill/>
         </p:spPr>
         <p:txBody>
-          <a:bodyPr wrap="square" anchor="t" lIns="0" rIns="0" tIns="0" bIns="0">
+          <a:bodyPr wrap="square" lIns="0" tIns="0" rIns="0" bIns="0" anchor="t">
             <a:spAutoFit/>
           </a:bodyPr>
           <a:lstStyle/>
@@ -12027,7 +12490,7 @@
 </file>
 
 <file path=ppt/slides/slide8.xml><?xml version="1.0" encoding="utf-8"?>
-<p:sld xmlns:a="http://schemas.openxmlformats.org/drawingml/2006/main" xmlns:p="http://schemas.openxmlformats.org/presentationml/2006/main" xmlns:r="http://schemas.openxmlformats.org/officeDocument/2006/relationships">
+<p:sld xmlns:a="http://schemas.openxmlformats.org/drawingml/2006/main" xmlns:r="http://schemas.openxmlformats.org/officeDocument/2006/relationships" xmlns:p="http://schemas.openxmlformats.org/presentationml/2006/main">
   <p:cSld>
     <p:spTree>
       <p:nvGrpSpPr>
@@ -12035,7 +12498,14 @@
         <p:cNvGrpSpPr/>
         <p:nvPr/>
       </p:nvGrpSpPr>
-      <p:grpSpPr/>
+      <p:grpSpPr>
+        <a:xfrm>
+          <a:off x="0" y="0"/>
+          <a:ext cx="0" cy="0"/>
+          <a:chOff x="0" y="0"/>
+          <a:chExt cx="0" cy="0"/>
+        </a:xfrm>
+      </p:grpSpPr>
       <p:sp>
         <p:nvSpPr>
           <p:cNvPr id="2" name="Rectangle 1"/>
@@ -12077,6 +12547,7 @@
           <a:lstStyle/>
           <a:p>
             <a:pPr algn="ctr"/>
+            <a:endParaRPr/>
           </a:p>
         </p:txBody>
       </p:sp>
@@ -12097,7 +12568,7 @@
           <a:noFill/>
         </p:spPr>
         <p:txBody>
-          <a:bodyPr wrap="square" anchor="t" lIns="0" rIns="0" tIns="0" bIns="0">
+          <a:bodyPr wrap="square" lIns="0" tIns="0" rIns="0" bIns="0" anchor="t">
             <a:spAutoFit/>
           </a:bodyPr>
           <a:lstStyle/>
@@ -12132,7 +12603,7 @@
           <a:noFill/>
         </p:spPr>
         <p:txBody>
-          <a:bodyPr wrap="square" anchor="t" lIns="0" rIns="0" tIns="0" bIns="0">
+          <a:bodyPr wrap="square" lIns="0" tIns="0" rIns="0" bIns="0" anchor="t">
             <a:spAutoFit/>
           </a:bodyPr>
           <a:lstStyle/>
@@ -12167,7 +12638,7 @@
           <a:noFill/>
         </p:spPr>
         <p:txBody>
-          <a:bodyPr wrap="square" anchor="t" lIns="0" rIns="0" tIns="0" bIns="0">
+          <a:bodyPr wrap="square" lIns="0" tIns="0" rIns="0" bIns="0" anchor="t">
             <a:spAutoFit/>
           </a:bodyPr>
           <a:lstStyle/>
@@ -12202,21 +12673,13 @@
           <a:noFill/>
         </p:spPr>
         <p:txBody>
-          <a:bodyPr wrap="square" anchor="t" lIns="0" rIns="0" tIns="0" bIns="0">
+          <a:bodyPr wrap="square" lIns="0" tIns="0" rIns="0" bIns="0" anchor="t">
             <a:spAutoFit/>
           </a:bodyPr>
           <a:lstStyle/>
           <a:p>
             <a:pPr algn="l"/>
-            <a:r>
-              <a:rPr sz="1150" b="1">
-                <a:solidFill>
-                  <a:srgbClr val="8B949E"/>
-                </a:solidFill>
-                <a:latin typeface="Segoe UI"/>
-              </a:rPr>
-              <a:t/>
-            </a:r>
+            <a:endParaRPr/>
           </a:p>
         </p:txBody>
       </p:sp>
@@ -12237,7 +12700,7 @@
           <a:noFill/>
         </p:spPr>
         <p:txBody>
-          <a:bodyPr wrap="square" anchor="t" lIns="0" rIns="0" tIns="0" bIns="0">
+          <a:bodyPr wrap="square" lIns="0" tIns="0" rIns="0" bIns="0" anchor="t">
             <a:spAutoFit/>
           </a:bodyPr>
           <a:lstStyle/>
@@ -12272,7 +12735,7 @@
           <a:noFill/>
         </p:spPr>
         <p:txBody>
-          <a:bodyPr wrap="square" anchor="t" lIns="0" rIns="0" tIns="0" bIns="0">
+          <a:bodyPr wrap="square" lIns="0" tIns="0" rIns="0" bIns="0" anchor="t">
             <a:spAutoFit/>
           </a:bodyPr>
           <a:lstStyle/>
@@ -12307,7 +12770,7 @@
           <a:noFill/>
         </p:spPr>
         <p:txBody>
-          <a:bodyPr wrap="square" anchor="t" lIns="0" rIns="0" tIns="0" bIns="0">
+          <a:bodyPr wrap="square" lIns="0" tIns="0" rIns="0" bIns="0" anchor="t">
             <a:spAutoFit/>
           </a:bodyPr>
           <a:lstStyle/>
@@ -12342,7 +12805,7 @@
           <a:noFill/>
         </p:spPr>
         <p:txBody>
-          <a:bodyPr wrap="square" anchor="t" lIns="0" rIns="0" tIns="0" bIns="0">
+          <a:bodyPr wrap="square" lIns="0" tIns="0" rIns="0" bIns="0" anchor="t">
             <a:spAutoFit/>
           </a:bodyPr>
           <a:lstStyle/>
@@ -12401,6 +12864,7 @@
           <a:lstStyle/>
           <a:p>
             <a:pPr algn="ctr"/>
+            <a:endParaRPr/>
           </a:p>
         </p:txBody>
       </p:sp>
@@ -12421,7 +12885,7 @@
           <a:noFill/>
         </p:spPr>
         <p:txBody>
-          <a:bodyPr wrap="square" anchor="ctr" lIns="0" rIns="0" tIns="0" bIns="0">
+          <a:bodyPr wrap="square" lIns="0" tIns="0" rIns="0" bIns="0" anchor="ctr">
             <a:spAutoFit/>
           </a:bodyPr>
           <a:lstStyle/>
@@ -12456,7 +12920,7 @@
           <a:noFill/>
         </p:spPr>
         <p:txBody>
-          <a:bodyPr wrap="square" anchor="ctr" lIns="0" rIns="0" tIns="0" bIns="0">
+          <a:bodyPr wrap="square" lIns="0" tIns="0" rIns="0" bIns="0" anchor="ctr">
             <a:spAutoFit/>
           </a:bodyPr>
           <a:lstStyle/>
@@ -12491,7 +12955,7 @@
           <a:noFill/>
         </p:spPr>
         <p:txBody>
-          <a:bodyPr wrap="square" anchor="ctr" lIns="0" rIns="0" tIns="0" bIns="0">
+          <a:bodyPr wrap="square" lIns="0" tIns="0" rIns="0" bIns="0" anchor="ctr">
             <a:spAutoFit/>
           </a:bodyPr>
           <a:lstStyle/>
@@ -12526,7 +12990,7 @@
           <a:noFill/>
         </p:spPr>
         <p:txBody>
-          <a:bodyPr wrap="square" anchor="ctr" lIns="0" rIns="0" tIns="0" bIns="0">
+          <a:bodyPr wrap="square" lIns="0" tIns="0" rIns="0" bIns="0" anchor="ctr">
             <a:spAutoFit/>
           </a:bodyPr>
           <a:lstStyle/>
@@ -12561,7 +13025,7 @@
           <a:noFill/>
         </p:spPr>
         <p:txBody>
-          <a:bodyPr wrap="square" anchor="ctr" lIns="0" rIns="0" tIns="0" bIns="0">
+          <a:bodyPr wrap="square" lIns="0" tIns="0" rIns="0" bIns="0" anchor="ctr">
             <a:spAutoFit/>
           </a:bodyPr>
           <a:lstStyle/>
@@ -12620,6 +13084,7 @@
           <a:lstStyle/>
           <a:p>
             <a:pPr algn="ctr"/>
+            <a:endParaRPr/>
           </a:p>
         </p:txBody>
       </p:sp>
@@ -12640,7 +13105,7 @@
           <a:noFill/>
         </p:spPr>
         <p:txBody>
-          <a:bodyPr wrap="square" anchor="ctr" lIns="0" rIns="0" tIns="0" bIns="0">
+          <a:bodyPr wrap="square" lIns="0" tIns="0" rIns="0" bIns="0" anchor="ctr">
             <a:spAutoFit/>
           </a:bodyPr>
           <a:lstStyle/>
@@ -12675,7 +13140,7 @@
           <a:noFill/>
         </p:spPr>
         <p:txBody>
-          <a:bodyPr wrap="square" anchor="ctr" lIns="0" rIns="0" tIns="0" bIns="0">
+          <a:bodyPr wrap="square" lIns="0" tIns="0" rIns="0" bIns="0" anchor="ctr">
             <a:spAutoFit/>
           </a:bodyPr>
           <a:lstStyle/>
@@ -12710,7 +13175,7 @@
           <a:noFill/>
         </p:spPr>
         <p:txBody>
-          <a:bodyPr wrap="square" anchor="ctr" lIns="0" rIns="0" tIns="0" bIns="0">
+          <a:bodyPr wrap="square" lIns="0" tIns="0" rIns="0" bIns="0" anchor="ctr">
             <a:spAutoFit/>
           </a:bodyPr>
           <a:lstStyle/>
@@ -12745,7 +13210,7 @@
           <a:noFill/>
         </p:spPr>
         <p:txBody>
-          <a:bodyPr wrap="square" anchor="ctr" lIns="0" rIns="0" tIns="0" bIns="0">
+          <a:bodyPr wrap="square" lIns="0" tIns="0" rIns="0" bIns="0" anchor="ctr">
             <a:spAutoFit/>
           </a:bodyPr>
           <a:lstStyle/>
@@ -12780,7 +13245,7 @@
           <a:noFill/>
         </p:spPr>
         <p:txBody>
-          <a:bodyPr wrap="square" anchor="ctr" lIns="0" rIns="0" tIns="0" bIns="0">
+          <a:bodyPr wrap="square" lIns="0" tIns="0" rIns="0" bIns="0" anchor="ctr">
             <a:spAutoFit/>
           </a:bodyPr>
           <a:lstStyle/>
@@ -12839,6 +13304,7 @@
           <a:lstStyle/>
           <a:p>
             <a:pPr algn="ctr"/>
+            <a:endParaRPr/>
           </a:p>
         </p:txBody>
       </p:sp>
@@ -12859,7 +13325,7 @@
           <a:noFill/>
         </p:spPr>
         <p:txBody>
-          <a:bodyPr wrap="square" anchor="ctr" lIns="0" rIns="0" tIns="0" bIns="0">
+          <a:bodyPr wrap="square" lIns="0" tIns="0" rIns="0" bIns="0" anchor="ctr">
             <a:spAutoFit/>
           </a:bodyPr>
           <a:lstStyle/>
@@ -12903,7 +13369,7 @@
           <a:noFill/>
         </p:spPr>
         <p:txBody>
-          <a:bodyPr wrap="square" anchor="t" lIns="0" rIns="0" tIns="0" bIns="0">
+          <a:bodyPr wrap="square" lIns="0" tIns="0" rIns="0" bIns="0" anchor="t">
             <a:spAutoFit/>
           </a:bodyPr>
           <a:lstStyle/>
@@ -12993,7 +13459,7 @@
 </file>
 
 <file path=ppt/slides/slide9.xml><?xml version="1.0" encoding="utf-8"?>
-<p:sld xmlns:a="http://schemas.openxmlformats.org/drawingml/2006/main" xmlns:p="http://schemas.openxmlformats.org/presentationml/2006/main" xmlns:r="http://schemas.openxmlformats.org/officeDocument/2006/relationships">
+<p:sld xmlns:a="http://schemas.openxmlformats.org/drawingml/2006/main" xmlns:r="http://schemas.openxmlformats.org/officeDocument/2006/relationships" xmlns:p="http://schemas.openxmlformats.org/presentationml/2006/main">
   <p:cSld>
     <p:spTree>
       <p:nvGrpSpPr>
@@ -13001,7 +13467,14 @@
         <p:cNvGrpSpPr/>
         <p:nvPr/>
       </p:nvGrpSpPr>
-      <p:grpSpPr/>
+      <p:grpSpPr>
+        <a:xfrm>
+          <a:off x="0" y="0"/>
+          <a:ext cx="0" cy="0"/>
+          <a:chOff x="0" y="0"/>
+          <a:chExt cx="0" cy="0"/>
+        </a:xfrm>
+      </p:grpSpPr>
       <p:sp>
         <p:nvSpPr>
           <p:cNvPr id="2" name="Rectangle 1"/>
@@ -13043,6 +13516,7 @@
           <a:lstStyle/>
           <a:p>
             <a:pPr algn="ctr"/>
+            <a:endParaRPr/>
           </a:p>
         </p:txBody>
       </p:sp>
@@ -13063,7 +13537,7 @@
           <a:noFill/>
         </p:spPr>
         <p:txBody>
-          <a:bodyPr wrap="square" anchor="t" lIns="0" rIns="0" tIns="0" bIns="0">
+          <a:bodyPr wrap="square" lIns="0" tIns="0" rIns="0" bIns="0" anchor="t">
             <a:spAutoFit/>
           </a:bodyPr>
           <a:lstStyle/>
@@ -13098,7 +13572,7 @@
           <a:noFill/>
         </p:spPr>
         <p:txBody>
-          <a:bodyPr wrap="square" anchor="t" lIns="0" rIns="0" tIns="0" bIns="0">
+          <a:bodyPr wrap="square" lIns="0" tIns="0" rIns="0" bIns="0" anchor="t">
             <a:spAutoFit/>
           </a:bodyPr>
           <a:lstStyle/>
@@ -13133,7 +13607,7 @@
           <a:noFill/>
         </p:spPr>
         <p:txBody>
-          <a:bodyPr wrap="square" anchor="t" lIns="0" rIns="0" tIns="0" bIns="0">
+          <a:bodyPr wrap="square" lIns="0" tIns="0" rIns="0" bIns="0" anchor="t">
             <a:spAutoFit/>
           </a:bodyPr>
           <a:lstStyle/>
@@ -13190,6 +13664,7 @@
           <a:lstStyle/>
           <a:p>
             <a:pPr algn="ctr"/>
+            <a:endParaRPr/>
           </a:p>
         </p:txBody>
       </p:sp>
@@ -13210,7 +13685,7 @@
           <a:noFill/>
         </p:spPr>
         <p:txBody>
-          <a:bodyPr wrap="square" anchor="t" lIns="0" rIns="0" tIns="0" bIns="0">
+          <a:bodyPr wrap="square" lIns="0" tIns="0" rIns="0" bIns="0" anchor="t">
             <a:spAutoFit/>
           </a:bodyPr>
           <a:lstStyle/>
@@ -13269,6 +13744,7 @@
           <a:lstStyle/>
           <a:p>
             <a:pPr algn="ctr"/>
+            <a:endParaRPr/>
           </a:p>
         </p:txBody>
       </p:sp>
@@ -13313,6 +13789,7 @@
           <a:lstStyle/>
           <a:p>
             <a:pPr algn="ctr"/>
+            <a:endParaRPr/>
           </a:p>
         </p:txBody>
       </p:sp>
@@ -13333,7 +13810,7 @@
           <a:noFill/>
         </p:spPr>
         <p:txBody>
-          <a:bodyPr wrap="square" anchor="ctr" lIns="0" rIns="0" tIns="0" bIns="0">
+          <a:bodyPr wrap="square" lIns="0" tIns="0" rIns="0" bIns="0" anchor="ctr">
             <a:spAutoFit/>
           </a:bodyPr>
           <a:lstStyle/>
@@ -13380,7 +13857,7 @@
           <a:noFill/>
         </p:spPr>
         <p:txBody>
-          <a:bodyPr wrap="square" anchor="t" lIns="0" rIns="0" tIns="0" bIns="0">
+          <a:bodyPr wrap="square" lIns="0" tIns="0" rIns="0" bIns="0" anchor="t">
             <a:spAutoFit/>
           </a:bodyPr>
           <a:lstStyle/>
@@ -13439,6 +13916,7 @@
           <a:lstStyle/>
           <a:p>
             <a:pPr algn="ctr"/>
+            <a:endParaRPr/>
           </a:p>
         </p:txBody>
       </p:sp>
@@ -13483,6 +13961,7 @@
           <a:lstStyle/>
           <a:p>
             <a:pPr algn="ctr"/>
+            <a:endParaRPr/>
           </a:p>
         </p:txBody>
       </p:sp>
@@ -13503,7 +13982,7 @@
           <a:noFill/>
         </p:spPr>
         <p:txBody>
-          <a:bodyPr wrap="square" anchor="ctr" lIns="0" rIns="0" tIns="0" bIns="0">
+          <a:bodyPr wrap="square" lIns="0" tIns="0" rIns="0" bIns="0" anchor="ctr">
             <a:spAutoFit/>
           </a:bodyPr>
           <a:lstStyle/>
@@ -13572,6 +14051,7 @@
           <a:lstStyle/>
           <a:p>
             <a:pPr algn="ctr"/>
+            <a:endParaRPr/>
           </a:p>
         </p:txBody>
       </p:sp>
@@ -13592,7 +14072,7 @@
           <a:noFill/>
         </p:spPr>
         <p:txBody>
-          <a:bodyPr wrap="square" anchor="t" lIns="0" rIns="0" tIns="0" bIns="0">
+          <a:bodyPr wrap="square" lIns="0" tIns="0" rIns="0" bIns="0" anchor="t">
             <a:spAutoFit/>
           </a:bodyPr>
           <a:lstStyle/>
@@ -13651,6 +14131,7 @@
           <a:lstStyle/>
           <a:p>
             <a:pPr algn="ctr"/>
+            <a:endParaRPr/>
           </a:p>
         </p:txBody>
       </p:sp>
@@ -13695,6 +14176,7 @@
           <a:lstStyle/>
           <a:p>
             <a:pPr algn="ctr"/>
+            <a:endParaRPr/>
           </a:p>
         </p:txBody>
       </p:sp>
@@ -13715,7 +14197,7 @@
           <a:noFill/>
         </p:spPr>
         <p:txBody>
-          <a:bodyPr wrap="square" anchor="ctr" lIns="0" rIns="0" tIns="0" bIns="0">
+          <a:bodyPr wrap="square" lIns="0" tIns="0" rIns="0" bIns="0" anchor="ctr">
             <a:spAutoFit/>
           </a:bodyPr>
           <a:lstStyle/>
@@ -13762,7 +14244,7 @@
           <a:noFill/>
         </p:spPr>
         <p:txBody>
-          <a:bodyPr wrap="square" anchor="t" lIns="0" rIns="0" tIns="0" bIns="0">
+          <a:bodyPr wrap="square" lIns="0" tIns="0" rIns="0" bIns="0" anchor="t">
             <a:spAutoFit/>
           </a:bodyPr>
           <a:lstStyle/>
@@ -13821,6 +14303,7 @@
           <a:lstStyle/>
           <a:p>
             <a:pPr algn="ctr"/>
+            <a:endParaRPr/>
           </a:p>
         </p:txBody>
       </p:sp>
@@ -13865,6 +14348,7 @@
           <a:lstStyle/>
           <a:p>
             <a:pPr algn="ctr"/>
+            <a:endParaRPr/>
           </a:p>
         </p:txBody>
       </p:sp>
@@ -13885,7 +14369,7 @@
           <a:noFill/>
         </p:spPr>
         <p:txBody>
-          <a:bodyPr wrap="square" anchor="ctr" lIns="0" rIns="0" tIns="0" bIns="0">
+          <a:bodyPr wrap="square" lIns="0" tIns="0" rIns="0" bIns="0" anchor="ctr">
             <a:spAutoFit/>
           </a:bodyPr>
           <a:lstStyle/>
@@ -13956,6 +14440,7 @@
           <a:lstStyle/>
           <a:p>
             <a:pPr algn="ctr"/>
+            <a:endParaRPr/>
           </a:p>
         </p:txBody>
       </p:sp>
@@ -14000,6 +14485,7 @@
           <a:lstStyle/>
           <a:p>
             <a:pPr algn="ctr"/>
+            <a:endParaRPr/>
           </a:p>
         </p:txBody>
       </p:sp>
@@ -14020,7 +14506,7 @@
           <a:noFill/>
         </p:spPr>
         <p:txBody>
-          <a:bodyPr wrap="square" anchor="t" lIns="0" rIns="0" tIns="0" bIns="0">
+          <a:bodyPr wrap="square" lIns="0" tIns="0" rIns="0" bIns="0" anchor="t">
             <a:spAutoFit/>
           </a:bodyPr>
           <a:lstStyle/>
@@ -14055,7 +14541,7 @@
           <a:noFill/>
         </p:spPr>
         <p:txBody>
-          <a:bodyPr wrap="square" anchor="t" lIns="0" rIns="0" tIns="0" bIns="0">
+          <a:bodyPr wrap="square" lIns="0" tIns="0" rIns="0" bIns="0" anchor="t">
             <a:spAutoFit/>
           </a:bodyPr>
           <a:lstStyle/>
@@ -14218,6 +14704,7 @@
           <a:lstStyle/>
           <a:p>
             <a:pPr algn="ctr"/>
+            <a:endParaRPr/>
           </a:p>
         </p:txBody>
       </p:sp>
@@ -14262,6 +14749,7 @@
           <a:lstStyle/>
           <a:p>
             <a:pPr algn="ctr"/>
+            <a:endParaRPr/>
           </a:p>
         </p:txBody>
       </p:sp>
@@ -14282,7 +14770,7 @@
           <a:noFill/>
         </p:spPr>
         <p:txBody>
-          <a:bodyPr wrap="square" anchor="t" lIns="0" rIns="0" tIns="0" bIns="0">
+          <a:bodyPr wrap="square" lIns="0" tIns="0" rIns="0" bIns="0" anchor="t">
             <a:spAutoFit/>
           </a:bodyPr>
           <a:lstStyle/>
@@ -14317,7 +14805,7 @@
           <a:noFill/>
         </p:spPr>
         <p:txBody>
-          <a:bodyPr wrap="square" anchor="t" lIns="0" rIns="0" tIns="0" bIns="0">
+          <a:bodyPr wrap="square" lIns="0" tIns="0" rIns="0" bIns="0" anchor="t">
             <a:spAutoFit/>
           </a:bodyPr>
           <a:lstStyle/>
@@ -14420,7 +14908,7 @@
           <a:noFill/>
         </p:spPr>
         <p:txBody>
-          <a:bodyPr wrap="square" anchor="t" lIns="0" rIns="0" tIns="0" bIns="0">
+          <a:bodyPr wrap="square" lIns="0" tIns="0" rIns="0" bIns="0" anchor="t">
             <a:spAutoFit/>
           </a:bodyPr>
           <a:lstStyle/>

--- a/docs/IPA_hardcoded_IV_ricompilazione.pptx
+++ b/docs/IPA_hardcoded_IV_ricompilazione.pptx
@@ -12,8 +12,8 @@
     <p:sldId id="260" r:id="rId6"/>
     <p:sldId id="261" r:id="rId7"/>
     <p:sldId id="262" r:id="rId8"/>
-    <p:sldId id="263" r:id="rId9"/>
-    <p:sldId id="264" r:id="rId10"/>
+    <p:sldId id="264" r:id="rId9"/>
+    <p:sldId id="263" r:id="rId10"/>
     <p:sldId id="265" r:id="rId11"/>
     <p:sldId id="266" r:id="rId12"/>
     <p:sldId id="267" r:id="rId13"/>
@@ -313,7 +313,7 @@
           <a:p>
             <a:fld id="{5BCAD085-E8A6-8845-BD4E-CB4CCA059FC4}" type="datetimeFigureOut">
               <a:rPr lang="en-US" smtClean="0"/>
-              <a:t>7/14/2026</a:t>
+              <a:t>7/20/2026</a:t>
             </a:fld>
             <a:endParaRPr lang="en-US"/>
           </a:p>
@@ -481,7 +481,7 @@
           <a:p>
             <a:fld id="{5BCAD085-E8A6-8845-BD4E-CB4CCA059FC4}" type="datetimeFigureOut">
               <a:rPr lang="en-US" smtClean="0"/>
-              <a:t>7/14/2026</a:t>
+              <a:t>7/20/2026</a:t>
             </a:fld>
             <a:endParaRPr lang="en-US"/>
           </a:p>
@@ -659,7 +659,7 @@
           <a:p>
             <a:fld id="{5BCAD085-E8A6-8845-BD4E-CB4CCA059FC4}" type="datetimeFigureOut">
               <a:rPr lang="en-US" smtClean="0"/>
-              <a:t>7/14/2026</a:t>
+              <a:t>7/20/2026</a:t>
             </a:fld>
             <a:endParaRPr lang="en-US"/>
           </a:p>
@@ -827,7 +827,7 @@
           <a:p>
             <a:fld id="{5BCAD085-E8A6-8845-BD4E-CB4CCA059FC4}" type="datetimeFigureOut">
               <a:rPr lang="en-US" smtClean="0"/>
-              <a:t>7/14/2026</a:t>
+              <a:t>7/20/2026</a:t>
             </a:fld>
             <a:endParaRPr lang="en-US"/>
           </a:p>
@@ -1072,7 +1072,7 @@
           <a:p>
             <a:fld id="{5BCAD085-E8A6-8845-BD4E-CB4CCA059FC4}" type="datetimeFigureOut">
               <a:rPr lang="en-US" smtClean="0"/>
-              <a:t>7/14/2026</a:t>
+              <a:t>7/20/2026</a:t>
             </a:fld>
             <a:endParaRPr lang="en-US"/>
           </a:p>
@@ -1357,7 +1357,7 @@
           <a:p>
             <a:fld id="{5BCAD085-E8A6-8845-BD4E-CB4CCA059FC4}" type="datetimeFigureOut">
               <a:rPr lang="en-US" smtClean="0"/>
-              <a:t>7/14/2026</a:t>
+              <a:t>7/20/2026</a:t>
             </a:fld>
             <a:endParaRPr lang="en-US"/>
           </a:p>
@@ -1776,7 +1776,7 @@
           <a:p>
             <a:fld id="{5BCAD085-E8A6-8845-BD4E-CB4CCA059FC4}" type="datetimeFigureOut">
               <a:rPr lang="en-US" smtClean="0"/>
-              <a:t>7/14/2026</a:t>
+              <a:t>7/20/2026</a:t>
             </a:fld>
             <a:endParaRPr lang="en-US"/>
           </a:p>
@@ -1893,7 +1893,7 @@
           <a:p>
             <a:fld id="{5BCAD085-E8A6-8845-BD4E-CB4CCA059FC4}" type="datetimeFigureOut">
               <a:rPr lang="en-US" smtClean="0"/>
-              <a:t>7/14/2026</a:t>
+              <a:t>7/20/2026</a:t>
             </a:fld>
             <a:endParaRPr lang="en-US"/>
           </a:p>
@@ -1988,7 +1988,7 @@
           <a:p>
             <a:fld id="{5BCAD085-E8A6-8845-BD4E-CB4CCA059FC4}" type="datetimeFigureOut">
               <a:rPr lang="en-US" smtClean="0"/>
-              <a:t>7/14/2026</a:t>
+              <a:t>7/20/2026</a:t>
             </a:fld>
             <a:endParaRPr lang="en-US"/>
           </a:p>
@@ -2263,7 +2263,7 @@
           <a:p>
             <a:fld id="{5BCAD085-E8A6-8845-BD4E-CB4CCA059FC4}" type="datetimeFigureOut">
               <a:rPr lang="en-US" smtClean="0"/>
-              <a:t>7/14/2026</a:t>
+              <a:t>7/20/2026</a:t>
             </a:fld>
             <a:endParaRPr lang="en-US"/>
           </a:p>
@@ -2515,7 +2515,7 @@
           <a:p>
             <a:fld id="{5BCAD085-E8A6-8845-BD4E-CB4CCA059FC4}" type="datetimeFigureOut">
               <a:rPr lang="en-US" smtClean="0"/>
-              <a:t>7/14/2026</a:t>
+              <a:t>7/20/2026</a:t>
             </a:fld>
             <a:endParaRPr lang="en-US"/>
           </a:p>
@@ -2726,7 +2726,7 @@
           <a:p>
             <a:fld id="{5BCAD085-E8A6-8845-BD4E-CB4CCA059FC4}" type="datetimeFigureOut">
               <a:rPr lang="en-US" smtClean="0"/>
-              <a:t>7/14/2026</a:t>
+              <a:t>7/20/2026</a:t>
             </a:fld>
             <a:endParaRPr lang="en-US"/>
           </a:p>
@@ -4769,8 +4769,8 @@
         </p:nvSpPr>
         <p:spPr>
           <a:xfrm>
-            <a:off x="6272784" y="1929384"/>
-            <a:ext cx="5202936" cy="1764791"/>
+            <a:off x="6272784" y="2523239"/>
+            <a:ext cx="5202936" cy="577081"/>
           </a:xfrm>
           <a:prstGeom prst="rect">
             <a:avLst/>
@@ -4785,25 +4785,211 @@
           <a:p>
             <a:pPr algn="l"/>
             <a:r>
-              <a:rPr sz="1350" b="1">
+              <a:rPr sz="1350" b="1" dirty="0">
                 <a:solidFill>
                   <a:srgbClr val="3FB950"/>
                 </a:solidFill>
                 <a:latin typeface="Segoe UI"/>
               </a:rPr>
-              <a:t>Se accettato</a:t>
-            </a:r>
+              <a:t>Se </a:t>
+            </a:r>
+            <a:r>
+              <a:rPr sz="1350" b="1" dirty="0" err="1">
+                <a:solidFill>
+                  <a:srgbClr val="3FB950"/>
+                </a:solidFill>
+                <a:latin typeface="Segoe UI"/>
+              </a:rPr>
+              <a:t>accettato</a:t>
+            </a:r>
+            <a:endParaRPr sz="1350" b="1" dirty="0">
+              <a:solidFill>
+                <a:srgbClr val="3FB950"/>
+              </a:solidFill>
+              <a:latin typeface="Segoe UI"/>
+            </a:endParaRPr>
           </a:p>
           <a:p>
             <a:pPr algn="l"/>
             <a:r>
-              <a:rPr sz="1200" b="0">
-                <a:solidFill>
-                  <a:srgbClr val="E6EDF3"/>
-                </a:solidFill>
-                <a:latin typeface="Segoe UI"/>
-              </a:rPr>
-              <a:t>Portare le 3 _gen_feature_* (scalar · dense_vector · onehot) in dialetto libbpf → l'AOT copre ogni modello sparse. ≈ mezza giornata + test.</a:t>
+              <a:rPr sz="1200" b="0" dirty="0" err="1">
+                <a:solidFill>
+                  <a:srgbClr val="E6EDF3"/>
+                </a:solidFill>
+                <a:latin typeface="Segoe UI"/>
+              </a:rPr>
+              <a:t>Portare</a:t>
+            </a:r>
+            <a:r>
+              <a:rPr sz="1200" b="0" dirty="0">
+                <a:solidFill>
+                  <a:srgbClr val="E6EDF3"/>
+                </a:solidFill>
+                <a:latin typeface="Segoe UI"/>
+              </a:rPr>
+              <a:t> le 3 _</a:t>
+            </a:r>
+            <a:r>
+              <a:rPr sz="1200" b="0" dirty="0" err="1">
+                <a:solidFill>
+                  <a:srgbClr val="E6EDF3"/>
+                </a:solidFill>
+                <a:latin typeface="Segoe UI"/>
+              </a:rPr>
+              <a:t>gen_feature</a:t>
+            </a:r>
+            <a:r>
+              <a:rPr sz="1200" b="0" dirty="0">
+                <a:solidFill>
+                  <a:srgbClr val="E6EDF3"/>
+                </a:solidFill>
+                <a:latin typeface="Segoe UI"/>
+              </a:rPr>
+              <a:t>_* (scalar · </a:t>
+            </a:r>
+            <a:r>
+              <a:rPr sz="1200" b="0" dirty="0" err="1">
+                <a:solidFill>
+                  <a:srgbClr val="E6EDF3"/>
+                </a:solidFill>
+                <a:latin typeface="Segoe UI"/>
+              </a:rPr>
+              <a:t>dense_vector</a:t>
+            </a:r>
+            <a:r>
+              <a:rPr sz="1200" b="0" dirty="0">
+                <a:solidFill>
+                  <a:srgbClr val="E6EDF3"/>
+                </a:solidFill>
+                <a:latin typeface="Segoe UI"/>
+              </a:rPr>
+              <a:t> · </a:t>
+            </a:r>
+            <a:r>
+              <a:rPr sz="1200" b="0" dirty="0" err="1">
+                <a:solidFill>
+                  <a:srgbClr val="E6EDF3"/>
+                </a:solidFill>
+                <a:latin typeface="Segoe UI"/>
+              </a:rPr>
+              <a:t>onehot</a:t>
+            </a:r>
+            <a:r>
+              <a:rPr sz="1200" b="0" dirty="0">
+                <a:solidFill>
+                  <a:srgbClr val="E6EDF3"/>
+                </a:solidFill>
+                <a:latin typeface="Segoe UI"/>
+              </a:rPr>
+              <a:t>) in </a:t>
+            </a:r>
+            <a:r>
+              <a:rPr sz="1200" b="0" dirty="0" err="1">
+                <a:solidFill>
+                  <a:srgbClr val="E6EDF3"/>
+                </a:solidFill>
+                <a:latin typeface="Segoe UI"/>
+              </a:rPr>
+              <a:t>dialetto</a:t>
+            </a:r>
+            <a:r>
+              <a:rPr sz="1200" b="0" dirty="0">
+                <a:solidFill>
+                  <a:srgbClr val="E6EDF3"/>
+                </a:solidFill>
+                <a:latin typeface="Segoe UI"/>
+              </a:rPr>
+              <a:t> </a:t>
+            </a:r>
+            <a:r>
+              <a:rPr sz="1200" b="0" dirty="0" err="1">
+                <a:solidFill>
+                  <a:srgbClr val="E6EDF3"/>
+                </a:solidFill>
+                <a:latin typeface="Segoe UI"/>
+              </a:rPr>
+              <a:t>libbpf</a:t>
+            </a:r>
+            <a:r>
+              <a:rPr sz="1200" b="0" dirty="0">
+                <a:solidFill>
+                  <a:srgbClr val="E6EDF3"/>
+                </a:solidFill>
+                <a:latin typeface="Segoe UI"/>
+              </a:rPr>
+              <a:t> → </a:t>
+            </a:r>
+            <a:r>
+              <a:rPr sz="1200" b="0" dirty="0" err="1">
+                <a:solidFill>
+                  <a:srgbClr val="E6EDF3"/>
+                </a:solidFill>
+                <a:latin typeface="Segoe UI"/>
+              </a:rPr>
+              <a:t>l'AOT</a:t>
+            </a:r>
+            <a:r>
+              <a:rPr sz="1200" b="0" dirty="0">
+                <a:solidFill>
+                  <a:srgbClr val="E6EDF3"/>
+                </a:solidFill>
+                <a:latin typeface="Segoe UI"/>
+              </a:rPr>
+              <a:t> </a:t>
+            </a:r>
+            <a:r>
+              <a:rPr sz="1200" b="0" dirty="0" err="1">
+                <a:solidFill>
+                  <a:srgbClr val="E6EDF3"/>
+                </a:solidFill>
+                <a:latin typeface="Segoe UI"/>
+              </a:rPr>
+              <a:t>copre</a:t>
+            </a:r>
+            <a:r>
+              <a:rPr sz="1200" b="0" dirty="0">
+                <a:solidFill>
+                  <a:srgbClr val="E6EDF3"/>
+                </a:solidFill>
+                <a:latin typeface="Segoe UI"/>
+              </a:rPr>
+              <a:t> </a:t>
+            </a:r>
+            <a:r>
+              <a:rPr sz="1200" b="0" dirty="0" err="1">
+                <a:solidFill>
+                  <a:srgbClr val="E6EDF3"/>
+                </a:solidFill>
+                <a:latin typeface="Segoe UI"/>
+              </a:rPr>
+              <a:t>ogni</a:t>
+            </a:r>
+            <a:r>
+              <a:rPr sz="1200" b="0" dirty="0">
+                <a:solidFill>
+                  <a:srgbClr val="E6EDF3"/>
+                </a:solidFill>
+                <a:latin typeface="Segoe UI"/>
+              </a:rPr>
+              <a:t> </a:t>
+            </a:r>
+            <a:r>
+              <a:rPr sz="1200" b="0" dirty="0" err="1">
+                <a:solidFill>
+                  <a:srgbClr val="E6EDF3"/>
+                </a:solidFill>
+                <a:latin typeface="Segoe UI"/>
+              </a:rPr>
+              <a:t>modello</a:t>
+            </a:r>
+            <a:r>
+              <a:rPr sz="1200" b="0" dirty="0">
+                <a:solidFill>
+                  <a:srgbClr val="E6EDF3"/>
+                </a:solidFill>
+                <a:latin typeface="Segoe UI"/>
+              </a:rPr>
+              <a:t> sparse.</a:t>
             </a:r>
           </a:p>
         </p:txBody>
@@ -5066,14 +5252,29 @@
           <a:p>
             <a:pPr algn="l"/>
             <a:r>
-              <a:rPr sz="4000" b="1">
+              <a:rPr sz="4000" b="1" dirty="0">
                 <a:solidFill>
                   <a:srgbClr val="F5A623"/>
                 </a:solidFill>
                 <a:latin typeface="Georgia"/>
               </a:rPr>
-              <a:t>11</a:t>
-            </a:r>
+              <a:t>1</a:t>
+            </a:r>
+            <a:r>
+              <a:rPr lang="it-IT" sz="4000" b="1" dirty="0">
+                <a:solidFill>
+                  <a:srgbClr val="F5A623"/>
+                </a:solidFill>
+                <a:latin typeface="Georgia"/>
+              </a:rPr>
+              <a:t>1</a:t>
+            </a:r>
+            <a:endParaRPr sz="4000" b="1" dirty="0">
+              <a:solidFill>
+                <a:srgbClr val="F5A623"/>
+              </a:solidFill>
+              <a:latin typeface="Georgia"/>
+            </a:endParaRPr>
           </a:p>
         </p:txBody>
       </p:sp>
@@ -6387,13 +6588,31 @@
               </a:spcAft>
             </a:pPr>
             <a:r>
+              <a:rPr sz="1300" b="1" dirty="0" err="1">
+                <a:solidFill>
+                  <a:srgbClr val="8B949E"/>
+                </a:solidFill>
+                <a:latin typeface="Segoe UI"/>
+              </a:rPr>
+              <a:t>Vincolo</a:t>
+            </a:r>
+            <a:r>
+              <a:rPr lang="it-IT" sz="1300" b="1">
+                <a:solidFill>
+                  <a:srgbClr val="8B949E"/>
+                </a:solidFill>
+                <a:latin typeface="Segoe UI"/>
+              </a:rPr>
+              <a:t> </a:t>
+            </a:r>
+            <a:r>
               <a:rPr sz="1300" b="1">
                 <a:solidFill>
                   <a:srgbClr val="8B949E"/>
                 </a:solidFill>
                 <a:latin typeface="Segoe UI"/>
               </a:rPr>
-              <a:t>Vincolo(</a:t>
+              <a:t>(</a:t>
             </a:r>
             <a:r>
               <a:rPr sz="1300" b="1" dirty="0" err="1">
@@ -7336,7 +7555,7 @@
         <p:spPr>
           <a:xfrm>
             <a:off x="4590288" y="2542032"/>
-            <a:ext cx="3246120" cy="2286000"/>
+            <a:ext cx="3246120" cy="1856919"/>
           </a:xfrm>
           <a:prstGeom prst="rect">
             <a:avLst/>
@@ -7355,13 +7574,31 @@
               </a:spcAft>
             </a:pPr>
             <a:r>
-              <a:rPr sz="1150" b="0">
+              <a:rPr sz="1150" b="0" dirty="0">
                 <a:solidFill>
                   <a:srgbClr val="8B949E"/>
                 </a:solidFill>
                 <a:latin typeface="Segoe UI"/>
               </a:rPr>
-              <a:t>Lista ordinata di tipi:</a:t>
+              <a:t>Lista </a:t>
+            </a:r>
+            <a:r>
+              <a:rPr sz="1150" b="0" dirty="0" err="1">
+                <a:solidFill>
+                  <a:srgbClr val="8B949E"/>
+                </a:solidFill>
+                <a:latin typeface="Segoe UI"/>
+              </a:rPr>
+              <a:t>ordinata</a:t>
+            </a:r>
+            <a:r>
+              <a:rPr sz="1150" b="0" dirty="0">
+                <a:solidFill>
+                  <a:srgbClr val="8B949E"/>
+                </a:solidFill>
+                <a:latin typeface="Segoe UI"/>
+              </a:rPr>
+              <a:t> di tipi:</a:t>
             </a:r>
           </a:p>
           <a:p>
@@ -7371,7 +7608,7 @@
               </a:spcAft>
             </a:pPr>
             <a:r>
-              <a:rPr sz="1150" b="1">
+              <a:rPr sz="1150" b="1" dirty="0">
                 <a:solidFill>
                   <a:srgbClr val="E6EDF3"/>
                 </a:solidFill>
@@ -7387,13 +7624,31 @@
               </a:spcAft>
             </a:pPr>
             <a:r>
-              <a:rPr sz="1150" b="0">
+              <a:rPr sz="1150" b="0" dirty="0">
                 <a:solidFill>
                   <a:srgbClr val="58A6FF"/>
                 </a:solidFill>
                 <a:latin typeface="Consolas"/>
               </a:rPr>
-              <a:t>  link_state,</a:t>
+              <a:t>  </a:t>
+            </a:r>
+            <a:r>
+              <a:rPr sz="1150" b="0" dirty="0" err="1">
+                <a:solidFill>
+                  <a:srgbClr val="58A6FF"/>
+                </a:solidFill>
+                <a:latin typeface="Consolas"/>
+              </a:rPr>
+              <a:t>link_state</a:t>
+            </a:r>
+            <a:r>
+              <a:rPr sz="1150" b="0" dirty="0">
+                <a:solidFill>
+                  <a:srgbClr val="58A6FF"/>
+                </a:solidFill>
+                <a:latin typeface="Consolas"/>
+              </a:rPr>
+              <a:t>,</a:t>
             </a:r>
           </a:p>
           <a:p>
@@ -7403,13 +7658,31 @@
               </a:spcAft>
             </a:pPr>
             <a:r>
-              <a:rPr sz="1150" b="0">
+              <a:rPr sz="1150" b="0" dirty="0">
                 <a:solidFill>
                   <a:srgbClr val="58A6FF"/>
                 </a:solidFill>
                 <a:latin typeface="Consolas"/>
               </a:rPr>
-              <a:t>  queue_occupancy,</a:t>
+              <a:t>  </a:t>
+            </a:r>
+            <a:r>
+              <a:rPr sz="1150" b="0" dirty="0" err="1">
+                <a:solidFill>
+                  <a:srgbClr val="58A6FF"/>
+                </a:solidFill>
+                <a:latin typeface="Consolas"/>
+              </a:rPr>
+              <a:t>queue_occupancy</a:t>
+            </a:r>
+            <a:r>
+              <a:rPr sz="1150" b="0" dirty="0">
+                <a:solidFill>
+                  <a:srgbClr val="58A6FF"/>
+                </a:solidFill>
+                <a:latin typeface="Consolas"/>
+              </a:rPr>
+              <a:t>,</a:t>
             </a:r>
           </a:p>
           <a:p>
@@ -7419,13 +7692,40 @@
               </a:spcAft>
             </a:pPr>
             <a:r>
-              <a:rPr sz="1150" b="0">
+              <a:rPr sz="1150" b="0" dirty="0">
                 <a:solidFill>
                   <a:srgbClr val="58A6FF"/>
                 </a:solidFill>
                 <a:latin typeface="Consolas"/>
               </a:rPr>
-              <a:t>  ttl ]</a:t>
+              <a:t>  </a:t>
+            </a:r>
+            <a:r>
+              <a:rPr sz="1150" b="0" dirty="0" err="1">
+                <a:solidFill>
+                  <a:srgbClr val="58A6FF"/>
+                </a:solidFill>
+                <a:latin typeface="Consolas"/>
+              </a:rPr>
+              <a:t>ttl</a:t>
+            </a:r>
+            <a:r>
+              <a:rPr sz="1150" b="0" dirty="0">
+                <a:solidFill>
+                  <a:srgbClr val="58A6FF"/>
+                </a:solidFill>
+                <a:latin typeface="Consolas"/>
+              </a:rPr>
+              <a:t> </a:t>
+            </a:r>
+            <a:r>
+              <a:rPr lang="it-IT" sz="1150" b="0" dirty="0">
+                <a:solidFill>
+                  <a:schemeClr val="bg1"/>
+                </a:solidFill>
+                <a:latin typeface="Consolas"/>
+              </a:rPr>
+              <a:t>]</a:t>
             </a:r>
           </a:p>
           <a:p>
@@ -7435,14 +7735,29 @@
               </a:spcAft>
             </a:pPr>
             <a:r>
-              <a:rPr sz="1150" b="1">
-                <a:solidFill>
-                  <a:srgbClr val="E6EDF3"/>
+              <a:rPr lang="it-IT" sz="1150" b="0" dirty="0" err="1">
+                <a:solidFill>
+                  <a:schemeClr val="bg1"/>
                 </a:solidFill>
                 <a:latin typeface="Consolas"/>
               </a:rPr>
-              <a:t>n_out = 7</a:t>
-            </a:r>
+              <a:t>hidden_dims</a:t>
+            </a:r>
+            <a:r>
+              <a:rPr lang="it-IT" sz="1150" b="0" dirty="0">
+                <a:solidFill>
+                  <a:schemeClr val="bg1"/>
+                </a:solidFill>
+                <a:latin typeface="Consolas"/>
+              </a:rPr>
+              <a:t>: [4, 4]</a:t>
+            </a:r>
+            <a:endParaRPr sz="1150" b="0" dirty="0">
+              <a:solidFill>
+                <a:schemeClr val="bg1"/>
+              </a:solidFill>
+              <a:latin typeface="Consolas"/>
+            </a:endParaRPr>
           </a:p>
           <a:p>
             <a:pPr algn="l">
@@ -7451,13 +7766,65 @@
               </a:spcAft>
             </a:pPr>
             <a:r>
-              <a:rPr sz="1100" b="0">
+              <a:rPr sz="1150" b="1" dirty="0" err="1">
+                <a:solidFill>
+                  <a:srgbClr val="E6EDF3"/>
+                </a:solidFill>
+                <a:latin typeface="Consolas"/>
+              </a:rPr>
+              <a:t>n_out</a:t>
+            </a:r>
+            <a:r>
+              <a:rPr sz="1150" b="1" dirty="0">
+                <a:solidFill>
+                  <a:srgbClr val="E6EDF3"/>
+                </a:solidFill>
+                <a:latin typeface="Consolas"/>
+              </a:rPr>
+              <a:t> = 7</a:t>
+            </a:r>
+          </a:p>
+          <a:p>
+            <a:pPr algn="l">
+              <a:spcAft>
+                <a:spcPts val="500"/>
+              </a:spcAft>
+            </a:pPr>
+            <a:r>
+              <a:rPr lang="it-IT" sz="1100" b="0" dirty="0">
                 <a:solidFill>
                   <a:srgbClr val="F5A623"/>
                 </a:solidFill>
                 <a:latin typeface="Segoe UI"/>
               </a:rPr>
-              <a:t>N_IN = Σ size dei tipi</a:t>
+              <a:t>// </a:t>
+            </a:r>
+            <a:r>
+              <a:rPr sz="1100" b="0" dirty="0">
+                <a:solidFill>
+                  <a:srgbClr val="F5A623"/>
+                </a:solidFill>
+                <a:latin typeface="Segoe UI"/>
+              </a:rPr>
+              <a:t>N_IN = Σ size </a:t>
+            </a:r>
+            <a:r>
+              <a:rPr sz="1100" b="0" dirty="0" err="1">
+                <a:solidFill>
+                  <a:srgbClr val="F5A623"/>
+                </a:solidFill>
+                <a:latin typeface="Segoe UI"/>
+              </a:rPr>
+              <a:t>dei</a:t>
+            </a:r>
+            <a:r>
+              <a:rPr sz="1100" b="0" dirty="0">
+                <a:solidFill>
+                  <a:srgbClr val="F5A623"/>
+                </a:solidFill>
+                <a:latin typeface="Segoe UI"/>
+              </a:rPr>
+              <a:t> tipi</a:t>
             </a:r>
           </a:p>
         </p:txBody>
@@ -8077,25 +8444,247 @@
           <a:p>
             <a:pPr algn="l"/>
             <a:r>
-              <a:rPr sz="1350" b="1">
+              <a:rPr sz="1350" b="1" dirty="0">
                 <a:solidFill>
                   <a:srgbClr val="F85149"/>
                 </a:solidFill>
                 <a:latin typeface="Segoe UI"/>
               </a:rPr>
-              <a:t>Prima: disallineamento silenzioso</a:t>
-            </a:r>
+              <a:t>Prima: </a:t>
+            </a:r>
+            <a:r>
+              <a:rPr sz="1350" b="1" dirty="0" err="1">
+                <a:solidFill>
+                  <a:srgbClr val="F85149"/>
+                </a:solidFill>
+                <a:latin typeface="Segoe UI"/>
+              </a:rPr>
+              <a:t>disallineamento</a:t>
+            </a:r>
+            <a:r>
+              <a:rPr sz="1350" b="1" dirty="0">
+                <a:solidFill>
+                  <a:srgbClr val="F85149"/>
+                </a:solidFill>
+                <a:latin typeface="Segoe UI"/>
+              </a:rPr>
+              <a:t> </a:t>
+            </a:r>
+            <a:r>
+              <a:rPr sz="1350" b="1" dirty="0" err="1">
+                <a:solidFill>
+                  <a:srgbClr val="F85149"/>
+                </a:solidFill>
+                <a:latin typeface="Segoe UI"/>
+              </a:rPr>
+              <a:t>silenzioso</a:t>
+            </a:r>
+            <a:endParaRPr sz="1350" b="1" dirty="0">
+              <a:solidFill>
+                <a:srgbClr val="F85149"/>
+              </a:solidFill>
+              <a:latin typeface="Segoe UI"/>
+            </a:endParaRPr>
           </a:p>
           <a:p>
             <a:pPr algn="l"/>
             <a:r>
-              <a:rPr sz="1200" b="0">
-                <a:solidFill>
-                  <a:srgbClr val="E6EDF3"/>
-                </a:solidFill>
-                <a:latin typeface="Segoe UI"/>
-              </a:rPr>
-              <a:t>Modello addestrato con N_IN=11 caricato su un nodo la cui topologia produce N_IN=13 → programma C sbagliato, caricato senza un solo errore. Inferenza errata.</a:t>
+              <a:rPr sz="1200" b="0" dirty="0" err="1">
+                <a:solidFill>
+                  <a:srgbClr val="E6EDF3"/>
+                </a:solidFill>
+                <a:latin typeface="Segoe UI"/>
+              </a:rPr>
+              <a:t>Modello</a:t>
+            </a:r>
+            <a:r>
+              <a:rPr sz="1200" b="0" dirty="0">
+                <a:solidFill>
+                  <a:srgbClr val="E6EDF3"/>
+                </a:solidFill>
+                <a:latin typeface="Segoe UI"/>
+              </a:rPr>
+              <a:t> </a:t>
+            </a:r>
+            <a:r>
+              <a:rPr sz="1200" b="0" dirty="0" err="1">
+                <a:solidFill>
+                  <a:srgbClr val="E6EDF3"/>
+                </a:solidFill>
+                <a:latin typeface="Segoe UI"/>
+              </a:rPr>
+              <a:t>addestrato</a:t>
+            </a:r>
+            <a:r>
+              <a:rPr sz="1200" b="0" dirty="0">
+                <a:solidFill>
+                  <a:srgbClr val="E6EDF3"/>
+                </a:solidFill>
+                <a:latin typeface="Segoe UI"/>
+              </a:rPr>
+              <a:t> con N_IN=11 </a:t>
+            </a:r>
+            <a:r>
+              <a:rPr sz="1200" b="0" dirty="0" err="1">
+                <a:solidFill>
+                  <a:srgbClr val="E6EDF3"/>
+                </a:solidFill>
+                <a:latin typeface="Segoe UI"/>
+              </a:rPr>
+              <a:t>caricato</a:t>
+            </a:r>
+            <a:r>
+              <a:rPr sz="1200" b="0" dirty="0">
+                <a:solidFill>
+                  <a:srgbClr val="E6EDF3"/>
+                </a:solidFill>
+                <a:latin typeface="Segoe UI"/>
+              </a:rPr>
+              <a:t> </a:t>
+            </a:r>
+            <a:r>
+              <a:rPr sz="1200" b="0" dirty="0" err="1">
+                <a:solidFill>
+                  <a:srgbClr val="E6EDF3"/>
+                </a:solidFill>
+                <a:latin typeface="Segoe UI"/>
+              </a:rPr>
+              <a:t>su</a:t>
+            </a:r>
+            <a:r>
+              <a:rPr sz="1200" b="0" dirty="0">
+                <a:solidFill>
+                  <a:srgbClr val="E6EDF3"/>
+                </a:solidFill>
+                <a:latin typeface="Segoe UI"/>
+              </a:rPr>
+              <a:t> un </a:t>
+            </a:r>
+            <a:r>
+              <a:rPr sz="1200" b="0" dirty="0" err="1">
+                <a:solidFill>
+                  <a:srgbClr val="E6EDF3"/>
+                </a:solidFill>
+                <a:latin typeface="Segoe UI"/>
+              </a:rPr>
+              <a:t>nodo</a:t>
+            </a:r>
+            <a:r>
+              <a:rPr sz="1200" b="0" dirty="0">
+                <a:solidFill>
+                  <a:srgbClr val="E6EDF3"/>
+                </a:solidFill>
+                <a:latin typeface="Segoe UI"/>
+              </a:rPr>
+              <a:t> la cui </a:t>
+            </a:r>
+            <a:r>
+              <a:rPr sz="1200" b="0" dirty="0" err="1">
+                <a:solidFill>
+                  <a:srgbClr val="E6EDF3"/>
+                </a:solidFill>
+                <a:latin typeface="Segoe UI"/>
+              </a:rPr>
+              <a:t>topologia</a:t>
+            </a:r>
+            <a:r>
+              <a:rPr sz="1200" b="0" dirty="0">
+                <a:solidFill>
+                  <a:srgbClr val="E6EDF3"/>
+                </a:solidFill>
+                <a:latin typeface="Segoe UI"/>
+              </a:rPr>
+              <a:t> produce N_IN=13 → </a:t>
+            </a:r>
+            <a:r>
+              <a:rPr sz="1200" b="0" dirty="0" err="1">
+                <a:solidFill>
+                  <a:srgbClr val="E6EDF3"/>
+                </a:solidFill>
+                <a:latin typeface="Segoe UI"/>
+              </a:rPr>
+              <a:t>programma</a:t>
+            </a:r>
+            <a:r>
+              <a:rPr sz="1200" b="0" dirty="0">
+                <a:solidFill>
+                  <a:srgbClr val="E6EDF3"/>
+                </a:solidFill>
+                <a:latin typeface="Segoe UI"/>
+              </a:rPr>
+              <a:t> C </a:t>
+            </a:r>
+            <a:r>
+              <a:rPr sz="1200" b="0" dirty="0" err="1">
+                <a:solidFill>
+                  <a:srgbClr val="E6EDF3"/>
+                </a:solidFill>
+                <a:latin typeface="Segoe UI"/>
+              </a:rPr>
+              <a:t>sbagliato</a:t>
+            </a:r>
+            <a:r>
+              <a:rPr sz="1200" b="0" dirty="0">
+                <a:solidFill>
+                  <a:srgbClr val="E6EDF3"/>
+                </a:solidFill>
+                <a:latin typeface="Segoe UI"/>
+              </a:rPr>
+              <a:t>, </a:t>
+            </a:r>
+            <a:r>
+              <a:rPr sz="1200" b="0" dirty="0" err="1">
+                <a:solidFill>
+                  <a:srgbClr val="E6EDF3"/>
+                </a:solidFill>
+                <a:latin typeface="Segoe UI"/>
+              </a:rPr>
+              <a:t>caricato</a:t>
+            </a:r>
+            <a:r>
+              <a:rPr sz="1200" b="0" dirty="0">
+                <a:solidFill>
+                  <a:srgbClr val="E6EDF3"/>
+                </a:solidFill>
+                <a:latin typeface="Segoe UI"/>
+              </a:rPr>
+              <a:t> senza un solo </a:t>
+            </a:r>
+            <a:r>
+              <a:rPr sz="1200" b="0" dirty="0" err="1">
+                <a:solidFill>
+                  <a:srgbClr val="E6EDF3"/>
+                </a:solidFill>
+                <a:latin typeface="Segoe UI"/>
+              </a:rPr>
+              <a:t>errore</a:t>
+            </a:r>
+            <a:r>
+              <a:rPr sz="1200" b="0" dirty="0">
+                <a:solidFill>
+                  <a:srgbClr val="E6EDF3"/>
+                </a:solidFill>
+                <a:latin typeface="Segoe UI"/>
+              </a:rPr>
+              <a:t>. </a:t>
+            </a:r>
+            <a:r>
+              <a:rPr sz="1200" b="0" dirty="0" err="1">
+                <a:solidFill>
+                  <a:srgbClr val="E6EDF3"/>
+                </a:solidFill>
+                <a:latin typeface="Segoe UI"/>
+              </a:rPr>
+              <a:t>Inferenza</a:t>
+            </a:r>
+            <a:r>
+              <a:rPr sz="1200" b="0" dirty="0">
+                <a:solidFill>
+                  <a:srgbClr val="E6EDF3"/>
+                </a:solidFill>
+                <a:latin typeface="Segoe UI"/>
+              </a:rPr>
+              <a:t> errata.</a:t>
             </a:r>
           </a:p>
         </p:txBody>
@@ -12560,7 +13149,7 @@
         <p:spPr>
           <a:xfrm>
             <a:off x="566928" y="384048"/>
-            <a:ext cx="1097280" cy="914400"/>
+            <a:ext cx="1097280" cy="615553"/>
           </a:xfrm>
           <a:prstGeom prst="rect">
             <a:avLst/>
@@ -12575,14 +13164,29 @@
           <a:p>
             <a:pPr algn="l"/>
             <a:r>
-              <a:rPr sz="4000" b="1">
+              <a:rPr sz="4000" b="1" dirty="0">
                 <a:solidFill>
                   <a:srgbClr val="F5A623"/>
                 </a:solidFill>
                 <a:latin typeface="Georgia"/>
               </a:rPr>
-              <a:t>07</a:t>
-            </a:r>
+              <a:t>0</a:t>
+            </a:r>
+            <a:r>
+              <a:rPr lang="it-IT" sz="4000" b="1" dirty="0">
+                <a:solidFill>
+                  <a:srgbClr val="F5A623"/>
+                </a:solidFill>
+                <a:latin typeface="Georgia"/>
+              </a:rPr>
+              <a:t>7</a:t>
+            </a:r>
+            <a:endParaRPr sz="4000" b="1" dirty="0">
+              <a:solidFill>
+                <a:srgbClr val="F5A623"/>
+              </a:solidFill>
+              <a:latin typeface="Georgia"/>
+            </a:endParaRPr>
           </a:p>
         </p:txBody>
       </p:sp>
@@ -12616,7 +13220,7 @@
                 </a:solidFill>
                 <a:latin typeface="Georgia"/>
               </a:rPr>
-              <a:t>Abbattere la ricompilazione</a:t>
+              <a:t>AOT-literal: come funziona</a:t>
             </a:r>
           </a:p>
         </p:txBody>
@@ -12651,21 +13255,64 @@
                 </a:solidFill>
                 <a:latin typeface="Segoe UI"/>
               </a:rPr>
-              <a:t>Clang non sparisce: esce dal nodo e dallo swap</a:t>
-            </a:r>
-          </a:p>
-        </p:txBody>
-      </p:sp>
-      <p:sp>
-        <p:nvSpPr>
-          <p:cNvPr id="6" name="TextBox 5"/>
+              <a:t>Stessa topologia del BCC (dispatcher+tail-call+doppio parse) — numeri reali</a:t>
+            </a:r>
+          </a:p>
+        </p:txBody>
+      </p:sp>
+      <p:sp>
+        <p:nvSpPr>
+          <p:cNvPr id="6" name="Rectangle 5"/>
+          <p:cNvSpPr/>
+          <p:nvPr/>
+        </p:nvSpPr>
+        <p:spPr>
+          <a:xfrm>
+            <a:off x="640080" y="1828800"/>
+            <a:ext cx="5349240" cy="384048"/>
+          </a:xfrm>
+          <a:prstGeom prst="rect">
+            <a:avLst/>
+          </a:prstGeom>
+          <a:noFill/>
+          <a:ln>
+            <a:noFill/>
+          </a:ln>
+          <a:effectLst/>
+        </p:spPr>
+        <p:style>
+          <a:lnRef idx="1">
+            <a:schemeClr val="accent1"/>
+          </a:lnRef>
+          <a:fillRef idx="3">
+            <a:schemeClr val="accent1"/>
+          </a:fillRef>
+          <a:effectRef idx="2">
+            <a:schemeClr val="accent1"/>
+          </a:effectRef>
+          <a:fontRef idx="minor">
+            <a:schemeClr val="lt1"/>
+          </a:fontRef>
+        </p:style>
+        <p:txBody>
+          <a:bodyPr rtlCol="0" anchor="ctr"/>
+          <a:lstStyle/>
+          <a:p>
+            <a:pPr algn="ctr"/>
+            <a:endParaRPr/>
+          </a:p>
+        </p:txBody>
+      </p:sp>
+      <p:sp>
+        <p:nvSpPr>
+          <p:cNvPr id="7" name="TextBox 6"/>
           <p:cNvSpPr txBox="1"/>
           <p:nvPr/>
         </p:nvSpPr>
         <p:spPr>
           <a:xfrm>
-            <a:off x="640080" y="1847088"/>
-            <a:ext cx="2148840" cy="365760"/>
+            <a:off x="658368" y="1828800"/>
+            <a:ext cx="5303520" cy="365760"/>
           </a:xfrm>
           <a:prstGeom prst="rect">
             <a:avLst/>
@@ -12679,160 +13326,28 @@
           <a:lstStyle/>
           <a:p>
             <a:pPr algn="l"/>
-            <a:endParaRPr/>
-          </a:p>
-        </p:txBody>
-      </p:sp>
-      <p:sp>
-        <p:nvSpPr>
-          <p:cNvPr id="7" name="TextBox 6"/>
-          <p:cNvSpPr txBox="1"/>
-          <p:nvPr/>
-        </p:nvSpPr>
-        <p:spPr>
-          <a:xfrm>
-            <a:off x="2807208" y="1847088"/>
-            <a:ext cx="1783080" cy="365760"/>
-          </a:xfrm>
-          <a:prstGeom prst="rect">
-            <a:avLst/>
-          </a:prstGeom>
-          <a:noFill/>
-        </p:spPr>
-        <p:txBody>
-          <a:bodyPr wrap="square" lIns="0" tIns="0" rIns="0" bIns="0" anchor="t">
-            <a:spAutoFit/>
-          </a:bodyPr>
-          <a:lstStyle/>
-          <a:p>
-            <a:pPr algn="l"/>
-            <a:r>
-              <a:rPr sz="1150" b="1">
-                <a:solidFill>
-                  <a:srgbClr val="8B949E"/>
-                </a:solidFill>
-                <a:latin typeface="Segoe UI"/>
-              </a:rPr>
-              <a:t># clang</a:t>
-            </a:r>
-          </a:p>
-        </p:txBody>
-      </p:sp>
-      <p:sp>
-        <p:nvSpPr>
-          <p:cNvPr id="8" name="TextBox 7"/>
-          <p:cNvSpPr txBox="1"/>
-          <p:nvPr/>
-        </p:nvSpPr>
-        <p:spPr>
-          <a:xfrm>
-            <a:off x="4608576" y="1847088"/>
-            <a:ext cx="2834640" cy="365760"/>
-          </a:xfrm>
-          <a:prstGeom prst="rect">
-            <a:avLst/>
-          </a:prstGeom>
-          <a:noFill/>
-        </p:spPr>
-        <p:txBody>
-          <a:bodyPr wrap="square" lIns="0" tIns="0" rIns="0" bIns="0" anchor="t">
-            <a:spAutoFit/>
-          </a:bodyPr>
-          <a:lstStyle/>
-          <a:p>
-            <a:pPr algn="l"/>
-            <a:r>
-              <a:rPr sz="1150" b="1">
-                <a:solidFill>
-                  <a:srgbClr val="8B949E"/>
-                </a:solidFill>
-                <a:latin typeface="Segoe UI"/>
-              </a:rPr>
-              <a:t>dove</a:t>
-            </a:r>
-          </a:p>
-        </p:txBody>
-      </p:sp>
-      <p:sp>
-        <p:nvSpPr>
-          <p:cNvPr id="9" name="TextBox 8"/>
-          <p:cNvSpPr txBox="1"/>
-          <p:nvPr/>
-        </p:nvSpPr>
-        <p:spPr>
-          <a:xfrm>
-            <a:off x="7461504" y="1847088"/>
-            <a:ext cx="2423160" cy="365760"/>
-          </a:xfrm>
-          <a:prstGeom prst="rect">
-            <a:avLst/>
-          </a:prstGeom>
-          <a:noFill/>
-        </p:spPr>
-        <p:txBody>
-          <a:bodyPr wrap="square" lIns="0" tIns="0" rIns="0" bIns="0" anchor="t">
-            <a:spAutoFit/>
-          </a:bodyPr>
-          <a:lstStyle/>
-          <a:p>
-            <a:pPr algn="l"/>
-            <a:r>
-              <a:rPr sz="1150" b="1">
-                <a:solidFill>
-                  <a:srgbClr val="8B949E"/>
-                </a:solidFill>
-                <a:latin typeface="Segoe UI"/>
-              </a:rPr>
-              <a:t>quando</a:t>
-            </a:r>
-          </a:p>
-        </p:txBody>
-      </p:sp>
-      <p:sp>
-        <p:nvSpPr>
-          <p:cNvPr id="10" name="TextBox 9"/>
-          <p:cNvSpPr txBox="1"/>
-          <p:nvPr/>
-        </p:nvSpPr>
-        <p:spPr>
-          <a:xfrm>
-            <a:off x="9902952" y="1847088"/>
-            <a:ext cx="1737360" cy="365760"/>
-          </a:xfrm>
-          <a:prstGeom prst="rect">
-            <a:avLst/>
-          </a:prstGeom>
-          <a:noFill/>
-        </p:spPr>
-        <p:txBody>
-          <a:bodyPr wrap="square" lIns="0" tIns="0" rIns="0" bIns="0" anchor="t">
-            <a:spAutoFit/>
-          </a:bodyPr>
-          <a:lstStyle/>
-          <a:p>
-            <a:pPr algn="l"/>
-            <a:r>
-              <a:rPr sz="1150" b="1">
-                <a:solidFill>
-                  <a:srgbClr val="8B949E"/>
-                </a:solidFill>
-                <a:latin typeface="Segoe UI"/>
-              </a:rPr>
-              <a:t>deploy sul nodo</a:t>
-            </a:r>
-          </a:p>
-        </p:txBody>
-      </p:sp>
-      <p:sp>
-        <p:nvSpPr>
-          <p:cNvPr id="11" name="Rounded Rectangle 10"/>
+            <a:r>
+              <a:rPr sz="1200" b="1">
+                <a:solidFill>
+                  <a:srgbClr val="F5A623"/>
+                </a:solidFill>
+                <a:latin typeface="Segoe UI"/>
+              </a:rPr>
+              <a:t>OFFLINE  ·  build box, 1× per modello</a:t>
+            </a:r>
+          </a:p>
+        </p:txBody>
+      </p:sp>
+      <p:sp>
+        <p:nvSpPr>
+          <p:cNvPr id="8" name="Rounded Rectangle 7"/>
           <p:cNvSpPr/>
           <p:nvPr/>
         </p:nvSpPr>
         <p:spPr>
           <a:xfrm>
             <a:off x="640080" y="2212848"/>
-            <a:ext cx="10927080" cy="731520"/>
+            <a:ext cx="2606040" cy="914400"/>
           </a:xfrm>
           <a:prstGeom prst="roundRect">
             <a:avLst/>
@@ -12870,195 +13385,20 @@
       </p:sp>
       <p:sp>
         <p:nvSpPr>
-          <p:cNvPr id="12" name="TextBox 11"/>
-          <p:cNvSpPr txBox="1"/>
-          <p:nvPr/>
-        </p:nvSpPr>
-        <p:spPr>
-          <a:xfrm>
-            <a:off x="786384" y="2212848"/>
-            <a:ext cx="1984248" cy="731520"/>
-          </a:xfrm>
-          <a:prstGeom prst="rect">
-            <a:avLst/>
-          </a:prstGeom>
-          <a:noFill/>
-        </p:spPr>
-        <p:txBody>
-          <a:bodyPr wrap="square" lIns="0" tIns="0" rIns="0" bIns="0" anchor="ctr">
-            <a:spAutoFit/>
-          </a:bodyPr>
-          <a:lstStyle/>
-          <a:p>
-            <a:pPr algn="l"/>
-            <a:r>
-              <a:rPr sz="1150" b="1">
-                <a:solidFill>
-                  <a:srgbClr val="F85149"/>
-                </a:solidFill>
-                <a:latin typeface="Consolas"/>
-              </a:rPr>
-              <a:t>literal + BCC</a:t>
-            </a:r>
-          </a:p>
-        </p:txBody>
-      </p:sp>
-      <p:sp>
-        <p:nvSpPr>
-          <p:cNvPr id="13" name="TextBox 12"/>
-          <p:cNvSpPr txBox="1"/>
-          <p:nvPr/>
-        </p:nvSpPr>
-        <p:spPr>
-          <a:xfrm>
-            <a:off x="2953512" y="2212848"/>
-            <a:ext cx="1618488" cy="731520"/>
-          </a:xfrm>
-          <a:prstGeom prst="rect">
-            <a:avLst/>
-          </a:prstGeom>
-          <a:noFill/>
-        </p:spPr>
-        <p:txBody>
-          <a:bodyPr wrap="square" lIns="0" tIns="0" rIns="0" bIns="0" anchor="ctr">
-            <a:spAutoFit/>
-          </a:bodyPr>
-          <a:lstStyle/>
-          <a:p>
-            <a:pPr algn="l"/>
-            <a:r>
-              <a:rPr sz="1150" b="0">
-                <a:solidFill>
-                  <a:srgbClr val="E6EDF3"/>
-                </a:solidFill>
-                <a:latin typeface="Consolas"/>
-              </a:rPr>
-              <a:t>N (1/modello)</a:t>
-            </a:r>
-          </a:p>
-        </p:txBody>
-      </p:sp>
-      <p:sp>
-        <p:nvSpPr>
-          <p:cNvPr id="14" name="TextBox 13"/>
-          <p:cNvSpPr txBox="1"/>
-          <p:nvPr/>
-        </p:nvSpPr>
-        <p:spPr>
-          <a:xfrm>
-            <a:off x="4754880" y="2212848"/>
-            <a:ext cx="2670048" cy="731520"/>
-          </a:xfrm>
-          <a:prstGeom prst="rect">
-            <a:avLst/>
-          </a:prstGeom>
-          <a:noFill/>
-        </p:spPr>
-        <p:txBody>
-          <a:bodyPr wrap="square" lIns="0" tIns="0" rIns="0" bIns="0" anchor="ctr">
-            <a:spAutoFit/>
-          </a:bodyPr>
-          <a:lstStyle/>
-          <a:p>
-            <a:pPr algn="l"/>
-            <a:r>
-              <a:rPr sz="1150" b="0">
-                <a:solidFill>
-                  <a:srgbClr val="F85149"/>
-                </a:solidFill>
-                <a:latin typeface="Consolas"/>
-              </a:rPr>
-              <a:t>sul nodo datapath</a:t>
-            </a:r>
-          </a:p>
-        </p:txBody>
-      </p:sp>
-      <p:sp>
-        <p:nvSpPr>
-          <p:cNvPr id="15" name="TextBox 14"/>
-          <p:cNvSpPr txBox="1"/>
-          <p:nvPr/>
-        </p:nvSpPr>
-        <p:spPr>
-          <a:xfrm>
-            <a:off x="7607808" y="2212848"/>
-            <a:ext cx="2258568" cy="731520"/>
-          </a:xfrm>
-          <a:prstGeom prst="rect">
-            <a:avLst/>
-          </a:prstGeom>
-          <a:noFill/>
-        </p:spPr>
-        <p:txBody>
-          <a:bodyPr wrap="square" lIns="0" tIns="0" rIns="0" bIns="0" anchor="ctr">
-            <a:spAutoFit/>
-          </a:bodyPr>
-          <a:lstStyle/>
-          <a:p>
-            <a:pPr algn="l"/>
-            <a:r>
-              <a:rPr sz="1150" b="0">
-                <a:solidFill>
-                  <a:srgbClr val="F85149"/>
-                </a:solidFill>
-                <a:latin typeface="Consolas"/>
-              </a:rPr>
-              <a:t>al load</a:t>
-            </a:r>
-          </a:p>
-        </p:txBody>
-      </p:sp>
-      <p:sp>
-        <p:nvSpPr>
-          <p:cNvPr id="16" name="TextBox 15"/>
-          <p:cNvSpPr txBox="1"/>
-          <p:nvPr/>
-        </p:nvSpPr>
-        <p:spPr>
-          <a:xfrm>
-            <a:off x="10049256" y="2212848"/>
-            <a:ext cx="1572768" cy="731520"/>
-          </a:xfrm>
-          <a:prstGeom prst="rect">
-            <a:avLst/>
-          </a:prstGeom>
-          <a:noFill/>
-        </p:spPr>
-        <p:txBody>
-          <a:bodyPr wrap="square" lIns="0" tIns="0" rIns="0" bIns="0" anchor="ctr">
-            <a:spAutoFit/>
-          </a:bodyPr>
-          <a:lstStyle/>
-          <a:p>
-            <a:pPr algn="l"/>
-            <a:r>
-              <a:rPr sz="1150" b="1">
-                <a:solidFill>
-                  <a:srgbClr val="F85149"/>
-                </a:solidFill>
-                <a:latin typeface="Consolas"/>
-              </a:rPr>
-              <a:t>1660 ms</a:t>
-            </a:r>
-          </a:p>
-        </p:txBody>
-      </p:sp>
-      <p:sp>
-        <p:nvSpPr>
-          <p:cNvPr id="17" name="Rounded Rectangle 16"/>
+          <p:cNvPr id="9" name="Rounded Rectangle 8"/>
           <p:cNvSpPr/>
           <p:nvPr/>
         </p:nvSpPr>
         <p:spPr>
           <a:xfrm>
-            <a:off x="640080" y="3017520"/>
-            <a:ext cx="10927080" cy="731520"/>
+            <a:off x="731519" y="2258568"/>
+            <a:ext cx="2423160" cy="64008"/>
           </a:xfrm>
           <a:prstGeom prst="roundRect">
             <a:avLst/>
           </a:prstGeom>
           <a:solidFill>
-            <a:srgbClr val="112A22"/>
+            <a:srgbClr val="58A6FF"/>
           </a:solidFill>
           <a:ln>
             <a:noFill/>
@@ -13090,14 +13430,14 @@
       </p:sp>
       <p:sp>
         <p:nvSpPr>
-          <p:cNvPr id="18" name="TextBox 17"/>
+          <p:cNvPr id="10" name="TextBox 9"/>
           <p:cNvSpPr txBox="1"/>
           <p:nvPr/>
         </p:nvSpPr>
         <p:spPr>
           <a:xfrm>
-            <a:off x="786384" y="3017520"/>
-            <a:ext cx="1984248" cy="731520"/>
+            <a:off x="713231" y="2267712"/>
+            <a:ext cx="2459736" cy="804672"/>
           </a:xfrm>
           <a:prstGeom prst="rect">
             <a:avLst/>
@@ -13112,27 +13452,39 @@
           <a:p>
             <a:pPr algn="l"/>
             <a:r>
-              <a:rPr sz="1150" b="1">
-                <a:solidFill>
-                  <a:srgbClr val="3FB950"/>
+              <a:rPr sz="1100" b="1">
+                <a:solidFill>
+                  <a:srgbClr val="58A6FF"/>
                 </a:solidFill>
                 <a:latin typeface="Consolas"/>
               </a:rPr>
-              <a:t>AOT-literal</a:t>
-            </a:r>
-          </a:p>
-        </p:txBody>
-      </p:sp>
-      <p:sp>
-        <p:nvSpPr>
-          <p:cNvPr id="19" name="TextBox 18"/>
+              <a:t>gen_full_c.py</a:t>
+            </a:r>
+          </a:p>
+          <a:p>
+            <a:pPr algn="l"/>
+            <a:r>
+              <a:rPr sz="1000" b="0">
+                <a:solidFill>
+                  <a:srgbClr val="8B949E"/>
+                </a:solidFill>
+                <a:latin typeface="Segoe UI"/>
+              </a:rPr>
+              <a:t>pesi literal → .bpf.c</a:t>
+            </a:r>
+          </a:p>
+        </p:txBody>
+      </p:sp>
+      <p:sp>
+        <p:nvSpPr>
+          <p:cNvPr id="11" name="TextBox 10"/>
           <p:cNvSpPr txBox="1"/>
           <p:nvPr/>
         </p:nvSpPr>
         <p:spPr>
           <a:xfrm>
-            <a:off x="2953512" y="3017520"/>
-            <a:ext cx="1618488" cy="731520"/>
+            <a:off x="3227832" y="2432304"/>
+            <a:ext cx="365760" cy="457200"/>
           </a:xfrm>
           <a:prstGeom prst="rect">
             <a:avLst/>
@@ -13140,145 +13492,40 @@
           <a:noFill/>
         </p:spPr>
         <p:txBody>
-          <a:bodyPr wrap="square" lIns="0" tIns="0" rIns="0" bIns="0" anchor="ctr">
+          <a:bodyPr wrap="square" lIns="0" tIns="0" rIns="0" bIns="0" anchor="t">
             <a:spAutoFit/>
           </a:bodyPr>
           <a:lstStyle/>
           <a:p>
             <a:pPr algn="l"/>
             <a:r>
-              <a:rPr sz="1150" b="0">
-                <a:solidFill>
-                  <a:srgbClr val="E6EDF3"/>
-                </a:solidFill>
-                <a:latin typeface="Consolas"/>
-              </a:rPr>
-              <a:t>N (1/modello)</a:t>
-            </a:r>
-          </a:p>
-        </p:txBody>
-      </p:sp>
-      <p:sp>
-        <p:nvSpPr>
-          <p:cNvPr id="20" name="TextBox 19"/>
-          <p:cNvSpPr txBox="1"/>
-          <p:nvPr/>
-        </p:nvSpPr>
-        <p:spPr>
-          <a:xfrm>
-            <a:off x="4754880" y="3017520"/>
-            <a:ext cx="2670048" cy="731520"/>
-          </a:xfrm>
-          <a:prstGeom prst="rect">
-            <a:avLst/>
-          </a:prstGeom>
-          <a:noFill/>
-        </p:spPr>
-        <p:txBody>
-          <a:bodyPr wrap="square" lIns="0" tIns="0" rIns="0" bIns="0" anchor="ctr">
-            <a:spAutoFit/>
-          </a:bodyPr>
-          <a:lstStyle/>
-          <a:p>
-            <a:pPr algn="l"/>
-            <a:r>
-              <a:rPr sz="1150" b="0">
-                <a:solidFill>
-                  <a:srgbClr val="3FB950"/>
-                </a:solidFill>
-                <a:latin typeface="Consolas"/>
-              </a:rPr>
-              <a:t>build box, offline</a:t>
-            </a:r>
-          </a:p>
-        </p:txBody>
-      </p:sp>
-      <p:sp>
-        <p:nvSpPr>
-          <p:cNvPr id="21" name="TextBox 20"/>
-          <p:cNvSpPr txBox="1"/>
-          <p:nvPr/>
-        </p:nvSpPr>
-        <p:spPr>
-          <a:xfrm>
-            <a:off x="7607808" y="3017520"/>
-            <a:ext cx="2258568" cy="731520"/>
-          </a:xfrm>
-          <a:prstGeom prst="rect">
-            <a:avLst/>
-          </a:prstGeom>
-          <a:noFill/>
-        </p:spPr>
-        <p:txBody>
-          <a:bodyPr wrap="square" lIns="0" tIns="0" rIns="0" bIns="0" anchor="ctr">
-            <a:spAutoFit/>
-          </a:bodyPr>
-          <a:lstStyle/>
-          <a:p>
-            <a:pPr algn="l"/>
-            <a:r>
-              <a:rPr sz="1150" b="0">
-                <a:solidFill>
-                  <a:srgbClr val="3FB950"/>
-                </a:solidFill>
-                <a:latin typeface="Consolas"/>
-              </a:rPr>
-              <a:t>prima del deploy</a:t>
-            </a:r>
-          </a:p>
-        </p:txBody>
-      </p:sp>
-      <p:sp>
-        <p:nvSpPr>
-          <p:cNvPr id="22" name="TextBox 21"/>
-          <p:cNvSpPr txBox="1"/>
-          <p:nvPr/>
-        </p:nvSpPr>
-        <p:spPr>
-          <a:xfrm>
-            <a:off x="10049256" y="3017520"/>
-            <a:ext cx="1572768" cy="731520"/>
-          </a:xfrm>
-          <a:prstGeom prst="rect">
-            <a:avLst/>
-          </a:prstGeom>
-          <a:noFill/>
-        </p:spPr>
-        <p:txBody>
-          <a:bodyPr wrap="square" lIns="0" tIns="0" rIns="0" bIns="0" anchor="ctr">
-            <a:spAutoFit/>
-          </a:bodyPr>
-          <a:lstStyle/>
-          <a:p>
-            <a:pPr algn="l"/>
-            <a:r>
-              <a:rPr sz="1150" b="1">
-                <a:solidFill>
-                  <a:srgbClr val="3FB950"/>
-                </a:solidFill>
-                <a:latin typeface="Consolas"/>
-              </a:rPr>
-              <a:t>5.5 ms</a:t>
-            </a:r>
-          </a:p>
-        </p:txBody>
-      </p:sp>
-      <p:sp>
-        <p:nvSpPr>
-          <p:cNvPr id="23" name="Rounded Rectangle 22"/>
+              <a:rPr sz="2600" b="1">
+                <a:solidFill>
+                  <a:srgbClr val="F5A623"/>
+                </a:solidFill>
+                <a:latin typeface="Segoe UI"/>
+              </a:rPr>
+              <a:t>›</a:t>
+            </a:r>
+          </a:p>
+        </p:txBody>
+      </p:sp>
+      <p:sp>
+        <p:nvSpPr>
+          <p:cNvPr id="12" name="Rounded Rectangle 11"/>
           <p:cNvSpPr/>
           <p:nvPr/>
         </p:nvSpPr>
         <p:spPr>
           <a:xfrm>
-            <a:off x="640080" y="3977639"/>
-            <a:ext cx="10972800" cy="777240"/>
+            <a:off x="3291839" y="2212848"/>
+            <a:ext cx="2606040" cy="914400"/>
           </a:xfrm>
           <a:prstGeom prst="roundRect">
             <a:avLst/>
           </a:prstGeom>
           <a:solidFill>
-            <a:srgbClr val="2A200A"/>
+            <a:srgbClr val="1B222E"/>
           </a:solidFill>
           <a:ln>
             <a:noFill/>
@@ -13310,14 +13557,59 @@
       </p:sp>
       <p:sp>
         <p:nvSpPr>
-          <p:cNvPr id="24" name="TextBox 23"/>
+          <p:cNvPr id="13" name="Rounded Rectangle 12"/>
+          <p:cNvSpPr/>
+          <p:nvPr/>
+        </p:nvSpPr>
+        <p:spPr>
+          <a:xfrm>
+            <a:off x="3383279" y="2258568"/>
+            <a:ext cx="2423160" cy="64008"/>
+          </a:xfrm>
+          <a:prstGeom prst="roundRect">
+            <a:avLst/>
+          </a:prstGeom>
+          <a:solidFill>
+            <a:srgbClr val="F5A623"/>
+          </a:solidFill>
+          <a:ln>
+            <a:noFill/>
+          </a:ln>
+          <a:effectLst/>
+        </p:spPr>
+        <p:style>
+          <a:lnRef idx="1">
+            <a:schemeClr val="accent1"/>
+          </a:lnRef>
+          <a:fillRef idx="3">
+            <a:schemeClr val="accent1"/>
+          </a:fillRef>
+          <a:effectRef idx="2">
+            <a:schemeClr val="accent1"/>
+          </a:effectRef>
+          <a:fontRef idx="minor">
+            <a:schemeClr val="lt1"/>
+          </a:fontRef>
+        </p:style>
+        <p:txBody>
+          <a:bodyPr rtlCol="0" anchor="ctr"/>
+          <a:lstStyle/>
+          <a:p>
+            <a:pPr algn="ctr"/>
+            <a:endParaRPr/>
+          </a:p>
+        </p:txBody>
+      </p:sp>
+      <p:sp>
+        <p:nvSpPr>
+          <p:cNvPr id="14" name="TextBox 13"/>
           <p:cNvSpPr txBox="1"/>
           <p:nvPr/>
         </p:nvSpPr>
         <p:spPr>
           <a:xfrm>
-            <a:off x="841248" y="4096512"/>
-            <a:ext cx="10607040" cy="548640"/>
+            <a:off x="3364991" y="2267712"/>
+            <a:ext cx="2459736" cy="804672"/>
           </a:xfrm>
           <a:prstGeom prst="rect">
             <a:avLst/>
@@ -13332,36 +13624,82 @@
           <a:p>
             <a:pPr algn="l"/>
             <a:r>
-              <a:rPr sz="1250" b="1">
+              <a:rPr sz="1100" b="1">
                 <a:solidFill>
                   <a:srgbClr val="F5A623"/>
                 </a:solidFill>
-                <a:latin typeface="Segoe UI"/>
-              </a:rPr>
-              <a:t>Onesto: </a:t>
-            </a:r>
-            <a:r>
-              <a:rPr sz="1200" b="0">
-                <a:solidFill>
-                  <a:srgbClr val="E6EDF3"/>
-                </a:solidFill>
-                <a:latin typeface="Segoe UI"/>
-              </a:rPr>
-              <a:t>stesso numero di compilazioni (una per modello, i pesi sono literal). Cambia DOVE e QUANDO: clang gira offline sulla build box, prima; il nodo non esegue mai LLVM.</a:t>
-            </a:r>
-          </a:p>
-        </p:txBody>
-      </p:sp>
-      <p:sp>
-        <p:nvSpPr>
-          <p:cNvPr id="25" name="TextBox 24"/>
+                <a:latin typeface="Consolas"/>
+              </a:rPr>
+              <a:t>clang -O2 -target bpf</a:t>
+            </a:r>
+          </a:p>
+          <a:p>
+            <a:pPr algn="l"/>
+            <a:r>
+              <a:rPr sz="1000" b="0">
+                <a:solidFill>
+                  <a:srgbClr val="8B949E"/>
+                </a:solidFill>
+                <a:latin typeface="Segoe UI"/>
+              </a:rPr>
+              <a:t>→ model.o</a:t>
+            </a:r>
+          </a:p>
+        </p:txBody>
+      </p:sp>
+      <p:sp>
+        <p:nvSpPr>
+          <p:cNvPr id="15" name="Rectangle 14"/>
+          <p:cNvSpPr/>
+          <p:nvPr/>
+        </p:nvSpPr>
+        <p:spPr>
+          <a:xfrm>
+            <a:off x="6199632" y="1828800"/>
+            <a:ext cx="5349240" cy="384048"/>
+          </a:xfrm>
+          <a:prstGeom prst="rect">
+            <a:avLst/>
+          </a:prstGeom>
+          <a:noFill/>
+          <a:ln>
+            <a:noFill/>
+          </a:ln>
+          <a:effectLst/>
+        </p:spPr>
+        <p:style>
+          <a:lnRef idx="1">
+            <a:schemeClr val="accent1"/>
+          </a:lnRef>
+          <a:fillRef idx="3">
+            <a:schemeClr val="accent1"/>
+          </a:fillRef>
+          <a:effectRef idx="2">
+            <a:schemeClr val="accent1"/>
+          </a:effectRef>
+          <a:fontRef idx="minor">
+            <a:schemeClr val="lt1"/>
+          </a:fontRef>
+        </p:style>
+        <p:txBody>
+          <a:bodyPr rtlCol="0" anchor="ctr"/>
+          <a:lstStyle/>
+          <a:p>
+            <a:pPr algn="ctr"/>
+            <a:endParaRPr/>
+          </a:p>
+        </p:txBody>
+      </p:sp>
+      <p:sp>
+        <p:nvSpPr>
+          <p:cNvPr id="16" name="TextBox 15"/>
           <p:cNvSpPr txBox="1"/>
           <p:nvPr/>
         </p:nvSpPr>
         <p:spPr>
           <a:xfrm>
-            <a:off x="658368" y="4892040"/>
-            <a:ext cx="10972800" cy="1371600"/>
+            <a:off x="6217920" y="1828800"/>
+            <a:ext cx="5303520" cy="365760"/>
           </a:xfrm>
           <a:prstGeom prst="rect">
             <a:avLst/>
@@ -13374,78 +13712,860 @@
           </a:bodyPr>
           <a:lstStyle/>
           <a:p>
+            <a:pPr algn="l"/>
+            <a:r>
+              <a:rPr sz="1200" b="1">
+                <a:solidFill>
+                  <a:srgbClr val="3FB950"/>
+                </a:solidFill>
+                <a:latin typeface="Segoe UI"/>
+              </a:rPr>
+              <a:t>RUNTIME  ·  nodo datapath, per deploy</a:t>
+            </a:r>
+          </a:p>
+        </p:txBody>
+      </p:sp>
+      <p:sp>
+        <p:nvSpPr>
+          <p:cNvPr id="17" name="Rounded Rectangle 16"/>
+          <p:cNvSpPr/>
+          <p:nvPr/>
+        </p:nvSpPr>
+        <p:spPr>
+          <a:xfrm>
+            <a:off x="6199632" y="2212848"/>
+            <a:ext cx="2606040" cy="914400"/>
+          </a:xfrm>
+          <a:prstGeom prst="roundRect">
+            <a:avLst/>
+          </a:prstGeom>
+          <a:solidFill>
+            <a:srgbClr val="1B222E"/>
+          </a:solidFill>
+          <a:ln>
+            <a:noFill/>
+          </a:ln>
+          <a:effectLst/>
+        </p:spPr>
+        <p:style>
+          <a:lnRef idx="1">
+            <a:schemeClr val="accent1"/>
+          </a:lnRef>
+          <a:fillRef idx="3">
+            <a:schemeClr val="accent1"/>
+          </a:fillRef>
+          <a:effectRef idx="2">
+            <a:schemeClr val="accent1"/>
+          </a:effectRef>
+          <a:fontRef idx="minor">
+            <a:schemeClr val="lt1"/>
+          </a:fontRef>
+        </p:style>
+        <p:txBody>
+          <a:bodyPr rtlCol="0" anchor="ctr"/>
+          <a:lstStyle/>
+          <a:p>
+            <a:pPr algn="ctr"/>
+            <a:endParaRPr/>
+          </a:p>
+        </p:txBody>
+      </p:sp>
+      <p:sp>
+        <p:nvSpPr>
+          <p:cNvPr id="18" name="Rounded Rectangle 17"/>
+          <p:cNvSpPr/>
+          <p:nvPr/>
+        </p:nvSpPr>
+        <p:spPr>
+          <a:xfrm>
+            <a:off x="6291072" y="2258568"/>
+            <a:ext cx="2423160" cy="64008"/>
+          </a:xfrm>
+          <a:prstGeom prst="roundRect">
+            <a:avLst/>
+          </a:prstGeom>
+          <a:solidFill>
+            <a:srgbClr val="3FB950"/>
+          </a:solidFill>
+          <a:ln>
+            <a:noFill/>
+          </a:ln>
+          <a:effectLst/>
+        </p:spPr>
+        <p:style>
+          <a:lnRef idx="1">
+            <a:schemeClr val="accent1"/>
+          </a:lnRef>
+          <a:fillRef idx="3">
+            <a:schemeClr val="accent1"/>
+          </a:fillRef>
+          <a:effectRef idx="2">
+            <a:schemeClr val="accent1"/>
+          </a:effectRef>
+          <a:fontRef idx="minor">
+            <a:schemeClr val="lt1"/>
+          </a:fontRef>
+        </p:style>
+        <p:txBody>
+          <a:bodyPr rtlCol="0" anchor="ctr"/>
+          <a:lstStyle/>
+          <a:p>
+            <a:pPr algn="ctr"/>
+            <a:endParaRPr/>
+          </a:p>
+        </p:txBody>
+      </p:sp>
+      <p:sp>
+        <p:nvSpPr>
+          <p:cNvPr id="19" name="TextBox 18"/>
+          <p:cNvSpPr txBox="1"/>
+          <p:nvPr/>
+        </p:nvSpPr>
+        <p:spPr>
+          <a:xfrm>
+            <a:off x="6272784" y="2267712"/>
+            <a:ext cx="2459736" cy="804672"/>
+          </a:xfrm>
+          <a:prstGeom prst="rect">
+            <a:avLst/>
+          </a:prstGeom>
+          <a:noFill/>
+        </p:spPr>
+        <p:txBody>
+          <a:bodyPr wrap="square" lIns="0" tIns="0" rIns="0" bIns="0" anchor="ctr">
+            <a:spAutoFit/>
+          </a:bodyPr>
+          <a:lstStyle/>
+          <a:p>
+            <a:pPr algn="l"/>
+            <a:r>
+              <a:rPr sz="1100" b="1">
+                <a:solidFill>
+                  <a:srgbClr val="3FB950"/>
+                </a:solidFill>
+                <a:latin typeface="Consolas"/>
+              </a:rPr>
+              <a:t>bpf_object__open</a:t>
+            </a:r>
+          </a:p>
+          <a:p>
+            <a:pPr algn="l"/>
+            <a:r>
+              <a:rPr sz="1000" b="0">
+                <a:solidFill>
+                  <a:srgbClr val="8B949E"/>
+                </a:solidFill>
+                <a:latin typeface="Segoe UI"/>
+              </a:rPr>
+              <a:t>+ load</a:t>
+            </a:r>
+          </a:p>
+        </p:txBody>
+      </p:sp>
+      <p:sp>
+        <p:nvSpPr>
+          <p:cNvPr id="20" name="TextBox 19"/>
+          <p:cNvSpPr txBox="1"/>
+          <p:nvPr/>
+        </p:nvSpPr>
+        <p:spPr>
+          <a:xfrm>
+            <a:off x="8787384" y="2432304"/>
+            <a:ext cx="365760" cy="457200"/>
+          </a:xfrm>
+          <a:prstGeom prst="rect">
+            <a:avLst/>
+          </a:prstGeom>
+          <a:noFill/>
+        </p:spPr>
+        <p:txBody>
+          <a:bodyPr wrap="square" lIns="0" tIns="0" rIns="0" bIns="0" anchor="t">
+            <a:spAutoFit/>
+          </a:bodyPr>
+          <a:lstStyle/>
+          <a:p>
+            <a:pPr algn="l"/>
+            <a:r>
+              <a:rPr sz="2600" b="1">
+                <a:solidFill>
+                  <a:srgbClr val="F5A623"/>
+                </a:solidFill>
+                <a:latin typeface="Segoe UI"/>
+              </a:rPr>
+              <a:t>›</a:t>
+            </a:r>
+          </a:p>
+        </p:txBody>
+      </p:sp>
+      <p:sp>
+        <p:nvSpPr>
+          <p:cNvPr id="21" name="Rounded Rectangle 20"/>
+          <p:cNvSpPr/>
+          <p:nvPr/>
+        </p:nvSpPr>
+        <p:spPr>
+          <a:xfrm>
+            <a:off x="8851392" y="2212848"/>
+            <a:ext cx="2606040" cy="914400"/>
+          </a:xfrm>
+          <a:prstGeom prst="roundRect">
+            <a:avLst/>
+          </a:prstGeom>
+          <a:solidFill>
+            <a:srgbClr val="1B222E"/>
+          </a:solidFill>
+          <a:ln>
+            <a:noFill/>
+          </a:ln>
+          <a:effectLst/>
+        </p:spPr>
+        <p:style>
+          <a:lnRef idx="1">
+            <a:schemeClr val="accent1"/>
+          </a:lnRef>
+          <a:fillRef idx="3">
+            <a:schemeClr val="accent1"/>
+          </a:fillRef>
+          <a:effectRef idx="2">
+            <a:schemeClr val="accent1"/>
+          </a:effectRef>
+          <a:fontRef idx="minor">
+            <a:schemeClr val="lt1"/>
+          </a:fontRef>
+        </p:style>
+        <p:txBody>
+          <a:bodyPr rtlCol="0" anchor="ctr"/>
+          <a:lstStyle/>
+          <a:p>
+            <a:pPr algn="ctr"/>
+            <a:endParaRPr/>
+          </a:p>
+        </p:txBody>
+      </p:sp>
+      <p:sp>
+        <p:nvSpPr>
+          <p:cNvPr id="22" name="Rounded Rectangle 21"/>
+          <p:cNvSpPr/>
+          <p:nvPr/>
+        </p:nvSpPr>
+        <p:spPr>
+          <a:xfrm>
+            <a:off x="8942832" y="2258568"/>
+            <a:ext cx="2423160" cy="64008"/>
+          </a:xfrm>
+          <a:prstGeom prst="roundRect">
+            <a:avLst/>
+          </a:prstGeom>
+          <a:solidFill>
+            <a:srgbClr val="3FD0C8"/>
+          </a:solidFill>
+          <a:ln>
+            <a:noFill/>
+          </a:ln>
+          <a:effectLst/>
+        </p:spPr>
+        <p:style>
+          <a:lnRef idx="1">
+            <a:schemeClr val="accent1"/>
+          </a:lnRef>
+          <a:fillRef idx="3">
+            <a:schemeClr val="accent1"/>
+          </a:fillRef>
+          <a:effectRef idx="2">
+            <a:schemeClr val="accent1"/>
+          </a:effectRef>
+          <a:fontRef idx="minor">
+            <a:schemeClr val="lt1"/>
+          </a:fontRef>
+        </p:style>
+        <p:txBody>
+          <a:bodyPr rtlCol="0" anchor="ctr"/>
+          <a:lstStyle/>
+          <a:p>
+            <a:pPr algn="ctr"/>
+            <a:endParaRPr/>
+          </a:p>
+        </p:txBody>
+      </p:sp>
+      <p:sp>
+        <p:nvSpPr>
+          <p:cNvPr id="23" name="TextBox 22"/>
+          <p:cNvSpPr txBox="1"/>
+          <p:nvPr/>
+        </p:nvSpPr>
+        <p:spPr>
+          <a:xfrm>
+            <a:off x="8924544" y="2267712"/>
+            <a:ext cx="2459736" cy="804672"/>
+          </a:xfrm>
+          <a:prstGeom prst="rect">
+            <a:avLst/>
+          </a:prstGeom>
+          <a:noFill/>
+        </p:spPr>
+        <p:txBody>
+          <a:bodyPr wrap="square" lIns="0" tIns="0" rIns="0" bIns="0" anchor="ctr">
+            <a:spAutoFit/>
+          </a:bodyPr>
+          <a:lstStyle/>
+          <a:p>
+            <a:pPr algn="l"/>
+            <a:r>
+              <a:rPr sz="1100" b="1">
+                <a:solidFill>
+                  <a:srgbClr val="3FD0C8"/>
+                </a:solidFill>
+                <a:latin typeface="Consolas"/>
+              </a:rPr>
+              <a:t>BPF_PROG_TEST_RUN</a:t>
+            </a:r>
+          </a:p>
+          <a:p>
+            <a:pPr algn="l"/>
+            <a:r>
+              <a:rPr sz="1000" b="0">
+                <a:solidFill>
+                  <a:srgbClr val="8B949E"/>
+                </a:solidFill>
+                <a:latin typeface="Segoe UI"/>
+              </a:rPr>
+              <a:t>perf full-path</a:t>
+            </a:r>
+          </a:p>
+        </p:txBody>
+      </p:sp>
+      <p:sp>
+        <p:nvSpPr>
+          <p:cNvPr id="24" name="Rounded Rectangle 23"/>
+          <p:cNvSpPr/>
+          <p:nvPr/>
+        </p:nvSpPr>
+        <p:spPr>
+          <a:xfrm>
+            <a:off x="640080" y="3429000"/>
+            <a:ext cx="5349240" cy="2331720"/>
+          </a:xfrm>
+          <a:prstGeom prst="roundRect">
+            <a:avLst/>
+          </a:prstGeom>
+          <a:solidFill>
+            <a:srgbClr val="1B222E"/>
+          </a:solidFill>
+          <a:ln>
+            <a:noFill/>
+          </a:ln>
+          <a:effectLst/>
+        </p:spPr>
+        <p:style>
+          <a:lnRef idx="1">
+            <a:schemeClr val="accent1"/>
+          </a:lnRef>
+          <a:fillRef idx="3">
+            <a:schemeClr val="accent1"/>
+          </a:fillRef>
+          <a:effectRef idx="2">
+            <a:schemeClr val="accent1"/>
+          </a:effectRef>
+          <a:fontRef idx="minor">
+            <a:schemeClr val="lt1"/>
+          </a:fontRef>
+        </p:style>
+        <p:txBody>
+          <a:bodyPr rtlCol="0" anchor="ctr"/>
+          <a:lstStyle/>
+          <a:p>
+            <a:pPr algn="ctr"/>
+            <a:endParaRPr/>
+          </a:p>
+        </p:txBody>
+      </p:sp>
+      <p:sp>
+        <p:nvSpPr>
+          <p:cNvPr id="25" name="Rounded Rectangle 24"/>
+          <p:cNvSpPr/>
+          <p:nvPr/>
+        </p:nvSpPr>
+        <p:spPr>
+          <a:xfrm>
+            <a:off x="731519" y="3474720"/>
+            <a:ext cx="5166359" cy="64008"/>
+          </a:xfrm>
+          <a:prstGeom prst="roundRect">
+            <a:avLst/>
+          </a:prstGeom>
+          <a:solidFill>
+            <a:srgbClr val="3FB950"/>
+          </a:solidFill>
+          <a:ln>
+            <a:noFill/>
+          </a:ln>
+          <a:effectLst/>
+        </p:spPr>
+        <p:style>
+          <a:lnRef idx="1">
+            <a:schemeClr val="accent1"/>
+          </a:lnRef>
+          <a:fillRef idx="3">
+            <a:schemeClr val="accent1"/>
+          </a:fillRef>
+          <a:effectRef idx="2">
+            <a:schemeClr val="accent1"/>
+          </a:effectRef>
+          <a:fontRef idx="minor">
+            <a:schemeClr val="lt1"/>
+          </a:fontRef>
+        </p:style>
+        <p:txBody>
+          <a:bodyPr rtlCol="0" anchor="ctr"/>
+          <a:lstStyle/>
+          <a:p>
+            <a:pPr algn="ctr"/>
+            <a:endParaRPr/>
+          </a:p>
+        </p:txBody>
+      </p:sp>
+      <p:sp>
+        <p:nvSpPr>
+          <p:cNvPr id="26" name="TextBox 25"/>
+          <p:cNvSpPr txBox="1"/>
+          <p:nvPr/>
+        </p:nvSpPr>
+        <p:spPr>
+          <a:xfrm>
+            <a:off x="841247" y="3575304"/>
+            <a:ext cx="4983479" cy="411480"/>
+          </a:xfrm>
+          <a:prstGeom prst="rect">
+            <a:avLst/>
+          </a:prstGeom>
+          <a:noFill/>
+        </p:spPr>
+        <p:txBody>
+          <a:bodyPr wrap="square" lIns="0" tIns="0" rIns="0" bIns="0" anchor="t">
+            <a:spAutoFit/>
+          </a:bodyPr>
+          <a:lstStyle/>
+          <a:p>
+            <a:pPr algn="l"/>
+            <a:r>
+              <a:rPr sz="1350" b="1">
+                <a:solidFill>
+                  <a:srgbClr val="3FB950"/>
+                </a:solidFill>
+                <a:latin typeface="Segoe UI"/>
+              </a:rPr>
+              <a:t>Costo di deploy (misurato)</a:t>
+            </a:r>
+          </a:p>
+        </p:txBody>
+      </p:sp>
+      <p:sp>
+        <p:nvSpPr>
+          <p:cNvPr id="27" name="TextBox 26"/>
+          <p:cNvSpPr txBox="1"/>
+          <p:nvPr/>
+        </p:nvSpPr>
+        <p:spPr>
+          <a:xfrm>
+            <a:off x="868680" y="4069080"/>
+            <a:ext cx="4892040" cy="1737360"/>
+          </a:xfrm>
+          <a:prstGeom prst="rect">
+            <a:avLst/>
+          </a:prstGeom>
+          <a:noFill/>
+        </p:spPr>
+        <p:txBody>
+          <a:bodyPr wrap="square" lIns="0" tIns="0" rIns="0" bIns="0" anchor="t">
+            <a:spAutoFit/>
+          </a:bodyPr>
+          <a:lstStyle/>
+          <a:p>
             <a:pPr algn="l">
               <a:spcAft>
-                <a:spcPts val="700"/>
+                <a:spcPts val="500"/>
               </a:spcAft>
             </a:pPr>
             <a:r>
+              <a:rPr sz="1150" b="0">
+                <a:solidFill>
+                  <a:srgbClr val="8B949E"/>
+                </a:solidFill>
+                <a:latin typeface="Consolas"/>
+              </a:rPr>
+              <a:t>build offline (clang→.o)</a:t>
+            </a:r>
+            <a:r>
               <a:rPr sz="1250" b="1">
                 <a:solidFill>
                   <a:srgbClr val="F5A623"/>
                 </a:solidFill>
-                <a:latin typeface="Segoe UI"/>
-              </a:rPr>
-              <a:t>•  </a:t>
-            </a:r>
-            <a:r>
-              <a:rPr sz="1250" b="0">
-                <a:solidFill>
-                  <a:srgbClr val="E6EDF3"/>
-                </a:solidFill>
-                <a:latin typeface="Segoe UI"/>
-              </a:rPr>
-              <a:t>M nodi, stesso modello: 1 compilazione + M load da ~5 ms, invece di M×1660 ms di clang su ogni nodo.</a:t>
+                <a:latin typeface="Consolas"/>
+              </a:rPr>
+              <a:t>   555 ms</a:t>
             </a:r>
           </a:p>
           <a:p>
             <a:pPr algn="l">
               <a:spcAft>
-                <a:spcPts val="700"/>
+                <a:spcPts val="500"/>
               </a:spcAft>
             </a:pPr>
             <a:r>
-              <a:rPr sz="1250" b="1">
-                <a:solidFill>
-                  <a:srgbClr val="F5A623"/>
-                </a:solidFill>
-                <a:latin typeface="Segoe UI"/>
-              </a:rPr>
-              <a:t>•  </a:t>
-            </a:r>
-            <a:r>
-              <a:rPr sz="1250" b="0">
-                <a:solidFill>
-                  <a:srgbClr val="E6EDF3"/>
-                </a:solidFill>
-                <a:latin typeface="Segoe UI"/>
-              </a:rPr>
-              <a:t>Swap a caldo: cambiare modello sulla datapath viva costa 5.5 ms, non 1660 — clang fuori dal percorso critico.</a:t>
+              <a:rPr sz="1050" b="0">
+                <a:solidFill>
+                  <a:srgbClr val="484F58"/>
+                </a:solidFill>
+                <a:latin typeface="Segoe UI"/>
+              </a:rPr>
+              <a:t>   1× per modello, sulla build box</a:t>
             </a:r>
           </a:p>
           <a:p>
             <a:pPr algn="l">
               <a:spcAft>
-                <a:spcPts val="700"/>
+                <a:spcPts val="500"/>
               </a:spcAft>
             </a:pPr>
             <a:r>
+              <a:rPr sz="1150" b="0">
+                <a:solidFill>
+                  <a:srgbClr val="8B949E"/>
+                </a:solidFill>
+                <a:latin typeface="Consolas"/>
+              </a:rPr>
+              <a:t>open_file</a:t>
+            </a:r>
+            <a:r>
               <a:rPr sz="1250" b="1">
                 <a:solidFill>
+                  <a:srgbClr val="3FB950"/>
+                </a:solidFill>
+                <a:latin typeface="Consolas"/>
+              </a:rPr>
+              <a:t>               0.58 ms</a:t>
+            </a:r>
+          </a:p>
+          <a:p>
+            <a:pPr algn="l">
+              <a:spcAft>
+                <a:spcPts val="500"/>
+              </a:spcAft>
+            </a:pPr>
+            <a:r>
+              <a:rPr sz="1150" b="0">
+                <a:solidFill>
+                  <a:srgbClr val="8B949E"/>
+                </a:solidFill>
+                <a:latin typeface="Consolas"/>
+              </a:rPr>
+              <a:t>load (verify+JIT)</a:t>
+            </a:r>
+            <a:r>
+              <a:rPr sz="1250" b="1">
+                <a:solidFill>
+                  <a:srgbClr val="3FB950"/>
+                </a:solidFill>
+                <a:latin typeface="Consolas"/>
+              </a:rPr>
+              <a:t>       4.89 ms</a:t>
+            </a:r>
+          </a:p>
+          <a:p>
+            <a:pPr algn="l">
+              <a:spcAft>
+                <a:spcPts val="500"/>
+              </a:spcAft>
+            </a:pPr>
+            <a:r>
+              <a:rPr sz="1150" b="1">
+                <a:solidFill>
+                  <a:srgbClr val="E6EDF3"/>
+                </a:solidFill>
+                <a:latin typeface="Consolas"/>
+              </a:rPr>
+              <a:t>deploy runtime totale</a:t>
+            </a:r>
+            <a:r>
+              <a:rPr sz="1300" b="1">
+                <a:solidFill>
+                  <a:srgbClr val="3FB950"/>
+                </a:solidFill>
+                <a:latin typeface="Consolas"/>
+              </a:rPr>
+              <a:t>    5.47 ms</a:t>
+            </a:r>
+          </a:p>
+        </p:txBody>
+      </p:sp>
+      <p:sp>
+        <p:nvSpPr>
+          <p:cNvPr id="28" name="Rounded Rectangle 27"/>
+          <p:cNvSpPr/>
+          <p:nvPr/>
+        </p:nvSpPr>
+        <p:spPr>
+          <a:xfrm>
+            <a:off x="6199632" y="3429000"/>
+            <a:ext cx="5349240" cy="2331720"/>
+          </a:xfrm>
+          <a:prstGeom prst="roundRect">
+            <a:avLst/>
+          </a:prstGeom>
+          <a:solidFill>
+            <a:srgbClr val="1B222E"/>
+          </a:solidFill>
+          <a:ln>
+            <a:noFill/>
+          </a:ln>
+          <a:effectLst/>
+        </p:spPr>
+        <p:style>
+          <a:lnRef idx="1">
+            <a:schemeClr val="accent1"/>
+          </a:lnRef>
+          <a:fillRef idx="3">
+            <a:schemeClr val="accent1"/>
+          </a:fillRef>
+          <a:effectRef idx="2">
+            <a:schemeClr val="accent1"/>
+          </a:effectRef>
+          <a:fontRef idx="minor">
+            <a:schemeClr val="lt1"/>
+          </a:fontRef>
+        </p:style>
+        <p:txBody>
+          <a:bodyPr rtlCol="0" anchor="ctr"/>
+          <a:lstStyle/>
+          <a:p>
+            <a:pPr algn="ctr"/>
+            <a:endParaRPr/>
+          </a:p>
+        </p:txBody>
+      </p:sp>
+      <p:sp>
+        <p:nvSpPr>
+          <p:cNvPr id="29" name="Rounded Rectangle 28"/>
+          <p:cNvSpPr/>
+          <p:nvPr/>
+        </p:nvSpPr>
+        <p:spPr>
+          <a:xfrm>
+            <a:off x="6291072" y="3474720"/>
+            <a:ext cx="5166359" cy="64008"/>
+          </a:xfrm>
+          <a:prstGeom prst="roundRect">
+            <a:avLst/>
+          </a:prstGeom>
+          <a:solidFill>
+            <a:srgbClr val="F5A623"/>
+          </a:solidFill>
+          <a:ln>
+            <a:noFill/>
+          </a:ln>
+          <a:effectLst/>
+        </p:spPr>
+        <p:style>
+          <a:lnRef idx="1">
+            <a:schemeClr val="accent1"/>
+          </a:lnRef>
+          <a:fillRef idx="3">
+            <a:schemeClr val="accent1"/>
+          </a:fillRef>
+          <a:effectRef idx="2">
+            <a:schemeClr val="accent1"/>
+          </a:effectRef>
+          <a:fontRef idx="minor">
+            <a:schemeClr val="lt1"/>
+          </a:fontRef>
+        </p:style>
+        <p:txBody>
+          <a:bodyPr rtlCol="0" anchor="ctr"/>
+          <a:lstStyle/>
+          <a:p>
+            <a:pPr algn="ctr"/>
+            <a:endParaRPr/>
+          </a:p>
+        </p:txBody>
+      </p:sp>
+      <p:sp>
+        <p:nvSpPr>
+          <p:cNvPr id="30" name="TextBox 29"/>
+          <p:cNvSpPr txBox="1"/>
+          <p:nvPr/>
+        </p:nvSpPr>
+        <p:spPr>
+          <a:xfrm>
+            <a:off x="6400800" y="3575304"/>
+            <a:ext cx="4983479" cy="411480"/>
+          </a:xfrm>
+          <a:prstGeom prst="rect">
+            <a:avLst/>
+          </a:prstGeom>
+          <a:noFill/>
+        </p:spPr>
+        <p:txBody>
+          <a:bodyPr wrap="square" lIns="0" tIns="0" rIns="0" bIns="0" anchor="t">
+            <a:spAutoFit/>
+          </a:bodyPr>
+          <a:lstStyle/>
+          <a:p>
+            <a:pPr algn="l"/>
+            <a:r>
+              <a:rPr sz="1350" b="1">
+                <a:solidFill>
                   <a:srgbClr val="F5A623"/>
                 </a:solidFill>
                 <a:latin typeface="Segoe UI"/>
               </a:rPr>
-              <a:t>•  </a:t>
-            </a:r>
-            <a:r>
-              <a:rPr sz="1250" b="0">
+              <a:t>Performance — arch-fedele vs BCC</a:t>
+            </a:r>
+          </a:p>
+        </p:txBody>
+      </p:sp>
+      <p:sp>
+        <p:nvSpPr>
+          <p:cNvPr id="31" name="TextBox 30"/>
+          <p:cNvSpPr txBox="1"/>
+          <p:nvPr/>
+        </p:nvSpPr>
+        <p:spPr>
+          <a:xfrm>
+            <a:off x="6428232" y="4041648"/>
+            <a:ext cx="4892040" cy="1737360"/>
+          </a:xfrm>
+          <a:prstGeom prst="rect">
+            <a:avLst/>
+          </a:prstGeom>
+          <a:noFill/>
+        </p:spPr>
+        <p:txBody>
+          <a:bodyPr wrap="square" lIns="0" tIns="0" rIns="0" bIns="0" anchor="t">
+            <a:spAutoFit/>
+          </a:bodyPr>
+          <a:lstStyle/>
+          <a:p>
+            <a:pPr algn="l">
+              <a:spcAft>
+                <a:spcPts val="500"/>
+              </a:spcAft>
+            </a:pPr>
+            <a:r>
+              <a:rPr sz="1100" b="1">
                 <a:solidFill>
                   <a:srgbClr val="8B949E"/>
                 </a:solidFill>
-                <a:latin typeface="Segoe UI"/>
-              </a:rPr>
-              <a:t>Non guadagni se compili sul nodo stesso al deploy: lì clang lo paghi comunque (1/modello).</a:t>
+                <a:latin typeface="Consolas"/>
+              </a:rPr>
+              <a:t>            AOT       BCC</a:t>
+            </a:r>
+          </a:p>
+          <a:p>
+            <a:pPr algn="l">
+              <a:spcAft>
+                <a:spcPts val="500"/>
+              </a:spcAft>
+            </a:pPr>
+            <a:r>
+              <a:rPr sz="1150" b="0">
+                <a:solidFill>
+                  <a:srgbClr val="E6EDF3"/>
+                </a:solidFill>
+                <a:latin typeface="Consolas"/>
+              </a:rPr>
+              <a:t>insn      943      980</a:t>
+            </a:r>
+          </a:p>
+          <a:p>
+            <a:pPr algn="l">
+              <a:spcAft>
+                <a:spcPts val="500"/>
+              </a:spcAft>
+            </a:pPr>
+            <a:r>
+              <a:rPr sz="1150" b="0">
+                <a:solidFill>
+                  <a:srgbClr val="E6EDF3"/>
+                </a:solidFill>
+                <a:latin typeface="Consolas"/>
+              </a:rPr>
+              <a:t>latenza   69 ns    66 ns</a:t>
+            </a:r>
+          </a:p>
+          <a:p>
+            <a:pPr algn="l">
+              <a:spcAft>
+                <a:spcPts val="500"/>
+              </a:spcAft>
+            </a:pPr>
+            <a:r>
+              <a:rPr sz="1150" b="0">
+                <a:solidFill>
+                  <a:srgbClr val="E6EDF3"/>
+                </a:solidFill>
+                <a:latin typeface="Consolas"/>
+              </a:rPr>
+              <a:t>thrpt     14.5     15.2 Mpps</a:t>
+            </a:r>
+          </a:p>
+          <a:p>
+            <a:pPr algn="l">
+              <a:spcAft>
+                <a:spcPts val="500"/>
+              </a:spcAft>
+            </a:pPr>
+            <a:r>
+              <a:rPr sz="1100" b="0">
+                <a:solidFill>
+                  <a:srgbClr val="3FB950"/>
+                </a:solidFill>
+                <a:latin typeface="Segoe UI"/>
+              </a:rPr>
+              <a:t>= identici (rumore di misura)</a:t>
+            </a:r>
+          </a:p>
+        </p:txBody>
+      </p:sp>
+      <p:sp>
+        <p:nvSpPr>
+          <p:cNvPr id="32" name="TextBox 31"/>
+          <p:cNvSpPr txBox="1"/>
+          <p:nvPr/>
+        </p:nvSpPr>
+        <p:spPr>
+          <a:xfrm>
+            <a:off x="640080" y="5943600"/>
+            <a:ext cx="10972800" cy="640080"/>
+          </a:xfrm>
+          <a:prstGeom prst="rect">
+            <a:avLst/>
+          </a:prstGeom>
+          <a:noFill/>
+        </p:spPr>
+        <p:txBody>
+          <a:bodyPr wrap="square" lIns="0" tIns="0" rIns="0" bIns="0" anchor="t">
+            <a:spAutoFit/>
+          </a:bodyPr>
+          <a:lstStyle/>
+          <a:p>
+            <a:pPr algn="l"/>
+            <a:r>
+              <a:rPr sz="1200" b="1">
+                <a:solidFill>
+                  <a:srgbClr val="8B949E"/>
+                </a:solidFill>
+                <a:latin typeface="Segoe UI"/>
+              </a:rPr>
+              <a:t>Stessa topologia del BCC (943 = disp 28 + model 915; test-run sul dispatcher). </a:t>
+            </a:r>
+            <a:r>
+              <a:rPr sz="1200" b="0">
+                <a:solidFill>
+                  <a:srgbClr val="E6EDF3"/>
+                </a:solidFill>
+                <a:latin typeface="Segoe UI"/>
+              </a:rPr>
+              <a:t>AOT NON è più veloce del BCC: preserva la perf literal-max — il valore è clang fuori dal nodo e dallo swap.</a:t>
             </a:r>
           </a:p>
         </p:txBody>
@@ -13529,7 +14649,7 @@
         <p:spPr>
           <a:xfrm>
             <a:off x="566928" y="384048"/>
-            <a:ext cx="1097280" cy="914400"/>
+            <a:ext cx="1097280" cy="615553"/>
           </a:xfrm>
           <a:prstGeom prst="rect">
             <a:avLst/>
@@ -13544,14 +14664,29 @@
           <a:p>
             <a:pPr algn="l"/>
             <a:r>
-              <a:rPr sz="4000" b="1">
+              <a:rPr sz="4000" b="1" dirty="0">
                 <a:solidFill>
                   <a:srgbClr val="F5A623"/>
                 </a:solidFill>
                 <a:latin typeface="Georgia"/>
               </a:rPr>
-              <a:t>08</a:t>
-            </a:r>
+              <a:t>0</a:t>
+            </a:r>
+            <a:r>
+              <a:rPr lang="it-IT" sz="4000" b="1" dirty="0">
+                <a:solidFill>
+                  <a:srgbClr val="F5A623"/>
+                </a:solidFill>
+                <a:latin typeface="Georgia"/>
+              </a:rPr>
+              <a:t>8</a:t>
+            </a:r>
+            <a:endParaRPr sz="4000" b="1" dirty="0">
+              <a:solidFill>
+                <a:srgbClr val="F5A623"/>
+              </a:solidFill>
+              <a:latin typeface="Georgia"/>
+            </a:endParaRPr>
           </a:p>
         </p:txBody>
       </p:sp>
@@ -13585,7 +14720,7 @@
                 </a:solidFill>
                 <a:latin typeface="Georgia"/>
               </a:rPr>
-              <a:t>AOT-literal: come funziona</a:t>
+              <a:t>Abbattere la ricompilazione</a:t>
             </a:r>
           </a:p>
         </p:txBody>
@@ -13620,64 +14755,21 @@
                 </a:solidFill>
                 <a:latin typeface="Segoe UI"/>
               </a:rPr>
-              <a:t>Stessa topologia del BCC (dispatcher+tail-call+doppio parse) — numeri reali</a:t>
-            </a:r>
-          </a:p>
-        </p:txBody>
-      </p:sp>
-      <p:sp>
-        <p:nvSpPr>
-          <p:cNvPr id="6" name="Rectangle 5"/>
-          <p:cNvSpPr/>
-          <p:nvPr/>
-        </p:nvSpPr>
-        <p:spPr>
-          <a:xfrm>
-            <a:off x="640080" y="1828800"/>
-            <a:ext cx="5349240" cy="384048"/>
-          </a:xfrm>
-          <a:prstGeom prst="rect">
-            <a:avLst/>
-          </a:prstGeom>
-          <a:noFill/>
-          <a:ln>
-            <a:noFill/>
-          </a:ln>
-          <a:effectLst/>
-        </p:spPr>
-        <p:style>
-          <a:lnRef idx="1">
-            <a:schemeClr val="accent1"/>
-          </a:lnRef>
-          <a:fillRef idx="3">
-            <a:schemeClr val="accent1"/>
-          </a:fillRef>
-          <a:effectRef idx="2">
-            <a:schemeClr val="accent1"/>
-          </a:effectRef>
-          <a:fontRef idx="minor">
-            <a:schemeClr val="lt1"/>
-          </a:fontRef>
-        </p:style>
-        <p:txBody>
-          <a:bodyPr rtlCol="0" anchor="ctr"/>
-          <a:lstStyle/>
-          <a:p>
-            <a:pPr algn="ctr"/>
-            <a:endParaRPr/>
-          </a:p>
-        </p:txBody>
-      </p:sp>
-      <p:sp>
-        <p:nvSpPr>
-          <p:cNvPr id="7" name="TextBox 6"/>
+              <a:t>Clang non sparisce: esce dal nodo e dallo swap</a:t>
+            </a:r>
+          </a:p>
+        </p:txBody>
+      </p:sp>
+      <p:sp>
+        <p:nvSpPr>
+          <p:cNvPr id="6" name="TextBox 5"/>
           <p:cNvSpPr txBox="1"/>
           <p:nvPr/>
         </p:nvSpPr>
         <p:spPr>
           <a:xfrm>
-            <a:off x="658368" y="1828800"/>
-            <a:ext cx="5303520" cy="365760"/>
+            <a:off x="640080" y="1847088"/>
+            <a:ext cx="2148840" cy="365760"/>
           </a:xfrm>
           <a:prstGeom prst="rect">
             <a:avLst/>
@@ -13691,28 +14783,160 @@
           <a:lstStyle/>
           <a:p>
             <a:pPr algn="l"/>
-            <a:r>
-              <a:rPr sz="1200" b="1">
-                <a:solidFill>
-                  <a:srgbClr val="F5A623"/>
-                </a:solidFill>
-                <a:latin typeface="Segoe UI"/>
-              </a:rPr>
-              <a:t>OFFLINE  ·  build box, 1× per modello</a:t>
-            </a:r>
-          </a:p>
-        </p:txBody>
-      </p:sp>
-      <p:sp>
-        <p:nvSpPr>
-          <p:cNvPr id="8" name="Rounded Rectangle 7"/>
+            <a:endParaRPr/>
+          </a:p>
+        </p:txBody>
+      </p:sp>
+      <p:sp>
+        <p:nvSpPr>
+          <p:cNvPr id="7" name="TextBox 6"/>
+          <p:cNvSpPr txBox="1"/>
+          <p:nvPr/>
+        </p:nvSpPr>
+        <p:spPr>
+          <a:xfrm>
+            <a:off x="2807208" y="1847088"/>
+            <a:ext cx="1783080" cy="365760"/>
+          </a:xfrm>
+          <a:prstGeom prst="rect">
+            <a:avLst/>
+          </a:prstGeom>
+          <a:noFill/>
+        </p:spPr>
+        <p:txBody>
+          <a:bodyPr wrap="square" lIns="0" tIns="0" rIns="0" bIns="0" anchor="t">
+            <a:spAutoFit/>
+          </a:bodyPr>
+          <a:lstStyle/>
+          <a:p>
+            <a:pPr algn="l"/>
+            <a:r>
+              <a:rPr sz="1150" b="1">
+                <a:solidFill>
+                  <a:srgbClr val="8B949E"/>
+                </a:solidFill>
+                <a:latin typeface="Segoe UI"/>
+              </a:rPr>
+              <a:t># clang</a:t>
+            </a:r>
+          </a:p>
+        </p:txBody>
+      </p:sp>
+      <p:sp>
+        <p:nvSpPr>
+          <p:cNvPr id="8" name="TextBox 7"/>
+          <p:cNvSpPr txBox="1"/>
+          <p:nvPr/>
+        </p:nvSpPr>
+        <p:spPr>
+          <a:xfrm>
+            <a:off x="4608576" y="1847088"/>
+            <a:ext cx="2834640" cy="365760"/>
+          </a:xfrm>
+          <a:prstGeom prst="rect">
+            <a:avLst/>
+          </a:prstGeom>
+          <a:noFill/>
+        </p:spPr>
+        <p:txBody>
+          <a:bodyPr wrap="square" lIns="0" tIns="0" rIns="0" bIns="0" anchor="t">
+            <a:spAutoFit/>
+          </a:bodyPr>
+          <a:lstStyle/>
+          <a:p>
+            <a:pPr algn="l"/>
+            <a:r>
+              <a:rPr sz="1150" b="1">
+                <a:solidFill>
+                  <a:srgbClr val="8B949E"/>
+                </a:solidFill>
+                <a:latin typeface="Segoe UI"/>
+              </a:rPr>
+              <a:t>dove</a:t>
+            </a:r>
+          </a:p>
+        </p:txBody>
+      </p:sp>
+      <p:sp>
+        <p:nvSpPr>
+          <p:cNvPr id="9" name="TextBox 8"/>
+          <p:cNvSpPr txBox="1"/>
+          <p:nvPr/>
+        </p:nvSpPr>
+        <p:spPr>
+          <a:xfrm>
+            <a:off x="7461504" y="1847088"/>
+            <a:ext cx="2423160" cy="365760"/>
+          </a:xfrm>
+          <a:prstGeom prst="rect">
+            <a:avLst/>
+          </a:prstGeom>
+          <a:noFill/>
+        </p:spPr>
+        <p:txBody>
+          <a:bodyPr wrap="square" lIns="0" tIns="0" rIns="0" bIns="0" anchor="t">
+            <a:spAutoFit/>
+          </a:bodyPr>
+          <a:lstStyle/>
+          <a:p>
+            <a:pPr algn="l"/>
+            <a:r>
+              <a:rPr sz="1150" b="1">
+                <a:solidFill>
+                  <a:srgbClr val="8B949E"/>
+                </a:solidFill>
+                <a:latin typeface="Segoe UI"/>
+              </a:rPr>
+              <a:t>quando</a:t>
+            </a:r>
+          </a:p>
+        </p:txBody>
+      </p:sp>
+      <p:sp>
+        <p:nvSpPr>
+          <p:cNvPr id="10" name="TextBox 9"/>
+          <p:cNvSpPr txBox="1"/>
+          <p:nvPr/>
+        </p:nvSpPr>
+        <p:spPr>
+          <a:xfrm>
+            <a:off x="9902952" y="1847088"/>
+            <a:ext cx="1737360" cy="365760"/>
+          </a:xfrm>
+          <a:prstGeom prst="rect">
+            <a:avLst/>
+          </a:prstGeom>
+          <a:noFill/>
+        </p:spPr>
+        <p:txBody>
+          <a:bodyPr wrap="square" lIns="0" tIns="0" rIns="0" bIns="0" anchor="t">
+            <a:spAutoFit/>
+          </a:bodyPr>
+          <a:lstStyle/>
+          <a:p>
+            <a:pPr algn="l"/>
+            <a:r>
+              <a:rPr sz="1150" b="1">
+                <a:solidFill>
+                  <a:srgbClr val="8B949E"/>
+                </a:solidFill>
+                <a:latin typeface="Segoe UI"/>
+              </a:rPr>
+              <a:t>deploy sul nodo</a:t>
+            </a:r>
+          </a:p>
+        </p:txBody>
+      </p:sp>
+      <p:sp>
+        <p:nvSpPr>
+          <p:cNvPr id="11" name="Rounded Rectangle 10"/>
           <p:cNvSpPr/>
           <p:nvPr/>
         </p:nvSpPr>
         <p:spPr>
           <a:xfrm>
             <a:off x="640080" y="2212848"/>
-            <a:ext cx="2606040" cy="914400"/>
+            <a:ext cx="10927080" cy="731520"/>
           </a:xfrm>
           <a:prstGeom prst="roundRect">
             <a:avLst/>
@@ -13750,20 +14974,195 @@
       </p:sp>
       <p:sp>
         <p:nvSpPr>
-          <p:cNvPr id="9" name="Rounded Rectangle 8"/>
+          <p:cNvPr id="12" name="TextBox 11"/>
+          <p:cNvSpPr txBox="1"/>
+          <p:nvPr/>
+        </p:nvSpPr>
+        <p:spPr>
+          <a:xfrm>
+            <a:off x="786384" y="2212848"/>
+            <a:ext cx="1984248" cy="731520"/>
+          </a:xfrm>
+          <a:prstGeom prst="rect">
+            <a:avLst/>
+          </a:prstGeom>
+          <a:noFill/>
+        </p:spPr>
+        <p:txBody>
+          <a:bodyPr wrap="square" lIns="0" tIns="0" rIns="0" bIns="0" anchor="ctr">
+            <a:spAutoFit/>
+          </a:bodyPr>
+          <a:lstStyle/>
+          <a:p>
+            <a:pPr algn="l"/>
+            <a:r>
+              <a:rPr sz="1150" b="1">
+                <a:solidFill>
+                  <a:srgbClr val="F85149"/>
+                </a:solidFill>
+                <a:latin typeface="Consolas"/>
+              </a:rPr>
+              <a:t>literal + BCC</a:t>
+            </a:r>
+          </a:p>
+        </p:txBody>
+      </p:sp>
+      <p:sp>
+        <p:nvSpPr>
+          <p:cNvPr id="13" name="TextBox 12"/>
+          <p:cNvSpPr txBox="1"/>
+          <p:nvPr/>
+        </p:nvSpPr>
+        <p:spPr>
+          <a:xfrm>
+            <a:off x="2953512" y="2212848"/>
+            <a:ext cx="1618488" cy="731520"/>
+          </a:xfrm>
+          <a:prstGeom prst="rect">
+            <a:avLst/>
+          </a:prstGeom>
+          <a:noFill/>
+        </p:spPr>
+        <p:txBody>
+          <a:bodyPr wrap="square" lIns="0" tIns="0" rIns="0" bIns="0" anchor="ctr">
+            <a:spAutoFit/>
+          </a:bodyPr>
+          <a:lstStyle/>
+          <a:p>
+            <a:pPr algn="l"/>
+            <a:r>
+              <a:rPr sz="1150" b="0">
+                <a:solidFill>
+                  <a:srgbClr val="E6EDF3"/>
+                </a:solidFill>
+                <a:latin typeface="Consolas"/>
+              </a:rPr>
+              <a:t>N (1/modello)</a:t>
+            </a:r>
+          </a:p>
+        </p:txBody>
+      </p:sp>
+      <p:sp>
+        <p:nvSpPr>
+          <p:cNvPr id="14" name="TextBox 13"/>
+          <p:cNvSpPr txBox="1"/>
+          <p:nvPr/>
+        </p:nvSpPr>
+        <p:spPr>
+          <a:xfrm>
+            <a:off x="4754880" y="2212848"/>
+            <a:ext cx="2670048" cy="731520"/>
+          </a:xfrm>
+          <a:prstGeom prst="rect">
+            <a:avLst/>
+          </a:prstGeom>
+          <a:noFill/>
+        </p:spPr>
+        <p:txBody>
+          <a:bodyPr wrap="square" lIns="0" tIns="0" rIns="0" bIns="0" anchor="ctr">
+            <a:spAutoFit/>
+          </a:bodyPr>
+          <a:lstStyle/>
+          <a:p>
+            <a:pPr algn="l"/>
+            <a:r>
+              <a:rPr sz="1150" b="0">
+                <a:solidFill>
+                  <a:srgbClr val="F85149"/>
+                </a:solidFill>
+                <a:latin typeface="Consolas"/>
+              </a:rPr>
+              <a:t>sul nodo datapath</a:t>
+            </a:r>
+          </a:p>
+        </p:txBody>
+      </p:sp>
+      <p:sp>
+        <p:nvSpPr>
+          <p:cNvPr id="15" name="TextBox 14"/>
+          <p:cNvSpPr txBox="1"/>
+          <p:nvPr/>
+        </p:nvSpPr>
+        <p:spPr>
+          <a:xfrm>
+            <a:off x="7607808" y="2212848"/>
+            <a:ext cx="2258568" cy="731520"/>
+          </a:xfrm>
+          <a:prstGeom prst="rect">
+            <a:avLst/>
+          </a:prstGeom>
+          <a:noFill/>
+        </p:spPr>
+        <p:txBody>
+          <a:bodyPr wrap="square" lIns="0" tIns="0" rIns="0" bIns="0" anchor="ctr">
+            <a:spAutoFit/>
+          </a:bodyPr>
+          <a:lstStyle/>
+          <a:p>
+            <a:pPr algn="l"/>
+            <a:r>
+              <a:rPr sz="1150" b="0">
+                <a:solidFill>
+                  <a:srgbClr val="F85149"/>
+                </a:solidFill>
+                <a:latin typeface="Consolas"/>
+              </a:rPr>
+              <a:t>al load</a:t>
+            </a:r>
+          </a:p>
+        </p:txBody>
+      </p:sp>
+      <p:sp>
+        <p:nvSpPr>
+          <p:cNvPr id="16" name="TextBox 15"/>
+          <p:cNvSpPr txBox="1"/>
+          <p:nvPr/>
+        </p:nvSpPr>
+        <p:spPr>
+          <a:xfrm>
+            <a:off x="10049256" y="2212848"/>
+            <a:ext cx="1572768" cy="731520"/>
+          </a:xfrm>
+          <a:prstGeom prst="rect">
+            <a:avLst/>
+          </a:prstGeom>
+          <a:noFill/>
+        </p:spPr>
+        <p:txBody>
+          <a:bodyPr wrap="square" lIns="0" tIns="0" rIns="0" bIns="0" anchor="ctr">
+            <a:spAutoFit/>
+          </a:bodyPr>
+          <a:lstStyle/>
+          <a:p>
+            <a:pPr algn="l"/>
+            <a:r>
+              <a:rPr sz="1150" b="1">
+                <a:solidFill>
+                  <a:srgbClr val="F85149"/>
+                </a:solidFill>
+                <a:latin typeface="Consolas"/>
+              </a:rPr>
+              <a:t>1660 ms</a:t>
+            </a:r>
+          </a:p>
+        </p:txBody>
+      </p:sp>
+      <p:sp>
+        <p:nvSpPr>
+          <p:cNvPr id="17" name="Rounded Rectangle 16"/>
           <p:cNvSpPr/>
           <p:nvPr/>
         </p:nvSpPr>
         <p:spPr>
           <a:xfrm>
-            <a:off x="731519" y="2258568"/>
-            <a:ext cx="2423160" cy="64008"/>
+            <a:off x="640080" y="3017520"/>
+            <a:ext cx="10927080" cy="731520"/>
           </a:xfrm>
           <a:prstGeom prst="roundRect">
             <a:avLst/>
           </a:prstGeom>
           <a:solidFill>
-            <a:srgbClr val="58A6FF"/>
+            <a:srgbClr val="112A22"/>
           </a:solidFill>
           <a:ln>
             <a:noFill/>
@@ -13795,14 +15194,14 @@
       </p:sp>
       <p:sp>
         <p:nvSpPr>
-          <p:cNvPr id="10" name="TextBox 9"/>
+          <p:cNvPr id="18" name="TextBox 17"/>
           <p:cNvSpPr txBox="1"/>
           <p:nvPr/>
         </p:nvSpPr>
         <p:spPr>
           <a:xfrm>
-            <a:off x="713231" y="2267712"/>
-            <a:ext cx="2459736" cy="804672"/>
+            <a:off x="786384" y="3017520"/>
+            <a:ext cx="1984248" cy="731520"/>
           </a:xfrm>
           <a:prstGeom prst="rect">
             <a:avLst/>
@@ -13817,39 +15216,27 @@
           <a:p>
             <a:pPr algn="l"/>
             <a:r>
-              <a:rPr sz="1100" b="1">
-                <a:solidFill>
-                  <a:srgbClr val="58A6FF"/>
+              <a:rPr sz="1150" b="1">
+                <a:solidFill>
+                  <a:srgbClr val="3FB950"/>
                 </a:solidFill>
                 <a:latin typeface="Consolas"/>
               </a:rPr>
-              <a:t>gen_full_c.py</a:t>
-            </a:r>
-          </a:p>
-          <a:p>
-            <a:pPr algn="l"/>
-            <a:r>
-              <a:rPr sz="1000" b="0">
-                <a:solidFill>
-                  <a:srgbClr val="8B949E"/>
-                </a:solidFill>
-                <a:latin typeface="Segoe UI"/>
-              </a:rPr>
-              <a:t>pesi literal → .bpf.c</a:t>
-            </a:r>
-          </a:p>
-        </p:txBody>
-      </p:sp>
-      <p:sp>
-        <p:nvSpPr>
-          <p:cNvPr id="11" name="TextBox 10"/>
+              <a:t>AOT-literal</a:t>
+            </a:r>
+          </a:p>
+        </p:txBody>
+      </p:sp>
+      <p:sp>
+        <p:nvSpPr>
+          <p:cNvPr id="19" name="TextBox 18"/>
           <p:cNvSpPr txBox="1"/>
           <p:nvPr/>
         </p:nvSpPr>
         <p:spPr>
           <a:xfrm>
-            <a:off x="3227832" y="2432304"/>
-            <a:ext cx="365760" cy="457200"/>
+            <a:off x="2953512" y="3017520"/>
+            <a:ext cx="1618488" cy="731520"/>
           </a:xfrm>
           <a:prstGeom prst="rect">
             <a:avLst/>
@@ -13857,40 +15244,145 @@
           <a:noFill/>
         </p:spPr>
         <p:txBody>
-          <a:bodyPr wrap="square" lIns="0" tIns="0" rIns="0" bIns="0" anchor="t">
+          <a:bodyPr wrap="square" lIns="0" tIns="0" rIns="0" bIns="0" anchor="ctr">
             <a:spAutoFit/>
           </a:bodyPr>
           <a:lstStyle/>
           <a:p>
             <a:pPr algn="l"/>
             <a:r>
-              <a:rPr sz="2600" b="1">
-                <a:solidFill>
-                  <a:srgbClr val="F5A623"/>
-                </a:solidFill>
-                <a:latin typeface="Segoe UI"/>
-              </a:rPr>
-              <a:t>›</a:t>
-            </a:r>
-          </a:p>
-        </p:txBody>
-      </p:sp>
-      <p:sp>
-        <p:nvSpPr>
-          <p:cNvPr id="12" name="Rounded Rectangle 11"/>
+              <a:rPr sz="1150" b="0">
+                <a:solidFill>
+                  <a:srgbClr val="E6EDF3"/>
+                </a:solidFill>
+                <a:latin typeface="Consolas"/>
+              </a:rPr>
+              <a:t>N (1/modello)</a:t>
+            </a:r>
+          </a:p>
+        </p:txBody>
+      </p:sp>
+      <p:sp>
+        <p:nvSpPr>
+          <p:cNvPr id="20" name="TextBox 19"/>
+          <p:cNvSpPr txBox="1"/>
+          <p:nvPr/>
+        </p:nvSpPr>
+        <p:spPr>
+          <a:xfrm>
+            <a:off x="4754880" y="3017520"/>
+            <a:ext cx="2670048" cy="731520"/>
+          </a:xfrm>
+          <a:prstGeom prst="rect">
+            <a:avLst/>
+          </a:prstGeom>
+          <a:noFill/>
+        </p:spPr>
+        <p:txBody>
+          <a:bodyPr wrap="square" lIns="0" tIns="0" rIns="0" bIns="0" anchor="ctr">
+            <a:spAutoFit/>
+          </a:bodyPr>
+          <a:lstStyle/>
+          <a:p>
+            <a:pPr algn="l"/>
+            <a:r>
+              <a:rPr sz="1150" b="0">
+                <a:solidFill>
+                  <a:srgbClr val="3FB950"/>
+                </a:solidFill>
+                <a:latin typeface="Consolas"/>
+              </a:rPr>
+              <a:t>build box, offline</a:t>
+            </a:r>
+          </a:p>
+        </p:txBody>
+      </p:sp>
+      <p:sp>
+        <p:nvSpPr>
+          <p:cNvPr id="21" name="TextBox 20"/>
+          <p:cNvSpPr txBox="1"/>
+          <p:nvPr/>
+        </p:nvSpPr>
+        <p:spPr>
+          <a:xfrm>
+            <a:off x="7607808" y="3017520"/>
+            <a:ext cx="2258568" cy="731520"/>
+          </a:xfrm>
+          <a:prstGeom prst="rect">
+            <a:avLst/>
+          </a:prstGeom>
+          <a:noFill/>
+        </p:spPr>
+        <p:txBody>
+          <a:bodyPr wrap="square" lIns="0" tIns="0" rIns="0" bIns="0" anchor="ctr">
+            <a:spAutoFit/>
+          </a:bodyPr>
+          <a:lstStyle/>
+          <a:p>
+            <a:pPr algn="l"/>
+            <a:r>
+              <a:rPr sz="1150" b="0">
+                <a:solidFill>
+                  <a:srgbClr val="3FB950"/>
+                </a:solidFill>
+                <a:latin typeface="Consolas"/>
+              </a:rPr>
+              <a:t>prima del deploy</a:t>
+            </a:r>
+          </a:p>
+        </p:txBody>
+      </p:sp>
+      <p:sp>
+        <p:nvSpPr>
+          <p:cNvPr id="22" name="TextBox 21"/>
+          <p:cNvSpPr txBox="1"/>
+          <p:nvPr/>
+        </p:nvSpPr>
+        <p:spPr>
+          <a:xfrm>
+            <a:off x="10049256" y="3017520"/>
+            <a:ext cx="1572768" cy="731520"/>
+          </a:xfrm>
+          <a:prstGeom prst="rect">
+            <a:avLst/>
+          </a:prstGeom>
+          <a:noFill/>
+        </p:spPr>
+        <p:txBody>
+          <a:bodyPr wrap="square" lIns="0" tIns="0" rIns="0" bIns="0" anchor="ctr">
+            <a:spAutoFit/>
+          </a:bodyPr>
+          <a:lstStyle/>
+          <a:p>
+            <a:pPr algn="l"/>
+            <a:r>
+              <a:rPr sz="1150" b="1">
+                <a:solidFill>
+                  <a:srgbClr val="3FB950"/>
+                </a:solidFill>
+                <a:latin typeface="Consolas"/>
+              </a:rPr>
+              <a:t>5.5 ms</a:t>
+            </a:r>
+          </a:p>
+        </p:txBody>
+      </p:sp>
+      <p:sp>
+        <p:nvSpPr>
+          <p:cNvPr id="23" name="Rounded Rectangle 22"/>
           <p:cNvSpPr/>
           <p:nvPr/>
         </p:nvSpPr>
         <p:spPr>
           <a:xfrm>
-            <a:off x="3291839" y="2212848"/>
-            <a:ext cx="2606040" cy="914400"/>
+            <a:off x="640080" y="3977639"/>
+            <a:ext cx="10972800" cy="777240"/>
           </a:xfrm>
           <a:prstGeom prst="roundRect">
             <a:avLst/>
           </a:prstGeom>
           <a:solidFill>
-            <a:srgbClr val="1B222E"/>
+            <a:srgbClr val="2A200A"/>
           </a:solidFill>
           <a:ln>
             <a:noFill/>
@@ -13922,59 +15414,14 @@
       </p:sp>
       <p:sp>
         <p:nvSpPr>
-          <p:cNvPr id="13" name="Rounded Rectangle 12"/>
-          <p:cNvSpPr/>
-          <p:nvPr/>
-        </p:nvSpPr>
-        <p:spPr>
-          <a:xfrm>
-            <a:off x="3383279" y="2258568"/>
-            <a:ext cx="2423160" cy="64008"/>
-          </a:xfrm>
-          <a:prstGeom prst="roundRect">
-            <a:avLst/>
-          </a:prstGeom>
-          <a:solidFill>
-            <a:srgbClr val="F5A623"/>
-          </a:solidFill>
-          <a:ln>
-            <a:noFill/>
-          </a:ln>
-          <a:effectLst/>
-        </p:spPr>
-        <p:style>
-          <a:lnRef idx="1">
-            <a:schemeClr val="accent1"/>
-          </a:lnRef>
-          <a:fillRef idx="3">
-            <a:schemeClr val="accent1"/>
-          </a:fillRef>
-          <a:effectRef idx="2">
-            <a:schemeClr val="accent1"/>
-          </a:effectRef>
-          <a:fontRef idx="minor">
-            <a:schemeClr val="lt1"/>
-          </a:fontRef>
-        </p:style>
-        <p:txBody>
-          <a:bodyPr rtlCol="0" anchor="ctr"/>
-          <a:lstStyle/>
-          <a:p>
-            <a:pPr algn="ctr"/>
-            <a:endParaRPr/>
-          </a:p>
-        </p:txBody>
-      </p:sp>
-      <p:sp>
-        <p:nvSpPr>
-          <p:cNvPr id="14" name="TextBox 13"/>
+          <p:cNvPr id="24" name="TextBox 23"/>
           <p:cNvSpPr txBox="1"/>
           <p:nvPr/>
         </p:nvSpPr>
         <p:spPr>
           <a:xfrm>
-            <a:off x="3364991" y="2267712"/>
-            <a:ext cx="2459736" cy="804672"/>
+            <a:off x="841248" y="4186166"/>
+            <a:ext cx="10607040" cy="369332"/>
           </a:xfrm>
           <a:prstGeom prst="rect">
             <a:avLst/>
@@ -13989,82 +15436,252 @@
           <a:p>
             <a:pPr algn="l"/>
             <a:r>
-              <a:rPr sz="1100" b="1">
-                <a:solidFill>
-                  <a:srgbClr val="F5A623"/>
-                </a:solidFill>
-                <a:latin typeface="Consolas"/>
-              </a:rPr>
-              <a:t>clang -O2 -target bpf</a:t>
-            </a:r>
-          </a:p>
-          <a:p>
-            <a:pPr algn="l"/>
-            <a:r>
-              <a:rPr sz="1000" b="0">
-                <a:solidFill>
-                  <a:srgbClr val="8B949E"/>
-                </a:solidFill>
-                <a:latin typeface="Segoe UI"/>
-              </a:rPr>
-              <a:t>→ model.o</a:t>
-            </a:r>
-          </a:p>
-        </p:txBody>
-      </p:sp>
-      <p:sp>
-        <p:nvSpPr>
-          <p:cNvPr id="15" name="Rectangle 14"/>
-          <p:cNvSpPr/>
-          <p:nvPr/>
-        </p:nvSpPr>
-        <p:spPr>
-          <a:xfrm>
-            <a:off x="6199632" y="1828800"/>
-            <a:ext cx="5349240" cy="384048"/>
-          </a:xfrm>
-          <a:prstGeom prst="rect">
-            <a:avLst/>
-          </a:prstGeom>
-          <a:noFill/>
-          <a:ln>
-            <a:noFill/>
-          </a:ln>
-          <a:effectLst/>
-        </p:spPr>
-        <p:style>
-          <a:lnRef idx="1">
-            <a:schemeClr val="accent1"/>
-          </a:lnRef>
-          <a:fillRef idx="3">
-            <a:schemeClr val="accent1"/>
-          </a:fillRef>
-          <a:effectRef idx="2">
-            <a:schemeClr val="accent1"/>
-          </a:effectRef>
-          <a:fontRef idx="minor">
-            <a:schemeClr val="lt1"/>
-          </a:fontRef>
-        </p:style>
-        <p:txBody>
-          <a:bodyPr rtlCol="0" anchor="ctr"/>
-          <a:lstStyle/>
-          <a:p>
-            <a:pPr algn="ctr"/>
-            <a:endParaRPr/>
-          </a:p>
-        </p:txBody>
-      </p:sp>
-      <p:sp>
-        <p:nvSpPr>
-          <p:cNvPr id="16" name="TextBox 15"/>
+              <a:rPr sz="1200" b="0" dirty="0" err="1">
+                <a:solidFill>
+                  <a:srgbClr val="E6EDF3"/>
+                </a:solidFill>
+                <a:latin typeface="Segoe UI"/>
+              </a:rPr>
+              <a:t>stesso</a:t>
+            </a:r>
+            <a:r>
+              <a:rPr sz="1200" b="0" dirty="0">
+                <a:solidFill>
+                  <a:srgbClr val="E6EDF3"/>
+                </a:solidFill>
+                <a:latin typeface="Segoe UI"/>
+              </a:rPr>
+              <a:t> </a:t>
+            </a:r>
+            <a:r>
+              <a:rPr sz="1200" b="0" dirty="0" err="1">
+                <a:solidFill>
+                  <a:srgbClr val="E6EDF3"/>
+                </a:solidFill>
+                <a:latin typeface="Segoe UI"/>
+              </a:rPr>
+              <a:t>numero</a:t>
+            </a:r>
+            <a:r>
+              <a:rPr sz="1200" b="0" dirty="0">
+                <a:solidFill>
+                  <a:srgbClr val="E6EDF3"/>
+                </a:solidFill>
+                <a:latin typeface="Segoe UI"/>
+              </a:rPr>
+              <a:t> di </a:t>
+            </a:r>
+            <a:r>
+              <a:rPr sz="1200" b="0" dirty="0" err="1">
+                <a:solidFill>
+                  <a:srgbClr val="E6EDF3"/>
+                </a:solidFill>
+                <a:latin typeface="Segoe UI"/>
+              </a:rPr>
+              <a:t>compilazioni</a:t>
+            </a:r>
+            <a:r>
+              <a:rPr sz="1200" b="0" dirty="0">
+                <a:solidFill>
+                  <a:srgbClr val="E6EDF3"/>
+                </a:solidFill>
+                <a:latin typeface="Segoe UI"/>
+              </a:rPr>
+              <a:t> (</a:t>
+            </a:r>
+            <a:r>
+              <a:rPr sz="1200" b="0" dirty="0" err="1">
+                <a:solidFill>
+                  <a:srgbClr val="E6EDF3"/>
+                </a:solidFill>
+                <a:latin typeface="Segoe UI"/>
+              </a:rPr>
+              <a:t>una</a:t>
+            </a:r>
+            <a:r>
+              <a:rPr sz="1200" b="0" dirty="0">
+                <a:solidFill>
+                  <a:srgbClr val="E6EDF3"/>
+                </a:solidFill>
+                <a:latin typeface="Segoe UI"/>
+              </a:rPr>
+              <a:t> per </a:t>
+            </a:r>
+            <a:r>
+              <a:rPr sz="1200" b="0" dirty="0" err="1">
+                <a:solidFill>
+                  <a:srgbClr val="E6EDF3"/>
+                </a:solidFill>
+                <a:latin typeface="Segoe UI"/>
+              </a:rPr>
+              <a:t>modello</a:t>
+            </a:r>
+            <a:r>
+              <a:rPr sz="1200" b="0" dirty="0">
+                <a:solidFill>
+                  <a:srgbClr val="E6EDF3"/>
+                </a:solidFill>
+                <a:latin typeface="Segoe UI"/>
+              </a:rPr>
+              <a:t>, </a:t>
+            </a:r>
+            <a:r>
+              <a:rPr sz="1200" b="0" dirty="0" err="1">
+                <a:solidFill>
+                  <a:srgbClr val="E6EDF3"/>
+                </a:solidFill>
+                <a:latin typeface="Segoe UI"/>
+              </a:rPr>
+              <a:t>i</a:t>
+            </a:r>
+            <a:r>
+              <a:rPr sz="1200" b="0" dirty="0">
+                <a:solidFill>
+                  <a:srgbClr val="E6EDF3"/>
+                </a:solidFill>
+                <a:latin typeface="Segoe UI"/>
+              </a:rPr>
+              <a:t> </a:t>
+            </a:r>
+            <a:r>
+              <a:rPr sz="1200" b="0" dirty="0" err="1">
+                <a:solidFill>
+                  <a:srgbClr val="E6EDF3"/>
+                </a:solidFill>
+                <a:latin typeface="Segoe UI"/>
+              </a:rPr>
+              <a:t>pesi</a:t>
+            </a:r>
+            <a:r>
+              <a:rPr sz="1200" b="0" dirty="0">
+                <a:solidFill>
+                  <a:srgbClr val="E6EDF3"/>
+                </a:solidFill>
+                <a:latin typeface="Segoe UI"/>
+              </a:rPr>
+              <a:t> </a:t>
+            </a:r>
+            <a:r>
+              <a:rPr sz="1200" b="0" dirty="0" err="1">
+                <a:solidFill>
+                  <a:srgbClr val="E6EDF3"/>
+                </a:solidFill>
+                <a:latin typeface="Segoe UI"/>
+              </a:rPr>
+              <a:t>sono</a:t>
+            </a:r>
+            <a:r>
+              <a:rPr sz="1200" b="0" dirty="0">
+                <a:solidFill>
+                  <a:srgbClr val="E6EDF3"/>
+                </a:solidFill>
+                <a:latin typeface="Segoe UI"/>
+              </a:rPr>
+              <a:t> literal). Cambia DOVE e QUANDO: clang </a:t>
+            </a:r>
+            <a:r>
+              <a:rPr sz="1200" b="0" dirty="0" err="1">
+                <a:solidFill>
+                  <a:srgbClr val="E6EDF3"/>
+                </a:solidFill>
+                <a:latin typeface="Segoe UI"/>
+              </a:rPr>
+              <a:t>gira</a:t>
+            </a:r>
+            <a:r>
+              <a:rPr sz="1200" b="0" dirty="0">
+                <a:solidFill>
+                  <a:srgbClr val="E6EDF3"/>
+                </a:solidFill>
+                <a:latin typeface="Segoe UI"/>
+              </a:rPr>
+              <a:t> offline </a:t>
+            </a:r>
+            <a:r>
+              <a:rPr sz="1200" b="0" dirty="0" err="1">
+                <a:solidFill>
+                  <a:srgbClr val="E6EDF3"/>
+                </a:solidFill>
+                <a:latin typeface="Segoe UI"/>
+              </a:rPr>
+              <a:t>sulla</a:t>
+            </a:r>
+            <a:r>
+              <a:rPr sz="1200" b="0" dirty="0">
+                <a:solidFill>
+                  <a:srgbClr val="E6EDF3"/>
+                </a:solidFill>
+                <a:latin typeface="Segoe UI"/>
+              </a:rPr>
+              <a:t> build box, prima; il </a:t>
+            </a:r>
+            <a:r>
+              <a:rPr sz="1200" b="0" dirty="0" err="1">
+                <a:solidFill>
+                  <a:srgbClr val="E6EDF3"/>
+                </a:solidFill>
+                <a:latin typeface="Segoe UI"/>
+              </a:rPr>
+              <a:t>nodo</a:t>
+            </a:r>
+            <a:r>
+              <a:rPr sz="1200" b="0" dirty="0">
+                <a:solidFill>
+                  <a:srgbClr val="E6EDF3"/>
+                </a:solidFill>
+                <a:latin typeface="Segoe UI"/>
+              </a:rPr>
+              <a:t> non </a:t>
+            </a:r>
+            <a:r>
+              <a:rPr sz="1200" b="0" dirty="0" err="1">
+                <a:solidFill>
+                  <a:srgbClr val="E6EDF3"/>
+                </a:solidFill>
+                <a:latin typeface="Segoe UI"/>
+              </a:rPr>
+              <a:t>esegue</a:t>
+            </a:r>
+            <a:r>
+              <a:rPr sz="1200" b="0" dirty="0">
+                <a:solidFill>
+                  <a:srgbClr val="E6EDF3"/>
+                </a:solidFill>
+                <a:latin typeface="Segoe UI"/>
+              </a:rPr>
+              <a:t> </a:t>
+            </a:r>
+            <a:r>
+              <a:rPr sz="1200" b="0" dirty="0" err="1">
+                <a:solidFill>
+                  <a:srgbClr val="E6EDF3"/>
+                </a:solidFill>
+                <a:latin typeface="Segoe UI"/>
+              </a:rPr>
+              <a:t>mai</a:t>
+            </a:r>
+            <a:r>
+              <a:rPr sz="1200" b="0" dirty="0">
+                <a:solidFill>
+                  <a:srgbClr val="E6EDF3"/>
+                </a:solidFill>
+                <a:latin typeface="Segoe UI"/>
+              </a:rPr>
+              <a:t> LLVM.</a:t>
+            </a:r>
+          </a:p>
+        </p:txBody>
+      </p:sp>
+      <p:sp>
+        <p:nvSpPr>
+          <p:cNvPr id="25" name="TextBox 24"/>
           <p:cNvSpPr txBox="1"/>
           <p:nvPr/>
         </p:nvSpPr>
         <p:spPr>
           <a:xfrm>
-            <a:off x="6217920" y="1828800"/>
-            <a:ext cx="5303520" cy="365760"/>
+            <a:off x="658368" y="4892040"/>
+            <a:ext cx="10972800" cy="1371600"/>
           </a:xfrm>
           <a:prstGeom prst="rect">
             <a:avLst/>
@@ -14077,860 +15694,78 @@
           </a:bodyPr>
           <a:lstStyle/>
           <a:p>
-            <a:pPr algn="l"/>
-            <a:r>
-              <a:rPr sz="1200" b="1">
-                <a:solidFill>
-                  <a:srgbClr val="3FB950"/>
-                </a:solidFill>
-                <a:latin typeface="Segoe UI"/>
-              </a:rPr>
-              <a:t>RUNTIME  ·  nodo datapath, per deploy</a:t>
-            </a:r>
-          </a:p>
-        </p:txBody>
-      </p:sp>
-      <p:sp>
-        <p:nvSpPr>
-          <p:cNvPr id="17" name="Rounded Rectangle 16"/>
-          <p:cNvSpPr/>
-          <p:nvPr/>
-        </p:nvSpPr>
-        <p:spPr>
-          <a:xfrm>
-            <a:off x="6199632" y="2212848"/>
-            <a:ext cx="2606040" cy="914400"/>
-          </a:xfrm>
-          <a:prstGeom prst="roundRect">
-            <a:avLst/>
-          </a:prstGeom>
-          <a:solidFill>
-            <a:srgbClr val="1B222E"/>
-          </a:solidFill>
-          <a:ln>
-            <a:noFill/>
-          </a:ln>
-          <a:effectLst/>
-        </p:spPr>
-        <p:style>
-          <a:lnRef idx="1">
-            <a:schemeClr val="accent1"/>
-          </a:lnRef>
-          <a:fillRef idx="3">
-            <a:schemeClr val="accent1"/>
-          </a:fillRef>
-          <a:effectRef idx="2">
-            <a:schemeClr val="accent1"/>
-          </a:effectRef>
-          <a:fontRef idx="minor">
-            <a:schemeClr val="lt1"/>
-          </a:fontRef>
-        </p:style>
-        <p:txBody>
-          <a:bodyPr rtlCol="0" anchor="ctr"/>
-          <a:lstStyle/>
-          <a:p>
-            <a:pPr algn="ctr"/>
-            <a:endParaRPr/>
-          </a:p>
-        </p:txBody>
-      </p:sp>
-      <p:sp>
-        <p:nvSpPr>
-          <p:cNvPr id="18" name="Rounded Rectangle 17"/>
-          <p:cNvSpPr/>
-          <p:nvPr/>
-        </p:nvSpPr>
-        <p:spPr>
-          <a:xfrm>
-            <a:off x="6291072" y="2258568"/>
-            <a:ext cx="2423160" cy="64008"/>
-          </a:xfrm>
-          <a:prstGeom prst="roundRect">
-            <a:avLst/>
-          </a:prstGeom>
-          <a:solidFill>
-            <a:srgbClr val="3FB950"/>
-          </a:solidFill>
-          <a:ln>
-            <a:noFill/>
-          </a:ln>
-          <a:effectLst/>
-        </p:spPr>
-        <p:style>
-          <a:lnRef idx="1">
-            <a:schemeClr val="accent1"/>
-          </a:lnRef>
-          <a:fillRef idx="3">
-            <a:schemeClr val="accent1"/>
-          </a:fillRef>
-          <a:effectRef idx="2">
-            <a:schemeClr val="accent1"/>
-          </a:effectRef>
-          <a:fontRef idx="minor">
-            <a:schemeClr val="lt1"/>
-          </a:fontRef>
-        </p:style>
-        <p:txBody>
-          <a:bodyPr rtlCol="0" anchor="ctr"/>
-          <a:lstStyle/>
-          <a:p>
-            <a:pPr algn="ctr"/>
-            <a:endParaRPr/>
-          </a:p>
-        </p:txBody>
-      </p:sp>
-      <p:sp>
-        <p:nvSpPr>
-          <p:cNvPr id="19" name="TextBox 18"/>
-          <p:cNvSpPr txBox="1"/>
-          <p:nvPr/>
-        </p:nvSpPr>
-        <p:spPr>
-          <a:xfrm>
-            <a:off x="6272784" y="2267712"/>
-            <a:ext cx="2459736" cy="804672"/>
-          </a:xfrm>
-          <a:prstGeom prst="rect">
-            <a:avLst/>
-          </a:prstGeom>
-          <a:noFill/>
-        </p:spPr>
-        <p:txBody>
-          <a:bodyPr wrap="square" lIns="0" tIns="0" rIns="0" bIns="0" anchor="ctr">
-            <a:spAutoFit/>
-          </a:bodyPr>
-          <a:lstStyle/>
-          <a:p>
-            <a:pPr algn="l"/>
-            <a:r>
-              <a:rPr sz="1100" b="1">
-                <a:solidFill>
-                  <a:srgbClr val="3FB950"/>
-                </a:solidFill>
-                <a:latin typeface="Consolas"/>
-              </a:rPr>
-              <a:t>bpf_object__open</a:t>
-            </a:r>
-          </a:p>
-          <a:p>
-            <a:pPr algn="l"/>
-            <a:r>
-              <a:rPr sz="1000" b="0">
-                <a:solidFill>
-                  <a:srgbClr val="8B949E"/>
-                </a:solidFill>
-                <a:latin typeface="Segoe UI"/>
-              </a:rPr>
-              <a:t>+ load</a:t>
-            </a:r>
-          </a:p>
-        </p:txBody>
-      </p:sp>
-      <p:sp>
-        <p:nvSpPr>
-          <p:cNvPr id="20" name="TextBox 19"/>
-          <p:cNvSpPr txBox="1"/>
-          <p:nvPr/>
-        </p:nvSpPr>
-        <p:spPr>
-          <a:xfrm>
-            <a:off x="8787384" y="2432304"/>
-            <a:ext cx="365760" cy="457200"/>
-          </a:xfrm>
-          <a:prstGeom prst="rect">
-            <a:avLst/>
-          </a:prstGeom>
-          <a:noFill/>
-        </p:spPr>
-        <p:txBody>
-          <a:bodyPr wrap="square" lIns="0" tIns="0" rIns="0" bIns="0" anchor="t">
-            <a:spAutoFit/>
-          </a:bodyPr>
-          <a:lstStyle/>
-          <a:p>
-            <a:pPr algn="l"/>
-            <a:r>
-              <a:rPr sz="2600" b="1">
-                <a:solidFill>
-                  <a:srgbClr val="F5A623"/>
-                </a:solidFill>
-                <a:latin typeface="Segoe UI"/>
-              </a:rPr>
-              <a:t>›</a:t>
-            </a:r>
-          </a:p>
-        </p:txBody>
-      </p:sp>
-      <p:sp>
-        <p:nvSpPr>
-          <p:cNvPr id="21" name="Rounded Rectangle 20"/>
-          <p:cNvSpPr/>
-          <p:nvPr/>
-        </p:nvSpPr>
-        <p:spPr>
-          <a:xfrm>
-            <a:off x="8851392" y="2212848"/>
-            <a:ext cx="2606040" cy="914400"/>
-          </a:xfrm>
-          <a:prstGeom prst="roundRect">
-            <a:avLst/>
-          </a:prstGeom>
-          <a:solidFill>
-            <a:srgbClr val="1B222E"/>
-          </a:solidFill>
-          <a:ln>
-            <a:noFill/>
-          </a:ln>
-          <a:effectLst/>
-        </p:spPr>
-        <p:style>
-          <a:lnRef idx="1">
-            <a:schemeClr val="accent1"/>
-          </a:lnRef>
-          <a:fillRef idx="3">
-            <a:schemeClr val="accent1"/>
-          </a:fillRef>
-          <a:effectRef idx="2">
-            <a:schemeClr val="accent1"/>
-          </a:effectRef>
-          <a:fontRef idx="minor">
-            <a:schemeClr val="lt1"/>
-          </a:fontRef>
-        </p:style>
-        <p:txBody>
-          <a:bodyPr rtlCol="0" anchor="ctr"/>
-          <a:lstStyle/>
-          <a:p>
-            <a:pPr algn="ctr"/>
-            <a:endParaRPr/>
-          </a:p>
-        </p:txBody>
-      </p:sp>
-      <p:sp>
-        <p:nvSpPr>
-          <p:cNvPr id="22" name="Rounded Rectangle 21"/>
-          <p:cNvSpPr/>
-          <p:nvPr/>
-        </p:nvSpPr>
-        <p:spPr>
-          <a:xfrm>
-            <a:off x="8942832" y="2258568"/>
-            <a:ext cx="2423160" cy="64008"/>
-          </a:xfrm>
-          <a:prstGeom prst="roundRect">
-            <a:avLst/>
-          </a:prstGeom>
-          <a:solidFill>
-            <a:srgbClr val="3FD0C8"/>
-          </a:solidFill>
-          <a:ln>
-            <a:noFill/>
-          </a:ln>
-          <a:effectLst/>
-        </p:spPr>
-        <p:style>
-          <a:lnRef idx="1">
-            <a:schemeClr val="accent1"/>
-          </a:lnRef>
-          <a:fillRef idx="3">
-            <a:schemeClr val="accent1"/>
-          </a:fillRef>
-          <a:effectRef idx="2">
-            <a:schemeClr val="accent1"/>
-          </a:effectRef>
-          <a:fontRef idx="minor">
-            <a:schemeClr val="lt1"/>
-          </a:fontRef>
-        </p:style>
-        <p:txBody>
-          <a:bodyPr rtlCol="0" anchor="ctr"/>
-          <a:lstStyle/>
-          <a:p>
-            <a:pPr algn="ctr"/>
-            <a:endParaRPr/>
-          </a:p>
-        </p:txBody>
-      </p:sp>
-      <p:sp>
-        <p:nvSpPr>
-          <p:cNvPr id="23" name="TextBox 22"/>
-          <p:cNvSpPr txBox="1"/>
-          <p:nvPr/>
-        </p:nvSpPr>
-        <p:spPr>
-          <a:xfrm>
-            <a:off x="8924544" y="2267712"/>
-            <a:ext cx="2459736" cy="804672"/>
-          </a:xfrm>
-          <a:prstGeom prst="rect">
-            <a:avLst/>
-          </a:prstGeom>
-          <a:noFill/>
-        </p:spPr>
-        <p:txBody>
-          <a:bodyPr wrap="square" lIns="0" tIns="0" rIns="0" bIns="0" anchor="ctr">
-            <a:spAutoFit/>
-          </a:bodyPr>
-          <a:lstStyle/>
-          <a:p>
-            <a:pPr algn="l"/>
-            <a:r>
-              <a:rPr sz="1100" b="1">
-                <a:solidFill>
-                  <a:srgbClr val="3FD0C8"/>
-                </a:solidFill>
-                <a:latin typeface="Consolas"/>
-              </a:rPr>
-              <a:t>BPF_PROG_TEST_RUN</a:t>
-            </a:r>
-          </a:p>
-          <a:p>
-            <a:pPr algn="l"/>
-            <a:r>
-              <a:rPr sz="1000" b="0">
-                <a:solidFill>
-                  <a:srgbClr val="8B949E"/>
-                </a:solidFill>
-                <a:latin typeface="Segoe UI"/>
-              </a:rPr>
-              <a:t>perf full-path</a:t>
-            </a:r>
-          </a:p>
-        </p:txBody>
-      </p:sp>
-      <p:sp>
-        <p:nvSpPr>
-          <p:cNvPr id="24" name="Rounded Rectangle 23"/>
-          <p:cNvSpPr/>
-          <p:nvPr/>
-        </p:nvSpPr>
-        <p:spPr>
-          <a:xfrm>
-            <a:off x="640080" y="3429000"/>
-            <a:ext cx="5349240" cy="2331720"/>
-          </a:xfrm>
-          <a:prstGeom prst="roundRect">
-            <a:avLst/>
-          </a:prstGeom>
-          <a:solidFill>
-            <a:srgbClr val="1B222E"/>
-          </a:solidFill>
-          <a:ln>
-            <a:noFill/>
-          </a:ln>
-          <a:effectLst/>
-        </p:spPr>
-        <p:style>
-          <a:lnRef idx="1">
-            <a:schemeClr val="accent1"/>
-          </a:lnRef>
-          <a:fillRef idx="3">
-            <a:schemeClr val="accent1"/>
-          </a:fillRef>
-          <a:effectRef idx="2">
-            <a:schemeClr val="accent1"/>
-          </a:effectRef>
-          <a:fontRef idx="minor">
-            <a:schemeClr val="lt1"/>
-          </a:fontRef>
-        </p:style>
-        <p:txBody>
-          <a:bodyPr rtlCol="0" anchor="ctr"/>
-          <a:lstStyle/>
-          <a:p>
-            <a:pPr algn="ctr"/>
-            <a:endParaRPr/>
-          </a:p>
-        </p:txBody>
-      </p:sp>
-      <p:sp>
-        <p:nvSpPr>
-          <p:cNvPr id="25" name="Rounded Rectangle 24"/>
-          <p:cNvSpPr/>
-          <p:nvPr/>
-        </p:nvSpPr>
-        <p:spPr>
-          <a:xfrm>
-            <a:off x="731519" y="3474720"/>
-            <a:ext cx="5166359" cy="64008"/>
-          </a:xfrm>
-          <a:prstGeom prst="roundRect">
-            <a:avLst/>
-          </a:prstGeom>
-          <a:solidFill>
-            <a:srgbClr val="3FB950"/>
-          </a:solidFill>
-          <a:ln>
-            <a:noFill/>
-          </a:ln>
-          <a:effectLst/>
-        </p:spPr>
-        <p:style>
-          <a:lnRef idx="1">
-            <a:schemeClr val="accent1"/>
-          </a:lnRef>
-          <a:fillRef idx="3">
-            <a:schemeClr val="accent1"/>
-          </a:fillRef>
-          <a:effectRef idx="2">
-            <a:schemeClr val="accent1"/>
-          </a:effectRef>
-          <a:fontRef idx="minor">
-            <a:schemeClr val="lt1"/>
-          </a:fontRef>
-        </p:style>
-        <p:txBody>
-          <a:bodyPr rtlCol="0" anchor="ctr"/>
-          <a:lstStyle/>
-          <a:p>
-            <a:pPr algn="ctr"/>
-            <a:endParaRPr/>
-          </a:p>
-        </p:txBody>
-      </p:sp>
-      <p:sp>
-        <p:nvSpPr>
-          <p:cNvPr id="26" name="TextBox 25"/>
-          <p:cNvSpPr txBox="1"/>
-          <p:nvPr/>
-        </p:nvSpPr>
-        <p:spPr>
-          <a:xfrm>
-            <a:off x="841247" y="3575304"/>
-            <a:ext cx="4983479" cy="411480"/>
-          </a:xfrm>
-          <a:prstGeom prst="rect">
-            <a:avLst/>
-          </a:prstGeom>
-          <a:noFill/>
-        </p:spPr>
-        <p:txBody>
-          <a:bodyPr wrap="square" lIns="0" tIns="0" rIns="0" bIns="0" anchor="t">
-            <a:spAutoFit/>
-          </a:bodyPr>
-          <a:lstStyle/>
-          <a:p>
-            <a:pPr algn="l"/>
-            <a:r>
-              <a:rPr sz="1350" b="1">
-                <a:solidFill>
-                  <a:srgbClr val="3FB950"/>
-                </a:solidFill>
-                <a:latin typeface="Segoe UI"/>
-              </a:rPr>
-              <a:t>Costo di deploy (misurato)</a:t>
-            </a:r>
-          </a:p>
-        </p:txBody>
-      </p:sp>
-      <p:sp>
-        <p:nvSpPr>
-          <p:cNvPr id="27" name="TextBox 26"/>
-          <p:cNvSpPr txBox="1"/>
-          <p:nvPr/>
-        </p:nvSpPr>
-        <p:spPr>
-          <a:xfrm>
-            <a:off x="868680" y="4069080"/>
-            <a:ext cx="4892040" cy="1737360"/>
-          </a:xfrm>
-          <a:prstGeom prst="rect">
-            <a:avLst/>
-          </a:prstGeom>
-          <a:noFill/>
-        </p:spPr>
-        <p:txBody>
-          <a:bodyPr wrap="square" lIns="0" tIns="0" rIns="0" bIns="0" anchor="t">
-            <a:spAutoFit/>
-          </a:bodyPr>
-          <a:lstStyle/>
-          <a:p>
             <a:pPr algn="l">
               <a:spcAft>
-                <a:spcPts val="500"/>
+                <a:spcPts val="700"/>
               </a:spcAft>
             </a:pPr>
             <a:r>
-              <a:rPr sz="1150" b="0">
-                <a:solidFill>
-                  <a:srgbClr val="8B949E"/>
-                </a:solidFill>
-                <a:latin typeface="Consolas"/>
-              </a:rPr>
-              <a:t>build offline (clang→.o)</a:t>
-            </a:r>
-            <a:r>
               <a:rPr sz="1250" b="1">
                 <a:solidFill>
                   <a:srgbClr val="F5A623"/>
                 </a:solidFill>
-                <a:latin typeface="Consolas"/>
-              </a:rPr>
-              <a:t>   555 ms</a:t>
+                <a:latin typeface="Segoe UI"/>
+              </a:rPr>
+              <a:t>•  </a:t>
+            </a:r>
+            <a:r>
+              <a:rPr sz="1250" b="0">
+                <a:solidFill>
+                  <a:srgbClr val="E6EDF3"/>
+                </a:solidFill>
+                <a:latin typeface="Segoe UI"/>
+              </a:rPr>
+              <a:t>M nodi, stesso modello: 1 compilazione + M load da ~5 ms, invece di M×1660 ms di clang su ogni nodo.</a:t>
             </a:r>
           </a:p>
           <a:p>
             <a:pPr algn="l">
               <a:spcAft>
-                <a:spcPts val="500"/>
+                <a:spcPts val="700"/>
               </a:spcAft>
             </a:pPr>
             <a:r>
-              <a:rPr sz="1050" b="0">
-                <a:solidFill>
-                  <a:srgbClr val="484F58"/>
-                </a:solidFill>
-                <a:latin typeface="Segoe UI"/>
-              </a:rPr>
-              <a:t>   1× per modello, sulla build box</a:t>
+              <a:rPr sz="1250" b="1">
+                <a:solidFill>
+                  <a:srgbClr val="F5A623"/>
+                </a:solidFill>
+                <a:latin typeface="Segoe UI"/>
+              </a:rPr>
+              <a:t>•  </a:t>
+            </a:r>
+            <a:r>
+              <a:rPr sz="1250" b="0">
+                <a:solidFill>
+                  <a:srgbClr val="E6EDF3"/>
+                </a:solidFill>
+                <a:latin typeface="Segoe UI"/>
+              </a:rPr>
+              <a:t>Swap a caldo: cambiare modello sulla datapath viva costa 5.5 ms, non 1660 — clang fuori dal percorso critico.</a:t>
             </a:r>
           </a:p>
           <a:p>
             <a:pPr algn="l">
               <a:spcAft>
-                <a:spcPts val="500"/>
+                <a:spcPts val="700"/>
               </a:spcAft>
             </a:pPr>
             <a:r>
-              <a:rPr sz="1150" b="0">
+              <a:rPr sz="1250" b="1">
+                <a:solidFill>
+                  <a:srgbClr val="F5A623"/>
+                </a:solidFill>
+                <a:latin typeface="Segoe UI"/>
+              </a:rPr>
+              <a:t>•  </a:t>
+            </a:r>
+            <a:r>
+              <a:rPr sz="1250" b="0">
                 <a:solidFill>
                   <a:srgbClr val="8B949E"/>
                 </a:solidFill>
-                <a:latin typeface="Consolas"/>
-              </a:rPr>
-              <a:t>open_file</a:t>
-            </a:r>
-            <a:r>
-              <a:rPr sz="1250" b="1">
-                <a:solidFill>
-                  <a:srgbClr val="3FB950"/>
-                </a:solidFill>
-                <a:latin typeface="Consolas"/>
-              </a:rPr>
-              <a:t>               0.58 ms</a:t>
-            </a:r>
-          </a:p>
-          <a:p>
-            <a:pPr algn="l">
-              <a:spcAft>
-                <a:spcPts val="500"/>
-              </a:spcAft>
-            </a:pPr>
-            <a:r>
-              <a:rPr sz="1150" b="0">
-                <a:solidFill>
-                  <a:srgbClr val="8B949E"/>
-                </a:solidFill>
-                <a:latin typeface="Consolas"/>
-              </a:rPr>
-              <a:t>load (verify+JIT)</a:t>
-            </a:r>
-            <a:r>
-              <a:rPr sz="1250" b="1">
-                <a:solidFill>
-                  <a:srgbClr val="3FB950"/>
-                </a:solidFill>
-                <a:latin typeface="Consolas"/>
-              </a:rPr>
-              <a:t>       4.89 ms</a:t>
-            </a:r>
-          </a:p>
-          <a:p>
-            <a:pPr algn="l">
-              <a:spcAft>
-                <a:spcPts val="500"/>
-              </a:spcAft>
-            </a:pPr>
-            <a:r>
-              <a:rPr sz="1150" b="1">
-                <a:solidFill>
-                  <a:srgbClr val="E6EDF3"/>
-                </a:solidFill>
-                <a:latin typeface="Consolas"/>
-              </a:rPr>
-              <a:t>deploy runtime totale</a:t>
-            </a:r>
-            <a:r>
-              <a:rPr sz="1300" b="1">
-                <a:solidFill>
-                  <a:srgbClr val="3FB950"/>
-                </a:solidFill>
-                <a:latin typeface="Consolas"/>
-              </a:rPr>
-              <a:t>    5.47 ms</a:t>
-            </a:r>
-          </a:p>
-        </p:txBody>
-      </p:sp>
-      <p:sp>
-        <p:nvSpPr>
-          <p:cNvPr id="28" name="Rounded Rectangle 27"/>
-          <p:cNvSpPr/>
-          <p:nvPr/>
-        </p:nvSpPr>
-        <p:spPr>
-          <a:xfrm>
-            <a:off x="6199632" y="3429000"/>
-            <a:ext cx="5349240" cy="2331720"/>
-          </a:xfrm>
-          <a:prstGeom prst="roundRect">
-            <a:avLst/>
-          </a:prstGeom>
-          <a:solidFill>
-            <a:srgbClr val="1B222E"/>
-          </a:solidFill>
-          <a:ln>
-            <a:noFill/>
-          </a:ln>
-          <a:effectLst/>
-        </p:spPr>
-        <p:style>
-          <a:lnRef idx="1">
-            <a:schemeClr val="accent1"/>
-          </a:lnRef>
-          <a:fillRef idx="3">
-            <a:schemeClr val="accent1"/>
-          </a:fillRef>
-          <a:effectRef idx="2">
-            <a:schemeClr val="accent1"/>
-          </a:effectRef>
-          <a:fontRef idx="minor">
-            <a:schemeClr val="lt1"/>
-          </a:fontRef>
-        </p:style>
-        <p:txBody>
-          <a:bodyPr rtlCol="0" anchor="ctr"/>
-          <a:lstStyle/>
-          <a:p>
-            <a:pPr algn="ctr"/>
-            <a:endParaRPr/>
-          </a:p>
-        </p:txBody>
-      </p:sp>
-      <p:sp>
-        <p:nvSpPr>
-          <p:cNvPr id="29" name="Rounded Rectangle 28"/>
-          <p:cNvSpPr/>
-          <p:nvPr/>
-        </p:nvSpPr>
-        <p:spPr>
-          <a:xfrm>
-            <a:off x="6291072" y="3474720"/>
-            <a:ext cx="5166359" cy="64008"/>
-          </a:xfrm>
-          <a:prstGeom prst="roundRect">
-            <a:avLst/>
-          </a:prstGeom>
-          <a:solidFill>
-            <a:srgbClr val="F5A623"/>
-          </a:solidFill>
-          <a:ln>
-            <a:noFill/>
-          </a:ln>
-          <a:effectLst/>
-        </p:spPr>
-        <p:style>
-          <a:lnRef idx="1">
-            <a:schemeClr val="accent1"/>
-          </a:lnRef>
-          <a:fillRef idx="3">
-            <a:schemeClr val="accent1"/>
-          </a:fillRef>
-          <a:effectRef idx="2">
-            <a:schemeClr val="accent1"/>
-          </a:effectRef>
-          <a:fontRef idx="minor">
-            <a:schemeClr val="lt1"/>
-          </a:fontRef>
-        </p:style>
-        <p:txBody>
-          <a:bodyPr rtlCol="0" anchor="ctr"/>
-          <a:lstStyle/>
-          <a:p>
-            <a:pPr algn="ctr"/>
-            <a:endParaRPr/>
-          </a:p>
-        </p:txBody>
-      </p:sp>
-      <p:sp>
-        <p:nvSpPr>
-          <p:cNvPr id="30" name="TextBox 29"/>
-          <p:cNvSpPr txBox="1"/>
-          <p:nvPr/>
-        </p:nvSpPr>
-        <p:spPr>
-          <a:xfrm>
-            <a:off x="6400800" y="3575304"/>
-            <a:ext cx="4983479" cy="411480"/>
-          </a:xfrm>
-          <a:prstGeom prst="rect">
-            <a:avLst/>
-          </a:prstGeom>
-          <a:noFill/>
-        </p:spPr>
-        <p:txBody>
-          <a:bodyPr wrap="square" lIns="0" tIns="0" rIns="0" bIns="0" anchor="t">
-            <a:spAutoFit/>
-          </a:bodyPr>
-          <a:lstStyle/>
-          <a:p>
-            <a:pPr algn="l"/>
-            <a:r>
-              <a:rPr sz="1350" b="1">
-                <a:solidFill>
-                  <a:srgbClr val="F5A623"/>
-                </a:solidFill>
-                <a:latin typeface="Segoe UI"/>
-              </a:rPr>
-              <a:t>Performance — arch-fedele vs BCC</a:t>
-            </a:r>
-          </a:p>
-        </p:txBody>
-      </p:sp>
-      <p:sp>
-        <p:nvSpPr>
-          <p:cNvPr id="31" name="TextBox 30"/>
-          <p:cNvSpPr txBox="1"/>
-          <p:nvPr/>
-        </p:nvSpPr>
-        <p:spPr>
-          <a:xfrm>
-            <a:off x="6428232" y="4041648"/>
-            <a:ext cx="4892040" cy="1737360"/>
-          </a:xfrm>
-          <a:prstGeom prst="rect">
-            <a:avLst/>
-          </a:prstGeom>
-          <a:noFill/>
-        </p:spPr>
-        <p:txBody>
-          <a:bodyPr wrap="square" lIns="0" tIns="0" rIns="0" bIns="0" anchor="t">
-            <a:spAutoFit/>
-          </a:bodyPr>
-          <a:lstStyle/>
-          <a:p>
-            <a:pPr algn="l">
-              <a:spcAft>
-                <a:spcPts val="500"/>
-              </a:spcAft>
-            </a:pPr>
-            <a:r>
-              <a:rPr sz="1100" b="1">
-                <a:solidFill>
-                  <a:srgbClr val="8B949E"/>
-                </a:solidFill>
-                <a:latin typeface="Consolas"/>
-              </a:rPr>
-              <a:t>            AOT       BCC</a:t>
-            </a:r>
-          </a:p>
-          <a:p>
-            <a:pPr algn="l">
-              <a:spcAft>
-                <a:spcPts val="500"/>
-              </a:spcAft>
-            </a:pPr>
-            <a:r>
-              <a:rPr sz="1150" b="0">
-                <a:solidFill>
-                  <a:srgbClr val="E6EDF3"/>
-                </a:solidFill>
-                <a:latin typeface="Consolas"/>
-              </a:rPr>
-              <a:t>insn      943      980</a:t>
-            </a:r>
-          </a:p>
-          <a:p>
-            <a:pPr algn="l">
-              <a:spcAft>
-                <a:spcPts val="500"/>
-              </a:spcAft>
-            </a:pPr>
-            <a:r>
-              <a:rPr sz="1150" b="0">
-                <a:solidFill>
-                  <a:srgbClr val="E6EDF3"/>
-                </a:solidFill>
-                <a:latin typeface="Consolas"/>
-              </a:rPr>
-              <a:t>latenza   69 ns    66 ns</a:t>
-            </a:r>
-          </a:p>
-          <a:p>
-            <a:pPr algn="l">
-              <a:spcAft>
-                <a:spcPts val="500"/>
-              </a:spcAft>
-            </a:pPr>
-            <a:r>
-              <a:rPr sz="1150" b="0">
-                <a:solidFill>
-                  <a:srgbClr val="E6EDF3"/>
-                </a:solidFill>
-                <a:latin typeface="Consolas"/>
-              </a:rPr>
-              <a:t>thrpt     14.5     15.2 Mpps</a:t>
-            </a:r>
-          </a:p>
-          <a:p>
-            <a:pPr algn="l">
-              <a:spcAft>
-                <a:spcPts val="500"/>
-              </a:spcAft>
-            </a:pPr>
-            <a:r>
-              <a:rPr sz="1100" b="0">
-                <a:solidFill>
-                  <a:srgbClr val="3FB950"/>
-                </a:solidFill>
-                <a:latin typeface="Segoe UI"/>
-              </a:rPr>
-              <a:t>= identici (rumore di misura)</a:t>
-            </a:r>
-          </a:p>
-        </p:txBody>
-      </p:sp>
-      <p:sp>
-        <p:nvSpPr>
-          <p:cNvPr id="32" name="TextBox 31"/>
-          <p:cNvSpPr txBox="1"/>
-          <p:nvPr/>
-        </p:nvSpPr>
-        <p:spPr>
-          <a:xfrm>
-            <a:off x="640080" y="5943600"/>
-            <a:ext cx="10972800" cy="640080"/>
-          </a:xfrm>
-          <a:prstGeom prst="rect">
-            <a:avLst/>
-          </a:prstGeom>
-          <a:noFill/>
-        </p:spPr>
-        <p:txBody>
-          <a:bodyPr wrap="square" lIns="0" tIns="0" rIns="0" bIns="0" anchor="t">
-            <a:spAutoFit/>
-          </a:bodyPr>
-          <a:lstStyle/>
-          <a:p>
-            <a:pPr algn="l"/>
-            <a:r>
-              <a:rPr sz="1200" b="1">
-                <a:solidFill>
-                  <a:srgbClr val="8B949E"/>
-                </a:solidFill>
-                <a:latin typeface="Segoe UI"/>
-              </a:rPr>
-              <a:t>Stessa topologia del BCC (943 = disp 28 + model 915; test-run sul dispatcher). </a:t>
-            </a:r>
-            <a:r>
-              <a:rPr sz="1200" b="0">
-                <a:solidFill>
-                  <a:srgbClr val="E6EDF3"/>
-                </a:solidFill>
-                <a:latin typeface="Segoe UI"/>
-              </a:rPr>
-              <a:t>AOT NON è più veloce del BCC: preserva la perf literal-max — il valore è clang fuori dal nodo e dallo swap.</a:t>
+                <a:latin typeface="Segoe UI"/>
+              </a:rPr>
+              <a:t>Non guadagni se compili sul nodo stesso al deploy: lì clang lo paghi comunque (1/modello).</a:t>
             </a:r>
           </a:p>
         </p:txBody>
